--- a/deck/Neurogaze-Pitch-Deck.pptx
+++ b/deck/Neurogaze-Pitch-Deck.pptx
@@ -888,7 +888,7 @@
           <a:p>
             <a:r>
               <a:rPr lang="en-US" dirty="0"/>
-              <a:t>SATU cerita integritas, bukan dua. Cerita kedua memindahkan waktu dari kolom rubrik yang bobotnya lebih besar.</a:t>
+              <a:t>Ini slide AI Implementation, bukan slide integritas — jual temuannya lebih dulu, penolakannya belakangan. Kalimat kuncinya: setiap makalah pada dataset ini yang tidak menjalankan alas semacam ini berisiko melaporkan performa yang sebagian berasal dari perbedaan pengumpulan data. Dataset wajah cukup satu baris; jangan diceritakan ulang.</a:t>
             </a:r>
             <a:endParaRPr lang="en-US" dirty="0"/>
           </a:p>
@@ -1064,7 +1064,7 @@
           <a:p>
             <a:r>
               <a:rPr lang="en-US" dirty="0"/>
-              <a:t>Ini yang mengubah 'belum ada data' dari kelemahan menjadi rencana.</a:t>
+              <a:t>Ini yang mengubah 'belum ada data' dari kelemahan menjadi rencana. Sebut kata 'studi prospektif berizin etik' dengan suara — kalau slide ini terdengar seperti rencana menyebar produk untuk memanen data balita, seluruh bagian responsible AI runtuh di satu kalimat.</a:t>
             </a:r>
             <a:endParaRPr lang="en-US" dirty="0"/>
           </a:p>
@@ -1240,7 +1240,7 @@
           <a:p>
             <a:r>
               <a:rPr lang="en-US" dirty="0"/>
-              <a:t>0:40. Dua angka saja. Jangan menambahkan statistik prevalensi.</a:t>
+              <a:t>0:40. Dua angka saja. Sebut sendiri bahwa keduanya lintas negara — sebelum juri menagihnya. Klaim Indonesia yang dibuat di sini hanya soal ketiadaan instrumen. Jangan menambahkan statistik prevalensi.</a:t>
             </a:r>
             <a:endParaRPr lang="en-US" dirty="0"/>
           </a:p>
@@ -1416,7 +1416,7 @@
           <a:p>
             <a:r>
               <a:rPr lang="en-US" dirty="0"/>
-              <a:t>1:45 total untuk dua demo. Ucapkan keberatannya sendiri SEBELUM juri memikirkannya — itu gerakan berbiaya nol dengan imbalan terbesar di seluruh pitch. Jangan pilih rekan satu tim sebagai relawan. Selama 67 detik berjalan: diam.</a:t>
+              <a:t>1:45 total. Buka /perbandingan lebih dulu: dua kondisi, tiga sinyal, satu layar — tanpa risiko kamera. Baru setelah itu jalankan SATU sesi langsung dan penyajilah pesertanya, bukan relawan. Ucapkan keberatannya sendiri SEBELUM juri memikirkannya. Tawarkan tablet ke juri SESUDAH pitch: 'silakan coba sendiri kalau mau menguji apakah alat ini merujuk semua orang.' Selama 67 detik berjalan, narasikan cermin panggung — jangan diam.</a:t>
             </a:r>
             <a:endParaRPr lang="en-US" dirty="0"/>
           </a:p>
@@ -1768,7 +1768,7 @@
           <a:p>
             <a:r>
               <a:rPr lang="en-US" dirty="0"/>
-              <a:t>Tunjuk panel riset di laporan yang masih terbuka dari bagian demo.</a:t>
+              <a:t>Sebut sendiri bahwa 544/547 hampir pasti tinggi karena referensinya dikalibrasi di persentil 99,5 — kalau juri yang menemukannya, angka itu berbalik jadi senjata. Yang dijual adalah kontrasnya dengan 1/23, dan parity 23/23.</a:t>
             </a:r>
             <a:endParaRPr lang="en-US" dirty="0"/>
           </a:p>
@@ -1856,7 +1856,7 @@
           <a:p>
             <a:r>
               <a:rPr lang="en-US" dirty="0"/>
-              <a:t>0:45 bersama momen integritas. Sensitivitas 17% bukan bug — itu bentuk alatnya. Rule-in.</a:t>
+              <a:t>0:45. Ini bagian Impact yang paling kuat di seluruh deck — pelankan. Satu wawancara bukan pengukuran kapasitas, dan narasumber tidak melihat tabel ini; sebut keduanya. Sensitivitas 17% bukan bug, itu bentuk alatnya. Rule-in.</a:t>
             </a:r>
             <a:endParaRPr lang="en-US" dirty="0"/>
           </a:p>
@@ -2597,7 +2597,7 @@
                 <a:ea typeface="Calibri" pitchFamily="34" charset="-122"/>
                 <a:cs typeface="Calibri" pitchFamily="34" charset="-120"/>
               </a:rPr>
-              <a:t>Momen integritas</a:t>
+              <a:t>Lapis bobot · hasil negatif</a:t>
             </a:r>
             <a:endParaRPr lang="en-US" sz="1200" dirty="0"/>
           </a:p>
@@ -2639,7 +2639,7 @@
                 <a:ea typeface="Cambria" pitchFamily="34" charset="-122"/>
                 <a:cs typeface="Cambria" pitchFamily="34" charset="-120"/>
               </a:rPr>
-              <a:t>Angka tertinggi di proyek ini, dan kami buang</a:t>
+              <a:t>Kami unduh data anak yang terbit, pasang bobotnya, lalu auditnya membunuhnya</a:t>
             </a:r>
             <a:endParaRPr lang="en-US" sz="3200" dirty="0"/>
           </a:p>
@@ -2653,8 +2653,8 @@
         </p:nvSpPr>
         <p:spPr>
           <a:xfrm>
-            <a:off x="685800" y="2331720"/>
-            <a:ext cx="3840480" cy="1120877"/>
+            <a:off x="685800" y="2103120"/>
+            <a:ext cx="10424160" cy="548640"/>
           </a:xfrm>
           <a:prstGeom prst="rect">
             <a:avLst/>
@@ -2668,12 +2668,635 @@
           <a:p>
             <a:pPr indent="0" marL="0">
               <a:lnSpc>
-                <a:spcPts val="7600"/>
+                <a:spcPts val="2000"/>
               </a:lnSpc>
               <a:buNone/>
             </a:pPr>
             <a:r>
-              <a:rPr lang="en-US" sz="7600" b="1" dirty="0">
+              <a:rPr lang="en-US" sz="1400" dirty="0">
+                <a:solidFill>
+                  <a:srgbClr val="14302B"/>
+                </a:solidFill>
+                <a:latin typeface="Calibri" pitchFamily="34" charset="0"/>
+                <a:ea typeface="Calibri" pitchFamily="34" charset="-122"/>
+                <a:cs typeface="Calibri" pitchFamily="34" charset="-120"/>
+              </a:rPr>
+              <a:t>Cilia dkk. 2022, CC BY 4.0: 59 anak berlabel, 2,25 juta baris koordinat. Data anak sungguhan tanpa merekam satu pun anak sendiri. Empat audit ditulis sebelum fitting dijalankan. Dua gagal.</a:t>
+            </a:r>
+            <a:endParaRPr lang="en-US" sz="1400" dirty="0"/>
+          </a:p>
+        </p:txBody>
+      </p:sp>
+      <p:sp>
+        <p:nvSpPr>
+          <p:cNvPr id="7" name="Text 5"/>
+          <p:cNvSpPr/>
+          <p:nvPr/>
+        </p:nvSpPr>
+        <p:spPr>
+          <a:xfrm>
+            <a:off x="685800" y="2743200"/>
+            <a:ext cx="6035040" cy="274320"/>
+          </a:xfrm>
+          <a:prstGeom prst="rect">
+            <a:avLst/>
+          </a:prstGeom>
+          <a:noFill/>
+          <a:ln/>
+        </p:spPr>
+        <p:txBody>
+          <a:bodyPr wrap="square" lIns="0" tIns="0" rIns="0" bIns="0" rtlCol="0" anchor="ctr"/>
+          <a:lstStyle/>
+          <a:p>
+            <a:pPr indent="0" marL="0">
+              <a:buNone/>
+            </a:pPr>
+            <a:r>
+              <a:rPr lang="en-US" sz="1100" b="1" dirty="0">
+                <a:solidFill>
+                  <a:srgbClr val="4A635D"/>
+                </a:solidFill>
+                <a:latin typeface="Calibri" pitchFamily="34" charset="0"/>
+                <a:ea typeface="Calibri" pitchFamily="34" charset="-122"/>
+                <a:cs typeface="Calibri" pitchFamily="34" charset="-120"/>
+              </a:rPr>
+              <a:t>AUC prediktor tunggal terhadap label ASD</a:t>
+            </a:r>
+            <a:endParaRPr lang="en-US" sz="1100" dirty="0"/>
+          </a:p>
+        </p:txBody>
+      </p:sp>
+      <p:sp>
+        <p:nvSpPr>
+          <p:cNvPr id="8" name="Text 6"/>
+          <p:cNvSpPr/>
+          <p:nvPr/>
+        </p:nvSpPr>
+        <p:spPr>
+          <a:xfrm>
+            <a:off x="685800" y="3127248"/>
+            <a:ext cx="2286000" cy="292608"/>
+          </a:xfrm>
+          <a:prstGeom prst="rect">
+            <a:avLst/>
+          </a:prstGeom>
+          <a:noFill/>
+          <a:ln/>
+        </p:spPr>
+        <p:txBody>
+          <a:bodyPr wrap="square" lIns="0" tIns="0" rIns="0" bIns="0" rtlCol="0" anchor="ctr"/>
+          <a:lstStyle/>
+          <a:p>
+            <a:pPr indent="0" marL="0">
+              <a:buNone/>
+            </a:pPr>
+            <a:r>
+              <a:rPr lang="en-US" sz="1200" dirty="0">
+                <a:solidFill>
+                  <a:srgbClr val="14302B"/>
+                </a:solidFill>
+                <a:latin typeface="Calibri" pitchFamily="34" charset="0"/>
+                <a:ea typeface="Calibri" pitchFamily="34" charset="-122"/>
+                <a:cs typeface="Calibri" pitchFamily="34" charset="-120"/>
+              </a:rPr>
+              <a:t>Rasio pelacakan alat</a:t>
+            </a:r>
+            <a:endParaRPr lang="en-US" sz="1200" dirty="0"/>
+          </a:p>
+        </p:txBody>
+      </p:sp>
+      <p:sp>
+        <p:nvSpPr>
+          <p:cNvPr id="9" name="Shape 7"/>
+          <p:cNvSpPr/>
+          <p:nvPr/>
+        </p:nvSpPr>
+        <p:spPr>
+          <a:xfrm>
+            <a:off x="3063240" y="3182112"/>
+            <a:ext cx="2495946" cy="182880"/>
+          </a:xfrm>
+          <a:prstGeom prst="rect">
+            <a:avLst/>
+          </a:prstGeom>
+          <a:solidFill>
+            <a:srgbClr val="B1442C"/>
+          </a:solidFill>
+          <a:ln w="12700">
+            <a:solidFill>
+              <a:srgbClr val="333333"/>
+            </a:solidFill>
+            <a:prstDash val="solid"/>
+          </a:ln>
+        </p:spPr>
+      </p:sp>
+      <p:sp>
+        <p:nvSpPr>
+          <p:cNvPr id="10" name="Text 8"/>
+          <p:cNvSpPr/>
+          <p:nvPr/>
+        </p:nvSpPr>
+        <p:spPr>
+          <a:xfrm>
+            <a:off x="6126480" y="3127248"/>
+            <a:ext cx="640080" cy="292608"/>
+          </a:xfrm>
+          <a:prstGeom prst="rect">
+            <a:avLst/>
+          </a:prstGeom>
+          <a:noFill/>
+          <a:ln/>
+        </p:spPr>
+        <p:txBody>
+          <a:bodyPr wrap="square" lIns="0" tIns="0" rIns="0" bIns="0" rtlCol="0" anchor="ctr"/>
+          <a:lstStyle/>
+          <a:p>
+            <a:pPr indent="0" marL="0">
+              <a:buNone/>
+            </a:pPr>
+            <a:r>
+              <a:rPr lang="en-US" sz="1200" b="1" dirty="0">
+                <a:solidFill>
+                  <a:srgbClr val="B1442C"/>
+                </a:solidFill>
+                <a:latin typeface="Calibri" pitchFamily="34" charset="0"/>
+                <a:ea typeface="Calibri" pitchFamily="34" charset="-122"/>
+                <a:cs typeface="Calibri" pitchFamily="34" charset="-120"/>
+              </a:rPr>
+              <a:t>0,853</a:t>
+            </a:r>
+            <a:endParaRPr lang="en-US" sz="1200" dirty="0"/>
+          </a:p>
+        </p:txBody>
+      </p:sp>
+      <p:sp>
+        <p:nvSpPr>
+          <p:cNvPr id="11" name="Text 9"/>
+          <p:cNvSpPr/>
+          <p:nvPr/>
+        </p:nvSpPr>
+        <p:spPr>
+          <a:xfrm>
+            <a:off x="685800" y="3584448"/>
+            <a:ext cx="2286000" cy="292608"/>
+          </a:xfrm>
+          <a:prstGeom prst="rect">
+            <a:avLst/>
+          </a:prstGeom>
+          <a:noFill/>
+          <a:ln/>
+        </p:spPr>
+        <p:txBody>
+          <a:bodyPr wrap="square" lIns="0" tIns="0" rIns="0" bIns="0" rtlCol="0" anchor="ctr"/>
+          <a:lstStyle/>
+          <a:p>
+            <a:pPr indent="0" marL="0">
+              <a:buNone/>
+            </a:pPr>
+            <a:r>
+              <a:rPr lang="en-US" sz="1200" dirty="0">
+                <a:solidFill>
+                  <a:srgbClr val="14302B"/>
+                </a:solidFill>
+                <a:latin typeface="Calibri" pitchFamily="34" charset="0"/>
+                <a:ea typeface="Calibri" pitchFamily="34" charset="-122"/>
+                <a:cs typeface="Calibri" pitchFamily="34" charset="-120"/>
+              </a:rPr>
+              <a:t>Fraksi kedip</a:t>
+            </a:r>
+            <a:endParaRPr lang="en-US" sz="1200" dirty="0"/>
+          </a:p>
+        </p:txBody>
+      </p:sp>
+      <p:sp>
+        <p:nvSpPr>
+          <p:cNvPr id="12" name="Shape 10"/>
+          <p:cNvSpPr/>
+          <p:nvPr/>
+        </p:nvSpPr>
+        <p:spPr>
+          <a:xfrm>
+            <a:off x="3063240" y="3639312"/>
+            <a:ext cx="2478390" cy="182880"/>
+          </a:xfrm>
+          <a:prstGeom prst="rect">
+            <a:avLst/>
+          </a:prstGeom>
+          <a:solidFill>
+            <a:srgbClr val="B1442C"/>
+          </a:solidFill>
+          <a:ln w="12700">
+            <a:solidFill>
+              <a:srgbClr val="333333"/>
+            </a:solidFill>
+            <a:prstDash val="solid"/>
+          </a:ln>
+        </p:spPr>
+      </p:sp>
+      <p:sp>
+        <p:nvSpPr>
+          <p:cNvPr id="13" name="Text 11"/>
+          <p:cNvSpPr/>
+          <p:nvPr/>
+        </p:nvSpPr>
+        <p:spPr>
+          <a:xfrm>
+            <a:off x="6126480" y="3584448"/>
+            <a:ext cx="640080" cy="292608"/>
+          </a:xfrm>
+          <a:prstGeom prst="rect">
+            <a:avLst/>
+          </a:prstGeom>
+          <a:noFill/>
+          <a:ln/>
+        </p:spPr>
+        <p:txBody>
+          <a:bodyPr wrap="square" lIns="0" tIns="0" rIns="0" bIns="0" rtlCol="0" anchor="ctr"/>
+          <a:lstStyle/>
+          <a:p>
+            <a:pPr indent="0" marL="0">
+              <a:buNone/>
+            </a:pPr>
+            <a:r>
+              <a:rPr lang="en-US" sz="1200" b="1" dirty="0">
+                <a:solidFill>
+                  <a:srgbClr val="B1442C"/>
+                </a:solidFill>
+                <a:latin typeface="Calibri" pitchFamily="34" charset="0"/>
+                <a:ea typeface="Calibri" pitchFamily="34" charset="-122"/>
+                <a:cs typeface="Calibri" pitchFamily="34" charset="-120"/>
+              </a:rPr>
+              <a:t>0,847</a:t>
+            </a:r>
+            <a:endParaRPr lang="en-US" sz="1200" dirty="0"/>
+          </a:p>
+        </p:txBody>
+      </p:sp>
+      <p:sp>
+        <p:nvSpPr>
+          <p:cNvPr id="14" name="Text 12"/>
+          <p:cNvSpPr/>
+          <p:nvPr/>
+        </p:nvSpPr>
+        <p:spPr>
+          <a:xfrm>
+            <a:off x="685800" y="4041648"/>
+            <a:ext cx="2286000" cy="292608"/>
+          </a:xfrm>
+          <a:prstGeom prst="rect">
+            <a:avLst/>
+          </a:prstGeom>
+          <a:noFill/>
+          <a:ln/>
+        </p:spPr>
+        <p:txBody>
+          <a:bodyPr wrap="square" lIns="0" tIns="0" rIns="0" bIns="0" rtlCol="0" anchor="ctr"/>
+          <a:lstStyle/>
+          <a:p>
+            <a:pPr indent="0" marL="0">
+              <a:buNone/>
+            </a:pPr>
+            <a:r>
+              <a:rPr lang="en-US" sz="1200" dirty="0">
+                <a:solidFill>
+                  <a:srgbClr val="14302B"/>
+                </a:solidFill>
+                <a:latin typeface="Calibri" pitchFamily="34" charset="0"/>
+                <a:ea typeface="Calibri" pitchFamily="34" charset="-122"/>
+                <a:cs typeface="Calibri" pitchFamily="34" charset="-120"/>
+              </a:rPr>
+              <a:t>Fraksi fiksasi</a:t>
+            </a:r>
+            <a:endParaRPr lang="en-US" sz="1200" dirty="0"/>
+          </a:p>
+        </p:txBody>
+      </p:sp>
+      <p:sp>
+        <p:nvSpPr>
+          <p:cNvPr id="15" name="Shape 13"/>
+          <p:cNvSpPr/>
+          <p:nvPr/>
+        </p:nvSpPr>
+        <p:spPr>
+          <a:xfrm>
+            <a:off x="3063240" y="4096512"/>
+            <a:ext cx="2416942" cy="182880"/>
+          </a:xfrm>
+          <a:prstGeom prst="rect">
+            <a:avLst/>
+          </a:prstGeom>
+          <a:solidFill>
+            <a:srgbClr val="B1442C"/>
+          </a:solidFill>
+          <a:ln w="12700">
+            <a:solidFill>
+              <a:srgbClr val="333333"/>
+            </a:solidFill>
+            <a:prstDash val="solid"/>
+          </a:ln>
+        </p:spPr>
+      </p:sp>
+      <p:sp>
+        <p:nvSpPr>
+          <p:cNvPr id="16" name="Text 14"/>
+          <p:cNvSpPr/>
+          <p:nvPr/>
+        </p:nvSpPr>
+        <p:spPr>
+          <a:xfrm>
+            <a:off x="6126480" y="4041648"/>
+            <a:ext cx="640080" cy="292608"/>
+          </a:xfrm>
+          <a:prstGeom prst="rect">
+            <a:avLst/>
+          </a:prstGeom>
+          <a:noFill/>
+          <a:ln/>
+        </p:spPr>
+        <p:txBody>
+          <a:bodyPr wrap="square" lIns="0" tIns="0" rIns="0" bIns="0" rtlCol="0" anchor="ctr"/>
+          <a:lstStyle/>
+          <a:p>
+            <a:pPr indent="0" marL="0">
+              <a:buNone/>
+            </a:pPr>
+            <a:r>
+              <a:rPr lang="en-US" sz="1200" b="1" dirty="0">
+                <a:solidFill>
+                  <a:srgbClr val="B1442C"/>
+                </a:solidFill>
+                <a:latin typeface="Calibri" pitchFamily="34" charset="0"/>
+                <a:ea typeface="Calibri" pitchFamily="34" charset="-122"/>
+                <a:cs typeface="Calibri" pitchFamily="34" charset="-120"/>
+              </a:rPr>
+              <a:t>0,826</a:t>
+            </a:r>
+            <a:endParaRPr lang="en-US" sz="1200" dirty="0"/>
+          </a:p>
+        </p:txBody>
+      </p:sp>
+      <p:sp>
+        <p:nvSpPr>
+          <p:cNvPr id="17" name="Text 15"/>
+          <p:cNvSpPr/>
+          <p:nvPr/>
+        </p:nvSpPr>
+        <p:spPr>
+          <a:xfrm>
+            <a:off x="685800" y="4498848"/>
+            <a:ext cx="2286000" cy="292608"/>
+          </a:xfrm>
+          <a:prstGeom prst="rect">
+            <a:avLst/>
+          </a:prstGeom>
+          <a:noFill/>
+          <a:ln/>
+        </p:spPr>
+        <p:txBody>
+          <a:bodyPr wrap="square" lIns="0" tIns="0" rIns="0" bIns="0" rtlCol="0" anchor="ctr"/>
+          <a:lstStyle/>
+          <a:p>
+            <a:pPr indent="0" marL="0">
+              <a:buNone/>
+            </a:pPr>
+            <a:r>
+              <a:rPr lang="en-US" sz="1200" dirty="0">
+                <a:solidFill>
+                  <a:srgbClr val="14302B"/>
+                </a:solidFill>
+                <a:latin typeface="Calibri" pitchFamily="34" charset="0"/>
+                <a:ea typeface="Calibri" pitchFamily="34" charset="-122"/>
+                <a:cs typeface="Calibri" pitchFamily="34" charset="-120"/>
+              </a:rPr>
+              <a:t>Sebaran tatapan</a:t>
+            </a:r>
+            <a:endParaRPr lang="en-US" sz="1200" dirty="0"/>
+          </a:p>
+        </p:txBody>
+      </p:sp>
+      <p:sp>
+        <p:nvSpPr>
+          <p:cNvPr id="18" name="Shape 16"/>
+          <p:cNvSpPr/>
+          <p:nvPr/>
+        </p:nvSpPr>
+        <p:spPr>
+          <a:xfrm>
+            <a:off x="3063240" y="4553712"/>
+            <a:ext cx="2229673" cy="182880"/>
+          </a:xfrm>
+          <a:prstGeom prst="rect">
+            <a:avLst/>
+          </a:prstGeom>
+          <a:solidFill>
+            <a:srgbClr val="4A635D"/>
+          </a:solidFill>
+          <a:ln w="12700">
+            <a:solidFill>
+              <a:srgbClr val="333333"/>
+            </a:solidFill>
+            <a:prstDash val="solid"/>
+          </a:ln>
+        </p:spPr>
+      </p:sp>
+      <p:sp>
+        <p:nvSpPr>
+          <p:cNvPr id="19" name="Text 17"/>
+          <p:cNvSpPr/>
+          <p:nvPr/>
+        </p:nvSpPr>
+        <p:spPr>
+          <a:xfrm>
+            <a:off x="6126480" y="4498848"/>
+            <a:ext cx="640080" cy="292608"/>
+          </a:xfrm>
+          <a:prstGeom prst="rect">
+            <a:avLst/>
+          </a:prstGeom>
+          <a:noFill/>
+          <a:ln/>
+        </p:spPr>
+        <p:txBody>
+          <a:bodyPr wrap="square" lIns="0" tIns="0" rIns="0" bIns="0" rtlCol="0" anchor="ctr"/>
+          <a:lstStyle/>
+          <a:p>
+            <a:pPr indent="0" marL="0">
+              <a:buNone/>
+            </a:pPr>
+            <a:r>
+              <a:rPr lang="en-US" sz="1200" b="1" dirty="0">
+                <a:solidFill>
+                  <a:srgbClr val="4A635D"/>
+                </a:solidFill>
+                <a:latin typeface="Calibri" pitchFamily="34" charset="0"/>
+                <a:ea typeface="Calibri" pitchFamily="34" charset="-122"/>
+                <a:cs typeface="Calibri" pitchFamily="34" charset="-120"/>
+              </a:rPr>
+              <a:t>0,762</a:t>
+            </a:r>
+            <a:endParaRPr lang="en-US" sz="1200" dirty="0"/>
+          </a:p>
+        </p:txBody>
+      </p:sp>
+      <p:sp>
+        <p:nvSpPr>
+          <p:cNvPr id="20" name="Text 18"/>
+          <p:cNvSpPr/>
+          <p:nvPr/>
+        </p:nvSpPr>
+        <p:spPr>
+          <a:xfrm>
+            <a:off x="685800" y="4956048"/>
+            <a:ext cx="2286000" cy="292608"/>
+          </a:xfrm>
+          <a:prstGeom prst="rect">
+            <a:avLst/>
+          </a:prstGeom>
+          <a:noFill/>
+          <a:ln/>
+        </p:spPr>
+        <p:txBody>
+          <a:bodyPr wrap="square" lIns="0" tIns="0" rIns="0" bIns="0" rtlCol="0" anchor="ctr"/>
+          <a:lstStyle/>
+          <a:p>
+            <a:pPr indent="0" marL="0">
+              <a:buNone/>
+            </a:pPr>
+            <a:r>
+              <a:rPr lang="en-US" sz="1200" dirty="0">
+                <a:solidFill>
+                  <a:srgbClr val="14302B"/>
+                </a:solidFill>
+                <a:latin typeface="Calibri" pitchFamily="34" charset="0"/>
+                <a:ea typeface="Calibri" pitchFamily="34" charset="-122"/>
+                <a:cs typeface="Calibri" pitchFamily="34" charset="-120"/>
+              </a:rPr>
+              <a:t>Mengikuti isyarat arah</a:t>
+            </a:r>
+            <a:endParaRPr lang="en-US" sz="1200" dirty="0"/>
+          </a:p>
+        </p:txBody>
+      </p:sp>
+      <p:sp>
+        <p:nvSpPr>
+          <p:cNvPr id="21" name="Shape 19"/>
+          <p:cNvSpPr/>
+          <p:nvPr/>
+        </p:nvSpPr>
+        <p:spPr>
+          <a:xfrm>
+            <a:off x="3063240" y="5010912"/>
+            <a:ext cx="1474744" cy="182880"/>
+          </a:xfrm>
+          <a:prstGeom prst="rect">
+            <a:avLst/>
+          </a:prstGeom>
+          <a:solidFill>
+            <a:srgbClr val="0D8271"/>
+          </a:solidFill>
+          <a:ln w="12700">
+            <a:solidFill>
+              <a:srgbClr val="333333"/>
+            </a:solidFill>
+            <a:prstDash val="solid"/>
+          </a:ln>
+        </p:spPr>
+      </p:sp>
+      <p:sp>
+        <p:nvSpPr>
+          <p:cNvPr id="22" name="Text 20"/>
+          <p:cNvSpPr/>
+          <p:nvPr/>
+        </p:nvSpPr>
+        <p:spPr>
+          <a:xfrm>
+            <a:off x="6126480" y="4956048"/>
+            <a:ext cx="640080" cy="292608"/>
+          </a:xfrm>
+          <a:prstGeom prst="rect">
+            <a:avLst/>
+          </a:prstGeom>
+          <a:noFill/>
+          <a:ln/>
+        </p:spPr>
+        <p:txBody>
+          <a:bodyPr wrap="square" lIns="0" tIns="0" rIns="0" bIns="0" rtlCol="0" anchor="ctr"/>
+          <a:lstStyle/>
+          <a:p>
+            <a:pPr indent="0" marL="0">
+              <a:buNone/>
+            </a:pPr>
+            <a:r>
+              <a:rPr lang="en-US" sz="1200" b="1" dirty="0">
+                <a:solidFill>
+                  <a:srgbClr val="0D8271"/>
+                </a:solidFill>
+                <a:latin typeface="Calibri" pitchFamily="34" charset="0"/>
+                <a:ea typeface="Calibri" pitchFamily="34" charset="-122"/>
+                <a:cs typeface="Calibri" pitchFamily="34" charset="-120"/>
+              </a:rPr>
+              <a:t>0,504</a:t>
+            </a:r>
+            <a:endParaRPr lang="en-US" sz="1200" dirty="0"/>
+          </a:p>
+        </p:txBody>
+      </p:sp>
+      <p:sp>
+        <p:nvSpPr>
+          <p:cNvPr id="23" name="Shape 21"/>
+          <p:cNvSpPr/>
+          <p:nvPr/>
+        </p:nvSpPr>
+        <p:spPr>
+          <a:xfrm>
+            <a:off x="7086600" y="2697480"/>
+            <a:ext cx="4023360" cy="2651760"/>
+          </a:xfrm>
+          <a:prstGeom prst="roundRect">
+            <a:avLst>
+              <a:gd name="adj" fmla="val 2069"/>
+            </a:avLst>
+          </a:prstGeom>
+          <a:solidFill>
+            <a:srgbClr val="FBEAE5"/>
+          </a:solidFill>
+          <a:ln w="12700">
+            <a:solidFill>
+              <a:srgbClr val="FBEAE5"/>
+            </a:solidFill>
+            <a:prstDash val="solid"/>
+          </a:ln>
+        </p:spPr>
+      </p:sp>
+      <p:sp>
+        <p:nvSpPr>
+          <p:cNvPr id="24" name="Text 22"/>
+          <p:cNvSpPr/>
+          <p:nvPr/>
+        </p:nvSpPr>
+        <p:spPr>
+          <a:xfrm>
+            <a:off x="7342632" y="2926080"/>
+            <a:ext cx="3520440" cy="822960"/>
+          </a:xfrm>
+          <a:prstGeom prst="rect">
+            <a:avLst/>
+          </a:prstGeom>
+          <a:noFill/>
+          <a:ln/>
+        </p:spPr>
+        <p:txBody>
+          <a:bodyPr wrap="square" lIns="0" tIns="0" rIns="0" bIns="0" rtlCol="0" anchor="ctr"/>
+          <a:lstStyle/>
+          <a:p>
+            <a:pPr indent="0" marL="0">
+              <a:lnSpc>
+                <a:spcPts val="2200"/>
+              </a:lnSpc>
+              <a:buNone/>
+            </a:pPr>
+            <a:r>
+              <a:rPr lang="en-US" sz="1700" b="1" dirty="0">
                 <a:solidFill>
                   <a:srgbClr val="B1442C"/>
                 </a:solidFill>
@@ -2681,38 +3304,45 @@
                 <a:ea typeface="Cambria" pitchFamily="34" charset="-122"/>
                 <a:cs typeface="Cambria" pitchFamily="34" charset="-120"/>
               </a:rPr>
-              <a:t>0,932</a:t>
-            </a:r>
-            <a:endParaRPr lang="en-US" sz="7600" dirty="0"/>
-          </a:p>
-        </p:txBody>
-      </p:sp>
-      <p:sp>
-        <p:nvSpPr>
-          <p:cNvPr id="7" name="Text 5"/>
-          <p:cNvSpPr/>
-          <p:nvPr/>
-        </p:nvSpPr>
-        <p:spPr>
-          <a:xfrm>
-            <a:off x="685800" y="3507461"/>
-            <a:ext cx="3840480" cy="274320"/>
-          </a:xfrm>
-          <a:prstGeom prst="rect">
-            <a:avLst/>
-          </a:prstGeom>
-          <a:noFill/>
-          <a:ln/>
-        </p:spPr>
-        <p:txBody>
-          <a:bodyPr wrap="square" lIns="0" tIns="0" rIns="0" bIns="0" rtlCol="0" anchor="ctr"/>
-          <a:lstStyle/>
-          <a:p>
-            <a:pPr indent="0" marL="0">
-              <a:buNone/>
-            </a:pPr>
-            <a:r>
-              <a:rPr lang="en-US" sz="1400" b="1" dirty="0">
+              <a:t>Yang paling memprediksi autisme di dataset itu adalah seberapa baik alatnya merekam anaknya.</a:t>
+            </a:r>
+            <a:endParaRPr lang="en-US" sz="1700" dirty="0"/>
+          </a:p>
+        </p:txBody>
+      </p:sp>
+      <p:sp>
+        <p:nvSpPr>
+          <p:cNvPr id="25" name="Text 23"/>
+          <p:cNvSpPr/>
+          <p:nvPr/>
+        </p:nvSpPr>
+        <p:spPr>
+          <a:xfrm>
+            <a:off x="7342632" y="3840480"/>
+            <a:ext cx="3520440" cy="1371600"/>
+          </a:xfrm>
+          <a:prstGeom prst="rect">
+            <a:avLst/>
+          </a:prstGeom>
+          <a:noFill/>
+          <a:ln/>
+        </p:spPr>
+        <p:txBody>
+          <a:bodyPr wrap="square" lIns="0" tIns="0" rIns="0" bIns="0" rtlCol="0" anchor="ctr"/>
+          <a:lstStyle/>
+          <a:p>
+            <a:pPr marL="342900" indent="-342900">
+              <a:lnSpc>
+                <a:spcPts val="1700"/>
+              </a:lnSpc>
+              <a:spcAft>
+                <a:spcPts val="600"/>
+              </a:spcAft>
+              <a:buSzPct val="100000"/>
+              <a:buChar char="•"/>
+            </a:pPr>
+            <a:r>
+              <a:rPr lang="en-US" sz="1200" dirty="0">
                 <a:solidFill>
                   <a:srgbClr val="14302B"/>
                 </a:solidFill>
@@ -2720,87 +3350,47 @@
                 <a:ea typeface="Calibri" pitchFamily="34" charset="-122"/>
                 <a:cs typeface="Calibri" pitchFamily="34" charset="-120"/>
               </a:rPr>
-              <a:t>AUC · CNN dataset wajah</a:t>
-            </a:r>
-            <a:endParaRPr lang="en-US" sz="1400" dirty="0"/>
-          </a:p>
-        </p:txBody>
-      </p:sp>
-      <p:sp>
-        <p:nvSpPr>
-          <p:cNvPr id="8" name="Text 6"/>
-          <p:cNvSpPr/>
-          <p:nvPr/>
-        </p:nvSpPr>
-        <p:spPr>
-          <a:xfrm>
-            <a:off x="685800" y="3818357"/>
-            <a:ext cx="3840480" cy="640080"/>
-          </a:xfrm>
-          <a:prstGeom prst="rect">
-            <a:avLst/>
-          </a:prstGeom>
-          <a:noFill/>
-          <a:ln/>
-        </p:spPr>
-        <p:txBody>
-          <a:bodyPr wrap="square" lIns="0" tIns="0" rIns="0" bIns="0" rtlCol="0" anchor="ctr"/>
-          <a:lstStyle/>
-          <a:p>
-            <a:pPr indent="0" marL="0">
+              <a:t>Alas tanpa satu pun fitur perilaku: AUC 0,905.</a:t>
+            </a:r>
+            <a:endParaRPr lang="en-US" sz="1200" dirty="0"/>
+          </a:p>
+          <a:p>
+            <a:pPr marL="342900" indent="-342900">
               <a:lnSpc>
-                <a:spcPts val="1500"/>
+                <a:spcPts val="1700"/>
               </a:lnSpc>
-              <a:buNone/>
+              <a:spcAft>
+                <a:spcPts val="600"/>
+              </a:spcAft>
+              <a:buSzPct val="100000"/>
+              <a:buChar char="•"/>
             </a:pPr>
             <a:r>
               <a:rPr lang="en-US" sz="1200" dirty="0">
                 <a:solidFill>
-                  <a:srgbClr val="4A635D"/>
+                  <a:srgbClr val="14302B"/>
                 </a:solidFill>
                 <a:latin typeface="Calibri" pitchFamily="34" charset="0"/>
                 <a:ea typeface="Calibri" pitchFamily="34" charset="-122"/>
                 <a:cs typeface="Calibri" pitchFamily="34" charset="-120"/>
               </a:rPr>
-              <a:t>Bobotnya tidak ada di repositori.</a:t>
+              <a:t>Model indeks perilaku kami: 0,784. Lebih rendah.</a:t>
             </a:r>
             <a:endParaRPr lang="en-US" sz="1200" dirty="0"/>
           </a:p>
-        </p:txBody>
-      </p:sp>
-      <p:sp>
-        <p:nvSpPr>
-          <p:cNvPr id="9" name="Text 7"/>
-          <p:cNvSpPr/>
-          <p:nvPr/>
-        </p:nvSpPr>
-        <p:spPr>
-          <a:xfrm>
-            <a:off x="5074920" y="2468880"/>
-            <a:ext cx="6400800" cy="1554480"/>
-          </a:xfrm>
-          <a:prstGeom prst="rect">
-            <a:avLst/>
-          </a:prstGeom>
-          <a:noFill/>
-          <a:ln/>
-        </p:spPr>
-        <p:txBody>
-          <a:bodyPr wrap="square" lIns="0" tIns="0" rIns="0" bIns="0" rtlCol="0" anchor="ctr"/>
-          <a:lstStyle/>
           <a:p>
             <a:pPr marL="342900" indent="-342900">
               <a:lnSpc>
-                <a:spcPts val="2100"/>
+                <a:spcPts val="1700"/>
               </a:lnSpc>
               <a:spcAft>
-                <a:spcPts val="1000"/>
+                <a:spcPts val="600"/>
               </a:spcAft>
               <a:buSzPct val="100000"/>
               <a:buChar char="•"/>
             </a:pPr>
             <a:r>
-              <a:rPr lang="en-US" sz="1450" dirty="0">
+              <a:rPr lang="en-US" sz="1200" dirty="0">
                 <a:solidFill>
                   <a:srgbClr val="14302B"/>
                 </a:solidFill>
@@ -2808,23 +3398,23 @@
                 <a:ea typeface="Calibri" pitchFamily="34" charset="-122"/>
                 <a:cs typeface="Calibri" pitchFamily="34" charset="-120"/>
               </a:rPr>
-              <a:t>Enam dari enam metadata tata kelola tidak tersedia.</a:t>
-            </a:r>
-            <a:endParaRPr lang="en-US" sz="1450" dirty="0"/>
+              <a:t>Anak ASD terbaca 13 percobaan, anak TD 20.</a:t>
+            </a:r>
+            <a:endParaRPr lang="en-US" sz="1200" dirty="0"/>
           </a:p>
           <a:p>
             <a:pPr marL="342900" indent="-342900">
               <a:lnSpc>
-                <a:spcPts val="2100"/>
+                <a:spcPts val="1700"/>
               </a:lnSpc>
               <a:spcAft>
-                <a:spcPts val="1000"/>
+                <a:spcPts val="600"/>
               </a:spcAft>
               <a:buSzPct val="100000"/>
               <a:buChar char="•"/>
             </a:pPr>
             <a:r>
-              <a:rPr lang="en-US" sz="1450" dirty="0">
+              <a:rPr lang="en-US" sz="1200" dirty="0">
                 <a:solidFill>
                   <a:srgbClr val="14302B"/>
                 </a:solidFill>
@@ -2832,50 +3422,26 @@
                 <a:ea typeface="Calibri" pitchFamily="34" charset="-122"/>
                 <a:cs typeface="Calibri" pitchFamily="34" charset="-120"/>
               </a:rPr>
-              <a:t>Tidak ada ID partisipan, jadi kebocoran identitas tidak bisa disingkirkan.</a:t>
-            </a:r>
-            <a:endParaRPr lang="en-US" sz="1450" dirty="0"/>
-          </a:p>
-          <a:p>
-            <a:pPr marL="342900" indent="-342900">
-              <a:lnSpc>
-                <a:spcPts val="2100"/>
-              </a:lnSpc>
-              <a:spcAft>
-                <a:spcPts val="1000"/>
-              </a:spcAft>
-              <a:buSzPct val="100000"/>
-              <a:buChar char="•"/>
-            </a:pPr>
-            <a:r>
-              <a:rPr lang="en-US" sz="1450" dirty="0">
-                <a:solidFill>
-                  <a:srgbClr val="14302B"/>
-                </a:solidFill>
-                <a:latin typeface="Calibri" pitchFamily="34" charset="0"/>
-                <a:ea typeface="Calibri" pitchFamily="34" charset="-122"/>
-                <a:cs typeface="Calibri" pitchFamily="34" charset="-120"/>
-              </a:rPr>
-              <a:t>Uji shortcut kami: statistik piksel saja sudah mencapai AUC 0,751, permutasi p = 0,005.</a:t>
-            </a:r>
-            <a:endParaRPr lang="en-US" sz="1450" dirty="0"/>
-          </a:p>
-        </p:txBody>
-      </p:sp>
-      <p:sp>
-        <p:nvSpPr>
-          <p:cNvPr id="10" name="Shape 8"/>
-          <p:cNvSpPr/>
-          <p:nvPr/>
-        </p:nvSpPr>
-        <p:spPr>
-          <a:xfrm>
-            <a:off x="685800" y="4434840"/>
-            <a:ext cx="10424160" cy="1051560"/>
+              <a:t>Bobot ditolak. Lapis 1 dikirim sendirian.</a:t>
+            </a:r>
+            <a:endParaRPr lang="en-US" sz="1200" dirty="0"/>
+          </a:p>
+        </p:txBody>
+      </p:sp>
+      <p:sp>
+        <p:nvSpPr>
+          <p:cNvPr id="26" name="Shape 24"/>
+          <p:cNvSpPr/>
+          <p:nvPr/>
+        </p:nvSpPr>
+        <p:spPr>
+          <a:xfrm>
+            <a:off x="685800" y="5486400"/>
+            <a:ext cx="10424160" cy="777240"/>
           </a:xfrm>
           <a:prstGeom prst="roundRect">
             <a:avLst>
-              <a:gd name="adj" fmla="val 5217"/>
+              <a:gd name="adj" fmla="val 7059"/>
             </a:avLst>
           </a:prstGeom>
           <a:solidFill>
@@ -2891,14 +3457,14 @@
       </p:sp>
       <p:sp>
         <p:nvSpPr>
-          <p:cNvPr id="11" name="Text 9"/>
-          <p:cNvSpPr/>
-          <p:nvPr/>
-        </p:nvSpPr>
-        <p:spPr>
-          <a:xfrm>
-            <a:off x="1097280" y="4718304"/>
-            <a:ext cx="9601200" cy="548640"/>
+          <p:cNvPr id="27" name="Text 25"/>
+          <p:cNvSpPr/>
+          <p:nvPr/>
+        </p:nvSpPr>
+        <p:spPr>
+          <a:xfrm>
+            <a:off x="1097280" y="5669280"/>
+            <a:ext cx="9601200" cy="411480"/>
           </a:xfrm>
           <a:prstGeom prst="rect">
             <a:avLst/>
@@ -2912,12 +3478,12 @@
           <a:p>
             <a:pPr indent="0" marL="0">
               <a:lnSpc>
-                <a:spcPts val="2700"/>
+                <a:spcPts val="2200"/>
               </a:lnSpc>
               <a:buNone/>
             </a:pPr>
             <a:r>
-              <a:rPr lang="en-US" sz="2100" b="1" i="1" dirty="0">
+              <a:rPr lang="en-US" sz="1600" b="1" i="1" dirty="0">
                 <a:solidFill>
                   <a:srgbClr val="FFFFFF"/>
                 </a:solidFill>
@@ -2925,9 +3491,9 @@
                 <a:ea typeface="Cambria" pitchFamily="34" charset="-122"/>
                 <a:cs typeface="Cambria" pitchFamily="34" charset="-120"/>
               </a:rPr>
-              <a:t>Tim yang mengoreksi angkanya sendiri lebih layak dipercaya daripada tim yang angkanya selalu bagus.</a:t>
-            </a:r>
-            <a:endParaRPr lang="en-US" sz="2100" dirty="0"/>
+              <a:t>Ini kedua kalinya audit kami membunuh angka terbaik kami — yang pertama CNN dataset wajah, AUC 0,932, bobotnya tidak ada di repositori.</a:t>
+            </a:r>
+            <a:endParaRPr lang="en-US" sz="1600" dirty="0"/>
           </a:p>
         </p:txBody>
       </p:sp>
@@ -3867,7 +4433,7 @@
                 <a:ea typeface="Cambria" pitchFamily="34" charset="-122"/>
                 <a:cs typeface="Cambria" pitchFamily="34" charset="-120"/>
               </a:rPr>
-              <a:t>Penyebarannya adalah mesin pengumpul datanya sendiri</a:t>
+              <a:t>Ia menempel pada alur yang sudah jalan</a:t>
             </a:r>
             <a:endParaRPr lang="en-US" sz="3200" dirty="0"/>
           </a:p>
@@ -3951,7 +4517,7 @@
                 <a:ea typeface="Cambria" pitchFamily="34" charset="-122"/>
                 <a:cs typeface="Cambria" pitchFamily="34" charset="-120"/>
               </a:rPr>
-              <a:t>700</a:t>
+              <a:t>~700</a:t>
             </a:r>
             <a:endParaRPr lang="en-US" sz="6800" dirty="0"/>
           </a:p>
@@ -3990,7 +4556,7 @@
                 <a:ea typeface="Calibri" pitchFamily="34" charset="-122"/>
                 <a:cs typeface="Calibri" pitchFamily="34" charset="-120"/>
               </a:rPr>
-              <a:t>sesi balita per tahun</a:t>
+              <a:t>sesi dapat dinilai per tahun — hipotetis</a:t>
             </a:r>
             <a:endParaRPr lang="en-US" sz="1400" dirty="0"/>
           </a:p>
@@ -4032,7 +4598,7 @@
                 <a:ea typeface="Calibri" pitchFamily="34" charset="-122"/>
                 <a:cs typeface="Calibri" pitchFamily="34" charset="-120"/>
               </a:rPr>
-              <a:t>30 Posyandu, satu tahun penyebaran biasa.</a:t>
+              <a:t>Aritmetika skala: 30 Posyandu × 40 anak layak, dikurangi attrition 42%. Skala rekrutmen, bukan rencana operasional.</a:t>
             </a:r>
             <a:endParaRPr lang="en-US" sz="1200" dirty="0"/>
           </a:p>
@@ -4308,7 +4874,7 @@
                 <a:ea typeface="Cambria" pitchFamily="34" charset="-122"/>
                 <a:cs typeface="Cambria" pitchFamily="34" charset="-120"/>
               </a:rPr>
-              <a:t>Dalam setahun penyebaran biasa, alat ini mengumpulkan data lebih banyak daripada studi yang jadi acuannya — di populasi yang belum pernah punya instrumennya.</a:t>
+              <a:t>Skala kohort acuan Nature Medicine dapat dicapai dalam satu tahun studi di 30 Posyandu — sebagai penelitian prospektif berizin etik dengan acuan klinis buta, bukan sebagai penyebaran produk.</a:t>
             </a:r>
             <a:endParaRPr lang="en-US" sz="1500" dirty="0"/>
           </a:p>
@@ -4924,7 +5490,7 @@
                 <a:ea typeface="Calibri" pitchFamily="34" charset="-122"/>
                 <a:cs typeface="Calibri" pitchFamily="34" charset="-120"/>
               </a:rPr>
-              <a:t>Usia rata-rata diagnosis ASD di Indonesia.</a:t>
+              <a:t>Usia rata-rata diagnosis ASD — tinjauan lintas negara, bukan estimasi Indonesia.</a:t>
             </a:r>
             <a:endParaRPr lang="en-US" sz="1200" dirty="0"/>
           </a:p>
@@ -5158,7 +5724,7 @@
                 <a:ea typeface="Calibri" pitchFamily="34" charset="-122"/>
                 <a:cs typeface="Calibri" pitchFamily="34" charset="-120"/>
               </a:rPr>
-              <a:t>Di jarak 32 bulan itu tidak ada satu pun titik yang menghasilkan pengukuran objektif. Yang ada hanya laporan manusia — dan laporan manusia tidak bisa diserahkan.</a:t>
+              <a:t>Sepanjang jeda itu yang tersedia hanya laporan manusia. Laporan tidak bisa diserahkan ke fasilitas berikutnya, tidak bisa diulang, dan tidak bisa dibandingkan.</a:t>
             </a:r>
             <a:endParaRPr lang="en-US" sz="1300" dirty="0"/>
           </a:p>
@@ -5166,30 +5732,63 @@
       </p:sp>
       <p:sp>
         <p:nvSpPr>
-          <p:cNvPr id="15" name="Text 13"/>
-          <p:cNvSpPr/>
-          <p:nvPr/>
-        </p:nvSpPr>
-        <p:spPr>
-          <a:xfrm>
-            <a:off x="685800" y="5120640"/>
-            <a:ext cx="6675120" cy="365760"/>
-          </a:xfrm>
-          <a:prstGeom prst="rect">
-            <a:avLst/>
-          </a:prstGeom>
-          <a:noFill/>
-          <a:ln/>
-        </p:spPr>
-        <p:txBody>
-          <a:bodyPr wrap="square" lIns="0" tIns="0" rIns="0" bIns="0" rtlCol="0" anchor="ctr"/>
-          <a:lstStyle/>
-          <a:p>
-            <a:pPr indent="0" marL="0">
-              <a:buNone/>
-            </a:pPr>
-            <a:r>
-              <a:rPr lang="en-US" sz="1400" b="1" dirty="0">
+          <p:cNvPr id="15" name="Shape 13"/>
+          <p:cNvSpPr/>
+          <p:nvPr/>
+        </p:nvSpPr>
+        <p:spPr>
+          <a:xfrm>
+            <a:off x="685800" y="4937760"/>
+            <a:ext cx="6675120" cy="914400"/>
+          </a:xfrm>
+          <a:prstGeom prst="roundRect">
+            <a:avLst>
+              <a:gd name="adj" fmla="val 6000"/>
+            </a:avLst>
+          </a:prstGeom>
+          <a:solidFill>
+            <a:srgbClr val="FFFFFF"/>
+          </a:solidFill>
+          <a:ln w="12700">
+            <a:solidFill>
+              <a:srgbClr val="DBE4E1"/>
+            </a:solidFill>
+            <a:prstDash val="solid"/>
+          </a:ln>
+        </p:spPr>
+      </p:sp>
+      <p:sp>
+        <p:nvSpPr>
+          <p:cNvPr id="16" name="Text 14"/>
+          <p:cNvSpPr/>
+          <p:nvPr/>
+        </p:nvSpPr>
+        <p:spPr>
+          <a:xfrm>
+            <a:off x="941832" y="5102352"/>
+            <a:ext cx="6217920" cy="640080"/>
+          </a:xfrm>
+          <a:prstGeom prst="rect">
+            <a:avLst/>
+          </a:prstGeom>
+          <a:noFill/>
+          <a:ln/>
+        </p:spPr>
+        <p:txBody>
+          <a:bodyPr wrap="square" lIns="0" tIns="0" rIns="0" bIns="0" rtlCol="0" anchor="ctr"/>
+          <a:lstStyle/>
+          <a:p>
+            <a:pPr indent="0" marL="0">
+              <a:lnSpc>
+                <a:spcPts val="1700"/>
+              </a:lnSpc>
+              <a:spcBef>
+                <a:spcPts val="400"/>
+              </a:spcBef>
+              <a:buNone/>
+            </a:pPr>
+            <a:r>
+              <a:rPr lang="en-US" sz="1250" dirty="0">
                 <a:solidFill>
                   <a:srgbClr val="14302B"/>
                 </a:solidFill>
@@ -5197,9 +5796,71 @@
                 <a:ea typeface="Calibri" pitchFamily="34" charset="-122"/>
                 <a:cs typeface="Calibri" pitchFamily="34" charset="-120"/>
               </a:rPr>
-              <a:t>Autisme paling responsif terhadap intervensi sebelum usia tiga tahun.</a:t>
-            </a:r>
-            <a:endParaRPr lang="en-US" sz="1400" dirty="0"/>
+              <a:t>“Baru datang sekitar umur 7 tahun. Orang tuanya sudah merasa ada yang berbeda sejak usia 2–3 tahun.”</a:t>
+            </a:r>
+            <a:endParaRPr lang="en-US" sz="1250" dirty="0"/>
+          </a:p>
+          <a:p>
+            <a:pPr indent="0" marL="0">
+              <a:lnSpc>
+                <a:spcPts val="1700"/>
+              </a:lnSpc>
+              <a:spcBef>
+                <a:spcPts val="400"/>
+              </a:spcBef>
+              <a:buNone/>
+            </a:pPr>
+            <a:r>
+              <a:rPr lang="en-US" sz="1050" dirty="0">
+                <a:solidFill>
+                  <a:srgbClr val="4A635D"/>
+                </a:solidFill>
+                <a:latin typeface="Calibri" pitchFamily="34" charset="0"/>
+                <a:ea typeface="Calibri" pitchFamily="34" charset="-122"/>
+                <a:cs typeface="Calibri" pitchFamily="34" charset="-120"/>
+              </a:rPr>
+              <a:t>Guru SLB di Jambi · wawancara praktisi · 3–4 dari sekitar 20 anak mulai ditangani sebelum usia 3 tahun</a:t>
+            </a:r>
+            <a:endParaRPr lang="en-US" sz="1250" dirty="0"/>
+          </a:p>
+        </p:txBody>
+      </p:sp>
+      <p:sp>
+        <p:nvSpPr>
+          <p:cNvPr id="17" name="Text 15"/>
+          <p:cNvSpPr/>
+          <p:nvPr/>
+        </p:nvSpPr>
+        <p:spPr>
+          <a:xfrm>
+            <a:off x="685800" y="5989320"/>
+            <a:ext cx="10424160" cy="274320"/>
+          </a:xfrm>
+          <a:prstGeom prst="rect">
+            <a:avLst/>
+          </a:prstGeom>
+          <a:noFill/>
+          <a:ln/>
+        </p:spPr>
+        <p:txBody>
+          <a:bodyPr wrap="square" lIns="0" tIns="0" rIns="0" bIns="0" rtlCol="0" anchor="ctr"/>
+          <a:lstStyle/>
+          <a:p>
+            <a:pPr indent="0" marL="0">
+              <a:buNone/>
+            </a:pPr>
+            <a:r>
+              <a:rPr lang="en-US" sz="1050" dirty="0">
+                <a:solidFill>
+                  <a:srgbClr val="4A635D"/>
+                </a:solidFill>
+                <a:latin typeface="Calibri" pitchFamily="34" charset="0"/>
+                <a:ea typeface="Calibri" pitchFamily="34" charset="-122"/>
+                <a:cs typeface="Calibri" pitchFamily="34" charset="-120"/>
+              </a:rPr>
+              <a:t>56 dan 32 bulan: tinjauan lintas negara. Bukan angka Indonesia, dan tidak dipakai sebagai angka Indonesia.</a:t>
+            </a:r>
+            <a:endParaRPr lang="en-US" sz="1050" dirty="0"/>
           </a:p>
         </p:txBody>
       </p:sp>
@@ -6186,7 +6847,7 @@
                 <a:ea typeface="Calibri" pitchFamily="34" charset="-122"/>
                 <a:cs typeface="Calibri" pitchFamily="34" charset="-120"/>
               </a:rPr>
-              <a:t>Jadi saya butuh satu orang dari ruangan ini. Tidak ada briefing, tidak ada instruksi.</a:t>
+              <a:t>Jadi jawabannya bukan satu sesi yang berhasil. Jawabannya dua kondisi, berdampingan, dari 15 sesi yang sudah direkam.</a:t>
             </a:r>
             <a:endParaRPr lang="en-US" sz="1700" dirty="0"/>
           </a:p>
@@ -6225,7 +6886,7 @@
                 <a:ea typeface="Calibri" pitchFamily="34" charset="-122"/>
                 <a:cs typeface="Calibri" pitchFamily="34" charset="-120"/>
               </a:rPr>
-              <a:t>Sesi kamera langsung  ·  67 detik  ·  pipeline yang sama persis</a:t>
+              <a:t>Layar perbandingan  ·  lalu satu sesi kamera langsung  ·  pipeline yang sama persis</a:t>
             </a:r>
             <a:endParaRPr lang="en-US" sz="1300" dirty="0"/>
           </a:p>
@@ -9306,7 +9967,7 @@
                 <a:ea typeface="Cambria" pitchFamily="34" charset="-122"/>
                 <a:cs typeface="Cambria" pitchFamily="34" charset="-120"/>
               </a:rPr>
-              <a:t>Modelnya jalan. Penjaganya menolak. Di depan kalian.</a:t>
+              <a:t>Modelnya jalan. Penjaganya menolak — dan kami buktikan ia tidak menolak semuanya.</a:t>
             </a:r>
             <a:endParaRPr lang="en-US" sz="3200" dirty="0"/>
           </a:p>
@@ -9507,7 +10168,7 @@
         <p:spPr>
           <a:xfrm>
             <a:off x="6995160" y="2286000"/>
-            <a:ext cx="4480560" cy="640080"/>
+            <a:ext cx="4480560" cy="822960"/>
           </a:xfrm>
           <a:prstGeom prst="rect">
             <a:avLst/>
@@ -9521,12 +10182,12 @@
           <a:p>
             <a:pPr indent="0" marL="0">
               <a:lnSpc>
-                <a:spcPts val="2500"/>
+                <a:spcPts val="2400"/>
               </a:lnSpc>
               <a:buNone/>
             </a:pPr>
             <a:r>
-              <a:rPr lang="en-US" sz="1900" b="1" dirty="0">
+              <a:rPr lang="en-US" sz="1800" b="1" dirty="0">
                 <a:solidFill>
                   <a:srgbClr val="0B1E1B"/>
                 </a:solidFill>
@@ -9534,9 +10195,9 @@
                 <a:ea typeface="Cambria" pitchFamily="34" charset="-122"/>
                 <a:cs typeface="Cambria" pitchFamily="34" charset="-120"/>
               </a:rPr>
-              <a:t>Ini bukan tangkapan layar yang kami siapkan. Ini yang aplikasi cetak setiap sesi.</a:t>
-            </a:r>
-            <a:endParaRPr lang="en-US" sz="1900" dirty="0"/>
+              <a:t>Penjaga yang selalu menolak sama saja dengan false yang dipasang tetap. Jadi kami jalankan dua arah.</a:t>
+            </a:r>
+            <a:endParaRPr lang="en-US" sz="1800" dirty="0"/>
           </a:p>
         </p:txBody>
       </p:sp>
@@ -9548,101 +10209,241 @@
         </p:nvSpPr>
         <p:spPr>
           <a:xfrm>
-            <a:off x="6995160" y="3063240"/>
-            <a:ext cx="4480560" cy="1463040"/>
-          </a:xfrm>
-          <a:prstGeom prst="rect">
-            <a:avLst/>
-          </a:prstGeom>
-          <a:noFill/>
-          <a:ln/>
-        </p:spPr>
-        <p:txBody>
-          <a:bodyPr wrap="square" lIns="0" tIns="0" rIns="0" bIns="0" rtlCol="0" anchor="ctr"/>
-          <a:lstStyle/>
-          <a:p>
-            <a:pPr marL="342900" indent="-342900">
-              <a:lnSpc>
-                <a:spcPts val="1900"/>
-              </a:lnSpc>
-              <a:spcAft>
-                <a:spcPts val="900"/>
-              </a:spcAft>
-              <a:buSzPct val="100000"/>
-              <a:buChar char="•"/>
-            </a:pPr>
-            <a:r>
-              <a:rPr lang="en-US" sz="1350" dirty="0">
-                <a:solidFill>
-                  <a:srgbClr val="14302B"/>
+            <a:off x="6995160" y="3200400"/>
+            <a:ext cx="2743200" cy="274320"/>
+          </a:xfrm>
+          <a:prstGeom prst="rect">
+            <a:avLst/>
+          </a:prstGeom>
+          <a:noFill/>
+          <a:ln/>
+        </p:spPr>
+        <p:txBody>
+          <a:bodyPr wrap="square" lIns="0" tIns="0" rIns="0" bIns="0" rtlCol="0" anchor="ctr"/>
+          <a:lstStyle/>
+          <a:p>
+            <a:pPr indent="0" marL="0">
+              <a:buNone/>
+            </a:pPr>
+            <a:r>
+              <a:rPr lang="en-US" sz="1200" dirty="0">
+                <a:solidFill>
+                  <a:srgbClr val="4A635D"/>
                 </a:solidFill>
                 <a:latin typeface="Calibri" pitchFamily="34" charset="0"/>
                 <a:ea typeface="Calibri" pitchFamily="34" charset="-122"/>
                 <a:cs typeface="Calibri" pitchFamily="34" charset="-120"/>
               </a:rPr>
-              <a:t>Regresi logistik 13 fitur dikirim ke tablet dan dijalankan setiap sesi.</a:t>
-            </a:r>
-            <a:endParaRPr lang="en-US" sz="1350" dirty="0"/>
-          </a:p>
-          <a:p>
-            <a:pPr marL="342900" indent="-342900">
-              <a:lnSpc>
-                <a:spcPts val="1900"/>
-              </a:lnSpc>
-              <a:spcAft>
-                <a:spcPts val="900"/>
-              </a:spcAft>
-              <a:buSzPct val="100000"/>
-              <a:buChar char="•"/>
-            </a:pPr>
-            <a:r>
-              <a:rPr lang="en-US" sz="1350" dirty="0">
-                <a:solidFill>
-                  <a:srgbClr val="14302B"/>
+              <a:t>Domain sumber (Carette)</a:t>
+            </a:r>
+            <a:endParaRPr lang="en-US" sz="1200" dirty="0"/>
+          </a:p>
+        </p:txBody>
+      </p:sp>
+      <p:sp>
+        <p:nvSpPr>
+          <p:cNvPr id="13" name="Text 11"/>
+          <p:cNvSpPr/>
+          <p:nvPr/>
+        </p:nvSpPr>
+        <p:spPr>
+          <a:xfrm>
+            <a:off x="9738360" y="3145536"/>
+            <a:ext cx="1737360" cy="329184"/>
+          </a:xfrm>
+          <a:prstGeom prst="rect">
+            <a:avLst/>
+          </a:prstGeom>
+          <a:noFill/>
+          <a:ln/>
+        </p:spPr>
+        <p:txBody>
+          <a:bodyPr wrap="square" lIns="0" tIns="0" rIns="0" bIns="0" rtlCol="0" anchor="ctr"/>
+          <a:lstStyle/>
+          <a:p>
+            <a:pPr algn="r" indent="0" marL="0">
+              <a:buNone/>
+            </a:pPr>
+            <a:r>
+              <a:rPr lang="en-US" sz="1450" b="1" dirty="0">
+                <a:solidFill>
+                  <a:srgbClr val="0D8271"/>
                 </a:solidFill>
                 <a:latin typeface="Calibri" pitchFamily="34" charset="0"/>
                 <a:ea typeface="Calibri" pitchFamily="34" charset="-122"/>
                 <a:cs typeface="Calibri" pitchFamily="34" charset="-120"/>
               </a:rPr>
-              <a:t>Penjaga memutuskan apakah keluarannya boleh dibaca — dan di sini ia menolak.</a:t>
-            </a:r>
-            <a:endParaRPr lang="en-US" sz="1350" dirty="0"/>
-          </a:p>
-          <a:p>
-            <a:pPr marL="342900" indent="-342900">
-              <a:lnSpc>
-                <a:spcPts val="1900"/>
-              </a:lnSpc>
-              <a:spcAft>
-                <a:spcPts val="900"/>
-              </a:spcAft>
-              <a:buSzPct val="100000"/>
-              <a:buChar char="•"/>
-            </a:pPr>
-            <a:r>
-              <a:rPr lang="en-US" sz="1350" dirty="0">
-                <a:solidFill>
-                  <a:srgbClr val="14302B"/>
+              <a:t>544 / 547 diterima</a:t>
+            </a:r>
+            <a:endParaRPr lang="en-US" sz="1450" dirty="0"/>
+          </a:p>
+        </p:txBody>
+      </p:sp>
+      <p:sp>
+        <p:nvSpPr>
+          <p:cNvPr id="14" name="Text 12"/>
+          <p:cNvSpPr/>
+          <p:nvPr/>
+        </p:nvSpPr>
+        <p:spPr>
+          <a:xfrm>
+            <a:off x="6995160" y="3767328"/>
+            <a:ext cx="2743200" cy="274320"/>
+          </a:xfrm>
+          <a:prstGeom prst="rect">
+            <a:avLst/>
+          </a:prstGeom>
+          <a:noFill/>
+          <a:ln/>
+        </p:spPr>
+        <p:txBody>
+          <a:bodyPr wrap="square" lIns="0" tIns="0" rIns="0" bIns="0" rtlCol="0" anchor="ctr"/>
+          <a:lstStyle/>
+          <a:p>
+            <a:pPr indent="0" marL="0">
+              <a:buNone/>
+            </a:pPr>
+            <a:r>
+              <a:rPr lang="en-US" sz="1200" dirty="0">
+                <a:solidFill>
+                  <a:srgbClr val="4A635D"/>
                 </a:solidFill>
                 <a:latin typeface="Calibri" pitchFamily="34" charset="0"/>
                 <a:ea typeface="Calibri" pitchFamily="34" charset="-122"/>
                 <a:cs typeface="Calibri" pitchFamily="34" charset="-120"/>
               </a:rPr>
-              <a:t>Ia menyebut fitur mana yang di luar distribusi, beserta jaraknya.</a:t>
-            </a:r>
-            <a:endParaRPr lang="en-US" sz="1350" dirty="0"/>
-          </a:p>
-        </p:txBody>
-      </p:sp>
-      <p:sp>
-        <p:nvSpPr>
-          <p:cNvPr id="13" name="Text 11"/>
-          <p:cNvSpPr/>
-          <p:nvPr/>
-        </p:nvSpPr>
-        <p:spPr>
-          <a:xfrm>
-            <a:off x="685800" y="4800600"/>
+              <a:t>Stimulus yang dikirim</a:t>
+            </a:r>
+            <a:endParaRPr lang="en-US" sz="1200" dirty="0"/>
+          </a:p>
+        </p:txBody>
+      </p:sp>
+      <p:sp>
+        <p:nvSpPr>
+          <p:cNvPr id="15" name="Text 13"/>
+          <p:cNvSpPr/>
+          <p:nvPr/>
+        </p:nvSpPr>
+        <p:spPr>
+          <a:xfrm>
+            <a:off x="9738360" y="3712464"/>
+            <a:ext cx="1737360" cy="329184"/>
+          </a:xfrm>
+          <a:prstGeom prst="rect">
+            <a:avLst/>
+          </a:prstGeom>
+          <a:noFill/>
+          <a:ln/>
+        </p:spPr>
+        <p:txBody>
+          <a:bodyPr wrap="square" lIns="0" tIns="0" rIns="0" bIns="0" rtlCol="0" anchor="ctr"/>
+          <a:lstStyle/>
+          <a:p>
+            <a:pPr algn="r" indent="0" marL="0">
+              <a:buNone/>
+            </a:pPr>
+            <a:r>
+              <a:rPr lang="en-US" sz="1450" b="1" dirty="0">
+                <a:solidFill>
+                  <a:srgbClr val="B1442C"/>
+                </a:solidFill>
+                <a:latin typeface="Calibri" pitchFamily="34" charset="0"/>
+                <a:ea typeface="Calibri" pitchFamily="34" charset="-122"/>
+                <a:cs typeface="Calibri" pitchFamily="34" charset="-120"/>
+              </a:rPr>
+              <a:t>1 / 23 diterima</a:t>
+            </a:r>
+            <a:endParaRPr lang="en-US" sz="1450" dirty="0"/>
+          </a:p>
+        </p:txBody>
+      </p:sp>
+      <p:sp>
+        <p:nvSpPr>
+          <p:cNvPr id="16" name="Text 14"/>
+          <p:cNvSpPr/>
+          <p:nvPr/>
+        </p:nvSpPr>
+        <p:spPr>
+          <a:xfrm>
+            <a:off x="6995160" y="4334256"/>
+            <a:ext cx="2743200" cy="274320"/>
+          </a:xfrm>
+          <a:prstGeom prst="rect">
+            <a:avLst/>
+          </a:prstGeom>
+          <a:noFill/>
+          <a:ln/>
+        </p:spPr>
+        <p:txBody>
+          <a:bodyPr wrap="square" lIns="0" tIns="0" rIns="0" bIns="0" rtlCol="0" anchor="ctr"/>
+          <a:lstStyle/>
+          <a:p>
+            <a:pPr indent="0" marL="0">
+              <a:buNone/>
+            </a:pPr>
+            <a:r>
+              <a:rPr lang="en-US" sz="1200" dirty="0">
+                <a:solidFill>
+                  <a:srgbClr val="4A635D"/>
+                </a:solidFill>
+                <a:latin typeface="Calibri" pitchFamily="34" charset="0"/>
+                <a:ea typeface="Calibri" pitchFamily="34" charset="-122"/>
+                <a:cs typeface="Calibri" pitchFamily="34" charset="-120"/>
+              </a:rPr>
+              <a:t>Keputusan direproduksi Python</a:t>
+            </a:r>
+            <a:endParaRPr lang="en-US" sz="1200" dirty="0"/>
+          </a:p>
+        </p:txBody>
+      </p:sp>
+      <p:sp>
+        <p:nvSpPr>
+          <p:cNvPr id="17" name="Text 15"/>
+          <p:cNvSpPr/>
+          <p:nvPr/>
+        </p:nvSpPr>
+        <p:spPr>
+          <a:xfrm>
+            <a:off x="9738360" y="4279392"/>
+            <a:ext cx="1737360" cy="329184"/>
+          </a:xfrm>
+          <a:prstGeom prst="rect">
+            <a:avLst/>
+          </a:prstGeom>
+          <a:noFill/>
+          <a:ln/>
+        </p:spPr>
+        <p:txBody>
+          <a:bodyPr wrap="square" lIns="0" tIns="0" rIns="0" bIns="0" rtlCol="0" anchor="ctr"/>
+          <a:lstStyle/>
+          <a:p>
+            <a:pPr algn="r" indent="0" marL="0">
+              <a:buNone/>
+            </a:pPr>
+            <a:r>
+              <a:rPr lang="en-US" sz="1450" b="1" dirty="0">
+                <a:solidFill>
+                  <a:srgbClr val="14302B"/>
+                </a:solidFill>
+                <a:latin typeface="Calibri" pitchFamily="34" charset="0"/>
+                <a:ea typeface="Calibri" pitchFamily="34" charset="-122"/>
+                <a:cs typeface="Calibri" pitchFamily="34" charset="-120"/>
+              </a:rPr>
+              <a:t>23 / 23</a:t>
+            </a:r>
+            <a:endParaRPr lang="en-US" sz="1450" dirty="0"/>
+          </a:p>
+        </p:txBody>
+      </p:sp>
+      <p:sp>
+        <p:nvSpPr>
+          <p:cNvPr id="18" name="Text 16"/>
+          <p:cNvSpPr/>
+          <p:nvPr/>
+        </p:nvSpPr>
+        <p:spPr>
+          <a:xfrm>
+            <a:off x="685800" y="4846320"/>
             <a:ext cx="10424160" cy="548640"/>
           </a:xfrm>
           <a:prstGeom prst="rect">
@@ -9657,12 +10458,54 @@
           <a:p>
             <a:pPr indent="0" marL="0">
               <a:lnSpc>
-                <a:spcPts val="2200"/>
+                <a:spcPts val="1800"/>
               </a:lnSpc>
               <a:buNone/>
             </a:pPr>
             <a:r>
-              <a:rPr lang="en-US" sz="1600" i="1" dirty="0">
+              <a:rPr lang="en-US" sz="1300" dirty="0">
+                <a:solidFill>
+                  <a:srgbClr val="14302B"/>
+                </a:solidFill>
+                <a:latin typeface="Calibri" pitchFamily="34" charset="0"/>
+                <a:ea typeface="Calibri" pitchFamily="34" charset="-122"/>
+                <a:cs typeface="Calibri" pitchFamily="34" charset="-120"/>
+              </a:rPr>
+              <a:t>Ia menerima hampir semua yang berasal dari kohort yang membangunnya, dan menolak setiap sesi pada stimulus sekarang — sambil menyebut fiturnya: ink_frac di 22 dari 23 sesi.</a:t>
+            </a:r>
+            <a:endParaRPr lang="en-US" sz="1300" dirty="0"/>
+          </a:p>
+        </p:txBody>
+      </p:sp>
+      <p:sp>
+        <p:nvSpPr>
+          <p:cNvPr id="19" name="Text 17"/>
+          <p:cNvSpPr/>
+          <p:nvPr/>
+        </p:nvSpPr>
+        <p:spPr>
+          <a:xfrm>
+            <a:off x="685800" y="5440680"/>
+            <a:ext cx="10424160" cy="457200"/>
+          </a:xfrm>
+          <a:prstGeom prst="rect">
+            <a:avLst/>
+          </a:prstGeom>
+          <a:noFill/>
+          <a:ln/>
+        </p:spPr>
+        <p:txBody>
+          <a:bodyPr wrap="square" lIns="0" tIns="0" rIns="0" bIns="0" rtlCol="0" anchor="ctr"/>
+          <a:lstStyle/>
+          <a:p>
+            <a:pPr indent="0" marL="0">
+              <a:lnSpc>
+                <a:spcPts val="2100"/>
+              </a:lnSpc>
+              <a:buNone/>
+            </a:pPr>
+            <a:r>
+              <a:rPr lang="en-US" sz="1500" i="1" dirty="0">
                 <a:solidFill>
                   <a:srgbClr val="0D8271"/>
                 </a:solidFill>
@@ -9670,9 +10513,48 @@
                 <a:ea typeface="Cambria" pitchFamily="34" charset="-122"/>
                 <a:cs typeface="Cambria" pitchFamily="34" charset="-120"/>
               </a:rPr>
-              <a:t>Kami tidak menyembunyikan model yang tidak layak. Kami menjalankannya di depan kalian dan menunjukkan sistem menangkapnya.</a:t>
-            </a:r>
-            <a:endParaRPr lang="en-US" sz="1600" dirty="0"/>
+              <a:t>Keputusan itu dibuat TypeScript di peramban saat sesi berjalan. Python menghitungnya ulang dari log dan mendapat verdict yang sama, 23 dari 23.</a:t>
+            </a:r>
+            <a:endParaRPr lang="en-US" sz="1500" dirty="0"/>
+          </a:p>
+        </p:txBody>
+      </p:sp>
+      <p:sp>
+        <p:nvSpPr>
+          <p:cNvPr id="20" name="Text 18"/>
+          <p:cNvSpPr/>
+          <p:nvPr/>
+        </p:nvSpPr>
+        <p:spPr>
+          <a:xfrm>
+            <a:off x="685800" y="5943600"/>
+            <a:ext cx="10424160" cy="274320"/>
+          </a:xfrm>
+          <a:prstGeom prst="rect">
+            <a:avLst/>
+          </a:prstGeom>
+          <a:noFill/>
+          <a:ln/>
+        </p:spPr>
+        <p:txBody>
+          <a:bodyPr wrap="square" lIns="0" tIns="0" rIns="0" bIns="0" rtlCol="0" anchor="ctr"/>
+          <a:lstStyle/>
+          <a:p>
+            <a:pPr indent="0" marL="0">
+              <a:buNone/>
+            </a:pPr>
+            <a:r>
+              <a:rPr lang="en-US" sz="1000" dirty="0">
+                <a:solidFill>
+                  <a:srgbClr val="4A635D"/>
+                </a:solidFill>
+                <a:latin typeface="Calibri" pitchFamily="34" charset="0"/>
+                <a:ea typeface="Calibri" pitchFamily="34" charset="-122"/>
+                <a:cs typeface="Calibri" pitchFamily="34" charset="-120"/>
+              </a:rPr>
+              <a:t>Sumber: research/hasil/ood_dua_arah.json · kalibrasi referensi persentil 99,5 sehingga tingkat penerimaan domain sumber adalah pemeriksaan kewarasan, bukan uji generalisasi</a:t>
+            </a:r>
+            <a:endParaRPr lang="en-US" sz="1000" dirty="0"/>
           </a:p>
         </p:txBody>
       </p:sp>
@@ -11586,14 +12468,41 @@
       </p:graphicFrame>
       <p:sp>
         <p:nvSpPr>
-          <p:cNvPr id="7" name="Text 4"/>
-          <p:cNvSpPr/>
-          <p:nvPr/>
-        </p:nvSpPr>
-        <p:spPr>
-          <a:xfrm>
-            <a:off x="685800" y="4617720"/>
-            <a:ext cx="6766560" cy="822960"/>
+          <p:cNvPr id="7" name="Shape 4"/>
+          <p:cNvSpPr/>
+          <p:nvPr/>
+        </p:nvSpPr>
+        <p:spPr>
+          <a:xfrm>
+            <a:off x="685800" y="4572000"/>
+            <a:ext cx="6766560" cy="1051560"/>
+          </a:xfrm>
+          <a:prstGeom prst="roundRect">
+            <a:avLst>
+              <a:gd name="adj" fmla="val 5217"/>
+            </a:avLst>
+          </a:prstGeom>
+          <a:solidFill>
+            <a:srgbClr val="FFFFFF"/>
+          </a:solidFill>
+          <a:ln w="12700">
+            <a:solidFill>
+              <a:srgbClr val="DBE4E1"/>
+            </a:solidFill>
+            <a:prstDash val="solid"/>
+          </a:ln>
+        </p:spPr>
+      </p:sp>
+      <p:sp>
+        <p:nvSpPr>
+          <p:cNvPr id="8" name="Text 5"/>
+          <p:cNvSpPr/>
+          <p:nvPr/>
+        </p:nvSpPr>
+        <p:spPr>
+          <a:xfrm>
+            <a:off x="941832" y="4754880"/>
+            <a:ext cx="6309360" cy="731520"/>
           </a:xfrm>
           <a:prstGeom prst="rect">
             <a:avLst/>
@@ -11607,12 +12516,15 @@
           <a:p>
             <a:pPr indent="0" marL="0">
               <a:lnSpc>
-                <a:spcPts val="1900"/>
+                <a:spcPts val="1700"/>
               </a:lnSpc>
-              <a:buNone/>
-            </a:pPr>
-            <a:r>
-              <a:rPr lang="en-US" sz="1350" dirty="0">
+              <a:spcBef>
+                <a:spcPts val="400"/>
+              </a:spcBef>
+              <a:buNone/>
+            </a:pPr>
+            <a:r>
+              <a:rPr lang="en-US" sz="1250" dirty="0">
                 <a:solidFill>
                   <a:srgbClr val="14302B"/>
                 </a:solidFill>
@@ -11620,34 +12532,57 @@
                 <a:ea typeface="Calibri" pitchFamily="34" charset="-122"/>
                 <a:cs typeface="Calibri" pitchFamily="34" charset="-120"/>
               </a:rPr>
-              <a:t>Kohort 1.000 anak, prevalensi 1%. Baris teratas paling menggoda dipamerkan — sensitivitas 92 persen — dan ia merujuk 740 dari 1.000 anak. Puskesmas mana pun berhenti memakainya di minggu kedua.</a:t>
-            </a:r>
-            <a:endParaRPr lang="en-US" sz="1350" dirty="0"/>
-          </a:p>
-        </p:txBody>
-      </p:sp>
-      <p:sp>
-        <p:nvSpPr>
-          <p:cNvPr id="8" name="Shape 5"/>
+              <a:t>“Kalau semua langsung dirujuk, tenaga dan jadwal yang tersedia mungkin kewalahan.”</a:t>
+            </a:r>
+            <a:endParaRPr lang="en-US" sz="1250" dirty="0"/>
+          </a:p>
+          <a:p>
+            <a:pPr indent="0" marL="0">
+              <a:lnSpc>
+                <a:spcPts val="1700"/>
+              </a:lnSpc>
+              <a:spcBef>
+                <a:spcPts val="400"/>
+              </a:spcBef>
+              <a:buNone/>
+            </a:pPr>
+            <a:r>
+              <a:rPr lang="en-US" sz="1050" dirty="0">
+                <a:solidFill>
+                  <a:srgbClr val="4A635D"/>
+                </a:solidFill>
+                <a:latin typeface="Calibri" pitchFamily="34" charset="0"/>
+                <a:ea typeface="Calibri" pitchFamily="34" charset="-122"/>
+                <a:cs typeface="Calibri" pitchFamily="34" charset="-120"/>
+              </a:rPr>
+              <a:t>Guru SLB di Jambi, ditanya apakah layanan sanggup menampung tiga kali lipat rujukan</a:t>
+            </a:r>
+            <a:endParaRPr lang="en-US" sz="1250" dirty="0"/>
+          </a:p>
+        </p:txBody>
+      </p:sp>
+      <p:sp>
+        <p:nvSpPr>
+          <p:cNvPr id="9" name="Shape 6"/>
           <p:cNvSpPr/>
           <p:nvPr/>
         </p:nvSpPr>
         <p:spPr>
           <a:xfrm>
             <a:off x="7726680" y="4572000"/>
-            <a:ext cx="3383280" cy="960120"/>
+            <a:ext cx="3383280" cy="1051560"/>
           </a:xfrm>
           <a:prstGeom prst="roundRect">
             <a:avLst>
-              <a:gd name="adj" fmla="val 5714"/>
+              <a:gd name="adj" fmla="val 5217"/>
             </a:avLst>
           </a:prstGeom>
           <a:solidFill>
-            <a:srgbClr val="E4F2EE"/>
+            <a:srgbClr val="FBEAE5"/>
           </a:solidFill>
           <a:ln w="12700">
             <a:solidFill>
-              <a:srgbClr val="E4F2EE"/>
+              <a:srgbClr val="FBEAE5"/>
             </a:solidFill>
             <a:prstDash val="solid"/>
           </a:ln>
@@ -11655,14 +12590,14 @@
       </p:sp>
       <p:sp>
         <p:nvSpPr>
-          <p:cNvPr id="9" name="Text 6"/>
-          <p:cNvSpPr/>
-          <p:nvPr/>
-        </p:nvSpPr>
-        <p:spPr>
-          <a:xfrm>
-            <a:off x="7955280" y="4718304"/>
-            <a:ext cx="2926080" cy="731520"/>
+          <p:cNvPr id="10" name="Text 7"/>
+          <p:cNvSpPr/>
+          <p:nvPr/>
+        </p:nvSpPr>
+        <p:spPr>
+          <a:xfrm>
+            <a:off x="7955280" y="4681728"/>
+            <a:ext cx="2926080" cy="442452"/>
           </a:xfrm>
           <a:prstGeom prst="rect">
             <a:avLst/>
@@ -11676,22 +12611,145 @@
           <a:p>
             <a:pPr indent="0" marL="0">
               <a:lnSpc>
-                <a:spcPts val="1600"/>
+                <a:spcPts val="3000"/>
               </a:lnSpc>
               <a:buNone/>
             </a:pPr>
             <a:r>
-              <a:rPr lang="en-US" sz="1200" b="1" dirty="0">
-                <a:solidFill>
-                  <a:srgbClr val="0D8271"/>
+              <a:rPr lang="en-US" sz="3000" b="1" dirty="0">
+                <a:solidFill>
+                  <a:srgbClr val="B1442C"/>
+                </a:solidFill>
+                <a:latin typeface="Cambria" pitchFamily="34" charset="0"/>
+                <a:ea typeface="Cambria" pitchFamily="34" charset="-122"/>
+                <a:cs typeface="Cambria" pitchFamily="34" charset="-120"/>
+              </a:rPr>
+              <a:t>38,3×</a:t>
+            </a:r>
+            <a:endParaRPr lang="en-US" sz="3000" dirty="0"/>
+          </a:p>
+        </p:txBody>
+      </p:sp>
+      <p:sp>
+        <p:nvSpPr>
+          <p:cNvPr id="11" name="Text 8"/>
+          <p:cNvSpPr/>
+          <p:nvPr/>
+        </p:nvSpPr>
+        <p:spPr>
+          <a:xfrm>
+            <a:off x="7955280" y="5179044"/>
+            <a:ext cx="2926080" cy="274320"/>
+          </a:xfrm>
+          <a:prstGeom prst="rect">
+            <a:avLst/>
+          </a:prstGeom>
+          <a:noFill/>
+          <a:ln/>
+        </p:spPr>
+        <p:txBody>
+          <a:bodyPr wrap="square" lIns="0" tIns="0" rIns="0" bIns="0" rtlCol="0" anchor="ctr"/>
+          <a:lstStyle/>
+          <a:p>
+            <a:pPr indent="0" marL="0">
+              <a:buNone/>
+            </a:pPr>
+            <a:r>
+              <a:rPr lang="en-US" sz="1400" b="1" dirty="0">
+                <a:solidFill>
+                  <a:srgbClr val="14302B"/>
                 </a:solidFill>
                 <a:latin typeface="Calibri" pitchFamily="34" charset="0"/>
                 <a:ea typeface="Calibri" pitchFamily="34" charset="-122"/>
                 <a:cs typeface="Calibri" pitchFamily="34" charset="-120"/>
               </a:rPr>
-              <a:t>Kami memilihnya bukan karena angkanya paling bagus, tapi karena itu satu-satunya yang muat di kapasitas rujukan yang benar-benar ada.</a:t>
+              <a:t>beban rujukan baris teratas</a:t>
+            </a:r>
+            <a:endParaRPr lang="en-US" sz="1400" dirty="0"/>
+          </a:p>
+        </p:txBody>
+      </p:sp>
+      <p:sp>
+        <p:nvSpPr>
+          <p:cNvPr id="12" name="Text 9"/>
+          <p:cNvSpPr/>
+          <p:nvPr/>
+        </p:nvSpPr>
+        <p:spPr>
+          <a:xfrm>
+            <a:off x="7955280" y="5489940"/>
+            <a:ext cx="2926080" cy="640080"/>
+          </a:xfrm>
+          <a:prstGeom prst="rect">
+            <a:avLst/>
+          </a:prstGeom>
+          <a:noFill/>
+          <a:ln/>
+        </p:spPr>
+        <p:txBody>
+          <a:bodyPr wrap="square" lIns="0" tIns="0" rIns="0" bIns="0" rtlCol="0" anchor="ctr"/>
+          <a:lstStyle/>
+          <a:p>
+            <a:pPr indent="0" marL="0">
+              <a:lnSpc>
+                <a:spcPts val="1500"/>
+              </a:lnSpc>
+              <a:buNone/>
+            </a:pPr>
+            <a:r>
+              <a:rPr lang="en-US" sz="1200" dirty="0">
+                <a:solidFill>
+                  <a:srgbClr val="4A635D"/>
+                </a:solidFill>
+                <a:latin typeface="Calibri" pitchFamily="34" charset="0"/>
+                <a:ea typeface="Calibri" pitchFamily="34" charset="-122"/>
+                <a:cs typeface="Calibri" pitchFamily="34" charset="-120"/>
+              </a:rPr>
+              <a:t>dibanding titik kerja yang dikirim</a:t>
             </a:r>
             <a:endParaRPr lang="en-US" sz="1200" dirty="0"/>
+          </a:p>
+        </p:txBody>
+      </p:sp>
+      <p:sp>
+        <p:nvSpPr>
+          <p:cNvPr id="13" name="Text 10"/>
+          <p:cNvSpPr/>
+          <p:nvPr/>
+        </p:nvSpPr>
+        <p:spPr>
+          <a:xfrm>
+            <a:off x="685800" y="5760720"/>
+            <a:ext cx="10424160" cy="502920"/>
+          </a:xfrm>
+          <a:prstGeom prst="rect">
+            <a:avLst/>
+          </a:prstGeom>
+          <a:noFill/>
+          <a:ln/>
+        </p:spPr>
+        <p:txBody>
+          <a:bodyPr wrap="square" lIns="0" tIns="0" rIns="0" bIns="0" rtlCol="0" anchor="ctr"/>
+          <a:lstStyle/>
+          <a:p>
+            <a:pPr indent="0" marL="0">
+              <a:lnSpc>
+                <a:spcPts val="2100"/>
+              </a:lnSpc>
+              <a:buNone/>
+            </a:pPr>
+            <a:r>
+              <a:rPr lang="en-US" sz="1500" b="1" i="1" dirty="0">
+                <a:solidFill>
+                  <a:srgbClr val="0B1E1B"/>
+                </a:solidFill>
+                <a:latin typeface="Cambria" pitchFamily="34" charset="0"/>
+                <a:ea typeface="Cambria" pitchFamily="34" charset="-122"/>
+                <a:cs typeface="Cambria" pitchFamily="34" charset="-120"/>
+              </a:rPr>
+              <a:t>Tiga kali lipat sudah dinilai sulit. Baris bersensitivitas 92 persen bukan tiga kali — ia 38 kali. Kami memilih baris yang paling sedikit menemukan karena itu satu-satunya yang muat.</a:t>
+            </a:r>
+            <a:endParaRPr lang="en-US" sz="1500" dirty="0"/>
           </a:p>
         </p:txBody>
       </p:sp>

--- a/deck/Neurogaze-Pitch-Deck.pptx
+++ b/deck/Neurogaze-Pitch-Deck.pptx
@@ -18,9 +18,10 @@
     <p:sldId id="266" r:id="rId12"/>
     <p:sldId id="267" r:id="rId13"/>
     <p:sldId id="268" r:id="rId14"/>
+    <p:sldId id="269" r:id="rId15"/>
   </p:sldIdLst>
   <p:notesMasterIdLst>
-    <p:notesMasterId r:id="rId15"/>
+    <p:notesMasterId r:id="rId16"/>
   </p:notesMasterIdLst>
   <p:sldSz cx="12192000" cy="6858000"/>
   <p:notesSz cx="6858000" cy="12192000"/>
@@ -888,7 +889,7 @@
           <a:p>
             <a:r>
               <a:rPr lang="en-US" dirty="0"/>
-              <a:t>Ini slide AI Implementation, bukan slide integritas — jual temuannya lebih dulu, penolakannya belakangan. Kalimat kuncinya: setiap makalah pada dataset ini yang tidak menjalankan alas semacam ini berisiko melaporkan performa yang sebagian berasal dari perbedaan pengumpulan data. Dataset wajah cukup satu baris; jangan diceritakan ulang.</a:t>
+              <a:t>0:45. Ini bagian Impact yang paling kuat di seluruh deck — pelankan. Satu wawancara bukan pengukuran kapasitas, dan narasumber tidak melihat tabel ini; sebut keduanya. Sensitivitas 17% bukan bug, itu bentuk alatnya. Rule-in.</a:t>
             </a:r>
             <a:endParaRPr lang="en-US" dirty="0"/>
           </a:p>
@@ -976,7 +977,7 @@
           <a:p>
             <a:r>
               <a:rPr lang="en-US" dirty="0"/>
-              <a:t>1:10. Bobot terbesar di rubrik. Sebut sendiri bahwa ini skenario bersyarat, lalu sebut biaya operasi yang belum terukur — sebelum juri menghitungnya.</a:t>
+              <a:t>Ini slide AI Implementation, bukan slide integritas — jual temuannya lebih dulu, penolakannya belakangan. Kalimat kuncinya: setiap makalah pada dataset ini yang tidak menjalankan alas semacam ini berisiko melaporkan performa yang sebagian berasal dari perbedaan pengumpulan data. Dataset wajah cukup satu baris; jangan diceritakan ulang.</a:t>
             </a:r>
             <a:endParaRPr lang="en-US" dirty="0"/>
           </a:p>
@@ -1064,7 +1065,7 @@
           <a:p>
             <a:r>
               <a:rPr lang="en-US" dirty="0"/>
-              <a:t>Ini yang mengubah 'belum ada data' dari kelemahan menjadi rencana. Sebut kata 'studi prospektif berizin etik' dengan suara — kalau slide ini terdengar seperti rencana menyebar produk untuk memanen data balita, seluruh bagian responsible AI runtuh di satu kalimat.</a:t>
+              <a:t>1:10. Bobot terbesar di rubrik. Sebut sendiri bahwa ini skenario bersyarat, lalu sebut biaya operasi yang belum terukur — sebelum juri menghitungnya.</a:t>
             </a:r>
             <a:endParaRPr lang="en-US" dirty="0"/>
           </a:p>
@@ -1152,7 +1153,7 @@
           <a:p>
             <a:r>
               <a:rPr lang="en-US" dirty="0"/>
-              <a:t>0:30. Berhenti di sini. Jangan sebut kaji etik sebagai tanda tangan; permintaannya mitra, bukan izin. Jangan tutup dengan 'lima lembaga menolak kami'.</a:t>
+              <a:t>Ini yang mengubah 'belum ada data' dari kelemahan menjadi rencana. Sebut kata 'studi prospektif berizin etik' dengan suara — kalau slide ini terdengar seperti rencana menyebar produk untuk memanen data balita, seluruh bagian responsible AI runtuh di satu kalimat.</a:t>
             </a:r>
             <a:endParaRPr lang="en-US" dirty="0"/>
           </a:p>
@@ -1176,6 +1177,94 @@
             <a:fld id="{F7021451-1387-4CA6-816F-3879F97B5CBC}" type="slidenum">
               <a:rPr lang="en-US"/>
               <a:t>13</a:t>
+            </a:fld>
+            <a:endParaRPr lang="en-US"/>
+          </a:p>
+        </p:txBody>
+      </p:sp>
+    </p:spTree>
+    <p:extLst>
+      <p:ext uri="{BB962C8B-B14F-4D97-AF65-F5344CB8AC3E}">
+        <p14:creationId xmlns:p14="http://schemas.microsoft.com/office/powerpoint/2010/main" val="1024086991"/>
+      </p:ext>
+    </p:extLst>
+  </p:cSld>
+  <p:clrMapOvr>
+    <a:masterClrMapping/>
+  </p:clrMapOvr>
+</p:notes>
+</file>
+
+<file path=ppt/notesSlides/notesSlide14.xml><?xml version="1.0" encoding="utf-8"?>
+<p:notes xmlns:a="http://schemas.openxmlformats.org/drawingml/2006/main" xmlns:r="http://schemas.openxmlformats.org/officeDocument/2006/relationships" xmlns:p="http://schemas.openxmlformats.org/presentationml/2006/main">
+  <p:cSld>
+    <p:spTree>
+      <p:nvGrpSpPr>
+        <p:cNvPr id="1" name=""/>
+        <p:cNvGrpSpPr/>
+        <p:nvPr/>
+      </p:nvGrpSpPr>
+      <p:grpSpPr>
+        <a:xfrm>
+          <a:off x="0" y="0"/>
+          <a:ext cx="0" cy="0"/>
+          <a:chOff x="0" y="0"/>
+          <a:chExt cx="0" cy="0"/>
+        </a:xfrm>
+      </p:grpSpPr>
+      <p:sp>
+        <p:nvSpPr>
+          <p:cNvPr id="2" name="Slide Image Placeholder 1"/>
+          <p:cNvSpPr>
+            <a:spLocks noGrp="1" noRot="1" noChangeAspect="1"/>
+          </p:cNvSpPr>
+          <p:nvPr>
+            <p:ph type="sldImg"/>
+          </p:nvPr>
+        </p:nvSpPr>
+        <p:spPr/>
+      </p:sp>
+      <p:sp>
+        <p:nvSpPr>
+          <p:cNvPr id="3" name="Notes Placeholder 2"/>
+          <p:cNvSpPr>
+            <a:spLocks noGrp="1"/>
+          </p:cNvSpPr>
+          <p:nvPr>
+            <p:ph type="body" idx="1"/>
+          </p:nvPr>
+        </p:nvSpPr>
+        <p:spPr/>
+        <p:txBody>
+          <a:bodyPr/>
+          <a:lstStyle/>
+          <a:p>
+            <a:r>
+              <a:rPr lang="en-US" dirty="0"/>
+              <a:t>0:30. Berhenti di sini. Jangan sebut kaji etik sebagai tanda tangan; permintaannya mitra, bukan izin. Jangan tutup dengan 'lima lembaga menolak kami'.</a:t>
+            </a:r>
+            <a:endParaRPr lang="en-US" dirty="0"/>
+          </a:p>
+        </p:txBody>
+      </p:sp>
+      <p:sp>
+        <p:nvSpPr>
+          <p:cNvPr id="4" name="Slide Number Placeholder 3"/>
+          <p:cNvSpPr>
+            <a:spLocks noGrp="1"/>
+          </p:cNvSpPr>
+          <p:nvPr>
+            <p:ph type="sldNum" sz="quarter" idx="10"/>
+          </p:nvPr>
+        </p:nvSpPr>
+        <p:spPr/>
+        <p:txBody>
+          <a:bodyPr/>
+          <a:lstStyle/>
+          <a:p>
+            <a:fld id="{F7021451-1387-4CA6-816F-3879F97B5CBC}" type="slidenum">
+              <a:rPr lang="en-US"/>
+              <a:t>14</a:t>
             </a:fld>
             <a:endParaRPr lang="en-US"/>
           </a:p>
@@ -1768,7 +1857,7 @@
           <a:p>
             <a:r>
               <a:rPr lang="en-US" dirty="0"/>
-              <a:t>Sebut sendiri bahwa 544/547 hampir pasti tinggi karena referensinya dikalibrasi di persentil 99,5 — kalau juri yang menemukannya, angka itu berbalik jadi senjata. Yang dijual adalah kontrasnya dengan 1/23, dan parity 23/23.</a:t>
+              <a:t>0:35. Ini kontribusi metodologis yang selama ini cuma catatan kaki. Baris 0,69 yang dijual: 52% jadi 4,8%. Lalu segera sebut baris 0,90 — 99% — supaya tidak terdengar seperti alat yang jadi tumpul.</a:t>
             </a:r>
             <a:endParaRPr lang="en-US" dirty="0"/>
           </a:p>
@@ -1856,7 +1945,7 @@
           <a:p>
             <a:r>
               <a:rPr lang="en-US" dirty="0"/>
-              <a:t>0:45. Ini bagian Impact yang paling kuat di seluruh deck — pelankan. Satu wawancara bukan pengukuran kapasitas, dan narasumber tidak melihat tabel ini; sebut keduanya. Sensitivitas 17% bukan bug, itu bentuk alatnya. Rule-in.</a:t>
+              <a:t>Sebut sendiri bahwa 544/547 hampir pasti tinggi karena referensinya dikalibrasi di persentil 99,5 — kalau juri yang menemukannya, angka itu berbalik jadi senjata. Yang dijual adalah kontrasnya dengan 1/23, dan parity 23/23.</a:t>
             </a:r>
             <a:endParaRPr lang="en-US" dirty="0"/>
           </a:p>
@@ -2597,7 +2686,7 @@
                 <a:ea typeface="Calibri" pitchFamily="34" charset="-122"/>
                 <a:cs typeface="Calibri" pitchFamily="34" charset="-120"/>
               </a:rPr>
-              <a:t>Lapis bobot · hasil negatif</a:t>
+              <a:t>Kenapa punya batas</a:t>
             </a:r>
             <a:endParaRPr lang="en-US" sz="1200" dirty="0"/>
           </a:p>
@@ -2639,22 +2728,1792 @@
                 <a:ea typeface="Cambria" pitchFamily="34" charset="-122"/>
                 <a:cs typeface="Cambria" pitchFamily="34" charset="-120"/>
               </a:rPr>
-              <a:t>Kami unduh data anak yang terbit, pasang bobotnya, lalu auditnya membunuhnya</a:t>
+              <a:t>Kami memilih titik kerja yang menemukan paling sedikit</a:t>
             </a:r>
             <a:endParaRPr lang="en-US" sz="3200" dirty="0"/>
           </a:p>
         </p:txBody>
       </p:sp>
-      <p:sp>
-        <p:nvSpPr>
-          <p:cNvPr id="6" name="Text 4"/>
-          <p:cNvSpPr/>
-          <p:nvPr/>
-        </p:nvSpPr>
-        <p:spPr>
-          <a:xfrm>
-            <a:off x="685800" y="2103120"/>
-            <a:ext cx="10424160" cy="548640"/>
+      <p:graphicFrame>
+        <p:nvGraphicFramePr>
+          <p:cNvPr id="11" name="Table 0"/>
+          <p:cNvGraphicFramePr>
+            <a:graphicFrameLocks noGrp="1"/>
+          </p:cNvGraphicFramePr>
+          <p:nvPr>
+            <p:extLst>
+              <p:ext uri="{D42A27DB-BD31-4B8C-83A1-F6EECF244321}">
+                <p14:modId xmlns:p14="http://schemas.microsoft.com/office/powerpoint/2010/main" val="1579011935"/>
+              </p:ext>
+            </p:extLst>
+          </p:nvPr>
+        </p:nvGraphicFramePr>
+        <p:xfrm>
+          <a:off x="685800" y="2194560"/>
+          <a:ext cx="10424160" cy="914400"/>
+        </p:xfrm>
+        <a:graphic>
+          <a:graphicData uri="http://schemas.openxmlformats.org/drawingml/2006/table">
+            <a:tbl>
+              <a:tblPr/>
+              <a:tblGrid>
+                <a:gridCol w="3657600"/>
+                <a:gridCol w="1371600"/>
+                <a:gridCol w="1371600"/>
+                <a:gridCol w="1920240"/>
+                <a:gridCol w="2103120"/>
+              </a:tblGrid>
+              <a:tr h="402336">
+                <a:tc>
+                  <a:txBody>
+                    <a:bodyPr/>
+                    <a:lstStyle/>
+                    <a:p>
+                      <a:pPr indent="0" marL="0">
+                        <a:buNone/>
+                      </a:pPr>
+                      <a:r>
+                        <a:rPr lang="en-US" sz="1300" b="1" dirty="0">
+                          <a:solidFill>
+                            <a:srgbClr val="14302B"/>
+                          </a:solidFill>
+                          <a:latin typeface="Calibri" pitchFamily="34" charset="0"/>
+                          <a:ea typeface="Calibri" pitchFamily="34" charset="-122"/>
+                          <a:cs typeface="Calibri" pitchFamily="34" charset="-120"/>
+                        </a:rPr>
+                        <a:t>Titik kerja</a:t>
+                      </a:r>
+                      <a:endParaRPr lang="en-US" sz="1300" dirty="0">
+                        <a:latin typeface="Calibri" charset="0"/>
+                        <a:ea typeface="Calibri" charset="0"/>
+                        <a:cs typeface="Calibri" charset="0"/>
+                      </a:endParaRPr>
+                    </a:p>
+                  </a:txBody>
+                  <a:tcPr marL="82296" marR="82296" marT="82296" marB="82296" anchor="ctr">
+                    <a:lnL w="12700" cap="flat" cmpd="sng" algn="ctr">
+                      <a:solidFill>
+                        <a:srgbClr val="DBE4E1"/>
+                      </a:solidFill>
+                      <a:prstDash val="solid"/>
+                      <a:round/>
+                      <a:headEnd type="none" w="med" len="med"/>
+                      <a:tailEnd type="none" w="med" len="med"/>
+                    </a:lnL>
+                    <a:lnR w="12700" cap="flat" cmpd="sng" algn="ctr">
+                      <a:solidFill>
+                        <a:srgbClr val="DBE4E1"/>
+                      </a:solidFill>
+                      <a:prstDash val="solid"/>
+                      <a:round/>
+                      <a:headEnd type="none" w="med" len="med"/>
+                      <a:tailEnd type="none" w="med" len="med"/>
+                    </a:lnR>
+                    <a:lnT w="12700" cap="flat" cmpd="sng" algn="ctr">
+                      <a:solidFill>
+                        <a:srgbClr val="DBE4E1"/>
+                      </a:solidFill>
+                      <a:prstDash val="solid"/>
+                      <a:round/>
+                      <a:headEnd type="none" w="med" len="med"/>
+                      <a:tailEnd type="none" w="med" len="med"/>
+                    </a:lnT>
+                    <a:lnB w="12700" cap="flat" cmpd="sng" algn="ctr">
+                      <a:solidFill>
+                        <a:srgbClr val="DBE4E1"/>
+                      </a:solidFill>
+                      <a:prstDash val="solid"/>
+                      <a:round/>
+                      <a:headEnd type="none" w="med" len="med"/>
+                      <a:tailEnd type="none" w="med" len="med"/>
+                    </a:lnB>
+                    <a:solidFill>
+                      <a:srgbClr val="FFFFFF"/>
+                    </a:solidFill>
+                  </a:tcPr>
+                </a:tc>
+                <a:tc>
+                  <a:txBody>
+                    <a:bodyPr/>
+                    <a:lstStyle/>
+                    <a:p>
+                      <a:pPr indent="0" marL="0">
+                        <a:buNone/>
+                      </a:pPr>
+                      <a:r>
+                        <a:rPr lang="en-US" sz="1300" b="1" dirty="0">
+                          <a:solidFill>
+                            <a:srgbClr val="14302B"/>
+                          </a:solidFill>
+                          <a:latin typeface="Calibri" pitchFamily="34" charset="0"/>
+                          <a:ea typeface="Calibri" pitchFamily="34" charset="-122"/>
+                          <a:cs typeface="Calibri" pitchFamily="34" charset="-120"/>
+                        </a:rPr>
+                        <a:t>Sens</a:t>
+                      </a:r>
+                      <a:endParaRPr lang="en-US" sz="1300" dirty="0">
+                        <a:latin typeface="Calibri" charset="0"/>
+                        <a:ea typeface="Calibri" charset="0"/>
+                        <a:cs typeface="Calibri" charset="0"/>
+                      </a:endParaRPr>
+                    </a:p>
+                  </a:txBody>
+                  <a:tcPr marL="82296" marR="82296" marT="82296" marB="82296" anchor="ctr">
+                    <a:lnL w="12700" cap="flat" cmpd="sng" algn="ctr">
+                      <a:solidFill>
+                        <a:srgbClr val="DBE4E1"/>
+                      </a:solidFill>
+                      <a:prstDash val="solid"/>
+                      <a:round/>
+                      <a:headEnd type="none" w="med" len="med"/>
+                      <a:tailEnd type="none" w="med" len="med"/>
+                    </a:lnL>
+                    <a:lnR w="12700" cap="flat" cmpd="sng" algn="ctr">
+                      <a:solidFill>
+                        <a:srgbClr val="DBE4E1"/>
+                      </a:solidFill>
+                      <a:prstDash val="solid"/>
+                      <a:round/>
+                      <a:headEnd type="none" w="med" len="med"/>
+                      <a:tailEnd type="none" w="med" len="med"/>
+                    </a:lnR>
+                    <a:lnT w="12700" cap="flat" cmpd="sng" algn="ctr">
+                      <a:solidFill>
+                        <a:srgbClr val="DBE4E1"/>
+                      </a:solidFill>
+                      <a:prstDash val="solid"/>
+                      <a:round/>
+                      <a:headEnd type="none" w="med" len="med"/>
+                      <a:tailEnd type="none" w="med" len="med"/>
+                    </a:lnT>
+                    <a:lnB w="12700" cap="flat" cmpd="sng" algn="ctr">
+                      <a:solidFill>
+                        <a:srgbClr val="DBE4E1"/>
+                      </a:solidFill>
+                      <a:prstDash val="solid"/>
+                      <a:round/>
+                      <a:headEnd type="none" w="med" len="med"/>
+                      <a:tailEnd type="none" w="med" len="med"/>
+                    </a:lnB>
+                    <a:solidFill>
+                      <a:srgbClr val="FFFFFF"/>
+                    </a:solidFill>
+                  </a:tcPr>
+                </a:tc>
+                <a:tc>
+                  <a:txBody>
+                    <a:bodyPr/>
+                    <a:lstStyle/>
+                    <a:p>
+                      <a:pPr indent="0" marL="0">
+                        <a:buNone/>
+                      </a:pPr>
+                      <a:r>
+                        <a:rPr lang="en-US" sz="1300" b="1" dirty="0">
+                          <a:solidFill>
+                            <a:srgbClr val="14302B"/>
+                          </a:solidFill>
+                          <a:latin typeface="Calibri" pitchFamily="34" charset="0"/>
+                          <a:ea typeface="Calibri" pitchFamily="34" charset="-122"/>
+                          <a:cs typeface="Calibri" pitchFamily="34" charset="-120"/>
+                        </a:rPr>
+                        <a:t>Spec</a:t>
+                      </a:r>
+                      <a:endParaRPr lang="en-US" sz="1300" dirty="0">
+                        <a:latin typeface="Calibri" charset="0"/>
+                        <a:ea typeface="Calibri" charset="0"/>
+                        <a:cs typeface="Calibri" charset="0"/>
+                      </a:endParaRPr>
+                    </a:p>
+                  </a:txBody>
+                  <a:tcPr marL="82296" marR="82296" marT="82296" marB="82296" anchor="ctr">
+                    <a:lnL w="12700" cap="flat" cmpd="sng" algn="ctr">
+                      <a:solidFill>
+                        <a:srgbClr val="DBE4E1"/>
+                      </a:solidFill>
+                      <a:prstDash val="solid"/>
+                      <a:round/>
+                      <a:headEnd type="none" w="med" len="med"/>
+                      <a:tailEnd type="none" w="med" len="med"/>
+                    </a:lnL>
+                    <a:lnR w="12700" cap="flat" cmpd="sng" algn="ctr">
+                      <a:solidFill>
+                        <a:srgbClr val="DBE4E1"/>
+                      </a:solidFill>
+                      <a:prstDash val="solid"/>
+                      <a:round/>
+                      <a:headEnd type="none" w="med" len="med"/>
+                      <a:tailEnd type="none" w="med" len="med"/>
+                    </a:lnR>
+                    <a:lnT w="12700" cap="flat" cmpd="sng" algn="ctr">
+                      <a:solidFill>
+                        <a:srgbClr val="DBE4E1"/>
+                      </a:solidFill>
+                      <a:prstDash val="solid"/>
+                      <a:round/>
+                      <a:headEnd type="none" w="med" len="med"/>
+                      <a:tailEnd type="none" w="med" len="med"/>
+                    </a:lnT>
+                    <a:lnB w="12700" cap="flat" cmpd="sng" algn="ctr">
+                      <a:solidFill>
+                        <a:srgbClr val="DBE4E1"/>
+                      </a:solidFill>
+                      <a:prstDash val="solid"/>
+                      <a:round/>
+                      <a:headEnd type="none" w="med" len="med"/>
+                      <a:tailEnd type="none" w="med" len="med"/>
+                    </a:lnB>
+                    <a:solidFill>
+                      <a:srgbClr val="FFFFFF"/>
+                    </a:solidFill>
+                  </a:tcPr>
+                </a:tc>
+                <a:tc>
+                  <a:txBody>
+                    <a:bodyPr/>
+                    <a:lstStyle/>
+                    <a:p>
+                      <a:pPr indent="0" marL="0">
+                        <a:buNone/>
+                      </a:pPr>
+                      <a:r>
+                        <a:rPr lang="en-US" sz="1300" b="1" dirty="0">
+                          <a:solidFill>
+                            <a:srgbClr val="14302B"/>
+                          </a:solidFill>
+                          <a:latin typeface="Calibri" pitchFamily="34" charset="0"/>
+                          <a:ea typeface="Calibri" pitchFamily="34" charset="-122"/>
+                          <a:cs typeface="Calibri" pitchFamily="34" charset="-120"/>
+                        </a:rPr>
+                        <a:t>Laju rujukan</a:t>
+                      </a:r>
+                      <a:endParaRPr lang="en-US" sz="1300" dirty="0">
+                        <a:latin typeface="Calibri" charset="0"/>
+                        <a:ea typeface="Calibri" charset="0"/>
+                        <a:cs typeface="Calibri" charset="0"/>
+                      </a:endParaRPr>
+                    </a:p>
+                  </a:txBody>
+                  <a:tcPr marL="82296" marR="82296" marT="82296" marB="82296" anchor="ctr">
+                    <a:lnL w="12700" cap="flat" cmpd="sng" algn="ctr">
+                      <a:solidFill>
+                        <a:srgbClr val="DBE4E1"/>
+                      </a:solidFill>
+                      <a:prstDash val="solid"/>
+                      <a:round/>
+                      <a:headEnd type="none" w="med" len="med"/>
+                      <a:tailEnd type="none" w="med" len="med"/>
+                    </a:lnL>
+                    <a:lnR w="12700" cap="flat" cmpd="sng" algn="ctr">
+                      <a:solidFill>
+                        <a:srgbClr val="DBE4E1"/>
+                      </a:solidFill>
+                      <a:prstDash val="solid"/>
+                      <a:round/>
+                      <a:headEnd type="none" w="med" len="med"/>
+                      <a:tailEnd type="none" w="med" len="med"/>
+                    </a:lnR>
+                    <a:lnT w="12700" cap="flat" cmpd="sng" algn="ctr">
+                      <a:solidFill>
+                        <a:srgbClr val="DBE4E1"/>
+                      </a:solidFill>
+                      <a:prstDash val="solid"/>
+                      <a:round/>
+                      <a:headEnd type="none" w="med" len="med"/>
+                      <a:tailEnd type="none" w="med" len="med"/>
+                    </a:lnT>
+                    <a:lnB w="12700" cap="flat" cmpd="sng" algn="ctr">
+                      <a:solidFill>
+                        <a:srgbClr val="DBE4E1"/>
+                      </a:solidFill>
+                      <a:prstDash val="solid"/>
+                      <a:round/>
+                      <a:headEnd type="none" w="med" len="med"/>
+                      <a:tailEnd type="none" w="med" len="med"/>
+                    </a:lnB>
+                    <a:solidFill>
+                      <a:srgbClr val="FFFFFF"/>
+                    </a:solidFill>
+                  </a:tcPr>
+                </a:tc>
+                <a:tc>
+                  <a:txBody>
+                    <a:bodyPr/>
+                    <a:lstStyle/>
+                    <a:p>
+                      <a:pPr indent="0" marL="0">
+                        <a:buNone/>
+                      </a:pPr>
+                      <a:r>
+                        <a:rPr lang="en-US" sz="1300" b="1" dirty="0">
+                          <a:solidFill>
+                            <a:srgbClr val="14302B"/>
+                          </a:solidFill>
+                          <a:latin typeface="Calibri" pitchFamily="34" charset="0"/>
+                          <a:ea typeface="Calibri" pitchFamily="34" charset="-122"/>
+                          <a:cs typeface="Calibri" pitchFamily="34" charset="-120"/>
+                        </a:rPr>
+                        <a:t>Rujukan per 1 kasus</a:t>
+                      </a:r>
+                      <a:endParaRPr lang="en-US" sz="1300" dirty="0">
+                        <a:latin typeface="Calibri" charset="0"/>
+                        <a:ea typeface="Calibri" charset="0"/>
+                        <a:cs typeface="Calibri" charset="0"/>
+                      </a:endParaRPr>
+                    </a:p>
+                  </a:txBody>
+                  <a:tcPr marL="82296" marR="82296" marT="82296" marB="82296" anchor="ctr">
+                    <a:lnL w="12700" cap="flat" cmpd="sng" algn="ctr">
+                      <a:solidFill>
+                        <a:srgbClr val="DBE4E1"/>
+                      </a:solidFill>
+                      <a:prstDash val="solid"/>
+                      <a:round/>
+                      <a:headEnd type="none" w="med" len="med"/>
+                      <a:tailEnd type="none" w="med" len="med"/>
+                    </a:lnL>
+                    <a:lnR w="12700" cap="flat" cmpd="sng" algn="ctr">
+                      <a:solidFill>
+                        <a:srgbClr val="DBE4E1"/>
+                      </a:solidFill>
+                      <a:prstDash val="solid"/>
+                      <a:round/>
+                      <a:headEnd type="none" w="med" len="med"/>
+                      <a:tailEnd type="none" w="med" len="med"/>
+                    </a:lnR>
+                    <a:lnT w="12700" cap="flat" cmpd="sng" algn="ctr">
+                      <a:solidFill>
+                        <a:srgbClr val="DBE4E1"/>
+                      </a:solidFill>
+                      <a:prstDash val="solid"/>
+                      <a:round/>
+                      <a:headEnd type="none" w="med" len="med"/>
+                      <a:tailEnd type="none" w="med" len="med"/>
+                    </a:lnT>
+                    <a:lnB w="12700" cap="flat" cmpd="sng" algn="ctr">
+                      <a:solidFill>
+                        <a:srgbClr val="DBE4E1"/>
+                      </a:solidFill>
+                      <a:prstDash val="solid"/>
+                      <a:round/>
+                      <a:headEnd type="none" w="med" len="med"/>
+                      <a:tailEnd type="none" w="med" len="med"/>
+                    </a:lnB>
+                    <a:solidFill>
+                      <a:srgbClr val="FFFFFF"/>
+                    </a:solidFill>
+                  </a:tcPr>
+                </a:tc>
+              </a:tr>
+              <a:tr h="402336">
+                <a:tc>
+                  <a:txBody>
+                    <a:bodyPr/>
+                    <a:lstStyle/>
+                    <a:p>
+                      <a:pPr indent="0" marL="0">
+                        <a:buNone/>
+                      </a:pPr>
+                      <a:r>
+                        <a:rPr lang="en-US" sz="1300" dirty="0">
+                          <a:solidFill>
+                            <a:srgbClr val="14302B"/>
+                          </a:solidFill>
+                          <a:latin typeface="Calibri" pitchFamily="34" charset="0"/>
+                          <a:ea typeface="Calibri" pitchFamily="34" charset="-122"/>
+                          <a:cs typeface="Calibri" pitchFamily="34" charset="-120"/>
+                        </a:rPr>
+                        <a:t>Regresi logistik, sensitivitas 0,9</a:t>
+                      </a:r>
+                      <a:endParaRPr lang="en-US" sz="1300" dirty="0">
+                        <a:latin typeface="Calibri" charset="0"/>
+                        <a:ea typeface="Calibri" charset="0"/>
+                        <a:cs typeface="Calibri" charset="0"/>
+                      </a:endParaRPr>
+                    </a:p>
+                  </a:txBody>
+                  <a:tcPr marL="82296" marR="82296" marT="82296" marB="82296" anchor="ctr">
+                    <a:lnL w="12700" cap="flat" cmpd="sng" algn="ctr">
+                      <a:solidFill>
+                        <a:srgbClr val="DBE4E1"/>
+                      </a:solidFill>
+                      <a:prstDash val="solid"/>
+                      <a:round/>
+                      <a:headEnd type="none" w="med" len="med"/>
+                      <a:tailEnd type="none" w="med" len="med"/>
+                    </a:lnL>
+                    <a:lnR w="12700" cap="flat" cmpd="sng" algn="ctr">
+                      <a:solidFill>
+                        <a:srgbClr val="DBE4E1"/>
+                      </a:solidFill>
+                      <a:prstDash val="solid"/>
+                      <a:round/>
+                      <a:headEnd type="none" w="med" len="med"/>
+                      <a:tailEnd type="none" w="med" len="med"/>
+                    </a:lnR>
+                    <a:lnT w="12700" cap="flat" cmpd="sng" algn="ctr">
+                      <a:solidFill>
+                        <a:srgbClr val="DBE4E1"/>
+                      </a:solidFill>
+                      <a:prstDash val="solid"/>
+                      <a:round/>
+                      <a:headEnd type="none" w="med" len="med"/>
+                      <a:tailEnd type="none" w="med" len="med"/>
+                    </a:lnT>
+                    <a:lnB w="12700" cap="flat" cmpd="sng" algn="ctr">
+                      <a:solidFill>
+                        <a:srgbClr val="DBE4E1"/>
+                      </a:solidFill>
+                      <a:prstDash val="solid"/>
+                      <a:round/>
+                      <a:headEnd type="none" w="med" len="med"/>
+                      <a:tailEnd type="none" w="med" len="med"/>
+                    </a:lnB>
+                    <a:solidFill>
+                      <a:srgbClr val="FFFFFF"/>
+                    </a:solidFill>
+                  </a:tcPr>
+                </a:tc>
+                <a:tc>
+                  <a:txBody>
+                    <a:bodyPr/>
+                    <a:lstStyle/>
+                    <a:p>
+                      <a:pPr indent="0" marL="0">
+                        <a:buNone/>
+                      </a:pPr>
+                      <a:r>
+                        <a:rPr lang="en-US" sz="1300" dirty="0">
+                          <a:solidFill>
+                            <a:srgbClr val="14302B"/>
+                          </a:solidFill>
+                          <a:latin typeface="Calibri" pitchFamily="34" charset="0"/>
+                          <a:ea typeface="Calibri" pitchFamily="34" charset="-122"/>
+                          <a:cs typeface="Calibri" pitchFamily="34" charset="-120"/>
+                        </a:rPr>
+                        <a:t>0,923</a:t>
+                      </a:r>
+                      <a:endParaRPr lang="en-US" sz="1300" dirty="0">
+                        <a:latin typeface="Calibri" charset="0"/>
+                        <a:ea typeface="Calibri" charset="0"/>
+                        <a:cs typeface="Calibri" charset="0"/>
+                      </a:endParaRPr>
+                    </a:p>
+                  </a:txBody>
+                  <a:tcPr marL="82296" marR="82296" marT="82296" marB="82296" anchor="ctr">
+                    <a:lnL w="12700" cap="flat" cmpd="sng" algn="ctr">
+                      <a:solidFill>
+                        <a:srgbClr val="DBE4E1"/>
+                      </a:solidFill>
+                      <a:prstDash val="solid"/>
+                      <a:round/>
+                      <a:headEnd type="none" w="med" len="med"/>
+                      <a:tailEnd type="none" w="med" len="med"/>
+                    </a:lnL>
+                    <a:lnR w="12700" cap="flat" cmpd="sng" algn="ctr">
+                      <a:solidFill>
+                        <a:srgbClr val="DBE4E1"/>
+                      </a:solidFill>
+                      <a:prstDash val="solid"/>
+                      <a:round/>
+                      <a:headEnd type="none" w="med" len="med"/>
+                      <a:tailEnd type="none" w="med" len="med"/>
+                    </a:lnR>
+                    <a:lnT w="12700" cap="flat" cmpd="sng" algn="ctr">
+                      <a:solidFill>
+                        <a:srgbClr val="DBE4E1"/>
+                      </a:solidFill>
+                      <a:prstDash val="solid"/>
+                      <a:round/>
+                      <a:headEnd type="none" w="med" len="med"/>
+                      <a:tailEnd type="none" w="med" len="med"/>
+                    </a:lnT>
+                    <a:lnB w="12700" cap="flat" cmpd="sng" algn="ctr">
+                      <a:solidFill>
+                        <a:srgbClr val="DBE4E1"/>
+                      </a:solidFill>
+                      <a:prstDash val="solid"/>
+                      <a:round/>
+                      <a:headEnd type="none" w="med" len="med"/>
+                      <a:tailEnd type="none" w="med" len="med"/>
+                    </a:lnB>
+                    <a:solidFill>
+                      <a:srgbClr val="FFFFFF"/>
+                    </a:solidFill>
+                  </a:tcPr>
+                </a:tc>
+                <a:tc>
+                  <a:txBody>
+                    <a:bodyPr/>
+                    <a:lstStyle/>
+                    <a:p>
+                      <a:pPr indent="0" marL="0">
+                        <a:buNone/>
+                      </a:pPr>
+                      <a:r>
+                        <a:rPr lang="en-US" sz="1300" dirty="0">
+                          <a:solidFill>
+                            <a:srgbClr val="14302B"/>
+                          </a:solidFill>
+                          <a:latin typeface="Calibri" pitchFamily="34" charset="0"/>
+                          <a:ea typeface="Calibri" pitchFamily="34" charset="-122"/>
+                          <a:cs typeface="Calibri" pitchFamily="34" charset="-120"/>
+                        </a:rPr>
+                        <a:t>0,179</a:t>
+                      </a:r>
+                      <a:endParaRPr lang="en-US" sz="1300" dirty="0">
+                        <a:latin typeface="Calibri" charset="0"/>
+                        <a:ea typeface="Calibri" charset="0"/>
+                        <a:cs typeface="Calibri" charset="0"/>
+                      </a:endParaRPr>
+                    </a:p>
+                  </a:txBody>
+                  <a:tcPr marL="82296" marR="82296" marT="82296" marB="82296" anchor="ctr">
+                    <a:lnL w="12700" cap="flat" cmpd="sng" algn="ctr">
+                      <a:solidFill>
+                        <a:srgbClr val="DBE4E1"/>
+                      </a:solidFill>
+                      <a:prstDash val="solid"/>
+                      <a:round/>
+                      <a:headEnd type="none" w="med" len="med"/>
+                      <a:tailEnd type="none" w="med" len="med"/>
+                    </a:lnL>
+                    <a:lnR w="12700" cap="flat" cmpd="sng" algn="ctr">
+                      <a:solidFill>
+                        <a:srgbClr val="DBE4E1"/>
+                      </a:solidFill>
+                      <a:prstDash val="solid"/>
+                      <a:round/>
+                      <a:headEnd type="none" w="med" len="med"/>
+                      <a:tailEnd type="none" w="med" len="med"/>
+                    </a:lnR>
+                    <a:lnT w="12700" cap="flat" cmpd="sng" algn="ctr">
+                      <a:solidFill>
+                        <a:srgbClr val="DBE4E1"/>
+                      </a:solidFill>
+                      <a:prstDash val="solid"/>
+                      <a:round/>
+                      <a:headEnd type="none" w="med" len="med"/>
+                      <a:tailEnd type="none" w="med" len="med"/>
+                    </a:lnT>
+                    <a:lnB w="12700" cap="flat" cmpd="sng" algn="ctr">
+                      <a:solidFill>
+                        <a:srgbClr val="DBE4E1"/>
+                      </a:solidFill>
+                      <a:prstDash val="solid"/>
+                      <a:round/>
+                      <a:headEnd type="none" w="med" len="med"/>
+                      <a:tailEnd type="none" w="med" len="med"/>
+                    </a:lnB>
+                    <a:solidFill>
+                      <a:srgbClr val="FFFFFF"/>
+                    </a:solidFill>
+                  </a:tcPr>
+                </a:tc>
+                <a:tc>
+                  <a:txBody>
+                    <a:bodyPr/>
+                    <a:lstStyle/>
+                    <a:p>
+                      <a:pPr indent="0" marL="0">
+                        <a:buNone/>
+                      </a:pPr>
+                      <a:r>
+                        <a:rPr lang="en-US" sz="1300" dirty="0">
+                          <a:solidFill>
+                            <a:srgbClr val="14302B"/>
+                          </a:solidFill>
+                          <a:latin typeface="Calibri" pitchFamily="34" charset="0"/>
+                          <a:ea typeface="Calibri" pitchFamily="34" charset="-122"/>
+                          <a:cs typeface="Calibri" pitchFamily="34" charset="-120"/>
+                        </a:rPr>
+                        <a:t>82,2%</a:t>
+                      </a:r>
+                      <a:endParaRPr lang="en-US" sz="1300" dirty="0">
+                        <a:latin typeface="Calibri" charset="0"/>
+                        <a:ea typeface="Calibri" charset="0"/>
+                        <a:cs typeface="Calibri" charset="0"/>
+                      </a:endParaRPr>
+                    </a:p>
+                  </a:txBody>
+                  <a:tcPr marL="82296" marR="82296" marT="82296" marB="82296" anchor="ctr">
+                    <a:lnL w="12700" cap="flat" cmpd="sng" algn="ctr">
+                      <a:solidFill>
+                        <a:srgbClr val="DBE4E1"/>
+                      </a:solidFill>
+                      <a:prstDash val="solid"/>
+                      <a:round/>
+                      <a:headEnd type="none" w="med" len="med"/>
+                      <a:tailEnd type="none" w="med" len="med"/>
+                    </a:lnL>
+                    <a:lnR w="12700" cap="flat" cmpd="sng" algn="ctr">
+                      <a:solidFill>
+                        <a:srgbClr val="DBE4E1"/>
+                      </a:solidFill>
+                      <a:prstDash val="solid"/>
+                      <a:round/>
+                      <a:headEnd type="none" w="med" len="med"/>
+                      <a:tailEnd type="none" w="med" len="med"/>
+                    </a:lnR>
+                    <a:lnT w="12700" cap="flat" cmpd="sng" algn="ctr">
+                      <a:solidFill>
+                        <a:srgbClr val="DBE4E1"/>
+                      </a:solidFill>
+                      <a:prstDash val="solid"/>
+                      <a:round/>
+                      <a:headEnd type="none" w="med" len="med"/>
+                      <a:tailEnd type="none" w="med" len="med"/>
+                    </a:lnT>
+                    <a:lnB w="12700" cap="flat" cmpd="sng" algn="ctr">
+                      <a:solidFill>
+                        <a:srgbClr val="DBE4E1"/>
+                      </a:solidFill>
+                      <a:prstDash val="solid"/>
+                      <a:round/>
+                      <a:headEnd type="none" w="med" len="med"/>
+                      <a:tailEnd type="none" w="med" len="med"/>
+                    </a:lnB>
+                    <a:solidFill>
+                      <a:srgbClr val="FFFFFF"/>
+                    </a:solidFill>
+                  </a:tcPr>
+                </a:tc>
+                <a:tc>
+                  <a:txBody>
+                    <a:bodyPr/>
+                    <a:lstStyle/>
+                    <a:p>
+                      <a:pPr indent="0" marL="0">
+                        <a:buNone/>
+                      </a:pPr>
+                      <a:r>
+                        <a:rPr lang="en-US" sz="1300" dirty="0">
+                          <a:solidFill>
+                            <a:srgbClr val="14302B"/>
+                          </a:solidFill>
+                          <a:latin typeface="Calibri" pitchFamily="34" charset="0"/>
+                          <a:ea typeface="Calibri" pitchFamily="34" charset="-122"/>
+                          <a:cs typeface="Calibri" pitchFamily="34" charset="-120"/>
+                        </a:rPr>
+                        <a:t>89,1</a:t>
+                      </a:r>
+                      <a:endParaRPr lang="en-US" sz="1300" dirty="0">
+                        <a:latin typeface="Calibri" charset="0"/>
+                        <a:ea typeface="Calibri" charset="0"/>
+                        <a:cs typeface="Calibri" charset="0"/>
+                      </a:endParaRPr>
+                    </a:p>
+                  </a:txBody>
+                  <a:tcPr marL="82296" marR="82296" marT="82296" marB="82296" anchor="ctr">
+                    <a:lnL w="12700" cap="flat" cmpd="sng" algn="ctr">
+                      <a:solidFill>
+                        <a:srgbClr val="DBE4E1"/>
+                      </a:solidFill>
+                      <a:prstDash val="solid"/>
+                      <a:round/>
+                      <a:headEnd type="none" w="med" len="med"/>
+                      <a:tailEnd type="none" w="med" len="med"/>
+                    </a:lnL>
+                    <a:lnR w="12700" cap="flat" cmpd="sng" algn="ctr">
+                      <a:solidFill>
+                        <a:srgbClr val="DBE4E1"/>
+                      </a:solidFill>
+                      <a:prstDash val="solid"/>
+                      <a:round/>
+                      <a:headEnd type="none" w="med" len="med"/>
+                      <a:tailEnd type="none" w="med" len="med"/>
+                    </a:lnR>
+                    <a:lnT w="12700" cap="flat" cmpd="sng" algn="ctr">
+                      <a:solidFill>
+                        <a:srgbClr val="DBE4E1"/>
+                      </a:solidFill>
+                      <a:prstDash val="solid"/>
+                      <a:round/>
+                      <a:headEnd type="none" w="med" len="med"/>
+                      <a:tailEnd type="none" w="med" len="med"/>
+                    </a:lnT>
+                    <a:lnB w="12700" cap="flat" cmpd="sng" algn="ctr">
+                      <a:solidFill>
+                        <a:srgbClr val="DBE4E1"/>
+                      </a:solidFill>
+                      <a:prstDash val="solid"/>
+                      <a:round/>
+                      <a:headEnd type="none" w="med" len="med"/>
+                      <a:tailEnd type="none" w="med" len="med"/>
+                    </a:lnB>
+                    <a:solidFill>
+                      <a:srgbClr val="FFFFFF"/>
+                    </a:solidFill>
+                  </a:tcPr>
+                </a:tc>
+              </a:tr>
+              <a:tr h="402336">
+                <a:tc>
+                  <a:txBody>
+                    <a:bodyPr/>
+                    <a:lstStyle/>
+                    <a:p>
+                      <a:pPr indent="0" marL="0">
+                        <a:buNone/>
+                      </a:pPr>
+                      <a:r>
+                        <a:rPr lang="en-US" sz="1300" dirty="0">
+                          <a:solidFill>
+                            <a:srgbClr val="14302B"/>
+                          </a:solidFill>
+                          <a:latin typeface="Calibri" pitchFamily="34" charset="0"/>
+                          <a:ea typeface="Calibri" pitchFamily="34" charset="-122"/>
+                          <a:cs typeface="Calibri" pitchFamily="34" charset="-120"/>
+                        </a:rPr>
+                        <a:t>Regresi logistik, Youden</a:t>
+                      </a:r>
+                      <a:endParaRPr lang="en-US" sz="1300" dirty="0">
+                        <a:latin typeface="Calibri" charset="0"/>
+                        <a:ea typeface="Calibri" charset="0"/>
+                        <a:cs typeface="Calibri" charset="0"/>
+                      </a:endParaRPr>
+                    </a:p>
+                  </a:txBody>
+                  <a:tcPr marL="82296" marR="82296" marT="82296" marB="82296" anchor="ctr">
+                    <a:lnL w="12700" cap="flat" cmpd="sng" algn="ctr">
+                      <a:solidFill>
+                        <a:srgbClr val="DBE4E1"/>
+                      </a:solidFill>
+                      <a:prstDash val="solid"/>
+                      <a:round/>
+                      <a:headEnd type="none" w="med" len="med"/>
+                      <a:tailEnd type="none" w="med" len="med"/>
+                    </a:lnL>
+                    <a:lnR w="12700" cap="flat" cmpd="sng" algn="ctr">
+                      <a:solidFill>
+                        <a:srgbClr val="DBE4E1"/>
+                      </a:solidFill>
+                      <a:prstDash val="solid"/>
+                      <a:round/>
+                      <a:headEnd type="none" w="med" len="med"/>
+                      <a:tailEnd type="none" w="med" len="med"/>
+                    </a:lnR>
+                    <a:lnT w="12700" cap="flat" cmpd="sng" algn="ctr">
+                      <a:solidFill>
+                        <a:srgbClr val="DBE4E1"/>
+                      </a:solidFill>
+                      <a:prstDash val="solid"/>
+                      <a:round/>
+                      <a:headEnd type="none" w="med" len="med"/>
+                      <a:tailEnd type="none" w="med" len="med"/>
+                    </a:lnT>
+                    <a:lnB w="12700" cap="flat" cmpd="sng" algn="ctr">
+                      <a:solidFill>
+                        <a:srgbClr val="DBE4E1"/>
+                      </a:solidFill>
+                      <a:prstDash val="solid"/>
+                      <a:round/>
+                      <a:headEnd type="none" w="med" len="med"/>
+                      <a:tailEnd type="none" w="med" len="med"/>
+                    </a:lnB>
+                    <a:solidFill>
+                      <a:srgbClr val="FFFFFF"/>
+                    </a:solidFill>
+                  </a:tcPr>
+                </a:tc>
+                <a:tc>
+                  <a:txBody>
+                    <a:bodyPr/>
+                    <a:lstStyle/>
+                    <a:p>
+                      <a:pPr indent="0" marL="0">
+                        <a:buNone/>
+                      </a:pPr>
+                      <a:r>
+                        <a:rPr lang="en-US" sz="1300" dirty="0">
+                          <a:solidFill>
+                            <a:srgbClr val="14302B"/>
+                          </a:solidFill>
+                          <a:latin typeface="Calibri" pitchFamily="34" charset="0"/>
+                          <a:ea typeface="Calibri" pitchFamily="34" charset="-122"/>
+                          <a:cs typeface="Calibri" pitchFamily="34" charset="-120"/>
+                        </a:rPr>
+                        <a:t>0,731</a:t>
+                      </a:r>
+                      <a:endParaRPr lang="en-US" sz="1300" dirty="0">
+                        <a:latin typeface="Calibri" charset="0"/>
+                        <a:ea typeface="Calibri" charset="0"/>
+                        <a:cs typeface="Calibri" charset="0"/>
+                      </a:endParaRPr>
+                    </a:p>
+                  </a:txBody>
+                  <a:tcPr marL="82296" marR="82296" marT="82296" marB="82296" anchor="ctr">
+                    <a:lnL w="12700" cap="flat" cmpd="sng" algn="ctr">
+                      <a:solidFill>
+                        <a:srgbClr val="DBE4E1"/>
+                      </a:solidFill>
+                      <a:prstDash val="solid"/>
+                      <a:round/>
+                      <a:headEnd type="none" w="med" len="med"/>
+                      <a:tailEnd type="none" w="med" len="med"/>
+                    </a:lnL>
+                    <a:lnR w="12700" cap="flat" cmpd="sng" algn="ctr">
+                      <a:solidFill>
+                        <a:srgbClr val="DBE4E1"/>
+                      </a:solidFill>
+                      <a:prstDash val="solid"/>
+                      <a:round/>
+                      <a:headEnd type="none" w="med" len="med"/>
+                      <a:tailEnd type="none" w="med" len="med"/>
+                    </a:lnR>
+                    <a:lnT w="12700" cap="flat" cmpd="sng" algn="ctr">
+                      <a:solidFill>
+                        <a:srgbClr val="DBE4E1"/>
+                      </a:solidFill>
+                      <a:prstDash val="solid"/>
+                      <a:round/>
+                      <a:headEnd type="none" w="med" len="med"/>
+                      <a:tailEnd type="none" w="med" len="med"/>
+                    </a:lnT>
+                    <a:lnB w="12700" cap="flat" cmpd="sng" algn="ctr">
+                      <a:solidFill>
+                        <a:srgbClr val="DBE4E1"/>
+                      </a:solidFill>
+                      <a:prstDash val="solid"/>
+                      <a:round/>
+                      <a:headEnd type="none" w="med" len="med"/>
+                      <a:tailEnd type="none" w="med" len="med"/>
+                    </a:lnB>
+                    <a:solidFill>
+                      <a:srgbClr val="FFFFFF"/>
+                    </a:solidFill>
+                  </a:tcPr>
+                </a:tc>
+                <a:tc>
+                  <a:txBody>
+                    <a:bodyPr/>
+                    <a:lstStyle/>
+                    <a:p>
+                      <a:pPr indent="0" marL="0">
+                        <a:buNone/>
+                      </a:pPr>
+                      <a:r>
+                        <a:rPr lang="en-US" sz="1300" dirty="0">
+                          <a:solidFill>
+                            <a:srgbClr val="14302B"/>
+                          </a:solidFill>
+                          <a:latin typeface="Calibri" pitchFamily="34" charset="0"/>
+                          <a:ea typeface="Calibri" pitchFamily="34" charset="-122"/>
+                          <a:cs typeface="Calibri" pitchFamily="34" charset="-120"/>
+                        </a:rPr>
+                        <a:t>0,821</a:t>
+                      </a:r>
+                      <a:endParaRPr lang="en-US" sz="1300" dirty="0">
+                        <a:latin typeface="Calibri" charset="0"/>
+                        <a:ea typeface="Calibri" charset="0"/>
+                        <a:cs typeface="Calibri" charset="0"/>
+                      </a:endParaRPr>
+                    </a:p>
+                  </a:txBody>
+                  <a:tcPr marL="82296" marR="82296" marT="82296" marB="82296" anchor="ctr">
+                    <a:lnL w="12700" cap="flat" cmpd="sng" algn="ctr">
+                      <a:solidFill>
+                        <a:srgbClr val="DBE4E1"/>
+                      </a:solidFill>
+                      <a:prstDash val="solid"/>
+                      <a:round/>
+                      <a:headEnd type="none" w="med" len="med"/>
+                      <a:tailEnd type="none" w="med" len="med"/>
+                    </a:lnL>
+                    <a:lnR w="12700" cap="flat" cmpd="sng" algn="ctr">
+                      <a:solidFill>
+                        <a:srgbClr val="DBE4E1"/>
+                      </a:solidFill>
+                      <a:prstDash val="solid"/>
+                      <a:round/>
+                      <a:headEnd type="none" w="med" len="med"/>
+                      <a:tailEnd type="none" w="med" len="med"/>
+                    </a:lnR>
+                    <a:lnT w="12700" cap="flat" cmpd="sng" algn="ctr">
+                      <a:solidFill>
+                        <a:srgbClr val="DBE4E1"/>
+                      </a:solidFill>
+                      <a:prstDash val="solid"/>
+                      <a:round/>
+                      <a:headEnd type="none" w="med" len="med"/>
+                      <a:tailEnd type="none" w="med" len="med"/>
+                    </a:lnT>
+                    <a:lnB w="12700" cap="flat" cmpd="sng" algn="ctr">
+                      <a:solidFill>
+                        <a:srgbClr val="DBE4E1"/>
+                      </a:solidFill>
+                      <a:prstDash val="solid"/>
+                      <a:round/>
+                      <a:headEnd type="none" w="med" len="med"/>
+                      <a:tailEnd type="none" w="med" len="med"/>
+                    </a:lnB>
+                    <a:solidFill>
+                      <a:srgbClr val="FFFFFF"/>
+                    </a:solidFill>
+                  </a:tcPr>
+                </a:tc>
+                <a:tc>
+                  <a:txBody>
+                    <a:bodyPr/>
+                    <a:lstStyle/>
+                    <a:p>
+                      <a:pPr indent="0" marL="0">
+                        <a:buNone/>
+                      </a:pPr>
+                      <a:r>
+                        <a:rPr lang="en-US" sz="1300" dirty="0">
+                          <a:solidFill>
+                            <a:srgbClr val="14302B"/>
+                          </a:solidFill>
+                          <a:latin typeface="Calibri" pitchFamily="34" charset="0"/>
+                          <a:ea typeface="Calibri" pitchFamily="34" charset="-122"/>
+                          <a:cs typeface="Calibri" pitchFamily="34" charset="-120"/>
+                        </a:rPr>
+                        <a:t>18,4%</a:t>
+                      </a:r>
+                      <a:endParaRPr lang="en-US" sz="1300" dirty="0">
+                        <a:latin typeface="Calibri" charset="0"/>
+                        <a:ea typeface="Calibri" charset="0"/>
+                        <a:cs typeface="Calibri" charset="0"/>
+                      </a:endParaRPr>
+                    </a:p>
+                  </a:txBody>
+                  <a:tcPr marL="82296" marR="82296" marT="82296" marB="82296" anchor="ctr">
+                    <a:lnL w="12700" cap="flat" cmpd="sng" algn="ctr">
+                      <a:solidFill>
+                        <a:srgbClr val="DBE4E1"/>
+                      </a:solidFill>
+                      <a:prstDash val="solid"/>
+                      <a:round/>
+                      <a:headEnd type="none" w="med" len="med"/>
+                      <a:tailEnd type="none" w="med" len="med"/>
+                    </a:lnL>
+                    <a:lnR w="12700" cap="flat" cmpd="sng" algn="ctr">
+                      <a:solidFill>
+                        <a:srgbClr val="DBE4E1"/>
+                      </a:solidFill>
+                      <a:prstDash val="solid"/>
+                      <a:round/>
+                      <a:headEnd type="none" w="med" len="med"/>
+                      <a:tailEnd type="none" w="med" len="med"/>
+                    </a:lnR>
+                    <a:lnT w="12700" cap="flat" cmpd="sng" algn="ctr">
+                      <a:solidFill>
+                        <a:srgbClr val="DBE4E1"/>
+                      </a:solidFill>
+                      <a:prstDash val="solid"/>
+                      <a:round/>
+                      <a:headEnd type="none" w="med" len="med"/>
+                      <a:tailEnd type="none" w="med" len="med"/>
+                    </a:lnT>
+                    <a:lnB w="12700" cap="flat" cmpd="sng" algn="ctr">
+                      <a:solidFill>
+                        <a:srgbClr val="DBE4E1"/>
+                      </a:solidFill>
+                      <a:prstDash val="solid"/>
+                      <a:round/>
+                      <a:headEnd type="none" w="med" len="med"/>
+                      <a:tailEnd type="none" w="med" len="med"/>
+                    </a:lnB>
+                    <a:solidFill>
+                      <a:srgbClr val="FFFFFF"/>
+                    </a:solidFill>
+                  </a:tcPr>
+                </a:tc>
+                <a:tc>
+                  <a:txBody>
+                    <a:bodyPr/>
+                    <a:lstStyle/>
+                    <a:p>
+                      <a:pPr indent="0" marL="0">
+                        <a:buNone/>
+                      </a:pPr>
+                      <a:r>
+                        <a:rPr lang="en-US" sz="1300" dirty="0">
+                          <a:solidFill>
+                            <a:srgbClr val="14302B"/>
+                          </a:solidFill>
+                          <a:latin typeface="Calibri" pitchFamily="34" charset="0"/>
+                          <a:ea typeface="Calibri" pitchFamily="34" charset="-122"/>
+                          <a:cs typeface="Calibri" pitchFamily="34" charset="-120"/>
+                        </a:rPr>
+                        <a:t>25,2</a:t>
+                      </a:r>
+                      <a:endParaRPr lang="en-US" sz="1300" dirty="0">
+                        <a:latin typeface="Calibri" charset="0"/>
+                        <a:ea typeface="Calibri" charset="0"/>
+                        <a:cs typeface="Calibri" charset="0"/>
+                      </a:endParaRPr>
+                    </a:p>
+                  </a:txBody>
+                  <a:tcPr marL="82296" marR="82296" marT="82296" marB="82296" anchor="ctr">
+                    <a:lnL w="12700" cap="flat" cmpd="sng" algn="ctr">
+                      <a:solidFill>
+                        <a:srgbClr val="DBE4E1"/>
+                      </a:solidFill>
+                      <a:prstDash val="solid"/>
+                      <a:round/>
+                      <a:headEnd type="none" w="med" len="med"/>
+                      <a:tailEnd type="none" w="med" len="med"/>
+                    </a:lnL>
+                    <a:lnR w="12700" cap="flat" cmpd="sng" algn="ctr">
+                      <a:solidFill>
+                        <a:srgbClr val="DBE4E1"/>
+                      </a:solidFill>
+                      <a:prstDash val="solid"/>
+                      <a:round/>
+                      <a:headEnd type="none" w="med" len="med"/>
+                      <a:tailEnd type="none" w="med" len="med"/>
+                    </a:lnR>
+                    <a:lnT w="12700" cap="flat" cmpd="sng" algn="ctr">
+                      <a:solidFill>
+                        <a:srgbClr val="DBE4E1"/>
+                      </a:solidFill>
+                      <a:prstDash val="solid"/>
+                      <a:round/>
+                      <a:headEnd type="none" w="med" len="med"/>
+                      <a:tailEnd type="none" w="med" len="med"/>
+                    </a:lnT>
+                    <a:lnB w="12700" cap="flat" cmpd="sng" algn="ctr">
+                      <a:solidFill>
+                        <a:srgbClr val="DBE4E1"/>
+                      </a:solidFill>
+                      <a:prstDash val="solid"/>
+                      <a:round/>
+                      <a:headEnd type="none" w="med" len="med"/>
+                      <a:tailEnd type="none" w="med" len="med"/>
+                    </a:lnB>
+                    <a:solidFill>
+                      <a:srgbClr val="FFFFFF"/>
+                    </a:solidFill>
+                  </a:tcPr>
+                </a:tc>
+              </a:tr>
+              <a:tr h="402336">
+                <a:tc>
+                  <a:txBody>
+                    <a:bodyPr/>
+                    <a:lstStyle/>
+                    <a:p>
+                      <a:pPr indent="0" marL="0">
+                        <a:buNone/>
+                      </a:pPr>
+                      <a:r>
+                        <a:rPr lang="en-US" sz="1300" b="1" dirty="0">
+                          <a:solidFill>
+                            <a:srgbClr val="0D8271"/>
+                          </a:solidFill>
+                          <a:latin typeface="Calibri" pitchFamily="34" charset="0"/>
+                          <a:ea typeface="Calibri" pitchFamily="34" charset="-122"/>
+                          <a:cs typeface="Calibri" pitchFamily="34" charset="-120"/>
+                        </a:rPr>
+                        <a:t>GeoPref 69% — yang dipakai</a:t>
+                      </a:r>
+                      <a:endParaRPr lang="en-US" sz="1300" dirty="0">
+                        <a:latin typeface="Calibri" charset="0"/>
+                        <a:ea typeface="Calibri" charset="0"/>
+                        <a:cs typeface="Calibri" charset="0"/>
+                      </a:endParaRPr>
+                    </a:p>
+                  </a:txBody>
+                  <a:tcPr marL="82296" marR="82296" marT="82296" marB="82296" anchor="ctr">
+                    <a:lnL w="12700" cap="flat" cmpd="sng" algn="ctr">
+                      <a:solidFill>
+                        <a:srgbClr val="DBE4E1"/>
+                      </a:solidFill>
+                      <a:prstDash val="solid"/>
+                      <a:round/>
+                      <a:headEnd type="none" w="med" len="med"/>
+                      <a:tailEnd type="none" w="med" len="med"/>
+                    </a:lnL>
+                    <a:lnR w="12700" cap="flat" cmpd="sng" algn="ctr">
+                      <a:solidFill>
+                        <a:srgbClr val="DBE4E1"/>
+                      </a:solidFill>
+                      <a:prstDash val="solid"/>
+                      <a:round/>
+                      <a:headEnd type="none" w="med" len="med"/>
+                      <a:tailEnd type="none" w="med" len="med"/>
+                    </a:lnR>
+                    <a:lnT w="12700" cap="flat" cmpd="sng" algn="ctr">
+                      <a:solidFill>
+                        <a:srgbClr val="DBE4E1"/>
+                      </a:solidFill>
+                      <a:prstDash val="solid"/>
+                      <a:round/>
+                      <a:headEnd type="none" w="med" len="med"/>
+                      <a:tailEnd type="none" w="med" len="med"/>
+                    </a:lnT>
+                    <a:lnB w="12700" cap="flat" cmpd="sng" algn="ctr">
+                      <a:solidFill>
+                        <a:srgbClr val="DBE4E1"/>
+                      </a:solidFill>
+                      <a:prstDash val="solid"/>
+                      <a:round/>
+                      <a:headEnd type="none" w="med" len="med"/>
+                      <a:tailEnd type="none" w="med" len="med"/>
+                    </a:lnB>
+                    <a:solidFill>
+                      <a:srgbClr val="FFFFFF"/>
+                    </a:solidFill>
+                  </a:tcPr>
+                </a:tc>
+                <a:tc>
+                  <a:txBody>
+                    <a:bodyPr/>
+                    <a:lstStyle/>
+                    <a:p>
+                      <a:pPr indent="0" marL="0">
+                        <a:buNone/>
+                      </a:pPr>
+                      <a:r>
+                        <a:rPr lang="en-US" sz="1300" b="1" dirty="0">
+                          <a:solidFill>
+                            <a:srgbClr val="0D8271"/>
+                          </a:solidFill>
+                          <a:latin typeface="Calibri" pitchFamily="34" charset="0"/>
+                          <a:ea typeface="Calibri" pitchFamily="34" charset="-122"/>
+                          <a:cs typeface="Calibri" pitchFamily="34" charset="-120"/>
+                        </a:rPr>
+                        <a:t>0,170</a:t>
+                      </a:r>
+                      <a:endParaRPr lang="en-US" sz="1300" dirty="0">
+                        <a:latin typeface="Calibri" charset="0"/>
+                        <a:ea typeface="Calibri" charset="0"/>
+                        <a:cs typeface="Calibri" charset="0"/>
+                      </a:endParaRPr>
+                    </a:p>
+                  </a:txBody>
+                  <a:tcPr marL="82296" marR="82296" marT="82296" marB="82296" anchor="ctr">
+                    <a:lnL w="12700" cap="flat" cmpd="sng" algn="ctr">
+                      <a:solidFill>
+                        <a:srgbClr val="DBE4E1"/>
+                      </a:solidFill>
+                      <a:prstDash val="solid"/>
+                      <a:round/>
+                      <a:headEnd type="none" w="med" len="med"/>
+                      <a:tailEnd type="none" w="med" len="med"/>
+                    </a:lnL>
+                    <a:lnR w="12700" cap="flat" cmpd="sng" algn="ctr">
+                      <a:solidFill>
+                        <a:srgbClr val="DBE4E1"/>
+                      </a:solidFill>
+                      <a:prstDash val="solid"/>
+                      <a:round/>
+                      <a:headEnd type="none" w="med" len="med"/>
+                      <a:tailEnd type="none" w="med" len="med"/>
+                    </a:lnR>
+                    <a:lnT w="12700" cap="flat" cmpd="sng" algn="ctr">
+                      <a:solidFill>
+                        <a:srgbClr val="DBE4E1"/>
+                      </a:solidFill>
+                      <a:prstDash val="solid"/>
+                      <a:round/>
+                      <a:headEnd type="none" w="med" len="med"/>
+                      <a:tailEnd type="none" w="med" len="med"/>
+                    </a:lnT>
+                    <a:lnB w="12700" cap="flat" cmpd="sng" algn="ctr">
+                      <a:solidFill>
+                        <a:srgbClr val="DBE4E1"/>
+                      </a:solidFill>
+                      <a:prstDash val="solid"/>
+                      <a:round/>
+                      <a:headEnd type="none" w="med" len="med"/>
+                      <a:tailEnd type="none" w="med" len="med"/>
+                    </a:lnB>
+                    <a:solidFill>
+                      <a:srgbClr val="FFFFFF"/>
+                    </a:solidFill>
+                  </a:tcPr>
+                </a:tc>
+                <a:tc>
+                  <a:txBody>
+                    <a:bodyPr/>
+                    <a:lstStyle/>
+                    <a:p>
+                      <a:pPr indent="0" marL="0">
+                        <a:buNone/>
+                      </a:pPr>
+                      <a:r>
+                        <a:rPr lang="en-US" sz="1300" b="1" dirty="0">
+                          <a:solidFill>
+                            <a:srgbClr val="0D8271"/>
+                          </a:solidFill>
+                          <a:latin typeface="Calibri" pitchFamily="34" charset="0"/>
+                          <a:ea typeface="Calibri" pitchFamily="34" charset="-122"/>
+                          <a:cs typeface="Calibri" pitchFamily="34" charset="-120"/>
+                        </a:rPr>
+                        <a:t>0,980</a:t>
+                      </a:r>
+                      <a:endParaRPr lang="en-US" sz="1300" dirty="0">
+                        <a:latin typeface="Calibri" charset="0"/>
+                        <a:ea typeface="Calibri" charset="0"/>
+                        <a:cs typeface="Calibri" charset="0"/>
+                      </a:endParaRPr>
+                    </a:p>
+                  </a:txBody>
+                  <a:tcPr marL="82296" marR="82296" marT="82296" marB="82296" anchor="ctr">
+                    <a:lnL w="12700" cap="flat" cmpd="sng" algn="ctr">
+                      <a:solidFill>
+                        <a:srgbClr val="DBE4E1"/>
+                      </a:solidFill>
+                      <a:prstDash val="solid"/>
+                      <a:round/>
+                      <a:headEnd type="none" w="med" len="med"/>
+                      <a:tailEnd type="none" w="med" len="med"/>
+                    </a:lnL>
+                    <a:lnR w="12700" cap="flat" cmpd="sng" algn="ctr">
+                      <a:solidFill>
+                        <a:srgbClr val="DBE4E1"/>
+                      </a:solidFill>
+                      <a:prstDash val="solid"/>
+                      <a:round/>
+                      <a:headEnd type="none" w="med" len="med"/>
+                      <a:tailEnd type="none" w="med" len="med"/>
+                    </a:lnR>
+                    <a:lnT w="12700" cap="flat" cmpd="sng" algn="ctr">
+                      <a:solidFill>
+                        <a:srgbClr val="DBE4E1"/>
+                      </a:solidFill>
+                      <a:prstDash val="solid"/>
+                      <a:round/>
+                      <a:headEnd type="none" w="med" len="med"/>
+                      <a:tailEnd type="none" w="med" len="med"/>
+                    </a:lnT>
+                    <a:lnB w="12700" cap="flat" cmpd="sng" algn="ctr">
+                      <a:solidFill>
+                        <a:srgbClr val="DBE4E1"/>
+                      </a:solidFill>
+                      <a:prstDash val="solid"/>
+                      <a:round/>
+                      <a:headEnd type="none" w="med" len="med"/>
+                      <a:tailEnd type="none" w="med" len="med"/>
+                    </a:lnB>
+                    <a:solidFill>
+                      <a:srgbClr val="FFFFFF"/>
+                    </a:solidFill>
+                  </a:tcPr>
+                </a:tc>
+                <a:tc>
+                  <a:txBody>
+                    <a:bodyPr/>
+                    <a:lstStyle/>
+                    <a:p>
+                      <a:pPr indent="0" marL="0">
+                        <a:buNone/>
+                      </a:pPr>
+                      <a:r>
+                        <a:rPr lang="en-US" sz="1300" b="1" dirty="0">
+                          <a:solidFill>
+                            <a:srgbClr val="0D8271"/>
+                          </a:solidFill>
+                          <a:latin typeface="Calibri" pitchFamily="34" charset="0"/>
+                          <a:ea typeface="Calibri" pitchFamily="34" charset="-122"/>
+                          <a:cs typeface="Calibri" pitchFamily="34" charset="-120"/>
+                        </a:rPr>
+                        <a:t>2,2%</a:t>
+                      </a:r>
+                      <a:endParaRPr lang="en-US" sz="1300" dirty="0">
+                        <a:latin typeface="Calibri" charset="0"/>
+                        <a:ea typeface="Calibri" charset="0"/>
+                        <a:cs typeface="Calibri" charset="0"/>
+                      </a:endParaRPr>
+                    </a:p>
+                  </a:txBody>
+                  <a:tcPr marL="82296" marR="82296" marT="82296" marB="82296" anchor="ctr">
+                    <a:lnL w="12700" cap="flat" cmpd="sng" algn="ctr">
+                      <a:solidFill>
+                        <a:srgbClr val="DBE4E1"/>
+                      </a:solidFill>
+                      <a:prstDash val="solid"/>
+                      <a:round/>
+                      <a:headEnd type="none" w="med" len="med"/>
+                      <a:tailEnd type="none" w="med" len="med"/>
+                    </a:lnL>
+                    <a:lnR w="12700" cap="flat" cmpd="sng" algn="ctr">
+                      <a:solidFill>
+                        <a:srgbClr val="DBE4E1"/>
+                      </a:solidFill>
+                      <a:prstDash val="solid"/>
+                      <a:round/>
+                      <a:headEnd type="none" w="med" len="med"/>
+                      <a:tailEnd type="none" w="med" len="med"/>
+                    </a:lnR>
+                    <a:lnT w="12700" cap="flat" cmpd="sng" algn="ctr">
+                      <a:solidFill>
+                        <a:srgbClr val="DBE4E1"/>
+                      </a:solidFill>
+                      <a:prstDash val="solid"/>
+                      <a:round/>
+                      <a:headEnd type="none" w="med" len="med"/>
+                      <a:tailEnd type="none" w="med" len="med"/>
+                    </a:lnT>
+                    <a:lnB w="12700" cap="flat" cmpd="sng" algn="ctr">
+                      <a:solidFill>
+                        <a:srgbClr val="DBE4E1"/>
+                      </a:solidFill>
+                      <a:prstDash val="solid"/>
+                      <a:round/>
+                      <a:headEnd type="none" w="med" len="med"/>
+                      <a:tailEnd type="none" w="med" len="med"/>
+                    </a:lnB>
+                    <a:solidFill>
+                      <a:srgbClr val="FFFFFF"/>
+                    </a:solidFill>
+                  </a:tcPr>
+                </a:tc>
+                <a:tc>
+                  <a:txBody>
+                    <a:bodyPr/>
+                    <a:lstStyle/>
+                    <a:p>
+                      <a:pPr indent="0" marL="0">
+                        <a:buNone/>
+                      </a:pPr>
+                      <a:r>
+                        <a:rPr lang="en-US" sz="1300" b="1" dirty="0">
+                          <a:solidFill>
+                            <a:srgbClr val="0D8271"/>
+                          </a:solidFill>
+                          <a:latin typeface="Calibri" pitchFamily="34" charset="0"/>
+                          <a:ea typeface="Calibri" pitchFamily="34" charset="-122"/>
+                          <a:cs typeface="Calibri" pitchFamily="34" charset="-120"/>
+                        </a:rPr>
+                        <a:t>12,6</a:t>
+                      </a:r>
+                      <a:endParaRPr lang="en-US" sz="1300" dirty="0">
+                        <a:latin typeface="Calibri" charset="0"/>
+                        <a:ea typeface="Calibri" charset="0"/>
+                        <a:cs typeface="Calibri" charset="0"/>
+                      </a:endParaRPr>
+                    </a:p>
+                  </a:txBody>
+                  <a:tcPr marL="82296" marR="82296" marT="82296" marB="82296" anchor="ctr">
+                    <a:lnL w="12700" cap="flat" cmpd="sng" algn="ctr">
+                      <a:solidFill>
+                        <a:srgbClr val="DBE4E1"/>
+                      </a:solidFill>
+                      <a:prstDash val="solid"/>
+                      <a:round/>
+                      <a:headEnd type="none" w="med" len="med"/>
+                      <a:tailEnd type="none" w="med" len="med"/>
+                    </a:lnL>
+                    <a:lnR w="12700" cap="flat" cmpd="sng" algn="ctr">
+                      <a:solidFill>
+                        <a:srgbClr val="DBE4E1"/>
+                      </a:solidFill>
+                      <a:prstDash val="solid"/>
+                      <a:round/>
+                      <a:headEnd type="none" w="med" len="med"/>
+                      <a:tailEnd type="none" w="med" len="med"/>
+                    </a:lnR>
+                    <a:lnT w="12700" cap="flat" cmpd="sng" algn="ctr">
+                      <a:solidFill>
+                        <a:srgbClr val="DBE4E1"/>
+                      </a:solidFill>
+                      <a:prstDash val="solid"/>
+                      <a:round/>
+                      <a:headEnd type="none" w="med" len="med"/>
+                      <a:tailEnd type="none" w="med" len="med"/>
+                    </a:lnT>
+                    <a:lnB w="12700" cap="flat" cmpd="sng" algn="ctr">
+                      <a:solidFill>
+                        <a:srgbClr val="DBE4E1"/>
+                      </a:solidFill>
+                      <a:prstDash val="solid"/>
+                      <a:round/>
+                      <a:headEnd type="none" w="med" len="med"/>
+                      <a:tailEnd type="none" w="med" len="med"/>
+                    </a:lnB>
+                    <a:solidFill>
+                      <a:srgbClr val="FFFFFF"/>
+                    </a:solidFill>
+                  </a:tcPr>
+                </a:tc>
+              </a:tr>
+              <a:tr h="402336">
+                <a:tc>
+                  <a:txBody>
+                    <a:bodyPr/>
+                    <a:lstStyle/>
+                    <a:p>
+                      <a:pPr indent="0" marL="0">
+                        <a:buNone/>
+                      </a:pPr>
+                      <a:r>
+                        <a:rPr lang="en-US" sz="1300" dirty="0">
+                          <a:solidFill>
+                            <a:srgbClr val="14302B"/>
+                          </a:solidFill>
+                          <a:latin typeface="Calibri" pitchFamily="34" charset="0"/>
+                          <a:ea typeface="Calibri" pitchFamily="34" charset="-122"/>
+                          <a:cs typeface="Calibri" pitchFamily="34" charset="-120"/>
+                        </a:rPr>
+                        <a:t>Target Gate C (preseden tablet)</a:t>
+                      </a:r>
+                      <a:endParaRPr lang="en-US" sz="1300" dirty="0">
+                        <a:latin typeface="Calibri" charset="0"/>
+                        <a:ea typeface="Calibri" charset="0"/>
+                        <a:cs typeface="Calibri" charset="0"/>
+                      </a:endParaRPr>
+                    </a:p>
+                  </a:txBody>
+                  <a:tcPr marL="82296" marR="82296" marT="82296" marB="82296" anchor="ctr">
+                    <a:lnL w="12700" cap="flat" cmpd="sng" algn="ctr">
+                      <a:solidFill>
+                        <a:srgbClr val="DBE4E1"/>
+                      </a:solidFill>
+                      <a:prstDash val="solid"/>
+                      <a:round/>
+                      <a:headEnd type="none" w="med" len="med"/>
+                      <a:tailEnd type="none" w="med" len="med"/>
+                    </a:lnL>
+                    <a:lnR w="12700" cap="flat" cmpd="sng" algn="ctr">
+                      <a:solidFill>
+                        <a:srgbClr val="DBE4E1"/>
+                      </a:solidFill>
+                      <a:prstDash val="solid"/>
+                      <a:round/>
+                      <a:headEnd type="none" w="med" len="med"/>
+                      <a:tailEnd type="none" w="med" len="med"/>
+                    </a:lnR>
+                    <a:lnT w="12700" cap="flat" cmpd="sng" algn="ctr">
+                      <a:solidFill>
+                        <a:srgbClr val="DBE4E1"/>
+                      </a:solidFill>
+                      <a:prstDash val="solid"/>
+                      <a:round/>
+                      <a:headEnd type="none" w="med" len="med"/>
+                      <a:tailEnd type="none" w="med" len="med"/>
+                    </a:lnT>
+                    <a:lnB w="12700" cap="flat" cmpd="sng" algn="ctr">
+                      <a:solidFill>
+                        <a:srgbClr val="DBE4E1"/>
+                      </a:solidFill>
+                      <a:prstDash val="solid"/>
+                      <a:round/>
+                      <a:headEnd type="none" w="med" len="med"/>
+                      <a:tailEnd type="none" w="med" len="med"/>
+                    </a:lnB>
+                    <a:solidFill>
+                      <a:srgbClr val="FFFFFF"/>
+                    </a:solidFill>
+                  </a:tcPr>
+                </a:tc>
+                <a:tc>
+                  <a:txBody>
+                    <a:bodyPr/>
+                    <a:lstStyle/>
+                    <a:p>
+                      <a:pPr indent="0" marL="0">
+                        <a:buNone/>
+                      </a:pPr>
+                      <a:r>
+                        <a:rPr lang="en-US" sz="1300" dirty="0">
+                          <a:solidFill>
+                            <a:srgbClr val="14302B"/>
+                          </a:solidFill>
+                          <a:latin typeface="Calibri" pitchFamily="34" charset="0"/>
+                          <a:ea typeface="Calibri" pitchFamily="34" charset="-122"/>
+                          <a:cs typeface="Calibri" pitchFamily="34" charset="-120"/>
+                        </a:rPr>
+                        <a:t>0,878</a:t>
+                      </a:r>
+                      <a:endParaRPr lang="en-US" sz="1300" dirty="0">
+                        <a:latin typeface="Calibri" charset="0"/>
+                        <a:ea typeface="Calibri" charset="0"/>
+                        <a:cs typeface="Calibri" charset="0"/>
+                      </a:endParaRPr>
+                    </a:p>
+                  </a:txBody>
+                  <a:tcPr marL="82296" marR="82296" marT="82296" marB="82296" anchor="ctr">
+                    <a:lnL w="12700" cap="flat" cmpd="sng" algn="ctr">
+                      <a:solidFill>
+                        <a:srgbClr val="DBE4E1"/>
+                      </a:solidFill>
+                      <a:prstDash val="solid"/>
+                      <a:round/>
+                      <a:headEnd type="none" w="med" len="med"/>
+                      <a:tailEnd type="none" w="med" len="med"/>
+                    </a:lnL>
+                    <a:lnR w="12700" cap="flat" cmpd="sng" algn="ctr">
+                      <a:solidFill>
+                        <a:srgbClr val="DBE4E1"/>
+                      </a:solidFill>
+                      <a:prstDash val="solid"/>
+                      <a:round/>
+                      <a:headEnd type="none" w="med" len="med"/>
+                      <a:tailEnd type="none" w="med" len="med"/>
+                    </a:lnR>
+                    <a:lnT w="12700" cap="flat" cmpd="sng" algn="ctr">
+                      <a:solidFill>
+                        <a:srgbClr val="DBE4E1"/>
+                      </a:solidFill>
+                      <a:prstDash val="solid"/>
+                      <a:round/>
+                      <a:headEnd type="none" w="med" len="med"/>
+                      <a:tailEnd type="none" w="med" len="med"/>
+                    </a:lnT>
+                    <a:lnB w="12700" cap="flat" cmpd="sng" algn="ctr">
+                      <a:solidFill>
+                        <a:srgbClr val="DBE4E1"/>
+                      </a:solidFill>
+                      <a:prstDash val="solid"/>
+                      <a:round/>
+                      <a:headEnd type="none" w="med" len="med"/>
+                      <a:tailEnd type="none" w="med" len="med"/>
+                    </a:lnB>
+                    <a:solidFill>
+                      <a:srgbClr val="FFFFFF"/>
+                    </a:solidFill>
+                  </a:tcPr>
+                </a:tc>
+                <a:tc>
+                  <a:txBody>
+                    <a:bodyPr/>
+                    <a:lstStyle/>
+                    <a:p>
+                      <a:pPr indent="0" marL="0">
+                        <a:buNone/>
+                      </a:pPr>
+                      <a:r>
+                        <a:rPr lang="en-US" sz="1300" dirty="0">
+                          <a:solidFill>
+                            <a:srgbClr val="14302B"/>
+                          </a:solidFill>
+                          <a:latin typeface="Calibri" pitchFamily="34" charset="0"/>
+                          <a:ea typeface="Calibri" pitchFamily="34" charset="-122"/>
+                          <a:cs typeface="Calibri" pitchFamily="34" charset="-120"/>
+                        </a:rPr>
+                        <a:t>0,808</a:t>
+                      </a:r>
+                      <a:endParaRPr lang="en-US" sz="1300" dirty="0">
+                        <a:latin typeface="Calibri" charset="0"/>
+                        <a:ea typeface="Calibri" charset="0"/>
+                        <a:cs typeface="Calibri" charset="0"/>
+                      </a:endParaRPr>
+                    </a:p>
+                  </a:txBody>
+                  <a:tcPr marL="82296" marR="82296" marT="82296" marB="82296" anchor="ctr">
+                    <a:lnL w="12700" cap="flat" cmpd="sng" algn="ctr">
+                      <a:solidFill>
+                        <a:srgbClr val="DBE4E1"/>
+                      </a:solidFill>
+                      <a:prstDash val="solid"/>
+                      <a:round/>
+                      <a:headEnd type="none" w="med" len="med"/>
+                      <a:tailEnd type="none" w="med" len="med"/>
+                    </a:lnL>
+                    <a:lnR w="12700" cap="flat" cmpd="sng" algn="ctr">
+                      <a:solidFill>
+                        <a:srgbClr val="DBE4E1"/>
+                      </a:solidFill>
+                      <a:prstDash val="solid"/>
+                      <a:round/>
+                      <a:headEnd type="none" w="med" len="med"/>
+                      <a:tailEnd type="none" w="med" len="med"/>
+                    </a:lnR>
+                    <a:lnT w="12700" cap="flat" cmpd="sng" algn="ctr">
+                      <a:solidFill>
+                        <a:srgbClr val="DBE4E1"/>
+                      </a:solidFill>
+                      <a:prstDash val="solid"/>
+                      <a:round/>
+                      <a:headEnd type="none" w="med" len="med"/>
+                      <a:tailEnd type="none" w="med" len="med"/>
+                    </a:lnT>
+                    <a:lnB w="12700" cap="flat" cmpd="sng" algn="ctr">
+                      <a:solidFill>
+                        <a:srgbClr val="DBE4E1"/>
+                      </a:solidFill>
+                      <a:prstDash val="solid"/>
+                      <a:round/>
+                      <a:headEnd type="none" w="med" len="med"/>
+                      <a:tailEnd type="none" w="med" len="med"/>
+                    </a:lnB>
+                    <a:solidFill>
+                      <a:srgbClr val="FFFFFF"/>
+                    </a:solidFill>
+                  </a:tcPr>
+                </a:tc>
+                <a:tc>
+                  <a:txBody>
+                    <a:bodyPr/>
+                    <a:lstStyle/>
+                    <a:p>
+                      <a:pPr indent="0" marL="0">
+                        <a:buNone/>
+                      </a:pPr>
+                      <a:r>
+                        <a:rPr lang="en-US" sz="1300" dirty="0">
+                          <a:solidFill>
+                            <a:srgbClr val="14302B"/>
+                          </a:solidFill>
+                          <a:latin typeface="Calibri" pitchFamily="34" charset="0"/>
+                          <a:ea typeface="Calibri" pitchFamily="34" charset="-122"/>
+                          <a:cs typeface="Calibri" pitchFamily="34" charset="-120"/>
+                        </a:rPr>
+                        <a:t>19,9%</a:t>
+                      </a:r>
+                      <a:endParaRPr lang="en-US" sz="1300" dirty="0">
+                        <a:latin typeface="Calibri" charset="0"/>
+                        <a:ea typeface="Calibri" charset="0"/>
+                        <a:cs typeface="Calibri" charset="0"/>
+                      </a:endParaRPr>
+                    </a:p>
+                  </a:txBody>
+                  <a:tcPr marL="82296" marR="82296" marT="82296" marB="82296" anchor="ctr">
+                    <a:lnL w="12700" cap="flat" cmpd="sng" algn="ctr">
+                      <a:solidFill>
+                        <a:srgbClr val="DBE4E1"/>
+                      </a:solidFill>
+                      <a:prstDash val="solid"/>
+                      <a:round/>
+                      <a:headEnd type="none" w="med" len="med"/>
+                      <a:tailEnd type="none" w="med" len="med"/>
+                    </a:lnL>
+                    <a:lnR w="12700" cap="flat" cmpd="sng" algn="ctr">
+                      <a:solidFill>
+                        <a:srgbClr val="DBE4E1"/>
+                      </a:solidFill>
+                      <a:prstDash val="solid"/>
+                      <a:round/>
+                      <a:headEnd type="none" w="med" len="med"/>
+                      <a:tailEnd type="none" w="med" len="med"/>
+                    </a:lnR>
+                    <a:lnT w="12700" cap="flat" cmpd="sng" algn="ctr">
+                      <a:solidFill>
+                        <a:srgbClr val="DBE4E1"/>
+                      </a:solidFill>
+                      <a:prstDash val="solid"/>
+                      <a:round/>
+                      <a:headEnd type="none" w="med" len="med"/>
+                      <a:tailEnd type="none" w="med" len="med"/>
+                    </a:lnT>
+                    <a:lnB w="12700" cap="flat" cmpd="sng" algn="ctr">
+                      <a:solidFill>
+                        <a:srgbClr val="DBE4E1"/>
+                      </a:solidFill>
+                      <a:prstDash val="solid"/>
+                      <a:round/>
+                      <a:headEnd type="none" w="med" len="med"/>
+                      <a:tailEnd type="none" w="med" len="med"/>
+                    </a:lnB>
+                    <a:solidFill>
+                      <a:srgbClr val="FFFFFF"/>
+                    </a:solidFill>
+                  </a:tcPr>
+                </a:tc>
+                <a:tc>
+                  <a:txBody>
+                    <a:bodyPr/>
+                    <a:lstStyle/>
+                    <a:p>
+                      <a:pPr indent="0" marL="0">
+                        <a:buNone/>
+                      </a:pPr>
+                      <a:r>
+                        <a:rPr lang="en-US" sz="1300" dirty="0">
+                          <a:solidFill>
+                            <a:srgbClr val="14302B"/>
+                          </a:solidFill>
+                          <a:latin typeface="Calibri" pitchFamily="34" charset="0"/>
+                          <a:ea typeface="Calibri" pitchFamily="34" charset="-122"/>
+                          <a:cs typeface="Calibri" pitchFamily="34" charset="-120"/>
+                        </a:rPr>
+                        <a:t>22,6</a:t>
+                      </a:r>
+                      <a:endParaRPr lang="en-US" sz="1300" dirty="0">
+                        <a:latin typeface="Calibri" charset="0"/>
+                        <a:ea typeface="Calibri" charset="0"/>
+                        <a:cs typeface="Calibri" charset="0"/>
+                      </a:endParaRPr>
+                    </a:p>
+                  </a:txBody>
+                  <a:tcPr marL="82296" marR="82296" marT="82296" marB="82296" anchor="ctr">
+                    <a:lnL w="12700" cap="flat" cmpd="sng" algn="ctr">
+                      <a:solidFill>
+                        <a:srgbClr val="DBE4E1"/>
+                      </a:solidFill>
+                      <a:prstDash val="solid"/>
+                      <a:round/>
+                      <a:headEnd type="none" w="med" len="med"/>
+                      <a:tailEnd type="none" w="med" len="med"/>
+                    </a:lnL>
+                    <a:lnR w="12700" cap="flat" cmpd="sng" algn="ctr">
+                      <a:solidFill>
+                        <a:srgbClr val="DBE4E1"/>
+                      </a:solidFill>
+                      <a:prstDash val="solid"/>
+                      <a:round/>
+                      <a:headEnd type="none" w="med" len="med"/>
+                      <a:tailEnd type="none" w="med" len="med"/>
+                    </a:lnR>
+                    <a:lnT w="12700" cap="flat" cmpd="sng" algn="ctr">
+                      <a:solidFill>
+                        <a:srgbClr val="DBE4E1"/>
+                      </a:solidFill>
+                      <a:prstDash val="solid"/>
+                      <a:round/>
+                      <a:headEnd type="none" w="med" len="med"/>
+                      <a:tailEnd type="none" w="med" len="med"/>
+                    </a:lnT>
+                    <a:lnB w="12700" cap="flat" cmpd="sng" algn="ctr">
+                      <a:solidFill>
+                        <a:srgbClr val="DBE4E1"/>
+                      </a:solidFill>
+                      <a:prstDash val="solid"/>
+                      <a:round/>
+                      <a:headEnd type="none" w="med" len="med"/>
+                      <a:tailEnd type="none" w="med" len="med"/>
+                    </a:lnB>
+                    <a:solidFill>
+                      <a:srgbClr val="FFFFFF"/>
+                    </a:solidFill>
+                  </a:tcPr>
+                </a:tc>
+              </a:tr>
+            </a:tbl>
+          </a:graphicData>
+        </a:graphic>
+      </p:graphicFrame>
+      <p:sp>
+        <p:nvSpPr>
+          <p:cNvPr id="7" name="Shape 4"/>
+          <p:cNvSpPr/>
+          <p:nvPr/>
+        </p:nvSpPr>
+        <p:spPr>
+          <a:xfrm>
+            <a:off x="685800" y="4572000"/>
+            <a:ext cx="6766560" cy="1051560"/>
+          </a:xfrm>
+          <a:prstGeom prst="roundRect">
+            <a:avLst>
+              <a:gd name="adj" fmla="val 5217"/>
+            </a:avLst>
+          </a:prstGeom>
+          <a:solidFill>
+            <a:srgbClr val="FFFFFF"/>
+          </a:solidFill>
+          <a:ln w="12700">
+            <a:solidFill>
+              <a:srgbClr val="DBE4E1"/>
+            </a:solidFill>
+            <a:prstDash val="solid"/>
+          </a:ln>
+        </p:spPr>
+      </p:sp>
+      <p:sp>
+        <p:nvSpPr>
+          <p:cNvPr id="8" name="Text 5"/>
+          <p:cNvSpPr/>
+          <p:nvPr/>
+        </p:nvSpPr>
+        <p:spPr>
+          <a:xfrm>
+            <a:off x="941832" y="4754880"/>
+            <a:ext cx="6309360" cy="731520"/>
           </a:xfrm>
           <a:prstGeom prst="rect">
             <a:avLst/>
@@ -2668,12 +4527,15 @@
           <a:p>
             <a:pPr indent="0" marL="0">
               <a:lnSpc>
-                <a:spcPts val="2000"/>
+                <a:spcPts val="1700"/>
               </a:lnSpc>
-              <a:buNone/>
-            </a:pPr>
-            <a:r>
-              <a:rPr lang="en-US" sz="1400" dirty="0">
+              <a:spcBef>
+                <a:spcPts val="400"/>
+              </a:spcBef>
+              <a:buNone/>
+            </a:pPr>
+            <a:r>
+              <a:rPr lang="en-US" sz="1250" dirty="0">
                 <a:solidFill>
                   <a:srgbClr val="14302B"/>
                 </a:solidFill>
@@ -2681,38 +4543,22 @@
                 <a:ea typeface="Calibri" pitchFamily="34" charset="-122"/>
                 <a:cs typeface="Calibri" pitchFamily="34" charset="-120"/>
               </a:rPr>
-              <a:t>Cilia dkk. 2022, CC BY 4.0: 59 anak berlabel, 2,25 juta baris koordinat. Data anak sungguhan tanpa merekam satu pun anak sendiri. Empat audit ditulis sebelum fitting dijalankan. Dua gagal.</a:t>
-            </a:r>
-            <a:endParaRPr lang="en-US" sz="1400" dirty="0"/>
-          </a:p>
-        </p:txBody>
-      </p:sp>
-      <p:sp>
-        <p:nvSpPr>
-          <p:cNvPr id="7" name="Text 5"/>
-          <p:cNvSpPr/>
-          <p:nvPr/>
-        </p:nvSpPr>
-        <p:spPr>
-          <a:xfrm>
-            <a:off x="685800" y="2743200"/>
-            <a:ext cx="6035040" cy="274320"/>
-          </a:xfrm>
-          <a:prstGeom prst="rect">
-            <a:avLst/>
-          </a:prstGeom>
-          <a:noFill/>
-          <a:ln/>
-        </p:spPr>
-        <p:txBody>
-          <a:bodyPr wrap="square" lIns="0" tIns="0" rIns="0" bIns="0" rtlCol="0" anchor="ctr"/>
-          <a:lstStyle/>
+              <a:t>“Kalau semua langsung dirujuk, tenaga dan jadwal yang tersedia mungkin kewalahan.”</a:t>
+            </a:r>
+            <a:endParaRPr lang="en-US" sz="1250" dirty="0"/>
+          </a:p>
           <a:p>
             <a:pPr indent="0" marL="0">
-              <a:buNone/>
-            </a:pPr>
-            <a:r>
-              <a:rPr lang="en-US" sz="1100" b="1" dirty="0">
+              <a:lnSpc>
+                <a:spcPts val="1700"/>
+              </a:lnSpc>
+              <a:spcBef>
+                <a:spcPts val="400"/>
+              </a:spcBef>
+              <a:buNone/>
+            </a:pPr>
+            <a:r>
+              <a:rPr lang="en-US" sz="1050" dirty="0">
                 <a:solidFill>
                   <a:srgbClr val="4A635D"/>
                 </a:solidFill>
@@ -2720,541 +4566,26 @@
                 <a:ea typeface="Calibri" pitchFamily="34" charset="-122"/>
                 <a:cs typeface="Calibri" pitchFamily="34" charset="-120"/>
               </a:rPr>
-              <a:t>AUC prediktor tunggal terhadap label ASD</a:t>
-            </a:r>
-            <a:endParaRPr lang="en-US" sz="1100" dirty="0"/>
-          </a:p>
-        </p:txBody>
-      </p:sp>
-      <p:sp>
-        <p:nvSpPr>
-          <p:cNvPr id="8" name="Text 6"/>
-          <p:cNvSpPr/>
-          <p:nvPr/>
-        </p:nvSpPr>
-        <p:spPr>
-          <a:xfrm>
-            <a:off x="685800" y="3127248"/>
-            <a:ext cx="2286000" cy="292608"/>
-          </a:xfrm>
-          <a:prstGeom prst="rect">
-            <a:avLst/>
-          </a:prstGeom>
-          <a:noFill/>
-          <a:ln/>
-        </p:spPr>
-        <p:txBody>
-          <a:bodyPr wrap="square" lIns="0" tIns="0" rIns="0" bIns="0" rtlCol="0" anchor="ctr"/>
-          <a:lstStyle/>
-          <a:p>
-            <a:pPr indent="0" marL="0">
-              <a:buNone/>
-            </a:pPr>
-            <a:r>
-              <a:rPr lang="en-US" sz="1200" dirty="0">
-                <a:solidFill>
-                  <a:srgbClr val="14302B"/>
-                </a:solidFill>
-                <a:latin typeface="Calibri" pitchFamily="34" charset="0"/>
-                <a:ea typeface="Calibri" pitchFamily="34" charset="-122"/>
-                <a:cs typeface="Calibri" pitchFamily="34" charset="-120"/>
-              </a:rPr>
-              <a:t>Rasio pelacakan alat</a:t>
-            </a:r>
-            <a:endParaRPr lang="en-US" sz="1200" dirty="0"/>
-          </a:p>
-        </p:txBody>
-      </p:sp>
-      <p:sp>
-        <p:nvSpPr>
-          <p:cNvPr id="9" name="Shape 7"/>
-          <p:cNvSpPr/>
-          <p:nvPr/>
-        </p:nvSpPr>
-        <p:spPr>
-          <a:xfrm>
-            <a:off x="3063240" y="3182112"/>
-            <a:ext cx="2495946" cy="182880"/>
-          </a:xfrm>
-          <a:prstGeom prst="rect">
-            <a:avLst/>
-          </a:prstGeom>
-          <a:solidFill>
-            <a:srgbClr val="B1442C"/>
-          </a:solidFill>
-          <a:ln w="12700">
-            <a:solidFill>
-              <a:srgbClr val="333333"/>
-            </a:solidFill>
-            <a:prstDash val="solid"/>
-          </a:ln>
-        </p:spPr>
-      </p:sp>
-      <p:sp>
-        <p:nvSpPr>
-          <p:cNvPr id="10" name="Text 8"/>
-          <p:cNvSpPr/>
-          <p:nvPr/>
-        </p:nvSpPr>
-        <p:spPr>
-          <a:xfrm>
-            <a:off x="6126480" y="3127248"/>
-            <a:ext cx="640080" cy="292608"/>
-          </a:xfrm>
-          <a:prstGeom prst="rect">
-            <a:avLst/>
-          </a:prstGeom>
-          <a:noFill/>
-          <a:ln/>
-        </p:spPr>
-        <p:txBody>
-          <a:bodyPr wrap="square" lIns="0" tIns="0" rIns="0" bIns="0" rtlCol="0" anchor="ctr"/>
-          <a:lstStyle/>
-          <a:p>
-            <a:pPr indent="0" marL="0">
-              <a:buNone/>
-            </a:pPr>
-            <a:r>
-              <a:rPr lang="en-US" sz="1200" b="1" dirty="0">
-                <a:solidFill>
-                  <a:srgbClr val="B1442C"/>
-                </a:solidFill>
-                <a:latin typeface="Calibri" pitchFamily="34" charset="0"/>
-                <a:ea typeface="Calibri" pitchFamily="34" charset="-122"/>
-                <a:cs typeface="Calibri" pitchFamily="34" charset="-120"/>
-              </a:rPr>
-              <a:t>0,853</a:t>
-            </a:r>
-            <a:endParaRPr lang="en-US" sz="1200" dirty="0"/>
-          </a:p>
-        </p:txBody>
-      </p:sp>
-      <p:sp>
-        <p:nvSpPr>
-          <p:cNvPr id="11" name="Text 9"/>
-          <p:cNvSpPr/>
-          <p:nvPr/>
-        </p:nvSpPr>
-        <p:spPr>
-          <a:xfrm>
-            <a:off x="685800" y="3584448"/>
-            <a:ext cx="2286000" cy="292608"/>
-          </a:xfrm>
-          <a:prstGeom prst="rect">
-            <a:avLst/>
-          </a:prstGeom>
-          <a:noFill/>
-          <a:ln/>
-        </p:spPr>
-        <p:txBody>
-          <a:bodyPr wrap="square" lIns="0" tIns="0" rIns="0" bIns="0" rtlCol="0" anchor="ctr"/>
-          <a:lstStyle/>
-          <a:p>
-            <a:pPr indent="0" marL="0">
-              <a:buNone/>
-            </a:pPr>
-            <a:r>
-              <a:rPr lang="en-US" sz="1200" dirty="0">
-                <a:solidFill>
-                  <a:srgbClr val="14302B"/>
-                </a:solidFill>
-                <a:latin typeface="Calibri" pitchFamily="34" charset="0"/>
-                <a:ea typeface="Calibri" pitchFamily="34" charset="-122"/>
-                <a:cs typeface="Calibri" pitchFamily="34" charset="-120"/>
-              </a:rPr>
-              <a:t>Fraksi kedip</a:t>
-            </a:r>
-            <a:endParaRPr lang="en-US" sz="1200" dirty="0"/>
-          </a:p>
-        </p:txBody>
-      </p:sp>
-      <p:sp>
-        <p:nvSpPr>
-          <p:cNvPr id="12" name="Shape 10"/>
-          <p:cNvSpPr/>
-          <p:nvPr/>
-        </p:nvSpPr>
-        <p:spPr>
-          <a:xfrm>
-            <a:off x="3063240" y="3639312"/>
-            <a:ext cx="2478390" cy="182880"/>
-          </a:xfrm>
-          <a:prstGeom prst="rect">
-            <a:avLst/>
-          </a:prstGeom>
-          <a:solidFill>
-            <a:srgbClr val="B1442C"/>
-          </a:solidFill>
-          <a:ln w="12700">
-            <a:solidFill>
-              <a:srgbClr val="333333"/>
-            </a:solidFill>
-            <a:prstDash val="solid"/>
-          </a:ln>
-        </p:spPr>
-      </p:sp>
-      <p:sp>
-        <p:nvSpPr>
-          <p:cNvPr id="13" name="Text 11"/>
-          <p:cNvSpPr/>
-          <p:nvPr/>
-        </p:nvSpPr>
-        <p:spPr>
-          <a:xfrm>
-            <a:off x="6126480" y="3584448"/>
-            <a:ext cx="640080" cy="292608"/>
-          </a:xfrm>
-          <a:prstGeom prst="rect">
-            <a:avLst/>
-          </a:prstGeom>
-          <a:noFill/>
-          <a:ln/>
-        </p:spPr>
-        <p:txBody>
-          <a:bodyPr wrap="square" lIns="0" tIns="0" rIns="0" bIns="0" rtlCol="0" anchor="ctr"/>
-          <a:lstStyle/>
-          <a:p>
-            <a:pPr indent="0" marL="0">
-              <a:buNone/>
-            </a:pPr>
-            <a:r>
-              <a:rPr lang="en-US" sz="1200" b="1" dirty="0">
-                <a:solidFill>
-                  <a:srgbClr val="B1442C"/>
-                </a:solidFill>
-                <a:latin typeface="Calibri" pitchFamily="34" charset="0"/>
-                <a:ea typeface="Calibri" pitchFamily="34" charset="-122"/>
-                <a:cs typeface="Calibri" pitchFamily="34" charset="-120"/>
-              </a:rPr>
-              <a:t>0,847</a:t>
-            </a:r>
-            <a:endParaRPr lang="en-US" sz="1200" dirty="0"/>
-          </a:p>
-        </p:txBody>
-      </p:sp>
-      <p:sp>
-        <p:nvSpPr>
-          <p:cNvPr id="14" name="Text 12"/>
-          <p:cNvSpPr/>
-          <p:nvPr/>
-        </p:nvSpPr>
-        <p:spPr>
-          <a:xfrm>
-            <a:off x="685800" y="4041648"/>
-            <a:ext cx="2286000" cy="292608"/>
-          </a:xfrm>
-          <a:prstGeom prst="rect">
-            <a:avLst/>
-          </a:prstGeom>
-          <a:noFill/>
-          <a:ln/>
-        </p:spPr>
-        <p:txBody>
-          <a:bodyPr wrap="square" lIns="0" tIns="0" rIns="0" bIns="0" rtlCol="0" anchor="ctr"/>
-          <a:lstStyle/>
-          <a:p>
-            <a:pPr indent="0" marL="0">
-              <a:buNone/>
-            </a:pPr>
-            <a:r>
-              <a:rPr lang="en-US" sz="1200" dirty="0">
-                <a:solidFill>
-                  <a:srgbClr val="14302B"/>
-                </a:solidFill>
-                <a:latin typeface="Calibri" pitchFamily="34" charset="0"/>
-                <a:ea typeface="Calibri" pitchFamily="34" charset="-122"/>
-                <a:cs typeface="Calibri" pitchFamily="34" charset="-120"/>
-              </a:rPr>
-              <a:t>Fraksi fiksasi</a:t>
-            </a:r>
-            <a:endParaRPr lang="en-US" sz="1200" dirty="0"/>
-          </a:p>
-        </p:txBody>
-      </p:sp>
-      <p:sp>
-        <p:nvSpPr>
-          <p:cNvPr id="15" name="Shape 13"/>
-          <p:cNvSpPr/>
-          <p:nvPr/>
-        </p:nvSpPr>
-        <p:spPr>
-          <a:xfrm>
-            <a:off x="3063240" y="4096512"/>
-            <a:ext cx="2416942" cy="182880"/>
-          </a:xfrm>
-          <a:prstGeom prst="rect">
-            <a:avLst/>
-          </a:prstGeom>
-          <a:solidFill>
-            <a:srgbClr val="B1442C"/>
-          </a:solidFill>
-          <a:ln w="12700">
-            <a:solidFill>
-              <a:srgbClr val="333333"/>
-            </a:solidFill>
-            <a:prstDash val="solid"/>
-          </a:ln>
-        </p:spPr>
-      </p:sp>
-      <p:sp>
-        <p:nvSpPr>
-          <p:cNvPr id="16" name="Text 14"/>
-          <p:cNvSpPr/>
-          <p:nvPr/>
-        </p:nvSpPr>
-        <p:spPr>
-          <a:xfrm>
-            <a:off x="6126480" y="4041648"/>
-            <a:ext cx="640080" cy="292608"/>
-          </a:xfrm>
-          <a:prstGeom prst="rect">
-            <a:avLst/>
-          </a:prstGeom>
-          <a:noFill/>
-          <a:ln/>
-        </p:spPr>
-        <p:txBody>
-          <a:bodyPr wrap="square" lIns="0" tIns="0" rIns="0" bIns="0" rtlCol="0" anchor="ctr"/>
-          <a:lstStyle/>
-          <a:p>
-            <a:pPr indent="0" marL="0">
-              <a:buNone/>
-            </a:pPr>
-            <a:r>
-              <a:rPr lang="en-US" sz="1200" b="1" dirty="0">
-                <a:solidFill>
-                  <a:srgbClr val="B1442C"/>
-                </a:solidFill>
-                <a:latin typeface="Calibri" pitchFamily="34" charset="0"/>
-                <a:ea typeface="Calibri" pitchFamily="34" charset="-122"/>
-                <a:cs typeface="Calibri" pitchFamily="34" charset="-120"/>
-              </a:rPr>
-              <a:t>0,826</a:t>
-            </a:r>
-            <a:endParaRPr lang="en-US" sz="1200" dirty="0"/>
-          </a:p>
-        </p:txBody>
-      </p:sp>
-      <p:sp>
-        <p:nvSpPr>
-          <p:cNvPr id="17" name="Text 15"/>
-          <p:cNvSpPr/>
-          <p:nvPr/>
-        </p:nvSpPr>
-        <p:spPr>
-          <a:xfrm>
-            <a:off x="685800" y="4498848"/>
-            <a:ext cx="2286000" cy="292608"/>
-          </a:xfrm>
-          <a:prstGeom prst="rect">
-            <a:avLst/>
-          </a:prstGeom>
-          <a:noFill/>
-          <a:ln/>
-        </p:spPr>
-        <p:txBody>
-          <a:bodyPr wrap="square" lIns="0" tIns="0" rIns="0" bIns="0" rtlCol="0" anchor="ctr"/>
-          <a:lstStyle/>
-          <a:p>
-            <a:pPr indent="0" marL="0">
-              <a:buNone/>
-            </a:pPr>
-            <a:r>
-              <a:rPr lang="en-US" sz="1200" dirty="0">
-                <a:solidFill>
-                  <a:srgbClr val="14302B"/>
-                </a:solidFill>
-                <a:latin typeface="Calibri" pitchFamily="34" charset="0"/>
-                <a:ea typeface="Calibri" pitchFamily="34" charset="-122"/>
-                <a:cs typeface="Calibri" pitchFamily="34" charset="-120"/>
-              </a:rPr>
-              <a:t>Sebaran tatapan</a:t>
-            </a:r>
-            <a:endParaRPr lang="en-US" sz="1200" dirty="0"/>
-          </a:p>
-        </p:txBody>
-      </p:sp>
-      <p:sp>
-        <p:nvSpPr>
-          <p:cNvPr id="18" name="Shape 16"/>
-          <p:cNvSpPr/>
-          <p:nvPr/>
-        </p:nvSpPr>
-        <p:spPr>
-          <a:xfrm>
-            <a:off x="3063240" y="4553712"/>
-            <a:ext cx="2229673" cy="182880"/>
-          </a:xfrm>
-          <a:prstGeom prst="rect">
-            <a:avLst/>
-          </a:prstGeom>
-          <a:solidFill>
-            <a:srgbClr val="4A635D"/>
-          </a:solidFill>
-          <a:ln w="12700">
-            <a:solidFill>
-              <a:srgbClr val="333333"/>
-            </a:solidFill>
-            <a:prstDash val="solid"/>
-          </a:ln>
-        </p:spPr>
-      </p:sp>
-      <p:sp>
-        <p:nvSpPr>
-          <p:cNvPr id="19" name="Text 17"/>
-          <p:cNvSpPr/>
-          <p:nvPr/>
-        </p:nvSpPr>
-        <p:spPr>
-          <a:xfrm>
-            <a:off x="6126480" y="4498848"/>
-            <a:ext cx="640080" cy="292608"/>
-          </a:xfrm>
-          <a:prstGeom prst="rect">
-            <a:avLst/>
-          </a:prstGeom>
-          <a:noFill/>
-          <a:ln/>
-        </p:spPr>
-        <p:txBody>
-          <a:bodyPr wrap="square" lIns="0" tIns="0" rIns="0" bIns="0" rtlCol="0" anchor="ctr"/>
-          <a:lstStyle/>
-          <a:p>
-            <a:pPr indent="0" marL="0">
-              <a:buNone/>
-            </a:pPr>
-            <a:r>
-              <a:rPr lang="en-US" sz="1200" b="1" dirty="0">
-                <a:solidFill>
-                  <a:srgbClr val="4A635D"/>
-                </a:solidFill>
-                <a:latin typeface="Calibri" pitchFamily="34" charset="0"/>
-                <a:ea typeface="Calibri" pitchFamily="34" charset="-122"/>
-                <a:cs typeface="Calibri" pitchFamily="34" charset="-120"/>
-              </a:rPr>
-              <a:t>0,762</a:t>
-            </a:r>
-            <a:endParaRPr lang="en-US" sz="1200" dirty="0"/>
-          </a:p>
-        </p:txBody>
-      </p:sp>
-      <p:sp>
-        <p:nvSpPr>
-          <p:cNvPr id="20" name="Text 18"/>
-          <p:cNvSpPr/>
-          <p:nvPr/>
-        </p:nvSpPr>
-        <p:spPr>
-          <a:xfrm>
-            <a:off x="685800" y="4956048"/>
-            <a:ext cx="2286000" cy="292608"/>
-          </a:xfrm>
-          <a:prstGeom prst="rect">
-            <a:avLst/>
-          </a:prstGeom>
-          <a:noFill/>
-          <a:ln/>
-        </p:spPr>
-        <p:txBody>
-          <a:bodyPr wrap="square" lIns="0" tIns="0" rIns="0" bIns="0" rtlCol="0" anchor="ctr"/>
-          <a:lstStyle/>
-          <a:p>
-            <a:pPr indent="0" marL="0">
-              <a:buNone/>
-            </a:pPr>
-            <a:r>
-              <a:rPr lang="en-US" sz="1200" dirty="0">
-                <a:solidFill>
-                  <a:srgbClr val="14302B"/>
-                </a:solidFill>
-                <a:latin typeface="Calibri" pitchFamily="34" charset="0"/>
-                <a:ea typeface="Calibri" pitchFamily="34" charset="-122"/>
-                <a:cs typeface="Calibri" pitchFamily="34" charset="-120"/>
-              </a:rPr>
-              <a:t>Mengikuti isyarat arah</a:t>
-            </a:r>
-            <a:endParaRPr lang="en-US" sz="1200" dirty="0"/>
-          </a:p>
-        </p:txBody>
-      </p:sp>
-      <p:sp>
-        <p:nvSpPr>
-          <p:cNvPr id="21" name="Shape 19"/>
-          <p:cNvSpPr/>
-          <p:nvPr/>
-        </p:nvSpPr>
-        <p:spPr>
-          <a:xfrm>
-            <a:off x="3063240" y="5010912"/>
-            <a:ext cx="1474744" cy="182880"/>
-          </a:xfrm>
-          <a:prstGeom prst="rect">
-            <a:avLst/>
-          </a:prstGeom>
-          <a:solidFill>
-            <a:srgbClr val="0D8271"/>
-          </a:solidFill>
-          <a:ln w="12700">
-            <a:solidFill>
-              <a:srgbClr val="333333"/>
-            </a:solidFill>
-            <a:prstDash val="solid"/>
-          </a:ln>
-        </p:spPr>
-      </p:sp>
-      <p:sp>
-        <p:nvSpPr>
-          <p:cNvPr id="22" name="Text 20"/>
-          <p:cNvSpPr/>
-          <p:nvPr/>
-        </p:nvSpPr>
-        <p:spPr>
-          <a:xfrm>
-            <a:off x="6126480" y="4956048"/>
-            <a:ext cx="640080" cy="292608"/>
-          </a:xfrm>
-          <a:prstGeom prst="rect">
-            <a:avLst/>
-          </a:prstGeom>
-          <a:noFill/>
-          <a:ln/>
-        </p:spPr>
-        <p:txBody>
-          <a:bodyPr wrap="square" lIns="0" tIns="0" rIns="0" bIns="0" rtlCol="0" anchor="ctr"/>
-          <a:lstStyle/>
-          <a:p>
-            <a:pPr indent="0" marL="0">
-              <a:buNone/>
-            </a:pPr>
-            <a:r>
-              <a:rPr lang="en-US" sz="1200" b="1" dirty="0">
-                <a:solidFill>
-                  <a:srgbClr val="0D8271"/>
-                </a:solidFill>
-                <a:latin typeface="Calibri" pitchFamily="34" charset="0"/>
-                <a:ea typeface="Calibri" pitchFamily="34" charset="-122"/>
-                <a:cs typeface="Calibri" pitchFamily="34" charset="-120"/>
-              </a:rPr>
-              <a:t>0,504</a:t>
-            </a:r>
-            <a:endParaRPr lang="en-US" sz="1200" dirty="0"/>
-          </a:p>
-        </p:txBody>
-      </p:sp>
-      <p:sp>
-        <p:nvSpPr>
-          <p:cNvPr id="23" name="Shape 21"/>
-          <p:cNvSpPr/>
-          <p:nvPr/>
-        </p:nvSpPr>
-        <p:spPr>
-          <a:xfrm>
-            <a:off x="7086600" y="2697480"/>
-            <a:ext cx="4023360" cy="2651760"/>
+              <a:t>Guru SLB di Jambi, ditanya apakah layanan sanggup menampung tiga kali lipat rujukan</a:t>
+            </a:r>
+            <a:endParaRPr lang="en-US" sz="1250" dirty="0"/>
+          </a:p>
+        </p:txBody>
+      </p:sp>
+      <p:sp>
+        <p:nvSpPr>
+          <p:cNvPr id="9" name="Shape 6"/>
+          <p:cNvSpPr/>
+          <p:nvPr/>
+        </p:nvSpPr>
+        <p:spPr>
+          <a:xfrm>
+            <a:off x="7726680" y="4572000"/>
+            <a:ext cx="3383280" cy="1051560"/>
           </a:xfrm>
           <a:prstGeom prst="roundRect">
             <a:avLst>
-              <a:gd name="adj" fmla="val 2069"/>
+              <a:gd name="adj" fmla="val 5217"/>
             </a:avLst>
           </a:prstGeom>
           <a:solidFill>
@@ -3270,14 +4601,14 @@
       </p:sp>
       <p:sp>
         <p:nvSpPr>
-          <p:cNvPr id="24" name="Text 22"/>
-          <p:cNvSpPr/>
-          <p:nvPr/>
-        </p:nvSpPr>
-        <p:spPr>
-          <a:xfrm>
-            <a:off x="7342632" y="2926080"/>
-            <a:ext cx="3520440" cy="822960"/>
+          <p:cNvPr id="10" name="Text 7"/>
+          <p:cNvSpPr/>
+          <p:nvPr/>
+        </p:nvSpPr>
+        <p:spPr>
+          <a:xfrm>
+            <a:off x="7955280" y="4681728"/>
+            <a:ext cx="2926080" cy="442452"/>
           </a:xfrm>
           <a:prstGeom prst="rect">
             <a:avLst/>
@@ -3291,12 +4622,12 @@
           <a:p>
             <a:pPr indent="0" marL="0">
               <a:lnSpc>
-                <a:spcPts val="2200"/>
+                <a:spcPts val="3000"/>
               </a:lnSpc>
               <a:buNone/>
             </a:pPr>
             <a:r>
-              <a:rPr lang="en-US" sz="1700" b="1" dirty="0">
+              <a:rPr lang="en-US" sz="3000" b="1" dirty="0">
                 <a:solidFill>
                   <a:srgbClr val="B1442C"/>
                 </a:solidFill>
@@ -3304,22 +4635,22 @@
                 <a:ea typeface="Cambria" pitchFamily="34" charset="-122"/>
                 <a:cs typeface="Cambria" pitchFamily="34" charset="-120"/>
               </a:rPr>
-              <a:t>Yang paling memprediksi autisme di dataset itu adalah seberapa baik alatnya merekam anaknya.</a:t>
-            </a:r>
-            <a:endParaRPr lang="en-US" sz="1700" dirty="0"/>
-          </a:p>
-        </p:txBody>
-      </p:sp>
-      <p:sp>
-        <p:nvSpPr>
-          <p:cNvPr id="25" name="Text 23"/>
-          <p:cNvSpPr/>
-          <p:nvPr/>
-        </p:nvSpPr>
-        <p:spPr>
-          <a:xfrm>
-            <a:off x="7342632" y="3840480"/>
-            <a:ext cx="3520440" cy="1371600"/>
+              <a:t>38,3×</a:t>
+            </a:r>
+            <a:endParaRPr lang="en-US" sz="3000" dirty="0"/>
+          </a:p>
+        </p:txBody>
+      </p:sp>
+      <p:sp>
+        <p:nvSpPr>
+          <p:cNvPr id="11" name="Text 8"/>
+          <p:cNvSpPr/>
+          <p:nvPr/>
+        </p:nvSpPr>
+        <p:spPr>
+          <a:xfrm>
+            <a:off x="7955280" y="5179044"/>
+            <a:ext cx="2926080" cy="274320"/>
           </a:xfrm>
           <a:prstGeom prst="rect">
             <a:avLst/>
@@ -3331,18 +4662,11 @@
           <a:bodyPr wrap="square" lIns="0" tIns="0" rIns="0" bIns="0" rtlCol="0" anchor="ctr"/>
           <a:lstStyle/>
           <a:p>
-            <a:pPr marL="342900" indent="-342900">
-              <a:lnSpc>
-                <a:spcPts val="1700"/>
-              </a:lnSpc>
-              <a:spcAft>
-                <a:spcPts val="600"/>
-              </a:spcAft>
-              <a:buSzPct val="100000"/>
-              <a:buChar char="•"/>
-            </a:pPr>
-            <a:r>
-              <a:rPr lang="en-US" sz="1200" dirty="0">
+            <a:pPr indent="0" marL="0">
+              <a:buNone/>
+            </a:pPr>
+            <a:r>
+              <a:rPr lang="en-US" sz="1400" b="1" dirty="0">
                 <a:solidFill>
                   <a:srgbClr val="14302B"/>
                 </a:solidFill>
@@ -3350,121 +4674,64 @@
                 <a:ea typeface="Calibri" pitchFamily="34" charset="-122"/>
                 <a:cs typeface="Calibri" pitchFamily="34" charset="-120"/>
               </a:rPr>
-              <a:t>Alas tanpa satu pun fitur perilaku: AUC 0,905.</a:t>
-            </a:r>
-            <a:endParaRPr lang="en-US" sz="1200" dirty="0"/>
-          </a:p>
-          <a:p>
-            <a:pPr marL="342900" indent="-342900">
+              <a:t>beban rujukan baris teratas</a:t>
+            </a:r>
+            <a:endParaRPr lang="en-US" sz="1400" dirty="0"/>
+          </a:p>
+        </p:txBody>
+      </p:sp>
+      <p:sp>
+        <p:nvSpPr>
+          <p:cNvPr id="12" name="Text 9"/>
+          <p:cNvSpPr/>
+          <p:nvPr/>
+        </p:nvSpPr>
+        <p:spPr>
+          <a:xfrm>
+            <a:off x="7955280" y="5489940"/>
+            <a:ext cx="2926080" cy="640080"/>
+          </a:xfrm>
+          <a:prstGeom prst="rect">
+            <a:avLst/>
+          </a:prstGeom>
+          <a:noFill/>
+          <a:ln/>
+        </p:spPr>
+        <p:txBody>
+          <a:bodyPr wrap="square" lIns="0" tIns="0" rIns="0" bIns="0" rtlCol="0" anchor="ctr"/>
+          <a:lstStyle/>
+          <a:p>
+            <a:pPr indent="0" marL="0">
               <a:lnSpc>
-                <a:spcPts val="1700"/>
+                <a:spcPts val="1500"/>
               </a:lnSpc>
-              <a:spcAft>
-                <a:spcPts val="600"/>
-              </a:spcAft>
-              <a:buSzPct val="100000"/>
-              <a:buChar char="•"/>
+              <a:buNone/>
             </a:pPr>
             <a:r>
               <a:rPr lang="en-US" sz="1200" dirty="0">
                 <a:solidFill>
-                  <a:srgbClr val="14302B"/>
+                  <a:srgbClr val="4A635D"/>
                 </a:solidFill>
                 <a:latin typeface="Calibri" pitchFamily="34" charset="0"/>
                 <a:ea typeface="Calibri" pitchFamily="34" charset="-122"/>
                 <a:cs typeface="Calibri" pitchFamily="34" charset="-120"/>
               </a:rPr>
-              <a:t>Model indeks perilaku kami: 0,784. Lebih rendah.</a:t>
+              <a:t>dibanding titik kerja yang dikirim</a:t>
             </a:r>
             <a:endParaRPr lang="en-US" sz="1200" dirty="0"/>
           </a:p>
-          <a:p>
-            <a:pPr marL="342900" indent="-342900">
-              <a:lnSpc>
-                <a:spcPts val="1700"/>
-              </a:lnSpc>
-              <a:spcAft>
-                <a:spcPts val="600"/>
-              </a:spcAft>
-              <a:buSzPct val="100000"/>
-              <a:buChar char="•"/>
-            </a:pPr>
-            <a:r>
-              <a:rPr lang="en-US" sz="1200" dirty="0">
-                <a:solidFill>
-                  <a:srgbClr val="14302B"/>
-                </a:solidFill>
-                <a:latin typeface="Calibri" pitchFamily="34" charset="0"/>
-                <a:ea typeface="Calibri" pitchFamily="34" charset="-122"/>
-                <a:cs typeface="Calibri" pitchFamily="34" charset="-120"/>
-              </a:rPr>
-              <a:t>Anak ASD terbaca 13 percobaan, anak TD 20.</a:t>
-            </a:r>
-            <a:endParaRPr lang="en-US" sz="1200" dirty="0"/>
-          </a:p>
-          <a:p>
-            <a:pPr marL="342900" indent="-342900">
-              <a:lnSpc>
-                <a:spcPts val="1700"/>
-              </a:lnSpc>
-              <a:spcAft>
-                <a:spcPts val="600"/>
-              </a:spcAft>
-              <a:buSzPct val="100000"/>
-              <a:buChar char="•"/>
-            </a:pPr>
-            <a:r>
-              <a:rPr lang="en-US" sz="1200" dirty="0">
-                <a:solidFill>
-                  <a:srgbClr val="14302B"/>
-                </a:solidFill>
-                <a:latin typeface="Calibri" pitchFamily="34" charset="0"/>
-                <a:ea typeface="Calibri" pitchFamily="34" charset="-122"/>
-                <a:cs typeface="Calibri" pitchFamily="34" charset="-120"/>
-              </a:rPr>
-              <a:t>Bobot ditolak. Lapis 1 dikirim sendirian.</a:t>
-            </a:r>
-            <a:endParaRPr lang="en-US" sz="1200" dirty="0"/>
-          </a:p>
-        </p:txBody>
-      </p:sp>
-      <p:sp>
-        <p:nvSpPr>
-          <p:cNvPr id="26" name="Shape 24"/>
-          <p:cNvSpPr/>
-          <p:nvPr/>
-        </p:nvSpPr>
-        <p:spPr>
-          <a:xfrm>
-            <a:off x="685800" y="5486400"/>
-            <a:ext cx="10424160" cy="777240"/>
-          </a:xfrm>
-          <a:prstGeom prst="roundRect">
-            <a:avLst>
-              <a:gd name="adj" fmla="val 7059"/>
-            </a:avLst>
-          </a:prstGeom>
-          <a:solidFill>
-            <a:srgbClr val="0B1E1B"/>
-          </a:solidFill>
-          <a:ln w="12700">
-            <a:solidFill>
-              <a:srgbClr val="0B1E1B"/>
-            </a:solidFill>
-            <a:prstDash val="solid"/>
-          </a:ln>
-        </p:spPr>
-      </p:sp>
-      <p:sp>
-        <p:nvSpPr>
-          <p:cNvPr id="27" name="Text 25"/>
-          <p:cNvSpPr/>
-          <p:nvPr/>
-        </p:nvSpPr>
-        <p:spPr>
-          <a:xfrm>
-            <a:off x="1097280" y="5669280"/>
-            <a:ext cx="9601200" cy="411480"/>
+        </p:txBody>
+      </p:sp>
+      <p:sp>
+        <p:nvSpPr>
+          <p:cNvPr id="13" name="Text 10"/>
+          <p:cNvSpPr/>
+          <p:nvPr/>
+        </p:nvSpPr>
+        <p:spPr>
+          <a:xfrm>
+            <a:off x="685800" y="5760720"/>
+            <a:ext cx="10424160" cy="502920"/>
           </a:xfrm>
           <a:prstGeom prst="rect">
             <a:avLst/>
@@ -3478,22 +4745,22 @@
           <a:p>
             <a:pPr indent="0" marL="0">
               <a:lnSpc>
-                <a:spcPts val="2200"/>
+                <a:spcPts val="2100"/>
               </a:lnSpc>
               <a:buNone/>
             </a:pPr>
             <a:r>
-              <a:rPr lang="en-US" sz="1600" b="1" i="1" dirty="0">
-                <a:solidFill>
-                  <a:srgbClr val="FFFFFF"/>
+              <a:rPr lang="en-US" sz="1500" b="1" i="1" dirty="0">
+                <a:solidFill>
+                  <a:srgbClr val="0B1E1B"/>
                 </a:solidFill>
                 <a:latin typeface="Cambria" pitchFamily="34" charset="0"/>
                 <a:ea typeface="Cambria" pitchFamily="34" charset="-122"/>
                 <a:cs typeface="Cambria" pitchFamily="34" charset="-120"/>
               </a:rPr>
-              <a:t>Ini kedua kalinya audit kami membunuh angka terbaik kami — yang pertama CNN dataset wajah, AUC 0,932, bobotnya tidak ada di repositori.</a:t>
-            </a:r>
-            <a:endParaRPr lang="en-US" sz="1600" dirty="0"/>
+              <a:t>Tiga kali lipat sudah dinilai sulit. Baris bersensitivitas 92 persen bukan tiga kali — ia 38 kali. Kami memilih baris yang paling sedikit menemukan karena itu satu-satunya yang muat.</a:t>
+            </a:r>
+            <a:endParaRPr lang="en-US" sz="1500" dirty="0"/>
           </a:p>
         </p:txBody>
       </p:sp>
@@ -3614,7 +4881,7 @@
                 <a:ea typeface="Calibri" pitchFamily="34" charset="-122"/>
                 <a:cs typeface="Calibri" pitchFamily="34" charset="-120"/>
               </a:rPr>
-              <a:t>Dampak dan biaya</a:t>
+              <a:t>Lapis bobot · hasil negatif</a:t>
             </a:r>
             <a:endParaRPr lang="en-US" sz="1200" dirty="0"/>
           </a:p>
@@ -3656,7 +4923,7 @@
                 <a:ea typeface="Cambria" pitchFamily="34" charset="-122"/>
                 <a:cs typeface="Cambria" pitchFamily="34" charset="-120"/>
               </a:rPr>
-              <a:t>Ambil metrik yang paling keras terhadap kami</a:t>
+              <a:t>Kami unduh data anak yang terbit, pasang bobotnya, lalu auditnya membunuhnya</a:t>
             </a:r>
             <a:endParaRPr lang="en-US" sz="3200" dirty="0"/>
           </a:p>
@@ -3671,7 +4938,7 @@
         <p:spPr>
           <a:xfrm>
             <a:off x="685800" y="2103120"/>
-            <a:ext cx="10424160" cy="502920"/>
+            <a:ext cx="10424160" cy="548640"/>
           </a:xfrm>
           <a:prstGeom prst="rect">
             <a:avLst/>
@@ -3685,47 +4952,123 @@
           <a:p>
             <a:pPr indent="0" marL="0">
               <a:lnSpc>
-                <a:spcPts val="2100"/>
+                <a:spcPts val="2000"/>
               </a:lnSpc>
               <a:buNone/>
             </a:pPr>
             <a:r>
-              <a:rPr lang="en-US" sz="1500" b="1" dirty="0">
-                <a:solidFill>
-                  <a:srgbClr val="B1442C"/>
+              <a:rPr lang="en-US" sz="1400" dirty="0">
+                <a:solidFill>
+                  <a:srgbClr val="14302B"/>
                 </a:solidFill>
                 <a:latin typeface="Calibri" pitchFamily="34" charset="0"/>
                 <a:ea typeface="Calibri" pitchFamily="34" charset="-122"/>
                 <a:cs typeface="Calibri" pitchFamily="34" charset="-120"/>
               </a:rPr>
-              <a:t>Skenario, bukan hasil terukur: angka per kasus ini berlaku hanya bila titik operasi protokol penuh berhasil direplikasi pada balita Indonesia. Hari ini titik itu ditahan.</a:t>
-            </a:r>
-            <a:endParaRPr lang="en-US" sz="1500" dirty="0"/>
-          </a:p>
-        </p:txBody>
-      </p:sp>
-      <p:sp>
-        <p:nvSpPr>
-          <p:cNvPr id="7" name="Shape 5"/>
-          <p:cNvSpPr/>
-          <p:nvPr/>
-        </p:nvSpPr>
-        <p:spPr>
-          <a:xfrm>
-            <a:off x="685800" y="2788920"/>
-            <a:ext cx="3246120" cy="1965960"/>
-          </a:xfrm>
-          <a:prstGeom prst="roundRect">
-            <a:avLst>
-              <a:gd name="adj" fmla="val 2791"/>
-            </a:avLst>
+              <a:t>Cilia dkk. 2022, CC BY 4.0: 59 anak berlabel, 2,25 juta baris koordinat. Data anak sungguhan tanpa merekam satu pun anak sendiri. Empat audit ditulis sebelum fitting dijalankan. Dua gagal.</a:t>
+            </a:r>
+            <a:endParaRPr lang="en-US" sz="1400" dirty="0"/>
+          </a:p>
+        </p:txBody>
+      </p:sp>
+      <p:sp>
+        <p:nvSpPr>
+          <p:cNvPr id="7" name="Text 5"/>
+          <p:cNvSpPr/>
+          <p:nvPr/>
+        </p:nvSpPr>
+        <p:spPr>
+          <a:xfrm>
+            <a:off x="685800" y="2743200"/>
+            <a:ext cx="6035040" cy="274320"/>
+          </a:xfrm>
+          <a:prstGeom prst="rect">
+            <a:avLst/>
+          </a:prstGeom>
+          <a:noFill/>
+          <a:ln/>
+        </p:spPr>
+        <p:txBody>
+          <a:bodyPr wrap="square" lIns="0" tIns="0" rIns="0" bIns="0" rtlCol="0" anchor="ctr"/>
+          <a:lstStyle/>
+          <a:p>
+            <a:pPr indent="0" marL="0">
+              <a:buNone/>
+            </a:pPr>
+            <a:r>
+              <a:rPr lang="en-US" sz="1100" b="1" dirty="0">
+                <a:solidFill>
+                  <a:srgbClr val="4A635D"/>
+                </a:solidFill>
+                <a:latin typeface="Calibri" pitchFamily="34" charset="0"/>
+                <a:ea typeface="Calibri" pitchFamily="34" charset="-122"/>
+                <a:cs typeface="Calibri" pitchFamily="34" charset="-120"/>
+              </a:rPr>
+              <a:t>AUC prediktor tunggal terhadap label ASD</a:t>
+            </a:r>
+            <a:endParaRPr lang="en-US" sz="1100" dirty="0"/>
+          </a:p>
+        </p:txBody>
+      </p:sp>
+      <p:sp>
+        <p:nvSpPr>
+          <p:cNvPr id="8" name="Text 6"/>
+          <p:cNvSpPr/>
+          <p:nvPr/>
+        </p:nvSpPr>
+        <p:spPr>
+          <a:xfrm>
+            <a:off x="685800" y="3127248"/>
+            <a:ext cx="2286000" cy="292608"/>
+          </a:xfrm>
+          <a:prstGeom prst="rect">
+            <a:avLst/>
+          </a:prstGeom>
+          <a:noFill/>
+          <a:ln/>
+        </p:spPr>
+        <p:txBody>
+          <a:bodyPr wrap="square" lIns="0" tIns="0" rIns="0" bIns="0" rtlCol="0" anchor="ctr"/>
+          <a:lstStyle/>
+          <a:p>
+            <a:pPr indent="0" marL="0">
+              <a:buNone/>
+            </a:pPr>
+            <a:r>
+              <a:rPr lang="en-US" sz="1200" dirty="0">
+                <a:solidFill>
+                  <a:srgbClr val="14302B"/>
+                </a:solidFill>
+                <a:latin typeface="Calibri" pitchFamily="34" charset="0"/>
+                <a:ea typeface="Calibri" pitchFamily="34" charset="-122"/>
+                <a:cs typeface="Calibri" pitchFamily="34" charset="-120"/>
+              </a:rPr>
+              <a:t>Rasio pelacakan alat</a:t>
+            </a:r>
+            <a:endParaRPr lang="en-US" sz="1200" dirty="0"/>
+          </a:p>
+        </p:txBody>
+      </p:sp>
+      <p:sp>
+        <p:nvSpPr>
+          <p:cNvPr id="9" name="Shape 7"/>
+          <p:cNvSpPr/>
+          <p:nvPr/>
+        </p:nvSpPr>
+        <p:spPr>
+          <a:xfrm>
+            <a:off x="3063240" y="3182112"/>
+            <a:ext cx="2495946" cy="182880"/>
+          </a:xfrm>
+          <a:prstGeom prst="rect">
+            <a:avLst/>
           </a:prstGeom>
           <a:solidFill>
-            <a:srgbClr val="FFFFFF"/>
+            <a:srgbClr val="B1442C"/>
           </a:solidFill>
           <a:ln w="12700">
             <a:solidFill>
-              <a:srgbClr val="DBE4E1"/>
+              <a:srgbClr val="333333"/>
             </a:solidFill>
             <a:prstDash val="solid"/>
           </a:ln>
@@ -3733,14 +5076,14 @@
       </p:sp>
       <p:sp>
         <p:nvSpPr>
-          <p:cNvPr id="8" name="Text 6"/>
-          <p:cNvSpPr/>
-          <p:nvPr/>
-        </p:nvSpPr>
-        <p:spPr>
-          <a:xfrm>
-            <a:off x="960120" y="3035808"/>
-            <a:ext cx="2697480" cy="548640"/>
+          <p:cNvPr id="10" name="Text 8"/>
+          <p:cNvSpPr/>
+          <p:nvPr/>
+        </p:nvSpPr>
+        <p:spPr>
+          <a:xfrm>
+            <a:off x="6126480" y="3127248"/>
+            <a:ext cx="640080" cy="292608"/>
           </a:xfrm>
           <a:prstGeom prst="rect">
             <a:avLst/>
@@ -3756,30 +5099,511 @@
               <a:buNone/>
             </a:pPr>
             <a:r>
-              <a:rPr lang="en-US" sz="3200" b="1" dirty="0">
-                <a:solidFill>
-                  <a:srgbClr val="0B1E1B"/>
+              <a:rPr lang="en-US" sz="1200" b="1" dirty="0">
+                <a:solidFill>
+                  <a:srgbClr val="B1442C"/>
+                </a:solidFill>
+                <a:latin typeface="Calibri" pitchFamily="34" charset="0"/>
+                <a:ea typeface="Calibri" pitchFamily="34" charset="-122"/>
+                <a:cs typeface="Calibri" pitchFamily="34" charset="-120"/>
+              </a:rPr>
+              <a:t>0,853</a:t>
+            </a:r>
+            <a:endParaRPr lang="en-US" sz="1200" dirty="0"/>
+          </a:p>
+        </p:txBody>
+      </p:sp>
+      <p:sp>
+        <p:nvSpPr>
+          <p:cNvPr id="11" name="Text 9"/>
+          <p:cNvSpPr/>
+          <p:nvPr/>
+        </p:nvSpPr>
+        <p:spPr>
+          <a:xfrm>
+            <a:off x="685800" y="3584448"/>
+            <a:ext cx="2286000" cy="292608"/>
+          </a:xfrm>
+          <a:prstGeom prst="rect">
+            <a:avLst/>
+          </a:prstGeom>
+          <a:noFill/>
+          <a:ln/>
+        </p:spPr>
+        <p:txBody>
+          <a:bodyPr wrap="square" lIns="0" tIns="0" rIns="0" bIns="0" rtlCol="0" anchor="ctr"/>
+          <a:lstStyle/>
+          <a:p>
+            <a:pPr indent="0" marL="0">
+              <a:buNone/>
+            </a:pPr>
+            <a:r>
+              <a:rPr lang="en-US" sz="1200" dirty="0">
+                <a:solidFill>
+                  <a:srgbClr val="14302B"/>
+                </a:solidFill>
+                <a:latin typeface="Calibri" pitchFamily="34" charset="0"/>
+                <a:ea typeface="Calibri" pitchFamily="34" charset="-122"/>
+                <a:cs typeface="Calibri" pitchFamily="34" charset="-120"/>
+              </a:rPr>
+              <a:t>Fraksi kedip</a:t>
+            </a:r>
+            <a:endParaRPr lang="en-US" sz="1200" dirty="0"/>
+          </a:p>
+        </p:txBody>
+      </p:sp>
+      <p:sp>
+        <p:nvSpPr>
+          <p:cNvPr id="12" name="Shape 10"/>
+          <p:cNvSpPr/>
+          <p:nvPr/>
+        </p:nvSpPr>
+        <p:spPr>
+          <a:xfrm>
+            <a:off x="3063240" y="3639312"/>
+            <a:ext cx="2478390" cy="182880"/>
+          </a:xfrm>
+          <a:prstGeom prst="rect">
+            <a:avLst/>
+          </a:prstGeom>
+          <a:solidFill>
+            <a:srgbClr val="B1442C"/>
+          </a:solidFill>
+          <a:ln w="12700">
+            <a:solidFill>
+              <a:srgbClr val="333333"/>
+            </a:solidFill>
+            <a:prstDash val="solid"/>
+          </a:ln>
+        </p:spPr>
+      </p:sp>
+      <p:sp>
+        <p:nvSpPr>
+          <p:cNvPr id="13" name="Text 11"/>
+          <p:cNvSpPr/>
+          <p:nvPr/>
+        </p:nvSpPr>
+        <p:spPr>
+          <a:xfrm>
+            <a:off x="6126480" y="3584448"/>
+            <a:ext cx="640080" cy="292608"/>
+          </a:xfrm>
+          <a:prstGeom prst="rect">
+            <a:avLst/>
+          </a:prstGeom>
+          <a:noFill/>
+          <a:ln/>
+        </p:spPr>
+        <p:txBody>
+          <a:bodyPr wrap="square" lIns="0" tIns="0" rIns="0" bIns="0" rtlCol="0" anchor="ctr"/>
+          <a:lstStyle/>
+          <a:p>
+            <a:pPr indent="0" marL="0">
+              <a:buNone/>
+            </a:pPr>
+            <a:r>
+              <a:rPr lang="en-US" sz="1200" b="1" dirty="0">
+                <a:solidFill>
+                  <a:srgbClr val="B1442C"/>
+                </a:solidFill>
+                <a:latin typeface="Calibri" pitchFamily="34" charset="0"/>
+                <a:ea typeface="Calibri" pitchFamily="34" charset="-122"/>
+                <a:cs typeface="Calibri" pitchFamily="34" charset="-120"/>
+              </a:rPr>
+              <a:t>0,847</a:t>
+            </a:r>
+            <a:endParaRPr lang="en-US" sz="1200" dirty="0"/>
+          </a:p>
+        </p:txBody>
+      </p:sp>
+      <p:sp>
+        <p:nvSpPr>
+          <p:cNvPr id="14" name="Text 12"/>
+          <p:cNvSpPr/>
+          <p:nvPr/>
+        </p:nvSpPr>
+        <p:spPr>
+          <a:xfrm>
+            <a:off x="685800" y="4041648"/>
+            <a:ext cx="2286000" cy="292608"/>
+          </a:xfrm>
+          <a:prstGeom prst="rect">
+            <a:avLst/>
+          </a:prstGeom>
+          <a:noFill/>
+          <a:ln/>
+        </p:spPr>
+        <p:txBody>
+          <a:bodyPr wrap="square" lIns="0" tIns="0" rIns="0" bIns="0" rtlCol="0" anchor="ctr"/>
+          <a:lstStyle/>
+          <a:p>
+            <a:pPr indent="0" marL="0">
+              <a:buNone/>
+            </a:pPr>
+            <a:r>
+              <a:rPr lang="en-US" sz="1200" dirty="0">
+                <a:solidFill>
+                  <a:srgbClr val="14302B"/>
+                </a:solidFill>
+                <a:latin typeface="Calibri" pitchFamily="34" charset="0"/>
+                <a:ea typeface="Calibri" pitchFamily="34" charset="-122"/>
+                <a:cs typeface="Calibri" pitchFamily="34" charset="-120"/>
+              </a:rPr>
+              <a:t>Fraksi fiksasi</a:t>
+            </a:r>
+            <a:endParaRPr lang="en-US" sz="1200" dirty="0"/>
+          </a:p>
+        </p:txBody>
+      </p:sp>
+      <p:sp>
+        <p:nvSpPr>
+          <p:cNvPr id="15" name="Shape 13"/>
+          <p:cNvSpPr/>
+          <p:nvPr/>
+        </p:nvSpPr>
+        <p:spPr>
+          <a:xfrm>
+            <a:off x="3063240" y="4096512"/>
+            <a:ext cx="2416942" cy="182880"/>
+          </a:xfrm>
+          <a:prstGeom prst="rect">
+            <a:avLst/>
+          </a:prstGeom>
+          <a:solidFill>
+            <a:srgbClr val="B1442C"/>
+          </a:solidFill>
+          <a:ln w="12700">
+            <a:solidFill>
+              <a:srgbClr val="333333"/>
+            </a:solidFill>
+            <a:prstDash val="solid"/>
+          </a:ln>
+        </p:spPr>
+      </p:sp>
+      <p:sp>
+        <p:nvSpPr>
+          <p:cNvPr id="16" name="Text 14"/>
+          <p:cNvSpPr/>
+          <p:nvPr/>
+        </p:nvSpPr>
+        <p:spPr>
+          <a:xfrm>
+            <a:off x="6126480" y="4041648"/>
+            <a:ext cx="640080" cy="292608"/>
+          </a:xfrm>
+          <a:prstGeom prst="rect">
+            <a:avLst/>
+          </a:prstGeom>
+          <a:noFill/>
+          <a:ln/>
+        </p:spPr>
+        <p:txBody>
+          <a:bodyPr wrap="square" lIns="0" tIns="0" rIns="0" bIns="0" rtlCol="0" anchor="ctr"/>
+          <a:lstStyle/>
+          <a:p>
+            <a:pPr indent="0" marL="0">
+              <a:buNone/>
+            </a:pPr>
+            <a:r>
+              <a:rPr lang="en-US" sz="1200" b="1" dirty="0">
+                <a:solidFill>
+                  <a:srgbClr val="B1442C"/>
+                </a:solidFill>
+                <a:latin typeface="Calibri" pitchFamily="34" charset="0"/>
+                <a:ea typeface="Calibri" pitchFamily="34" charset="-122"/>
+                <a:cs typeface="Calibri" pitchFamily="34" charset="-120"/>
+              </a:rPr>
+              <a:t>0,826</a:t>
+            </a:r>
+            <a:endParaRPr lang="en-US" sz="1200" dirty="0"/>
+          </a:p>
+        </p:txBody>
+      </p:sp>
+      <p:sp>
+        <p:nvSpPr>
+          <p:cNvPr id="17" name="Text 15"/>
+          <p:cNvSpPr/>
+          <p:nvPr/>
+        </p:nvSpPr>
+        <p:spPr>
+          <a:xfrm>
+            <a:off x="685800" y="4498848"/>
+            <a:ext cx="2286000" cy="292608"/>
+          </a:xfrm>
+          <a:prstGeom prst="rect">
+            <a:avLst/>
+          </a:prstGeom>
+          <a:noFill/>
+          <a:ln/>
+        </p:spPr>
+        <p:txBody>
+          <a:bodyPr wrap="square" lIns="0" tIns="0" rIns="0" bIns="0" rtlCol="0" anchor="ctr"/>
+          <a:lstStyle/>
+          <a:p>
+            <a:pPr indent="0" marL="0">
+              <a:buNone/>
+            </a:pPr>
+            <a:r>
+              <a:rPr lang="en-US" sz="1200" dirty="0">
+                <a:solidFill>
+                  <a:srgbClr val="14302B"/>
+                </a:solidFill>
+                <a:latin typeface="Calibri" pitchFamily="34" charset="0"/>
+                <a:ea typeface="Calibri" pitchFamily="34" charset="-122"/>
+                <a:cs typeface="Calibri" pitchFamily="34" charset="-120"/>
+              </a:rPr>
+              <a:t>Sebaran tatapan</a:t>
+            </a:r>
+            <a:endParaRPr lang="en-US" sz="1200" dirty="0"/>
+          </a:p>
+        </p:txBody>
+      </p:sp>
+      <p:sp>
+        <p:nvSpPr>
+          <p:cNvPr id="18" name="Shape 16"/>
+          <p:cNvSpPr/>
+          <p:nvPr/>
+        </p:nvSpPr>
+        <p:spPr>
+          <a:xfrm>
+            <a:off x="3063240" y="4553712"/>
+            <a:ext cx="2229673" cy="182880"/>
+          </a:xfrm>
+          <a:prstGeom prst="rect">
+            <a:avLst/>
+          </a:prstGeom>
+          <a:solidFill>
+            <a:srgbClr val="4A635D"/>
+          </a:solidFill>
+          <a:ln w="12700">
+            <a:solidFill>
+              <a:srgbClr val="333333"/>
+            </a:solidFill>
+            <a:prstDash val="solid"/>
+          </a:ln>
+        </p:spPr>
+      </p:sp>
+      <p:sp>
+        <p:nvSpPr>
+          <p:cNvPr id="19" name="Text 17"/>
+          <p:cNvSpPr/>
+          <p:nvPr/>
+        </p:nvSpPr>
+        <p:spPr>
+          <a:xfrm>
+            <a:off x="6126480" y="4498848"/>
+            <a:ext cx="640080" cy="292608"/>
+          </a:xfrm>
+          <a:prstGeom prst="rect">
+            <a:avLst/>
+          </a:prstGeom>
+          <a:noFill/>
+          <a:ln/>
+        </p:spPr>
+        <p:txBody>
+          <a:bodyPr wrap="square" lIns="0" tIns="0" rIns="0" bIns="0" rtlCol="0" anchor="ctr"/>
+          <a:lstStyle/>
+          <a:p>
+            <a:pPr indent="0" marL="0">
+              <a:buNone/>
+            </a:pPr>
+            <a:r>
+              <a:rPr lang="en-US" sz="1200" b="1" dirty="0">
+                <a:solidFill>
+                  <a:srgbClr val="4A635D"/>
+                </a:solidFill>
+                <a:latin typeface="Calibri" pitchFamily="34" charset="0"/>
+                <a:ea typeface="Calibri" pitchFamily="34" charset="-122"/>
+                <a:cs typeface="Calibri" pitchFamily="34" charset="-120"/>
+              </a:rPr>
+              <a:t>0,762</a:t>
+            </a:r>
+            <a:endParaRPr lang="en-US" sz="1200" dirty="0"/>
+          </a:p>
+        </p:txBody>
+      </p:sp>
+      <p:sp>
+        <p:nvSpPr>
+          <p:cNvPr id="20" name="Text 18"/>
+          <p:cNvSpPr/>
+          <p:nvPr/>
+        </p:nvSpPr>
+        <p:spPr>
+          <a:xfrm>
+            <a:off x="685800" y="4956048"/>
+            <a:ext cx="2286000" cy="292608"/>
+          </a:xfrm>
+          <a:prstGeom prst="rect">
+            <a:avLst/>
+          </a:prstGeom>
+          <a:noFill/>
+          <a:ln/>
+        </p:spPr>
+        <p:txBody>
+          <a:bodyPr wrap="square" lIns="0" tIns="0" rIns="0" bIns="0" rtlCol="0" anchor="ctr"/>
+          <a:lstStyle/>
+          <a:p>
+            <a:pPr indent="0" marL="0">
+              <a:buNone/>
+            </a:pPr>
+            <a:r>
+              <a:rPr lang="en-US" sz="1200" dirty="0">
+                <a:solidFill>
+                  <a:srgbClr val="14302B"/>
+                </a:solidFill>
+                <a:latin typeface="Calibri" pitchFamily="34" charset="0"/>
+                <a:ea typeface="Calibri" pitchFamily="34" charset="-122"/>
+                <a:cs typeface="Calibri" pitchFamily="34" charset="-120"/>
+              </a:rPr>
+              <a:t>Mengikuti isyarat arah</a:t>
+            </a:r>
+            <a:endParaRPr lang="en-US" sz="1200" dirty="0"/>
+          </a:p>
+        </p:txBody>
+      </p:sp>
+      <p:sp>
+        <p:nvSpPr>
+          <p:cNvPr id="21" name="Shape 19"/>
+          <p:cNvSpPr/>
+          <p:nvPr/>
+        </p:nvSpPr>
+        <p:spPr>
+          <a:xfrm>
+            <a:off x="3063240" y="5010912"/>
+            <a:ext cx="1474744" cy="182880"/>
+          </a:xfrm>
+          <a:prstGeom prst="rect">
+            <a:avLst/>
+          </a:prstGeom>
+          <a:solidFill>
+            <a:srgbClr val="0D8271"/>
+          </a:solidFill>
+          <a:ln w="12700">
+            <a:solidFill>
+              <a:srgbClr val="333333"/>
+            </a:solidFill>
+            <a:prstDash val="solid"/>
+          </a:ln>
+        </p:spPr>
+      </p:sp>
+      <p:sp>
+        <p:nvSpPr>
+          <p:cNvPr id="22" name="Text 20"/>
+          <p:cNvSpPr/>
+          <p:nvPr/>
+        </p:nvSpPr>
+        <p:spPr>
+          <a:xfrm>
+            <a:off x="6126480" y="4956048"/>
+            <a:ext cx="640080" cy="292608"/>
+          </a:xfrm>
+          <a:prstGeom prst="rect">
+            <a:avLst/>
+          </a:prstGeom>
+          <a:noFill/>
+          <a:ln/>
+        </p:spPr>
+        <p:txBody>
+          <a:bodyPr wrap="square" lIns="0" tIns="0" rIns="0" bIns="0" rtlCol="0" anchor="ctr"/>
+          <a:lstStyle/>
+          <a:p>
+            <a:pPr indent="0" marL="0">
+              <a:buNone/>
+            </a:pPr>
+            <a:r>
+              <a:rPr lang="en-US" sz="1200" b="1" dirty="0">
+                <a:solidFill>
+                  <a:srgbClr val="0D8271"/>
+                </a:solidFill>
+                <a:latin typeface="Calibri" pitchFamily="34" charset="0"/>
+                <a:ea typeface="Calibri" pitchFamily="34" charset="-122"/>
+                <a:cs typeface="Calibri" pitchFamily="34" charset="-120"/>
+              </a:rPr>
+              <a:t>0,504</a:t>
+            </a:r>
+            <a:endParaRPr lang="en-US" sz="1200" dirty="0"/>
+          </a:p>
+        </p:txBody>
+      </p:sp>
+      <p:sp>
+        <p:nvSpPr>
+          <p:cNvPr id="23" name="Shape 21"/>
+          <p:cNvSpPr/>
+          <p:nvPr/>
+        </p:nvSpPr>
+        <p:spPr>
+          <a:xfrm>
+            <a:off x="7086600" y="2697480"/>
+            <a:ext cx="4023360" cy="2651760"/>
+          </a:xfrm>
+          <a:prstGeom prst="roundRect">
+            <a:avLst>
+              <a:gd name="adj" fmla="val 2069"/>
+            </a:avLst>
+          </a:prstGeom>
+          <a:solidFill>
+            <a:srgbClr val="FBEAE5"/>
+          </a:solidFill>
+          <a:ln w="12700">
+            <a:solidFill>
+              <a:srgbClr val="FBEAE5"/>
+            </a:solidFill>
+            <a:prstDash val="solid"/>
+          </a:ln>
+        </p:spPr>
+      </p:sp>
+      <p:sp>
+        <p:nvSpPr>
+          <p:cNvPr id="24" name="Text 22"/>
+          <p:cNvSpPr/>
+          <p:nvPr/>
+        </p:nvSpPr>
+        <p:spPr>
+          <a:xfrm>
+            <a:off x="7342632" y="2926080"/>
+            <a:ext cx="3520440" cy="822960"/>
+          </a:xfrm>
+          <a:prstGeom prst="rect">
+            <a:avLst/>
+          </a:prstGeom>
+          <a:noFill/>
+          <a:ln/>
+        </p:spPr>
+        <p:txBody>
+          <a:bodyPr wrap="square" lIns="0" tIns="0" rIns="0" bIns="0" rtlCol="0" anchor="ctr"/>
+          <a:lstStyle/>
+          <a:p>
+            <a:pPr indent="0" marL="0">
+              <a:lnSpc>
+                <a:spcPts val="2200"/>
+              </a:lnSpc>
+              <a:buNone/>
+            </a:pPr>
+            <a:r>
+              <a:rPr lang="en-US" sz="1700" b="1" dirty="0">
+                <a:solidFill>
+                  <a:srgbClr val="B1442C"/>
                 </a:solidFill>
                 <a:latin typeface="Cambria" pitchFamily="34" charset="0"/>
                 <a:ea typeface="Cambria" pitchFamily="34" charset="-122"/>
                 <a:cs typeface="Cambria" pitchFamily="34" charset="-120"/>
               </a:rPr>
-              <a:t>Rp 9,08 jt</a:t>
-            </a:r>
-            <a:endParaRPr lang="en-US" sz="3200" dirty="0"/>
-          </a:p>
-        </p:txBody>
-      </p:sp>
-      <p:sp>
-        <p:nvSpPr>
-          <p:cNvPr id="9" name="Text 7"/>
-          <p:cNvSpPr/>
-          <p:nvPr/>
-        </p:nvSpPr>
-        <p:spPr>
-          <a:xfrm>
-            <a:off x="960120" y="3639312"/>
-            <a:ext cx="2697480" cy="457200"/>
+              <a:t>Yang paling memprediksi autisme di dataset itu adalah seberapa baik alatnya merekam anaknya.</a:t>
+            </a:r>
+            <a:endParaRPr lang="en-US" sz="1700" dirty="0"/>
+          </a:p>
+        </p:txBody>
+      </p:sp>
+      <p:sp>
+        <p:nvSpPr>
+          <p:cNvPr id="25" name="Text 23"/>
+          <p:cNvSpPr/>
+          <p:nvPr/>
+        </p:nvSpPr>
+        <p:spPr>
+          <a:xfrm>
+            <a:off x="7342632" y="3840480"/>
+            <a:ext cx="3520440" cy="1371600"/>
           </a:xfrm>
           <a:prstGeom prst="rect">
             <a:avLst/>
@@ -3791,14 +5615,18 @@
           <a:bodyPr wrap="square" lIns="0" tIns="0" rIns="0" bIns="0" rtlCol="0" anchor="ctr"/>
           <a:lstStyle/>
           <a:p>
-            <a:pPr indent="0" marL="0">
+            <a:pPr marL="342900" indent="-342900">
               <a:lnSpc>
                 <a:spcPts val="1700"/>
               </a:lnSpc>
-              <a:buNone/>
-            </a:pPr>
-            <a:r>
-              <a:rPr lang="en-US" sz="1300" b="1" dirty="0">
+              <a:spcAft>
+                <a:spcPts val="600"/>
+              </a:spcAft>
+              <a:buSzPct val="100000"/>
+              <a:buChar char="•"/>
+            </a:pPr>
+            <a:r>
+              <a:rPr lang="en-US" sz="1200" dirty="0">
                 <a:solidFill>
                   <a:srgbClr val="14302B"/>
                 </a:solidFill>
@@ -3806,76 +5634,106 @@
                 <a:ea typeface="Calibri" pitchFamily="34" charset="-122"/>
                 <a:cs typeface="Calibri" pitchFamily="34" charset="-120"/>
               </a:rPr>
-              <a:t>Neurogaze · 1 Posyandu</a:t>
-            </a:r>
-            <a:endParaRPr lang="en-US" sz="1300" dirty="0"/>
-          </a:p>
-        </p:txBody>
-      </p:sp>
-      <p:sp>
-        <p:nvSpPr>
-          <p:cNvPr id="10" name="Text 8"/>
-          <p:cNvSpPr/>
-          <p:nvPr/>
-        </p:nvSpPr>
-        <p:spPr>
-          <a:xfrm>
-            <a:off x="960120" y="4114800"/>
-            <a:ext cx="2697480" cy="502920"/>
-          </a:xfrm>
-          <a:prstGeom prst="rect">
-            <a:avLst/>
-          </a:prstGeom>
-          <a:noFill/>
-          <a:ln/>
-        </p:spPr>
-        <p:txBody>
-          <a:bodyPr wrap="square" lIns="0" tIns="0" rIns="0" bIns="0" rtlCol="0" anchor="ctr"/>
-          <a:lstStyle/>
-          <a:p>
-            <a:pPr indent="0" marL="0">
+              <a:t>Alas tanpa satu pun fitur perilaku: AUC 0,905.</a:t>
+            </a:r>
+            <a:endParaRPr lang="en-US" sz="1200" dirty="0"/>
+          </a:p>
+          <a:p>
+            <a:pPr marL="342900" indent="-342900">
               <a:lnSpc>
-                <a:spcPts val="1500"/>
+                <a:spcPts val="1700"/>
               </a:lnSpc>
-              <a:buNone/>
-            </a:pPr>
-            <a:r>
-              <a:rPr lang="en-US" sz="1100" dirty="0">
-                <a:solidFill>
-                  <a:srgbClr val="4A635D"/>
+              <a:spcAft>
+                <a:spcPts val="600"/>
+              </a:spcAft>
+              <a:buSzPct val="100000"/>
+              <a:buChar char="•"/>
+            </a:pPr>
+            <a:r>
+              <a:rPr lang="en-US" sz="1200" dirty="0">
+                <a:solidFill>
+                  <a:srgbClr val="14302B"/>
                 </a:solidFill>
                 <a:latin typeface="Calibri" pitchFamily="34" charset="0"/>
                 <a:ea typeface="Calibri" pitchFamily="34" charset="-122"/>
                 <a:cs typeface="Calibri" pitchFamily="34" charset="-120"/>
               </a:rPr>
-              <a:t>1.000 sesi × Rp 13.900 ÷ 1,53 kasus</a:t>
-            </a:r>
-            <a:endParaRPr lang="en-US" sz="1100" dirty="0"/>
-          </a:p>
-        </p:txBody>
-      </p:sp>
-      <p:sp>
-        <p:nvSpPr>
-          <p:cNvPr id="11" name="Shape 9"/>
-          <p:cNvSpPr/>
-          <p:nvPr/>
-        </p:nvSpPr>
-        <p:spPr>
-          <a:xfrm>
-            <a:off x="4206240" y="2788920"/>
-            <a:ext cx="3246120" cy="1965960"/>
+              <a:t>Model indeks perilaku kami: 0,784. Lebih rendah.</a:t>
+            </a:r>
+            <a:endParaRPr lang="en-US" sz="1200" dirty="0"/>
+          </a:p>
+          <a:p>
+            <a:pPr marL="342900" indent="-342900">
+              <a:lnSpc>
+                <a:spcPts val="1700"/>
+              </a:lnSpc>
+              <a:spcAft>
+                <a:spcPts val="600"/>
+              </a:spcAft>
+              <a:buSzPct val="100000"/>
+              <a:buChar char="•"/>
+            </a:pPr>
+            <a:r>
+              <a:rPr lang="en-US" sz="1200" dirty="0">
+                <a:solidFill>
+                  <a:srgbClr val="14302B"/>
+                </a:solidFill>
+                <a:latin typeface="Calibri" pitchFamily="34" charset="0"/>
+                <a:ea typeface="Calibri" pitchFamily="34" charset="-122"/>
+                <a:cs typeface="Calibri" pitchFamily="34" charset="-120"/>
+              </a:rPr>
+              <a:t>Anak ASD terbaca 13 percobaan, anak TD 20.</a:t>
+            </a:r>
+            <a:endParaRPr lang="en-US" sz="1200" dirty="0"/>
+          </a:p>
+          <a:p>
+            <a:pPr marL="342900" indent="-342900">
+              <a:lnSpc>
+                <a:spcPts val="1700"/>
+              </a:lnSpc>
+              <a:spcAft>
+                <a:spcPts val="600"/>
+              </a:spcAft>
+              <a:buSzPct val="100000"/>
+              <a:buChar char="•"/>
+            </a:pPr>
+            <a:r>
+              <a:rPr lang="en-US" sz="1200" dirty="0">
+                <a:solidFill>
+                  <a:srgbClr val="14302B"/>
+                </a:solidFill>
+                <a:latin typeface="Calibri" pitchFamily="34" charset="0"/>
+                <a:ea typeface="Calibri" pitchFamily="34" charset="-122"/>
+                <a:cs typeface="Calibri" pitchFamily="34" charset="-120"/>
+              </a:rPr>
+              <a:t>Bobot ditolak. Lapis 1 dikirim sendirian.</a:t>
+            </a:r>
+            <a:endParaRPr lang="en-US" sz="1200" dirty="0"/>
+          </a:p>
+        </p:txBody>
+      </p:sp>
+      <p:sp>
+        <p:nvSpPr>
+          <p:cNvPr id="26" name="Shape 24"/>
+          <p:cNvSpPr/>
+          <p:nvPr/>
+        </p:nvSpPr>
+        <p:spPr>
+          <a:xfrm>
+            <a:off x="685800" y="5440680"/>
+            <a:ext cx="10424160" cy="868680"/>
           </a:xfrm>
           <a:prstGeom prst="roundRect">
             <a:avLst>
-              <a:gd name="adj" fmla="val 2791"/>
+              <a:gd name="adj" fmla="val 6316"/>
             </a:avLst>
           </a:prstGeom>
           <a:solidFill>
-            <a:srgbClr val="E4F2EE"/>
+            <a:srgbClr val="0B1E1B"/>
           </a:solidFill>
           <a:ln w="12700">
             <a:solidFill>
-              <a:srgbClr val="E4F2EE"/>
+              <a:srgbClr val="0B1E1B"/>
             </a:solidFill>
             <a:prstDash val="solid"/>
           </a:ln>
@@ -3883,14 +5741,14 @@
       </p:sp>
       <p:sp>
         <p:nvSpPr>
-          <p:cNvPr id="12" name="Text 10"/>
-          <p:cNvSpPr/>
-          <p:nvPr/>
-        </p:nvSpPr>
-        <p:spPr>
-          <a:xfrm>
-            <a:off x="4480560" y="3035808"/>
-            <a:ext cx="2697480" cy="548640"/>
+          <p:cNvPr id="27" name="Text 25"/>
+          <p:cNvSpPr/>
+          <p:nvPr/>
+        </p:nvSpPr>
+        <p:spPr>
+          <a:xfrm>
+            <a:off x="1097280" y="5577840"/>
+            <a:ext cx="4937760" cy="320040"/>
           </a:xfrm>
           <a:prstGeom prst="rect">
             <a:avLst/>
@@ -3906,30 +5764,72 @@
               <a:buNone/>
             </a:pPr>
             <a:r>
-              <a:rPr lang="en-US" sz="3200" b="1" dirty="0">
-                <a:solidFill>
-                  <a:srgbClr val="0D8271"/>
+              <a:rPr lang="en-US" sz="1300" b="1" dirty="0">
+                <a:solidFill>
+                  <a:srgbClr val="5CB9A3"/>
+                </a:solidFill>
+                <a:latin typeface="Calibri" pitchFamily="34" charset="0"/>
+                <a:ea typeface="Calibri" pitchFamily="34" charset="-122"/>
+                <a:cs typeface="Calibri" pitchFamily="34" charset="-120"/>
+              </a:rPr>
+              <a:t>Lalu kami jalankan audit yang sama pada data kami sendiri.</a:t>
+            </a:r>
+            <a:endParaRPr lang="en-US" sz="1300" dirty="0"/>
+          </a:p>
+        </p:txBody>
+      </p:sp>
+      <p:sp>
+        <p:nvSpPr>
+          <p:cNvPr id="28" name="Text 26"/>
+          <p:cNvSpPr/>
+          <p:nvPr/>
+        </p:nvSpPr>
+        <p:spPr>
+          <a:xfrm>
+            <a:off x="1097280" y="5897880"/>
+            <a:ext cx="9692640" cy="365760"/>
+          </a:xfrm>
+          <a:prstGeom prst="rect">
+            <a:avLst/>
+          </a:prstGeom>
+          <a:noFill/>
+          <a:ln/>
+        </p:spPr>
+        <p:txBody>
+          <a:bodyPr wrap="square" lIns="0" tIns="0" rIns="0" bIns="0" rtlCol="0" anchor="ctr"/>
+          <a:lstStyle/>
+          <a:p>
+            <a:pPr indent="0" marL="0">
+              <a:lnSpc>
+                <a:spcPts val="2000"/>
+              </a:lnSpc>
+              <a:buNone/>
+            </a:pPr>
+            <a:r>
+              <a:rPr lang="en-US" sz="1500" i="1" dirty="0">
+                <a:solidFill>
+                  <a:srgbClr val="FFFFFF"/>
                 </a:solidFill>
                 <a:latin typeface="Cambria" pitchFamily="34" charset="0"/>
                 <a:ea typeface="Cambria" pitchFamily="34" charset="-122"/>
                 <a:cs typeface="Cambria" pitchFamily="34" charset="-120"/>
               </a:rPr>
-              <a:t>Rp 2,29 jt</a:t>
-            </a:r>
-            <a:endParaRPr lang="en-US" sz="3200" dirty="0"/>
-          </a:p>
-        </p:txBody>
-      </p:sp>
-      <p:sp>
-        <p:nvSpPr>
-          <p:cNvPr id="13" name="Text 11"/>
-          <p:cNvSpPr/>
-          <p:nvPr/>
-        </p:nvSpPr>
-        <p:spPr>
-          <a:xfrm>
-            <a:off x="4480560" y="3639312"/>
-            <a:ext cx="2697480" cy="457200"/>
+              <a:t>Mutu rekaman saja, kontrol positif kami: AUC 0,537 · p = 0,26. Kebetulan. Yang memisahkan kedua kondisi kami adalah perilaku, bukan cara sesinya direkam.</a:t>
+            </a:r>
+            <a:endParaRPr lang="en-US" sz="1500" dirty="0"/>
+          </a:p>
+        </p:txBody>
+      </p:sp>
+      <p:sp>
+        <p:nvSpPr>
+          <p:cNvPr id="29" name="Text 27"/>
+          <p:cNvSpPr/>
+          <p:nvPr/>
+        </p:nvSpPr>
+        <p:spPr>
+          <a:xfrm>
+            <a:off x="6263640" y="5559552"/>
+            <a:ext cx="4480560" cy="320040"/>
           </a:xfrm>
           <a:prstGeom prst="rect">
             <a:avLst/>
@@ -3941,336 +5841,21 @@
           <a:bodyPr wrap="square" lIns="0" tIns="0" rIns="0" bIns="0" rtlCol="0" anchor="ctr"/>
           <a:lstStyle/>
           <a:p>
-            <a:pPr indent="0" marL="0">
-              <a:lnSpc>
-                <a:spcPts val="1700"/>
-              </a:lnSpc>
-              <a:buNone/>
-            </a:pPr>
-            <a:r>
-              <a:rPr lang="en-US" sz="1300" b="1" dirty="0">
-                <a:solidFill>
-                  <a:srgbClr val="14302B"/>
+            <a:pPr algn="r" indent="0" marL="0">
+              <a:buNone/>
+            </a:pPr>
+            <a:r>
+              <a:rPr lang="en-US" sz="1400" b="1" dirty="0">
+                <a:solidFill>
+                  <a:srgbClr val="F0A189"/>
                 </a:solidFill>
                 <a:latin typeface="Calibri" pitchFamily="34" charset="0"/>
                 <a:ea typeface="Calibri" pitchFamily="34" charset="-122"/>
                 <a:cs typeface="Calibri" pitchFamily="34" charset="-120"/>
               </a:rPr>
-              <a:t>Neurogaze · dirotasi 4 Posyandu</a:t>
-            </a:r>
-            <a:endParaRPr lang="en-US" sz="1300" dirty="0"/>
-          </a:p>
-        </p:txBody>
-      </p:sp>
-      <p:sp>
-        <p:nvSpPr>
-          <p:cNvPr id="14" name="Text 12"/>
-          <p:cNvSpPr/>
-          <p:nvPr/>
-        </p:nvSpPr>
-        <p:spPr>
-          <a:xfrm>
-            <a:off x="4480560" y="4114800"/>
-            <a:ext cx="2697480" cy="502920"/>
-          </a:xfrm>
-          <a:prstGeom prst="rect">
-            <a:avLst/>
-          </a:prstGeom>
-          <a:noFill/>
-          <a:ln/>
-        </p:spPr>
-        <p:txBody>
-          <a:bodyPr wrap="square" lIns="0" tIns="0" rIns="0" bIns="0" rtlCol="0" anchor="ctr"/>
-          <a:lstStyle/>
-          <a:p>
-            <a:pPr indent="0" marL="0">
-              <a:lnSpc>
-                <a:spcPts val="1500"/>
-              </a:lnSpc>
-              <a:buNone/>
-            </a:pPr>
-            <a:r>
-              <a:rPr lang="en-US" sz="1100" dirty="0">
-                <a:solidFill>
-                  <a:srgbClr val="4A635D"/>
-                </a:solidFill>
-                <a:latin typeface="Calibri" pitchFamily="34" charset="0"/>
-                <a:ea typeface="Calibri" pitchFamily="34" charset="-122"/>
-                <a:cs typeface="Calibri" pitchFamily="34" charset="-120"/>
-              </a:rPr>
-              <a:t>1.000 sesi × Rp 3.500 ÷ 1,53 kasus</a:t>
-            </a:r>
-            <a:endParaRPr lang="en-US" sz="1100" dirty="0"/>
-          </a:p>
-        </p:txBody>
-      </p:sp>
-      <p:sp>
-        <p:nvSpPr>
-          <p:cNvPr id="15" name="Shape 13"/>
-          <p:cNvSpPr/>
-          <p:nvPr/>
-        </p:nvSpPr>
-        <p:spPr>
-          <a:xfrm>
-            <a:off x="7726680" y="2788920"/>
-            <a:ext cx="3246120" cy="1965960"/>
-          </a:xfrm>
-          <a:prstGeom prst="roundRect">
-            <a:avLst>
-              <a:gd name="adj" fmla="val 2791"/>
-            </a:avLst>
-          </a:prstGeom>
-          <a:solidFill>
-            <a:srgbClr val="FFFFFF"/>
-          </a:solidFill>
-          <a:ln w="12700">
-            <a:solidFill>
-              <a:srgbClr val="DBE4E1"/>
-            </a:solidFill>
-            <a:prstDash val="solid"/>
-          </a:ln>
-        </p:spPr>
-      </p:sp>
-      <p:sp>
-        <p:nvSpPr>
-          <p:cNvPr id="16" name="Text 14"/>
-          <p:cNvSpPr/>
-          <p:nvPr/>
-        </p:nvSpPr>
-        <p:spPr>
-          <a:xfrm>
-            <a:off x="8001000" y="3035808"/>
-            <a:ext cx="2697480" cy="548640"/>
-          </a:xfrm>
-          <a:prstGeom prst="rect">
-            <a:avLst/>
-          </a:prstGeom>
-          <a:noFill/>
-          <a:ln/>
-        </p:spPr>
-        <p:txBody>
-          <a:bodyPr wrap="square" lIns="0" tIns="0" rIns="0" bIns="0" rtlCol="0" anchor="ctr"/>
-          <a:lstStyle/>
-          <a:p>
-            <a:pPr indent="0" marL="0">
-              <a:buNone/>
-            </a:pPr>
-            <a:r>
-              <a:rPr lang="en-US" sz="3200" b="1" dirty="0">
-                <a:solidFill>
-                  <a:srgbClr val="B1442C"/>
-                </a:solidFill>
-                <a:latin typeface="Cambria" pitchFamily="34" charset="0"/>
-                <a:ea typeface="Cambria" pitchFamily="34" charset="-122"/>
-                <a:cs typeface="Cambria" pitchFamily="34" charset="-120"/>
-              </a:rPr>
-              <a:t>Rp 9,70 jt</a:t>
-            </a:r>
-            <a:endParaRPr lang="en-US" sz="3200" dirty="0"/>
-          </a:p>
-        </p:txBody>
-      </p:sp>
-      <p:sp>
-        <p:nvSpPr>
-          <p:cNvPr id="17" name="Text 15"/>
-          <p:cNvSpPr/>
-          <p:nvPr/>
-        </p:nvSpPr>
-        <p:spPr>
-          <a:xfrm>
-            <a:off x="8001000" y="3639312"/>
-            <a:ext cx="2697480" cy="457200"/>
-          </a:xfrm>
-          <a:prstGeom prst="rect">
-            <a:avLst/>
-          </a:prstGeom>
-          <a:noFill/>
-          <a:ln/>
-        </p:spPr>
-        <p:txBody>
-          <a:bodyPr wrap="square" lIns="0" tIns="0" rIns="0" bIns="0" rtlCol="0" anchor="ctr"/>
-          <a:lstStyle/>
-          <a:p>
-            <a:pPr indent="0" marL="0">
-              <a:lnSpc>
-                <a:spcPts val="1700"/>
-              </a:lnSpc>
-              <a:buNone/>
-            </a:pPr>
-            <a:r>
-              <a:rPr lang="en-US" sz="1300" b="1" dirty="0">
-                <a:solidFill>
-                  <a:srgbClr val="14302B"/>
-                </a:solidFill>
-                <a:latin typeface="Calibri" pitchFamily="34" charset="0"/>
-                <a:ea typeface="Calibri" pitchFamily="34" charset="-122"/>
-                <a:cs typeface="Calibri" pitchFamily="34" charset="-120"/>
-              </a:rPr>
-              <a:t>EarliPoint · satu pemeriksaan</a:t>
-            </a:r>
-            <a:endParaRPr lang="en-US" sz="1300" dirty="0"/>
-          </a:p>
-        </p:txBody>
-      </p:sp>
-      <p:sp>
-        <p:nvSpPr>
-          <p:cNvPr id="18" name="Text 16"/>
-          <p:cNvSpPr/>
-          <p:nvPr/>
-        </p:nvSpPr>
-        <p:spPr>
-          <a:xfrm>
-            <a:off x="8001000" y="4114800"/>
-            <a:ext cx="2697480" cy="502920"/>
-          </a:xfrm>
-          <a:prstGeom prst="rect">
-            <a:avLst/>
-          </a:prstGeom>
-          <a:noFill/>
-          <a:ln/>
-        </p:spPr>
-        <p:txBody>
-          <a:bodyPr wrap="square" lIns="0" tIns="0" rIns="0" bIns="0" rtlCol="0" anchor="ctr"/>
-          <a:lstStyle/>
-          <a:p>
-            <a:pPr indent="0" marL="0">
-              <a:lnSpc>
-                <a:spcPts val="1500"/>
-              </a:lnSpc>
-              <a:buNone/>
-            </a:pPr>
-            <a:r>
-              <a:rPr lang="en-US" sz="1100" dirty="0">
-                <a:solidFill>
-                  <a:srgbClr val="4A635D"/>
-                </a:solidFill>
-                <a:latin typeface="Calibri" pitchFamily="34" charset="0"/>
-                <a:ea typeface="Calibri" pitchFamily="34" charset="-122"/>
-                <a:cs typeface="Calibri" pitchFamily="34" charset="-120"/>
-              </a:rPr>
-              <a:t>Satu anak, sekali periksa, di klinik</a:t>
-            </a:r>
-            <a:endParaRPr lang="en-US" sz="1100" dirty="0"/>
-          </a:p>
-        </p:txBody>
-      </p:sp>
-      <p:sp>
-        <p:nvSpPr>
-          <p:cNvPr id="19" name="Text 17"/>
-          <p:cNvSpPr/>
-          <p:nvPr/>
-        </p:nvSpPr>
-        <p:spPr>
-          <a:xfrm>
-            <a:off x="685800" y="4983480"/>
-            <a:ext cx="10424160" cy="640080"/>
-          </a:xfrm>
-          <a:prstGeom prst="rect">
-            <a:avLst/>
-          </a:prstGeom>
-          <a:noFill/>
-          <a:ln/>
-        </p:spPr>
-        <p:txBody>
-          <a:bodyPr wrap="square" lIns="0" tIns="0" rIns="0" bIns="0" rtlCol="0" anchor="ctr"/>
-          <a:lstStyle/>
-          <a:p>
-            <a:pPr indent="0" marL="0">
-              <a:lnSpc>
-                <a:spcPts val="2400"/>
-              </a:lnSpc>
-              <a:buNone/>
-            </a:pPr>
-            <a:r>
-              <a:rPr lang="en-US" sz="1700" b="1" dirty="0">
-                <a:solidFill>
-                  <a:srgbClr val="0B1E1B"/>
-                </a:solidFill>
-                <a:latin typeface="Cambria" pitchFamily="34" charset="0"/>
-                <a:ea typeface="Cambria" pitchFamily="34" charset="-122"/>
-                <a:cs typeface="Cambria" pitchFamily="34" charset="-120"/>
-              </a:rPr>
-              <a:t>Bila titik operasinya terreplikasi, menemukan satu kasus harganya kira-kira sekali pemeriksaan EarliPoint — seperempatnya bila satu tablet dirotasi ke empat Posyandu.</a:t>
-            </a:r>
-            <a:endParaRPr lang="en-US" sz="1700" dirty="0"/>
-          </a:p>
-        </p:txBody>
-      </p:sp>
-      <p:sp>
-        <p:nvSpPr>
-          <p:cNvPr id="20" name="Text 18"/>
-          <p:cNvSpPr/>
-          <p:nvPr/>
-        </p:nvSpPr>
-        <p:spPr>
-          <a:xfrm>
-            <a:off x="685800" y="5650992"/>
-            <a:ext cx="10424160" cy="274320"/>
-          </a:xfrm>
-          <a:prstGeom prst="rect">
-            <a:avLst/>
-          </a:prstGeom>
-          <a:noFill/>
-          <a:ln/>
-        </p:spPr>
-        <p:txBody>
-          <a:bodyPr wrap="square" lIns="0" tIns="0" rIns="0" bIns="0" rtlCol="0" anchor="ctr"/>
-          <a:lstStyle/>
-          <a:p>
-            <a:pPr indent="0" marL="0">
-              <a:buNone/>
-            </a:pPr>
-            <a:r>
-              <a:rPr lang="en-US" sz="1050" b="1" dirty="0">
-                <a:solidFill>
-                  <a:srgbClr val="14302B"/>
-                </a:solidFill>
-                <a:latin typeface="Calibri" pitchFamily="34" charset="0"/>
-                <a:ea typeface="Calibri" pitchFamily="34" charset="-122"/>
-                <a:cs typeface="Calibri" pitchFamily="34" charset="-120"/>
-              </a:rPr>
-              <a:t>Yang belum terukur: waktu kader, pelatihan, dukungan, cetak, dudukan, pengulangan sesi, pemeliharaan, penggantian perangkat, dan tindak lanjut klinis.</a:t>
-            </a:r>
-            <a:endParaRPr lang="en-US" sz="1050" dirty="0"/>
-          </a:p>
-        </p:txBody>
-      </p:sp>
-      <p:sp>
-        <p:nvSpPr>
-          <p:cNvPr id="21" name="Text 19"/>
-          <p:cNvSpPr/>
-          <p:nvPr/>
-        </p:nvSpPr>
-        <p:spPr>
-          <a:xfrm>
-            <a:off x="685800" y="5943600"/>
-            <a:ext cx="10424160" cy="274320"/>
-          </a:xfrm>
-          <a:prstGeom prst="rect">
-            <a:avLst/>
-          </a:prstGeom>
-          <a:noFill/>
-          <a:ln/>
-        </p:spPr>
-        <p:txBody>
-          <a:bodyPr wrap="square" lIns="0" tIns="0" rIns="0" bIns="0" rtlCol="0" anchor="ctr"/>
-          <a:lstStyle/>
-          <a:p>
-            <a:pPr indent="0" marL="0">
-              <a:buNone/>
-            </a:pPr>
-            <a:r>
-              <a:rPr lang="en-US" sz="1050" dirty="0">
-                <a:solidFill>
-                  <a:srgbClr val="4A635D"/>
-                </a:solidFill>
-                <a:latin typeface="Calibri" pitchFamily="34" charset="0"/>
-                <a:ea typeface="Calibri" pitchFamily="34" charset="-122"/>
-                <a:cs typeface="Calibri" pitchFamily="34" charset="-120"/>
-              </a:rPr>
-              <a:t>Asumsi dinyatakan di docs/dampak_dan_adopsi.md · kohort 1.000, prevalensi 1%, cakupan teknis 90%</a:t>
-            </a:r>
-            <a:endParaRPr lang="en-US" sz="1050" dirty="0"/>
+              <a:t>Cilia 0,905  ·  kami 0,537</a:t>
+            </a:r>
+            <a:endParaRPr lang="en-US" sz="1400" dirty="0"/>
           </a:p>
         </p:txBody>
       </p:sp>
@@ -4391,7 +5976,7 @@
                 <a:ea typeface="Calibri" pitchFamily="34" charset="-122"/>
                 <a:cs typeface="Calibri" pitchFamily="34" charset="-120"/>
               </a:rPr>
-              <a:t>Jalur adopsi</a:t>
+              <a:t>Dampak dan biaya</a:t>
             </a:r>
             <a:endParaRPr lang="en-US" sz="1200" dirty="0"/>
           </a:p>
@@ -4433,7 +6018,7 @@
                 <a:ea typeface="Cambria" pitchFamily="34" charset="-122"/>
                 <a:cs typeface="Cambria" pitchFamily="34" charset="-120"/>
               </a:rPr>
-              <a:t>Ia menempel pada alur yang sudah jalan</a:t>
+              <a:t>Ambil metrik yang paling keras terhadap kami</a:t>
             </a:r>
             <a:endParaRPr lang="en-US" sz="3200" dirty="0"/>
           </a:p>
@@ -4448,7 +6033,7 @@
         <p:spPr>
           <a:xfrm>
             <a:off x="685800" y="2103120"/>
-            <a:ext cx="10424160" cy="548640"/>
+            <a:ext cx="10424160" cy="502920"/>
           </a:xfrm>
           <a:prstGeom prst="rect">
             <a:avLst/>
@@ -4467,15 +6052,15 @@
               <a:buNone/>
             </a:pPr>
             <a:r>
-              <a:rPr lang="en-US" sz="1500" dirty="0">
-                <a:solidFill>
-                  <a:srgbClr val="14302B"/>
+              <a:rPr lang="en-US" sz="1500" b="1" dirty="0">
+                <a:solidFill>
+                  <a:srgbClr val="B1442C"/>
                 </a:solidFill>
                 <a:latin typeface="Calibri" pitchFamily="34" charset="0"/>
                 <a:ea typeface="Calibri" pitchFamily="34" charset="-122"/>
                 <a:cs typeface="Calibri" pitchFamily="34" charset="-120"/>
               </a:rPr>
-              <a:t>Alat ini tidak menggantikan apa pun. Ia menempel: sesi 67 detik sesudah penimbangan bulanan, laporan satu halaman diserahkan ke Puskesmas, dibaca berdampingan dengan SDIDTK.</a:t>
+              <a:t>Skenario, bukan hasil terukur: angka per kasus ini berlaku hanya bila titik operasi protokol penuh berhasil direplikasi pada balita Indonesia. Hari ini titik itu ditahan.</a:t>
             </a:r>
             <a:endParaRPr lang="en-US" sz="1500" dirty="0"/>
           </a:p>
@@ -4483,14 +6068,41 @@
       </p:sp>
       <p:sp>
         <p:nvSpPr>
-          <p:cNvPr id="7" name="Text 5"/>
-          <p:cNvSpPr/>
-          <p:nvPr/>
-        </p:nvSpPr>
-        <p:spPr>
-          <a:xfrm>
-            <a:off x="685800" y="2926080"/>
-            <a:ext cx="3291840" cy="1002890"/>
+          <p:cNvPr id="7" name="Shape 5"/>
+          <p:cNvSpPr/>
+          <p:nvPr/>
+        </p:nvSpPr>
+        <p:spPr>
+          <a:xfrm>
+            <a:off x="685800" y="2788920"/>
+            <a:ext cx="3246120" cy="1965960"/>
+          </a:xfrm>
+          <a:prstGeom prst="roundRect">
+            <a:avLst>
+              <a:gd name="adj" fmla="val 2791"/>
+            </a:avLst>
+          </a:prstGeom>
+          <a:solidFill>
+            <a:srgbClr val="FFFFFF"/>
+          </a:solidFill>
+          <a:ln w="12700">
+            <a:solidFill>
+              <a:srgbClr val="DBE4E1"/>
+            </a:solidFill>
+            <a:prstDash val="solid"/>
+          </a:ln>
+        </p:spPr>
+      </p:sp>
+      <p:sp>
+        <p:nvSpPr>
+          <p:cNvPr id="8" name="Text 6"/>
+          <p:cNvSpPr/>
+          <p:nvPr/>
+        </p:nvSpPr>
+        <p:spPr>
+          <a:xfrm>
+            <a:off x="960120" y="3035808"/>
+            <a:ext cx="2697480" cy="548640"/>
           </a:xfrm>
           <a:prstGeom prst="rect">
             <a:avLst/>
@@ -4503,36 +6115,33 @@
           <a:lstStyle/>
           <a:p>
             <a:pPr indent="0" marL="0">
-              <a:lnSpc>
-                <a:spcPts val="6800"/>
-              </a:lnSpc>
-              <a:buNone/>
-            </a:pPr>
-            <a:r>
-              <a:rPr lang="en-US" sz="6800" b="1" dirty="0">
-                <a:solidFill>
-                  <a:srgbClr val="0D8271"/>
+              <a:buNone/>
+            </a:pPr>
+            <a:r>
+              <a:rPr lang="en-US" sz="3200" b="1" dirty="0">
+                <a:solidFill>
+                  <a:srgbClr val="0B1E1B"/>
                 </a:solidFill>
                 <a:latin typeface="Cambria" pitchFamily="34" charset="0"/>
                 <a:ea typeface="Cambria" pitchFamily="34" charset="-122"/>
                 <a:cs typeface="Cambria" pitchFamily="34" charset="-120"/>
               </a:rPr>
-              <a:t>~700</a:t>
-            </a:r>
-            <a:endParaRPr lang="en-US" sz="6800" dirty="0"/>
-          </a:p>
-        </p:txBody>
-      </p:sp>
-      <p:sp>
-        <p:nvSpPr>
-          <p:cNvPr id="8" name="Text 6"/>
-          <p:cNvSpPr/>
-          <p:nvPr/>
-        </p:nvSpPr>
-        <p:spPr>
-          <a:xfrm>
-            <a:off x="685800" y="3983834"/>
-            <a:ext cx="3291840" cy="274320"/>
+              <a:t>Rp 9,08 jt</a:t>
+            </a:r>
+            <a:endParaRPr lang="en-US" sz="3200" dirty="0"/>
+          </a:p>
+        </p:txBody>
+      </p:sp>
+      <p:sp>
+        <p:nvSpPr>
+          <p:cNvPr id="9" name="Text 7"/>
+          <p:cNvSpPr/>
+          <p:nvPr/>
+        </p:nvSpPr>
+        <p:spPr>
+          <a:xfrm>
+            <a:off x="960120" y="3639312"/>
+            <a:ext cx="2697480" cy="457200"/>
           </a:xfrm>
           <a:prstGeom prst="rect">
             <a:avLst/>
@@ -4545,10 +6154,13 @@
           <a:lstStyle/>
           <a:p>
             <a:pPr indent="0" marL="0">
-              <a:buNone/>
-            </a:pPr>
-            <a:r>
-              <a:rPr lang="en-US" sz="1400" b="1" dirty="0">
+              <a:lnSpc>
+                <a:spcPts val="1700"/>
+              </a:lnSpc>
+              <a:buNone/>
+            </a:pPr>
+            <a:r>
+              <a:rPr lang="en-US" sz="1300" b="1" dirty="0">
                 <a:solidFill>
                   <a:srgbClr val="14302B"/>
                 </a:solidFill>
@@ -4556,22 +6168,22 @@
                 <a:ea typeface="Calibri" pitchFamily="34" charset="-122"/>
                 <a:cs typeface="Calibri" pitchFamily="34" charset="-120"/>
               </a:rPr>
-              <a:t>sesi dapat dinilai per tahun — hipotetis</a:t>
-            </a:r>
-            <a:endParaRPr lang="en-US" sz="1400" dirty="0"/>
-          </a:p>
-        </p:txBody>
-      </p:sp>
-      <p:sp>
-        <p:nvSpPr>
-          <p:cNvPr id="9" name="Text 7"/>
-          <p:cNvSpPr/>
-          <p:nvPr/>
-        </p:nvSpPr>
-        <p:spPr>
-          <a:xfrm>
-            <a:off x="685800" y="4294730"/>
-            <a:ext cx="3291840" cy="640080"/>
+              <a:t>Neurogaze · 1 Posyandu</a:t>
+            </a:r>
+            <a:endParaRPr lang="en-US" sz="1300" dirty="0"/>
+          </a:p>
+        </p:txBody>
+      </p:sp>
+      <p:sp>
+        <p:nvSpPr>
+          <p:cNvPr id="10" name="Text 8"/>
+          <p:cNvSpPr/>
+          <p:nvPr/>
+        </p:nvSpPr>
+        <p:spPr>
+          <a:xfrm>
+            <a:off x="960120" y="4114800"/>
+            <a:ext cx="2697480" cy="502920"/>
           </a:xfrm>
           <a:prstGeom prst="rect">
             <a:avLst/>
@@ -4590,7 +6202,7 @@
               <a:buNone/>
             </a:pPr>
             <a:r>
-              <a:rPr lang="en-US" sz="1200" dirty="0">
+              <a:rPr lang="en-US" sz="1100" dirty="0">
                 <a:solidFill>
                   <a:srgbClr val="4A635D"/>
                 </a:solidFill>
@@ -4598,149 +6210,26 @@
                 <a:ea typeface="Calibri" pitchFamily="34" charset="-122"/>
                 <a:cs typeface="Calibri" pitchFamily="34" charset="-120"/>
               </a:rPr>
-              <a:t>Aritmetika skala: 30 Posyandu × 40 anak layak, dikurangi attrition 42%. Skala rekrutmen, bukan rencana operasional.</a:t>
-            </a:r>
-            <a:endParaRPr lang="en-US" sz="1200" dirty="0"/>
-          </a:p>
-        </p:txBody>
-      </p:sp>
-      <p:sp>
-        <p:nvSpPr>
-          <p:cNvPr id="10" name="Text 8"/>
-          <p:cNvSpPr/>
-          <p:nvPr/>
-        </p:nvSpPr>
-        <p:spPr>
-          <a:xfrm>
-            <a:off x="4434840" y="2926080"/>
-            <a:ext cx="3291840" cy="1002890"/>
-          </a:xfrm>
-          <a:prstGeom prst="rect">
-            <a:avLst/>
-          </a:prstGeom>
-          <a:noFill/>
-          <a:ln/>
-        </p:spPr>
-        <p:txBody>
-          <a:bodyPr wrap="square" lIns="0" tIns="0" rIns="0" bIns="0" rtlCol="0" anchor="ctr"/>
-          <a:lstStyle/>
-          <a:p>
-            <a:pPr indent="0" marL="0">
-              <a:lnSpc>
-                <a:spcPts val="6800"/>
-              </a:lnSpc>
-              <a:buNone/>
-            </a:pPr>
-            <a:r>
-              <a:rPr lang="en-US" sz="6800" b="1" dirty="0">
-                <a:solidFill>
-                  <a:srgbClr val="4A635D"/>
-                </a:solidFill>
-                <a:latin typeface="Cambria" pitchFamily="34" charset="0"/>
-                <a:ea typeface="Cambria" pitchFamily="34" charset="-122"/>
-                <a:cs typeface="Cambria" pitchFamily="34" charset="-120"/>
-              </a:rPr>
-              <a:t>475</a:t>
-            </a:r>
-            <a:endParaRPr lang="en-US" sz="6800" dirty="0"/>
-          </a:p>
-        </p:txBody>
-      </p:sp>
-      <p:sp>
-        <p:nvSpPr>
-          <p:cNvPr id="11" name="Text 9"/>
-          <p:cNvSpPr/>
-          <p:nvPr/>
-        </p:nvSpPr>
-        <p:spPr>
-          <a:xfrm>
-            <a:off x="4434840" y="3983834"/>
-            <a:ext cx="3291840" cy="274320"/>
-          </a:xfrm>
-          <a:prstGeom prst="rect">
-            <a:avLst/>
-          </a:prstGeom>
-          <a:noFill/>
-          <a:ln/>
-        </p:spPr>
-        <p:txBody>
-          <a:bodyPr wrap="square" lIns="0" tIns="0" rIns="0" bIns="0" rtlCol="0" anchor="ctr"/>
-          <a:lstStyle/>
-          <a:p>
-            <a:pPr indent="0" marL="0">
-              <a:buNone/>
-            </a:pPr>
-            <a:r>
-              <a:rPr lang="en-US" sz="1400" b="1" dirty="0">
-                <a:solidFill>
-                  <a:srgbClr val="14302B"/>
-                </a:solidFill>
-                <a:latin typeface="Calibri" pitchFamily="34" charset="0"/>
-                <a:ea typeface="Calibri" pitchFamily="34" charset="-122"/>
-                <a:cs typeface="Calibri" pitchFamily="34" charset="-120"/>
-              </a:rPr>
-              <a:t>kohort Nature Medicine</a:t>
-            </a:r>
-            <a:endParaRPr lang="en-US" sz="1400" dirty="0"/>
-          </a:p>
-        </p:txBody>
-      </p:sp>
-      <p:sp>
-        <p:nvSpPr>
-          <p:cNvPr id="12" name="Text 10"/>
-          <p:cNvSpPr/>
-          <p:nvPr/>
-        </p:nvSpPr>
-        <p:spPr>
-          <a:xfrm>
-            <a:off x="4434840" y="4294730"/>
-            <a:ext cx="3291840" cy="640080"/>
-          </a:xfrm>
-          <a:prstGeom prst="rect">
-            <a:avLst/>
-          </a:prstGeom>
-          <a:noFill/>
-          <a:ln/>
-        </p:spPr>
-        <p:txBody>
-          <a:bodyPr wrap="square" lIns="0" tIns="0" rIns="0" bIns="0" rtlCol="0" anchor="ctr"/>
-          <a:lstStyle/>
-          <a:p>
-            <a:pPr indent="0" marL="0">
-              <a:lnSpc>
-                <a:spcPts val="1500"/>
-              </a:lnSpc>
-              <a:buNone/>
-            </a:pPr>
-            <a:r>
-              <a:rPr lang="en-US" sz="1200" dirty="0">
-                <a:solidFill>
-                  <a:srgbClr val="4A635D"/>
-                </a:solidFill>
-                <a:latin typeface="Calibri" pitchFamily="34" charset="0"/>
-                <a:ea typeface="Calibri" pitchFamily="34" charset="-122"/>
-                <a:cs typeface="Calibri" pitchFamily="34" charset="-120"/>
-              </a:rPr>
-              <a:t>Studi SenseToKnow yang jadi acuan kami.</a:t>
-            </a:r>
-            <a:endParaRPr lang="en-US" sz="1200" dirty="0"/>
-          </a:p>
-        </p:txBody>
-      </p:sp>
-      <p:sp>
-        <p:nvSpPr>
-          <p:cNvPr id="13" name="Shape 11"/>
-          <p:cNvSpPr/>
-          <p:nvPr/>
-        </p:nvSpPr>
-        <p:spPr>
-          <a:xfrm>
-            <a:off x="7909560" y="2880360"/>
-            <a:ext cx="3200400" cy="2194560"/>
+              <a:t>1.000 sesi × Rp 13.900 ÷ 1,53 kasus</a:t>
+            </a:r>
+            <a:endParaRPr lang="en-US" sz="1100" dirty="0"/>
+          </a:p>
+        </p:txBody>
+      </p:sp>
+      <p:sp>
+        <p:nvSpPr>
+          <p:cNvPr id="11" name="Shape 9"/>
+          <p:cNvSpPr/>
+          <p:nvPr/>
+        </p:nvSpPr>
+        <p:spPr>
+          <a:xfrm>
+            <a:off x="4206240" y="2788920"/>
+            <a:ext cx="3246120" cy="1965960"/>
           </a:xfrm>
           <a:prstGeom prst="roundRect">
             <a:avLst>
-              <a:gd name="adj" fmla="val 2500"/>
+              <a:gd name="adj" fmla="val 2791"/>
             </a:avLst>
           </a:prstGeom>
           <a:solidFill>
@@ -4756,14 +6245,14 @@
       </p:sp>
       <p:sp>
         <p:nvSpPr>
-          <p:cNvPr id="14" name="Text 12"/>
-          <p:cNvSpPr/>
-          <p:nvPr/>
-        </p:nvSpPr>
-        <p:spPr>
-          <a:xfrm>
-            <a:off x="8138160" y="3127248"/>
-            <a:ext cx="2743200" cy="548640"/>
+          <p:cNvPr id="12" name="Text 10"/>
+          <p:cNvSpPr/>
+          <p:nvPr/>
+        </p:nvSpPr>
+        <p:spPr>
+          <a:xfrm>
+            <a:off x="4480560" y="3035808"/>
+            <a:ext cx="2697480" cy="548640"/>
           </a:xfrm>
           <a:prstGeom prst="rect">
             <a:avLst/>
@@ -4776,13 +6265,10 @@
           <a:lstStyle/>
           <a:p>
             <a:pPr indent="0" marL="0">
-              <a:lnSpc>
-                <a:spcPts val="2100"/>
-              </a:lnSpc>
-              <a:buNone/>
-            </a:pPr>
-            <a:r>
-              <a:rPr lang="en-US" sz="1600" b="1" dirty="0">
+              <a:buNone/>
+            </a:pPr>
+            <a:r>
+              <a:rPr lang="en-US" sz="3200" b="1" dirty="0">
                 <a:solidFill>
                   <a:srgbClr val="0D8271"/>
                 </a:solidFill>
@@ -4790,22 +6276,22 @@
                 <a:ea typeface="Cambria" pitchFamily="34" charset="-122"/>
                 <a:cs typeface="Cambria" pitchFamily="34" charset="-120"/>
               </a:rPr>
-              <a:t>Tanpa biaya marginal perangkat lunak</a:t>
-            </a:r>
-            <a:endParaRPr lang="en-US" sz="1600" dirty="0"/>
-          </a:p>
-        </p:txBody>
-      </p:sp>
-      <p:sp>
-        <p:nvSpPr>
-          <p:cNvPr id="15" name="Text 13"/>
-          <p:cNvSpPr/>
-          <p:nvPr/>
-        </p:nvSpPr>
-        <p:spPr>
-          <a:xfrm>
-            <a:off x="8138160" y="3749040"/>
-            <a:ext cx="2743200" cy="1097280"/>
+              <a:t>Rp 2,29 jt</a:t>
+            </a:r>
+            <a:endParaRPr lang="en-US" sz="3200" dirty="0"/>
+          </a:p>
+        </p:txBody>
+      </p:sp>
+      <p:sp>
+        <p:nvSpPr>
+          <p:cNvPr id="13" name="Text 11"/>
+          <p:cNvSpPr/>
+          <p:nvPr/>
+        </p:nvSpPr>
+        <p:spPr>
+          <a:xfrm>
+            <a:off x="4480560" y="3639312"/>
+            <a:ext cx="2697480" cy="457200"/>
           </a:xfrm>
           <a:prstGeom prst="rect">
             <a:avLst/>
@@ -4819,12 +6305,12 @@
           <a:p>
             <a:pPr indent="0" marL="0">
               <a:lnSpc>
-                <a:spcPts val="1800"/>
+                <a:spcPts val="1700"/>
               </a:lnSpc>
               <a:buNone/>
             </a:pPr>
             <a:r>
-              <a:rPr lang="en-US" sz="1250" dirty="0">
+              <a:rPr lang="en-US" sz="1300" b="1" dirty="0">
                 <a:solidFill>
                   <a:srgbClr val="14302B"/>
                 </a:solidFill>
@@ -4832,22 +6318,22 @@
                 <a:ea typeface="Calibri" pitchFamily="34" charset="-122"/>
                 <a:cs typeface="Calibri" pitchFamily="34" charset="-120"/>
               </a:rPr>
-              <a:t>PWA statis. Tidak ada server, basis data, maupun lisensi. Posyandu ke-1 dan ke-1.000 memuat berkas yang sama.</a:t>
-            </a:r>
-            <a:endParaRPr lang="en-US" sz="1250" dirty="0"/>
-          </a:p>
-        </p:txBody>
-      </p:sp>
-      <p:sp>
-        <p:nvSpPr>
-          <p:cNvPr id="16" name="Text 14"/>
-          <p:cNvSpPr/>
-          <p:nvPr/>
-        </p:nvSpPr>
-        <p:spPr>
-          <a:xfrm>
-            <a:off x="685800" y="5349240"/>
-            <a:ext cx="6766560" cy="640080"/>
+              <a:t>Neurogaze · dirotasi 4 Posyandu</a:t>
+            </a:r>
+            <a:endParaRPr lang="en-US" sz="1300" dirty="0"/>
+          </a:p>
+        </p:txBody>
+      </p:sp>
+      <p:sp>
+        <p:nvSpPr>
+          <p:cNvPr id="14" name="Text 12"/>
+          <p:cNvSpPr/>
+          <p:nvPr/>
+        </p:nvSpPr>
+        <p:spPr>
+          <a:xfrm>
+            <a:off x="4480560" y="4114800"/>
+            <a:ext cx="2697480" cy="502920"/>
           </a:xfrm>
           <a:prstGeom prst="rect">
             <a:avLst/>
@@ -4861,22 +6347,292 @@
           <a:p>
             <a:pPr indent="0" marL="0">
               <a:lnSpc>
-                <a:spcPts val="2100"/>
+                <a:spcPts val="1500"/>
               </a:lnSpc>
               <a:buNone/>
             </a:pPr>
             <a:r>
-              <a:rPr lang="en-US" sz="1500" i="1" dirty="0">
-                <a:solidFill>
-                  <a:srgbClr val="14302B"/>
+              <a:rPr lang="en-US" sz="1100" dirty="0">
+                <a:solidFill>
+                  <a:srgbClr val="4A635D"/>
+                </a:solidFill>
+                <a:latin typeface="Calibri" pitchFamily="34" charset="0"/>
+                <a:ea typeface="Calibri" pitchFamily="34" charset="-122"/>
+                <a:cs typeface="Calibri" pitchFamily="34" charset="-120"/>
+              </a:rPr>
+              <a:t>1.000 sesi × Rp 3.500 ÷ 1,53 kasus</a:t>
+            </a:r>
+            <a:endParaRPr lang="en-US" sz="1100" dirty="0"/>
+          </a:p>
+        </p:txBody>
+      </p:sp>
+      <p:sp>
+        <p:nvSpPr>
+          <p:cNvPr id="15" name="Shape 13"/>
+          <p:cNvSpPr/>
+          <p:nvPr/>
+        </p:nvSpPr>
+        <p:spPr>
+          <a:xfrm>
+            <a:off x="7726680" y="2788920"/>
+            <a:ext cx="3246120" cy="1965960"/>
+          </a:xfrm>
+          <a:prstGeom prst="roundRect">
+            <a:avLst>
+              <a:gd name="adj" fmla="val 2791"/>
+            </a:avLst>
+          </a:prstGeom>
+          <a:solidFill>
+            <a:srgbClr val="FFFFFF"/>
+          </a:solidFill>
+          <a:ln w="12700">
+            <a:solidFill>
+              <a:srgbClr val="DBE4E1"/>
+            </a:solidFill>
+            <a:prstDash val="solid"/>
+          </a:ln>
+        </p:spPr>
+      </p:sp>
+      <p:sp>
+        <p:nvSpPr>
+          <p:cNvPr id="16" name="Text 14"/>
+          <p:cNvSpPr/>
+          <p:nvPr/>
+        </p:nvSpPr>
+        <p:spPr>
+          <a:xfrm>
+            <a:off x="8001000" y="3035808"/>
+            <a:ext cx="2697480" cy="548640"/>
+          </a:xfrm>
+          <a:prstGeom prst="rect">
+            <a:avLst/>
+          </a:prstGeom>
+          <a:noFill/>
+          <a:ln/>
+        </p:spPr>
+        <p:txBody>
+          <a:bodyPr wrap="square" lIns="0" tIns="0" rIns="0" bIns="0" rtlCol="0" anchor="ctr"/>
+          <a:lstStyle/>
+          <a:p>
+            <a:pPr indent="0" marL="0">
+              <a:buNone/>
+            </a:pPr>
+            <a:r>
+              <a:rPr lang="en-US" sz="3200" b="1" dirty="0">
+                <a:solidFill>
+                  <a:srgbClr val="B1442C"/>
                 </a:solidFill>
                 <a:latin typeface="Cambria" pitchFamily="34" charset="0"/>
                 <a:ea typeface="Cambria" pitchFamily="34" charset="-122"/>
                 <a:cs typeface="Cambria" pitchFamily="34" charset="-120"/>
               </a:rPr>
-              <a:t>Skala kohort acuan Nature Medicine dapat dicapai dalam satu tahun studi di 30 Posyandu — sebagai penelitian prospektif berizin etik dengan acuan klinis buta, bukan sebagai penyebaran produk.</a:t>
-            </a:r>
-            <a:endParaRPr lang="en-US" sz="1500" dirty="0"/>
+              <a:t>Rp 9,70 jt</a:t>
+            </a:r>
+            <a:endParaRPr lang="en-US" sz="3200" dirty="0"/>
+          </a:p>
+        </p:txBody>
+      </p:sp>
+      <p:sp>
+        <p:nvSpPr>
+          <p:cNvPr id="17" name="Text 15"/>
+          <p:cNvSpPr/>
+          <p:nvPr/>
+        </p:nvSpPr>
+        <p:spPr>
+          <a:xfrm>
+            <a:off x="8001000" y="3639312"/>
+            <a:ext cx="2697480" cy="457200"/>
+          </a:xfrm>
+          <a:prstGeom prst="rect">
+            <a:avLst/>
+          </a:prstGeom>
+          <a:noFill/>
+          <a:ln/>
+        </p:spPr>
+        <p:txBody>
+          <a:bodyPr wrap="square" lIns="0" tIns="0" rIns="0" bIns="0" rtlCol="0" anchor="ctr"/>
+          <a:lstStyle/>
+          <a:p>
+            <a:pPr indent="0" marL="0">
+              <a:lnSpc>
+                <a:spcPts val="1700"/>
+              </a:lnSpc>
+              <a:buNone/>
+            </a:pPr>
+            <a:r>
+              <a:rPr lang="en-US" sz="1300" b="1" dirty="0">
+                <a:solidFill>
+                  <a:srgbClr val="14302B"/>
+                </a:solidFill>
+                <a:latin typeface="Calibri" pitchFamily="34" charset="0"/>
+                <a:ea typeface="Calibri" pitchFamily="34" charset="-122"/>
+                <a:cs typeface="Calibri" pitchFamily="34" charset="-120"/>
+              </a:rPr>
+              <a:t>EarliPoint · satu pemeriksaan</a:t>
+            </a:r>
+            <a:endParaRPr lang="en-US" sz="1300" dirty="0"/>
+          </a:p>
+        </p:txBody>
+      </p:sp>
+      <p:sp>
+        <p:nvSpPr>
+          <p:cNvPr id="18" name="Text 16"/>
+          <p:cNvSpPr/>
+          <p:nvPr/>
+        </p:nvSpPr>
+        <p:spPr>
+          <a:xfrm>
+            <a:off x="8001000" y="4114800"/>
+            <a:ext cx="2697480" cy="502920"/>
+          </a:xfrm>
+          <a:prstGeom prst="rect">
+            <a:avLst/>
+          </a:prstGeom>
+          <a:noFill/>
+          <a:ln/>
+        </p:spPr>
+        <p:txBody>
+          <a:bodyPr wrap="square" lIns="0" tIns="0" rIns="0" bIns="0" rtlCol="0" anchor="ctr"/>
+          <a:lstStyle/>
+          <a:p>
+            <a:pPr indent="0" marL="0">
+              <a:lnSpc>
+                <a:spcPts val="1500"/>
+              </a:lnSpc>
+              <a:buNone/>
+            </a:pPr>
+            <a:r>
+              <a:rPr lang="en-US" sz="1100" dirty="0">
+                <a:solidFill>
+                  <a:srgbClr val="4A635D"/>
+                </a:solidFill>
+                <a:latin typeface="Calibri" pitchFamily="34" charset="0"/>
+                <a:ea typeface="Calibri" pitchFamily="34" charset="-122"/>
+                <a:cs typeface="Calibri" pitchFamily="34" charset="-120"/>
+              </a:rPr>
+              <a:t>Satu anak, sekali periksa, di klinik</a:t>
+            </a:r>
+            <a:endParaRPr lang="en-US" sz="1100" dirty="0"/>
+          </a:p>
+        </p:txBody>
+      </p:sp>
+      <p:sp>
+        <p:nvSpPr>
+          <p:cNvPr id="19" name="Text 17"/>
+          <p:cNvSpPr/>
+          <p:nvPr/>
+        </p:nvSpPr>
+        <p:spPr>
+          <a:xfrm>
+            <a:off x="685800" y="4983480"/>
+            <a:ext cx="10424160" cy="640080"/>
+          </a:xfrm>
+          <a:prstGeom prst="rect">
+            <a:avLst/>
+          </a:prstGeom>
+          <a:noFill/>
+          <a:ln/>
+        </p:spPr>
+        <p:txBody>
+          <a:bodyPr wrap="square" lIns="0" tIns="0" rIns="0" bIns="0" rtlCol="0" anchor="ctr"/>
+          <a:lstStyle/>
+          <a:p>
+            <a:pPr indent="0" marL="0">
+              <a:lnSpc>
+                <a:spcPts val="2400"/>
+              </a:lnSpc>
+              <a:buNone/>
+            </a:pPr>
+            <a:r>
+              <a:rPr lang="en-US" sz="1700" b="1" dirty="0">
+                <a:solidFill>
+                  <a:srgbClr val="0B1E1B"/>
+                </a:solidFill>
+                <a:latin typeface="Cambria" pitchFamily="34" charset="0"/>
+                <a:ea typeface="Cambria" pitchFamily="34" charset="-122"/>
+                <a:cs typeface="Cambria" pitchFamily="34" charset="-120"/>
+              </a:rPr>
+              <a:t>Bila titik operasinya terreplikasi, menemukan satu kasus harganya kira-kira sekali pemeriksaan EarliPoint — seperempatnya bila satu tablet dirotasi ke empat Posyandu.</a:t>
+            </a:r>
+            <a:endParaRPr lang="en-US" sz="1700" dirty="0"/>
+          </a:p>
+        </p:txBody>
+      </p:sp>
+      <p:sp>
+        <p:nvSpPr>
+          <p:cNvPr id="20" name="Text 18"/>
+          <p:cNvSpPr/>
+          <p:nvPr/>
+        </p:nvSpPr>
+        <p:spPr>
+          <a:xfrm>
+            <a:off x="685800" y="5650992"/>
+            <a:ext cx="10424160" cy="274320"/>
+          </a:xfrm>
+          <a:prstGeom prst="rect">
+            <a:avLst/>
+          </a:prstGeom>
+          <a:noFill/>
+          <a:ln/>
+        </p:spPr>
+        <p:txBody>
+          <a:bodyPr wrap="square" lIns="0" tIns="0" rIns="0" bIns="0" rtlCol="0" anchor="ctr"/>
+          <a:lstStyle/>
+          <a:p>
+            <a:pPr indent="0" marL="0">
+              <a:buNone/>
+            </a:pPr>
+            <a:r>
+              <a:rPr lang="en-US" sz="1050" b="1" dirty="0">
+                <a:solidFill>
+                  <a:srgbClr val="14302B"/>
+                </a:solidFill>
+                <a:latin typeface="Calibri" pitchFamily="34" charset="0"/>
+                <a:ea typeface="Calibri" pitchFamily="34" charset="-122"/>
+                <a:cs typeface="Calibri" pitchFamily="34" charset="-120"/>
+              </a:rPr>
+              <a:t>Yang belum terukur: waktu kader, pelatihan, dukungan, cetak, dudukan, pengulangan sesi, pemeliharaan, penggantian perangkat, dan tindak lanjut klinis.</a:t>
+            </a:r>
+            <a:endParaRPr lang="en-US" sz="1050" dirty="0"/>
+          </a:p>
+        </p:txBody>
+      </p:sp>
+      <p:sp>
+        <p:nvSpPr>
+          <p:cNvPr id="21" name="Text 19"/>
+          <p:cNvSpPr/>
+          <p:nvPr/>
+        </p:nvSpPr>
+        <p:spPr>
+          <a:xfrm>
+            <a:off x="685800" y="5943600"/>
+            <a:ext cx="10424160" cy="274320"/>
+          </a:xfrm>
+          <a:prstGeom prst="rect">
+            <a:avLst/>
+          </a:prstGeom>
+          <a:noFill/>
+          <a:ln/>
+        </p:spPr>
+        <p:txBody>
+          <a:bodyPr wrap="square" lIns="0" tIns="0" rIns="0" bIns="0" rtlCol="0" anchor="ctr"/>
+          <a:lstStyle/>
+          <a:p>
+            <a:pPr indent="0" marL="0">
+              <a:buNone/>
+            </a:pPr>
+            <a:r>
+              <a:rPr lang="en-US" sz="1050" dirty="0">
+                <a:solidFill>
+                  <a:srgbClr val="4A635D"/>
+                </a:solidFill>
+                <a:latin typeface="Calibri" pitchFamily="34" charset="0"/>
+                <a:ea typeface="Calibri" pitchFamily="34" charset="-122"/>
+                <a:cs typeface="Calibri" pitchFamily="34" charset="-120"/>
+              </a:rPr>
+              <a:t>Asumsi dinyatakan di docs/dampak_dan_adopsi.md · kohort 1.000, prevalensi 1%, cakupan teknis 90%</a:t>
+            </a:r>
+            <a:endParaRPr lang="en-US" sz="1050" dirty="0"/>
           </a:p>
         </p:txBody>
       </p:sp>
@@ -4891,6 +6647,612 @@
 <file path=ppt/slides/slide13.xml><?xml version="1.0" encoding="utf-8"?>
 <p:sld xmlns:a="http://schemas.openxmlformats.org/drawingml/2006/main" xmlns:r="http://schemas.openxmlformats.org/officeDocument/2006/relationships" xmlns:p="http://schemas.openxmlformats.org/presentationml/2006/main">
   <p:cSld name="Slide 13">
+    <p:bg>
+      <p:bgPr>
+        <a:solidFill>
+          <a:srgbClr val="F7F9F8"/>
+        </a:solidFill>
+      </p:bgPr>
+    </p:bg>
+    <p:spTree>
+      <p:nvGrpSpPr>
+        <p:cNvPr id="1" name=""/>
+        <p:cNvGrpSpPr/>
+        <p:nvPr/>
+      </p:nvGrpSpPr>
+      <p:grpSpPr>
+        <a:xfrm>
+          <a:off x="0" y="0"/>
+          <a:ext cx="0" cy="0"/>
+          <a:chOff x="0" y="0"/>
+          <a:chExt cx="0" cy="0"/>
+        </a:xfrm>
+      </p:grpSpPr>
+      <p:sp>
+        <p:nvSpPr>
+          <p:cNvPr id="2" name="Shape 0"/>
+          <p:cNvSpPr/>
+          <p:nvPr/>
+        </p:nvSpPr>
+        <p:spPr>
+          <a:xfrm>
+            <a:off x="11268151" y="740664"/>
+            <a:ext cx="237744" cy="237744"/>
+          </a:xfrm>
+          <a:prstGeom prst="ellipse">
+            <a:avLst/>
+          </a:prstGeom>
+          <a:solidFill>
+            <a:srgbClr val="FFFFFF">
+              <a:alpha val="0"/>
+            </a:srgbClr>
+          </a:solidFill>
+          <a:ln w="25400">
+            <a:solidFill>
+              <a:srgbClr val="5CB9A3"/>
+            </a:solidFill>
+            <a:prstDash val="solid"/>
+          </a:ln>
+        </p:spPr>
+      </p:sp>
+      <p:sp>
+        <p:nvSpPr>
+          <p:cNvPr id="3" name="Shape 1"/>
+          <p:cNvSpPr/>
+          <p:nvPr/>
+        </p:nvSpPr>
+        <p:spPr>
+          <a:xfrm>
+            <a:off x="11339474" y="811987"/>
+            <a:ext cx="95098" cy="95098"/>
+          </a:xfrm>
+          <a:prstGeom prst="ellipse">
+            <a:avLst/>
+          </a:prstGeom>
+          <a:solidFill>
+            <a:srgbClr val="5CB9A3"/>
+          </a:solidFill>
+          <a:ln w="12700">
+            <a:solidFill>
+              <a:srgbClr val="333333"/>
+            </a:solidFill>
+            <a:prstDash val="solid"/>
+          </a:ln>
+        </p:spPr>
+      </p:sp>
+      <p:sp>
+        <p:nvSpPr>
+          <p:cNvPr id="4" name="Text 2"/>
+          <p:cNvSpPr/>
+          <p:nvPr/>
+        </p:nvSpPr>
+        <p:spPr>
+          <a:xfrm>
+            <a:off x="685800" y="685800"/>
+            <a:ext cx="10271455" cy="256032"/>
+          </a:xfrm>
+          <a:prstGeom prst="rect">
+            <a:avLst/>
+          </a:prstGeom>
+          <a:noFill/>
+          <a:ln/>
+        </p:spPr>
+        <p:txBody>
+          <a:bodyPr wrap="square" lIns="0" tIns="0" rIns="0" bIns="0" rtlCol="0" anchor="ctr"/>
+          <a:lstStyle/>
+          <a:p>
+            <a:pPr indent="0" marL="0">
+              <a:buNone/>
+            </a:pPr>
+            <a:r>
+              <a:rPr lang="en-US" sz="1200" b="1" spc="120" kern="0" dirty="0">
+                <a:solidFill>
+                  <a:srgbClr val="0D8271"/>
+                </a:solidFill>
+                <a:latin typeface="Calibri" pitchFamily="34" charset="0"/>
+                <a:ea typeface="Calibri" pitchFamily="34" charset="-122"/>
+                <a:cs typeface="Calibri" pitchFamily="34" charset="-120"/>
+              </a:rPr>
+              <a:t>Jalur adopsi</a:t>
+            </a:r>
+            <a:endParaRPr lang="en-US" sz="1200" dirty="0"/>
+          </a:p>
+        </p:txBody>
+      </p:sp>
+      <p:sp>
+        <p:nvSpPr>
+          <p:cNvPr id="5" name="Text 3"/>
+          <p:cNvSpPr/>
+          <p:nvPr/>
+        </p:nvSpPr>
+        <p:spPr>
+          <a:xfrm>
+            <a:off x="685800" y="996696"/>
+            <a:ext cx="10271455" cy="822960"/>
+          </a:xfrm>
+          <a:prstGeom prst="rect">
+            <a:avLst/>
+          </a:prstGeom>
+          <a:noFill/>
+          <a:ln/>
+        </p:spPr>
+        <p:txBody>
+          <a:bodyPr wrap="square" lIns="0" tIns="0" rIns="0" bIns="0" rtlCol="0" anchor="ctr"/>
+          <a:lstStyle/>
+          <a:p>
+            <a:pPr indent="0" marL="0">
+              <a:lnSpc>
+                <a:spcPts val="3600"/>
+              </a:lnSpc>
+              <a:buNone/>
+            </a:pPr>
+            <a:r>
+              <a:rPr lang="en-US" sz="3200" b="1" dirty="0">
+                <a:solidFill>
+                  <a:srgbClr val="0B1E1B"/>
+                </a:solidFill>
+                <a:latin typeface="Cambria" pitchFamily="34" charset="0"/>
+                <a:ea typeface="Cambria" pitchFamily="34" charset="-122"/>
+                <a:cs typeface="Cambria" pitchFamily="34" charset="-120"/>
+              </a:rPr>
+              <a:t>Ia menempel pada alur yang sudah jalan</a:t>
+            </a:r>
+            <a:endParaRPr lang="en-US" sz="3200" dirty="0"/>
+          </a:p>
+        </p:txBody>
+      </p:sp>
+      <p:sp>
+        <p:nvSpPr>
+          <p:cNvPr id="6" name="Text 4"/>
+          <p:cNvSpPr/>
+          <p:nvPr/>
+        </p:nvSpPr>
+        <p:spPr>
+          <a:xfrm>
+            <a:off x="685800" y="2103120"/>
+            <a:ext cx="10424160" cy="548640"/>
+          </a:xfrm>
+          <a:prstGeom prst="rect">
+            <a:avLst/>
+          </a:prstGeom>
+          <a:noFill/>
+          <a:ln/>
+        </p:spPr>
+        <p:txBody>
+          <a:bodyPr wrap="square" lIns="0" tIns="0" rIns="0" bIns="0" rtlCol="0" anchor="ctr"/>
+          <a:lstStyle/>
+          <a:p>
+            <a:pPr indent="0" marL="0">
+              <a:lnSpc>
+                <a:spcPts val="2100"/>
+              </a:lnSpc>
+              <a:buNone/>
+            </a:pPr>
+            <a:r>
+              <a:rPr lang="en-US" sz="1500" dirty="0">
+                <a:solidFill>
+                  <a:srgbClr val="14302B"/>
+                </a:solidFill>
+                <a:latin typeface="Calibri" pitchFamily="34" charset="0"/>
+                <a:ea typeface="Calibri" pitchFamily="34" charset="-122"/>
+                <a:cs typeface="Calibri" pitchFamily="34" charset="-120"/>
+              </a:rPr>
+              <a:t>Alat ini tidak menggantikan apa pun. Ia menempel: sesi 67 detik sesudah penimbangan bulanan, laporan satu halaman diserahkan ke Puskesmas, dibaca berdampingan dengan SDIDTK.</a:t>
+            </a:r>
+            <a:endParaRPr lang="en-US" sz="1500" dirty="0"/>
+          </a:p>
+        </p:txBody>
+      </p:sp>
+      <p:sp>
+        <p:nvSpPr>
+          <p:cNvPr id="7" name="Text 5"/>
+          <p:cNvSpPr/>
+          <p:nvPr/>
+        </p:nvSpPr>
+        <p:spPr>
+          <a:xfrm>
+            <a:off x="685800" y="2926080"/>
+            <a:ext cx="3291840" cy="1002890"/>
+          </a:xfrm>
+          <a:prstGeom prst="rect">
+            <a:avLst/>
+          </a:prstGeom>
+          <a:noFill/>
+          <a:ln/>
+        </p:spPr>
+        <p:txBody>
+          <a:bodyPr wrap="square" lIns="0" tIns="0" rIns="0" bIns="0" rtlCol="0" anchor="ctr"/>
+          <a:lstStyle/>
+          <a:p>
+            <a:pPr indent="0" marL="0">
+              <a:lnSpc>
+                <a:spcPts val="6800"/>
+              </a:lnSpc>
+              <a:buNone/>
+            </a:pPr>
+            <a:r>
+              <a:rPr lang="en-US" sz="6800" b="1" dirty="0">
+                <a:solidFill>
+                  <a:srgbClr val="0D8271"/>
+                </a:solidFill>
+                <a:latin typeface="Cambria" pitchFamily="34" charset="0"/>
+                <a:ea typeface="Cambria" pitchFamily="34" charset="-122"/>
+                <a:cs typeface="Cambria" pitchFamily="34" charset="-120"/>
+              </a:rPr>
+              <a:t>~700</a:t>
+            </a:r>
+            <a:endParaRPr lang="en-US" sz="6800" dirty="0"/>
+          </a:p>
+        </p:txBody>
+      </p:sp>
+      <p:sp>
+        <p:nvSpPr>
+          <p:cNvPr id="8" name="Text 6"/>
+          <p:cNvSpPr/>
+          <p:nvPr/>
+        </p:nvSpPr>
+        <p:spPr>
+          <a:xfrm>
+            <a:off x="685800" y="3983834"/>
+            <a:ext cx="3291840" cy="274320"/>
+          </a:xfrm>
+          <a:prstGeom prst="rect">
+            <a:avLst/>
+          </a:prstGeom>
+          <a:noFill/>
+          <a:ln/>
+        </p:spPr>
+        <p:txBody>
+          <a:bodyPr wrap="square" lIns="0" tIns="0" rIns="0" bIns="0" rtlCol="0" anchor="ctr"/>
+          <a:lstStyle/>
+          <a:p>
+            <a:pPr indent="0" marL="0">
+              <a:buNone/>
+            </a:pPr>
+            <a:r>
+              <a:rPr lang="en-US" sz="1400" b="1" dirty="0">
+                <a:solidFill>
+                  <a:srgbClr val="14302B"/>
+                </a:solidFill>
+                <a:latin typeface="Calibri" pitchFamily="34" charset="0"/>
+                <a:ea typeface="Calibri" pitchFamily="34" charset="-122"/>
+                <a:cs typeface="Calibri" pitchFamily="34" charset="-120"/>
+              </a:rPr>
+              <a:t>sesi dapat dinilai per tahun — hipotetis</a:t>
+            </a:r>
+            <a:endParaRPr lang="en-US" sz="1400" dirty="0"/>
+          </a:p>
+        </p:txBody>
+      </p:sp>
+      <p:sp>
+        <p:nvSpPr>
+          <p:cNvPr id="9" name="Text 7"/>
+          <p:cNvSpPr/>
+          <p:nvPr/>
+        </p:nvSpPr>
+        <p:spPr>
+          <a:xfrm>
+            <a:off x="685800" y="4294730"/>
+            <a:ext cx="3291840" cy="640080"/>
+          </a:xfrm>
+          <a:prstGeom prst="rect">
+            <a:avLst/>
+          </a:prstGeom>
+          <a:noFill/>
+          <a:ln/>
+        </p:spPr>
+        <p:txBody>
+          <a:bodyPr wrap="square" lIns="0" tIns="0" rIns="0" bIns="0" rtlCol="0" anchor="ctr"/>
+          <a:lstStyle/>
+          <a:p>
+            <a:pPr indent="0" marL="0">
+              <a:lnSpc>
+                <a:spcPts val="1500"/>
+              </a:lnSpc>
+              <a:buNone/>
+            </a:pPr>
+            <a:r>
+              <a:rPr lang="en-US" sz="1200" dirty="0">
+                <a:solidFill>
+                  <a:srgbClr val="4A635D"/>
+                </a:solidFill>
+                <a:latin typeface="Calibri" pitchFamily="34" charset="0"/>
+                <a:ea typeface="Calibri" pitchFamily="34" charset="-122"/>
+                <a:cs typeface="Calibri" pitchFamily="34" charset="-120"/>
+              </a:rPr>
+              <a:t>Aritmetika skala: 30 Posyandu × 40 anak layak, dikurangi attrition 42%. Skala rekrutmen, bukan rencana operasional.</a:t>
+            </a:r>
+            <a:endParaRPr lang="en-US" sz="1200" dirty="0"/>
+          </a:p>
+        </p:txBody>
+      </p:sp>
+      <p:sp>
+        <p:nvSpPr>
+          <p:cNvPr id="10" name="Text 8"/>
+          <p:cNvSpPr/>
+          <p:nvPr/>
+        </p:nvSpPr>
+        <p:spPr>
+          <a:xfrm>
+            <a:off x="4434840" y="2926080"/>
+            <a:ext cx="3291840" cy="1002890"/>
+          </a:xfrm>
+          <a:prstGeom prst="rect">
+            <a:avLst/>
+          </a:prstGeom>
+          <a:noFill/>
+          <a:ln/>
+        </p:spPr>
+        <p:txBody>
+          <a:bodyPr wrap="square" lIns="0" tIns="0" rIns="0" bIns="0" rtlCol="0" anchor="ctr"/>
+          <a:lstStyle/>
+          <a:p>
+            <a:pPr indent="0" marL="0">
+              <a:lnSpc>
+                <a:spcPts val="6800"/>
+              </a:lnSpc>
+              <a:buNone/>
+            </a:pPr>
+            <a:r>
+              <a:rPr lang="en-US" sz="6800" b="1" dirty="0">
+                <a:solidFill>
+                  <a:srgbClr val="4A635D"/>
+                </a:solidFill>
+                <a:latin typeface="Cambria" pitchFamily="34" charset="0"/>
+                <a:ea typeface="Cambria" pitchFamily="34" charset="-122"/>
+                <a:cs typeface="Cambria" pitchFamily="34" charset="-120"/>
+              </a:rPr>
+              <a:t>475</a:t>
+            </a:r>
+            <a:endParaRPr lang="en-US" sz="6800" dirty="0"/>
+          </a:p>
+        </p:txBody>
+      </p:sp>
+      <p:sp>
+        <p:nvSpPr>
+          <p:cNvPr id="11" name="Text 9"/>
+          <p:cNvSpPr/>
+          <p:nvPr/>
+        </p:nvSpPr>
+        <p:spPr>
+          <a:xfrm>
+            <a:off x="4434840" y="3983834"/>
+            <a:ext cx="3291840" cy="274320"/>
+          </a:xfrm>
+          <a:prstGeom prst="rect">
+            <a:avLst/>
+          </a:prstGeom>
+          <a:noFill/>
+          <a:ln/>
+        </p:spPr>
+        <p:txBody>
+          <a:bodyPr wrap="square" lIns="0" tIns="0" rIns="0" bIns="0" rtlCol="0" anchor="ctr"/>
+          <a:lstStyle/>
+          <a:p>
+            <a:pPr indent="0" marL="0">
+              <a:buNone/>
+            </a:pPr>
+            <a:r>
+              <a:rPr lang="en-US" sz="1400" b="1" dirty="0">
+                <a:solidFill>
+                  <a:srgbClr val="14302B"/>
+                </a:solidFill>
+                <a:latin typeface="Calibri" pitchFamily="34" charset="0"/>
+                <a:ea typeface="Calibri" pitchFamily="34" charset="-122"/>
+                <a:cs typeface="Calibri" pitchFamily="34" charset="-120"/>
+              </a:rPr>
+              <a:t>kohort Nature Medicine</a:t>
+            </a:r>
+            <a:endParaRPr lang="en-US" sz="1400" dirty="0"/>
+          </a:p>
+        </p:txBody>
+      </p:sp>
+      <p:sp>
+        <p:nvSpPr>
+          <p:cNvPr id="12" name="Text 10"/>
+          <p:cNvSpPr/>
+          <p:nvPr/>
+        </p:nvSpPr>
+        <p:spPr>
+          <a:xfrm>
+            <a:off x="4434840" y="4294730"/>
+            <a:ext cx="3291840" cy="640080"/>
+          </a:xfrm>
+          <a:prstGeom prst="rect">
+            <a:avLst/>
+          </a:prstGeom>
+          <a:noFill/>
+          <a:ln/>
+        </p:spPr>
+        <p:txBody>
+          <a:bodyPr wrap="square" lIns="0" tIns="0" rIns="0" bIns="0" rtlCol="0" anchor="ctr"/>
+          <a:lstStyle/>
+          <a:p>
+            <a:pPr indent="0" marL="0">
+              <a:lnSpc>
+                <a:spcPts val="1500"/>
+              </a:lnSpc>
+              <a:buNone/>
+            </a:pPr>
+            <a:r>
+              <a:rPr lang="en-US" sz="1200" dirty="0">
+                <a:solidFill>
+                  <a:srgbClr val="4A635D"/>
+                </a:solidFill>
+                <a:latin typeface="Calibri" pitchFamily="34" charset="0"/>
+                <a:ea typeface="Calibri" pitchFamily="34" charset="-122"/>
+                <a:cs typeface="Calibri" pitchFamily="34" charset="-120"/>
+              </a:rPr>
+              <a:t>Studi SenseToKnow yang jadi acuan kami.</a:t>
+            </a:r>
+            <a:endParaRPr lang="en-US" sz="1200" dirty="0"/>
+          </a:p>
+        </p:txBody>
+      </p:sp>
+      <p:sp>
+        <p:nvSpPr>
+          <p:cNvPr id="13" name="Shape 11"/>
+          <p:cNvSpPr/>
+          <p:nvPr/>
+        </p:nvSpPr>
+        <p:spPr>
+          <a:xfrm>
+            <a:off x="7909560" y="2880360"/>
+            <a:ext cx="3200400" cy="2194560"/>
+          </a:xfrm>
+          <a:prstGeom prst="roundRect">
+            <a:avLst>
+              <a:gd name="adj" fmla="val 2500"/>
+            </a:avLst>
+          </a:prstGeom>
+          <a:solidFill>
+            <a:srgbClr val="E4F2EE"/>
+          </a:solidFill>
+          <a:ln w="12700">
+            <a:solidFill>
+              <a:srgbClr val="E4F2EE"/>
+            </a:solidFill>
+            <a:prstDash val="solid"/>
+          </a:ln>
+        </p:spPr>
+      </p:sp>
+      <p:sp>
+        <p:nvSpPr>
+          <p:cNvPr id="14" name="Text 12"/>
+          <p:cNvSpPr/>
+          <p:nvPr/>
+        </p:nvSpPr>
+        <p:spPr>
+          <a:xfrm>
+            <a:off x="8138160" y="3127248"/>
+            <a:ext cx="2743200" cy="548640"/>
+          </a:xfrm>
+          <a:prstGeom prst="rect">
+            <a:avLst/>
+          </a:prstGeom>
+          <a:noFill/>
+          <a:ln/>
+        </p:spPr>
+        <p:txBody>
+          <a:bodyPr wrap="square" lIns="0" tIns="0" rIns="0" bIns="0" rtlCol="0" anchor="ctr"/>
+          <a:lstStyle/>
+          <a:p>
+            <a:pPr indent="0" marL="0">
+              <a:lnSpc>
+                <a:spcPts val="2100"/>
+              </a:lnSpc>
+              <a:buNone/>
+            </a:pPr>
+            <a:r>
+              <a:rPr lang="en-US" sz="1600" b="1" dirty="0">
+                <a:solidFill>
+                  <a:srgbClr val="0D8271"/>
+                </a:solidFill>
+                <a:latin typeface="Cambria" pitchFamily="34" charset="0"/>
+                <a:ea typeface="Cambria" pitchFamily="34" charset="-122"/>
+                <a:cs typeface="Cambria" pitchFamily="34" charset="-120"/>
+              </a:rPr>
+              <a:t>Tanpa biaya marginal perangkat lunak</a:t>
+            </a:r>
+            <a:endParaRPr lang="en-US" sz="1600" dirty="0"/>
+          </a:p>
+        </p:txBody>
+      </p:sp>
+      <p:sp>
+        <p:nvSpPr>
+          <p:cNvPr id="15" name="Text 13"/>
+          <p:cNvSpPr/>
+          <p:nvPr/>
+        </p:nvSpPr>
+        <p:spPr>
+          <a:xfrm>
+            <a:off x="8138160" y="3749040"/>
+            <a:ext cx="2743200" cy="1097280"/>
+          </a:xfrm>
+          <a:prstGeom prst="rect">
+            <a:avLst/>
+          </a:prstGeom>
+          <a:noFill/>
+          <a:ln/>
+        </p:spPr>
+        <p:txBody>
+          <a:bodyPr wrap="square" lIns="0" tIns="0" rIns="0" bIns="0" rtlCol="0" anchor="ctr"/>
+          <a:lstStyle/>
+          <a:p>
+            <a:pPr indent="0" marL="0">
+              <a:lnSpc>
+                <a:spcPts val="1800"/>
+              </a:lnSpc>
+              <a:buNone/>
+            </a:pPr>
+            <a:r>
+              <a:rPr lang="en-US" sz="1250" dirty="0">
+                <a:solidFill>
+                  <a:srgbClr val="14302B"/>
+                </a:solidFill>
+                <a:latin typeface="Calibri" pitchFamily="34" charset="0"/>
+                <a:ea typeface="Calibri" pitchFamily="34" charset="-122"/>
+                <a:cs typeface="Calibri" pitchFamily="34" charset="-120"/>
+              </a:rPr>
+              <a:t>PWA statis. Tidak ada server, basis data, maupun lisensi. Posyandu ke-1 dan ke-1.000 memuat berkas yang sama.</a:t>
+            </a:r>
+            <a:endParaRPr lang="en-US" sz="1250" dirty="0"/>
+          </a:p>
+        </p:txBody>
+      </p:sp>
+      <p:sp>
+        <p:nvSpPr>
+          <p:cNvPr id="16" name="Text 14"/>
+          <p:cNvSpPr/>
+          <p:nvPr/>
+        </p:nvSpPr>
+        <p:spPr>
+          <a:xfrm>
+            <a:off x="685800" y="5349240"/>
+            <a:ext cx="6766560" cy="640080"/>
+          </a:xfrm>
+          <a:prstGeom prst="rect">
+            <a:avLst/>
+          </a:prstGeom>
+          <a:noFill/>
+          <a:ln/>
+        </p:spPr>
+        <p:txBody>
+          <a:bodyPr wrap="square" lIns="0" tIns="0" rIns="0" bIns="0" rtlCol="0" anchor="ctr"/>
+          <a:lstStyle/>
+          <a:p>
+            <a:pPr indent="0" marL="0">
+              <a:lnSpc>
+                <a:spcPts val="2100"/>
+              </a:lnSpc>
+              <a:buNone/>
+            </a:pPr>
+            <a:r>
+              <a:rPr lang="en-US" sz="1500" i="1" dirty="0">
+                <a:solidFill>
+                  <a:srgbClr val="14302B"/>
+                </a:solidFill>
+                <a:latin typeface="Cambria" pitchFamily="34" charset="0"/>
+                <a:ea typeface="Cambria" pitchFamily="34" charset="-122"/>
+                <a:cs typeface="Cambria" pitchFamily="34" charset="-120"/>
+              </a:rPr>
+              <a:t>Skala kohort acuan Nature Medicine dapat dicapai dalam satu tahun studi di 30 Posyandu — sebagai penelitian prospektif berizin etik dengan acuan klinis buta, bukan sebagai penyebaran produk.</a:t>
+            </a:r>
+            <a:endParaRPr lang="en-US" sz="1500" dirty="0"/>
+          </a:p>
+        </p:txBody>
+      </p:sp>
+    </p:spTree>
+  </p:cSld>
+  <p:clrMapOvr>
+    <a:masterClrMapping/>
+  </p:clrMapOvr>
+</p:sld>
+</file>
+
+<file path=ppt/slides/slide14.xml><?xml version="1.0" encoding="utf-8"?>
+<p:sld xmlns:a="http://schemas.openxmlformats.org/drawingml/2006/main" xmlns:r="http://schemas.openxmlformats.org/officeDocument/2006/relationships" xmlns:p="http://schemas.openxmlformats.org/presentationml/2006/main">
+  <p:cSld name="Slide 14">
     <p:bg>
       <p:bgPr>
         <a:solidFill>
@@ -5138,8 +7500,8 @@
         </p:nvSpPr>
         <p:spPr>
           <a:xfrm>
-            <a:off x="685800" y="5532120"/>
-            <a:ext cx="10424160" cy="274320"/>
+            <a:off x="685800" y="5440680"/>
+            <a:ext cx="10424160" cy="411480"/>
           </a:xfrm>
           <a:prstGeom prst="rect">
             <a:avLst/>
@@ -5152,6 +7514,9 @@
           <a:lstStyle/>
           <a:p>
             <a:pPr indent="0" marL="0">
+              <a:lnSpc>
+                <a:spcPts val="1800"/>
+              </a:lnSpc>
               <a:buNone/>
             </a:pPr>
             <a:r>
@@ -5163,7 +7528,7 @@
                 <a:ea typeface="Calibri" pitchFamily="34" charset="-122"/>
                 <a:cs typeface="Calibri" pitchFamily="34" charset="-120"/>
               </a:rPr>
-              <a:t>Yang kami minta: satu mitra klinis yang mampu menjalankan kaji itu.</a:t>
+              <a:t>Yang kami minta: satu mitra klinis yang mampu menjalankan kaji itu. Paketnya sudah siap dikirim — 10 dari 14 berkas jadi, sisanya menuntut mitra sebagai penanggung jawabnya.</a:t>
             </a:r>
             <a:endParaRPr lang="en-US" sz="1300" dirty="0"/>
           </a:p>
@@ -9925,7 +12290,7 @@
                 <a:ea typeface="Calibri" pitchFamily="34" charset="-122"/>
                 <a:cs typeface="Calibri" pitchFamily="34" charset="-120"/>
               </a:rPr>
-              <a:t>Penjaga out-of-distribution</a:t>
+              <a:t>Kontribusi metodologis</a:t>
             </a:r>
             <a:endParaRPr lang="en-US" sz="1200" dirty="0"/>
           </a:p>
@@ -9967,7 +12332,7 @@
                 <a:ea typeface="Cambria" pitchFamily="34" charset="-122"/>
                 <a:cs typeface="Cambria" pitchFamily="34" charset="-120"/>
               </a:rPr>
-              <a:t>Modelnya jalan. Penjaganya menolak — dan kami buktikan ia tidak menolak semuanya.</a:t>
+              <a:t>Kami membandingkan ambang terhadap selang, bukan terhadap satu angka</a:t>
             </a:r>
             <a:endParaRPr lang="en-US" sz="3200" dirty="0"/>
           </a:p>
@@ -9975,26 +12340,1168 @@
       </p:sp>
       <p:sp>
         <p:nvSpPr>
-          <p:cNvPr id="6" name="Shape 4"/>
-          <p:cNvSpPr/>
-          <p:nvPr/>
-        </p:nvSpPr>
-        <p:spPr>
-          <a:xfrm>
-            <a:off x="685800" y="2194560"/>
-            <a:ext cx="5760720" cy="2286000"/>
+          <p:cNvPr id="6" name="Text 4"/>
+          <p:cNvSpPr/>
+          <p:nvPr/>
+        </p:nvSpPr>
+        <p:spPr>
+          <a:xfrm>
+            <a:off x="685800" y="2103120"/>
+            <a:ext cx="10424160" cy="777240"/>
+          </a:xfrm>
+          <a:prstGeom prst="rect">
+            <a:avLst/>
+          </a:prstGeom>
+          <a:noFill/>
+          <a:ln/>
+        </p:spPr>
+        <p:txBody>
+          <a:bodyPr wrap="square" lIns="0" tIns="0" rIns="0" bIns="0" rtlCol="0" anchor="ctr"/>
+          <a:lstStyle/>
+          <a:p>
+            <a:pPr indent="0" marL="0">
+              <a:lnSpc>
+                <a:spcPts val="2000"/>
+              </a:lnSpc>
+              <a:buNone/>
+            </a:pPr>
+            <a:r>
+              <a:rPr lang="en-US" sz="1400" dirty="0">
+                <a:solidFill>
+                  <a:srgbClr val="14302B"/>
+                </a:solidFill>
+                <a:latin typeface="Calibri" pitchFamily="34" charset="0"/>
+                <a:ea typeface="Calibri" pitchFamily="34" charset="-122"/>
+                <a:cs typeface="Calibri" pitchFamily="34" charset="-120"/>
+              </a:rPr>
+              <a:t>Hampir setiap penerapan ambang terbit membandingkan estimasi titik sesi dengan cutoff. Klip 16,75 detik hanya menghasilkan sekitar 300 sampel di dalam AOI, dan galat pencuplikan pada angka sebesar itu berjalan belasan poin. Jadi kami bandingkan selang kepercayaan 95% sesi — dan sesi yang selangnya melintasi ambang berstatus tidak dapat dinilai, bukan positif.</a:t>
+            </a:r>
+            <a:endParaRPr lang="en-US" sz="1400" dirty="0"/>
+          </a:p>
+        </p:txBody>
+      </p:sp>
+      <p:graphicFrame>
+        <p:nvGraphicFramePr>
+          <p:cNvPr id="9" name="Table 0"/>
+          <p:cNvGraphicFramePr>
+            <a:graphicFrameLocks noGrp="1"/>
+          </p:cNvGraphicFramePr>
+          <p:nvPr>
+            <p:extLst>
+              <p:ext uri="{D42A27DB-BD31-4B8C-83A1-F6EECF244321}">
+                <p14:modId xmlns:p14="http://schemas.microsoft.com/office/powerpoint/2010/main" val="1579011935"/>
+              </p:ext>
+            </p:extLst>
+          </p:nvPr>
+        </p:nvGraphicFramePr>
+        <p:xfrm>
+          <a:off x="685800" y="3063240"/>
+          <a:ext cx="6400800" cy="914400"/>
+        </p:xfrm>
+        <a:graphic>
+          <a:graphicData uri="http://schemas.openxmlformats.org/drawingml/2006/table">
+            <a:tbl>
+              <a:tblPr/>
+              <a:tblGrid>
+                <a:gridCol w="2743200"/>
+                <a:gridCol w="1828800"/>
+                <a:gridCol w="1828800"/>
+              </a:tblGrid>
+              <a:tr h="402336">
+                <a:tc>
+                  <a:txBody>
+                    <a:bodyPr/>
+                    <a:lstStyle/>
+                    <a:p>
+                      <a:pPr indent="0" marL="0">
+                        <a:buNone/>
+                      </a:pPr>
+                      <a:r>
+                        <a:rPr lang="en-US" sz="1300" b="1" dirty="0">
+                          <a:solidFill>
+                            <a:srgbClr val="14302B"/>
+                          </a:solidFill>
+                          <a:latin typeface="Calibri" pitchFamily="34" charset="0"/>
+                          <a:ea typeface="Calibri" pitchFamily="34" charset="-122"/>
+                          <a:cs typeface="Calibri" pitchFamily="34" charset="-120"/>
+                        </a:rPr>
+                        <a:t>Preferensi sebenarnya</a:t>
+                      </a:r>
+                      <a:endParaRPr lang="en-US" sz="1300" dirty="0">
+                        <a:latin typeface="Calibri" charset="0"/>
+                        <a:ea typeface="Calibri" charset="0"/>
+                        <a:cs typeface="Calibri" charset="0"/>
+                      </a:endParaRPr>
+                    </a:p>
+                  </a:txBody>
+                  <a:tcPr marL="82296" marR="82296" marT="82296" marB="82296" anchor="ctr">
+                    <a:lnL w="12700" cap="flat" cmpd="sng" algn="ctr">
+                      <a:solidFill>
+                        <a:srgbClr val="DBE4E1"/>
+                      </a:solidFill>
+                      <a:prstDash val="solid"/>
+                      <a:round/>
+                      <a:headEnd type="none" w="med" len="med"/>
+                      <a:tailEnd type="none" w="med" len="med"/>
+                    </a:lnL>
+                    <a:lnR w="12700" cap="flat" cmpd="sng" algn="ctr">
+                      <a:solidFill>
+                        <a:srgbClr val="DBE4E1"/>
+                      </a:solidFill>
+                      <a:prstDash val="solid"/>
+                      <a:round/>
+                      <a:headEnd type="none" w="med" len="med"/>
+                      <a:tailEnd type="none" w="med" len="med"/>
+                    </a:lnR>
+                    <a:lnT w="12700" cap="flat" cmpd="sng" algn="ctr">
+                      <a:solidFill>
+                        <a:srgbClr val="DBE4E1"/>
+                      </a:solidFill>
+                      <a:prstDash val="solid"/>
+                      <a:round/>
+                      <a:headEnd type="none" w="med" len="med"/>
+                      <a:tailEnd type="none" w="med" len="med"/>
+                    </a:lnT>
+                    <a:lnB w="12700" cap="flat" cmpd="sng" algn="ctr">
+                      <a:solidFill>
+                        <a:srgbClr val="DBE4E1"/>
+                      </a:solidFill>
+                      <a:prstDash val="solid"/>
+                      <a:round/>
+                      <a:headEnd type="none" w="med" len="med"/>
+                      <a:tailEnd type="none" w="med" len="med"/>
+                    </a:lnB>
+                    <a:solidFill>
+                      <a:srgbClr val="FFFFFF"/>
+                    </a:solidFill>
+                  </a:tcPr>
+                </a:tc>
+                <a:tc>
+                  <a:txBody>
+                    <a:bodyPr/>
+                    <a:lstStyle/>
+                    <a:p>
+                      <a:pPr indent="0" marL="0">
+                        <a:buNone/>
+                      </a:pPr>
+                      <a:r>
+                        <a:rPr lang="en-US" sz="1300" b="1" dirty="0">
+                          <a:solidFill>
+                            <a:srgbClr val="14302B"/>
+                          </a:solidFill>
+                          <a:latin typeface="Calibri" pitchFamily="34" charset="0"/>
+                          <a:ea typeface="Calibri" pitchFamily="34" charset="-122"/>
+                          <a:cs typeface="Calibri" pitchFamily="34" charset="-120"/>
+                        </a:rPr>
+                        <a:t>Aturan titik lama</a:t>
+                      </a:r>
+                      <a:endParaRPr lang="en-US" sz="1300" dirty="0">
+                        <a:latin typeface="Calibri" charset="0"/>
+                        <a:ea typeface="Calibri" charset="0"/>
+                        <a:cs typeface="Calibri" charset="0"/>
+                      </a:endParaRPr>
+                    </a:p>
+                  </a:txBody>
+                  <a:tcPr marL="82296" marR="82296" marT="82296" marB="82296" anchor="ctr">
+                    <a:lnL w="12700" cap="flat" cmpd="sng" algn="ctr">
+                      <a:solidFill>
+                        <a:srgbClr val="DBE4E1"/>
+                      </a:solidFill>
+                      <a:prstDash val="solid"/>
+                      <a:round/>
+                      <a:headEnd type="none" w="med" len="med"/>
+                      <a:tailEnd type="none" w="med" len="med"/>
+                    </a:lnL>
+                    <a:lnR w="12700" cap="flat" cmpd="sng" algn="ctr">
+                      <a:solidFill>
+                        <a:srgbClr val="DBE4E1"/>
+                      </a:solidFill>
+                      <a:prstDash val="solid"/>
+                      <a:round/>
+                      <a:headEnd type="none" w="med" len="med"/>
+                      <a:tailEnd type="none" w="med" len="med"/>
+                    </a:lnR>
+                    <a:lnT w="12700" cap="flat" cmpd="sng" algn="ctr">
+                      <a:solidFill>
+                        <a:srgbClr val="DBE4E1"/>
+                      </a:solidFill>
+                      <a:prstDash val="solid"/>
+                      <a:round/>
+                      <a:headEnd type="none" w="med" len="med"/>
+                      <a:tailEnd type="none" w="med" len="med"/>
+                    </a:lnT>
+                    <a:lnB w="12700" cap="flat" cmpd="sng" algn="ctr">
+                      <a:solidFill>
+                        <a:srgbClr val="DBE4E1"/>
+                      </a:solidFill>
+                      <a:prstDash val="solid"/>
+                      <a:round/>
+                      <a:headEnd type="none" w="med" len="med"/>
+                      <a:tailEnd type="none" w="med" len="med"/>
+                    </a:lnB>
+                    <a:solidFill>
+                      <a:srgbClr val="FFFFFF"/>
+                    </a:solidFill>
+                  </a:tcPr>
+                </a:tc>
+                <a:tc>
+                  <a:txBody>
+                    <a:bodyPr/>
+                    <a:lstStyle/>
+                    <a:p>
+                      <a:pPr indent="0" marL="0">
+                        <a:buNone/>
+                      </a:pPr>
+                      <a:r>
+                        <a:rPr lang="en-US" sz="1300" b="1" dirty="0">
+                          <a:solidFill>
+                            <a:srgbClr val="14302B"/>
+                          </a:solidFill>
+                          <a:latin typeface="Calibri" pitchFamily="34" charset="0"/>
+                          <a:ea typeface="Calibri" pitchFamily="34" charset="-122"/>
+                          <a:cs typeface="Calibri" pitchFamily="34" charset="-120"/>
+                        </a:rPr>
+                        <a:t>Aturan selang sekarang</a:t>
+                      </a:r>
+                      <a:endParaRPr lang="en-US" sz="1300" dirty="0">
+                        <a:latin typeface="Calibri" charset="0"/>
+                        <a:ea typeface="Calibri" charset="0"/>
+                        <a:cs typeface="Calibri" charset="0"/>
+                      </a:endParaRPr>
+                    </a:p>
+                  </a:txBody>
+                  <a:tcPr marL="82296" marR="82296" marT="82296" marB="82296" anchor="ctr">
+                    <a:lnL w="12700" cap="flat" cmpd="sng" algn="ctr">
+                      <a:solidFill>
+                        <a:srgbClr val="DBE4E1"/>
+                      </a:solidFill>
+                      <a:prstDash val="solid"/>
+                      <a:round/>
+                      <a:headEnd type="none" w="med" len="med"/>
+                      <a:tailEnd type="none" w="med" len="med"/>
+                    </a:lnL>
+                    <a:lnR w="12700" cap="flat" cmpd="sng" algn="ctr">
+                      <a:solidFill>
+                        <a:srgbClr val="DBE4E1"/>
+                      </a:solidFill>
+                      <a:prstDash val="solid"/>
+                      <a:round/>
+                      <a:headEnd type="none" w="med" len="med"/>
+                      <a:tailEnd type="none" w="med" len="med"/>
+                    </a:lnR>
+                    <a:lnT w="12700" cap="flat" cmpd="sng" algn="ctr">
+                      <a:solidFill>
+                        <a:srgbClr val="DBE4E1"/>
+                      </a:solidFill>
+                      <a:prstDash val="solid"/>
+                      <a:round/>
+                      <a:headEnd type="none" w="med" len="med"/>
+                      <a:tailEnd type="none" w="med" len="med"/>
+                    </a:lnT>
+                    <a:lnB w="12700" cap="flat" cmpd="sng" algn="ctr">
+                      <a:solidFill>
+                        <a:srgbClr val="DBE4E1"/>
+                      </a:solidFill>
+                      <a:prstDash val="solid"/>
+                      <a:round/>
+                      <a:headEnd type="none" w="med" len="med"/>
+                      <a:tailEnd type="none" w="med" len="med"/>
+                    </a:lnB>
+                    <a:solidFill>
+                      <a:srgbClr val="FFFFFF"/>
+                    </a:solidFill>
+                  </a:tcPr>
+                </a:tc>
+              </a:tr>
+              <a:tr h="402336">
+                <a:tc>
+                  <a:txBody>
+                    <a:bodyPr/>
+                    <a:lstStyle/>
+                    <a:p>
+                      <a:pPr indent="0" marL="0">
+                        <a:buNone/>
+                      </a:pPr>
+                      <a:r>
+                        <a:rPr lang="en-US" sz="1300" b="1" dirty="0">
+                          <a:solidFill>
+                            <a:srgbClr val="14302B"/>
+                          </a:solidFill>
+                          <a:latin typeface="Calibri" pitchFamily="34" charset="0"/>
+                          <a:ea typeface="Calibri" pitchFamily="34" charset="-122"/>
+                          <a:cs typeface="Calibri" pitchFamily="34" charset="-120"/>
+                        </a:rPr>
+                        <a:t>0,69 — persis di ambang</a:t>
+                      </a:r>
+                      <a:endParaRPr lang="en-US" sz="1300" dirty="0">
+                        <a:latin typeface="Calibri" charset="0"/>
+                        <a:ea typeface="Calibri" charset="0"/>
+                        <a:cs typeface="Calibri" charset="0"/>
+                      </a:endParaRPr>
+                    </a:p>
+                  </a:txBody>
+                  <a:tcPr marL="82296" marR="82296" marT="82296" marB="82296" anchor="ctr">
+                    <a:lnL w="12700" cap="flat" cmpd="sng" algn="ctr">
+                      <a:solidFill>
+                        <a:srgbClr val="DBE4E1"/>
+                      </a:solidFill>
+                      <a:prstDash val="solid"/>
+                      <a:round/>
+                      <a:headEnd type="none" w="med" len="med"/>
+                      <a:tailEnd type="none" w="med" len="med"/>
+                    </a:lnL>
+                    <a:lnR w="12700" cap="flat" cmpd="sng" algn="ctr">
+                      <a:solidFill>
+                        <a:srgbClr val="DBE4E1"/>
+                      </a:solidFill>
+                      <a:prstDash val="solid"/>
+                      <a:round/>
+                      <a:headEnd type="none" w="med" len="med"/>
+                      <a:tailEnd type="none" w="med" len="med"/>
+                    </a:lnR>
+                    <a:lnT w="12700" cap="flat" cmpd="sng" algn="ctr">
+                      <a:solidFill>
+                        <a:srgbClr val="DBE4E1"/>
+                      </a:solidFill>
+                      <a:prstDash val="solid"/>
+                      <a:round/>
+                      <a:headEnd type="none" w="med" len="med"/>
+                      <a:tailEnd type="none" w="med" len="med"/>
+                    </a:lnT>
+                    <a:lnB w="12700" cap="flat" cmpd="sng" algn="ctr">
+                      <a:solidFill>
+                        <a:srgbClr val="DBE4E1"/>
+                      </a:solidFill>
+                      <a:prstDash val="solid"/>
+                      <a:round/>
+                      <a:headEnd type="none" w="med" len="med"/>
+                      <a:tailEnd type="none" w="med" len="med"/>
+                    </a:lnB>
+                    <a:solidFill>
+                      <a:srgbClr val="FFFFFF"/>
+                    </a:solidFill>
+                  </a:tcPr>
+                </a:tc>
+                <a:tc>
+                  <a:txBody>
+                    <a:bodyPr/>
+                    <a:lstStyle/>
+                    <a:p>
+                      <a:pPr indent="0" marL="0">
+                        <a:buNone/>
+                      </a:pPr>
+                      <a:r>
+                        <a:rPr lang="en-US" sz="1300" b="1" dirty="0">
+                          <a:solidFill>
+                            <a:srgbClr val="B1442C"/>
+                          </a:solidFill>
+                          <a:latin typeface="Calibri" pitchFamily="34" charset="0"/>
+                          <a:ea typeface="Calibri" pitchFamily="34" charset="-122"/>
+                          <a:cs typeface="Calibri" pitchFamily="34" charset="-120"/>
+                        </a:rPr>
+                        <a:t>52,2%</a:t>
+                      </a:r>
+                      <a:endParaRPr lang="en-US" sz="1300" dirty="0">
+                        <a:latin typeface="Calibri" charset="0"/>
+                        <a:ea typeface="Calibri" charset="0"/>
+                        <a:cs typeface="Calibri" charset="0"/>
+                      </a:endParaRPr>
+                    </a:p>
+                  </a:txBody>
+                  <a:tcPr marL="82296" marR="82296" marT="82296" marB="82296" anchor="ctr">
+                    <a:lnL w="12700" cap="flat" cmpd="sng" algn="ctr">
+                      <a:solidFill>
+                        <a:srgbClr val="DBE4E1"/>
+                      </a:solidFill>
+                      <a:prstDash val="solid"/>
+                      <a:round/>
+                      <a:headEnd type="none" w="med" len="med"/>
+                      <a:tailEnd type="none" w="med" len="med"/>
+                    </a:lnL>
+                    <a:lnR w="12700" cap="flat" cmpd="sng" algn="ctr">
+                      <a:solidFill>
+                        <a:srgbClr val="DBE4E1"/>
+                      </a:solidFill>
+                      <a:prstDash val="solid"/>
+                      <a:round/>
+                      <a:headEnd type="none" w="med" len="med"/>
+                      <a:tailEnd type="none" w="med" len="med"/>
+                    </a:lnR>
+                    <a:lnT w="12700" cap="flat" cmpd="sng" algn="ctr">
+                      <a:solidFill>
+                        <a:srgbClr val="DBE4E1"/>
+                      </a:solidFill>
+                      <a:prstDash val="solid"/>
+                      <a:round/>
+                      <a:headEnd type="none" w="med" len="med"/>
+                      <a:tailEnd type="none" w="med" len="med"/>
+                    </a:lnT>
+                    <a:lnB w="12700" cap="flat" cmpd="sng" algn="ctr">
+                      <a:solidFill>
+                        <a:srgbClr val="DBE4E1"/>
+                      </a:solidFill>
+                      <a:prstDash val="solid"/>
+                      <a:round/>
+                      <a:headEnd type="none" w="med" len="med"/>
+                      <a:tailEnd type="none" w="med" len="med"/>
+                    </a:lnB>
+                    <a:solidFill>
+                      <a:srgbClr val="FFFFFF"/>
+                    </a:solidFill>
+                  </a:tcPr>
+                </a:tc>
+                <a:tc>
+                  <a:txBody>
+                    <a:bodyPr/>
+                    <a:lstStyle/>
+                    <a:p>
+                      <a:pPr indent="0" marL="0">
+                        <a:buNone/>
+                      </a:pPr>
+                      <a:r>
+                        <a:rPr lang="en-US" sz="1300" b="1" dirty="0">
+                          <a:solidFill>
+                            <a:srgbClr val="0D8271"/>
+                          </a:solidFill>
+                          <a:latin typeface="Calibri" pitchFamily="34" charset="0"/>
+                          <a:ea typeface="Calibri" pitchFamily="34" charset="-122"/>
+                          <a:cs typeface="Calibri" pitchFamily="34" charset="-120"/>
+                        </a:rPr>
+                        <a:t>4,8%</a:t>
+                      </a:r>
+                      <a:endParaRPr lang="en-US" sz="1300" dirty="0">
+                        <a:latin typeface="Calibri" charset="0"/>
+                        <a:ea typeface="Calibri" charset="0"/>
+                        <a:cs typeface="Calibri" charset="0"/>
+                      </a:endParaRPr>
+                    </a:p>
+                  </a:txBody>
+                  <a:tcPr marL="82296" marR="82296" marT="82296" marB="82296" anchor="ctr">
+                    <a:lnL w="12700" cap="flat" cmpd="sng" algn="ctr">
+                      <a:solidFill>
+                        <a:srgbClr val="DBE4E1"/>
+                      </a:solidFill>
+                      <a:prstDash val="solid"/>
+                      <a:round/>
+                      <a:headEnd type="none" w="med" len="med"/>
+                      <a:tailEnd type="none" w="med" len="med"/>
+                    </a:lnL>
+                    <a:lnR w="12700" cap="flat" cmpd="sng" algn="ctr">
+                      <a:solidFill>
+                        <a:srgbClr val="DBE4E1"/>
+                      </a:solidFill>
+                      <a:prstDash val="solid"/>
+                      <a:round/>
+                      <a:headEnd type="none" w="med" len="med"/>
+                      <a:tailEnd type="none" w="med" len="med"/>
+                    </a:lnR>
+                    <a:lnT w="12700" cap="flat" cmpd="sng" algn="ctr">
+                      <a:solidFill>
+                        <a:srgbClr val="DBE4E1"/>
+                      </a:solidFill>
+                      <a:prstDash val="solid"/>
+                      <a:round/>
+                      <a:headEnd type="none" w="med" len="med"/>
+                      <a:tailEnd type="none" w="med" len="med"/>
+                    </a:lnT>
+                    <a:lnB w="12700" cap="flat" cmpd="sng" algn="ctr">
+                      <a:solidFill>
+                        <a:srgbClr val="DBE4E1"/>
+                      </a:solidFill>
+                      <a:prstDash val="solid"/>
+                      <a:round/>
+                      <a:headEnd type="none" w="med" len="med"/>
+                      <a:tailEnd type="none" w="med" len="med"/>
+                    </a:lnB>
+                    <a:solidFill>
+                      <a:srgbClr val="FFFFFF"/>
+                    </a:solidFill>
+                  </a:tcPr>
+                </a:tc>
+              </a:tr>
+              <a:tr h="402336">
+                <a:tc>
+                  <a:txBody>
+                    <a:bodyPr/>
+                    <a:lstStyle/>
+                    <a:p>
+                      <a:pPr indent="0" marL="0">
+                        <a:buNone/>
+                      </a:pPr>
+                      <a:r>
+                        <a:rPr lang="en-US" sz="1300" dirty="0">
+                          <a:solidFill>
+                            <a:srgbClr val="14302B"/>
+                          </a:solidFill>
+                          <a:latin typeface="Calibri" pitchFamily="34" charset="0"/>
+                          <a:ea typeface="Calibri" pitchFamily="34" charset="-122"/>
+                          <a:cs typeface="Calibri" pitchFamily="34" charset="-120"/>
+                        </a:rPr>
+                        <a:t>0,75</a:t>
+                      </a:r>
+                      <a:endParaRPr lang="en-US" sz="1300" dirty="0">
+                        <a:latin typeface="Calibri" charset="0"/>
+                        <a:ea typeface="Calibri" charset="0"/>
+                        <a:cs typeface="Calibri" charset="0"/>
+                      </a:endParaRPr>
+                    </a:p>
+                  </a:txBody>
+                  <a:tcPr marL="82296" marR="82296" marT="82296" marB="82296" anchor="ctr">
+                    <a:lnL w="12700" cap="flat" cmpd="sng" algn="ctr">
+                      <a:solidFill>
+                        <a:srgbClr val="DBE4E1"/>
+                      </a:solidFill>
+                      <a:prstDash val="solid"/>
+                      <a:round/>
+                      <a:headEnd type="none" w="med" len="med"/>
+                      <a:tailEnd type="none" w="med" len="med"/>
+                    </a:lnL>
+                    <a:lnR w="12700" cap="flat" cmpd="sng" algn="ctr">
+                      <a:solidFill>
+                        <a:srgbClr val="DBE4E1"/>
+                      </a:solidFill>
+                      <a:prstDash val="solid"/>
+                      <a:round/>
+                      <a:headEnd type="none" w="med" len="med"/>
+                      <a:tailEnd type="none" w="med" len="med"/>
+                    </a:lnR>
+                    <a:lnT w="12700" cap="flat" cmpd="sng" algn="ctr">
+                      <a:solidFill>
+                        <a:srgbClr val="DBE4E1"/>
+                      </a:solidFill>
+                      <a:prstDash val="solid"/>
+                      <a:round/>
+                      <a:headEnd type="none" w="med" len="med"/>
+                      <a:tailEnd type="none" w="med" len="med"/>
+                    </a:lnT>
+                    <a:lnB w="12700" cap="flat" cmpd="sng" algn="ctr">
+                      <a:solidFill>
+                        <a:srgbClr val="DBE4E1"/>
+                      </a:solidFill>
+                      <a:prstDash val="solid"/>
+                      <a:round/>
+                      <a:headEnd type="none" w="med" len="med"/>
+                      <a:tailEnd type="none" w="med" len="med"/>
+                    </a:lnB>
+                    <a:solidFill>
+                      <a:srgbClr val="FFFFFF"/>
+                    </a:solidFill>
+                  </a:tcPr>
+                </a:tc>
+                <a:tc>
+                  <a:txBody>
+                    <a:bodyPr/>
+                    <a:lstStyle/>
+                    <a:p>
+                      <a:pPr indent="0" marL="0">
+                        <a:buNone/>
+                      </a:pPr>
+                      <a:r>
+                        <a:rPr lang="en-US" sz="1300" dirty="0">
+                          <a:solidFill>
+                            <a:srgbClr val="14302B"/>
+                          </a:solidFill>
+                          <a:latin typeface="Calibri" pitchFamily="34" charset="0"/>
+                          <a:ea typeface="Calibri" pitchFamily="34" charset="-122"/>
+                          <a:cs typeface="Calibri" pitchFamily="34" charset="-120"/>
+                        </a:rPr>
+                        <a:t>89,5%</a:t>
+                      </a:r>
+                      <a:endParaRPr lang="en-US" sz="1300" dirty="0">
+                        <a:latin typeface="Calibri" charset="0"/>
+                        <a:ea typeface="Calibri" charset="0"/>
+                        <a:cs typeface="Calibri" charset="0"/>
+                      </a:endParaRPr>
+                    </a:p>
+                  </a:txBody>
+                  <a:tcPr marL="82296" marR="82296" marT="82296" marB="82296" anchor="ctr">
+                    <a:lnL w="12700" cap="flat" cmpd="sng" algn="ctr">
+                      <a:solidFill>
+                        <a:srgbClr val="DBE4E1"/>
+                      </a:solidFill>
+                      <a:prstDash val="solid"/>
+                      <a:round/>
+                      <a:headEnd type="none" w="med" len="med"/>
+                      <a:tailEnd type="none" w="med" len="med"/>
+                    </a:lnL>
+                    <a:lnR w="12700" cap="flat" cmpd="sng" algn="ctr">
+                      <a:solidFill>
+                        <a:srgbClr val="DBE4E1"/>
+                      </a:solidFill>
+                      <a:prstDash val="solid"/>
+                      <a:round/>
+                      <a:headEnd type="none" w="med" len="med"/>
+                      <a:tailEnd type="none" w="med" len="med"/>
+                    </a:lnR>
+                    <a:lnT w="12700" cap="flat" cmpd="sng" algn="ctr">
+                      <a:solidFill>
+                        <a:srgbClr val="DBE4E1"/>
+                      </a:solidFill>
+                      <a:prstDash val="solid"/>
+                      <a:round/>
+                      <a:headEnd type="none" w="med" len="med"/>
+                      <a:tailEnd type="none" w="med" len="med"/>
+                    </a:lnT>
+                    <a:lnB w="12700" cap="flat" cmpd="sng" algn="ctr">
+                      <a:solidFill>
+                        <a:srgbClr val="DBE4E1"/>
+                      </a:solidFill>
+                      <a:prstDash val="solid"/>
+                      <a:round/>
+                      <a:headEnd type="none" w="med" len="med"/>
+                      <a:tailEnd type="none" w="med" len="med"/>
+                    </a:lnB>
+                    <a:solidFill>
+                      <a:srgbClr val="FFFFFF"/>
+                    </a:solidFill>
+                  </a:tcPr>
+                </a:tc>
+                <a:tc>
+                  <a:txBody>
+                    <a:bodyPr/>
+                    <a:lstStyle/>
+                    <a:p>
+                      <a:pPr indent="0" marL="0">
+                        <a:buNone/>
+                      </a:pPr>
+                      <a:r>
+                        <a:rPr lang="en-US" sz="1300" dirty="0">
+                          <a:solidFill>
+                            <a:srgbClr val="14302B"/>
+                          </a:solidFill>
+                          <a:latin typeface="Calibri" pitchFamily="34" charset="0"/>
+                          <a:ea typeface="Calibri" pitchFamily="34" charset="-122"/>
+                          <a:cs typeface="Calibri" pitchFamily="34" charset="-120"/>
+                        </a:rPr>
+                        <a:t>24,2%</a:t>
+                      </a:r>
+                      <a:endParaRPr lang="en-US" sz="1300" dirty="0">
+                        <a:latin typeface="Calibri" charset="0"/>
+                        <a:ea typeface="Calibri" charset="0"/>
+                        <a:cs typeface="Calibri" charset="0"/>
+                      </a:endParaRPr>
+                    </a:p>
+                  </a:txBody>
+                  <a:tcPr marL="82296" marR="82296" marT="82296" marB="82296" anchor="ctr">
+                    <a:lnL w="12700" cap="flat" cmpd="sng" algn="ctr">
+                      <a:solidFill>
+                        <a:srgbClr val="DBE4E1"/>
+                      </a:solidFill>
+                      <a:prstDash val="solid"/>
+                      <a:round/>
+                      <a:headEnd type="none" w="med" len="med"/>
+                      <a:tailEnd type="none" w="med" len="med"/>
+                    </a:lnL>
+                    <a:lnR w="12700" cap="flat" cmpd="sng" algn="ctr">
+                      <a:solidFill>
+                        <a:srgbClr val="DBE4E1"/>
+                      </a:solidFill>
+                      <a:prstDash val="solid"/>
+                      <a:round/>
+                      <a:headEnd type="none" w="med" len="med"/>
+                      <a:tailEnd type="none" w="med" len="med"/>
+                    </a:lnR>
+                    <a:lnT w="12700" cap="flat" cmpd="sng" algn="ctr">
+                      <a:solidFill>
+                        <a:srgbClr val="DBE4E1"/>
+                      </a:solidFill>
+                      <a:prstDash val="solid"/>
+                      <a:round/>
+                      <a:headEnd type="none" w="med" len="med"/>
+                      <a:tailEnd type="none" w="med" len="med"/>
+                    </a:lnT>
+                    <a:lnB w="12700" cap="flat" cmpd="sng" algn="ctr">
+                      <a:solidFill>
+                        <a:srgbClr val="DBE4E1"/>
+                      </a:solidFill>
+                      <a:prstDash val="solid"/>
+                      <a:round/>
+                      <a:headEnd type="none" w="med" len="med"/>
+                      <a:tailEnd type="none" w="med" len="med"/>
+                    </a:lnB>
+                    <a:solidFill>
+                      <a:srgbClr val="FFFFFF"/>
+                    </a:solidFill>
+                  </a:tcPr>
+                </a:tc>
+              </a:tr>
+              <a:tr h="402336">
+                <a:tc>
+                  <a:txBody>
+                    <a:bodyPr/>
+                    <a:lstStyle/>
+                    <a:p>
+                      <a:pPr indent="0" marL="0">
+                        <a:buNone/>
+                      </a:pPr>
+                      <a:r>
+                        <a:rPr lang="en-US" sz="1300" dirty="0">
+                          <a:solidFill>
+                            <a:srgbClr val="14302B"/>
+                          </a:solidFill>
+                          <a:latin typeface="Calibri" pitchFamily="34" charset="0"/>
+                          <a:ea typeface="Calibri" pitchFamily="34" charset="-122"/>
+                          <a:cs typeface="Calibri" pitchFamily="34" charset="-120"/>
+                        </a:rPr>
+                        <a:t>0,80</a:t>
+                      </a:r>
+                      <a:endParaRPr lang="en-US" sz="1300" dirty="0">
+                        <a:latin typeface="Calibri" charset="0"/>
+                        <a:ea typeface="Calibri" charset="0"/>
+                        <a:cs typeface="Calibri" charset="0"/>
+                      </a:endParaRPr>
+                    </a:p>
+                  </a:txBody>
+                  <a:tcPr marL="82296" marR="82296" marT="82296" marB="82296" anchor="ctr">
+                    <a:lnL w="12700" cap="flat" cmpd="sng" algn="ctr">
+                      <a:solidFill>
+                        <a:srgbClr val="DBE4E1"/>
+                      </a:solidFill>
+                      <a:prstDash val="solid"/>
+                      <a:round/>
+                      <a:headEnd type="none" w="med" len="med"/>
+                      <a:tailEnd type="none" w="med" len="med"/>
+                    </a:lnL>
+                    <a:lnR w="12700" cap="flat" cmpd="sng" algn="ctr">
+                      <a:solidFill>
+                        <a:srgbClr val="DBE4E1"/>
+                      </a:solidFill>
+                      <a:prstDash val="solid"/>
+                      <a:round/>
+                      <a:headEnd type="none" w="med" len="med"/>
+                      <a:tailEnd type="none" w="med" len="med"/>
+                    </a:lnR>
+                    <a:lnT w="12700" cap="flat" cmpd="sng" algn="ctr">
+                      <a:solidFill>
+                        <a:srgbClr val="DBE4E1"/>
+                      </a:solidFill>
+                      <a:prstDash val="solid"/>
+                      <a:round/>
+                      <a:headEnd type="none" w="med" len="med"/>
+                      <a:tailEnd type="none" w="med" len="med"/>
+                    </a:lnT>
+                    <a:lnB w="12700" cap="flat" cmpd="sng" algn="ctr">
+                      <a:solidFill>
+                        <a:srgbClr val="DBE4E1"/>
+                      </a:solidFill>
+                      <a:prstDash val="solid"/>
+                      <a:round/>
+                      <a:headEnd type="none" w="med" len="med"/>
+                      <a:tailEnd type="none" w="med" len="med"/>
+                    </a:lnB>
+                    <a:solidFill>
+                      <a:srgbClr val="FFFFFF"/>
+                    </a:solidFill>
+                  </a:tcPr>
+                </a:tc>
+                <a:tc>
+                  <a:txBody>
+                    <a:bodyPr/>
+                    <a:lstStyle/>
+                    <a:p>
+                      <a:pPr indent="0" marL="0">
+                        <a:buNone/>
+                      </a:pPr>
+                      <a:r>
+                        <a:rPr lang="en-US" sz="1300" dirty="0">
+                          <a:solidFill>
+                            <a:srgbClr val="14302B"/>
+                          </a:solidFill>
+                          <a:latin typeface="Calibri" pitchFamily="34" charset="0"/>
+                          <a:ea typeface="Calibri" pitchFamily="34" charset="-122"/>
+                          <a:cs typeface="Calibri" pitchFamily="34" charset="-120"/>
+                        </a:rPr>
+                        <a:t>98,8%</a:t>
+                      </a:r>
+                      <a:endParaRPr lang="en-US" sz="1300" dirty="0">
+                        <a:latin typeface="Calibri" charset="0"/>
+                        <a:ea typeface="Calibri" charset="0"/>
+                        <a:cs typeface="Calibri" charset="0"/>
+                      </a:endParaRPr>
+                    </a:p>
+                  </a:txBody>
+                  <a:tcPr marL="82296" marR="82296" marT="82296" marB="82296" anchor="ctr">
+                    <a:lnL w="12700" cap="flat" cmpd="sng" algn="ctr">
+                      <a:solidFill>
+                        <a:srgbClr val="DBE4E1"/>
+                      </a:solidFill>
+                      <a:prstDash val="solid"/>
+                      <a:round/>
+                      <a:headEnd type="none" w="med" len="med"/>
+                      <a:tailEnd type="none" w="med" len="med"/>
+                    </a:lnL>
+                    <a:lnR w="12700" cap="flat" cmpd="sng" algn="ctr">
+                      <a:solidFill>
+                        <a:srgbClr val="DBE4E1"/>
+                      </a:solidFill>
+                      <a:prstDash val="solid"/>
+                      <a:round/>
+                      <a:headEnd type="none" w="med" len="med"/>
+                      <a:tailEnd type="none" w="med" len="med"/>
+                    </a:lnR>
+                    <a:lnT w="12700" cap="flat" cmpd="sng" algn="ctr">
+                      <a:solidFill>
+                        <a:srgbClr val="DBE4E1"/>
+                      </a:solidFill>
+                      <a:prstDash val="solid"/>
+                      <a:round/>
+                      <a:headEnd type="none" w="med" len="med"/>
+                      <a:tailEnd type="none" w="med" len="med"/>
+                    </a:lnT>
+                    <a:lnB w="12700" cap="flat" cmpd="sng" algn="ctr">
+                      <a:solidFill>
+                        <a:srgbClr val="DBE4E1"/>
+                      </a:solidFill>
+                      <a:prstDash val="solid"/>
+                      <a:round/>
+                      <a:headEnd type="none" w="med" len="med"/>
+                      <a:tailEnd type="none" w="med" len="med"/>
+                    </a:lnB>
+                    <a:solidFill>
+                      <a:srgbClr val="FFFFFF"/>
+                    </a:solidFill>
+                  </a:tcPr>
+                </a:tc>
+                <a:tc>
+                  <a:txBody>
+                    <a:bodyPr/>
+                    <a:lstStyle/>
+                    <a:p>
+                      <a:pPr indent="0" marL="0">
+                        <a:buNone/>
+                      </a:pPr>
+                      <a:r>
+                        <a:rPr lang="en-US" sz="1300" dirty="0">
+                          <a:solidFill>
+                            <a:srgbClr val="14302B"/>
+                          </a:solidFill>
+                          <a:latin typeface="Calibri" pitchFamily="34" charset="0"/>
+                          <a:ea typeface="Calibri" pitchFamily="34" charset="-122"/>
+                          <a:cs typeface="Calibri" pitchFamily="34" charset="-120"/>
+                        </a:rPr>
+                        <a:t>59,5%</a:t>
+                      </a:r>
+                      <a:endParaRPr lang="en-US" sz="1300" dirty="0">
+                        <a:latin typeface="Calibri" charset="0"/>
+                        <a:ea typeface="Calibri" charset="0"/>
+                        <a:cs typeface="Calibri" charset="0"/>
+                      </a:endParaRPr>
+                    </a:p>
+                  </a:txBody>
+                  <a:tcPr marL="82296" marR="82296" marT="82296" marB="82296" anchor="ctr">
+                    <a:lnL w="12700" cap="flat" cmpd="sng" algn="ctr">
+                      <a:solidFill>
+                        <a:srgbClr val="DBE4E1"/>
+                      </a:solidFill>
+                      <a:prstDash val="solid"/>
+                      <a:round/>
+                      <a:headEnd type="none" w="med" len="med"/>
+                      <a:tailEnd type="none" w="med" len="med"/>
+                    </a:lnL>
+                    <a:lnR w="12700" cap="flat" cmpd="sng" algn="ctr">
+                      <a:solidFill>
+                        <a:srgbClr val="DBE4E1"/>
+                      </a:solidFill>
+                      <a:prstDash val="solid"/>
+                      <a:round/>
+                      <a:headEnd type="none" w="med" len="med"/>
+                      <a:tailEnd type="none" w="med" len="med"/>
+                    </a:lnR>
+                    <a:lnT w="12700" cap="flat" cmpd="sng" algn="ctr">
+                      <a:solidFill>
+                        <a:srgbClr val="DBE4E1"/>
+                      </a:solidFill>
+                      <a:prstDash val="solid"/>
+                      <a:round/>
+                      <a:headEnd type="none" w="med" len="med"/>
+                      <a:tailEnd type="none" w="med" len="med"/>
+                    </a:lnT>
+                    <a:lnB w="12700" cap="flat" cmpd="sng" algn="ctr">
+                      <a:solidFill>
+                        <a:srgbClr val="DBE4E1"/>
+                      </a:solidFill>
+                      <a:prstDash val="solid"/>
+                      <a:round/>
+                      <a:headEnd type="none" w="med" len="med"/>
+                      <a:tailEnd type="none" w="med" len="med"/>
+                    </a:lnB>
+                    <a:solidFill>
+                      <a:srgbClr val="FFFFFF"/>
+                    </a:solidFill>
+                  </a:tcPr>
+                </a:tc>
+              </a:tr>
+              <a:tr h="402336">
+                <a:tc>
+                  <a:txBody>
+                    <a:bodyPr/>
+                    <a:lstStyle/>
+                    <a:p>
+                      <a:pPr indent="0" marL="0">
+                        <a:buNone/>
+                      </a:pPr>
+                      <a:r>
+                        <a:rPr lang="en-US" sz="1300" b="1" dirty="0">
+                          <a:solidFill>
+                            <a:srgbClr val="14302B"/>
+                          </a:solidFill>
+                          <a:latin typeface="Calibri" pitchFamily="34" charset="0"/>
+                          <a:ea typeface="Calibri" pitchFamily="34" charset="-122"/>
+                          <a:cs typeface="Calibri" pitchFamily="34" charset="-120"/>
+                        </a:rPr>
+                        <a:t>0,90 — preferensi tinggi</a:t>
+                      </a:r>
+                      <a:endParaRPr lang="en-US" sz="1300" dirty="0">
+                        <a:latin typeface="Calibri" charset="0"/>
+                        <a:ea typeface="Calibri" charset="0"/>
+                        <a:cs typeface="Calibri" charset="0"/>
+                      </a:endParaRPr>
+                    </a:p>
+                  </a:txBody>
+                  <a:tcPr marL="82296" marR="82296" marT="82296" marB="82296" anchor="ctr">
+                    <a:lnL w="12700" cap="flat" cmpd="sng" algn="ctr">
+                      <a:solidFill>
+                        <a:srgbClr val="DBE4E1"/>
+                      </a:solidFill>
+                      <a:prstDash val="solid"/>
+                      <a:round/>
+                      <a:headEnd type="none" w="med" len="med"/>
+                      <a:tailEnd type="none" w="med" len="med"/>
+                    </a:lnL>
+                    <a:lnR w="12700" cap="flat" cmpd="sng" algn="ctr">
+                      <a:solidFill>
+                        <a:srgbClr val="DBE4E1"/>
+                      </a:solidFill>
+                      <a:prstDash val="solid"/>
+                      <a:round/>
+                      <a:headEnd type="none" w="med" len="med"/>
+                      <a:tailEnd type="none" w="med" len="med"/>
+                    </a:lnR>
+                    <a:lnT w="12700" cap="flat" cmpd="sng" algn="ctr">
+                      <a:solidFill>
+                        <a:srgbClr val="DBE4E1"/>
+                      </a:solidFill>
+                      <a:prstDash val="solid"/>
+                      <a:round/>
+                      <a:headEnd type="none" w="med" len="med"/>
+                      <a:tailEnd type="none" w="med" len="med"/>
+                    </a:lnT>
+                    <a:lnB w="12700" cap="flat" cmpd="sng" algn="ctr">
+                      <a:solidFill>
+                        <a:srgbClr val="DBE4E1"/>
+                      </a:solidFill>
+                      <a:prstDash val="solid"/>
+                      <a:round/>
+                      <a:headEnd type="none" w="med" len="med"/>
+                      <a:tailEnd type="none" w="med" len="med"/>
+                    </a:lnB>
+                    <a:solidFill>
+                      <a:srgbClr val="FFFFFF"/>
+                    </a:solidFill>
+                  </a:tcPr>
+                </a:tc>
+                <a:tc>
+                  <a:txBody>
+                    <a:bodyPr/>
+                    <a:lstStyle/>
+                    <a:p>
+                      <a:pPr indent="0" marL="0">
+                        <a:buNone/>
+                      </a:pPr>
+                      <a:r>
+                        <a:rPr lang="en-US" sz="1300" b="1" dirty="0">
+                          <a:solidFill>
+                            <a:srgbClr val="14302B"/>
+                          </a:solidFill>
+                          <a:latin typeface="Calibri" pitchFamily="34" charset="0"/>
+                          <a:ea typeface="Calibri" pitchFamily="34" charset="-122"/>
+                          <a:cs typeface="Calibri" pitchFamily="34" charset="-120"/>
+                        </a:rPr>
+                        <a:t>100%</a:t>
+                      </a:r>
+                      <a:endParaRPr lang="en-US" sz="1300" dirty="0">
+                        <a:latin typeface="Calibri" charset="0"/>
+                        <a:ea typeface="Calibri" charset="0"/>
+                        <a:cs typeface="Calibri" charset="0"/>
+                      </a:endParaRPr>
+                    </a:p>
+                  </a:txBody>
+                  <a:tcPr marL="82296" marR="82296" marT="82296" marB="82296" anchor="ctr">
+                    <a:lnL w="12700" cap="flat" cmpd="sng" algn="ctr">
+                      <a:solidFill>
+                        <a:srgbClr val="DBE4E1"/>
+                      </a:solidFill>
+                      <a:prstDash val="solid"/>
+                      <a:round/>
+                      <a:headEnd type="none" w="med" len="med"/>
+                      <a:tailEnd type="none" w="med" len="med"/>
+                    </a:lnL>
+                    <a:lnR w="12700" cap="flat" cmpd="sng" algn="ctr">
+                      <a:solidFill>
+                        <a:srgbClr val="DBE4E1"/>
+                      </a:solidFill>
+                      <a:prstDash val="solid"/>
+                      <a:round/>
+                      <a:headEnd type="none" w="med" len="med"/>
+                      <a:tailEnd type="none" w="med" len="med"/>
+                    </a:lnR>
+                    <a:lnT w="12700" cap="flat" cmpd="sng" algn="ctr">
+                      <a:solidFill>
+                        <a:srgbClr val="DBE4E1"/>
+                      </a:solidFill>
+                      <a:prstDash val="solid"/>
+                      <a:round/>
+                      <a:headEnd type="none" w="med" len="med"/>
+                      <a:tailEnd type="none" w="med" len="med"/>
+                    </a:lnT>
+                    <a:lnB w="12700" cap="flat" cmpd="sng" algn="ctr">
+                      <a:solidFill>
+                        <a:srgbClr val="DBE4E1"/>
+                      </a:solidFill>
+                      <a:prstDash val="solid"/>
+                      <a:round/>
+                      <a:headEnd type="none" w="med" len="med"/>
+                      <a:tailEnd type="none" w="med" len="med"/>
+                    </a:lnB>
+                    <a:solidFill>
+                      <a:srgbClr val="FFFFFF"/>
+                    </a:solidFill>
+                  </a:tcPr>
+                </a:tc>
+                <a:tc>
+                  <a:txBody>
+                    <a:bodyPr/>
+                    <a:lstStyle/>
+                    <a:p>
+                      <a:pPr indent="0" marL="0">
+                        <a:buNone/>
+                      </a:pPr>
+                      <a:r>
+                        <a:rPr lang="en-US" sz="1300" b="1" dirty="0">
+                          <a:solidFill>
+                            <a:srgbClr val="0D8271"/>
+                          </a:solidFill>
+                          <a:latin typeface="Calibri" pitchFamily="34" charset="0"/>
+                          <a:ea typeface="Calibri" pitchFamily="34" charset="-122"/>
+                          <a:cs typeface="Calibri" pitchFamily="34" charset="-120"/>
+                        </a:rPr>
+                        <a:t>99,0%</a:t>
+                      </a:r>
+                      <a:endParaRPr lang="en-US" sz="1300" dirty="0">
+                        <a:latin typeface="Calibri" charset="0"/>
+                        <a:ea typeface="Calibri" charset="0"/>
+                        <a:cs typeface="Calibri" charset="0"/>
+                      </a:endParaRPr>
+                    </a:p>
+                  </a:txBody>
+                  <a:tcPr marL="82296" marR="82296" marT="82296" marB="82296" anchor="ctr">
+                    <a:lnL w="12700" cap="flat" cmpd="sng" algn="ctr">
+                      <a:solidFill>
+                        <a:srgbClr val="DBE4E1"/>
+                      </a:solidFill>
+                      <a:prstDash val="solid"/>
+                      <a:round/>
+                      <a:headEnd type="none" w="med" len="med"/>
+                      <a:tailEnd type="none" w="med" len="med"/>
+                    </a:lnL>
+                    <a:lnR w="12700" cap="flat" cmpd="sng" algn="ctr">
+                      <a:solidFill>
+                        <a:srgbClr val="DBE4E1"/>
+                      </a:solidFill>
+                      <a:prstDash val="solid"/>
+                      <a:round/>
+                      <a:headEnd type="none" w="med" len="med"/>
+                      <a:tailEnd type="none" w="med" len="med"/>
+                    </a:lnR>
+                    <a:lnT w="12700" cap="flat" cmpd="sng" algn="ctr">
+                      <a:solidFill>
+                        <a:srgbClr val="DBE4E1"/>
+                      </a:solidFill>
+                      <a:prstDash val="solid"/>
+                      <a:round/>
+                      <a:headEnd type="none" w="med" len="med"/>
+                      <a:tailEnd type="none" w="med" len="med"/>
+                    </a:lnT>
+                    <a:lnB w="12700" cap="flat" cmpd="sng" algn="ctr">
+                      <a:solidFill>
+                        <a:srgbClr val="DBE4E1"/>
+                      </a:solidFill>
+                      <a:prstDash val="solid"/>
+                      <a:round/>
+                      <a:headEnd type="none" w="med" len="med"/>
+                      <a:tailEnd type="none" w="med" len="med"/>
+                    </a:lnB>
+                    <a:solidFill>
+                      <a:srgbClr val="FFFFFF"/>
+                    </a:solidFill>
+                  </a:tcPr>
+                </a:tc>
+              </a:tr>
+            </a:tbl>
+          </a:graphicData>
+        </a:graphic>
+      </p:graphicFrame>
+      <p:sp>
+        <p:nvSpPr>
+          <p:cNvPr id="8" name="Text 5"/>
+          <p:cNvSpPr/>
+          <p:nvPr/>
+        </p:nvSpPr>
+        <p:spPr>
+          <a:xfrm>
+            <a:off x="685800" y="5166360"/>
+            <a:ext cx="6400800" cy="274320"/>
+          </a:xfrm>
+          <a:prstGeom prst="rect">
+            <a:avLst/>
+          </a:prstGeom>
+          <a:noFill/>
+          <a:ln/>
+        </p:spPr>
+        <p:txBody>
+          <a:bodyPr wrap="square" lIns="0" tIns="0" rIns="0" bIns="0" rtlCol="0" anchor="ctr"/>
+          <a:lstStyle/>
+          <a:p>
+            <a:pPr indent="0" marL="0">
+              <a:buNone/>
+            </a:pPr>
+            <a:r>
+              <a:rPr lang="en-US" sz="1000" dirty="0">
+                <a:solidFill>
+                  <a:srgbClr val="4A635D"/>
+                </a:solidFill>
+                <a:latin typeface="Calibri" pitchFamily="34" charset="0"/>
+                <a:ea typeface="Calibri" pitchFamily="34" charset="-122"/>
+                <a:cs typeface="Calibri" pitchFamily="34" charset="-120"/>
+              </a:rPr>
+              <a:t>Peluang aturan menyala · simulasi 400 sesi per titik, 17 jendela · research/simulate_geopref_interval.py</a:t>
+            </a:r>
+            <a:endParaRPr lang="en-US" sz="1000" dirty="0"/>
+          </a:p>
+        </p:txBody>
+      </p:sp>
+      <p:sp>
+        <p:nvSpPr>
+          <p:cNvPr id="9" name="Shape 6"/>
+          <p:cNvSpPr/>
+          <p:nvPr/>
+        </p:nvSpPr>
+        <p:spPr>
+          <a:xfrm>
+            <a:off x="7360920" y="3017520"/>
+            <a:ext cx="3749040" cy="2331720"/>
           </a:xfrm>
           <a:prstGeom prst="roundRect">
             <a:avLst>
-              <a:gd name="adj" fmla="val 2400"/>
+              <a:gd name="adj" fmla="val 2353"/>
             </a:avLst>
           </a:prstGeom>
           <a:solidFill>
-            <a:srgbClr val="0B1E1B"/>
+            <a:srgbClr val="E4F2EE"/>
           </a:solidFill>
           <a:ln w="12700">
             <a:solidFill>
-              <a:srgbClr val="0B1E1B"/>
+              <a:srgbClr val="E4F2EE"/>
             </a:solidFill>
             <a:prstDash val="solid"/>
           </a:ln>
@@ -10002,14 +13509,14 @@
       </p:sp>
       <p:sp>
         <p:nvSpPr>
-          <p:cNvPr id="7" name="Text 5"/>
-          <p:cNvSpPr/>
-          <p:nvPr/>
-        </p:nvSpPr>
-        <p:spPr>
-          <a:xfrm>
-            <a:off x="1051560" y="2487168"/>
-            <a:ext cx="5029200" cy="274320"/>
+          <p:cNvPr id="10" name="Text 7"/>
+          <p:cNvSpPr/>
+          <p:nvPr/>
+        </p:nvSpPr>
+        <p:spPr>
+          <a:xfrm>
+            <a:off x="7616952" y="3246120"/>
+            <a:ext cx="3246120" cy="731520"/>
           </a:xfrm>
           <a:prstGeom prst="rect">
             <a:avLst/>
@@ -10022,111 +13529,36 @@
           <a:lstStyle/>
           <a:p>
             <a:pPr indent="0" marL="0">
-              <a:buNone/>
-            </a:pPr>
-            <a:r>
-              <a:rPr lang="en-US" sz="1150" b="1" spc="120" kern="0" dirty="0">
-                <a:solidFill>
-                  <a:srgbClr val="8CAEA5"/>
-                </a:solidFill>
-                <a:latin typeface="Calibri" pitchFamily="34" charset="0"/>
-                <a:ea typeface="Calibri" pitchFamily="34" charset="-122"/>
-                <a:cs typeface="Calibri" pitchFamily="34" charset="-120"/>
-              </a:rPr>
-              <a:t>PUTUSAN PENJAGA</a:t>
-            </a:r>
-            <a:endParaRPr lang="en-US" sz="1150" dirty="0"/>
-          </a:p>
-        </p:txBody>
-      </p:sp>
-      <p:sp>
-        <p:nvSpPr>
-          <p:cNvPr id="8" name="Text 6"/>
-          <p:cNvSpPr/>
-          <p:nvPr/>
-        </p:nvSpPr>
-        <p:spPr>
-          <a:xfrm>
-            <a:off x="1051560" y="2788920"/>
-            <a:ext cx="2743200" cy="548640"/>
-          </a:xfrm>
-          <a:prstGeom prst="rect">
-            <a:avLst/>
-          </a:prstGeom>
-          <a:noFill/>
-          <a:ln/>
-        </p:spPr>
-        <p:txBody>
-          <a:bodyPr wrap="square" lIns="0" tIns="0" rIns="0" bIns="0" rtlCol="0" anchor="ctr"/>
-          <a:lstStyle/>
-          <a:p>
-            <a:pPr indent="0" marL="0">
-              <a:buNone/>
-            </a:pPr>
-            <a:r>
-              <a:rPr lang="en-US" sz="3400" b="1" dirty="0">
-                <a:solidFill>
-                  <a:srgbClr val="F0A189"/>
+              <a:lnSpc>
+                <a:spcPts val="2300"/>
+              </a:lnSpc>
+              <a:buNone/>
+            </a:pPr>
+            <a:r>
+              <a:rPr lang="en-US" sz="1800" b="1" dirty="0">
+                <a:solidFill>
+                  <a:srgbClr val="0D8271"/>
                 </a:solidFill>
                 <a:latin typeface="Cambria" pitchFamily="34" charset="0"/>
                 <a:ea typeface="Cambria" pitchFamily="34" charset="-122"/>
                 <a:cs typeface="Cambria" pitchFamily="34" charset="-120"/>
               </a:rPr>
-              <a:t>Ditolak</a:t>
-            </a:r>
-            <a:endParaRPr lang="en-US" sz="3400" dirty="0"/>
-          </a:p>
-        </p:txBody>
-      </p:sp>
-      <p:sp>
-        <p:nvSpPr>
-          <p:cNvPr id="9" name="Text 7"/>
-          <p:cNvSpPr/>
-          <p:nvPr/>
-        </p:nvSpPr>
-        <p:spPr>
-          <a:xfrm>
-            <a:off x="1051560" y="3383280"/>
-            <a:ext cx="5029200" cy="274320"/>
-          </a:xfrm>
-          <a:prstGeom prst="rect">
-            <a:avLst/>
-          </a:prstGeom>
-          <a:noFill/>
-          <a:ln/>
-        </p:spPr>
-        <p:txBody>
-          <a:bodyPr wrap="square" lIns="0" tIns="0" rIns="0" bIns="0" rtlCol="0" anchor="ctr"/>
-          <a:lstStyle/>
-          <a:p>
-            <a:pPr indent="0" marL="0">
-              <a:buNone/>
-            </a:pPr>
-            <a:r>
-              <a:rPr lang="en-US" sz="1300" dirty="0">
-                <a:solidFill>
-                  <a:srgbClr val="B7D2CA"/>
-                </a:solidFill>
-                <a:latin typeface="Calibri" pitchFamily="34" charset="0"/>
-                <a:ea typeface="Calibri" pitchFamily="34" charset="-122"/>
-                <a:cs typeface="Calibri" pitchFamily="34" charset="-120"/>
-              </a:rPr>
-              <a:t>3 fitur ditandai  ·  cakupan 100%</a:t>
-            </a:r>
-            <a:endParaRPr lang="en-US" sz="1300" dirty="0"/>
-          </a:p>
-        </p:txBody>
-      </p:sp>
-      <p:sp>
-        <p:nvSpPr>
-          <p:cNvPr id="10" name="Text 8"/>
-          <p:cNvSpPr/>
-          <p:nvPr/>
-        </p:nvSpPr>
-        <p:spPr>
-          <a:xfrm>
-            <a:off x="1051560" y="3767328"/>
-            <a:ext cx="5029200" cy="457200"/>
+              <a:t>Kami membuang lemparan koinnya, bukan sensitivitasnya.</a:t>
+            </a:r>
+            <a:endParaRPr lang="en-US" sz="1800" dirty="0"/>
+          </a:p>
+        </p:txBody>
+      </p:sp>
+      <p:sp>
+        <p:nvSpPr>
+          <p:cNvPr id="11" name="Text 8"/>
+          <p:cNvSpPr/>
+          <p:nvPr/>
+        </p:nvSpPr>
+        <p:spPr>
+          <a:xfrm>
+            <a:off x="7616952" y="4069080"/>
+            <a:ext cx="3246120" cy="1188720"/>
           </a:xfrm>
           <a:prstGeom prst="rect">
             <a:avLst/>
@@ -10147,13 +13579,13 @@
             <a:r>
               <a:rPr lang="en-US" sz="1250" dirty="0">
                 <a:solidFill>
-                  <a:srgbClr val="5CB9A3"/>
+                  <a:srgbClr val="14302B"/>
                 </a:solidFill>
                 <a:latin typeface="Calibri" pitchFamily="34" charset="0"/>
                 <a:ea typeface="Calibri" pitchFamily="34" charset="-122"/>
                 <a:cs typeface="Calibri" pitchFamily="34" charset="-120"/>
               </a:rPr>
-              <a:t>Jarak terjauh 9,1 z  ·  Mahalanobis 87,9  ·  keluaran model ditahan</a:t>
+              <a:t>Anak yang preferensinya persis di ambang dulu memicu rujukan separuh waktu — koin yang disajikan sebagai pengukuran. Sekarang 4,8%. Yang preferensinya benar-benar tinggi tetap terbaca 99%.</a:t>
             </a:r>
             <a:endParaRPr lang="en-US" sz="1250" dirty="0"/>
           </a:p>
@@ -10161,332 +13593,14 @@
       </p:sp>
       <p:sp>
         <p:nvSpPr>
-          <p:cNvPr id="11" name="Text 9"/>
-          <p:cNvSpPr/>
-          <p:nvPr/>
-        </p:nvSpPr>
-        <p:spPr>
-          <a:xfrm>
-            <a:off x="6995160" y="2286000"/>
-            <a:ext cx="4480560" cy="822960"/>
-          </a:xfrm>
-          <a:prstGeom prst="rect">
-            <a:avLst/>
-          </a:prstGeom>
-          <a:noFill/>
-          <a:ln/>
-        </p:spPr>
-        <p:txBody>
-          <a:bodyPr wrap="square" lIns="0" tIns="0" rIns="0" bIns="0" rtlCol="0" anchor="ctr"/>
-          <a:lstStyle/>
-          <a:p>
-            <a:pPr indent="0" marL="0">
-              <a:lnSpc>
-                <a:spcPts val="2400"/>
-              </a:lnSpc>
-              <a:buNone/>
-            </a:pPr>
-            <a:r>
-              <a:rPr lang="en-US" sz="1800" b="1" dirty="0">
-                <a:solidFill>
-                  <a:srgbClr val="0B1E1B"/>
-                </a:solidFill>
-                <a:latin typeface="Cambria" pitchFamily="34" charset="0"/>
-                <a:ea typeface="Cambria" pitchFamily="34" charset="-122"/>
-                <a:cs typeface="Cambria" pitchFamily="34" charset="-120"/>
-              </a:rPr>
-              <a:t>Penjaga yang selalu menolak sama saja dengan false yang dipasang tetap. Jadi kami jalankan dua arah.</a:t>
-            </a:r>
-            <a:endParaRPr lang="en-US" sz="1800" dirty="0"/>
-          </a:p>
-        </p:txBody>
-      </p:sp>
-      <p:sp>
-        <p:nvSpPr>
-          <p:cNvPr id="12" name="Text 10"/>
-          <p:cNvSpPr/>
-          <p:nvPr/>
-        </p:nvSpPr>
-        <p:spPr>
-          <a:xfrm>
-            <a:off x="6995160" y="3200400"/>
-            <a:ext cx="2743200" cy="274320"/>
-          </a:xfrm>
-          <a:prstGeom prst="rect">
-            <a:avLst/>
-          </a:prstGeom>
-          <a:noFill/>
-          <a:ln/>
-        </p:spPr>
-        <p:txBody>
-          <a:bodyPr wrap="square" lIns="0" tIns="0" rIns="0" bIns="0" rtlCol="0" anchor="ctr"/>
-          <a:lstStyle/>
-          <a:p>
-            <a:pPr indent="0" marL="0">
-              <a:buNone/>
-            </a:pPr>
-            <a:r>
-              <a:rPr lang="en-US" sz="1200" dirty="0">
-                <a:solidFill>
-                  <a:srgbClr val="4A635D"/>
-                </a:solidFill>
-                <a:latin typeface="Calibri" pitchFamily="34" charset="0"/>
-                <a:ea typeface="Calibri" pitchFamily="34" charset="-122"/>
-                <a:cs typeface="Calibri" pitchFamily="34" charset="-120"/>
-              </a:rPr>
-              <a:t>Domain sumber (Carette)</a:t>
-            </a:r>
-            <a:endParaRPr lang="en-US" sz="1200" dirty="0"/>
-          </a:p>
-        </p:txBody>
-      </p:sp>
-      <p:sp>
-        <p:nvSpPr>
-          <p:cNvPr id="13" name="Text 11"/>
-          <p:cNvSpPr/>
-          <p:nvPr/>
-        </p:nvSpPr>
-        <p:spPr>
-          <a:xfrm>
-            <a:off x="9738360" y="3145536"/>
-            <a:ext cx="1737360" cy="329184"/>
-          </a:xfrm>
-          <a:prstGeom prst="rect">
-            <a:avLst/>
-          </a:prstGeom>
-          <a:noFill/>
-          <a:ln/>
-        </p:spPr>
-        <p:txBody>
-          <a:bodyPr wrap="square" lIns="0" tIns="0" rIns="0" bIns="0" rtlCol="0" anchor="ctr"/>
-          <a:lstStyle/>
-          <a:p>
-            <a:pPr algn="r" indent="0" marL="0">
-              <a:buNone/>
-            </a:pPr>
-            <a:r>
-              <a:rPr lang="en-US" sz="1450" b="1" dirty="0">
-                <a:solidFill>
-                  <a:srgbClr val="0D8271"/>
-                </a:solidFill>
-                <a:latin typeface="Calibri" pitchFamily="34" charset="0"/>
-                <a:ea typeface="Calibri" pitchFamily="34" charset="-122"/>
-                <a:cs typeface="Calibri" pitchFamily="34" charset="-120"/>
-              </a:rPr>
-              <a:t>544 / 547 diterima</a:t>
-            </a:r>
-            <a:endParaRPr lang="en-US" sz="1450" dirty="0"/>
-          </a:p>
-        </p:txBody>
-      </p:sp>
-      <p:sp>
-        <p:nvSpPr>
-          <p:cNvPr id="14" name="Text 12"/>
-          <p:cNvSpPr/>
-          <p:nvPr/>
-        </p:nvSpPr>
-        <p:spPr>
-          <a:xfrm>
-            <a:off x="6995160" y="3767328"/>
-            <a:ext cx="2743200" cy="274320"/>
-          </a:xfrm>
-          <a:prstGeom prst="rect">
-            <a:avLst/>
-          </a:prstGeom>
-          <a:noFill/>
-          <a:ln/>
-        </p:spPr>
-        <p:txBody>
-          <a:bodyPr wrap="square" lIns="0" tIns="0" rIns="0" bIns="0" rtlCol="0" anchor="ctr"/>
-          <a:lstStyle/>
-          <a:p>
-            <a:pPr indent="0" marL="0">
-              <a:buNone/>
-            </a:pPr>
-            <a:r>
-              <a:rPr lang="en-US" sz="1200" dirty="0">
-                <a:solidFill>
-                  <a:srgbClr val="4A635D"/>
-                </a:solidFill>
-                <a:latin typeface="Calibri" pitchFamily="34" charset="0"/>
-                <a:ea typeface="Calibri" pitchFamily="34" charset="-122"/>
-                <a:cs typeface="Calibri" pitchFamily="34" charset="-120"/>
-              </a:rPr>
-              <a:t>Stimulus yang dikirim</a:t>
-            </a:r>
-            <a:endParaRPr lang="en-US" sz="1200" dirty="0"/>
-          </a:p>
-        </p:txBody>
-      </p:sp>
-      <p:sp>
-        <p:nvSpPr>
-          <p:cNvPr id="15" name="Text 13"/>
-          <p:cNvSpPr/>
-          <p:nvPr/>
-        </p:nvSpPr>
-        <p:spPr>
-          <a:xfrm>
-            <a:off x="9738360" y="3712464"/>
-            <a:ext cx="1737360" cy="329184"/>
-          </a:xfrm>
-          <a:prstGeom prst="rect">
-            <a:avLst/>
-          </a:prstGeom>
-          <a:noFill/>
-          <a:ln/>
-        </p:spPr>
-        <p:txBody>
-          <a:bodyPr wrap="square" lIns="0" tIns="0" rIns="0" bIns="0" rtlCol="0" anchor="ctr"/>
-          <a:lstStyle/>
-          <a:p>
-            <a:pPr algn="r" indent="0" marL="0">
-              <a:buNone/>
-            </a:pPr>
-            <a:r>
-              <a:rPr lang="en-US" sz="1450" b="1" dirty="0">
-                <a:solidFill>
-                  <a:srgbClr val="B1442C"/>
-                </a:solidFill>
-                <a:latin typeface="Calibri" pitchFamily="34" charset="0"/>
-                <a:ea typeface="Calibri" pitchFamily="34" charset="-122"/>
-                <a:cs typeface="Calibri" pitchFamily="34" charset="-120"/>
-              </a:rPr>
-              <a:t>1 / 23 diterima</a:t>
-            </a:r>
-            <a:endParaRPr lang="en-US" sz="1450" dirty="0"/>
-          </a:p>
-        </p:txBody>
-      </p:sp>
-      <p:sp>
-        <p:nvSpPr>
-          <p:cNvPr id="16" name="Text 14"/>
-          <p:cNvSpPr/>
-          <p:nvPr/>
-        </p:nvSpPr>
-        <p:spPr>
-          <a:xfrm>
-            <a:off x="6995160" y="4334256"/>
-            <a:ext cx="2743200" cy="274320"/>
-          </a:xfrm>
-          <a:prstGeom prst="rect">
-            <a:avLst/>
-          </a:prstGeom>
-          <a:noFill/>
-          <a:ln/>
-        </p:spPr>
-        <p:txBody>
-          <a:bodyPr wrap="square" lIns="0" tIns="0" rIns="0" bIns="0" rtlCol="0" anchor="ctr"/>
-          <a:lstStyle/>
-          <a:p>
-            <a:pPr indent="0" marL="0">
-              <a:buNone/>
-            </a:pPr>
-            <a:r>
-              <a:rPr lang="en-US" sz="1200" dirty="0">
-                <a:solidFill>
-                  <a:srgbClr val="4A635D"/>
-                </a:solidFill>
-                <a:latin typeface="Calibri" pitchFamily="34" charset="0"/>
-                <a:ea typeface="Calibri" pitchFamily="34" charset="-122"/>
-                <a:cs typeface="Calibri" pitchFamily="34" charset="-120"/>
-              </a:rPr>
-              <a:t>Keputusan direproduksi Python</a:t>
-            </a:r>
-            <a:endParaRPr lang="en-US" sz="1200" dirty="0"/>
-          </a:p>
-        </p:txBody>
-      </p:sp>
-      <p:sp>
-        <p:nvSpPr>
-          <p:cNvPr id="17" name="Text 15"/>
-          <p:cNvSpPr/>
-          <p:nvPr/>
-        </p:nvSpPr>
-        <p:spPr>
-          <a:xfrm>
-            <a:off x="9738360" y="4279392"/>
-            <a:ext cx="1737360" cy="329184"/>
-          </a:xfrm>
-          <a:prstGeom prst="rect">
-            <a:avLst/>
-          </a:prstGeom>
-          <a:noFill/>
-          <a:ln/>
-        </p:spPr>
-        <p:txBody>
-          <a:bodyPr wrap="square" lIns="0" tIns="0" rIns="0" bIns="0" rtlCol="0" anchor="ctr"/>
-          <a:lstStyle/>
-          <a:p>
-            <a:pPr algn="r" indent="0" marL="0">
-              <a:buNone/>
-            </a:pPr>
-            <a:r>
-              <a:rPr lang="en-US" sz="1450" b="1" dirty="0">
-                <a:solidFill>
-                  <a:srgbClr val="14302B"/>
-                </a:solidFill>
-                <a:latin typeface="Calibri" pitchFamily="34" charset="0"/>
-                <a:ea typeface="Calibri" pitchFamily="34" charset="-122"/>
-                <a:cs typeface="Calibri" pitchFamily="34" charset="-120"/>
-              </a:rPr>
-              <a:t>23 / 23</a:t>
-            </a:r>
-            <a:endParaRPr lang="en-US" sz="1450" dirty="0"/>
-          </a:p>
-        </p:txBody>
-      </p:sp>
-      <p:sp>
-        <p:nvSpPr>
-          <p:cNvPr id="18" name="Text 16"/>
-          <p:cNvSpPr/>
-          <p:nvPr/>
-        </p:nvSpPr>
-        <p:spPr>
-          <a:xfrm>
-            <a:off x="685800" y="4846320"/>
+          <p:cNvPr id="12" name="Text 9"/>
+          <p:cNvSpPr/>
+          <p:nvPr/>
+        </p:nvSpPr>
+        <p:spPr>
+          <a:xfrm>
+            <a:off x="685800" y="5577840"/>
             <a:ext cx="10424160" cy="548640"/>
-          </a:xfrm>
-          <a:prstGeom prst="rect">
-            <a:avLst/>
-          </a:prstGeom>
-          <a:noFill/>
-          <a:ln/>
-        </p:spPr>
-        <p:txBody>
-          <a:bodyPr wrap="square" lIns="0" tIns="0" rIns="0" bIns="0" rtlCol="0" anchor="ctr"/>
-          <a:lstStyle/>
-          <a:p>
-            <a:pPr indent="0" marL="0">
-              <a:lnSpc>
-                <a:spcPts val="1800"/>
-              </a:lnSpc>
-              <a:buNone/>
-            </a:pPr>
-            <a:r>
-              <a:rPr lang="en-US" sz="1300" dirty="0">
-                <a:solidFill>
-                  <a:srgbClr val="14302B"/>
-                </a:solidFill>
-                <a:latin typeface="Calibri" pitchFamily="34" charset="0"/>
-                <a:ea typeface="Calibri" pitchFamily="34" charset="-122"/>
-                <a:cs typeface="Calibri" pitchFamily="34" charset="-120"/>
-              </a:rPr>
-              <a:t>Ia menerima hampir semua yang berasal dari kohort yang membangunnya, dan menolak setiap sesi pada stimulus sekarang — sambil menyebut fiturnya: ink_frac di 22 dari 23 sesi.</a:t>
-            </a:r>
-            <a:endParaRPr lang="en-US" sz="1300" dirty="0"/>
-          </a:p>
-        </p:txBody>
-      </p:sp>
-      <p:sp>
-        <p:nvSpPr>
-          <p:cNvPr id="19" name="Text 17"/>
-          <p:cNvSpPr/>
-          <p:nvPr/>
-        </p:nvSpPr>
-        <p:spPr>
-          <a:xfrm>
-            <a:off x="685800" y="5440680"/>
-            <a:ext cx="10424160" cy="457200"/>
           </a:xfrm>
           <a:prstGeom prst="rect">
             <a:avLst/>
@@ -10507,54 +13621,15 @@
             <a:r>
               <a:rPr lang="en-US" sz="1500" i="1" dirty="0">
                 <a:solidFill>
-                  <a:srgbClr val="0D8271"/>
+                  <a:srgbClr val="14302B"/>
                 </a:solidFill>
                 <a:latin typeface="Cambria" pitchFamily="34" charset="0"/>
                 <a:ea typeface="Cambria" pitchFamily="34" charset="-122"/>
                 <a:cs typeface="Cambria" pitchFamily="34" charset="-120"/>
               </a:rPr>
-              <a:t>Keputusan itu dibuat TypeScript di peramban saat sesi berjalan. Python menghitungnya ulang dari log dan mendapat verdict yang sama, 23 dari 23.</a:t>
+              <a:t>Standar buktinya jadi sama untuk kedua sinyal: mengikuti isyarat sudah memakai uji tanda sejak awal. Yang tidak dapat menempatkan dirinya di satu sisi ambang belum mengukur apa pun tentang ambang itu.</a:t>
             </a:r>
             <a:endParaRPr lang="en-US" sz="1500" dirty="0"/>
-          </a:p>
-        </p:txBody>
-      </p:sp>
-      <p:sp>
-        <p:nvSpPr>
-          <p:cNvPr id="20" name="Text 18"/>
-          <p:cNvSpPr/>
-          <p:nvPr/>
-        </p:nvSpPr>
-        <p:spPr>
-          <a:xfrm>
-            <a:off x="685800" y="5943600"/>
-            <a:ext cx="10424160" cy="274320"/>
-          </a:xfrm>
-          <a:prstGeom prst="rect">
-            <a:avLst/>
-          </a:prstGeom>
-          <a:noFill/>
-          <a:ln/>
-        </p:spPr>
-        <p:txBody>
-          <a:bodyPr wrap="square" lIns="0" tIns="0" rIns="0" bIns="0" rtlCol="0" anchor="ctr"/>
-          <a:lstStyle/>
-          <a:p>
-            <a:pPr indent="0" marL="0">
-              <a:buNone/>
-            </a:pPr>
-            <a:r>
-              <a:rPr lang="en-US" sz="1000" dirty="0">
-                <a:solidFill>
-                  <a:srgbClr val="4A635D"/>
-                </a:solidFill>
-                <a:latin typeface="Calibri" pitchFamily="34" charset="0"/>
-                <a:ea typeface="Calibri" pitchFamily="34" charset="-122"/>
-                <a:cs typeface="Calibri" pitchFamily="34" charset="-120"/>
-              </a:rPr>
-              <a:t>Sumber: research/hasil/ood_dua_arah.json · kalibrasi referensi persentil 99,5 sehingga tingkat penerimaan domain sumber adalah pemeriksaan kewarasan, bukan uji generalisasi</a:t>
-            </a:r>
-            <a:endParaRPr lang="en-US" sz="1000" dirty="0"/>
           </a:p>
         </p:txBody>
       </p:sp>
@@ -10675,7 +13750,7 @@
                 <a:ea typeface="Calibri" pitchFamily="34" charset="-122"/>
                 <a:cs typeface="Calibri" pitchFamily="34" charset="-120"/>
               </a:rPr>
-              <a:t>Kenapa punya batas</a:t>
+              <a:t>Penjaga out-of-distribution</a:t>
             </a:r>
             <a:endParaRPr lang="en-US" sz="1200" dirty="0"/>
           </a:p>
@@ -10717,1777 +13792,34 @@
                 <a:ea typeface="Cambria" pitchFamily="34" charset="-122"/>
                 <a:cs typeface="Cambria" pitchFamily="34" charset="-120"/>
               </a:rPr>
-              <a:t>Kami memilih titik kerja yang menemukan paling sedikit</a:t>
+              <a:t>Modelnya jalan. Penjaganya menolak — dan kami buktikan ia tidak menolak semuanya.</a:t>
             </a:r>
             <a:endParaRPr lang="en-US" sz="3200" dirty="0"/>
           </a:p>
         </p:txBody>
       </p:sp>
-      <p:graphicFrame>
-        <p:nvGraphicFramePr>
-          <p:cNvPr id="10" name="Table 0"/>
-          <p:cNvGraphicFramePr>
-            <a:graphicFrameLocks noGrp="1"/>
-          </p:cNvGraphicFramePr>
-          <p:nvPr>
-            <p:extLst>
-              <p:ext uri="{D42A27DB-BD31-4B8C-83A1-F6EECF244321}">
-                <p14:modId xmlns:p14="http://schemas.microsoft.com/office/powerpoint/2010/main" val="1579011935"/>
-              </p:ext>
-            </p:extLst>
-          </p:nvPr>
-        </p:nvGraphicFramePr>
-        <p:xfrm>
-          <a:off x="685800" y="2194560"/>
-          <a:ext cx="10424160" cy="914400"/>
-        </p:xfrm>
-        <a:graphic>
-          <a:graphicData uri="http://schemas.openxmlformats.org/drawingml/2006/table">
-            <a:tbl>
-              <a:tblPr/>
-              <a:tblGrid>
-                <a:gridCol w="3657600"/>
-                <a:gridCol w="1371600"/>
-                <a:gridCol w="1371600"/>
-                <a:gridCol w="1920240"/>
-                <a:gridCol w="2103120"/>
-              </a:tblGrid>
-              <a:tr h="402336">
-                <a:tc>
-                  <a:txBody>
-                    <a:bodyPr/>
-                    <a:lstStyle/>
-                    <a:p>
-                      <a:pPr indent="0" marL="0">
-                        <a:buNone/>
-                      </a:pPr>
-                      <a:r>
-                        <a:rPr lang="en-US" sz="1300" b="1" dirty="0">
-                          <a:solidFill>
-                            <a:srgbClr val="14302B"/>
-                          </a:solidFill>
-                          <a:latin typeface="Calibri" pitchFamily="34" charset="0"/>
-                          <a:ea typeface="Calibri" pitchFamily="34" charset="-122"/>
-                          <a:cs typeface="Calibri" pitchFamily="34" charset="-120"/>
-                        </a:rPr>
-                        <a:t>Titik kerja</a:t>
-                      </a:r>
-                      <a:endParaRPr lang="en-US" sz="1300" dirty="0">
-                        <a:latin typeface="Calibri" charset="0"/>
-                        <a:ea typeface="Calibri" charset="0"/>
-                        <a:cs typeface="Calibri" charset="0"/>
-                      </a:endParaRPr>
-                    </a:p>
-                  </a:txBody>
-                  <a:tcPr marL="82296" marR="82296" marT="82296" marB="82296" anchor="ctr">
-                    <a:lnL w="12700" cap="flat" cmpd="sng" algn="ctr">
-                      <a:solidFill>
-                        <a:srgbClr val="DBE4E1"/>
-                      </a:solidFill>
-                      <a:prstDash val="solid"/>
-                      <a:round/>
-                      <a:headEnd type="none" w="med" len="med"/>
-                      <a:tailEnd type="none" w="med" len="med"/>
-                    </a:lnL>
-                    <a:lnR w="12700" cap="flat" cmpd="sng" algn="ctr">
-                      <a:solidFill>
-                        <a:srgbClr val="DBE4E1"/>
-                      </a:solidFill>
-                      <a:prstDash val="solid"/>
-                      <a:round/>
-                      <a:headEnd type="none" w="med" len="med"/>
-                      <a:tailEnd type="none" w="med" len="med"/>
-                    </a:lnR>
-                    <a:lnT w="12700" cap="flat" cmpd="sng" algn="ctr">
-                      <a:solidFill>
-                        <a:srgbClr val="DBE4E1"/>
-                      </a:solidFill>
-                      <a:prstDash val="solid"/>
-                      <a:round/>
-                      <a:headEnd type="none" w="med" len="med"/>
-                      <a:tailEnd type="none" w="med" len="med"/>
-                    </a:lnT>
-                    <a:lnB w="12700" cap="flat" cmpd="sng" algn="ctr">
-                      <a:solidFill>
-                        <a:srgbClr val="DBE4E1"/>
-                      </a:solidFill>
-                      <a:prstDash val="solid"/>
-                      <a:round/>
-                      <a:headEnd type="none" w="med" len="med"/>
-                      <a:tailEnd type="none" w="med" len="med"/>
-                    </a:lnB>
-                    <a:solidFill>
-                      <a:srgbClr val="FFFFFF"/>
-                    </a:solidFill>
-                  </a:tcPr>
-                </a:tc>
-                <a:tc>
-                  <a:txBody>
-                    <a:bodyPr/>
-                    <a:lstStyle/>
-                    <a:p>
-                      <a:pPr indent="0" marL="0">
-                        <a:buNone/>
-                      </a:pPr>
-                      <a:r>
-                        <a:rPr lang="en-US" sz="1300" b="1" dirty="0">
-                          <a:solidFill>
-                            <a:srgbClr val="14302B"/>
-                          </a:solidFill>
-                          <a:latin typeface="Calibri" pitchFamily="34" charset="0"/>
-                          <a:ea typeface="Calibri" pitchFamily="34" charset="-122"/>
-                          <a:cs typeface="Calibri" pitchFamily="34" charset="-120"/>
-                        </a:rPr>
-                        <a:t>Sens</a:t>
-                      </a:r>
-                      <a:endParaRPr lang="en-US" sz="1300" dirty="0">
-                        <a:latin typeface="Calibri" charset="0"/>
-                        <a:ea typeface="Calibri" charset="0"/>
-                        <a:cs typeface="Calibri" charset="0"/>
-                      </a:endParaRPr>
-                    </a:p>
-                  </a:txBody>
-                  <a:tcPr marL="82296" marR="82296" marT="82296" marB="82296" anchor="ctr">
-                    <a:lnL w="12700" cap="flat" cmpd="sng" algn="ctr">
-                      <a:solidFill>
-                        <a:srgbClr val="DBE4E1"/>
-                      </a:solidFill>
-                      <a:prstDash val="solid"/>
-                      <a:round/>
-                      <a:headEnd type="none" w="med" len="med"/>
-                      <a:tailEnd type="none" w="med" len="med"/>
-                    </a:lnL>
-                    <a:lnR w="12700" cap="flat" cmpd="sng" algn="ctr">
-                      <a:solidFill>
-                        <a:srgbClr val="DBE4E1"/>
-                      </a:solidFill>
-                      <a:prstDash val="solid"/>
-                      <a:round/>
-                      <a:headEnd type="none" w="med" len="med"/>
-                      <a:tailEnd type="none" w="med" len="med"/>
-                    </a:lnR>
-                    <a:lnT w="12700" cap="flat" cmpd="sng" algn="ctr">
-                      <a:solidFill>
-                        <a:srgbClr val="DBE4E1"/>
-                      </a:solidFill>
-                      <a:prstDash val="solid"/>
-                      <a:round/>
-                      <a:headEnd type="none" w="med" len="med"/>
-                      <a:tailEnd type="none" w="med" len="med"/>
-                    </a:lnT>
-                    <a:lnB w="12700" cap="flat" cmpd="sng" algn="ctr">
-                      <a:solidFill>
-                        <a:srgbClr val="DBE4E1"/>
-                      </a:solidFill>
-                      <a:prstDash val="solid"/>
-                      <a:round/>
-                      <a:headEnd type="none" w="med" len="med"/>
-                      <a:tailEnd type="none" w="med" len="med"/>
-                    </a:lnB>
-                    <a:solidFill>
-                      <a:srgbClr val="FFFFFF"/>
-                    </a:solidFill>
-                  </a:tcPr>
-                </a:tc>
-                <a:tc>
-                  <a:txBody>
-                    <a:bodyPr/>
-                    <a:lstStyle/>
-                    <a:p>
-                      <a:pPr indent="0" marL="0">
-                        <a:buNone/>
-                      </a:pPr>
-                      <a:r>
-                        <a:rPr lang="en-US" sz="1300" b="1" dirty="0">
-                          <a:solidFill>
-                            <a:srgbClr val="14302B"/>
-                          </a:solidFill>
-                          <a:latin typeface="Calibri" pitchFamily="34" charset="0"/>
-                          <a:ea typeface="Calibri" pitchFamily="34" charset="-122"/>
-                          <a:cs typeface="Calibri" pitchFamily="34" charset="-120"/>
-                        </a:rPr>
-                        <a:t>Spec</a:t>
-                      </a:r>
-                      <a:endParaRPr lang="en-US" sz="1300" dirty="0">
-                        <a:latin typeface="Calibri" charset="0"/>
-                        <a:ea typeface="Calibri" charset="0"/>
-                        <a:cs typeface="Calibri" charset="0"/>
-                      </a:endParaRPr>
-                    </a:p>
-                  </a:txBody>
-                  <a:tcPr marL="82296" marR="82296" marT="82296" marB="82296" anchor="ctr">
-                    <a:lnL w="12700" cap="flat" cmpd="sng" algn="ctr">
-                      <a:solidFill>
-                        <a:srgbClr val="DBE4E1"/>
-                      </a:solidFill>
-                      <a:prstDash val="solid"/>
-                      <a:round/>
-                      <a:headEnd type="none" w="med" len="med"/>
-                      <a:tailEnd type="none" w="med" len="med"/>
-                    </a:lnL>
-                    <a:lnR w="12700" cap="flat" cmpd="sng" algn="ctr">
-                      <a:solidFill>
-                        <a:srgbClr val="DBE4E1"/>
-                      </a:solidFill>
-                      <a:prstDash val="solid"/>
-                      <a:round/>
-                      <a:headEnd type="none" w="med" len="med"/>
-                      <a:tailEnd type="none" w="med" len="med"/>
-                    </a:lnR>
-                    <a:lnT w="12700" cap="flat" cmpd="sng" algn="ctr">
-                      <a:solidFill>
-                        <a:srgbClr val="DBE4E1"/>
-                      </a:solidFill>
-                      <a:prstDash val="solid"/>
-                      <a:round/>
-                      <a:headEnd type="none" w="med" len="med"/>
-                      <a:tailEnd type="none" w="med" len="med"/>
-                    </a:lnT>
-                    <a:lnB w="12700" cap="flat" cmpd="sng" algn="ctr">
-                      <a:solidFill>
-                        <a:srgbClr val="DBE4E1"/>
-                      </a:solidFill>
-                      <a:prstDash val="solid"/>
-                      <a:round/>
-                      <a:headEnd type="none" w="med" len="med"/>
-                      <a:tailEnd type="none" w="med" len="med"/>
-                    </a:lnB>
-                    <a:solidFill>
-                      <a:srgbClr val="FFFFFF"/>
-                    </a:solidFill>
-                  </a:tcPr>
-                </a:tc>
-                <a:tc>
-                  <a:txBody>
-                    <a:bodyPr/>
-                    <a:lstStyle/>
-                    <a:p>
-                      <a:pPr indent="0" marL="0">
-                        <a:buNone/>
-                      </a:pPr>
-                      <a:r>
-                        <a:rPr lang="en-US" sz="1300" b="1" dirty="0">
-                          <a:solidFill>
-                            <a:srgbClr val="14302B"/>
-                          </a:solidFill>
-                          <a:latin typeface="Calibri" pitchFamily="34" charset="0"/>
-                          <a:ea typeface="Calibri" pitchFamily="34" charset="-122"/>
-                          <a:cs typeface="Calibri" pitchFamily="34" charset="-120"/>
-                        </a:rPr>
-                        <a:t>Laju rujukan</a:t>
-                      </a:r>
-                      <a:endParaRPr lang="en-US" sz="1300" dirty="0">
-                        <a:latin typeface="Calibri" charset="0"/>
-                        <a:ea typeface="Calibri" charset="0"/>
-                        <a:cs typeface="Calibri" charset="0"/>
-                      </a:endParaRPr>
-                    </a:p>
-                  </a:txBody>
-                  <a:tcPr marL="82296" marR="82296" marT="82296" marB="82296" anchor="ctr">
-                    <a:lnL w="12700" cap="flat" cmpd="sng" algn="ctr">
-                      <a:solidFill>
-                        <a:srgbClr val="DBE4E1"/>
-                      </a:solidFill>
-                      <a:prstDash val="solid"/>
-                      <a:round/>
-                      <a:headEnd type="none" w="med" len="med"/>
-                      <a:tailEnd type="none" w="med" len="med"/>
-                    </a:lnL>
-                    <a:lnR w="12700" cap="flat" cmpd="sng" algn="ctr">
-                      <a:solidFill>
-                        <a:srgbClr val="DBE4E1"/>
-                      </a:solidFill>
-                      <a:prstDash val="solid"/>
-                      <a:round/>
-                      <a:headEnd type="none" w="med" len="med"/>
-                      <a:tailEnd type="none" w="med" len="med"/>
-                    </a:lnR>
-                    <a:lnT w="12700" cap="flat" cmpd="sng" algn="ctr">
-                      <a:solidFill>
-                        <a:srgbClr val="DBE4E1"/>
-                      </a:solidFill>
-                      <a:prstDash val="solid"/>
-                      <a:round/>
-                      <a:headEnd type="none" w="med" len="med"/>
-                      <a:tailEnd type="none" w="med" len="med"/>
-                    </a:lnT>
-                    <a:lnB w="12700" cap="flat" cmpd="sng" algn="ctr">
-                      <a:solidFill>
-                        <a:srgbClr val="DBE4E1"/>
-                      </a:solidFill>
-                      <a:prstDash val="solid"/>
-                      <a:round/>
-                      <a:headEnd type="none" w="med" len="med"/>
-                      <a:tailEnd type="none" w="med" len="med"/>
-                    </a:lnB>
-                    <a:solidFill>
-                      <a:srgbClr val="FFFFFF"/>
-                    </a:solidFill>
-                  </a:tcPr>
-                </a:tc>
-                <a:tc>
-                  <a:txBody>
-                    <a:bodyPr/>
-                    <a:lstStyle/>
-                    <a:p>
-                      <a:pPr indent="0" marL="0">
-                        <a:buNone/>
-                      </a:pPr>
-                      <a:r>
-                        <a:rPr lang="en-US" sz="1300" b="1" dirty="0">
-                          <a:solidFill>
-                            <a:srgbClr val="14302B"/>
-                          </a:solidFill>
-                          <a:latin typeface="Calibri" pitchFamily="34" charset="0"/>
-                          <a:ea typeface="Calibri" pitchFamily="34" charset="-122"/>
-                          <a:cs typeface="Calibri" pitchFamily="34" charset="-120"/>
-                        </a:rPr>
-                        <a:t>Rujukan per 1 kasus</a:t>
-                      </a:r>
-                      <a:endParaRPr lang="en-US" sz="1300" dirty="0">
-                        <a:latin typeface="Calibri" charset="0"/>
-                        <a:ea typeface="Calibri" charset="0"/>
-                        <a:cs typeface="Calibri" charset="0"/>
-                      </a:endParaRPr>
-                    </a:p>
-                  </a:txBody>
-                  <a:tcPr marL="82296" marR="82296" marT="82296" marB="82296" anchor="ctr">
-                    <a:lnL w="12700" cap="flat" cmpd="sng" algn="ctr">
-                      <a:solidFill>
-                        <a:srgbClr val="DBE4E1"/>
-                      </a:solidFill>
-                      <a:prstDash val="solid"/>
-                      <a:round/>
-                      <a:headEnd type="none" w="med" len="med"/>
-                      <a:tailEnd type="none" w="med" len="med"/>
-                    </a:lnL>
-                    <a:lnR w="12700" cap="flat" cmpd="sng" algn="ctr">
-                      <a:solidFill>
-                        <a:srgbClr val="DBE4E1"/>
-                      </a:solidFill>
-                      <a:prstDash val="solid"/>
-                      <a:round/>
-                      <a:headEnd type="none" w="med" len="med"/>
-                      <a:tailEnd type="none" w="med" len="med"/>
-                    </a:lnR>
-                    <a:lnT w="12700" cap="flat" cmpd="sng" algn="ctr">
-                      <a:solidFill>
-                        <a:srgbClr val="DBE4E1"/>
-                      </a:solidFill>
-                      <a:prstDash val="solid"/>
-                      <a:round/>
-                      <a:headEnd type="none" w="med" len="med"/>
-                      <a:tailEnd type="none" w="med" len="med"/>
-                    </a:lnT>
-                    <a:lnB w="12700" cap="flat" cmpd="sng" algn="ctr">
-                      <a:solidFill>
-                        <a:srgbClr val="DBE4E1"/>
-                      </a:solidFill>
-                      <a:prstDash val="solid"/>
-                      <a:round/>
-                      <a:headEnd type="none" w="med" len="med"/>
-                      <a:tailEnd type="none" w="med" len="med"/>
-                    </a:lnB>
-                    <a:solidFill>
-                      <a:srgbClr val="FFFFFF"/>
-                    </a:solidFill>
-                  </a:tcPr>
-                </a:tc>
-              </a:tr>
-              <a:tr h="402336">
-                <a:tc>
-                  <a:txBody>
-                    <a:bodyPr/>
-                    <a:lstStyle/>
-                    <a:p>
-                      <a:pPr indent="0" marL="0">
-                        <a:buNone/>
-                      </a:pPr>
-                      <a:r>
-                        <a:rPr lang="en-US" sz="1300" dirty="0">
-                          <a:solidFill>
-                            <a:srgbClr val="14302B"/>
-                          </a:solidFill>
-                          <a:latin typeface="Calibri" pitchFamily="34" charset="0"/>
-                          <a:ea typeface="Calibri" pitchFamily="34" charset="-122"/>
-                          <a:cs typeface="Calibri" pitchFamily="34" charset="-120"/>
-                        </a:rPr>
-                        <a:t>Regresi logistik, sensitivitas 0,9</a:t>
-                      </a:r>
-                      <a:endParaRPr lang="en-US" sz="1300" dirty="0">
-                        <a:latin typeface="Calibri" charset="0"/>
-                        <a:ea typeface="Calibri" charset="0"/>
-                        <a:cs typeface="Calibri" charset="0"/>
-                      </a:endParaRPr>
-                    </a:p>
-                  </a:txBody>
-                  <a:tcPr marL="82296" marR="82296" marT="82296" marB="82296" anchor="ctr">
-                    <a:lnL w="12700" cap="flat" cmpd="sng" algn="ctr">
-                      <a:solidFill>
-                        <a:srgbClr val="DBE4E1"/>
-                      </a:solidFill>
-                      <a:prstDash val="solid"/>
-                      <a:round/>
-                      <a:headEnd type="none" w="med" len="med"/>
-                      <a:tailEnd type="none" w="med" len="med"/>
-                    </a:lnL>
-                    <a:lnR w="12700" cap="flat" cmpd="sng" algn="ctr">
-                      <a:solidFill>
-                        <a:srgbClr val="DBE4E1"/>
-                      </a:solidFill>
-                      <a:prstDash val="solid"/>
-                      <a:round/>
-                      <a:headEnd type="none" w="med" len="med"/>
-                      <a:tailEnd type="none" w="med" len="med"/>
-                    </a:lnR>
-                    <a:lnT w="12700" cap="flat" cmpd="sng" algn="ctr">
-                      <a:solidFill>
-                        <a:srgbClr val="DBE4E1"/>
-                      </a:solidFill>
-                      <a:prstDash val="solid"/>
-                      <a:round/>
-                      <a:headEnd type="none" w="med" len="med"/>
-                      <a:tailEnd type="none" w="med" len="med"/>
-                    </a:lnT>
-                    <a:lnB w="12700" cap="flat" cmpd="sng" algn="ctr">
-                      <a:solidFill>
-                        <a:srgbClr val="DBE4E1"/>
-                      </a:solidFill>
-                      <a:prstDash val="solid"/>
-                      <a:round/>
-                      <a:headEnd type="none" w="med" len="med"/>
-                      <a:tailEnd type="none" w="med" len="med"/>
-                    </a:lnB>
-                    <a:solidFill>
-                      <a:srgbClr val="FFFFFF"/>
-                    </a:solidFill>
-                  </a:tcPr>
-                </a:tc>
-                <a:tc>
-                  <a:txBody>
-                    <a:bodyPr/>
-                    <a:lstStyle/>
-                    <a:p>
-                      <a:pPr indent="0" marL="0">
-                        <a:buNone/>
-                      </a:pPr>
-                      <a:r>
-                        <a:rPr lang="en-US" sz="1300" dirty="0">
-                          <a:solidFill>
-                            <a:srgbClr val="14302B"/>
-                          </a:solidFill>
-                          <a:latin typeface="Calibri" pitchFamily="34" charset="0"/>
-                          <a:ea typeface="Calibri" pitchFamily="34" charset="-122"/>
-                          <a:cs typeface="Calibri" pitchFamily="34" charset="-120"/>
-                        </a:rPr>
-                        <a:t>0,923</a:t>
-                      </a:r>
-                      <a:endParaRPr lang="en-US" sz="1300" dirty="0">
-                        <a:latin typeface="Calibri" charset="0"/>
-                        <a:ea typeface="Calibri" charset="0"/>
-                        <a:cs typeface="Calibri" charset="0"/>
-                      </a:endParaRPr>
-                    </a:p>
-                  </a:txBody>
-                  <a:tcPr marL="82296" marR="82296" marT="82296" marB="82296" anchor="ctr">
-                    <a:lnL w="12700" cap="flat" cmpd="sng" algn="ctr">
-                      <a:solidFill>
-                        <a:srgbClr val="DBE4E1"/>
-                      </a:solidFill>
-                      <a:prstDash val="solid"/>
-                      <a:round/>
-                      <a:headEnd type="none" w="med" len="med"/>
-                      <a:tailEnd type="none" w="med" len="med"/>
-                    </a:lnL>
-                    <a:lnR w="12700" cap="flat" cmpd="sng" algn="ctr">
-                      <a:solidFill>
-                        <a:srgbClr val="DBE4E1"/>
-                      </a:solidFill>
-                      <a:prstDash val="solid"/>
-                      <a:round/>
-                      <a:headEnd type="none" w="med" len="med"/>
-                      <a:tailEnd type="none" w="med" len="med"/>
-                    </a:lnR>
-                    <a:lnT w="12700" cap="flat" cmpd="sng" algn="ctr">
-                      <a:solidFill>
-                        <a:srgbClr val="DBE4E1"/>
-                      </a:solidFill>
-                      <a:prstDash val="solid"/>
-                      <a:round/>
-                      <a:headEnd type="none" w="med" len="med"/>
-                      <a:tailEnd type="none" w="med" len="med"/>
-                    </a:lnT>
-                    <a:lnB w="12700" cap="flat" cmpd="sng" algn="ctr">
-                      <a:solidFill>
-                        <a:srgbClr val="DBE4E1"/>
-                      </a:solidFill>
-                      <a:prstDash val="solid"/>
-                      <a:round/>
-                      <a:headEnd type="none" w="med" len="med"/>
-                      <a:tailEnd type="none" w="med" len="med"/>
-                    </a:lnB>
-                    <a:solidFill>
-                      <a:srgbClr val="FFFFFF"/>
-                    </a:solidFill>
-                  </a:tcPr>
-                </a:tc>
-                <a:tc>
-                  <a:txBody>
-                    <a:bodyPr/>
-                    <a:lstStyle/>
-                    <a:p>
-                      <a:pPr indent="0" marL="0">
-                        <a:buNone/>
-                      </a:pPr>
-                      <a:r>
-                        <a:rPr lang="en-US" sz="1300" dirty="0">
-                          <a:solidFill>
-                            <a:srgbClr val="14302B"/>
-                          </a:solidFill>
-                          <a:latin typeface="Calibri" pitchFamily="34" charset="0"/>
-                          <a:ea typeface="Calibri" pitchFamily="34" charset="-122"/>
-                          <a:cs typeface="Calibri" pitchFamily="34" charset="-120"/>
-                        </a:rPr>
-                        <a:t>0,179</a:t>
-                      </a:r>
-                      <a:endParaRPr lang="en-US" sz="1300" dirty="0">
-                        <a:latin typeface="Calibri" charset="0"/>
-                        <a:ea typeface="Calibri" charset="0"/>
-                        <a:cs typeface="Calibri" charset="0"/>
-                      </a:endParaRPr>
-                    </a:p>
-                  </a:txBody>
-                  <a:tcPr marL="82296" marR="82296" marT="82296" marB="82296" anchor="ctr">
-                    <a:lnL w="12700" cap="flat" cmpd="sng" algn="ctr">
-                      <a:solidFill>
-                        <a:srgbClr val="DBE4E1"/>
-                      </a:solidFill>
-                      <a:prstDash val="solid"/>
-                      <a:round/>
-                      <a:headEnd type="none" w="med" len="med"/>
-                      <a:tailEnd type="none" w="med" len="med"/>
-                    </a:lnL>
-                    <a:lnR w="12700" cap="flat" cmpd="sng" algn="ctr">
-                      <a:solidFill>
-                        <a:srgbClr val="DBE4E1"/>
-                      </a:solidFill>
-                      <a:prstDash val="solid"/>
-                      <a:round/>
-                      <a:headEnd type="none" w="med" len="med"/>
-                      <a:tailEnd type="none" w="med" len="med"/>
-                    </a:lnR>
-                    <a:lnT w="12700" cap="flat" cmpd="sng" algn="ctr">
-                      <a:solidFill>
-                        <a:srgbClr val="DBE4E1"/>
-                      </a:solidFill>
-                      <a:prstDash val="solid"/>
-                      <a:round/>
-                      <a:headEnd type="none" w="med" len="med"/>
-                      <a:tailEnd type="none" w="med" len="med"/>
-                    </a:lnT>
-                    <a:lnB w="12700" cap="flat" cmpd="sng" algn="ctr">
-                      <a:solidFill>
-                        <a:srgbClr val="DBE4E1"/>
-                      </a:solidFill>
-                      <a:prstDash val="solid"/>
-                      <a:round/>
-                      <a:headEnd type="none" w="med" len="med"/>
-                      <a:tailEnd type="none" w="med" len="med"/>
-                    </a:lnB>
-                    <a:solidFill>
-                      <a:srgbClr val="FFFFFF"/>
-                    </a:solidFill>
-                  </a:tcPr>
-                </a:tc>
-                <a:tc>
-                  <a:txBody>
-                    <a:bodyPr/>
-                    <a:lstStyle/>
-                    <a:p>
-                      <a:pPr indent="0" marL="0">
-                        <a:buNone/>
-                      </a:pPr>
-                      <a:r>
-                        <a:rPr lang="en-US" sz="1300" dirty="0">
-                          <a:solidFill>
-                            <a:srgbClr val="14302B"/>
-                          </a:solidFill>
-                          <a:latin typeface="Calibri" pitchFamily="34" charset="0"/>
-                          <a:ea typeface="Calibri" pitchFamily="34" charset="-122"/>
-                          <a:cs typeface="Calibri" pitchFamily="34" charset="-120"/>
-                        </a:rPr>
-                        <a:t>82,2%</a:t>
-                      </a:r>
-                      <a:endParaRPr lang="en-US" sz="1300" dirty="0">
-                        <a:latin typeface="Calibri" charset="0"/>
-                        <a:ea typeface="Calibri" charset="0"/>
-                        <a:cs typeface="Calibri" charset="0"/>
-                      </a:endParaRPr>
-                    </a:p>
-                  </a:txBody>
-                  <a:tcPr marL="82296" marR="82296" marT="82296" marB="82296" anchor="ctr">
-                    <a:lnL w="12700" cap="flat" cmpd="sng" algn="ctr">
-                      <a:solidFill>
-                        <a:srgbClr val="DBE4E1"/>
-                      </a:solidFill>
-                      <a:prstDash val="solid"/>
-                      <a:round/>
-                      <a:headEnd type="none" w="med" len="med"/>
-                      <a:tailEnd type="none" w="med" len="med"/>
-                    </a:lnL>
-                    <a:lnR w="12700" cap="flat" cmpd="sng" algn="ctr">
-                      <a:solidFill>
-                        <a:srgbClr val="DBE4E1"/>
-                      </a:solidFill>
-                      <a:prstDash val="solid"/>
-                      <a:round/>
-                      <a:headEnd type="none" w="med" len="med"/>
-                      <a:tailEnd type="none" w="med" len="med"/>
-                    </a:lnR>
-                    <a:lnT w="12700" cap="flat" cmpd="sng" algn="ctr">
-                      <a:solidFill>
-                        <a:srgbClr val="DBE4E1"/>
-                      </a:solidFill>
-                      <a:prstDash val="solid"/>
-                      <a:round/>
-                      <a:headEnd type="none" w="med" len="med"/>
-                      <a:tailEnd type="none" w="med" len="med"/>
-                    </a:lnT>
-                    <a:lnB w="12700" cap="flat" cmpd="sng" algn="ctr">
-                      <a:solidFill>
-                        <a:srgbClr val="DBE4E1"/>
-                      </a:solidFill>
-                      <a:prstDash val="solid"/>
-                      <a:round/>
-                      <a:headEnd type="none" w="med" len="med"/>
-                      <a:tailEnd type="none" w="med" len="med"/>
-                    </a:lnB>
-                    <a:solidFill>
-                      <a:srgbClr val="FFFFFF"/>
-                    </a:solidFill>
-                  </a:tcPr>
-                </a:tc>
-                <a:tc>
-                  <a:txBody>
-                    <a:bodyPr/>
-                    <a:lstStyle/>
-                    <a:p>
-                      <a:pPr indent="0" marL="0">
-                        <a:buNone/>
-                      </a:pPr>
-                      <a:r>
-                        <a:rPr lang="en-US" sz="1300" dirty="0">
-                          <a:solidFill>
-                            <a:srgbClr val="14302B"/>
-                          </a:solidFill>
-                          <a:latin typeface="Calibri" pitchFamily="34" charset="0"/>
-                          <a:ea typeface="Calibri" pitchFamily="34" charset="-122"/>
-                          <a:cs typeface="Calibri" pitchFamily="34" charset="-120"/>
-                        </a:rPr>
-                        <a:t>89,1</a:t>
-                      </a:r>
-                      <a:endParaRPr lang="en-US" sz="1300" dirty="0">
-                        <a:latin typeface="Calibri" charset="0"/>
-                        <a:ea typeface="Calibri" charset="0"/>
-                        <a:cs typeface="Calibri" charset="0"/>
-                      </a:endParaRPr>
-                    </a:p>
-                  </a:txBody>
-                  <a:tcPr marL="82296" marR="82296" marT="82296" marB="82296" anchor="ctr">
-                    <a:lnL w="12700" cap="flat" cmpd="sng" algn="ctr">
-                      <a:solidFill>
-                        <a:srgbClr val="DBE4E1"/>
-                      </a:solidFill>
-                      <a:prstDash val="solid"/>
-                      <a:round/>
-                      <a:headEnd type="none" w="med" len="med"/>
-                      <a:tailEnd type="none" w="med" len="med"/>
-                    </a:lnL>
-                    <a:lnR w="12700" cap="flat" cmpd="sng" algn="ctr">
-                      <a:solidFill>
-                        <a:srgbClr val="DBE4E1"/>
-                      </a:solidFill>
-                      <a:prstDash val="solid"/>
-                      <a:round/>
-                      <a:headEnd type="none" w="med" len="med"/>
-                      <a:tailEnd type="none" w="med" len="med"/>
-                    </a:lnR>
-                    <a:lnT w="12700" cap="flat" cmpd="sng" algn="ctr">
-                      <a:solidFill>
-                        <a:srgbClr val="DBE4E1"/>
-                      </a:solidFill>
-                      <a:prstDash val="solid"/>
-                      <a:round/>
-                      <a:headEnd type="none" w="med" len="med"/>
-                      <a:tailEnd type="none" w="med" len="med"/>
-                    </a:lnT>
-                    <a:lnB w="12700" cap="flat" cmpd="sng" algn="ctr">
-                      <a:solidFill>
-                        <a:srgbClr val="DBE4E1"/>
-                      </a:solidFill>
-                      <a:prstDash val="solid"/>
-                      <a:round/>
-                      <a:headEnd type="none" w="med" len="med"/>
-                      <a:tailEnd type="none" w="med" len="med"/>
-                    </a:lnB>
-                    <a:solidFill>
-                      <a:srgbClr val="FFFFFF"/>
-                    </a:solidFill>
-                  </a:tcPr>
-                </a:tc>
-              </a:tr>
-              <a:tr h="402336">
-                <a:tc>
-                  <a:txBody>
-                    <a:bodyPr/>
-                    <a:lstStyle/>
-                    <a:p>
-                      <a:pPr indent="0" marL="0">
-                        <a:buNone/>
-                      </a:pPr>
-                      <a:r>
-                        <a:rPr lang="en-US" sz="1300" dirty="0">
-                          <a:solidFill>
-                            <a:srgbClr val="14302B"/>
-                          </a:solidFill>
-                          <a:latin typeface="Calibri" pitchFamily="34" charset="0"/>
-                          <a:ea typeface="Calibri" pitchFamily="34" charset="-122"/>
-                          <a:cs typeface="Calibri" pitchFamily="34" charset="-120"/>
-                        </a:rPr>
-                        <a:t>Regresi logistik, Youden</a:t>
-                      </a:r>
-                      <a:endParaRPr lang="en-US" sz="1300" dirty="0">
-                        <a:latin typeface="Calibri" charset="0"/>
-                        <a:ea typeface="Calibri" charset="0"/>
-                        <a:cs typeface="Calibri" charset="0"/>
-                      </a:endParaRPr>
-                    </a:p>
-                  </a:txBody>
-                  <a:tcPr marL="82296" marR="82296" marT="82296" marB="82296" anchor="ctr">
-                    <a:lnL w="12700" cap="flat" cmpd="sng" algn="ctr">
-                      <a:solidFill>
-                        <a:srgbClr val="DBE4E1"/>
-                      </a:solidFill>
-                      <a:prstDash val="solid"/>
-                      <a:round/>
-                      <a:headEnd type="none" w="med" len="med"/>
-                      <a:tailEnd type="none" w="med" len="med"/>
-                    </a:lnL>
-                    <a:lnR w="12700" cap="flat" cmpd="sng" algn="ctr">
-                      <a:solidFill>
-                        <a:srgbClr val="DBE4E1"/>
-                      </a:solidFill>
-                      <a:prstDash val="solid"/>
-                      <a:round/>
-                      <a:headEnd type="none" w="med" len="med"/>
-                      <a:tailEnd type="none" w="med" len="med"/>
-                    </a:lnR>
-                    <a:lnT w="12700" cap="flat" cmpd="sng" algn="ctr">
-                      <a:solidFill>
-                        <a:srgbClr val="DBE4E1"/>
-                      </a:solidFill>
-                      <a:prstDash val="solid"/>
-                      <a:round/>
-                      <a:headEnd type="none" w="med" len="med"/>
-                      <a:tailEnd type="none" w="med" len="med"/>
-                    </a:lnT>
-                    <a:lnB w="12700" cap="flat" cmpd="sng" algn="ctr">
-                      <a:solidFill>
-                        <a:srgbClr val="DBE4E1"/>
-                      </a:solidFill>
-                      <a:prstDash val="solid"/>
-                      <a:round/>
-                      <a:headEnd type="none" w="med" len="med"/>
-                      <a:tailEnd type="none" w="med" len="med"/>
-                    </a:lnB>
-                    <a:solidFill>
-                      <a:srgbClr val="FFFFFF"/>
-                    </a:solidFill>
-                  </a:tcPr>
-                </a:tc>
-                <a:tc>
-                  <a:txBody>
-                    <a:bodyPr/>
-                    <a:lstStyle/>
-                    <a:p>
-                      <a:pPr indent="0" marL="0">
-                        <a:buNone/>
-                      </a:pPr>
-                      <a:r>
-                        <a:rPr lang="en-US" sz="1300" dirty="0">
-                          <a:solidFill>
-                            <a:srgbClr val="14302B"/>
-                          </a:solidFill>
-                          <a:latin typeface="Calibri" pitchFamily="34" charset="0"/>
-                          <a:ea typeface="Calibri" pitchFamily="34" charset="-122"/>
-                          <a:cs typeface="Calibri" pitchFamily="34" charset="-120"/>
-                        </a:rPr>
-                        <a:t>0,731</a:t>
-                      </a:r>
-                      <a:endParaRPr lang="en-US" sz="1300" dirty="0">
-                        <a:latin typeface="Calibri" charset="0"/>
-                        <a:ea typeface="Calibri" charset="0"/>
-                        <a:cs typeface="Calibri" charset="0"/>
-                      </a:endParaRPr>
-                    </a:p>
-                  </a:txBody>
-                  <a:tcPr marL="82296" marR="82296" marT="82296" marB="82296" anchor="ctr">
-                    <a:lnL w="12700" cap="flat" cmpd="sng" algn="ctr">
-                      <a:solidFill>
-                        <a:srgbClr val="DBE4E1"/>
-                      </a:solidFill>
-                      <a:prstDash val="solid"/>
-                      <a:round/>
-                      <a:headEnd type="none" w="med" len="med"/>
-                      <a:tailEnd type="none" w="med" len="med"/>
-                    </a:lnL>
-                    <a:lnR w="12700" cap="flat" cmpd="sng" algn="ctr">
-                      <a:solidFill>
-                        <a:srgbClr val="DBE4E1"/>
-                      </a:solidFill>
-                      <a:prstDash val="solid"/>
-                      <a:round/>
-                      <a:headEnd type="none" w="med" len="med"/>
-                      <a:tailEnd type="none" w="med" len="med"/>
-                    </a:lnR>
-                    <a:lnT w="12700" cap="flat" cmpd="sng" algn="ctr">
-                      <a:solidFill>
-                        <a:srgbClr val="DBE4E1"/>
-                      </a:solidFill>
-                      <a:prstDash val="solid"/>
-                      <a:round/>
-                      <a:headEnd type="none" w="med" len="med"/>
-                      <a:tailEnd type="none" w="med" len="med"/>
-                    </a:lnT>
-                    <a:lnB w="12700" cap="flat" cmpd="sng" algn="ctr">
-                      <a:solidFill>
-                        <a:srgbClr val="DBE4E1"/>
-                      </a:solidFill>
-                      <a:prstDash val="solid"/>
-                      <a:round/>
-                      <a:headEnd type="none" w="med" len="med"/>
-                      <a:tailEnd type="none" w="med" len="med"/>
-                    </a:lnB>
-                    <a:solidFill>
-                      <a:srgbClr val="FFFFFF"/>
-                    </a:solidFill>
-                  </a:tcPr>
-                </a:tc>
-                <a:tc>
-                  <a:txBody>
-                    <a:bodyPr/>
-                    <a:lstStyle/>
-                    <a:p>
-                      <a:pPr indent="0" marL="0">
-                        <a:buNone/>
-                      </a:pPr>
-                      <a:r>
-                        <a:rPr lang="en-US" sz="1300" dirty="0">
-                          <a:solidFill>
-                            <a:srgbClr val="14302B"/>
-                          </a:solidFill>
-                          <a:latin typeface="Calibri" pitchFamily="34" charset="0"/>
-                          <a:ea typeface="Calibri" pitchFamily="34" charset="-122"/>
-                          <a:cs typeface="Calibri" pitchFamily="34" charset="-120"/>
-                        </a:rPr>
-                        <a:t>0,821</a:t>
-                      </a:r>
-                      <a:endParaRPr lang="en-US" sz="1300" dirty="0">
-                        <a:latin typeface="Calibri" charset="0"/>
-                        <a:ea typeface="Calibri" charset="0"/>
-                        <a:cs typeface="Calibri" charset="0"/>
-                      </a:endParaRPr>
-                    </a:p>
-                  </a:txBody>
-                  <a:tcPr marL="82296" marR="82296" marT="82296" marB="82296" anchor="ctr">
-                    <a:lnL w="12700" cap="flat" cmpd="sng" algn="ctr">
-                      <a:solidFill>
-                        <a:srgbClr val="DBE4E1"/>
-                      </a:solidFill>
-                      <a:prstDash val="solid"/>
-                      <a:round/>
-                      <a:headEnd type="none" w="med" len="med"/>
-                      <a:tailEnd type="none" w="med" len="med"/>
-                    </a:lnL>
-                    <a:lnR w="12700" cap="flat" cmpd="sng" algn="ctr">
-                      <a:solidFill>
-                        <a:srgbClr val="DBE4E1"/>
-                      </a:solidFill>
-                      <a:prstDash val="solid"/>
-                      <a:round/>
-                      <a:headEnd type="none" w="med" len="med"/>
-                      <a:tailEnd type="none" w="med" len="med"/>
-                    </a:lnR>
-                    <a:lnT w="12700" cap="flat" cmpd="sng" algn="ctr">
-                      <a:solidFill>
-                        <a:srgbClr val="DBE4E1"/>
-                      </a:solidFill>
-                      <a:prstDash val="solid"/>
-                      <a:round/>
-                      <a:headEnd type="none" w="med" len="med"/>
-                      <a:tailEnd type="none" w="med" len="med"/>
-                    </a:lnT>
-                    <a:lnB w="12700" cap="flat" cmpd="sng" algn="ctr">
-                      <a:solidFill>
-                        <a:srgbClr val="DBE4E1"/>
-                      </a:solidFill>
-                      <a:prstDash val="solid"/>
-                      <a:round/>
-                      <a:headEnd type="none" w="med" len="med"/>
-                      <a:tailEnd type="none" w="med" len="med"/>
-                    </a:lnB>
-                    <a:solidFill>
-                      <a:srgbClr val="FFFFFF"/>
-                    </a:solidFill>
-                  </a:tcPr>
-                </a:tc>
-                <a:tc>
-                  <a:txBody>
-                    <a:bodyPr/>
-                    <a:lstStyle/>
-                    <a:p>
-                      <a:pPr indent="0" marL="0">
-                        <a:buNone/>
-                      </a:pPr>
-                      <a:r>
-                        <a:rPr lang="en-US" sz="1300" dirty="0">
-                          <a:solidFill>
-                            <a:srgbClr val="14302B"/>
-                          </a:solidFill>
-                          <a:latin typeface="Calibri" pitchFamily="34" charset="0"/>
-                          <a:ea typeface="Calibri" pitchFamily="34" charset="-122"/>
-                          <a:cs typeface="Calibri" pitchFamily="34" charset="-120"/>
-                        </a:rPr>
-                        <a:t>18,4%</a:t>
-                      </a:r>
-                      <a:endParaRPr lang="en-US" sz="1300" dirty="0">
-                        <a:latin typeface="Calibri" charset="0"/>
-                        <a:ea typeface="Calibri" charset="0"/>
-                        <a:cs typeface="Calibri" charset="0"/>
-                      </a:endParaRPr>
-                    </a:p>
-                  </a:txBody>
-                  <a:tcPr marL="82296" marR="82296" marT="82296" marB="82296" anchor="ctr">
-                    <a:lnL w="12700" cap="flat" cmpd="sng" algn="ctr">
-                      <a:solidFill>
-                        <a:srgbClr val="DBE4E1"/>
-                      </a:solidFill>
-                      <a:prstDash val="solid"/>
-                      <a:round/>
-                      <a:headEnd type="none" w="med" len="med"/>
-                      <a:tailEnd type="none" w="med" len="med"/>
-                    </a:lnL>
-                    <a:lnR w="12700" cap="flat" cmpd="sng" algn="ctr">
-                      <a:solidFill>
-                        <a:srgbClr val="DBE4E1"/>
-                      </a:solidFill>
-                      <a:prstDash val="solid"/>
-                      <a:round/>
-                      <a:headEnd type="none" w="med" len="med"/>
-                      <a:tailEnd type="none" w="med" len="med"/>
-                    </a:lnR>
-                    <a:lnT w="12700" cap="flat" cmpd="sng" algn="ctr">
-                      <a:solidFill>
-                        <a:srgbClr val="DBE4E1"/>
-                      </a:solidFill>
-                      <a:prstDash val="solid"/>
-                      <a:round/>
-                      <a:headEnd type="none" w="med" len="med"/>
-                      <a:tailEnd type="none" w="med" len="med"/>
-                    </a:lnT>
-                    <a:lnB w="12700" cap="flat" cmpd="sng" algn="ctr">
-                      <a:solidFill>
-                        <a:srgbClr val="DBE4E1"/>
-                      </a:solidFill>
-                      <a:prstDash val="solid"/>
-                      <a:round/>
-                      <a:headEnd type="none" w="med" len="med"/>
-                      <a:tailEnd type="none" w="med" len="med"/>
-                    </a:lnB>
-                    <a:solidFill>
-                      <a:srgbClr val="FFFFFF"/>
-                    </a:solidFill>
-                  </a:tcPr>
-                </a:tc>
-                <a:tc>
-                  <a:txBody>
-                    <a:bodyPr/>
-                    <a:lstStyle/>
-                    <a:p>
-                      <a:pPr indent="0" marL="0">
-                        <a:buNone/>
-                      </a:pPr>
-                      <a:r>
-                        <a:rPr lang="en-US" sz="1300" dirty="0">
-                          <a:solidFill>
-                            <a:srgbClr val="14302B"/>
-                          </a:solidFill>
-                          <a:latin typeface="Calibri" pitchFamily="34" charset="0"/>
-                          <a:ea typeface="Calibri" pitchFamily="34" charset="-122"/>
-                          <a:cs typeface="Calibri" pitchFamily="34" charset="-120"/>
-                        </a:rPr>
-                        <a:t>25,2</a:t>
-                      </a:r>
-                      <a:endParaRPr lang="en-US" sz="1300" dirty="0">
-                        <a:latin typeface="Calibri" charset="0"/>
-                        <a:ea typeface="Calibri" charset="0"/>
-                        <a:cs typeface="Calibri" charset="0"/>
-                      </a:endParaRPr>
-                    </a:p>
-                  </a:txBody>
-                  <a:tcPr marL="82296" marR="82296" marT="82296" marB="82296" anchor="ctr">
-                    <a:lnL w="12700" cap="flat" cmpd="sng" algn="ctr">
-                      <a:solidFill>
-                        <a:srgbClr val="DBE4E1"/>
-                      </a:solidFill>
-                      <a:prstDash val="solid"/>
-                      <a:round/>
-                      <a:headEnd type="none" w="med" len="med"/>
-                      <a:tailEnd type="none" w="med" len="med"/>
-                    </a:lnL>
-                    <a:lnR w="12700" cap="flat" cmpd="sng" algn="ctr">
-                      <a:solidFill>
-                        <a:srgbClr val="DBE4E1"/>
-                      </a:solidFill>
-                      <a:prstDash val="solid"/>
-                      <a:round/>
-                      <a:headEnd type="none" w="med" len="med"/>
-                      <a:tailEnd type="none" w="med" len="med"/>
-                    </a:lnR>
-                    <a:lnT w="12700" cap="flat" cmpd="sng" algn="ctr">
-                      <a:solidFill>
-                        <a:srgbClr val="DBE4E1"/>
-                      </a:solidFill>
-                      <a:prstDash val="solid"/>
-                      <a:round/>
-                      <a:headEnd type="none" w="med" len="med"/>
-                      <a:tailEnd type="none" w="med" len="med"/>
-                    </a:lnT>
-                    <a:lnB w="12700" cap="flat" cmpd="sng" algn="ctr">
-                      <a:solidFill>
-                        <a:srgbClr val="DBE4E1"/>
-                      </a:solidFill>
-                      <a:prstDash val="solid"/>
-                      <a:round/>
-                      <a:headEnd type="none" w="med" len="med"/>
-                      <a:tailEnd type="none" w="med" len="med"/>
-                    </a:lnB>
-                    <a:solidFill>
-                      <a:srgbClr val="FFFFFF"/>
-                    </a:solidFill>
-                  </a:tcPr>
-                </a:tc>
-              </a:tr>
-              <a:tr h="402336">
-                <a:tc>
-                  <a:txBody>
-                    <a:bodyPr/>
-                    <a:lstStyle/>
-                    <a:p>
-                      <a:pPr indent="0" marL="0">
-                        <a:buNone/>
-                      </a:pPr>
-                      <a:r>
-                        <a:rPr lang="en-US" sz="1300" b="1" dirty="0">
-                          <a:solidFill>
-                            <a:srgbClr val="0D8271"/>
-                          </a:solidFill>
-                          <a:latin typeface="Calibri" pitchFamily="34" charset="0"/>
-                          <a:ea typeface="Calibri" pitchFamily="34" charset="-122"/>
-                          <a:cs typeface="Calibri" pitchFamily="34" charset="-120"/>
-                        </a:rPr>
-                        <a:t>GeoPref 69% — yang dipakai</a:t>
-                      </a:r>
-                      <a:endParaRPr lang="en-US" sz="1300" dirty="0">
-                        <a:latin typeface="Calibri" charset="0"/>
-                        <a:ea typeface="Calibri" charset="0"/>
-                        <a:cs typeface="Calibri" charset="0"/>
-                      </a:endParaRPr>
-                    </a:p>
-                  </a:txBody>
-                  <a:tcPr marL="82296" marR="82296" marT="82296" marB="82296" anchor="ctr">
-                    <a:lnL w="12700" cap="flat" cmpd="sng" algn="ctr">
-                      <a:solidFill>
-                        <a:srgbClr val="DBE4E1"/>
-                      </a:solidFill>
-                      <a:prstDash val="solid"/>
-                      <a:round/>
-                      <a:headEnd type="none" w="med" len="med"/>
-                      <a:tailEnd type="none" w="med" len="med"/>
-                    </a:lnL>
-                    <a:lnR w="12700" cap="flat" cmpd="sng" algn="ctr">
-                      <a:solidFill>
-                        <a:srgbClr val="DBE4E1"/>
-                      </a:solidFill>
-                      <a:prstDash val="solid"/>
-                      <a:round/>
-                      <a:headEnd type="none" w="med" len="med"/>
-                      <a:tailEnd type="none" w="med" len="med"/>
-                    </a:lnR>
-                    <a:lnT w="12700" cap="flat" cmpd="sng" algn="ctr">
-                      <a:solidFill>
-                        <a:srgbClr val="DBE4E1"/>
-                      </a:solidFill>
-                      <a:prstDash val="solid"/>
-                      <a:round/>
-                      <a:headEnd type="none" w="med" len="med"/>
-                      <a:tailEnd type="none" w="med" len="med"/>
-                    </a:lnT>
-                    <a:lnB w="12700" cap="flat" cmpd="sng" algn="ctr">
-                      <a:solidFill>
-                        <a:srgbClr val="DBE4E1"/>
-                      </a:solidFill>
-                      <a:prstDash val="solid"/>
-                      <a:round/>
-                      <a:headEnd type="none" w="med" len="med"/>
-                      <a:tailEnd type="none" w="med" len="med"/>
-                    </a:lnB>
-                    <a:solidFill>
-                      <a:srgbClr val="FFFFFF"/>
-                    </a:solidFill>
-                  </a:tcPr>
-                </a:tc>
-                <a:tc>
-                  <a:txBody>
-                    <a:bodyPr/>
-                    <a:lstStyle/>
-                    <a:p>
-                      <a:pPr indent="0" marL="0">
-                        <a:buNone/>
-                      </a:pPr>
-                      <a:r>
-                        <a:rPr lang="en-US" sz="1300" b="1" dirty="0">
-                          <a:solidFill>
-                            <a:srgbClr val="0D8271"/>
-                          </a:solidFill>
-                          <a:latin typeface="Calibri" pitchFamily="34" charset="0"/>
-                          <a:ea typeface="Calibri" pitchFamily="34" charset="-122"/>
-                          <a:cs typeface="Calibri" pitchFamily="34" charset="-120"/>
-                        </a:rPr>
-                        <a:t>0,170</a:t>
-                      </a:r>
-                      <a:endParaRPr lang="en-US" sz="1300" dirty="0">
-                        <a:latin typeface="Calibri" charset="0"/>
-                        <a:ea typeface="Calibri" charset="0"/>
-                        <a:cs typeface="Calibri" charset="0"/>
-                      </a:endParaRPr>
-                    </a:p>
-                  </a:txBody>
-                  <a:tcPr marL="82296" marR="82296" marT="82296" marB="82296" anchor="ctr">
-                    <a:lnL w="12700" cap="flat" cmpd="sng" algn="ctr">
-                      <a:solidFill>
-                        <a:srgbClr val="DBE4E1"/>
-                      </a:solidFill>
-                      <a:prstDash val="solid"/>
-                      <a:round/>
-                      <a:headEnd type="none" w="med" len="med"/>
-                      <a:tailEnd type="none" w="med" len="med"/>
-                    </a:lnL>
-                    <a:lnR w="12700" cap="flat" cmpd="sng" algn="ctr">
-                      <a:solidFill>
-                        <a:srgbClr val="DBE4E1"/>
-                      </a:solidFill>
-                      <a:prstDash val="solid"/>
-                      <a:round/>
-                      <a:headEnd type="none" w="med" len="med"/>
-                      <a:tailEnd type="none" w="med" len="med"/>
-                    </a:lnR>
-                    <a:lnT w="12700" cap="flat" cmpd="sng" algn="ctr">
-                      <a:solidFill>
-                        <a:srgbClr val="DBE4E1"/>
-                      </a:solidFill>
-                      <a:prstDash val="solid"/>
-                      <a:round/>
-                      <a:headEnd type="none" w="med" len="med"/>
-                      <a:tailEnd type="none" w="med" len="med"/>
-                    </a:lnT>
-                    <a:lnB w="12700" cap="flat" cmpd="sng" algn="ctr">
-                      <a:solidFill>
-                        <a:srgbClr val="DBE4E1"/>
-                      </a:solidFill>
-                      <a:prstDash val="solid"/>
-                      <a:round/>
-                      <a:headEnd type="none" w="med" len="med"/>
-                      <a:tailEnd type="none" w="med" len="med"/>
-                    </a:lnB>
-                    <a:solidFill>
-                      <a:srgbClr val="FFFFFF"/>
-                    </a:solidFill>
-                  </a:tcPr>
-                </a:tc>
-                <a:tc>
-                  <a:txBody>
-                    <a:bodyPr/>
-                    <a:lstStyle/>
-                    <a:p>
-                      <a:pPr indent="0" marL="0">
-                        <a:buNone/>
-                      </a:pPr>
-                      <a:r>
-                        <a:rPr lang="en-US" sz="1300" b="1" dirty="0">
-                          <a:solidFill>
-                            <a:srgbClr val="0D8271"/>
-                          </a:solidFill>
-                          <a:latin typeface="Calibri" pitchFamily="34" charset="0"/>
-                          <a:ea typeface="Calibri" pitchFamily="34" charset="-122"/>
-                          <a:cs typeface="Calibri" pitchFamily="34" charset="-120"/>
-                        </a:rPr>
-                        <a:t>0,980</a:t>
-                      </a:r>
-                      <a:endParaRPr lang="en-US" sz="1300" dirty="0">
-                        <a:latin typeface="Calibri" charset="0"/>
-                        <a:ea typeface="Calibri" charset="0"/>
-                        <a:cs typeface="Calibri" charset="0"/>
-                      </a:endParaRPr>
-                    </a:p>
-                  </a:txBody>
-                  <a:tcPr marL="82296" marR="82296" marT="82296" marB="82296" anchor="ctr">
-                    <a:lnL w="12700" cap="flat" cmpd="sng" algn="ctr">
-                      <a:solidFill>
-                        <a:srgbClr val="DBE4E1"/>
-                      </a:solidFill>
-                      <a:prstDash val="solid"/>
-                      <a:round/>
-                      <a:headEnd type="none" w="med" len="med"/>
-                      <a:tailEnd type="none" w="med" len="med"/>
-                    </a:lnL>
-                    <a:lnR w="12700" cap="flat" cmpd="sng" algn="ctr">
-                      <a:solidFill>
-                        <a:srgbClr val="DBE4E1"/>
-                      </a:solidFill>
-                      <a:prstDash val="solid"/>
-                      <a:round/>
-                      <a:headEnd type="none" w="med" len="med"/>
-                      <a:tailEnd type="none" w="med" len="med"/>
-                    </a:lnR>
-                    <a:lnT w="12700" cap="flat" cmpd="sng" algn="ctr">
-                      <a:solidFill>
-                        <a:srgbClr val="DBE4E1"/>
-                      </a:solidFill>
-                      <a:prstDash val="solid"/>
-                      <a:round/>
-                      <a:headEnd type="none" w="med" len="med"/>
-                      <a:tailEnd type="none" w="med" len="med"/>
-                    </a:lnT>
-                    <a:lnB w="12700" cap="flat" cmpd="sng" algn="ctr">
-                      <a:solidFill>
-                        <a:srgbClr val="DBE4E1"/>
-                      </a:solidFill>
-                      <a:prstDash val="solid"/>
-                      <a:round/>
-                      <a:headEnd type="none" w="med" len="med"/>
-                      <a:tailEnd type="none" w="med" len="med"/>
-                    </a:lnB>
-                    <a:solidFill>
-                      <a:srgbClr val="FFFFFF"/>
-                    </a:solidFill>
-                  </a:tcPr>
-                </a:tc>
-                <a:tc>
-                  <a:txBody>
-                    <a:bodyPr/>
-                    <a:lstStyle/>
-                    <a:p>
-                      <a:pPr indent="0" marL="0">
-                        <a:buNone/>
-                      </a:pPr>
-                      <a:r>
-                        <a:rPr lang="en-US" sz="1300" b="1" dirty="0">
-                          <a:solidFill>
-                            <a:srgbClr val="0D8271"/>
-                          </a:solidFill>
-                          <a:latin typeface="Calibri" pitchFamily="34" charset="0"/>
-                          <a:ea typeface="Calibri" pitchFamily="34" charset="-122"/>
-                          <a:cs typeface="Calibri" pitchFamily="34" charset="-120"/>
-                        </a:rPr>
-                        <a:t>2,2%</a:t>
-                      </a:r>
-                      <a:endParaRPr lang="en-US" sz="1300" dirty="0">
-                        <a:latin typeface="Calibri" charset="0"/>
-                        <a:ea typeface="Calibri" charset="0"/>
-                        <a:cs typeface="Calibri" charset="0"/>
-                      </a:endParaRPr>
-                    </a:p>
-                  </a:txBody>
-                  <a:tcPr marL="82296" marR="82296" marT="82296" marB="82296" anchor="ctr">
-                    <a:lnL w="12700" cap="flat" cmpd="sng" algn="ctr">
-                      <a:solidFill>
-                        <a:srgbClr val="DBE4E1"/>
-                      </a:solidFill>
-                      <a:prstDash val="solid"/>
-                      <a:round/>
-                      <a:headEnd type="none" w="med" len="med"/>
-                      <a:tailEnd type="none" w="med" len="med"/>
-                    </a:lnL>
-                    <a:lnR w="12700" cap="flat" cmpd="sng" algn="ctr">
-                      <a:solidFill>
-                        <a:srgbClr val="DBE4E1"/>
-                      </a:solidFill>
-                      <a:prstDash val="solid"/>
-                      <a:round/>
-                      <a:headEnd type="none" w="med" len="med"/>
-                      <a:tailEnd type="none" w="med" len="med"/>
-                    </a:lnR>
-                    <a:lnT w="12700" cap="flat" cmpd="sng" algn="ctr">
-                      <a:solidFill>
-                        <a:srgbClr val="DBE4E1"/>
-                      </a:solidFill>
-                      <a:prstDash val="solid"/>
-                      <a:round/>
-                      <a:headEnd type="none" w="med" len="med"/>
-                      <a:tailEnd type="none" w="med" len="med"/>
-                    </a:lnT>
-                    <a:lnB w="12700" cap="flat" cmpd="sng" algn="ctr">
-                      <a:solidFill>
-                        <a:srgbClr val="DBE4E1"/>
-                      </a:solidFill>
-                      <a:prstDash val="solid"/>
-                      <a:round/>
-                      <a:headEnd type="none" w="med" len="med"/>
-                      <a:tailEnd type="none" w="med" len="med"/>
-                    </a:lnB>
-                    <a:solidFill>
-                      <a:srgbClr val="FFFFFF"/>
-                    </a:solidFill>
-                  </a:tcPr>
-                </a:tc>
-                <a:tc>
-                  <a:txBody>
-                    <a:bodyPr/>
-                    <a:lstStyle/>
-                    <a:p>
-                      <a:pPr indent="0" marL="0">
-                        <a:buNone/>
-                      </a:pPr>
-                      <a:r>
-                        <a:rPr lang="en-US" sz="1300" b="1" dirty="0">
-                          <a:solidFill>
-                            <a:srgbClr val="0D8271"/>
-                          </a:solidFill>
-                          <a:latin typeface="Calibri" pitchFamily="34" charset="0"/>
-                          <a:ea typeface="Calibri" pitchFamily="34" charset="-122"/>
-                          <a:cs typeface="Calibri" pitchFamily="34" charset="-120"/>
-                        </a:rPr>
-                        <a:t>12,6</a:t>
-                      </a:r>
-                      <a:endParaRPr lang="en-US" sz="1300" dirty="0">
-                        <a:latin typeface="Calibri" charset="0"/>
-                        <a:ea typeface="Calibri" charset="0"/>
-                        <a:cs typeface="Calibri" charset="0"/>
-                      </a:endParaRPr>
-                    </a:p>
-                  </a:txBody>
-                  <a:tcPr marL="82296" marR="82296" marT="82296" marB="82296" anchor="ctr">
-                    <a:lnL w="12700" cap="flat" cmpd="sng" algn="ctr">
-                      <a:solidFill>
-                        <a:srgbClr val="DBE4E1"/>
-                      </a:solidFill>
-                      <a:prstDash val="solid"/>
-                      <a:round/>
-                      <a:headEnd type="none" w="med" len="med"/>
-                      <a:tailEnd type="none" w="med" len="med"/>
-                    </a:lnL>
-                    <a:lnR w="12700" cap="flat" cmpd="sng" algn="ctr">
-                      <a:solidFill>
-                        <a:srgbClr val="DBE4E1"/>
-                      </a:solidFill>
-                      <a:prstDash val="solid"/>
-                      <a:round/>
-                      <a:headEnd type="none" w="med" len="med"/>
-                      <a:tailEnd type="none" w="med" len="med"/>
-                    </a:lnR>
-                    <a:lnT w="12700" cap="flat" cmpd="sng" algn="ctr">
-                      <a:solidFill>
-                        <a:srgbClr val="DBE4E1"/>
-                      </a:solidFill>
-                      <a:prstDash val="solid"/>
-                      <a:round/>
-                      <a:headEnd type="none" w="med" len="med"/>
-                      <a:tailEnd type="none" w="med" len="med"/>
-                    </a:lnT>
-                    <a:lnB w="12700" cap="flat" cmpd="sng" algn="ctr">
-                      <a:solidFill>
-                        <a:srgbClr val="DBE4E1"/>
-                      </a:solidFill>
-                      <a:prstDash val="solid"/>
-                      <a:round/>
-                      <a:headEnd type="none" w="med" len="med"/>
-                      <a:tailEnd type="none" w="med" len="med"/>
-                    </a:lnB>
-                    <a:solidFill>
-                      <a:srgbClr val="FFFFFF"/>
-                    </a:solidFill>
-                  </a:tcPr>
-                </a:tc>
-              </a:tr>
-              <a:tr h="402336">
-                <a:tc>
-                  <a:txBody>
-                    <a:bodyPr/>
-                    <a:lstStyle/>
-                    <a:p>
-                      <a:pPr indent="0" marL="0">
-                        <a:buNone/>
-                      </a:pPr>
-                      <a:r>
-                        <a:rPr lang="en-US" sz="1300" dirty="0">
-                          <a:solidFill>
-                            <a:srgbClr val="14302B"/>
-                          </a:solidFill>
-                          <a:latin typeface="Calibri" pitchFamily="34" charset="0"/>
-                          <a:ea typeface="Calibri" pitchFamily="34" charset="-122"/>
-                          <a:cs typeface="Calibri" pitchFamily="34" charset="-120"/>
-                        </a:rPr>
-                        <a:t>Target Gate C (preseden tablet)</a:t>
-                      </a:r>
-                      <a:endParaRPr lang="en-US" sz="1300" dirty="0">
-                        <a:latin typeface="Calibri" charset="0"/>
-                        <a:ea typeface="Calibri" charset="0"/>
-                        <a:cs typeface="Calibri" charset="0"/>
-                      </a:endParaRPr>
-                    </a:p>
-                  </a:txBody>
-                  <a:tcPr marL="82296" marR="82296" marT="82296" marB="82296" anchor="ctr">
-                    <a:lnL w="12700" cap="flat" cmpd="sng" algn="ctr">
-                      <a:solidFill>
-                        <a:srgbClr val="DBE4E1"/>
-                      </a:solidFill>
-                      <a:prstDash val="solid"/>
-                      <a:round/>
-                      <a:headEnd type="none" w="med" len="med"/>
-                      <a:tailEnd type="none" w="med" len="med"/>
-                    </a:lnL>
-                    <a:lnR w="12700" cap="flat" cmpd="sng" algn="ctr">
-                      <a:solidFill>
-                        <a:srgbClr val="DBE4E1"/>
-                      </a:solidFill>
-                      <a:prstDash val="solid"/>
-                      <a:round/>
-                      <a:headEnd type="none" w="med" len="med"/>
-                      <a:tailEnd type="none" w="med" len="med"/>
-                    </a:lnR>
-                    <a:lnT w="12700" cap="flat" cmpd="sng" algn="ctr">
-                      <a:solidFill>
-                        <a:srgbClr val="DBE4E1"/>
-                      </a:solidFill>
-                      <a:prstDash val="solid"/>
-                      <a:round/>
-                      <a:headEnd type="none" w="med" len="med"/>
-                      <a:tailEnd type="none" w="med" len="med"/>
-                    </a:lnT>
-                    <a:lnB w="12700" cap="flat" cmpd="sng" algn="ctr">
-                      <a:solidFill>
-                        <a:srgbClr val="DBE4E1"/>
-                      </a:solidFill>
-                      <a:prstDash val="solid"/>
-                      <a:round/>
-                      <a:headEnd type="none" w="med" len="med"/>
-                      <a:tailEnd type="none" w="med" len="med"/>
-                    </a:lnB>
-                    <a:solidFill>
-                      <a:srgbClr val="FFFFFF"/>
-                    </a:solidFill>
-                  </a:tcPr>
-                </a:tc>
-                <a:tc>
-                  <a:txBody>
-                    <a:bodyPr/>
-                    <a:lstStyle/>
-                    <a:p>
-                      <a:pPr indent="0" marL="0">
-                        <a:buNone/>
-                      </a:pPr>
-                      <a:r>
-                        <a:rPr lang="en-US" sz="1300" dirty="0">
-                          <a:solidFill>
-                            <a:srgbClr val="14302B"/>
-                          </a:solidFill>
-                          <a:latin typeface="Calibri" pitchFamily="34" charset="0"/>
-                          <a:ea typeface="Calibri" pitchFamily="34" charset="-122"/>
-                          <a:cs typeface="Calibri" pitchFamily="34" charset="-120"/>
-                        </a:rPr>
-                        <a:t>0,878</a:t>
-                      </a:r>
-                      <a:endParaRPr lang="en-US" sz="1300" dirty="0">
-                        <a:latin typeface="Calibri" charset="0"/>
-                        <a:ea typeface="Calibri" charset="0"/>
-                        <a:cs typeface="Calibri" charset="0"/>
-                      </a:endParaRPr>
-                    </a:p>
-                  </a:txBody>
-                  <a:tcPr marL="82296" marR="82296" marT="82296" marB="82296" anchor="ctr">
-                    <a:lnL w="12700" cap="flat" cmpd="sng" algn="ctr">
-                      <a:solidFill>
-                        <a:srgbClr val="DBE4E1"/>
-                      </a:solidFill>
-                      <a:prstDash val="solid"/>
-                      <a:round/>
-                      <a:headEnd type="none" w="med" len="med"/>
-                      <a:tailEnd type="none" w="med" len="med"/>
-                    </a:lnL>
-                    <a:lnR w="12700" cap="flat" cmpd="sng" algn="ctr">
-                      <a:solidFill>
-                        <a:srgbClr val="DBE4E1"/>
-                      </a:solidFill>
-                      <a:prstDash val="solid"/>
-                      <a:round/>
-                      <a:headEnd type="none" w="med" len="med"/>
-                      <a:tailEnd type="none" w="med" len="med"/>
-                    </a:lnR>
-                    <a:lnT w="12700" cap="flat" cmpd="sng" algn="ctr">
-                      <a:solidFill>
-                        <a:srgbClr val="DBE4E1"/>
-                      </a:solidFill>
-                      <a:prstDash val="solid"/>
-                      <a:round/>
-                      <a:headEnd type="none" w="med" len="med"/>
-                      <a:tailEnd type="none" w="med" len="med"/>
-                    </a:lnT>
-                    <a:lnB w="12700" cap="flat" cmpd="sng" algn="ctr">
-                      <a:solidFill>
-                        <a:srgbClr val="DBE4E1"/>
-                      </a:solidFill>
-                      <a:prstDash val="solid"/>
-                      <a:round/>
-                      <a:headEnd type="none" w="med" len="med"/>
-                      <a:tailEnd type="none" w="med" len="med"/>
-                    </a:lnB>
-                    <a:solidFill>
-                      <a:srgbClr val="FFFFFF"/>
-                    </a:solidFill>
-                  </a:tcPr>
-                </a:tc>
-                <a:tc>
-                  <a:txBody>
-                    <a:bodyPr/>
-                    <a:lstStyle/>
-                    <a:p>
-                      <a:pPr indent="0" marL="0">
-                        <a:buNone/>
-                      </a:pPr>
-                      <a:r>
-                        <a:rPr lang="en-US" sz="1300" dirty="0">
-                          <a:solidFill>
-                            <a:srgbClr val="14302B"/>
-                          </a:solidFill>
-                          <a:latin typeface="Calibri" pitchFamily="34" charset="0"/>
-                          <a:ea typeface="Calibri" pitchFamily="34" charset="-122"/>
-                          <a:cs typeface="Calibri" pitchFamily="34" charset="-120"/>
-                        </a:rPr>
-                        <a:t>0,808</a:t>
-                      </a:r>
-                      <a:endParaRPr lang="en-US" sz="1300" dirty="0">
-                        <a:latin typeface="Calibri" charset="0"/>
-                        <a:ea typeface="Calibri" charset="0"/>
-                        <a:cs typeface="Calibri" charset="0"/>
-                      </a:endParaRPr>
-                    </a:p>
-                  </a:txBody>
-                  <a:tcPr marL="82296" marR="82296" marT="82296" marB="82296" anchor="ctr">
-                    <a:lnL w="12700" cap="flat" cmpd="sng" algn="ctr">
-                      <a:solidFill>
-                        <a:srgbClr val="DBE4E1"/>
-                      </a:solidFill>
-                      <a:prstDash val="solid"/>
-                      <a:round/>
-                      <a:headEnd type="none" w="med" len="med"/>
-                      <a:tailEnd type="none" w="med" len="med"/>
-                    </a:lnL>
-                    <a:lnR w="12700" cap="flat" cmpd="sng" algn="ctr">
-                      <a:solidFill>
-                        <a:srgbClr val="DBE4E1"/>
-                      </a:solidFill>
-                      <a:prstDash val="solid"/>
-                      <a:round/>
-                      <a:headEnd type="none" w="med" len="med"/>
-                      <a:tailEnd type="none" w="med" len="med"/>
-                    </a:lnR>
-                    <a:lnT w="12700" cap="flat" cmpd="sng" algn="ctr">
-                      <a:solidFill>
-                        <a:srgbClr val="DBE4E1"/>
-                      </a:solidFill>
-                      <a:prstDash val="solid"/>
-                      <a:round/>
-                      <a:headEnd type="none" w="med" len="med"/>
-                      <a:tailEnd type="none" w="med" len="med"/>
-                    </a:lnT>
-                    <a:lnB w="12700" cap="flat" cmpd="sng" algn="ctr">
-                      <a:solidFill>
-                        <a:srgbClr val="DBE4E1"/>
-                      </a:solidFill>
-                      <a:prstDash val="solid"/>
-                      <a:round/>
-                      <a:headEnd type="none" w="med" len="med"/>
-                      <a:tailEnd type="none" w="med" len="med"/>
-                    </a:lnB>
-                    <a:solidFill>
-                      <a:srgbClr val="FFFFFF"/>
-                    </a:solidFill>
-                  </a:tcPr>
-                </a:tc>
-                <a:tc>
-                  <a:txBody>
-                    <a:bodyPr/>
-                    <a:lstStyle/>
-                    <a:p>
-                      <a:pPr indent="0" marL="0">
-                        <a:buNone/>
-                      </a:pPr>
-                      <a:r>
-                        <a:rPr lang="en-US" sz="1300" dirty="0">
-                          <a:solidFill>
-                            <a:srgbClr val="14302B"/>
-                          </a:solidFill>
-                          <a:latin typeface="Calibri" pitchFamily="34" charset="0"/>
-                          <a:ea typeface="Calibri" pitchFamily="34" charset="-122"/>
-                          <a:cs typeface="Calibri" pitchFamily="34" charset="-120"/>
-                        </a:rPr>
-                        <a:t>19,9%</a:t>
-                      </a:r>
-                      <a:endParaRPr lang="en-US" sz="1300" dirty="0">
-                        <a:latin typeface="Calibri" charset="0"/>
-                        <a:ea typeface="Calibri" charset="0"/>
-                        <a:cs typeface="Calibri" charset="0"/>
-                      </a:endParaRPr>
-                    </a:p>
-                  </a:txBody>
-                  <a:tcPr marL="82296" marR="82296" marT="82296" marB="82296" anchor="ctr">
-                    <a:lnL w="12700" cap="flat" cmpd="sng" algn="ctr">
-                      <a:solidFill>
-                        <a:srgbClr val="DBE4E1"/>
-                      </a:solidFill>
-                      <a:prstDash val="solid"/>
-                      <a:round/>
-                      <a:headEnd type="none" w="med" len="med"/>
-                      <a:tailEnd type="none" w="med" len="med"/>
-                    </a:lnL>
-                    <a:lnR w="12700" cap="flat" cmpd="sng" algn="ctr">
-                      <a:solidFill>
-                        <a:srgbClr val="DBE4E1"/>
-                      </a:solidFill>
-                      <a:prstDash val="solid"/>
-                      <a:round/>
-                      <a:headEnd type="none" w="med" len="med"/>
-                      <a:tailEnd type="none" w="med" len="med"/>
-                    </a:lnR>
-                    <a:lnT w="12700" cap="flat" cmpd="sng" algn="ctr">
-                      <a:solidFill>
-                        <a:srgbClr val="DBE4E1"/>
-                      </a:solidFill>
-                      <a:prstDash val="solid"/>
-                      <a:round/>
-                      <a:headEnd type="none" w="med" len="med"/>
-                      <a:tailEnd type="none" w="med" len="med"/>
-                    </a:lnT>
-                    <a:lnB w="12700" cap="flat" cmpd="sng" algn="ctr">
-                      <a:solidFill>
-                        <a:srgbClr val="DBE4E1"/>
-                      </a:solidFill>
-                      <a:prstDash val="solid"/>
-                      <a:round/>
-                      <a:headEnd type="none" w="med" len="med"/>
-                      <a:tailEnd type="none" w="med" len="med"/>
-                    </a:lnB>
-                    <a:solidFill>
-                      <a:srgbClr val="FFFFFF"/>
-                    </a:solidFill>
-                  </a:tcPr>
-                </a:tc>
-                <a:tc>
-                  <a:txBody>
-                    <a:bodyPr/>
-                    <a:lstStyle/>
-                    <a:p>
-                      <a:pPr indent="0" marL="0">
-                        <a:buNone/>
-                      </a:pPr>
-                      <a:r>
-                        <a:rPr lang="en-US" sz="1300" dirty="0">
-                          <a:solidFill>
-                            <a:srgbClr val="14302B"/>
-                          </a:solidFill>
-                          <a:latin typeface="Calibri" pitchFamily="34" charset="0"/>
-                          <a:ea typeface="Calibri" pitchFamily="34" charset="-122"/>
-                          <a:cs typeface="Calibri" pitchFamily="34" charset="-120"/>
-                        </a:rPr>
-                        <a:t>22,6</a:t>
-                      </a:r>
-                      <a:endParaRPr lang="en-US" sz="1300" dirty="0">
-                        <a:latin typeface="Calibri" charset="0"/>
-                        <a:ea typeface="Calibri" charset="0"/>
-                        <a:cs typeface="Calibri" charset="0"/>
-                      </a:endParaRPr>
-                    </a:p>
-                  </a:txBody>
-                  <a:tcPr marL="82296" marR="82296" marT="82296" marB="82296" anchor="ctr">
-                    <a:lnL w="12700" cap="flat" cmpd="sng" algn="ctr">
-                      <a:solidFill>
-                        <a:srgbClr val="DBE4E1"/>
-                      </a:solidFill>
-                      <a:prstDash val="solid"/>
-                      <a:round/>
-                      <a:headEnd type="none" w="med" len="med"/>
-                      <a:tailEnd type="none" w="med" len="med"/>
-                    </a:lnL>
-                    <a:lnR w="12700" cap="flat" cmpd="sng" algn="ctr">
-                      <a:solidFill>
-                        <a:srgbClr val="DBE4E1"/>
-                      </a:solidFill>
-                      <a:prstDash val="solid"/>
-                      <a:round/>
-                      <a:headEnd type="none" w="med" len="med"/>
-                      <a:tailEnd type="none" w="med" len="med"/>
-                    </a:lnR>
-                    <a:lnT w="12700" cap="flat" cmpd="sng" algn="ctr">
-                      <a:solidFill>
-                        <a:srgbClr val="DBE4E1"/>
-                      </a:solidFill>
-                      <a:prstDash val="solid"/>
-                      <a:round/>
-                      <a:headEnd type="none" w="med" len="med"/>
-                      <a:tailEnd type="none" w="med" len="med"/>
-                    </a:lnT>
-                    <a:lnB w="12700" cap="flat" cmpd="sng" algn="ctr">
-                      <a:solidFill>
-                        <a:srgbClr val="DBE4E1"/>
-                      </a:solidFill>
-                      <a:prstDash val="solid"/>
-                      <a:round/>
-                      <a:headEnd type="none" w="med" len="med"/>
-                      <a:tailEnd type="none" w="med" len="med"/>
-                    </a:lnB>
-                    <a:solidFill>
-                      <a:srgbClr val="FFFFFF"/>
-                    </a:solidFill>
-                  </a:tcPr>
-                </a:tc>
-              </a:tr>
-            </a:tbl>
-          </a:graphicData>
-        </a:graphic>
-      </p:graphicFrame>
-      <p:sp>
-        <p:nvSpPr>
-          <p:cNvPr id="7" name="Shape 4"/>
-          <p:cNvSpPr/>
-          <p:nvPr/>
-        </p:nvSpPr>
-        <p:spPr>
-          <a:xfrm>
-            <a:off x="685800" y="4572000"/>
-            <a:ext cx="6766560" cy="1051560"/>
+      <p:sp>
+        <p:nvSpPr>
+          <p:cNvPr id="6" name="Shape 4"/>
+          <p:cNvSpPr/>
+          <p:nvPr/>
+        </p:nvSpPr>
+        <p:spPr>
+          <a:xfrm>
+            <a:off x="685800" y="2194560"/>
+            <a:ext cx="5760720" cy="2286000"/>
           </a:xfrm>
           <a:prstGeom prst="roundRect">
             <a:avLst>
-              <a:gd name="adj" fmla="val 5217"/>
+              <a:gd name="adj" fmla="val 2400"/>
             </a:avLst>
           </a:prstGeom>
           <a:solidFill>
-            <a:srgbClr val="FFFFFF"/>
+            <a:srgbClr val="0B1E1B"/>
           </a:solidFill>
           <a:ln w="12700">
             <a:solidFill>
-              <a:srgbClr val="DBE4E1"/>
+              <a:srgbClr val="0B1E1B"/>
             </a:solidFill>
             <a:prstDash val="solid"/>
           </a:ln>
@@ -12495,14 +13827,131 @@
       </p:sp>
       <p:sp>
         <p:nvSpPr>
-          <p:cNvPr id="8" name="Text 5"/>
-          <p:cNvSpPr/>
-          <p:nvPr/>
-        </p:nvSpPr>
-        <p:spPr>
-          <a:xfrm>
-            <a:off x="941832" y="4754880"/>
-            <a:ext cx="6309360" cy="731520"/>
+          <p:cNvPr id="7" name="Text 5"/>
+          <p:cNvSpPr/>
+          <p:nvPr/>
+        </p:nvSpPr>
+        <p:spPr>
+          <a:xfrm>
+            <a:off x="1051560" y="2487168"/>
+            <a:ext cx="5029200" cy="274320"/>
+          </a:xfrm>
+          <a:prstGeom prst="rect">
+            <a:avLst/>
+          </a:prstGeom>
+          <a:noFill/>
+          <a:ln/>
+        </p:spPr>
+        <p:txBody>
+          <a:bodyPr wrap="square" lIns="0" tIns="0" rIns="0" bIns="0" rtlCol="0" anchor="ctr"/>
+          <a:lstStyle/>
+          <a:p>
+            <a:pPr indent="0" marL="0">
+              <a:buNone/>
+            </a:pPr>
+            <a:r>
+              <a:rPr lang="en-US" sz="1150" b="1" spc="120" kern="0" dirty="0">
+                <a:solidFill>
+                  <a:srgbClr val="8CAEA5"/>
+                </a:solidFill>
+                <a:latin typeface="Calibri" pitchFamily="34" charset="0"/>
+                <a:ea typeface="Calibri" pitchFamily="34" charset="-122"/>
+                <a:cs typeface="Calibri" pitchFamily="34" charset="-120"/>
+              </a:rPr>
+              <a:t>PUTUSAN PENJAGA</a:t>
+            </a:r>
+            <a:endParaRPr lang="en-US" sz="1150" dirty="0"/>
+          </a:p>
+        </p:txBody>
+      </p:sp>
+      <p:sp>
+        <p:nvSpPr>
+          <p:cNvPr id="8" name="Text 6"/>
+          <p:cNvSpPr/>
+          <p:nvPr/>
+        </p:nvSpPr>
+        <p:spPr>
+          <a:xfrm>
+            <a:off x="1051560" y="2788920"/>
+            <a:ext cx="2743200" cy="548640"/>
+          </a:xfrm>
+          <a:prstGeom prst="rect">
+            <a:avLst/>
+          </a:prstGeom>
+          <a:noFill/>
+          <a:ln/>
+        </p:spPr>
+        <p:txBody>
+          <a:bodyPr wrap="square" lIns="0" tIns="0" rIns="0" bIns="0" rtlCol="0" anchor="ctr"/>
+          <a:lstStyle/>
+          <a:p>
+            <a:pPr indent="0" marL="0">
+              <a:buNone/>
+            </a:pPr>
+            <a:r>
+              <a:rPr lang="en-US" sz="3400" b="1" dirty="0">
+                <a:solidFill>
+                  <a:srgbClr val="F0A189"/>
+                </a:solidFill>
+                <a:latin typeface="Cambria" pitchFamily="34" charset="0"/>
+                <a:ea typeface="Cambria" pitchFamily="34" charset="-122"/>
+                <a:cs typeface="Cambria" pitchFamily="34" charset="-120"/>
+              </a:rPr>
+              <a:t>Ditolak</a:t>
+            </a:r>
+            <a:endParaRPr lang="en-US" sz="3400" dirty="0"/>
+          </a:p>
+        </p:txBody>
+      </p:sp>
+      <p:sp>
+        <p:nvSpPr>
+          <p:cNvPr id="9" name="Text 7"/>
+          <p:cNvSpPr/>
+          <p:nvPr/>
+        </p:nvSpPr>
+        <p:spPr>
+          <a:xfrm>
+            <a:off x="1051560" y="3383280"/>
+            <a:ext cx="5029200" cy="274320"/>
+          </a:xfrm>
+          <a:prstGeom prst="rect">
+            <a:avLst/>
+          </a:prstGeom>
+          <a:noFill/>
+          <a:ln/>
+        </p:spPr>
+        <p:txBody>
+          <a:bodyPr wrap="square" lIns="0" tIns="0" rIns="0" bIns="0" rtlCol="0" anchor="ctr"/>
+          <a:lstStyle/>
+          <a:p>
+            <a:pPr indent="0" marL="0">
+              <a:buNone/>
+            </a:pPr>
+            <a:r>
+              <a:rPr lang="en-US" sz="1300" dirty="0">
+                <a:solidFill>
+                  <a:srgbClr val="B7D2CA"/>
+                </a:solidFill>
+                <a:latin typeface="Calibri" pitchFamily="34" charset="0"/>
+                <a:ea typeface="Calibri" pitchFamily="34" charset="-122"/>
+                <a:cs typeface="Calibri" pitchFamily="34" charset="-120"/>
+              </a:rPr>
+              <a:t>3 fitur ditandai  ·  cakupan 100%</a:t>
+            </a:r>
+            <a:endParaRPr lang="en-US" sz="1300" dirty="0"/>
+          </a:p>
+        </p:txBody>
+      </p:sp>
+      <p:sp>
+        <p:nvSpPr>
+          <p:cNvPr id="10" name="Text 8"/>
+          <p:cNvSpPr/>
+          <p:nvPr/>
+        </p:nvSpPr>
+        <p:spPr>
+          <a:xfrm>
+            <a:off x="1051560" y="3767328"/>
+            <a:ext cx="5029200" cy="457200"/>
           </a:xfrm>
           <a:prstGeom prst="rect">
             <a:avLst/>
@@ -12518,36 +13967,91 @@
               <a:lnSpc>
                 <a:spcPts val="1700"/>
               </a:lnSpc>
-              <a:spcBef>
-                <a:spcPts val="400"/>
-              </a:spcBef>
               <a:buNone/>
             </a:pPr>
             <a:r>
               <a:rPr lang="en-US" sz="1250" dirty="0">
                 <a:solidFill>
-                  <a:srgbClr val="14302B"/>
+                  <a:srgbClr val="5CB9A3"/>
                 </a:solidFill>
                 <a:latin typeface="Calibri" pitchFamily="34" charset="0"/>
                 <a:ea typeface="Calibri" pitchFamily="34" charset="-122"/>
                 <a:cs typeface="Calibri" pitchFamily="34" charset="-120"/>
               </a:rPr>
-              <a:t>“Kalau semua langsung dirujuk, tenaga dan jadwal yang tersedia mungkin kewalahan.”</a:t>
+              <a:t>Jarak terjauh 9,1 z  ·  Mahalanobis 87,9  ·  keluaran model ditahan</a:t>
             </a:r>
             <a:endParaRPr lang="en-US" sz="1250" dirty="0"/>
           </a:p>
+        </p:txBody>
+      </p:sp>
+      <p:sp>
+        <p:nvSpPr>
+          <p:cNvPr id="11" name="Text 9"/>
+          <p:cNvSpPr/>
+          <p:nvPr/>
+        </p:nvSpPr>
+        <p:spPr>
+          <a:xfrm>
+            <a:off x="6995160" y="2286000"/>
+            <a:ext cx="4480560" cy="822960"/>
+          </a:xfrm>
+          <a:prstGeom prst="rect">
+            <a:avLst/>
+          </a:prstGeom>
+          <a:noFill/>
+          <a:ln/>
+        </p:spPr>
+        <p:txBody>
+          <a:bodyPr wrap="square" lIns="0" tIns="0" rIns="0" bIns="0" rtlCol="0" anchor="ctr"/>
+          <a:lstStyle/>
           <a:p>
             <a:pPr indent="0" marL="0">
               <a:lnSpc>
-                <a:spcPts val="1700"/>
+                <a:spcPts val="2400"/>
               </a:lnSpc>
-              <a:spcBef>
-                <a:spcPts val="400"/>
-              </a:spcBef>
-              <a:buNone/>
-            </a:pPr>
-            <a:r>
-              <a:rPr lang="en-US" sz="1050" dirty="0">
+              <a:buNone/>
+            </a:pPr>
+            <a:r>
+              <a:rPr lang="en-US" sz="1800" b="1" dirty="0">
+                <a:solidFill>
+                  <a:srgbClr val="0B1E1B"/>
+                </a:solidFill>
+                <a:latin typeface="Cambria" pitchFamily="34" charset="0"/>
+                <a:ea typeface="Cambria" pitchFamily="34" charset="-122"/>
+                <a:cs typeface="Cambria" pitchFamily="34" charset="-120"/>
+              </a:rPr>
+              <a:t>Penjaga yang selalu menolak sama saja dengan false yang dipasang tetap. Jadi kami jalankan dua arah.</a:t>
+            </a:r>
+            <a:endParaRPr lang="en-US" sz="1800" dirty="0"/>
+          </a:p>
+        </p:txBody>
+      </p:sp>
+      <p:sp>
+        <p:nvSpPr>
+          <p:cNvPr id="12" name="Text 10"/>
+          <p:cNvSpPr/>
+          <p:nvPr/>
+        </p:nvSpPr>
+        <p:spPr>
+          <a:xfrm>
+            <a:off x="6995160" y="3200400"/>
+            <a:ext cx="2743200" cy="274320"/>
+          </a:xfrm>
+          <a:prstGeom prst="rect">
+            <a:avLst/>
+          </a:prstGeom>
+          <a:noFill/>
+          <a:ln/>
+        </p:spPr>
+        <p:txBody>
+          <a:bodyPr wrap="square" lIns="0" tIns="0" rIns="0" bIns="0" rtlCol="0" anchor="ctr"/>
+          <a:lstStyle/>
+          <a:p>
+            <a:pPr indent="0" marL="0">
+              <a:buNone/>
+            </a:pPr>
+            <a:r>
+              <a:rPr lang="en-US" sz="1200" dirty="0">
                 <a:solidFill>
                   <a:srgbClr val="4A635D"/>
                 </a:solidFill>
@@ -12555,49 +14059,22 @@
                 <a:ea typeface="Calibri" pitchFamily="34" charset="-122"/>
                 <a:cs typeface="Calibri" pitchFamily="34" charset="-120"/>
               </a:rPr>
-              <a:t>Guru SLB di Jambi, ditanya apakah layanan sanggup menampung tiga kali lipat rujukan</a:t>
-            </a:r>
-            <a:endParaRPr lang="en-US" sz="1250" dirty="0"/>
-          </a:p>
-        </p:txBody>
-      </p:sp>
-      <p:sp>
-        <p:nvSpPr>
-          <p:cNvPr id="9" name="Shape 6"/>
-          <p:cNvSpPr/>
-          <p:nvPr/>
-        </p:nvSpPr>
-        <p:spPr>
-          <a:xfrm>
-            <a:off x="7726680" y="4572000"/>
-            <a:ext cx="3383280" cy="1051560"/>
-          </a:xfrm>
-          <a:prstGeom prst="roundRect">
-            <a:avLst>
-              <a:gd name="adj" fmla="val 5217"/>
-            </a:avLst>
-          </a:prstGeom>
-          <a:solidFill>
-            <a:srgbClr val="FBEAE5"/>
-          </a:solidFill>
-          <a:ln w="12700">
-            <a:solidFill>
-              <a:srgbClr val="FBEAE5"/>
-            </a:solidFill>
-            <a:prstDash val="solid"/>
-          </a:ln>
-        </p:spPr>
-      </p:sp>
-      <p:sp>
-        <p:nvSpPr>
-          <p:cNvPr id="10" name="Text 7"/>
-          <p:cNvSpPr/>
-          <p:nvPr/>
-        </p:nvSpPr>
-        <p:spPr>
-          <a:xfrm>
-            <a:off x="7955280" y="4681728"/>
-            <a:ext cx="2926080" cy="442452"/>
+              <a:t>Domain sumber (Carette)</a:t>
+            </a:r>
+            <a:endParaRPr lang="en-US" sz="1200" dirty="0"/>
+          </a:p>
+        </p:txBody>
+      </p:sp>
+      <p:sp>
+        <p:nvSpPr>
+          <p:cNvPr id="13" name="Text 11"/>
+          <p:cNvSpPr/>
+          <p:nvPr/>
+        </p:nvSpPr>
+        <p:spPr>
+          <a:xfrm>
+            <a:off x="9738360" y="3145536"/>
+            <a:ext cx="1737360" cy="329184"/>
           </a:xfrm>
           <a:prstGeom prst="rect">
             <a:avLst/>
@@ -12609,76 +14086,34 @@
           <a:bodyPr wrap="square" lIns="0" tIns="0" rIns="0" bIns="0" rtlCol="0" anchor="ctr"/>
           <a:lstStyle/>
           <a:p>
-            <a:pPr indent="0" marL="0">
-              <a:lnSpc>
-                <a:spcPts val="3000"/>
-              </a:lnSpc>
-              <a:buNone/>
-            </a:pPr>
-            <a:r>
-              <a:rPr lang="en-US" sz="3000" b="1" dirty="0">
-                <a:solidFill>
-                  <a:srgbClr val="B1442C"/>
-                </a:solidFill>
-                <a:latin typeface="Cambria" pitchFamily="34" charset="0"/>
-                <a:ea typeface="Cambria" pitchFamily="34" charset="-122"/>
-                <a:cs typeface="Cambria" pitchFamily="34" charset="-120"/>
-              </a:rPr>
-              <a:t>38,3×</a:t>
-            </a:r>
-            <a:endParaRPr lang="en-US" sz="3000" dirty="0"/>
-          </a:p>
-        </p:txBody>
-      </p:sp>
-      <p:sp>
-        <p:nvSpPr>
-          <p:cNvPr id="11" name="Text 8"/>
-          <p:cNvSpPr/>
-          <p:nvPr/>
-        </p:nvSpPr>
-        <p:spPr>
-          <a:xfrm>
-            <a:off x="7955280" y="5179044"/>
-            <a:ext cx="2926080" cy="274320"/>
-          </a:xfrm>
-          <a:prstGeom prst="rect">
-            <a:avLst/>
-          </a:prstGeom>
-          <a:noFill/>
-          <a:ln/>
-        </p:spPr>
-        <p:txBody>
-          <a:bodyPr wrap="square" lIns="0" tIns="0" rIns="0" bIns="0" rtlCol="0" anchor="ctr"/>
-          <a:lstStyle/>
-          <a:p>
-            <a:pPr indent="0" marL="0">
-              <a:buNone/>
-            </a:pPr>
-            <a:r>
-              <a:rPr lang="en-US" sz="1400" b="1" dirty="0">
-                <a:solidFill>
-                  <a:srgbClr val="14302B"/>
+            <a:pPr algn="r" indent="0" marL="0">
+              <a:buNone/>
+            </a:pPr>
+            <a:r>
+              <a:rPr lang="en-US" sz="1450" b="1" dirty="0">
+                <a:solidFill>
+                  <a:srgbClr val="0D8271"/>
                 </a:solidFill>
                 <a:latin typeface="Calibri" pitchFamily="34" charset="0"/>
                 <a:ea typeface="Calibri" pitchFamily="34" charset="-122"/>
                 <a:cs typeface="Calibri" pitchFamily="34" charset="-120"/>
               </a:rPr>
-              <a:t>beban rujukan baris teratas</a:t>
-            </a:r>
-            <a:endParaRPr lang="en-US" sz="1400" dirty="0"/>
-          </a:p>
-        </p:txBody>
-      </p:sp>
-      <p:sp>
-        <p:nvSpPr>
-          <p:cNvPr id="12" name="Text 9"/>
-          <p:cNvSpPr/>
-          <p:nvPr/>
-        </p:nvSpPr>
-        <p:spPr>
-          <a:xfrm>
-            <a:off x="7955280" y="5489940"/>
-            <a:ext cx="2926080" cy="640080"/>
+              <a:t>544 / 547 diterima</a:t>
+            </a:r>
+            <a:endParaRPr lang="en-US" sz="1450" dirty="0"/>
+          </a:p>
+        </p:txBody>
+      </p:sp>
+      <p:sp>
+        <p:nvSpPr>
+          <p:cNvPr id="14" name="Text 12"/>
+          <p:cNvSpPr/>
+          <p:nvPr/>
+        </p:nvSpPr>
+        <p:spPr>
+          <a:xfrm>
+            <a:off x="6995160" y="3767328"/>
+            <a:ext cx="2743200" cy="274320"/>
           </a:xfrm>
           <a:prstGeom prst="rect">
             <a:avLst/>
@@ -12691,9 +14126,6 @@
           <a:lstStyle/>
           <a:p>
             <a:pPr indent="0" marL="0">
-              <a:lnSpc>
-                <a:spcPts val="1500"/>
-              </a:lnSpc>
               <a:buNone/>
             </a:pPr>
             <a:r>
@@ -12705,7 +14137,7 @@
                 <a:ea typeface="Calibri" pitchFamily="34" charset="-122"/>
                 <a:cs typeface="Calibri" pitchFamily="34" charset="-120"/>
               </a:rPr>
-              <a:t>dibanding titik kerja yang dikirim</a:t>
+              <a:t>Stimulus yang dikirim</a:t>
             </a:r>
             <a:endParaRPr lang="en-US" sz="1200" dirty="0"/>
           </a:p>
@@ -12713,14 +14145,173 @@
       </p:sp>
       <p:sp>
         <p:nvSpPr>
-          <p:cNvPr id="13" name="Text 10"/>
-          <p:cNvSpPr/>
-          <p:nvPr/>
-        </p:nvSpPr>
-        <p:spPr>
-          <a:xfrm>
-            <a:off x="685800" y="5760720"/>
-            <a:ext cx="10424160" cy="502920"/>
+          <p:cNvPr id="15" name="Text 13"/>
+          <p:cNvSpPr/>
+          <p:nvPr/>
+        </p:nvSpPr>
+        <p:spPr>
+          <a:xfrm>
+            <a:off x="9738360" y="3712464"/>
+            <a:ext cx="1737360" cy="329184"/>
+          </a:xfrm>
+          <a:prstGeom prst="rect">
+            <a:avLst/>
+          </a:prstGeom>
+          <a:noFill/>
+          <a:ln/>
+        </p:spPr>
+        <p:txBody>
+          <a:bodyPr wrap="square" lIns="0" tIns="0" rIns="0" bIns="0" rtlCol="0" anchor="ctr"/>
+          <a:lstStyle/>
+          <a:p>
+            <a:pPr algn="r" indent="0" marL="0">
+              <a:buNone/>
+            </a:pPr>
+            <a:r>
+              <a:rPr lang="en-US" sz="1450" b="1" dirty="0">
+                <a:solidFill>
+                  <a:srgbClr val="B1442C"/>
+                </a:solidFill>
+                <a:latin typeface="Calibri" pitchFamily="34" charset="0"/>
+                <a:ea typeface="Calibri" pitchFamily="34" charset="-122"/>
+                <a:cs typeface="Calibri" pitchFamily="34" charset="-120"/>
+              </a:rPr>
+              <a:t>1 / 23 diterima</a:t>
+            </a:r>
+            <a:endParaRPr lang="en-US" sz="1450" dirty="0"/>
+          </a:p>
+        </p:txBody>
+      </p:sp>
+      <p:sp>
+        <p:nvSpPr>
+          <p:cNvPr id="16" name="Text 14"/>
+          <p:cNvSpPr/>
+          <p:nvPr/>
+        </p:nvSpPr>
+        <p:spPr>
+          <a:xfrm>
+            <a:off x="6995160" y="4334256"/>
+            <a:ext cx="2743200" cy="274320"/>
+          </a:xfrm>
+          <a:prstGeom prst="rect">
+            <a:avLst/>
+          </a:prstGeom>
+          <a:noFill/>
+          <a:ln/>
+        </p:spPr>
+        <p:txBody>
+          <a:bodyPr wrap="square" lIns="0" tIns="0" rIns="0" bIns="0" rtlCol="0" anchor="ctr"/>
+          <a:lstStyle/>
+          <a:p>
+            <a:pPr indent="0" marL="0">
+              <a:buNone/>
+            </a:pPr>
+            <a:r>
+              <a:rPr lang="en-US" sz="1200" dirty="0">
+                <a:solidFill>
+                  <a:srgbClr val="4A635D"/>
+                </a:solidFill>
+                <a:latin typeface="Calibri" pitchFamily="34" charset="0"/>
+                <a:ea typeface="Calibri" pitchFamily="34" charset="-122"/>
+                <a:cs typeface="Calibri" pitchFamily="34" charset="-120"/>
+              </a:rPr>
+              <a:t>Keputusan direproduksi Python</a:t>
+            </a:r>
+            <a:endParaRPr lang="en-US" sz="1200" dirty="0"/>
+          </a:p>
+        </p:txBody>
+      </p:sp>
+      <p:sp>
+        <p:nvSpPr>
+          <p:cNvPr id="17" name="Text 15"/>
+          <p:cNvSpPr/>
+          <p:nvPr/>
+        </p:nvSpPr>
+        <p:spPr>
+          <a:xfrm>
+            <a:off x="9738360" y="4279392"/>
+            <a:ext cx="1737360" cy="329184"/>
+          </a:xfrm>
+          <a:prstGeom prst="rect">
+            <a:avLst/>
+          </a:prstGeom>
+          <a:noFill/>
+          <a:ln/>
+        </p:spPr>
+        <p:txBody>
+          <a:bodyPr wrap="square" lIns="0" tIns="0" rIns="0" bIns="0" rtlCol="0" anchor="ctr"/>
+          <a:lstStyle/>
+          <a:p>
+            <a:pPr algn="r" indent="0" marL="0">
+              <a:buNone/>
+            </a:pPr>
+            <a:r>
+              <a:rPr lang="en-US" sz="1450" b="1" dirty="0">
+                <a:solidFill>
+                  <a:srgbClr val="14302B"/>
+                </a:solidFill>
+                <a:latin typeface="Calibri" pitchFamily="34" charset="0"/>
+                <a:ea typeface="Calibri" pitchFamily="34" charset="-122"/>
+                <a:cs typeface="Calibri" pitchFamily="34" charset="-120"/>
+              </a:rPr>
+              <a:t>23 / 23</a:t>
+            </a:r>
+            <a:endParaRPr lang="en-US" sz="1450" dirty="0"/>
+          </a:p>
+        </p:txBody>
+      </p:sp>
+      <p:sp>
+        <p:nvSpPr>
+          <p:cNvPr id="18" name="Text 16"/>
+          <p:cNvSpPr/>
+          <p:nvPr/>
+        </p:nvSpPr>
+        <p:spPr>
+          <a:xfrm>
+            <a:off x="685800" y="4846320"/>
+            <a:ext cx="10424160" cy="548640"/>
+          </a:xfrm>
+          <a:prstGeom prst="rect">
+            <a:avLst/>
+          </a:prstGeom>
+          <a:noFill/>
+          <a:ln/>
+        </p:spPr>
+        <p:txBody>
+          <a:bodyPr wrap="square" lIns="0" tIns="0" rIns="0" bIns="0" rtlCol="0" anchor="ctr"/>
+          <a:lstStyle/>
+          <a:p>
+            <a:pPr indent="0" marL="0">
+              <a:lnSpc>
+                <a:spcPts val="1800"/>
+              </a:lnSpc>
+              <a:buNone/>
+            </a:pPr>
+            <a:r>
+              <a:rPr lang="en-US" sz="1300" dirty="0">
+                <a:solidFill>
+                  <a:srgbClr val="14302B"/>
+                </a:solidFill>
+                <a:latin typeface="Calibri" pitchFamily="34" charset="0"/>
+                <a:ea typeface="Calibri" pitchFamily="34" charset="-122"/>
+                <a:cs typeface="Calibri" pitchFamily="34" charset="-120"/>
+              </a:rPr>
+              <a:t>Ia menerima hampir semua yang berasal dari kohort yang membangunnya, dan menolak setiap sesi pada stimulus sekarang — sambil menyebut fiturnya: ink_frac di 22 dari 23 sesi.</a:t>
+            </a:r>
+            <a:endParaRPr lang="en-US" sz="1300" dirty="0"/>
+          </a:p>
+        </p:txBody>
+      </p:sp>
+      <p:sp>
+        <p:nvSpPr>
+          <p:cNvPr id="19" name="Text 17"/>
+          <p:cNvSpPr/>
+          <p:nvPr/>
+        </p:nvSpPr>
+        <p:spPr>
+          <a:xfrm>
+            <a:off x="685800" y="5440680"/>
+            <a:ext cx="10424160" cy="457200"/>
           </a:xfrm>
           <a:prstGeom prst="rect">
             <a:avLst/>
@@ -12739,17 +14330,56 @@
               <a:buNone/>
             </a:pPr>
             <a:r>
-              <a:rPr lang="en-US" sz="1500" b="1" i="1" dirty="0">
-                <a:solidFill>
-                  <a:srgbClr val="0B1E1B"/>
+              <a:rPr lang="en-US" sz="1500" i="1" dirty="0">
+                <a:solidFill>
+                  <a:srgbClr val="0D8271"/>
                 </a:solidFill>
                 <a:latin typeface="Cambria" pitchFamily="34" charset="0"/>
                 <a:ea typeface="Cambria" pitchFamily="34" charset="-122"/>
                 <a:cs typeface="Cambria" pitchFamily="34" charset="-120"/>
               </a:rPr>
-              <a:t>Tiga kali lipat sudah dinilai sulit. Baris bersensitivitas 92 persen bukan tiga kali — ia 38 kali. Kami memilih baris yang paling sedikit menemukan karena itu satu-satunya yang muat.</a:t>
+              <a:t>Keputusan itu dibuat TypeScript di peramban saat sesi berjalan. Python menghitungnya ulang dari log dan mendapat verdict yang sama, 23 dari 23.</a:t>
             </a:r>
             <a:endParaRPr lang="en-US" sz="1500" dirty="0"/>
+          </a:p>
+        </p:txBody>
+      </p:sp>
+      <p:sp>
+        <p:nvSpPr>
+          <p:cNvPr id="20" name="Text 18"/>
+          <p:cNvSpPr/>
+          <p:nvPr/>
+        </p:nvSpPr>
+        <p:spPr>
+          <a:xfrm>
+            <a:off x="685800" y="5943600"/>
+            <a:ext cx="10424160" cy="274320"/>
+          </a:xfrm>
+          <a:prstGeom prst="rect">
+            <a:avLst/>
+          </a:prstGeom>
+          <a:noFill/>
+          <a:ln/>
+        </p:spPr>
+        <p:txBody>
+          <a:bodyPr wrap="square" lIns="0" tIns="0" rIns="0" bIns="0" rtlCol="0" anchor="ctr"/>
+          <a:lstStyle/>
+          <a:p>
+            <a:pPr indent="0" marL="0">
+              <a:buNone/>
+            </a:pPr>
+            <a:r>
+              <a:rPr lang="en-US" sz="1000" dirty="0">
+                <a:solidFill>
+                  <a:srgbClr val="4A635D"/>
+                </a:solidFill>
+                <a:latin typeface="Calibri" pitchFamily="34" charset="0"/>
+                <a:ea typeface="Calibri" pitchFamily="34" charset="-122"/>
+                <a:cs typeface="Calibri" pitchFamily="34" charset="-120"/>
+              </a:rPr>
+              <a:t>Sumber: research/hasil/ood_dua_arah.json · kalibrasi referensi persentil 99,5 sehingga tingkat penerimaan domain sumber adalah pemeriksaan kewarasan, bukan uji generalisasi</a:t>
+            </a:r>
+            <a:endParaRPr lang="en-US" sz="1000" dirty="0"/>
           </a:p>
         </p:txBody>
       </p:sp>

--- a/deck/Neurogaze-Pitch-Deck.pptx
+++ b/deck/Neurogaze-Pitch-Deck.pptx
@@ -19,9 +19,10 @@
     <p:sldId id="267" r:id="rId13"/>
     <p:sldId id="268" r:id="rId14"/>
     <p:sldId id="269" r:id="rId15"/>
+    <p:sldId id="270" r:id="rId16"/>
   </p:sldIdLst>
   <p:notesMasterIdLst>
-    <p:notesMasterId r:id="rId16"/>
+    <p:notesMasterId r:id="rId17"/>
   </p:notesMasterIdLst>
   <p:sldSz cx="12192000" cy="6858000"/>
   <p:notesSz cx="6858000" cy="12192000"/>
@@ -1065,7 +1066,7 @@
           <a:p>
             <a:r>
               <a:rPr lang="en-US" dirty="0"/>
-              <a:t>1:10. Bobot terbesar di rubrik. Sebut sendiri bahwa ini skenario bersyarat, lalu sebut biaya operasi yang belum terukur — sebelum juri menghitungnya.</a:t>
+              <a:t>0:40. INI pembuka bagian dampak, bukan tabel biaya. Klaim yang tidak bersyarat, sudah selesai, dan tidak butuh satu balita pun untuk dibuktikan. Baru setelah ini masuk ke biaya, dan biaya selalu disebut sebagai skenario.</a:t>
             </a:r>
             <a:endParaRPr lang="en-US" dirty="0"/>
           </a:p>
@@ -1153,7 +1154,7 @@
           <a:p>
             <a:r>
               <a:rPr lang="en-US" dirty="0"/>
-              <a:t>Ini yang mengubah 'belum ada data' dari kelemahan menjadi rencana. Sebut kata 'studi prospektif berizin etik' dengan suara — kalau slide ini terdengar seperti rencana menyebar produk untuk memanen data balita, seluruh bagian responsible AI runtuh di satu kalimat.</a:t>
+              <a:t>1:10. Bobot terbesar di rubrik. Sebut sendiri bahwa ini skenario bersyarat, lalu sebut biaya operasi yang belum terukur — sebelum juri menghitungnya.</a:t>
             </a:r>
             <a:endParaRPr lang="en-US" dirty="0"/>
           </a:p>
@@ -1241,7 +1242,7 @@
           <a:p>
             <a:r>
               <a:rPr lang="en-US" dirty="0"/>
-              <a:t>0:30. Berhenti di sini. Jangan sebut kaji etik sebagai tanda tangan; permintaannya mitra, bukan izin. Jangan tutup dengan 'lima lembaga menolak kami'.</a:t>
+              <a:t>Ini yang mengubah 'belum ada data' dari kelemahan menjadi rencana. Sebut kata 'studi prospektif berizin etik' dengan suara — kalau slide ini terdengar seperti rencana menyebar produk untuk memanen data balita, seluruh bagian responsible AI runtuh di satu kalimat.</a:t>
             </a:r>
             <a:endParaRPr lang="en-US" dirty="0"/>
           </a:p>
@@ -1265,6 +1266,94 @@
             <a:fld id="{F7021451-1387-4CA6-816F-3879F97B5CBC}" type="slidenum">
               <a:rPr lang="en-US"/>
               <a:t>14</a:t>
+            </a:fld>
+            <a:endParaRPr lang="en-US"/>
+          </a:p>
+        </p:txBody>
+      </p:sp>
+    </p:spTree>
+    <p:extLst>
+      <p:ext uri="{BB962C8B-B14F-4D97-AF65-F5344CB8AC3E}">
+        <p14:creationId xmlns:p14="http://schemas.microsoft.com/office/powerpoint/2010/main" val="1024086991"/>
+      </p:ext>
+    </p:extLst>
+  </p:cSld>
+  <p:clrMapOvr>
+    <a:masterClrMapping/>
+  </p:clrMapOvr>
+</p:notes>
+</file>
+
+<file path=ppt/notesSlides/notesSlide15.xml><?xml version="1.0" encoding="utf-8"?>
+<p:notes xmlns:a="http://schemas.openxmlformats.org/drawingml/2006/main" xmlns:r="http://schemas.openxmlformats.org/officeDocument/2006/relationships" xmlns:p="http://schemas.openxmlformats.org/presentationml/2006/main">
+  <p:cSld>
+    <p:spTree>
+      <p:nvGrpSpPr>
+        <p:cNvPr id="1" name=""/>
+        <p:cNvGrpSpPr/>
+        <p:nvPr/>
+      </p:nvGrpSpPr>
+      <p:grpSpPr>
+        <a:xfrm>
+          <a:off x="0" y="0"/>
+          <a:ext cx="0" cy="0"/>
+          <a:chOff x="0" y="0"/>
+          <a:chExt cx="0" cy="0"/>
+        </a:xfrm>
+      </p:grpSpPr>
+      <p:sp>
+        <p:nvSpPr>
+          <p:cNvPr id="2" name="Slide Image Placeholder 1"/>
+          <p:cNvSpPr>
+            <a:spLocks noGrp="1" noRot="1" noChangeAspect="1"/>
+          </p:cNvSpPr>
+          <p:nvPr>
+            <p:ph type="sldImg"/>
+          </p:nvPr>
+        </p:nvSpPr>
+        <p:spPr/>
+      </p:sp>
+      <p:sp>
+        <p:nvSpPr>
+          <p:cNvPr id="3" name="Notes Placeholder 2"/>
+          <p:cNvSpPr>
+            <a:spLocks noGrp="1"/>
+          </p:cNvSpPr>
+          <p:nvPr>
+            <p:ph type="body" idx="1"/>
+          </p:nvPr>
+        </p:nvSpPr>
+        <p:spPr/>
+        <p:txBody>
+          <a:bodyPr/>
+          <a:lstStyle/>
+          <a:p>
+            <a:r>
+              <a:rPr lang="en-US" dirty="0"/>
+              <a:t>0:30. Berhenti di sini. Jangan sebut kaji etik sebagai tanda tangan; permintaannya mitra, bukan izin. Jangan tutup dengan 'lima lembaga menolak kami'.</a:t>
+            </a:r>
+            <a:endParaRPr lang="en-US" dirty="0"/>
+          </a:p>
+        </p:txBody>
+      </p:sp>
+      <p:sp>
+        <p:nvSpPr>
+          <p:cNvPr id="4" name="Slide Number Placeholder 3"/>
+          <p:cNvSpPr>
+            <a:spLocks noGrp="1"/>
+          </p:cNvSpPr>
+          <p:nvPr>
+            <p:ph type="sldNum" sz="quarter" idx="10"/>
+          </p:nvPr>
+        </p:nvSpPr>
+        <p:spPr/>
+        <p:txBody>
+          <a:bodyPr/>
+          <a:lstStyle/>
+          <a:p>
+            <a:fld id="{F7021451-1387-4CA6-816F-3879F97B5CBC}" type="slidenum">
+              <a:rPr lang="en-US"/>
+              <a:t>15</a:t>
             </a:fld>
             <a:endParaRPr lang="en-US"/>
           </a:p>
@@ -5976,7 +6065,7 @@
                 <a:ea typeface="Calibri" pitchFamily="34" charset="-122"/>
                 <a:cs typeface="Calibri" pitchFamily="34" charset="-120"/>
               </a:rPr>
-              <a:t>Dampak dan biaya</a:t>
+              <a:t>Dampak yang sudah selesai hari ini</a:t>
             </a:r>
             <a:endParaRPr lang="en-US" sz="1200" dirty="0"/>
           </a:p>
@@ -6018,7 +6107,7 @@
                 <a:ea typeface="Cambria" pitchFamily="34" charset="-122"/>
                 <a:cs typeface="Cambria" pitchFamily="34" charset="-120"/>
               </a:rPr>
-              <a:t>Ambil metrik yang paling keras terhadap kami</a:t>
+              <a:t>Studi yang akan menjawab pertanyaan ini belum bisa dimulai — instrumennya tidak ada</a:t>
             </a:r>
             <a:endParaRPr lang="en-US" sz="3200" dirty="0"/>
           </a:p>
@@ -6033,7 +6122,7 @@
         <p:spPr>
           <a:xfrm>
             <a:off x="685800" y="2103120"/>
-            <a:ext cx="10424160" cy="502920"/>
+            <a:ext cx="10424160" cy="640080"/>
           </a:xfrm>
           <a:prstGeom prst="rect">
             <a:avLst/>
@@ -6047,170 +6136,137 @@
           <a:p>
             <a:pPr indent="0" marL="0">
               <a:lnSpc>
-                <a:spcPts val="2100"/>
+                <a:spcPts val="2000"/>
               </a:lnSpc>
               <a:buNone/>
             </a:pPr>
             <a:r>
-              <a:rPr lang="en-US" sz="1500" b="1" dirty="0">
-                <a:solidFill>
-                  <a:srgbClr val="B1442C"/>
+              <a:rPr lang="en-US" sz="1400" dirty="0">
+                <a:solidFill>
+                  <a:srgbClr val="14302B"/>
                 </a:solidFill>
                 <a:latin typeface="Calibri" pitchFamily="34" charset="0"/>
                 <a:ea typeface="Calibri" pitchFamily="34" charset="-122"/>
                 <a:cs typeface="Calibri" pitchFamily="34" charset="-120"/>
               </a:rPr>
-              <a:t>Skenario, bukan hasil terukur: angka per kasus ini berlaku hanya bila titik operasi protokol penuh berhasil direplikasi pada balita Indonesia. Hari ini titik itu ditahan.</a:t>
-            </a:r>
-            <a:endParaRPr lang="en-US" sz="1500" dirty="0"/>
-          </a:p>
-        </p:txBody>
-      </p:sp>
-      <p:sp>
-        <p:nvSpPr>
-          <p:cNvPr id="7" name="Shape 5"/>
-          <p:cNvSpPr/>
-          <p:nvPr/>
-        </p:nvSpPr>
-        <p:spPr>
-          <a:xfrm>
-            <a:off x="685800" y="2788920"/>
-            <a:ext cx="3246120" cy="1965960"/>
-          </a:xfrm>
-          <a:prstGeom prst="roundRect">
-            <a:avLst>
-              <a:gd name="adj" fmla="val 2791"/>
-            </a:avLst>
-          </a:prstGeom>
-          <a:solidFill>
-            <a:srgbClr val="FFFFFF"/>
-          </a:solidFill>
-          <a:ln w="12700">
-            <a:solidFill>
-              <a:srgbClr val="DBE4E1"/>
-            </a:solidFill>
-            <a:prstDash val="solid"/>
-          </a:ln>
-        </p:spPr>
-      </p:sp>
-      <p:sp>
-        <p:nvSpPr>
-          <p:cNvPr id="8" name="Text 6"/>
-          <p:cNvSpPr/>
-          <p:nvPr/>
-        </p:nvSpPr>
-        <p:spPr>
-          <a:xfrm>
-            <a:off x="960120" y="3035808"/>
-            <a:ext cx="2697480" cy="548640"/>
-          </a:xfrm>
-          <a:prstGeom prst="rect">
-            <a:avLst/>
-          </a:prstGeom>
-          <a:noFill/>
-          <a:ln/>
-        </p:spPr>
-        <p:txBody>
-          <a:bodyPr wrap="square" lIns="0" tIns="0" rIns="0" bIns="0" rtlCol="0" anchor="ctr"/>
-          <a:lstStyle/>
-          <a:p>
-            <a:pPr indent="0" marL="0">
-              <a:buNone/>
-            </a:pPr>
-            <a:r>
-              <a:rPr lang="en-US" sz="3200" b="1" dirty="0">
-                <a:solidFill>
-                  <a:srgbClr val="0B1E1B"/>
-                </a:solidFill>
-                <a:latin typeface="Cambria" pitchFamily="34" charset="0"/>
-                <a:ea typeface="Cambria" pitchFamily="34" charset="-122"/>
-                <a:cs typeface="Cambria" pitchFamily="34" charset="-120"/>
-              </a:rPr>
-              <a:t>Rp 9,08 jt</a:t>
-            </a:r>
-            <a:endParaRPr lang="en-US" sz="3200" dirty="0"/>
-          </a:p>
-        </p:txBody>
-      </p:sp>
-      <p:sp>
-        <p:nvSpPr>
-          <p:cNvPr id="9" name="Text 7"/>
-          <p:cNvSpPr/>
-          <p:nvPr/>
-        </p:nvSpPr>
-        <p:spPr>
-          <a:xfrm>
-            <a:off x="960120" y="3639312"/>
-            <a:ext cx="2697480" cy="457200"/>
-          </a:xfrm>
-          <a:prstGeom prst="rect">
-            <a:avLst/>
-          </a:prstGeom>
-          <a:noFill/>
-          <a:ln/>
-        </p:spPr>
-        <p:txBody>
-          <a:bodyPr wrap="square" lIns="0" tIns="0" rIns="0" bIns="0" rtlCol="0" anchor="ctr"/>
-          <a:lstStyle/>
-          <a:p>
-            <a:pPr indent="0" marL="0">
-              <a:lnSpc>
-                <a:spcPts val="1700"/>
-              </a:lnSpc>
-              <a:buNone/>
-            </a:pPr>
-            <a:r>
-              <a:rPr lang="en-US" sz="1300" b="1" dirty="0">
-                <a:solidFill>
-                  <a:srgbClr val="14302B"/>
+              <a:t>Itu bukan retorika. Kelompok riset mana pun yang ingin menguji ukuran atensi berbasis tablet pada balita Indonesia harus membangun seluruh rantai ini lebih dulu, sebelum merekrut satu anak pun. Rantai itu sudah selesai, sudah diuji, dan sudah bisa diserahkan.</a:t>
+            </a:r>
+            <a:endParaRPr lang="en-US" sz="1400" dirty="0"/>
+          </a:p>
+        </p:txBody>
+      </p:sp>
+      <p:sp>
+        <p:nvSpPr>
+          <p:cNvPr id="7" name="Text 5"/>
+          <p:cNvSpPr/>
+          <p:nvPr/>
+        </p:nvSpPr>
+        <p:spPr>
+          <a:xfrm>
+            <a:off x="685800" y="2880360"/>
+            <a:ext cx="274320" cy="274320"/>
+          </a:xfrm>
+          <a:prstGeom prst="rect">
+            <a:avLst/>
+          </a:prstGeom>
+          <a:noFill/>
+          <a:ln/>
+        </p:spPr>
+        <p:txBody>
+          <a:bodyPr wrap="square" lIns="0" tIns="0" rIns="0" bIns="0" rtlCol="0" anchor="ctr"/>
+          <a:lstStyle/>
+          <a:p>
+            <a:pPr indent="0" marL="0">
+              <a:buNone/>
+            </a:pPr>
+            <a:r>
+              <a:rPr lang="en-US" sz="1400" b="1" dirty="0">
+                <a:solidFill>
+                  <a:srgbClr val="0D8271"/>
                 </a:solidFill>
                 <a:latin typeface="Calibri" pitchFamily="34" charset="0"/>
                 <a:ea typeface="Calibri" pitchFamily="34" charset="-122"/>
                 <a:cs typeface="Calibri" pitchFamily="34" charset="-120"/>
               </a:rPr>
-              <a:t>Neurogaze · 1 Posyandu</a:t>
-            </a:r>
-            <a:endParaRPr lang="en-US" sz="1300" dirty="0"/>
-          </a:p>
-        </p:txBody>
-      </p:sp>
-      <p:sp>
-        <p:nvSpPr>
-          <p:cNvPr id="10" name="Text 8"/>
-          <p:cNvSpPr/>
-          <p:nvPr/>
-        </p:nvSpPr>
-        <p:spPr>
-          <a:xfrm>
-            <a:off x="960120" y="4114800"/>
-            <a:ext cx="2697480" cy="502920"/>
-          </a:xfrm>
-          <a:prstGeom prst="rect">
-            <a:avLst/>
-          </a:prstGeom>
-          <a:noFill/>
-          <a:ln/>
-        </p:spPr>
-        <p:txBody>
-          <a:bodyPr wrap="square" lIns="0" tIns="0" rIns="0" bIns="0" rtlCol="0" anchor="ctr"/>
-          <a:lstStyle/>
-          <a:p>
-            <a:pPr indent="0" marL="0">
-              <a:lnSpc>
-                <a:spcPts val="1500"/>
-              </a:lnSpc>
-              <a:buNone/>
-            </a:pPr>
-            <a:r>
-              <a:rPr lang="en-US" sz="1100" dirty="0">
-                <a:solidFill>
-                  <a:srgbClr val="4A635D"/>
+              <a:t>✓</a:t>
+            </a:r>
+            <a:endParaRPr lang="en-US" sz="1400" dirty="0"/>
+          </a:p>
+        </p:txBody>
+      </p:sp>
+      <p:sp>
+        <p:nvSpPr>
+          <p:cNvPr id="8" name="Text 6"/>
+          <p:cNvSpPr/>
+          <p:nvPr/>
+        </p:nvSpPr>
+        <p:spPr>
+          <a:xfrm>
+            <a:off x="996696" y="2880360"/>
+            <a:ext cx="4846320" cy="256032"/>
+          </a:xfrm>
+          <a:prstGeom prst="rect">
+            <a:avLst/>
+          </a:prstGeom>
+          <a:noFill/>
+          <a:ln/>
+        </p:spPr>
+        <p:txBody>
+          <a:bodyPr wrap="square" lIns="0" tIns="0" rIns="0" bIns="0" rtlCol="0" anchor="ctr"/>
+          <a:lstStyle/>
+          <a:p>
+            <a:pPr indent="0" marL="0">
+              <a:buNone/>
+            </a:pPr>
+            <a:r>
+              <a:rPr lang="en-US" sz="1300" b="1" dirty="0">
+                <a:solidFill>
+                  <a:srgbClr val="0B1E1B"/>
                 </a:solidFill>
                 <a:latin typeface="Calibri" pitchFamily="34" charset="0"/>
                 <a:ea typeface="Calibri" pitchFamily="34" charset="-122"/>
                 <a:cs typeface="Calibri" pitchFamily="34" charset="-120"/>
               </a:rPr>
-              <a:t>1.000 sesi × Rp 13.900 ÷ 1,53 kasus</a:t>
+              <a:t>Instrumen luring terinstrumentasi</a:t>
+            </a:r>
+            <a:endParaRPr lang="en-US" sz="1300" dirty="0"/>
+          </a:p>
+        </p:txBody>
+      </p:sp>
+      <p:sp>
+        <p:nvSpPr>
+          <p:cNvPr id="9" name="Text 7"/>
+          <p:cNvSpPr/>
+          <p:nvPr/>
+        </p:nvSpPr>
+        <p:spPr>
+          <a:xfrm>
+            <a:off x="996696" y="3136392"/>
+            <a:ext cx="4846320" cy="256032"/>
+          </a:xfrm>
+          <a:prstGeom prst="rect">
+            <a:avLst/>
+          </a:prstGeom>
+          <a:noFill/>
+          <a:ln/>
+        </p:spPr>
+        <p:txBody>
+          <a:bodyPr wrap="square" lIns="0" tIns="0" rIns="0" bIns="0" rtlCol="0" anchor="ctr"/>
+          <a:lstStyle/>
+          <a:p>
+            <a:pPr indent="0" marL="0">
+              <a:buNone/>
+            </a:pPr>
+            <a:r>
+              <a:rPr lang="en-US" sz="1100" dirty="0">
+                <a:solidFill>
+                  <a:srgbClr val="4A635D"/>
+                </a:solidFill>
+                <a:latin typeface="Calibri" pitchFamily="34" charset="0"/>
+                <a:ea typeface="Calibri" pitchFamily="34" charset="-122"/>
+                <a:cs typeface="Calibri" pitchFamily="34" charset="-120"/>
+              </a:rPr>
+              <a:t>kamera, kalibrasi, gerbang mutu, jejak audit</a:t>
             </a:r>
             <a:endParaRPr lang="en-US" sz="1100" dirty="0"/>
           </a:p>
@@ -6218,18 +6274,603 @@
       </p:sp>
       <p:sp>
         <p:nvSpPr>
-          <p:cNvPr id="11" name="Shape 9"/>
-          <p:cNvSpPr/>
-          <p:nvPr/>
-        </p:nvSpPr>
-        <p:spPr>
-          <a:xfrm>
-            <a:off x="4206240" y="2788920"/>
-            <a:ext cx="3246120" cy="1965960"/>
+          <p:cNvPr id="10" name="Text 8"/>
+          <p:cNvSpPr/>
+          <p:nvPr/>
+        </p:nvSpPr>
+        <p:spPr>
+          <a:xfrm>
+            <a:off x="6035040" y="2880360"/>
+            <a:ext cx="274320" cy="274320"/>
+          </a:xfrm>
+          <a:prstGeom prst="rect">
+            <a:avLst/>
+          </a:prstGeom>
+          <a:noFill/>
+          <a:ln/>
+        </p:spPr>
+        <p:txBody>
+          <a:bodyPr wrap="square" lIns="0" tIns="0" rIns="0" bIns="0" rtlCol="0" anchor="ctr"/>
+          <a:lstStyle/>
+          <a:p>
+            <a:pPr indent="0" marL="0">
+              <a:buNone/>
+            </a:pPr>
+            <a:r>
+              <a:rPr lang="en-US" sz="1400" b="1" dirty="0">
+                <a:solidFill>
+                  <a:srgbClr val="0D8271"/>
+                </a:solidFill>
+                <a:latin typeface="Calibri" pitchFamily="34" charset="0"/>
+                <a:ea typeface="Calibri" pitchFamily="34" charset="-122"/>
+                <a:cs typeface="Calibri" pitchFamily="34" charset="-120"/>
+              </a:rPr>
+              <a:t>✓</a:t>
+            </a:r>
+            <a:endParaRPr lang="en-US" sz="1400" dirty="0"/>
+          </a:p>
+        </p:txBody>
+      </p:sp>
+      <p:sp>
+        <p:nvSpPr>
+          <p:cNvPr id="11" name="Text 9"/>
+          <p:cNvSpPr/>
+          <p:nvPr/>
+        </p:nvSpPr>
+        <p:spPr>
+          <a:xfrm>
+            <a:off x="6345936" y="2880360"/>
+            <a:ext cx="4846320" cy="256032"/>
+          </a:xfrm>
+          <a:prstGeom prst="rect">
+            <a:avLst/>
+          </a:prstGeom>
+          <a:noFill/>
+          <a:ln/>
+        </p:spPr>
+        <p:txBody>
+          <a:bodyPr wrap="square" lIns="0" tIns="0" rIns="0" bIns="0" rtlCol="0" anchor="ctr"/>
+          <a:lstStyle/>
+          <a:p>
+            <a:pPr indent="0" marL="0">
+              <a:buNone/>
+            </a:pPr>
+            <a:r>
+              <a:rPr lang="en-US" sz="1300" b="1" dirty="0">
+                <a:solidFill>
+                  <a:srgbClr val="0B1E1B"/>
+                </a:solidFill>
+                <a:latin typeface="Calibri" pitchFamily="34" charset="0"/>
+                <a:ea typeface="Calibri" pitchFamily="34" charset="-122"/>
+                <a:cs typeface="Calibri" pitchFamily="34" charset="-120"/>
+              </a:rPr>
+              <a:t>Parity Python–TypeScript</a:t>
+            </a:r>
+            <a:endParaRPr lang="en-US" sz="1300" dirty="0"/>
+          </a:p>
+        </p:txBody>
+      </p:sp>
+      <p:sp>
+        <p:nvSpPr>
+          <p:cNvPr id="12" name="Text 10"/>
+          <p:cNvSpPr/>
+          <p:nvPr/>
+        </p:nvSpPr>
+        <p:spPr>
+          <a:xfrm>
+            <a:off x="6345936" y="3136392"/>
+            <a:ext cx="4846320" cy="256032"/>
+          </a:xfrm>
+          <a:prstGeom prst="rect">
+            <a:avLst/>
+          </a:prstGeom>
+          <a:noFill/>
+          <a:ln/>
+        </p:spPr>
+        <p:txBody>
+          <a:bodyPr wrap="square" lIns="0" tIns="0" rIns="0" bIns="0" rtlCol="0" anchor="ctr"/>
+          <a:lstStyle/>
+          <a:p>
+            <a:pPr indent="0" marL="0">
+              <a:buNone/>
+            </a:pPr>
+            <a:r>
+              <a:rPr lang="en-US" sz="1100" dirty="0">
+                <a:solidFill>
+                  <a:srgbClr val="4A635D"/>
+                </a:solidFill>
+                <a:latin typeface="Calibri" pitchFamily="34" charset="0"/>
+                <a:ea typeface="Calibri" pitchFamily="34" charset="-122"/>
+                <a:cs typeface="Calibri" pitchFamily="34" charset="-120"/>
+              </a:rPr>
+              <a:t>fitur riset dan fitur tablet diuji berpasangan</a:t>
+            </a:r>
+            <a:endParaRPr lang="en-US" sz="1100" dirty="0"/>
+          </a:p>
+        </p:txBody>
+      </p:sp>
+      <p:sp>
+        <p:nvSpPr>
+          <p:cNvPr id="13" name="Text 11"/>
+          <p:cNvSpPr/>
+          <p:nvPr/>
+        </p:nvSpPr>
+        <p:spPr>
+          <a:xfrm>
+            <a:off x="685800" y="3593592"/>
+            <a:ext cx="274320" cy="274320"/>
+          </a:xfrm>
+          <a:prstGeom prst="rect">
+            <a:avLst/>
+          </a:prstGeom>
+          <a:noFill/>
+          <a:ln/>
+        </p:spPr>
+        <p:txBody>
+          <a:bodyPr wrap="square" lIns="0" tIns="0" rIns="0" bIns="0" rtlCol="0" anchor="ctr"/>
+          <a:lstStyle/>
+          <a:p>
+            <a:pPr indent="0" marL="0">
+              <a:buNone/>
+            </a:pPr>
+            <a:r>
+              <a:rPr lang="en-US" sz="1400" b="1" dirty="0">
+                <a:solidFill>
+                  <a:srgbClr val="0D8271"/>
+                </a:solidFill>
+                <a:latin typeface="Calibri" pitchFamily="34" charset="0"/>
+                <a:ea typeface="Calibri" pitchFamily="34" charset="-122"/>
+                <a:cs typeface="Calibri" pitchFamily="34" charset="-120"/>
+              </a:rPr>
+              <a:t>✓</a:t>
+            </a:r>
+            <a:endParaRPr lang="en-US" sz="1400" dirty="0"/>
+          </a:p>
+        </p:txBody>
+      </p:sp>
+      <p:sp>
+        <p:nvSpPr>
+          <p:cNvPr id="14" name="Text 12"/>
+          <p:cNvSpPr/>
+          <p:nvPr/>
+        </p:nvSpPr>
+        <p:spPr>
+          <a:xfrm>
+            <a:off x="996696" y="3593592"/>
+            <a:ext cx="4846320" cy="256032"/>
+          </a:xfrm>
+          <a:prstGeom prst="rect">
+            <a:avLst/>
+          </a:prstGeom>
+          <a:noFill/>
+          <a:ln/>
+        </p:spPr>
+        <p:txBody>
+          <a:bodyPr wrap="square" lIns="0" tIns="0" rIns="0" bIns="0" rtlCol="0" anchor="ctr"/>
+          <a:lstStyle/>
+          <a:p>
+            <a:pPr indent="0" marL="0">
+              <a:buNone/>
+            </a:pPr>
+            <a:r>
+              <a:rPr lang="en-US" sz="1300" b="1" dirty="0">
+                <a:solidFill>
+                  <a:srgbClr val="0B1E1B"/>
+                </a:solidFill>
+                <a:latin typeface="Calibri" pitchFamily="34" charset="0"/>
+                <a:ea typeface="Calibri" pitchFamily="34" charset="-122"/>
+                <a:cs typeface="Calibri" pitchFamily="34" charset="-120"/>
+              </a:rPr>
+              <a:t>Bukti instrumen Gate A dan B</a:t>
+            </a:r>
+            <a:endParaRPr lang="en-US" sz="1300" dirty="0"/>
+          </a:p>
+        </p:txBody>
+      </p:sp>
+      <p:sp>
+        <p:nvSpPr>
+          <p:cNvPr id="15" name="Text 13"/>
+          <p:cNvSpPr/>
+          <p:nvPr/>
+        </p:nvSpPr>
+        <p:spPr>
+          <a:xfrm>
+            <a:off x="996696" y="3849624"/>
+            <a:ext cx="4846320" cy="256032"/>
+          </a:xfrm>
+          <a:prstGeom prst="rect">
+            <a:avLst/>
+          </a:prstGeom>
+          <a:noFill/>
+          <a:ln/>
+        </p:spPr>
+        <p:txBody>
+          <a:bodyPr wrap="square" lIns="0" tIns="0" rIns="0" bIns="0" rtlCol="0" anchor="ctr"/>
+          <a:lstStyle/>
+          <a:p>
+            <a:pPr indent="0" marL="0">
+              <a:buNone/>
+            </a:pPr>
+            <a:r>
+              <a:rPr lang="en-US" sz="1100" dirty="0">
+                <a:solidFill>
+                  <a:srgbClr val="4A635D"/>
+                </a:solidFill>
+                <a:latin typeface="Calibri" pitchFamily="34" charset="0"/>
+                <a:ea typeface="Calibri" pitchFamily="34" charset="-122"/>
+                <a:cs typeface="Calibri" pitchFamily="34" charset="-120"/>
+              </a:rPr>
+              <a:t>130 berkas mentah, manifest SHA-256</a:t>
+            </a:r>
+            <a:endParaRPr lang="en-US" sz="1100" dirty="0"/>
+          </a:p>
+        </p:txBody>
+      </p:sp>
+      <p:sp>
+        <p:nvSpPr>
+          <p:cNvPr id="16" name="Text 14"/>
+          <p:cNvSpPr/>
+          <p:nvPr/>
+        </p:nvSpPr>
+        <p:spPr>
+          <a:xfrm>
+            <a:off x="6035040" y="3593592"/>
+            <a:ext cx="274320" cy="274320"/>
+          </a:xfrm>
+          <a:prstGeom prst="rect">
+            <a:avLst/>
+          </a:prstGeom>
+          <a:noFill/>
+          <a:ln/>
+        </p:spPr>
+        <p:txBody>
+          <a:bodyPr wrap="square" lIns="0" tIns="0" rIns="0" bIns="0" rtlCol="0" anchor="ctr"/>
+          <a:lstStyle/>
+          <a:p>
+            <a:pPr indent="0" marL="0">
+              <a:buNone/>
+            </a:pPr>
+            <a:r>
+              <a:rPr lang="en-US" sz="1400" b="1" dirty="0">
+                <a:solidFill>
+                  <a:srgbClr val="0D8271"/>
+                </a:solidFill>
+                <a:latin typeface="Calibri" pitchFamily="34" charset="0"/>
+                <a:ea typeface="Calibri" pitchFamily="34" charset="-122"/>
+                <a:cs typeface="Calibri" pitchFamily="34" charset="-120"/>
+              </a:rPr>
+              <a:t>✓</a:t>
+            </a:r>
+            <a:endParaRPr lang="en-US" sz="1400" dirty="0"/>
+          </a:p>
+        </p:txBody>
+      </p:sp>
+      <p:sp>
+        <p:nvSpPr>
+          <p:cNvPr id="17" name="Text 15"/>
+          <p:cNvSpPr/>
+          <p:nvPr/>
+        </p:nvSpPr>
+        <p:spPr>
+          <a:xfrm>
+            <a:off x="6345936" y="3593592"/>
+            <a:ext cx="4846320" cy="256032"/>
+          </a:xfrm>
+          <a:prstGeom prst="rect">
+            <a:avLst/>
+          </a:prstGeom>
+          <a:noFill/>
+          <a:ln/>
+        </p:spPr>
+        <p:txBody>
+          <a:bodyPr wrap="square" lIns="0" tIns="0" rIns="0" bIns="0" rtlCol="0" anchor="ctr"/>
+          <a:lstStyle/>
+          <a:p>
+            <a:pPr indent="0" marL="0">
+              <a:buNone/>
+            </a:pPr>
+            <a:r>
+              <a:rPr lang="en-US" sz="1300" b="1" dirty="0">
+                <a:solidFill>
+                  <a:srgbClr val="0B1E1B"/>
+                </a:solidFill>
+                <a:latin typeface="Calibri" pitchFamily="34" charset="0"/>
+                <a:ea typeface="Calibri" pitchFamily="34" charset="-122"/>
+                <a:cs typeface="Calibri" pitchFamily="34" charset="-120"/>
+              </a:rPr>
+              <a:t>Kontrol positif dewasa</a:t>
+            </a:r>
+            <a:endParaRPr lang="en-US" sz="1300" dirty="0"/>
+          </a:p>
+        </p:txBody>
+      </p:sp>
+      <p:sp>
+        <p:nvSpPr>
+          <p:cNvPr id="18" name="Text 16"/>
+          <p:cNvSpPr/>
+          <p:nvPr/>
+        </p:nvSpPr>
+        <p:spPr>
+          <a:xfrm>
+            <a:off x="6345936" y="3849624"/>
+            <a:ext cx="4846320" cy="256032"/>
+          </a:xfrm>
+          <a:prstGeom prst="rect">
+            <a:avLst/>
+          </a:prstGeom>
+          <a:noFill/>
+          <a:ln/>
+        </p:spPr>
+        <p:txBody>
+          <a:bodyPr wrap="square" lIns="0" tIns="0" rIns="0" bIns="0" rtlCol="0" anchor="ctr"/>
+          <a:lstStyle/>
+          <a:p>
+            <a:pPr indent="0" marL="0">
+              <a:buNone/>
+            </a:pPr>
+            <a:r>
+              <a:rPr lang="en-US" sz="1100" dirty="0">
+                <a:solidFill>
+                  <a:srgbClr val="4A635D"/>
+                </a:solidFill>
+                <a:latin typeface="Calibri" pitchFamily="34" charset="0"/>
+                <a:ea typeface="Calibri" pitchFamily="34" charset="-122"/>
+                <a:cs typeface="Calibri" pitchFamily="34" charset="-120"/>
+              </a:rPr>
+              <a:t>provenance kamera-ke-angka lengkap</a:t>
+            </a:r>
+            <a:endParaRPr lang="en-US" sz="1100" dirty="0"/>
+          </a:p>
+        </p:txBody>
+      </p:sp>
+      <p:sp>
+        <p:nvSpPr>
+          <p:cNvPr id="19" name="Text 17"/>
+          <p:cNvSpPr/>
+          <p:nvPr/>
+        </p:nvSpPr>
+        <p:spPr>
+          <a:xfrm>
+            <a:off x="685800" y="4306824"/>
+            <a:ext cx="274320" cy="274320"/>
+          </a:xfrm>
+          <a:prstGeom prst="rect">
+            <a:avLst/>
+          </a:prstGeom>
+          <a:noFill/>
+          <a:ln/>
+        </p:spPr>
+        <p:txBody>
+          <a:bodyPr wrap="square" lIns="0" tIns="0" rIns="0" bIns="0" rtlCol="0" anchor="ctr"/>
+          <a:lstStyle/>
+          <a:p>
+            <a:pPr indent="0" marL="0">
+              <a:buNone/>
+            </a:pPr>
+            <a:r>
+              <a:rPr lang="en-US" sz="1400" b="1" dirty="0">
+                <a:solidFill>
+                  <a:srgbClr val="0D8271"/>
+                </a:solidFill>
+                <a:latin typeface="Calibri" pitchFamily="34" charset="0"/>
+                <a:ea typeface="Calibri" pitchFamily="34" charset="-122"/>
+                <a:cs typeface="Calibri" pitchFamily="34" charset="-120"/>
+              </a:rPr>
+              <a:t>✓</a:t>
+            </a:r>
+            <a:endParaRPr lang="en-US" sz="1400" dirty="0"/>
+          </a:p>
+        </p:txBody>
+      </p:sp>
+      <p:sp>
+        <p:nvSpPr>
+          <p:cNvPr id="20" name="Text 18"/>
+          <p:cNvSpPr/>
+          <p:nvPr/>
+        </p:nvSpPr>
+        <p:spPr>
+          <a:xfrm>
+            <a:off x="996696" y="4306824"/>
+            <a:ext cx="4846320" cy="256032"/>
+          </a:xfrm>
+          <a:prstGeom prst="rect">
+            <a:avLst/>
+          </a:prstGeom>
+          <a:noFill/>
+          <a:ln/>
+        </p:spPr>
+        <p:txBody>
+          <a:bodyPr wrap="square" lIns="0" tIns="0" rIns="0" bIns="0" rtlCol="0" anchor="ctr"/>
+          <a:lstStyle/>
+          <a:p>
+            <a:pPr indent="0" marL="0">
+              <a:buNone/>
+            </a:pPr>
+            <a:r>
+              <a:rPr lang="en-US" sz="1300" b="1" dirty="0">
+                <a:solidFill>
+                  <a:srgbClr val="0B1E1B"/>
+                </a:solidFill>
+                <a:latin typeface="Calibri" pitchFamily="34" charset="0"/>
+                <a:ea typeface="Calibri" pitchFamily="34" charset="-122"/>
+                <a:cs typeface="Calibri" pitchFamily="34" charset="-120"/>
+              </a:rPr>
+              <a:t>Protokol Gate C dan kriteria terimanya</a:t>
+            </a:r>
+            <a:endParaRPr lang="en-US" sz="1300" dirty="0"/>
+          </a:p>
+        </p:txBody>
+      </p:sp>
+      <p:sp>
+        <p:nvSpPr>
+          <p:cNvPr id="21" name="Text 19"/>
+          <p:cNvSpPr/>
+          <p:nvPr/>
+        </p:nvSpPr>
+        <p:spPr>
+          <a:xfrm>
+            <a:off x="996696" y="4562856"/>
+            <a:ext cx="4846320" cy="256032"/>
+          </a:xfrm>
+          <a:prstGeom prst="rect">
+            <a:avLst/>
+          </a:prstGeom>
+          <a:noFill/>
+          <a:ln/>
+        </p:spPr>
+        <p:txBody>
+          <a:bodyPr wrap="square" lIns="0" tIns="0" rIns="0" bIns="0" rtlCol="0" anchor="ctr"/>
+          <a:lstStyle/>
+          <a:p>
+            <a:pPr indent="0" marL="0">
+              <a:buNone/>
+            </a:pPr>
+            <a:r>
+              <a:rPr lang="en-US" sz="1100" dirty="0">
+                <a:solidFill>
+                  <a:srgbClr val="4A635D"/>
+                </a:solidFill>
+                <a:latin typeface="Calibri" pitchFamily="34" charset="0"/>
+                <a:ea typeface="Calibri" pitchFamily="34" charset="-122"/>
+                <a:cs typeface="Calibri" pitchFamily="34" charset="-120"/>
+              </a:rPr>
+              <a:t>beserta empat audit wajib</a:t>
+            </a:r>
+            <a:endParaRPr lang="en-US" sz="1100" dirty="0"/>
+          </a:p>
+        </p:txBody>
+      </p:sp>
+      <p:sp>
+        <p:nvSpPr>
+          <p:cNvPr id="22" name="Text 20"/>
+          <p:cNvSpPr/>
+          <p:nvPr/>
+        </p:nvSpPr>
+        <p:spPr>
+          <a:xfrm>
+            <a:off x="6035040" y="4306824"/>
+            <a:ext cx="274320" cy="274320"/>
+          </a:xfrm>
+          <a:prstGeom prst="rect">
+            <a:avLst/>
+          </a:prstGeom>
+          <a:noFill/>
+          <a:ln/>
+        </p:spPr>
+        <p:txBody>
+          <a:bodyPr wrap="square" lIns="0" tIns="0" rIns="0" bIns="0" rtlCol="0" anchor="ctr"/>
+          <a:lstStyle/>
+          <a:p>
+            <a:pPr indent="0" marL="0">
+              <a:buNone/>
+            </a:pPr>
+            <a:r>
+              <a:rPr lang="en-US" sz="1400" b="1" dirty="0">
+                <a:solidFill>
+                  <a:srgbClr val="0D8271"/>
+                </a:solidFill>
+                <a:latin typeface="Calibri" pitchFamily="34" charset="0"/>
+                <a:ea typeface="Calibri" pitchFamily="34" charset="-122"/>
+                <a:cs typeface="Calibri" pitchFamily="34" charset="-120"/>
+              </a:rPr>
+              <a:t>✓</a:t>
+            </a:r>
+            <a:endParaRPr lang="en-US" sz="1400" dirty="0"/>
+          </a:p>
+        </p:txBody>
+      </p:sp>
+      <p:sp>
+        <p:nvSpPr>
+          <p:cNvPr id="23" name="Text 21"/>
+          <p:cNvSpPr/>
+          <p:nvPr/>
+        </p:nvSpPr>
+        <p:spPr>
+          <a:xfrm>
+            <a:off x="6345936" y="4306824"/>
+            <a:ext cx="4846320" cy="256032"/>
+          </a:xfrm>
+          <a:prstGeom prst="rect">
+            <a:avLst/>
+          </a:prstGeom>
+          <a:noFill/>
+          <a:ln/>
+        </p:spPr>
+        <p:txBody>
+          <a:bodyPr wrap="square" lIns="0" tIns="0" rIns="0" bIns="0" rtlCol="0" anchor="ctr"/>
+          <a:lstStyle/>
+          <a:p>
+            <a:pPr indent="0" marL="0">
+              <a:buNone/>
+            </a:pPr>
+            <a:r>
+              <a:rPr lang="en-US" sz="1300" b="1" dirty="0">
+                <a:solidFill>
+                  <a:srgbClr val="0B1E1B"/>
+                </a:solidFill>
+                <a:latin typeface="Calibri" pitchFamily="34" charset="0"/>
+                <a:ea typeface="Calibri" pitchFamily="34" charset="-122"/>
+                <a:cs typeface="Calibri" pitchFamily="34" charset="-120"/>
+              </a:rPr>
+              <a:t>Simulasi beban rujukan per titik kerja</a:t>
+            </a:r>
+            <a:endParaRPr lang="en-US" sz="1300" dirty="0"/>
+          </a:p>
+        </p:txBody>
+      </p:sp>
+      <p:sp>
+        <p:nvSpPr>
+          <p:cNvPr id="24" name="Text 22"/>
+          <p:cNvSpPr/>
+          <p:nvPr/>
+        </p:nvSpPr>
+        <p:spPr>
+          <a:xfrm>
+            <a:off x="6345936" y="4562856"/>
+            <a:ext cx="4846320" cy="256032"/>
+          </a:xfrm>
+          <a:prstGeom prst="rect">
+            <a:avLst/>
+          </a:prstGeom>
+          <a:noFill/>
+          <a:ln/>
+        </p:spPr>
+        <p:txBody>
+          <a:bodyPr wrap="square" lIns="0" tIns="0" rIns="0" bIns="0" rtlCol="0" anchor="ctr"/>
+          <a:lstStyle/>
+          <a:p>
+            <a:pPr indent="0" marL="0">
+              <a:buNone/>
+            </a:pPr>
+            <a:r>
+              <a:rPr lang="en-US" sz="1100" dirty="0">
+                <a:solidFill>
+                  <a:srgbClr val="4A635D"/>
+                </a:solidFill>
+                <a:latin typeface="Calibri" pitchFamily="34" charset="0"/>
+                <a:ea typeface="Calibri" pitchFamily="34" charset="-122"/>
+                <a:cs typeface="Calibri" pitchFamily="34" charset="-120"/>
+              </a:rPr>
+              <a:t>termasuk titik impas kapasitas</a:t>
+            </a:r>
+            <a:endParaRPr lang="en-US" sz="1100" dirty="0"/>
+          </a:p>
+        </p:txBody>
+      </p:sp>
+      <p:sp>
+        <p:nvSpPr>
+          <p:cNvPr id="25" name="Shape 23"/>
+          <p:cNvSpPr/>
+          <p:nvPr/>
+        </p:nvSpPr>
+        <p:spPr>
+          <a:xfrm>
+            <a:off x="685800" y="5120640"/>
+            <a:ext cx="10424160" cy="914400"/>
           </a:xfrm>
           <a:prstGeom prst="roundRect">
             <a:avLst>
-              <a:gd name="adj" fmla="val 2791"/>
+              <a:gd name="adj" fmla="val 6000"/>
             </a:avLst>
           </a:prstGeom>
           <a:solidFill>
@@ -6245,30 +6886,33 @@
       </p:sp>
       <p:sp>
         <p:nvSpPr>
-          <p:cNvPr id="12" name="Text 10"/>
-          <p:cNvSpPr/>
-          <p:nvPr/>
-        </p:nvSpPr>
-        <p:spPr>
-          <a:xfrm>
-            <a:off x="4480560" y="3035808"/>
-            <a:ext cx="2697480" cy="548640"/>
-          </a:xfrm>
-          <a:prstGeom prst="rect">
-            <a:avLst/>
-          </a:prstGeom>
-          <a:noFill/>
-          <a:ln/>
-        </p:spPr>
-        <p:txBody>
-          <a:bodyPr wrap="square" lIns="0" tIns="0" rIns="0" bIns="0" rtlCol="0" anchor="ctr"/>
-          <a:lstStyle/>
-          <a:p>
-            <a:pPr indent="0" marL="0">
-              <a:buNone/>
-            </a:pPr>
-            <a:r>
-              <a:rPr lang="en-US" sz="3200" b="1" dirty="0">
+          <p:cNvPr id="26" name="Text 24"/>
+          <p:cNvSpPr/>
+          <p:nvPr/>
+        </p:nvSpPr>
+        <p:spPr>
+          <a:xfrm>
+            <a:off x="1051560" y="5230368"/>
+            <a:ext cx="2011680" cy="442452"/>
+          </a:xfrm>
+          <a:prstGeom prst="rect">
+            <a:avLst/>
+          </a:prstGeom>
+          <a:noFill/>
+          <a:ln/>
+        </p:spPr>
+        <p:txBody>
+          <a:bodyPr wrap="square" lIns="0" tIns="0" rIns="0" bIns="0" rtlCol="0" anchor="ctr"/>
+          <a:lstStyle/>
+          <a:p>
+            <a:pPr indent="0" marL="0">
+              <a:lnSpc>
+                <a:spcPts val="3000"/>
+              </a:lnSpc>
+              <a:buNone/>
+            </a:pPr>
+            <a:r>
+              <a:rPr lang="en-US" sz="3000" b="1" dirty="0">
                 <a:solidFill>
                   <a:srgbClr val="0D8271"/>
                 </a:solidFill>
@@ -6276,41 +6920,38 @@
                 <a:ea typeface="Cambria" pitchFamily="34" charset="-122"/>
                 <a:cs typeface="Cambria" pitchFamily="34" charset="-120"/>
               </a:rPr>
-              <a:t>Rp 2,29 jt</a:t>
-            </a:r>
-            <a:endParaRPr lang="en-US" sz="3200" dirty="0"/>
-          </a:p>
-        </p:txBody>
-      </p:sp>
-      <p:sp>
-        <p:nvSpPr>
-          <p:cNvPr id="13" name="Text 11"/>
-          <p:cNvSpPr/>
-          <p:nvPr/>
-        </p:nvSpPr>
-        <p:spPr>
-          <a:xfrm>
-            <a:off x="4480560" y="3639312"/>
-            <a:ext cx="2697480" cy="457200"/>
-          </a:xfrm>
-          <a:prstGeom prst="rect">
-            <a:avLst/>
-          </a:prstGeom>
-          <a:noFill/>
-          <a:ln/>
-        </p:spPr>
-        <p:txBody>
-          <a:bodyPr wrap="square" lIns="0" tIns="0" rIns="0" bIns="0" rtlCol="0" anchor="ctr"/>
-          <a:lstStyle/>
-          <a:p>
-            <a:pPr indent="0" marL="0">
-              <a:lnSpc>
-                <a:spcPts val="1700"/>
-              </a:lnSpc>
-              <a:buNone/>
-            </a:pPr>
-            <a:r>
-              <a:rPr lang="en-US" sz="1300" b="1" dirty="0">
+              <a:t>10/14</a:t>
+            </a:r>
+            <a:endParaRPr lang="en-US" sz="3000" dirty="0"/>
+          </a:p>
+        </p:txBody>
+      </p:sp>
+      <p:sp>
+        <p:nvSpPr>
+          <p:cNvPr id="27" name="Text 25"/>
+          <p:cNvSpPr/>
+          <p:nvPr/>
+        </p:nvSpPr>
+        <p:spPr>
+          <a:xfrm>
+            <a:off x="1051560" y="5727684"/>
+            <a:ext cx="2011680" cy="274320"/>
+          </a:xfrm>
+          <a:prstGeom prst="rect">
+            <a:avLst/>
+          </a:prstGeom>
+          <a:noFill/>
+          <a:ln/>
+        </p:spPr>
+        <p:txBody>
+          <a:bodyPr wrap="square" lIns="0" tIns="0" rIns="0" bIns="0" rtlCol="0" anchor="ctr"/>
+          <a:lstStyle/>
+          <a:p>
+            <a:pPr indent="0" marL="0">
+              <a:buNone/>
+            </a:pPr>
+            <a:r>
+              <a:rPr lang="en-US" sz="1400" b="1" dirty="0">
                 <a:solidFill>
                   <a:srgbClr val="14302B"/>
                 </a:solidFill>
@@ -6318,22 +6959,22 @@
                 <a:ea typeface="Calibri" pitchFamily="34" charset="-122"/>
                 <a:cs typeface="Calibri" pitchFamily="34" charset="-120"/>
               </a:rPr>
-              <a:t>Neurogaze · dirotasi 4 Posyandu</a:t>
-            </a:r>
-            <a:endParaRPr lang="en-US" sz="1300" dirty="0"/>
-          </a:p>
-        </p:txBody>
-      </p:sp>
-      <p:sp>
-        <p:nvSpPr>
-          <p:cNvPr id="14" name="Text 12"/>
-          <p:cNvSpPr/>
-          <p:nvPr/>
-        </p:nvSpPr>
-        <p:spPr>
-          <a:xfrm>
-            <a:off x="4480560" y="4114800"/>
-            <a:ext cx="2697480" cy="502920"/>
+              <a:t>berkas paket mitra siap kirim</a:t>
+            </a:r>
+            <a:endParaRPr lang="en-US" sz="1400" dirty="0"/>
+          </a:p>
+        </p:txBody>
+      </p:sp>
+      <p:sp>
+        <p:nvSpPr>
+          <p:cNvPr id="28" name="Text 26"/>
+          <p:cNvSpPr/>
+          <p:nvPr/>
+        </p:nvSpPr>
+        <p:spPr>
+          <a:xfrm>
+            <a:off x="3520440" y="5285232"/>
+            <a:ext cx="7315200" cy="658368"/>
           </a:xfrm>
           <a:prstGeom prst="rect">
             <a:avLst/>
@@ -6347,292 +6988,61 @@
           <a:p>
             <a:pPr indent="0" marL="0">
               <a:lnSpc>
-                <a:spcPts val="1500"/>
+                <a:spcPts val="1600"/>
               </a:lnSpc>
               <a:buNone/>
             </a:pPr>
             <a:r>
-              <a:rPr lang="en-US" sz="1100" dirty="0">
-                <a:solidFill>
-                  <a:srgbClr val="4A635D"/>
+              <a:rPr lang="en-US" sz="1200" dirty="0">
+                <a:solidFill>
+                  <a:srgbClr val="14302B"/>
                 </a:solidFill>
                 <a:latin typeface="Calibri" pitchFamily="34" charset="0"/>
                 <a:ea typeface="Calibri" pitchFamily="34" charset="-122"/>
                 <a:cs typeface="Calibri" pitchFamily="34" charset="-120"/>
               </a:rPr>
-              <a:t>1.000 sesi × Rp 3.500 ÷ 1,53 kasus</a:t>
-            </a:r>
-            <a:endParaRPr lang="en-US" sz="1100" dirty="0"/>
-          </a:p>
-        </p:txBody>
-      </p:sp>
-      <p:sp>
-        <p:nvSpPr>
-          <p:cNvPr id="15" name="Shape 13"/>
-          <p:cNvSpPr/>
-          <p:nvPr/>
-        </p:nvSpPr>
-        <p:spPr>
-          <a:xfrm>
-            <a:off x="7726680" y="2788920"/>
-            <a:ext cx="3246120" cy="1965960"/>
-          </a:xfrm>
-          <a:prstGeom prst="roundRect">
-            <a:avLst>
-              <a:gd name="adj" fmla="val 2791"/>
-            </a:avLst>
-          </a:prstGeom>
-          <a:solidFill>
-            <a:srgbClr val="FFFFFF"/>
-          </a:solidFill>
-          <a:ln w="12700">
-            <a:solidFill>
-              <a:srgbClr val="DBE4E1"/>
-            </a:solidFill>
-            <a:prstDash val="solid"/>
-          </a:ln>
-        </p:spPr>
-      </p:sp>
-      <p:sp>
-        <p:nvSpPr>
-          <p:cNvPr id="16" name="Text 14"/>
-          <p:cNvSpPr/>
-          <p:nvPr/>
-        </p:nvSpPr>
-        <p:spPr>
-          <a:xfrm>
-            <a:off x="8001000" y="3035808"/>
-            <a:ext cx="2697480" cy="548640"/>
-          </a:xfrm>
-          <a:prstGeom prst="rect">
-            <a:avLst/>
-          </a:prstGeom>
-          <a:noFill/>
-          <a:ln/>
-        </p:spPr>
-        <p:txBody>
-          <a:bodyPr wrap="square" lIns="0" tIns="0" rIns="0" bIns="0" rtlCol="0" anchor="ctr"/>
-          <a:lstStyle/>
-          <a:p>
-            <a:pPr indent="0" marL="0">
-              <a:buNone/>
-            </a:pPr>
-            <a:r>
-              <a:rPr lang="en-US" sz="3200" b="1" dirty="0">
-                <a:solidFill>
-                  <a:srgbClr val="B1442C"/>
-                </a:solidFill>
-                <a:latin typeface="Cambria" pitchFamily="34" charset="0"/>
-                <a:ea typeface="Cambria" pitchFamily="34" charset="-122"/>
-                <a:cs typeface="Cambria" pitchFamily="34" charset="-120"/>
-              </a:rPr>
-              <a:t>Rp 9,70 jt</a:t>
-            </a:r>
-            <a:endParaRPr lang="en-US" sz="3200" dirty="0"/>
-          </a:p>
-        </p:txBody>
-      </p:sp>
-      <p:sp>
-        <p:nvSpPr>
-          <p:cNvPr id="17" name="Text 15"/>
-          <p:cNvSpPr/>
-          <p:nvPr/>
-        </p:nvSpPr>
-        <p:spPr>
-          <a:xfrm>
-            <a:off x="8001000" y="3639312"/>
-            <a:ext cx="2697480" cy="457200"/>
-          </a:xfrm>
-          <a:prstGeom prst="rect">
-            <a:avLst/>
-          </a:prstGeom>
-          <a:noFill/>
-          <a:ln/>
-        </p:spPr>
-        <p:txBody>
-          <a:bodyPr wrap="square" lIns="0" tIns="0" rIns="0" bIns="0" rtlCol="0" anchor="ctr"/>
-          <a:lstStyle/>
-          <a:p>
-            <a:pPr indent="0" marL="0">
-              <a:lnSpc>
-                <a:spcPts val="1700"/>
-              </a:lnSpc>
-              <a:buNone/>
-            </a:pPr>
-            <a:r>
-              <a:rPr lang="en-US" sz="1300" b="1" dirty="0">
-                <a:solidFill>
-                  <a:srgbClr val="14302B"/>
+              <a:t>Empat sisanya — naskah kaji etik, lembar persetujuan orang tua, perjanjian data — menuntut mitra sebagai penanggung jawabnya, dan tidak dapat dikarang lebih dulu. “Kami belum punya mitra” dan “paketnya siap, mitranya yang belum ada” menggambarkan keadaan yang sama; hanya satu yang menggambarkan pekerjaannya.</a:t>
+            </a:r>
+            <a:endParaRPr lang="en-US" sz="1200" dirty="0"/>
+          </a:p>
+        </p:txBody>
+      </p:sp>
+      <p:sp>
+        <p:nvSpPr>
+          <p:cNvPr id="29" name="Text 27"/>
+          <p:cNvSpPr/>
+          <p:nvPr/>
+        </p:nvSpPr>
+        <p:spPr>
+          <a:xfrm>
+            <a:off x="685800" y="6144768"/>
+            <a:ext cx="10424160" cy="274320"/>
+          </a:xfrm>
+          <a:prstGeom prst="rect">
+            <a:avLst/>
+          </a:prstGeom>
+          <a:noFill/>
+          <a:ln/>
+        </p:spPr>
+        <p:txBody>
+          <a:bodyPr wrap="square" lIns="0" tIns="0" rIns="0" bIns="0" rtlCol="0" anchor="ctr"/>
+          <a:lstStyle/>
+          <a:p>
+            <a:pPr indent="0" marL="0">
+              <a:buNone/>
+            </a:pPr>
+            <a:r>
+              <a:rPr lang="en-US" sz="1000" dirty="0">
+                <a:solidFill>
+                  <a:srgbClr val="4A635D"/>
                 </a:solidFill>
                 <a:latin typeface="Calibri" pitchFamily="34" charset="0"/>
                 <a:ea typeface="Calibri" pitchFamily="34" charset="-122"/>
                 <a:cs typeface="Calibri" pitchFamily="34" charset="-120"/>
               </a:rPr>
-              <a:t>EarliPoint · satu pemeriksaan</a:t>
-            </a:r>
-            <a:endParaRPr lang="en-US" sz="1300" dirty="0"/>
-          </a:p>
-        </p:txBody>
-      </p:sp>
-      <p:sp>
-        <p:nvSpPr>
-          <p:cNvPr id="18" name="Text 16"/>
-          <p:cNvSpPr/>
-          <p:nvPr/>
-        </p:nvSpPr>
-        <p:spPr>
-          <a:xfrm>
-            <a:off x="8001000" y="4114800"/>
-            <a:ext cx="2697480" cy="502920"/>
-          </a:xfrm>
-          <a:prstGeom prst="rect">
-            <a:avLst/>
-          </a:prstGeom>
-          <a:noFill/>
-          <a:ln/>
-        </p:spPr>
-        <p:txBody>
-          <a:bodyPr wrap="square" lIns="0" tIns="0" rIns="0" bIns="0" rtlCol="0" anchor="ctr"/>
-          <a:lstStyle/>
-          <a:p>
-            <a:pPr indent="0" marL="0">
-              <a:lnSpc>
-                <a:spcPts val="1500"/>
-              </a:lnSpc>
-              <a:buNone/>
-            </a:pPr>
-            <a:r>
-              <a:rPr lang="en-US" sz="1100" dirty="0">
-                <a:solidFill>
-                  <a:srgbClr val="4A635D"/>
-                </a:solidFill>
-                <a:latin typeface="Calibri" pitchFamily="34" charset="0"/>
-                <a:ea typeface="Calibri" pitchFamily="34" charset="-122"/>
-                <a:cs typeface="Calibri" pitchFamily="34" charset="-120"/>
-              </a:rPr>
-              <a:t>Satu anak, sekali periksa, di klinik</a:t>
-            </a:r>
-            <a:endParaRPr lang="en-US" sz="1100" dirty="0"/>
-          </a:p>
-        </p:txBody>
-      </p:sp>
-      <p:sp>
-        <p:nvSpPr>
-          <p:cNvPr id="19" name="Text 17"/>
-          <p:cNvSpPr/>
-          <p:nvPr/>
-        </p:nvSpPr>
-        <p:spPr>
-          <a:xfrm>
-            <a:off x="685800" y="4983480"/>
-            <a:ext cx="10424160" cy="640080"/>
-          </a:xfrm>
-          <a:prstGeom prst="rect">
-            <a:avLst/>
-          </a:prstGeom>
-          <a:noFill/>
-          <a:ln/>
-        </p:spPr>
-        <p:txBody>
-          <a:bodyPr wrap="square" lIns="0" tIns="0" rIns="0" bIns="0" rtlCol="0" anchor="ctr"/>
-          <a:lstStyle/>
-          <a:p>
-            <a:pPr indent="0" marL="0">
-              <a:lnSpc>
-                <a:spcPts val="2400"/>
-              </a:lnSpc>
-              <a:buNone/>
-            </a:pPr>
-            <a:r>
-              <a:rPr lang="en-US" sz="1700" b="1" dirty="0">
-                <a:solidFill>
-                  <a:srgbClr val="0B1E1B"/>
-                </a:solidFill>
-                <a:latin typeface="Cambria" pitchFamily="34" charset="0"/>
-                <a:ea typeface="Cambria" pitchFamily="34" charset="-122"/>
-                <a:cs typeface="Cambria" pitchFamily="34" charset="-120"/>
-              </a:rPr>
-              <a:t>Bila titik operasinya terreplikasi, menemukan satu kasus harganya kira-kira sekali pemeriksaan EarliPoint — seperempatnya bila satu tablet dirotasi ke empat Posyandu.</a:t>
-            </a:r>
-            <a:endParaRPr lang="en-US" sz="1700" dirty="0"/>
-          </a:p>
-        </p:txBody>
-      </p:sp>
-      <p:sp>
-        <p:nvSpPr>
-          <p:cNvPr id="20" name="Text 18"/>
-          <p:cNvSpPr/>
-          <p:nvPr/>
-        </p:nvSpPr>
-        <p:spPr>
-          <a:xfrm>
-            <a:off x="685800" y="5650992"/>
-            <a:ext cx="10424160" cy="274320"/>
-          </a:xfrm>
-          <a:prstGeom prst="rect">
-            <a:avLst/>
-          </a:prstGeom>
-          <a:noFill/>
-          <a:ln/>
-        </p:spPr>
-        <p:txBody>
-          <a:bodyPr wrap="square" lIns="0" tIns="0" rIns="0" bIns="0" rtlCol="0" anchor="ctr"/>
-          <a:lstStyle/>
-          <a:p>
-            <a:pPr indent="0" marL="0">
-              <a:buNone/>
-            </a:pPr>
-            <a:r>
-              <a:rPr lang="en-US" sz="1050" b="1" dirty="0">
-                <a:solidFill>
-                  <a:srgbClr val="14302B"/>
-                </a:solidFill>
-                <a:latin typeface="Calibri" pitchFamily="34" charset="0"/>
-                <a:ea typeface="Calibri" pitchFamily="34" charset="-122"/>
-                <a:cs typeface="Calibri" pitchFamily="34" charset="-120"/>
-              </a:rPr>
-              <a:t>Yang belum terukur: waktu kader, pelatihan, dukungan, cetak, dudukan, pengulangan sesi, pemeliharaan, penggantian perangkat, dan tindak lanjut klinis.</a:t>
-            </a:r>
-            <a:endParaRPr lang="en-US" sz="1050" dirty="0"/>
-          </a:p>
-        </p:txBody>
-      </p:sp>
-      <p:sp>
-        <p:nvSpPr>
-          <p:cNvPr id="21" name="Text 19"/>
-          <p:cNvSpPr/>
-          <p:nvPr/>
-        </p:nvSpPr>
-        <p:spPr>
-          <a:xfrm>
-            <a:off x="685800" y="5943600"/>
-            <a:ext cx="10424160" cy="274320"/>
-          </a:xfrm>
-          <a:prstGeom prst="rect">
-            <a:avLst/>
-          </a:prstGeom>
-          <a:noFill/>
-          <a:ln/>
-        </p:spPr>
-        <p:txBody>
-          <a:bodyPr wrap="square" lIns="0" tIns="0" rIns="0" bIns="0" rtlCol="0" anchor="ctr"/>
-          <a:lstStyle/>
-          <a:p>
-            <a:pPr indent="0" marL="0">
-              <a:buNone/>
-            </a:pPr>
-            <a:r>
-              <a:rPr lang="en-US" sz="1050" dirty="0">
-                <a:solidFill>
-                  <a:srgbClr val="4A635D"/>
-                </a:solidFill>
-                <a:latin typeface="Calibri" pitchFamily="34" charset="0"/>
-                <a:ea typeface="Calibri" pitchFamily="34" charset="-122"/>
-                <a:cs typeface="Calibri" pitchFamily="34" charset="-120"/>
-              </a:rPr>
-              <a:t>Asumsi dinyatakan di docs/dampak_dan_adopsi.md · kohort 1.000, prevalensi 1%, cakupan teknis 90%</a:t>
-            </a:r>
-            <a:endParaRPr lang="en-US" sz="1050" dirty="0"/>
+              <a:t>Rinciannya di docs/paket_mitra.md</a:t>
+            </a:r>
+            <a:endParaRPr lang="en-US" sz="1000" dirty="0"/>
           </a:p>
         </p:txBody>
       </p:sp>
@@ -6753,7 +7163,7 @@
                 <a:ea typeface="Calibri" pitchFamily="34" charset="-122"/>
                 <a:cs typeface="Calibri" pitchFamily="34" charset="-120"/>
               </a:rPr>
-              <a:t>Jalur adopsi</a:t>
+              <a:t>Dampak dan biaya</a:t>
             </a:r>
             <a:endParaRPr lang="en-US" sz="1200" dirty="0"/>
           </a:p>
@@ -6795,7 +7205,7 @@
                 <a:ea typeface="Cambria" pitchFamily="34" charset="-122"/>
                 <a:cs typeface="Cambria" pitchFamily="34" charset="-120"/>
               </a:rPr>
-              <a:t>Ia menempel pada alur yang sudah jalan</a:t>
+              <a:t>Ambil metrik yang paling keras terhadap kami</a:t>
             </a:r>
             <a:endParaRPr lang="en-US" sz="3200" dirty="0"/>
           </a:p>
@@ -6810,7 +7220,7 @@
         <p:spPr>
           <a:xfrm>
             <a:off x="685800" y="2103120"/>
-            <a:ext cx="10424160" cy="548640"/>
+            <a:ext cx="10424160" cy="502920"/>
           </a:xfrm>
           <a:prstGeom prst="rect">
             <a:avLst/>
@@ -6829,15 +7239,15 @@
               <a:buNone/>
             </a:pPr>
             <a:r>
-              <a:rPr lang="en-US" sz="1500" dirty="0">
-                <a:solidFill>
-                  <a:srgbClr val="14302B"/>
+              <a:rPr lang="en-US" sz="1500" b="1" dirty="0">
+                <a:solidFill>
+                  <a:srgbClr val="B1442C"/>
                 </a:solidFill>
                 <a:latin typeface="Calibri" pitchFamily="34" charset="0"/>
                 <a:ea typeface="Calibri" pitchFamily="34" charset="-122"/>
                 <a:cs typeface="Calibri" pitchFamily="34" charset="-120"/>
               </a:rPr>
-              <a:t>Alat ini tidak menggantikan apa pun. Ia menempel: sesi 67 detik sesudah penimbangan bulanan, laporan satu halaman diserahkan ke Puskesmas, dibaca berdampingan dengan SDIDTK.</a:t>
+              <a:t>Skenario, bukan hasil terukur: angka per kasus ini berlaku hanya bila titik operasi protokol penuh berhasil direplikasi pada balita Indonesia. Hari ini titik itu ditahan.</a:t>
             </a:r>
             <a:endParaRPr lang="en-US" sz="1500" dirty="0"/>
           </a:p>
@@ -6845,72 +7255,99 @@
       </p:sp>
       <p:sp>
         <p:nvSpPr>
-          <p:cNvPr id="7" name="Text 5"/>
-          <p:cNvSpPr/>
-          <p:nvPr/>
-        </p:nvSpPr>
-        <p:spPr>
-          <a:xfrm>
-            <a:off x="685800" y="2926080"/>
-            <a:ext cx="3291840" cy="1002890"/>
-          </a:xfrm>
-          <a:prstGeom prst="rect">
-            <a:avLst/>
-          </a:prstGeom>
-          <a:noFill/>
-          <a:ln/>
-        </p:spPr>
-        <p:txBody>
-          <a:bodyPr wrap="square" lIns="0" tIns="0" rIns="0" bIns="0" rtlCol="0" anchor="ctr"/>
-          <a:lstStyle/>
-          <a:p>
-            <a:pPr indent="0" marL="0">
-              <a:lnSpc>
-                <a:spcPts val="6800"/>
-              </a:lnSpc>
-              <a:buNone/>
-            </a:pPr>
-            <a:r>
-              <a:rPr lang="en-US" sz="6800" b="1" dirty="0">
-                <a:solidFill>
-                  <a:srgbClr val="0D8271"/>
+          <p:cNvPr id="7" name="Shape 5"/>
+          <p:cNvSpPr/>
+          <p:nvPr/>
+        </p:nvSpPr>
+        <p:spPr>
+          <a:xfrm>
+            <a:off x="685800" y="2788920"/>
+            <a:ext cx="3246120" cy="1965960"/>
+          </a:xfrm>
+          <a:prstGeom prst="roundRect">
+            <a:avLst>
+              <a:gd name="adj" fmla="val 2791"/>
+            </a:avLst>
+          </a:prstGeom>
+          <a:solidFill>
+            <a:srgbClr val="FFFFFF"/>
+          </a:solidFill>
+          <a:ln w="12700">
+            <a:solidFill>
+              <a:srgbClr val="DBE4E1"/>
+            </a:solidFill>
+            <a:prstDash val="solid"/>
+          </a:ln>
+        </p:spPr>
+      </p:sp>
+      <p:sp>
+        <p:nvSpPr>
+          <p:cNvPr id="8" name="Text 6"/>
+          <p:cNvSpPr/>
+          <p:nvPr/>
+        </p:nvSpPr>
+        <p:spPr>
+          <a:xfrm>
+            <a:off x="960120" y="3035808"/>
+            <a:ext cx="2697480" cy="548640"/>
+          </a:xfrm>
+          <a:prstGeom prst="rect">
+            <a:avLst/>
+          </a:prstGeom>
+          <a:noFill/>
+          <a:ln/>
+        </p:spPr>
+        <p:txBody>
+          <a:bodyPr wrap="square" lIns="0" tIns="0" rIns="0" bIns="0" rtlCol="0" anchor="ctr"/>
+          <a:lstStyle/>
+          <a:p>
+            <a:pPr indent="0" marL="0">
+              <a:buNone/>
+            </a:pPr>
+            <a:r>
+              <a:rPr lang="en-US" sz="3200" b="1" dirty="0">
+                <a:solidFill>
+                  <a:srgbClr val="0B1E1B"/>
                 </a:solidFill>
                 <a:latin typeface="Cambria" pitchFamily="34" charset="0"/>
                 <a:ea typeface="Cambria" pitchFamily="34" charset="-122"/>
                 <a:cs typeface="Cambria" pitchFamily="34" charset="-120"/>
               </a:rPr>
-              <a:t>~700</a:t>
-            </a:r>
-            <a:endParaRPr lang="en-US" sz="6800" dirty="0"/>
-          </a:p>
-        </p:txBody>
-      </p:sp>
-      <p:sp>
-        <p:nvSpPr>
-          <p:cNvPr id="8" name="Text 6"/>
-          <p:cNvSpPr/>
-          <p:nvPr/>
-        </p:nvSpPr>
-        <p:spPr>
-          <a:xfrm>
-            <a:off x="685800" y="3983834"/>
-            <a:ext cx="3291840" cy="274320"/>
-          </a:xfrm>
-          <a:prstGeom prst="rect">
-            <a:avLst/>
-          </a:prstGeom>
-          <a:noFill/>
-          <a:ln/>
-        </p:spPr>
-        <p:txBody>
-          <a:bodyPr wrap="square" lIns="0" tIns="0" rIns="0" bIns="0" rtlCol="0" anchor="ctr"/>
-          <a:lstStyle/>
-          <a:p>
-            <a:pPr indent="0" marL="0">
-              <a:buNone/>
-            </a:pPr>
-            <a:r>
-              <a:rPr lang="en-US" sz="1400" b="1" dirty="0">
+              <a:t>Rp 9,08 jt</a:t>
+            </a:r>
+            <a:endParaRPr lang="en-US" sz="3200" dirty="0"/>
+          </a:p>
+        </p:txBody>
+      </p:sp>
+      <p:sp>
+        <p:nvSpPr>
+          <p:cNvPr id="9" name="Text 7"/>
+          <p:cNvSpPr/>
+          <p:nvPr/>
+        </p:nvSpPr>
+        <p:spPr>
+          <a:xfrm>
+            <a:off x="960120" y="3639312"/>
+            <a:ext cx="2697480" cy="457200"/>
+          </a:xfrm>
+          <a:prstGeom prst="rect">
+            <a:avLst/>
+          </a:prstGeom>
+          <a:noFill/>
+          <a:ln/>
+        </p:spPr>
+        <p:txBody>
+          <a:bodyPr wrap="square" lIns="0" tIns="0" rIns="0" bIns="0" rtlCol="0" anchor="ctr"/>
+          <a:lstStyle/>
+          <a:p>
+            <a:pPr indent="0" marL="0">
+              <a:lnSpc>
+                <a:spcPts val="1700"/>
+              </a:lnSpc>
+              <a:buNone/>
+            </a:pPr>
+            <a:r>
+              <a:rPr lang="en-US" sz="1300" b="1" dirty="0">
                 <a:solidFill>
                   <a:srgbClr val="14302B"/>
                 </a:solidFill>
@@ -6918,22 +7355,22 @@
                 <a:ea typeface="Calibri" pitchFamily="34" charset="-122"/>
                 <a:cs typeface="Calibri" pitchFamily="34" charset="-120"/>
               </a:rPr>
-              <a:t>sesi dapat dinilai per tahun — hipotetis</a:t>
-            </a:r>
-            <a:endParaRPr lang="en-US" sz="1400" dirty="0"/>
-          </a:p>
-        </p:txBody>
-      </p:sp>
-      <p:sp>
-        <p:nvSpPr>
-          <p:cNvPr id="9" name="Text 7"/>
-          <p:cNvSpPr/>
-          <p:nvPr/>
-        </p:nvSpPr>
-        <p:spPr>
-          <a:xfrm>
-            <a:off x="685800" y="4294730"/>
-            <a:ext cx="3291840" cy="640080"/>
+              <a:t>Neurogaze · 1 Posyandu</a:t>
+            </a:r>
+            <a:endParaRPr lang="en-US" sz="1300" dirty="0"/>
+          </a:p>
+        </p:txBody>
+      </p:sp>
+      <p:sp>
+        <p:nvSpPr>
+          <p:cNvPr id="10" name="Text 8"/>
+          <p:cNvSpPr/>
+          <p:nvPr/>
+        </p:nvSpPr>
+        <p:spPr>
+          <a:xfrm>
+            <a:off x="960120" y="4114800"/>
+            <a:ext cx="2697480" cy="502920"/>
           </a:xfrm>
           <a:prstGeom prst="rect">
             <a:avLst/>
@@ -6952,7 +7389,7 @@
               <a:buNone/>
             </a:pPr>
             <a:r>
-              <a:rPr lang="en-US" sz="1200" dirty="0">
+              <a:rPr lang="en-US" sz="1100" dirty="0">
                 <a:solidFill>
                   <a:srgbClr val="4A635D"/>
                 </a:solidFill>
@@ -6960,149 +7397,26 @@
                 <a:ea typeface="Calibri" pitchFamily="34" charset="-122"/>
                 <a:cs typeface="Calibri" pitchFamily="34" charset="-120"/>
               </a:rPr>
-              <a:t>Aritmetika skala: 30 Posyandu × 40 anak layak, dikurangi attrition 42%. Skala rekrutmen, bukan rencana operasional.</a:t>
-            </a:r>
-            <a:endParaRPr lang="en-US" sz="1200" dirty="0"/>
-          </a:p>
-        </p:txBody>
-      </p:sp>
-      <p:sp>
-        <p:nvSpPr>
-          <p:cNvPr id="10" name="Text 8"/>
-          <p:cNvSpPr/>
-          <p:nvPr/>
-        </p:nvSpPr>
-        <p:spPr>
-          <a:xfrm>
-            <a:off x="4434840" y="2926080"/>
-            <a:ext cx="3291840" cy="1002890"/>
-          </a:xfrm>
-          <a:prstGeom prst="rect">
-            <a:avLst/>
-          </a:prstGeom>
-          <a:noFill/>
-          <a:ln/>
-        </p:spPr>
-        <p:txBody>
-          <a:bodyPr wrap="square" lIns="0" tIns="0" rIns="0" bIns="0" rtlCol="0" anchor="ctr"/>
-          <a:lstStyle/>
-          <a:p>
-            <a:pPr indent="0" marL="0">
-              <a:lnSpc>
-                <a:spcPts val="6800"/>
-              </a:lnSpc>
-              <a:buNone/>
-            </a:pPr>
-            <a:r>
-              <a:rPr lang="en-US" sz="6800" b="1" dirty="0">
-                <a:solidFill>
-                  <a:srgbClr val="4A635D"/>
-                </a:solidFill>
-                <a:latin typeface="Cambria" pitchFamily="34" charset="0"/>
-                <a:ea typeface="Cambria" pitchFamily="34" charset="-122"/>
-                <a:cs typeface="Cambria" pitchFamily="34" charset="-120"/>
-              </a:rPr>
-              <a:t>475</a:t>
-            </a:r>
-            <a:endParaRPr lang="en-US" sz="6800" dirty="0"/>
-          </a:p>
-        </p:txBody>
-      </p:sp>
-      <p:sp>
-        <p:nvSpPr>
-          <p:cNvPr id="11" name="Text 9"/>
-          <p:cNvSpPr/>
-          <p:nvPr/>
-        </p:nvSpPr>
-        <p:spPr>
-          <a:xfrm>
-            <a:off x="4434840" y="3983834"/>
-            <a:ext cx="3291840" cy="274320"/>
-          </a:xfrm>
-          <a:prstGeom prst="rect">
-            <a:avLst/>
-          </a:prstGeom>
-          <a:noFill/>
-          <a:ln/>
-        </p:spPr>
-        <p:txBody>
-          <a:bodyPr wrap="square" lIns="0" tIns="0" rIns="0" bIns="0" rtlCol="0" anchor="ctr"/>
-          <a:lstStyle/>
-          <a:p>
-            <a:pPr indent="0" marL="0">
-              <a:buNone/>
-            </a:pPr>
-            <a:r>
-              <a:rPr lang="en-US" sz="1400" b="1" dirty="0">
-                <a:solidFill>
-                  <a:srgbClr val="14302B"/>
-                </a:solidFill>
-                <a:latin typeface="Calibri" pitchFamily="34" charset="0"/>
-                <a:ea typeface="Calibri" pitchFamily="34" charset="-122"/>
-                <a:cs typeface="Calibri" pitchFamily="34" charset="-120"/>
-              </a:rPr>
-              <a:t>kohort Nature Medicine</a:t>
-            </a:r>
-            <a:endParaRPr lang="en-US" sz="1400" dirty="0"/>
-          </a:p>
-        </p:txBody>
-      </p:sp>
-      <p:sp>
-        <p:nvSpPr>
-          <p:cNvPr id="12" name="Text 10"/>
-          <p:cNvSpPr/>
-          <p:nvPr/>
-        </p:nvSpPr>
-        <p:spPr>
-          <a:xfrm>
-            <a:off x="4434840" y="4294730"/>
-            <a:ext cx="3291840" cy="640080"/>
-          </a:xfrm>
-          <a:prstGeom prst="rect">
-            <a:avLst/>
-          </a:prstGeom>
-          <a:noFill/>
-          <a:ln/>
-        </p:spPr>
-        <p:txBody>
-          <a:bodyPr wrap="square" lIns="0" tIns="0" rIns="0" bIns="0" rtlCol="0" anchor="ctr"/>
-          <a:lstStyle/>
-          <a:p>
-            <a:pPr indent="0" marL="0">
-              <a:lnSpc>
-                <a:spcPts val="1500"/>
-              </a:lnSpc>
-              <a:buNone/>
-            </a:pPr>
-            <a:r>
-              <a:rPr lang="en-US" sz="1200" dirty="0">
-                <a:solidFill>
-                  <a:srgbClr val="4A635D"/>
-                </a:solidFill>
-                <a:latin typeface="Calibri" pitchFamily="34" charset="0"/>
-                <a:ea typeface="Calibri" pitchFamily="34" charset="-122"/>
-                <a:cs typeface="Calibri" pitchFamily="34" charset="-120"/>
-              </a:rPr>
-              <a:t>Studi SenseToKnow yang jadi acuan kami.</a:t>
-            </a:r>
-            <a:endParaRPr lang="en-US" sz="1200" dirty="0"/>
-          </a:p>
-        </p:txBody>
-      </p:sp>
-      <p:sp>
-        <p:nvSpPr>
-          <p:cNvPr id="13" name="Shape 11"/>
-          <p:cNvSpPr/>
-          <p:nvPr/>
-        </p:nvSpPr>
-        <p:spPr>
-          <a:xfrm>
-            <a:off x="7909560" y="2880360"/>
-            <a:ext cx="3200400" cy="2194560"/>
+              <a:t>1.000 sesi × Rp 13.900 ÷ 1,53 kasus</a:t>
+            </a:r>
+            <a:endParaRPr lang="en-US" sz="1100" dirty="0"/>
+          </a:p>
+        </p:txBody>
+      </p:sp>
+      <p:sp>
+        <p:nvSpPr>
+          <p:cNvPr id="11" name="Shape 9"/>
+          <p:cNvSpPr/>
+          <p:nvPr/>
+        </p:nvSpPr>
+        <p:spPr>
+          <a:xfrm>
+            <a:off x="4206240" y="2788920"/>
+            <a:ext cx="3246120" cy="1965960"/>
           </a:xfrm>
           <a:prstGeom prst="roundRect">
             <a:avLst>
-              <a:gd name="adj" fmla="val 2500"/>
+              <a:gd name="adj" fmla="val 2791"/>
             </a:avLst>
           </a:prstGeom>
           <a:solidFill>
@@ -7118,33 +7432,30 @@
       </p:sp>
       <p:sp>
         <p:nvSpPr>
-          <p:cNvPr id="14" name="Text 12"/>
-          <p:cNvSpPr/>
-          <p:nvPr/>
-        </p:nvSpPr>
-        <p:spPr>
-          <a:xfrm>
-            <a:off x="8138160" y="3127248"/>
-            <a:ext cx="2743200" cy="548640"/>
-          </a:xfrm>
-          <a:prstGeom prst="rect">
-            <a:avLst/>
-          </a:prstGeom>
-          <a:noFill/>
-          <a:ln/>
-        </p:spPr>
-        <p:txBody>
-          <a:bodyPr wrap="square" lIns="0" tIns="0" rIns="0" bIns="0" rtlCol="0" anchor="ctr"/>
-          <a:lstStyle/>
-          <a:p>
-            <a:pPr indent="0" marL="0">
-              <a:lnSpc>
-                <a:spcPts val="2100"/>
-              </a:lnSpc>
-              <a:buNone/>
-            </a:pPr>
-            <a:r>
-              <a:rPr lang="en-US" sz="1600" b="1" dirty="0">
+          <p:cNvPr id="12" name="Text 10"/>
+          <p:cNvSpPr/>
+          <p:nvPr/>
+        </p:nvSpPr>
+        <p:spPr>
+          <a:xfrm>
+            <a:off x="4480560" y="3035808"/>
+            <a:ext cx="2697480" cy="548640"/>
+          </a:xfrm>
+          <a:prstGeom prst="rect">
+            <a:avLst/>
+          </a:prstGeom>
+          <a:noFill/>
+          <a:ln/>
+        </p:spPr>
+        <p:txBody>
+          <a:bodyPr wrap="square" lIns="0" tIns="0" rIns="0" bIns="0" rtlCol="0" anchor="ctr"/>
+          <a:lstStyle/>
+          <a:p>
+            <a:pPr indent="0" marL="0">
+              <a:buNone/>
+            </a:pPr>
+            <a:r>
+              <a:rPr lang="en-US" sz="3200" b="1" dirty="0">
                 <a:solidFill>
                   <a:srgbClr val="0D8271"/>
                 </a:solidFill>
@@ -7152,22 +7463,22 @@
                 <a:ea typeface="Cambria" pitchFamily="34" charset="-122"/>
                 <a:cs typeface="Cambria" pitchFamily="34" charset="-120"/>
               </a:rPr>
-              <a:t>Tanpa biaya marginal perangkat lunak</a:t>
-            </a:r>
-            <a:endParaRPr lang="en-US" sz="1600" dirty="0"/>
-          </a:p>
-        </p:txBody>
-      </p:sp>
-      <p:sp>
-        <p:nvSpPr>
-          <p:cNvPr id="15" name="Text 13"/>
-          <p:cNvSpPr/>
-          <p:nvPr/>
-        </p:nvSpPr>
-        <p:spPr>
-          <a:xfrm>
-            <a:off x="8138160" y="3749040"/>
-            <a:ext cx="2743200" cy="1097280"/>
+              <a:t>Rp 2,29 jt</a:t>
+            </a:r>
+            <a:endParaRPr lang="en-US" sz="3200" dirty="0"/>
+          </a:p>
+        </p:txBody>
+      </p:sp>
+      <p:sp>
+        <p:nvSpPr>
+          <p:cNvPr id="13" name="Text 11"/>
+          <p:cNvSpPr/>
+          <p:nvPr/>
+        </p:nvSpPr>
+        <p:spPr>
+          <a:xfrm>
+            <a:off x="4480560" y="3639312"/>
+            <a:ext cx="2697480" cy="457200"/>
           </a:xfrm>
           <a:prstGeom prst="rect">
             <a:avLst/>
@@ -7181,12 +7492,12 @@
           <a:p>
             <a:pPr indent="0" marL="0">
               <a:lnSpc>
-                <a:spcPts val="1800"/>
+                <a:spcPts val="1700"/>
               </a:lnSpc>
               <a:buNone/>
             </a:pPr>
             <a:r>
-              <a:rPr lang="en-US" sz="1250" dirty="0">
+              <a:rPr lang="en-US" sz="1300" b="1" dirty="0">
                 <a:solidFill>
                   <a:srgbClr val="14302B"/>
                 </a:solidFill>
@@ -7194,11 +7505,80 @@
                 <a:ea typeface="Calibri" pitchFamily="34" charset="-122"/>
                 <a:cs typeface="Calibri" pitchFamily="34" charset="-120"/>
               </a:rPr>
-              <a:t>PWA statis. Tidak ada server, basis data, maupun lisensi. Posyandu ke-1 dan ke-1.000 memuat berkas yang sama.</a:t>
-            </a:r>
-            <a:endParaRPr lang="en-US" sz="1250" dirty="0"/>
-          </a:p>
-        </p:txBody>
+              <a:t>Neurogaze · dirotasi 4 Posyandu</a:t>
+            </a:r>
+            <a:endParaRPr lang="en-US" sz="1300" dirty="0"/>
+          </a:p>
+        </p:txBody>
+      </p:sp>
+      <p:sp>
+        <p:nvSpPr>
+          <p:cNvPr id="14" name="Text 12"/>
+          <p:cNvSpPr/>
+          <p:nvPr/>
+        </p:nvSpPr>
+        <p:spPr>
+          <a:xfrm>
+            <a:off x="4480560" y="4114800"/>
+            <a:ext cx="2697480" cy="502920"/>
+          </a:xfrm>
+          <a:prstGeom prst="rect">
+            <a:avLst/>
+          </a:prstGeom>
+          <a:noFill/>
+          <a:ln/>
+        </p:spPr>
+        <p:txBody>
+          <a:bodyPr wrap="square" lIns="0" tIns="0" rIns="0" bIns="0" rtlCol="0" anchor="ctr"/>
+          <a:lstStyle/>
+          <a:p>
+            <a:pPr indent="0" marL="0">
+              <a:lnSpc>
+                <a:spcPts val="1500"/>
+              </a:lnSpc>
+              <a:buNone/>
+            </a:pPr>
+            <a:r>
+              <a:rPr lang="en-US" sz="1100" dirty="0">
+                <a:solidFill>
+                  <a:srgbClr val="4A635D"/>
+                </a:solidFill>
+                <a:latin typeface="Calibri" pitchFamily="34" charset="0"/>
+                <a:ea typeface="Calibri" pitchFamily="34" charset="-122"/>
+                <a:cs typeface="Calibri" pitchFamily="34" charset="-120"/>
+              </a:rPr>
+              <a:t>1.000 sesi × Rp 3.500 ÷ 1,53 kasus</a:t>
+            </a:r>
+            <a:endParaRPr lang="en-US" sz="1100" dirty="0"/>
+          </a:p>
+        </p:txBody>
+      </p:sp>
+      <p:sp>
+        <p:nvSpPr>
+          <p:cNvPr id="15" name="Shape 13"/>
+          <p:cNvSpPr/>
+          <p:nvPr/>
+        </p:nvSpPr>
+        <p:spPr>
+          <a:xfrm>
+            <a:off x="7726680" y="2788920"/>
+            <a:ext cx="3246120" cy="1965960"/>
+          </a:xfrm>
+          <a:prstGeom prst="roundRect">
+            <a:avLst>
+              <a:gd name="adj" fmla="val 2791"/>
+            </a:avLst>
+          </a:prstGeom>
+          <a:solidFill>
+            <a:srgbClr val="FFFFFF"/>
+          </a:solidFill>
+          <a:ln w="12700">
+            <a:solidFill>
+              <a:srgbClr val="DBE4E1"/>
+            </a:solidFill>
+            <a:prstDash val="solid"/>
+          </a:ln>
+        </p:spPr>
       </p:sp>
       <p:sp>
         <p:nvSpPr>
@@ -7208,37 +7588,238 @@
         </p:nvSpPr>
         <p:spPr>
           <a:xfrm>
-            <a:off x="685800" y="5349240"/>
-            <a:ext cx="6766560" cy="640080"/>
-          </a:xfrm>
-          <a:prstGeom prst="rect">
-            <a:avLst/>
-          </a:prstGeom>
-          <a:noFill/>
-          <a:ln/>
-        </p:spPr>
-        <p:txBody>
-          <a:bodyPr wrap="square" lIns="0" tIns="0" rIns="0" bIns="0" rtlCol="0" anchor="ctr"/>
-          <a:lstStyle/>
-          <a:p>
-            <a:pPr indent="0" marL="0">
-              <a:lnSpc>
-                <a:spcPts val="2100"/>
-              </a:lnSpc>
-              <a:buNone/>
-            </a:pPr>
-            <a:r>
-              <a:rPr lang="en-US" sz="1500" i="1" dirty="0">
-                <a:solidFill>
-                  <a:srgbClr val="14302B"/>
+            <a:off x="8001000" y="3035808"/>
+            <a:ext cx="2697480" cy="548640"/>
+          </a:xfrm>
+          <a:prstGeom prst="rect">
+            <a:avLst/>
+          </a:prstGeom>
+          <a:noFill/>
+          <a:ln/>
+        </p:spPr>
+        <p:txBody>
+          <a:bodyPr wrap="square" lIns="0" tIns="0" rIns="0" bIns="0" rtlCol="0" anchor="ctr"/>
+          <a:lstStyle/>
+          <a:p>
+            <a:pPr indent="0" marL="0">
+              <a:buNone/>
+            </a:pPr>
+            <a:r>
+              <a:rPr lang="en-US" sz="3200" b="1" dirty="0">
+                <a:solidFill>
+                  <a:srgbClr val="B1442C"/>
                 </a:solidFill>
                 <a:latin typeface="Cambria" pitchFamily="34" charset="0"/>
                 <a:ea typeface="Cambria" pitchFamily="34" charset="-122"/>
                 <a:cs typeface="Cambria" pitchFamily="34" charset="-120"/>
               </a:rPr>
-              <a:t>Skala kohort acuan Nature Medicine dapat dicapai dalam satu tahun studi di 30 Posyandu — sebagai penelitian prospektif berizin etik dengan acuan klinis buta, bukan sebagai penyebaran produk.</a:t>
-            </a:r>
-            <a:endParaRPr lang="en-US" sz="1500" dirty="0"/>
+              <a:t>Rp 9,70 jt</a:t>
+            </a:r>
+            <a:endParaRPr lang="en-US" sz="3200" dirty="0"/>
+          </a:p>
+        </p:txBody>
+      </p:sp>
+      <p:sp>
+        <p:nvSpPr>
+          <p:cNvPr id="17" name="Text 15"/>
+          <p:cNvSpPr/>
+          <p:nvPr/>
+        </p:nvSpPr>
+        <p:spPr>
+          <a:xfrm>
+            <a:off x="8001000" y="3639312"/>
+            <a:ext cx="2697480" cy="457200"/>
+          </a:xfrm>
+          <a:prstGeom prst="rect">
+            <a:avLst/>
+          </a:prstGeom>
+          <a:noFill/>
+          <a:ln/>
+        </p:spPr>
+        <p:txBody>
+          <a:bodyPr wrap="square" lIns="0" tIns="0" rIns="0" bIns="0" rtlCol="0" anchor="ctr"/>
+          <a:lstStyle/>
+          <a:p>
+            <a:pPr indent="0" marL="0">
+              <a:lnSpc>
+                <a:spcPts val="1700"/>
+              </a:lnSpc>
+              <a:buNone/>
+            </a:pPr>
+            <a:r>
+              <a:rPr lang="en-US" sz="1300" b="1" dirty="0">
+                <a:solidFill>
+                  <a:srgbClr val="14302B"/>
+                </a:solidFill>
+                <a:latin typeface="Calibri" pitchFamily="34" charset="0"/>
+                <a:ea typeface="Calibri" pitchFamily="34" charset="-122"/>
+                <a:cs typeface="Calibri" pitchFamily="34" charset="-120"/>
+              </a:rPr>
+              <a:t>EarliPoint · satu pemeriksaan</a:t>
+            </a:r>
+            <a:endParaRPr lang="en-US" sz="1300" dirty="0"/>
+          </a:p>
+        </p:txBody>
+      </p:sp>
+      <p:sp>
+        <p:nvSpPr>
+          <p:cNvPr id="18" name="Text 16"/>
+          <p:cNvSpPr/>
+          <p:nvPr/>
+        </p:nvSpPr>
+        <p:spPr>
+          <a:xfrm>
+            <a:off x="8001000" y="4114800"/>
+            <a:ext cx="2697480" cy="502920"/>
+          </a:xfrm>
+          <a:prstGeom prst="rect">
+            <a:avLst/>
+          </a:prstGeom>
+          <a:noFill/>
+          <a:ln/>
+        </p:spPr>
+        <p:txBody>
+          <a:bodyPr wrap="square" lIns="0" tIns="0" rIns="0" bIns="0" rtlCol="0" anchor="ctr"/>
+          <a:lstStyle/>
+          <a:p>
+            <a:pPr indent="0" marL="0">
+              <a:lnSpc>
+                <a:spcPts val="1500"/>
+              </a:lnSpc>
+              <a:buNone/>
+            </a:pPr>
+            <a:r>
+              <a:rPr lang="en-US" sz="1100" dirty="0">
+                <a:solidFill>
+                  <a:srgbClr val="4A635D"/>
+                </a:solidFill>
+                <a:latin typeface="Calibri" pitchFamily="34" charset="0"/>
+                <a:ea typeface="Calibri" pitchFamily="34" charset="-122"/>
+                <a:cs typeface="Calibri" pitchFamily="34" charset="-120"/>
+              </a:rPr>
+              <a:t>Satu anak, sekali periksa, di klinik</a:t>
+            </a:r>
+            <a:endParaRPr lang="en-US" sz="1100" dirty="0"/>
+          </a:p>
+        </p:txBody>
+      </p:sp>
+      <p:sp>
+        <p:nvSpPr>
+          <p:cNvPr id="19" name="Text 17"/>
+          <p:cNvSpPr/>
+          <p:nvPr/>
+        </p:nvSpPr>
+        <p:spPr>
+          <a:xfrm>
+            <a:off x="685800" y="4983480"/>
+            <a:ext cx="10424160" cy="640080"/>
+          </a:xfrm>
+          <a:prstGeom prst="rect">
+            <a:avLst/>
+          </a:prstGeom>
+          <a:noFill/>
+          <a:ln/>
+        </p:spPr>
+        <p:txBody>
+          <a:bodyPr wrap="square" lIns="0" tIns="0" rIns="0" bIns="0" rtlCol="0" anchor="ctr"/>
+          <a:lstStyle/>
+          <a:p>
+            <a:pPr indent="0" marL="0">
+              <a:lnSpc>
+                <a:spcPts val="2400"/>
+              </a:lnSpc>
+              <a:buNone/>
+            </a:pPr>
+            <a:r>
+              <a:rPr lang="en-US" sz="1700" b="1" dirty="0">
+                <a:solidFill>
+                  <a:srgbClr val="0B1E1B"/>
+                </a:solidFill>
+                <a:latin typeface="Cambria" pitchFamily="34" charset="0"/>
+                <a:ea typeface="Cambria" pitchFamily="34" charset="-122"/>
+                <a:cs typeface="Cambria" pitchFamily="34" charset="-120"/>
+              </a:rPr>
+              <a:t>Bila titik operasinya terreplikasi, menemukan satu kasus harganya kira-kira sekali pemeriksaan EarliPoint — seperempatnya bila satu tablet dirotasi ke empat Posyandu.</a:t>
+            </a:r>
+            <a:endParaRPr lang="en-US" sz="1700" dirty="0"/>
+          </a:p>
+        </p:txBody>
+      </p:sp>
+      <p:sp>
+        <p:nvSpPr>
+          <p:cNvPr id="20" name="Text 18"/>
+          <p:cNvSpPr/>
+          <p:nvPr/>
+        </p:nvSpPr>
+        <p:spPr>
+          <a:xfrm>
+            <a:off x="685800" y="5650992"/>
+            <a:ext cx="10424160" cy="274320"/>
+          </a:xfrm>
+          <a:prstGeom prst="rect">
+            <a:avLst/>
+          </a:prstGeom>
+          <a:noFill/>
+          <a:ln/>
+        </p:spPr>
+        <p:txBody>
+          <a:bodyPr wrap="square" lIns="0" tIns="0" rIns="0" bIns="0" rtlCol="0" anchor="ctr"/>
+          <a:lstStyle/>
+          <a:p>
+            <a:pPr indent="0" marL="0">
+              <a:buNone/>
+            </a:pPr>
+            <a:r>
+              <a:rPr lang="en-US" sz="1050" b="1" dirty="0">
+                <a:solidFill>
+                  <a:srgbClr val="14302B"/>
+                </a:solidFill>
+                <a:latin typeface="Calibri" pitchFamily="34" charset="0"/>
+                <a:ea typeface="Calibri" pitchFamily="34" charset="-122"/>
+                <a:cs typeface="Calibri" pitchFamily="34" charset="-120"/>
+              </a:rPr>
+              <a:t>Yang belum terukur: waktu kader, pelatihan, dukungan, cetak, dudukan, pengulangan sesi, pemeliharaan, penggantian perangkat, dan tindak lanjut klinis.</a:t>
+            </a:r>
+            <a:endParaRPr lang="en-US" sz="1050" dirty="0"/>
+          </a:p>
+        </p:txBody>
+      </p:sp>
+      <p:sp>
+        <p:nvSpPr>
+          <p:cNvPr id="21" name="Text 19"/>
+          <p:cNvSpPr/>
+          <p:nvPr/>
+        </p:nvSpPr>
+        <p:spPr>
+          <a:xfrm>
+            <a:off x="685800" y="5943600"/>
+            <a:ext cx="10424160" cy="274320"/>
+          </a:xfrm>
+          <a:prstGeom prst="rect">
+            <a:avLst/>
+          </a:prstGeom>
+          <a:noFill/>
+          <a:ln/>
+        </p:spPr>
+        <p:txBody>
+          <a:bodyPr wrap="square" lIns="0" tIns="0" rIns="0" bIns="0" rtlCol="0" anchor="ctr"/>
+          <a:lstStyle/>
+          <a:p>
+            <a:pPr indent="0" marL="0">
+              <a:buNone/>
+            </a:pPr>
+            <a:r>
+              <a:rPr lang="en-US" sz="1050" dirty="0">
+                <a:solidFill>
+                  <a:srgbClr val="4A635D"/>
+                </a:solidFill>
+                <a:latin typeface="Calibri" pitchFamily="34" charset="0"/>
+                <a:ea typeface="Calibri" pitchFamily="34" charset="-122"/>
+                <a:cs typeface="Calibri" pitchFamily="34" charset="-120"/>
+              </a:rPr>
+              <a:t>Asumsi dinyatakan di docs/dampak_dan_adopsi.md · kohort 1.000, prevalensi 1%, cakupan teknis 90%</a:t>
+            </a:r>
+            <a:endParaRPr lang="en-US" sz="1050" dirty="0"/>
           </a:p>
         </p:txBody>
       </p:sp>
@@ -7253,6 +7834,612 @@
 <file path=ppt/slides/slide14.xml><?xml version="1.0" encoding="utf-8"?>
 <p:sld xmlns:a="http://schemas.openxmlformats.org/drawingml/2006/main" xmlns:r="http://schemas.openxmlformats.org/officeDocument/2006/relationships" xmlns:p="http://schemas.openxmlformats.org/presentationml/2006/main">
   <p:cSld name="Slide 14">
+    <p:bg>
+      <p:bgPr>
+        <a:solidFill>
+          <a:srgbClr val="F7F9F8"/>
+        </a:solidFill>
+      </p:bgPr>
+    </p:bg>
+    <p:spTree>
+      <p:nvGrpSpPr>
+        <p:cNvPr id="1" name=""/>
+        <p:cNvGrpSpPr/>
+        <p:nvPr/>
+      </p:nvGrpSpPr>
+      <p:grpSpPr>
+        <a:xfrm>
+          <a:off x="0" y="0"/>
+          <a:ext cx="0" cy="0"/>
+          <a:chOff x="0" y="0"/>
+          <a:chExt cx="0" cy="0"/>
+        </a:xfrm>
+      </p:grpSpPr>
+      <p:sp>
+        <p:nvSpPr>
+          <p:cNvPr id="2" name="Shape 0"/>
+          <p:cNvSpPr/>
+          <p:nvPr/>
+        </p:nvSpPr>
+        <p:spPr>
+          <a:xfrm>
+            <a:off x="11268151" y="740664"/>
+            <a:ext cx="237744" cy="237744"/>
+          </a:xfrm>
+          <a:prstGeom prst="ellipse">
+            <a:avLst/>
+          </a:prstGeom>
+          <a:solidFill>
+            <a:srgbClr val="FFFFFF">
+              <a:alpha val="0"/>
+            </a:srgbClr>
+          </a:solidFill>
+          <a:ln w="25400">
+            <a:solidFill>
+              <a:srgbClr val="5CB9A3"/>
+            </a:solidFill>
+            <a:prstDash val="solid"/>
+          </a:ln>
+        </p:spPr>
+      </p:sp>
+      <p:sp>
+        <p:nvSpPr>
+          <p:cNvPr id="3" name="Shape 1"/>
+          <p:cNvSpPr/>
+          <p:nvPr/>
+        </p:nvSpPr>
+        <p:spPr>
+          <a:xfrm>
+            <a:off x="11339474" y="811987"/>
+            <a:ext cx="95098" cy="95098"/>
+          </a:xfrm>
+          <a:prstGeom prst="ellipse">
+            <a:avLst/>
+          </a:prstGeom>
+          <a:solidFill>
+            <a:srgbClr val="5CB9A3"/>
+          </a:solidFill>
+          <a:ln w="12700">
+            <a:solidFill>
+              <a:srgbClr val="333333"/>
+            </a:solidFill>
+            <a:prstDash val="solid"/>
+          </a:ln>
+        </p:spPr>
+      </p:sp>
+      <p:sp>
+        <p:nvSpPr>
+          <p:cNvPr id="4" name="Text 2"/>
+          <p:cNvSpPr/>
+          <p:nvPr/>
+        </p:nvSpPr>
+        <p:spPr>
+          <a:xfrm>
+            <a:off x="685800" y="685800"/>
+            <a:ext cx="10271455" cy="256032"/>
+          </a:xfrm>
+          <a:prstGeom prst="rect">
+            <a:avLst/>
+          </a:prstGeom>
+          <a:noFill/>
+          <a:ln/>
+        </p:spPr>
+        <p:txBody>
+          <a:bodyPr wrap="square" lIns="0" tIns="0" rIns="0" bIns="0" rtlCol="0" anchor="ctr"/>
+          <a:lstStyle/>
+          <a:p>
+            <a:pPr indent="0" marL="0">
+              <a:buNone/>
+            </a:pPr>
+            <a:r>
+              <a:rPr lang="en-US" sz="1200" b="1" spc="120" kern="0" dirty="0">
+                <a:solidFill>
+                  <a:srgbClr val="0D8271"/>
+                </a:solidFill>
+                <a:latin typeface="Calibri" pitchFamily="34" charset="0"/>
+                <a:ea typeface="Calibri" pitchFamily="34" charset="-122"/>
+                <a:cs typeface="Calibri" pitchFamily="34" charset="-120"/>
+              </a:rPr>
+              <a:t>Jalur adopsi</a:t>
+            </a:r>
+            <a:endParaRPr lang="en-US" sz="1200" dirty="0"/>
+          </a:p>
+        </p:txBody>
+      </p:sp>
+      <p:sp>
+        <p:nvSpPr>
+          <p:cNvPr id="5" name="Text 3"/>
+          <p:cNvSpPr/>
+          <p:nvPr/>
+        </p:nvSpPr>
+        <p:spPr>
+          <a:xfrm>
+            <a:off x="685800" y="996696"/>
+            <a:ext cx="10271455" cy="822960"/>
+          </a:xfrm>
+          <a:prstGeom prst="rect">
+            <a:avLst/>
+          </a:prstGeom>
+          <a:noFill/>
+          <a:ln/>
+        </p:spPr>
+        <p:txBody>
+          <a:bodyPr wrap="square" lIns="0" tIns="0" rIns="0" bIns="0" rtlCol="0" anchor="ctr"/>
+          <a:lstStyle/>
+          <a:p>
+            <a:pPr indent="0" marL="0">
+              <a:lnSpc>
+                <a:spcPts val="3600"/>
+              </a:lnSpc>
+              <a:buNone/>
+            </a:pPr>
+            <a:r>
+              <a:rPr lang="en-US" sz="3200" b="1" dirty="0">
+                <a:solidFill>
+                  <a:srgbClr val="0B1E1B"/>
+                </a:solidFill>
+                <a:latin typeface="Cambria" pitchFamily="34" charset="0"/>
+                <a:ea typeface="Cambria" pitchFamily="34" charset="-122"/>
+                <a:cs typeface="Cambria" pitchFamily="34" charset="-120"/>
+              </a:rPr>
+              <a:t>Ia menempel pada alur yang sudah jalan</a:t>
+            </a:r>
+            <a:endParaRPr lang="en-US" sz="3200" dirty="0"/>
+          </a:p>
+        </p:txBody>
+      </p:sp>
+      <p:sp>
+        <p:nvSpPr>
+          <p:cNvPr id="6" name="Text 4"/>
+          <p:cNvSpPr/>
+          <p:nvPr/>
+        </p:nvSpPr>
+        <p:spPr>
+          <a:xfrm>
+            <a:off x="685800" y="2103120"/>
+            <a:ext cx="10424160" cy="548640"/>
+          </a:xfrm>
+          <a:prstGeom prst="rect">
+            <a:avLst/>
+          </a:prstGeom>
+          <a:noFill/>
+          <a:ln/>
+        </p:spPr>
+        <p:txBody>
+          <a:bodyPr wrap="square" lIns="0" tIns="0" rIns="0" bIns="0" rtlCol="0" anchor="ctr"/>
+          <a:lstStyle/>
+          <a:p>
+            <a:pPr indent="0" marL="0">
+              <a:lnSpc>
+                <a:spcPts val="2100"/>
+              </a:lnSpc>
+              <a:buNone/>
+            </a:pPr>
+            <a:r>
+              <a:rPr lang="en-US" sz="1500" dirty="0">
+                <a:solidFill>
+                  <a:srgbClr val="14302B"/>
+                </a:solidFill>
+                <a:latin typeface="Calibri" pitchFamily="34" charset="0"/>
+                <a:ea typeface="Calibri" pitchFamily="34" charset="-122"/>
+                <a:cs typeface="Calibri" pitchFamily="34" charset="-120"/>
+              </a:rPr>
+              <a:t>Alat ini tidak menggantikan apa pun. Ia menempel: sesi 67 detik sesudah penimbangan bulanan, laporan satu halaman diserahkan ke Puskesmas, dibaca berdampingan dengan SDIDTK.</a:t>
+            </a:r>
+            <a:endParaRPr lang="en-US" sz="1500" dirty="0"/>
+          </a:p>
+        </p:txBody>
+      </p:sp>
+      <p:sp>
+        <p:nvSpPr>
+          <p:cNvPr id="7" name="Text 5"/>
+          <p:cNvSpPr/>
+          <p:nvPr/>
+        </p:nvSpPr>
+        <p:spPr>
+          <a:xfrm>
+            <a:off x="685800" y="2926080"/>
+            <a:ext cx="3291840" cy="1002890"/>
+          </a:xfrm>
+          <a:prstGeom prst="rect">
+            <a:avLst/>
+          </a:prstGeom>
+          <a:noFill/>
+          <a:ln/>
+        </p:spPr>
+        <p:txBody>
+          <a:bodyPr wrap="square" lIns="0" tIns="0" rIns="0" bIns="0" rtlCol="0" anchor="ctr"/>
+          <a:lstStyle/>
+          <a:p>
+            <a:pPr indent="0" marL="0">
+              <a:lnSpc>
+                <a:spcPts val="6800"/>
+              </a:lnSpc>
+              <a:buNone/>
+            </a:pPr>
+            <a:r>
+              <a:rPr lang="en-US" sz="6800" b="1" dirty="0">
+                <a:solidFill>
+                  <a:srgbClr val="0D8271"/>
+                </a:solidFill>
+                <a:latin typeface="Cambria" pitchFamily="34" charset="0"/>
+                <a:ea typeface="Cambria" pitchFamily="34" charset="-122"/>
+                <a:cs typeface="Cambria" pitchFamily="34" charset="-120"/>
+              </a:rPr>
+              <a:t>~700</a:t>
+            </a:r>
+            <a:endParaRPr lang="en-US" sz="6800" dirty="0"/>
+          </a:p>
+        </p:txBody>
+      </p:sp>
+      <p:sp>
+        <p:nvSpPr>
+          <p:cNvPr id="8" name="Text 6"/>
+          <p:cNvSpPr/>
+          <p:nvPr/>
+        </p:nvSpPr>
+        <p:spPr>
+          <a:xfrm>
+            <a:off x="685800" y="3983834"/>
+            <a:ext cx="3291840" cy="274320"/>
+          </a:xfrm>
+          <a:prstGeom prst="rect">
+            <a:avLst/>
+          </a:prstGeom>
+          <a:noFill/>
+          <a:ln/>
+        </p:spPr>
+        <p:txBody>
+          <a:bodyPr wrap="square" lIns="0" tIns="0" rIns="0" bIns="0" rtlCol="0" anchor="ctr"/>
+          <a:lstStyle/>
+          <a:p>
+            <a:pPr indent="0" marL="0">
+              <a:buNone/>
+            </a:pPr>
+            <a:r>
+              <a:rPr lang="en-US" sz="1400" b="1" dirty="0">
+                <a:solidFill>
+                  <a:srgbClr val="14302B"/>
+                </a:solidFill>
+                <a:latin typeface="Calibri" pitchFamily="34" charset="0"/>
+                <a:ea typeface="Calibri" pitchFamily="34" charset="-122"/>
+                <a:cs typeface="Calibri" pitchFamily="34" charset="-120"/>
+              </a:rPr>
+              <a:t>sesi dapat dinilai per tahun — hipotetis</a:t>
+            </a:r>
+            <a:endParaRPr lang="en-US" sz="1400" dirty="0"/>
+          </a:p>
+        </p:txBody>
+      </p:sp>
+      <p:sp>
+        <p:nvSpPr>
+          <p:cNvPr id="9" name="Text 7"/>
+          <p:cNvSpPr/>
+          <p:nvPr/>
+        </p:nvSpPr>
+        <p:spPr>
+          <a:xfrm>
+            <a:off x="685800" y="4294730"/>
+            <a:ext cx="3291840" cy="640080"/>
+          </a:xfrm>
+          <a:prstGeom prst="rect">
+            <a:avLst/>
+          </a:prstGeom>
+          <a:noFill/>
+          <a:ln/>
+        </p:spPr>
+        <p:txBody>
+          <a:bodyPr wrap="square" lIns="0" tIns="0" rIns="0" bIns="0" rtlCol="0" anchor="ctr"/>
+          <a:lstStyle/>
+          <a:p>
+            <a:pPr indent="0" marL="0">
+              <a:lnSpc>
+                <a:spcPts val="1500"/>
+              </a:lnSpc>
+              <a:buNone/>
+            </a:pPr>
+            <a:r>
+              <a:rPr lang="en-US" sz="1200" dirty="0">
+                <a:solidFill>
+                  <a:srgbClr val="4A635D"/>
+                </a:solidFill>
+                <a:latin typeface="Calibri" pitchFamily="34" charset="0"/>
+                <a:ea typeface="Calibri" pitchFamily="34" charset="-122"/>
+                <a:cs typeface="Calibri" pitchFamily="34" charset="-120"/>
+              </a:rPr>
+              <a:t>Aritmetika skala: 30 Posyandu × 40 anak layak, dikurangi attrition 42%. Skala rekrutmen, bukan rencana operasional.</a:t>
+            </a:r>
+            <a:endParaRPr lang="en-US" sz="1200" dirty="0"/>
+          </a:p>
+        </p:txBody>
+      </p:sp>
+      <p:sp>
+        <p:nvSpPr>
+          <p:cNvPr id="10" name="Text 8"/>
+          <p:cNvSpPr/>
+          <p:nvPr/>
+        </p:nvSpPr>
+        <p:spPr>
+          <a:xfrm>
+            <a:off x="4434840" y="2926080"/>
+            <a:ext cx="3291840" cy="1002890"/>
+          </a:xfrm>
+          <a:prstGeom prst="rect">
+            <a:avLst/>
+          </a:prstGeom>
+          <a:noFill/>
+          <a:ln/>
+        </p:spPr>
+        <p:txBody>
+          <a:bodyPr wrap="square" lIns="0" tIns="0" rIns="0" bIns="0" rtlCol="0" anchor="ctr"/>
+          <a:lstStyle/>
+          <a:p>
+            <a:pPr indent="0" marL="0">
+              <a:lnSpc>
+                <a:spcPts val="6800"/>
+              </a:lnSpc>
+              <a:buNone/>
+            </a:pPr>
+            <a:r>
+              <a:rPr lang="en-US" sz="6800" b="1" dirty="0">
+                <a:solidFill>
+                  <a:srgbClr val="4A635D"/>
+                </a:solidFill>
+                <a:latin typeface="Cambria" pitchFamily="34" charset="0"/>
+                <a:ea typeface="Cambria" pitchFamily="34" charset="-122"/>
+                <a:cs typeface="Cambria" pitchFamily="34" charset="-120"/>
+              </a:rPr>
+              <a:t>475</a:t>
+            </a:r>
+            <a:endParaRPr lang="en-US" sz="6800" dirty="0"/>
+          </a:p>
+        </p:txBody>
+      </p:sp>
+      <p:sp>
+        <p:nvSpPr>
+          <p:cNvPr id="11" name="Text 9"/>
+          <p:cNvSpPr/>
+          <p:nvPr/>
+        </p:nvSpPr>
+        <p:spPr>
+          <a:xfrm>
+            <a:off x="4434840" y="3983834"/>
+            <a:ext cx="3291840" cy="274320"/>
+          </a:xfrm>
+          <a:prstGeom prst="rect">
+            <a:avLst/>
+          </a:prstGeom>
+          <a:noFill/>
+          <a:ln/>
+        </p:spPr>
+        <p:txBody>
+          <a:bodyPr wrap="square" lIns="0" tIns="0" rIns="0" bIns="0" rtlCol="0" anchor="ctr"/>
+          <a:lstStyle/>
+          <a:p>
+            <a:pPr indent="0" marL="0">
+              <a:buNone/>
+            </a:pPr>
+            <a:r>
+              <a:rPr lang="en-US" sz="1400" b="1" dirty="0">
+                <a:solidFill>
+                  <a:srgbClr val="14302B"/>
+                </a:solidFill>
+                <a:latin typeface="Calibri" pitchFamily="34" charset="0"/>
+                <a:ea typeface="Calibri" pitchFamily="34" charset="-122"/>
+                <a:cs typeface="Calibri" pitchFamily="34" charset="-120"/>
+              </a:rPr>
+              <a:t>kohort Nature Medicine</a:t>
+            </a:r>
+            <a:endParaRPr lang="en-US" sz="1400" dirty="0"/>
+          </a:p>
+        </p:txBody>
+      </p:sp>
+      <p:sp>
+        <p:nvSpPr>
+          <p:cNvPr id="12" name="Text 10"/>
+          <p:cNvSpPr/>
+          <p:nvPr/>
+        </p:nvSpPr>
+        <p:spPr>
+          <a:xfrm>
+            <a:off x="4434840" y="4294730"/>
+            <a:ext cx="3291840" cy="640080"/>
+          </a:xfrm>
+          <a:prstGeom prst="rect">
+            <a:avLst/>
+          </a:prstGeom>
+          <a:noFill/>
+          <a:ln/>
+        </p:spPr>
+        <p:txBody>
+          <a:bodyPr wrap="square" lIns="0" tIns="0" rIns="0" bIns="0" rtlCol="0" anchor="ctr"/>
+          <a:lstStyle/>
+          <a:p>
+            <a:pPr indent="0" marL="0">
+              <a:lnSpc>
+                <a:spcPts val="1500"/>
+              </a:lnSpc>
+              <a:buNone/>
+            </a:pPr>
+            <a:r>
+              <a:rPr lang="en-US" sz="1200" dirty="0">
+                <a:solidFill>
+                  <a:srgbClr val="4A635D"/>
+                </a:solidFill>
+                <a:latin typeface="Calibri" pitchFamily="34" charset="0"/>
+                <a:ea typeface="Calibri" pitchFamily="34" charset="-122"/>
+                <a:cs typeface="Calibri" pitchFamily="34" charset="-120"/>
+              </a:rPr>
+              <a:t>Studi SenseToKnow yang jadi acuan kami.</a:t>
+            </a:r>
+            <a:endParaRPr lang="en-US" sz="1200" dirty="0"/>
+          </a:p>
+        </p:txBody>
+      </p:sp>
+      <p:sp>
+        <p:nvSpPr>
+          <p:cNvPr id="13" name="Shape 11"/>
+          <p:cNvSpPr/>
+          <p:nvPr/>
+        </p:nvSpPr>
+        <p:spPr>
+          <a:xfrm>
+            <a:off x="7909560" y="2880360"/>
+            <a:ext cx="3200400" cy="2194560"/>
+          </a:xfrm>
+          <a:prstGeom prst="roundRect">
+            <a:avLst>
+              <a:gd name="adj" fmla="val 2500"/>
+            </a:avLst>
+          </a:prstGeom>
+          <a:solidFill>
+            <a:srgbClr val="E4F2EE"/>
+          </a:solidFill>
+          <a:ln w="12700">
+            <a:solidFill>
+              <a:srgbClr val="E4F2EE"/>
+            </a:solidFill>
+            <a:prstDash val="solid"/>
+          </a:ln>
+        </p:spPr>
+      </p:sp>
+      <p:sp>
+        <p:nvSpPr>
+          <p:cNvPr id="14" name="Text 12"/>
+          <p:cNvSpPr/>
+          <p:nvPr/>
+        </p:nvSpPr>
+        <p:spPr>
+          <a:xfrm>
+            <a:off x="8138160" y="3127248"/>
+            <a:ext cx="2743200" cy="548640"/>
+          </a:xfrm>
+          <a:prstGeom prst="rect">
+            <a:avLst/>
+          </a:prstGeom>
+          <a:noFill/>
+          <a:ln/>
+        </p:spPr>
+        <p:txBody>
+          <a:bodyPr wrap="square" lIns="0" tIns="0" rIns="0" bIns="0" rtlCol="0" anchor="ctr"/>
+          <a:lstStyle/>
+          <a:p>
+            <a:pPr indent="0" marL="0">
+              <a:lnSpc>
+                <a:spcPts val="2100"/>
+              </a:lnSpc>
+              <a:buNone/>
+            </a:pPr>
+            <a:r>
+              <a:rPr lang="en-US" sz="1600" b="1" dirty="0">
+                <a:solidFill>
+                  <a:srgbClr val="0D8271"/>
+                </a:solidFill>
+                <a:latin typeface="Cambria" pitchFamily="34" charset="0"/>
+                <a:ea typeface="Cambria" pitchFamily="34" charset="-122"/>
+                <a:cs typeface="Cambria" pitchFamily="34" charset="-120"/>
+              </a:rPr>
+              <a:t>Tanpa biaya marginal perangkat lunak</a:t>
+            </a:r>
+            <a:endParaRPr lang="en-US" sz="1600" dirty="0"/>
+          </a:p>
+        </p:txBody>
+      </p:sp>
+      <p:sp>
+        <p:nvSpPr>
+          <p:cNvPr id="15" name="Text 13"/>
+          <p:cNvSpPr/>
+          <p:nvPr/>
+        </p:nvSpPr>
+        <p:spPr>
+          <a:xfrm>
+            <a:off x="8138160" y="3749040"/>
+            <a:ext cx="2743200" cy="1097280"/>
+          </a:xfrm>
+          <a:prstGeom prst="rect">
+            <a:avLst/>
+          </a:prstGeom>
+          <a:noFill/>
+          <a:ln/>
+        </p:spPr>
+        <p:txBody>
+          <a:bodyPr wrap="square" lIns="0" tIns="0" rIns="0" bIns="0" rtlCol="0" anchor="ctr"/>
+          <a:lstStyle/>
+          <a:p>
+            <a:pPr indent="0" marL="0">
+              <a:lnSpc>
+                <a:spcPts val="1800"/>
+              </a:lnSpc>
+              <a:buNone/>
+            </a:pPr>
+            <a:r>
+              <a:rPr lang="en-US" sz="1250" dirty="0">
+                <a:solidFill>
+                  <a:srgbClr val="14302B"/>
+                </a:solidFill>
+                <a:latin typeface="Calibri" pitchFamily="34" charset="0"/>
+                <a:ea typeface="Calibri" pitchFamily="34" charset="-122"/>
+                <a:cs typeface="Calibri" pitchFamily="34" charset="-120"/>
+              </a:rPr>
+              <a:t>PWA statis. Tidak ada server, basis data, maupun lisensi. Posyandu ke-1 dan ke-1.000 memuat berkas yang sama.</a:t>
+            </a:r>
+            <a:endParaRPr lang="en-US" sz="1250" dirty="0"/>
+          </a:p>
+        </p:txBody>
+      </p:sp>
+      <p:sp>
+        <p:nvSpPr>
+          <p:cNvPr id="16" name="Text 14"/>
+          <p:cNvSpPr/>
+          <p:nvPr/>
+        </p:nvSpPr>
+        <p:spPr>
+          <a:xfrm>
+            <a:off x="685800" y="5349240"/>
+            <a:ext cx="6766560" cy="640080"/>
+          </a:xfrm>
+          <a:prstGeom prst="rect">
+            <a:avLst/>
+          </a:prstGeom>
+          <a:noFill/>
+          <a:ln/>
+        </p:spPr>
+        <p:txBody>
+          <a:bodyPr wrap="square" lIns="0" tIns="0" rIns="0" bIns="0" rtlCol="0" anchor="ctr"/>
+          <a:lstStyle/>
+          <a:p>
+            <a:pPr indent="0" marL="0">
+              <a:lnSpc>
+                <a:spcPts val="2100"/>
+              </a:lnSpc>
+              <a:buNone/>
+            </a:pPr>
+            <a:r>
+              <a:rPr lang="en-US" sz="1500" i="1" dirty="0">
+                <a:solidFill>
+                  <a:srgbClr val="14302B"/>
+                </a:solidFill>
+                <a:latin typeface="Cambria" pitchFamily="34" charset="0"/>
+                <a:ea typeface="Cambria" pitchFamily="34" charset="-122"/>
+                <a:cs typeface="Cambria" pitchFamily="34" charset="-120"/>
+              </a:rPr>
+              <a:t>Skala kohort acuan Nature Medicine dapat dicapai dalam satu tahun studi di 30 Posyandu — sebagai penelitian prospektif berizin etik dengan acuan klinis buta, bukan sebagai penyebaran produk.</a:t>
+            </a:r>
+            <a:endParaRPr lang="en-US" sz="1500" dirty="0"/>
+          </a:p>
+        </p:txBody>
+      </p:sp>
+    </p:spTree>
+  </p:cSld>
+  <p:clrMapOvr>
+    <a:masterClrMapping/>
+  </p:clrMapOvr>
+</p:sld>
+</file>
+
+<file path=ppt/slides/slide15.xml><?xml version="1.0" encoding="utf-8"?>
+<p:sld xmlns:a="http://schemas.openxmlformats.org/drawingml/2006/main" xmlns:r="http://schemas.openxmlformats.org/officeDocument/2006/relationships" xmlns:p="http://schemas.openxmlformats.org/presentationml/2006/main">
+  <p:cSld name="Slide 15">
     <p:bg>
       <p:bgPr>
         <a:solidFill>

--- a/deck/Neurogaze-Pitch-Deck.pptx
+++ b/deck/Neurogaze-Pitch-Deck.pptx
@@ -20,9 +20,10 @@
     <p:sldId id="268" r:id="rId14"/>
     <p:sldId id="269" r:id="rId15"/>
     <p:sldId id="270" r:id="rId16"/>
+    <p:sldId id="271" r:id="rId17"/>
   </p:sldIdLst>
   <p:notesMasterIdLst>
-    <p:notesMasterId r:id="rId17"/>
+    <p:notesMasterId r:id="rId18"/>
   </p:notesMasterIdLst>
   <p:sldSz cx="12192000" cy="6858000"/>
   <p:notesSz cx="6858000" cy="12192000"/>
@@ -890,7 +891,7 @@
           <a:p>
             <a:r>
               <a:rPr lang="en-US" dirty="0"/>
-              <a:t>0:45. Ini bagian Impact yang paling kuat di seluruh deck — pelankan. Satu wawancara bukan pengukuran kapasitas, dan narasumber tidak melihat tabel ini; sebut keduanya. Sensitivitas 17% bukan bug, itu bentuk alatnya. Rule-in.</a:t>
+              <a:t>Sebut sendiri bahwa 544/547 hampir pasti tinggi karena referensinya dikalibrasi di persentil 99,5 — kalau juri yang menemukannya, angka itu berbalik jadi senjata. Yang dijual adalah kontrasnya dengan 1/23, dan parity 23/23.</a:t>
             </a:r>
             <a:endParaRPr lang="en-US" dirty="0"/>
           </a:p>
@@ -978,7 +979,7 @@
           <a:p>
             <a:r>
               <a:rPr lang="en-US" dirty="0"/>
-              <a:t>Ini slide AI Implementation, bukan slide integritas — jual temuannya lebih dulu, penolakannya belakangan. Kalimat kuncinya: setiap makalah pada dataset ini yang tidak menjalankan alas semacam ini berisiko melaporkan performa yang sebagian berasal dari perbedaan pengumpulan data. Dataset wajah cukup satu baris; jangan diceritakan ulang.</a:t>
+              <a:t>0:45. Ini bagian Impact yang paling kuat di seluruh deck — pelankan. Satu wawancara bukan pengukuran kapasitas, dan narasumber tidak melihat tabel ini; sebut keduanya. Sensitivitas 17% bukan bug, itu bentuk alatnya. Rule-in.</a:t>
             </a:r>
             <a:endParaRPr lang="en-US" dirty="0"/>
           </a:p>
@@ -1066,7 +1067,7 @@
           <a:p>
             <a:r>
               <a:rPr lang="en-US" dirty="0"/>
-              <a:t>0:40. INI pembuka bagian dampak, bukan tabel biaya. Klaim yang tidak bersyarat, sudah selesai, dan tidak butuh satu balita pun untuk dibuktikan. Baru setelah ini masuk ke biaya, dan biaya selalu disebut sebagai skenario.</a:t>
+              <a:t>Ini slide AI Implementation, bukan slide integritas — jual temuannya lebih dulu, penolakannya belakangan. Kalimat kuncinya: setiap makalah pada dataset ini yang tidak menjalankan alas semacam ini berisiko melaporkan performa yang sebagian berasal dari perbedaan pengumpulan data. Dataset wajah cukup satu baris; jangan diceritakan ulang.</a:t>
             </a:r>
             <a:endParaRPr lang="en-US" dirty="0"/>
           </a:p>
@@ -1154,7 +1155,7 @@
           <a:p>
             <a:r>
               <a:rPr lang="en-US" dirty="0"/>
-              <a:t>1:10. Bobot terbesar di rubrik. Sebut sendiri bahwa ini skenario bersyarat, lalu sebut biaya operasi yang belum terukur — sebelum juri menghitungnya.</a:t>
+              <a:t>0:40. INI pembuka bagian dampak, bukan tabel biaya. Klaim yang tidak bersyarat, sudah selesai, dan tidak butuh satu balita pun untuk dibuktikan. Baru setelah ini masuk ke biaya, dan biaya selalu disebut sebagai skenario.</a:t>
             </a:r>
             <a:endParaRPr lang="en-US" dirty="0"/>
           </a:p>
@@ -1242,7 +1243,7 @@
           <a:p>
             <a:r>
               <a:rPr lang="en-US" dirty="0"/>
-              <a:t>Ini yang mengubah 'belum ada data' dari kelemahan menjadi rencana. Sebut kata 'studi prospektif berizin etik' dengan suara — kalau slide ini terdengar seperti rencana menyebar produk untuk memanen data balita, seluruh bagian responsible AI runtuh di satu kalimat.</a:t>
+              <a:t>1:10. Bobot terbesar di rubrik. Sebut sendiri bahwa ini skenario bersyarat, lalu sebut biaya operasi yang belum terukur — sebelum juri menghitungnya.</a:t>
             </a:r>
             <a:endParaRPr lang="en-US" dirty="0"/>
           </a:p>
@@ -1330,7 +1331,7 @@
           <a:p>
             <a:r>
               <a:rPr lang="en-US" dirty="0"/>
-              <a:t>0:30. Berhenti di sini. Jangan sebut kaji etik sebagai tanda tangan; permintaannya mitra, bukan izin. Jangan tutup dengan 'lima lembaga menolak kami'.</a:t>
+              <a:t>Ini yang mengubah 'belum ada data' dari kelemahan menjadi rencana. Sebut kata 'studi prospektif berizin etik' dengan suara — kalau slide ini terdengar seperti rencana menyebar produk untuk memanen data balita, seluruh bagian responsible AI runtuh di satu kalimat.</a:t>
             </a:r>
             <a:endParaRPr lang="en-US" dirty="0"/>
           </a:p>
@@ -1354,6 +1355,94 @@
             <a:fld id="{F7021451-1387-4CA6-816F-3879F97B5CBC}" type="slidenum">
               <a:rPr lang="en-US"/>
               <a:t>15</a:t>
+            </a:fld>
+            <a:endParaRPr lang="en-US"/>
+          </a:p>
+        </p:txBody>
+      </p:sp>
+    </p:spTree>
+    <p:extLst>
+      <p:ext uri="{BB962C8B-B14F-4D97-AF65-F5344CB8AC3E}">
+        <p14:creationId xmlns:p14="http://schemas.microsoft.com/office/powerpoint/2010/main" val="1024086991"/>
+      </p:ext>
+    </p:extLst>
+  </p:cSld>
+  <p:clrMapOvr>
+    <a:masterClrMapping/>
+  </p:clrMapOvr>
+</p:notes>
+</file>
+
+<file path=ppt/notesSlides/notesSlide16.xml><?xml version="1.0" encoding="utf-8"?>
+<p:notes xmlns:a="http://schemas.openxmlformats.org/drawingml/2006/main" xmlns:r="http://schemas.openxmlformats.org/officeDocument/2006/relationships" xmlns:p="http://schemas.openxmlformats.org/presentationml/2006/main">
+  <p:cSld>
+    <p:spTree>
+      <p:nvGrpSpPr>
+        <p:cNvPr id="1" name=""/>
+        <p:cNvGrpSpPr/>
+        <p:nvPr/>
+      </p:nvGrpSpPr>
+      <p:grpSpPr>
+        <a:xfrm>
+          <a:off x="0" y="0"/>
+          <a:ext cx="0" cy="0"/>
+          <a:chOff x="0" y="0"/>
+          <a:chExt cx="0" cy="0"/>
+        </a:xfrm>
+      </p:grpSpPr>
+      <p:sp>
+        <p:nvSpPr>
+          <p:cNvPr id="2" name="Slide Image Placeholder 1"/>
+          <p:cNvSpPr>
+            <a:spLocks noGrp="1" noRot="1" noChangeAspect="1"/>
+          </p:cNvSpPr>
+          <p:nvPr>
+            <p:ph type="sldImg"/>
+          </p:nvPr>
+        </p:nvSpPr>
+        <p:spPr/>
+      </p:sp>
+      <p:sp>
+        <p:nvSpPr>
+          <p:cNvPr id="3" name="Notes Placeholder 2"/>
+          <p:cNvSpPr>
+            <a:spLocks noGrp="1"/>
+          </p:cNvSpPr>
+          <p:nvPr>
+            <p:ph type="body" idx="1"/>
+          </p:nvPr>
+        </p:nvSpPr>
+        <p:spPr/>
+        <p:txBody>
+          <a:bodyPr/>
+          <a:lstStyle/>
+          <a:p>
+            <a:r>
+              <a:rPr lang="en-US" dirty="0"/>
+              <a:t>0:30. Berhenti di sini. Jangan sebut kaji etik sebagai tanda tangan; permintaannya mitra, bukan izin. Jangan tutup dengan 'lima lembaga menolak kami'.</a:t>
+            </a:r>
+            <a:endParaRPr lang="en-US" dirty="0"/>
+          </a:p>
+        </p:txBody>
+      </p:sp>
+      <p:sp>
+        <p:nvSpPr>
+          <p:cNvPr id="4" name="Slide Number Placeholder 3"/>
+          <p:cNvSpPr>
+            <a:spLocks noGrp="1"/>
+          </p:cNvSpPr>
+          <p:nvPr>
+            <p:ph type="sldNum" sz="quarter" idx="10"/>
+          </p:nvPr>
+        </p:nvSpPr>
+        <p:spPr/>
+        <p:txBody>
+          <a:bodyPr/>
+          <a:lstStyle/>
+          <a:p>
+            <a:fld id="{F7021451-1387-4CA6-816F-3879F97B5CBC}" type="slidenum">
+              <a:rPr lang="en-US"/>
+              <a:t>16</a:t>
             </a:fld>
             <a:endParaRPr lang="en-US"/>
           </a:p>
@@ -1770,7 +1859,7 @@
           <a:p>
             <a:r>
               <a:rPr lang="en-US" dirty="0"/>
-              <a:t>0:45. Ini bagian yang menutup lubang terbesar di rubrik (AI Implementation, 10%).</a:t>
+              <a:t>0:30. Sebut sendiri bahwa operatornya tim, bukan kader — sebelum juri menanyakannya. Yang dijual: 6 kondisi lingkungan dan 3 perangkat sungguhan. Kalau folder deck/foto kosong, slide ini muncul dengan kotak placeholder; isi dulu sebelum mencetak.</a:t>
             </a:r>
             <a:endParaRPr lang="en-US" dirty="0"/>
           </a:p>
@@ -1858,7 +1947,7 @@
           <a:p>
             <a:r>
               <a:rPr lang="en-US" dirty="0"/>
-              <a:t>Lambatkan di sini. Ini satu-satunya temuan terukur milik sendiri di seluruh proyek — semua angka lain milik studi orang lain.</a:t>
+              <a:t>0:45. Ini bagian yang menutup lubang terbesar di rubrik (AI Implementation, 10%).</a:t>
             </a:r>
             <a:endParaRPr lang="en-US" dirty="0"/>
           </a:p>
@@ -1946,7 +2035,7 @@
           <a:p>
             <a:r>
               <a:rPr lang="en-US" dirty="0"/>
-              <a:t>0:35. Ini kontribusi metodologis yang selama ini cuma catatan kaki. Baris 0,69 yang dijual: 52% jadi 4,8%. Lalu segera sebut baris 0,90 — 99% — supaya tidak terdengar seperti alat yang jadi tumpul.</a:t>
+              <a:t>Lambatkan di sini. Ini satu-satunya temuan terukur milik sendiri di seluruh proyek — semua angka lain milik studi orang lain.</a:t>
             </a:r>
             <a:endParaRPr lang="en-US" dirty="0"/>
           </a:p>
@@ -2034,7 +2123,7 @@
           <a:p>
             <a:r>
               <a:rPr lang="en-US" dirty="0"/>
-              <a:t>Sebut sendiri bahwa 544/547 hampir pasti tinggi karena referensinya dikalibrasi di persentil 99,5 — kalau juri yang menemukannya, angka itu berbalik jadi senjata. Yang dijual adalah kontrasnya dengan 1/23, dan parity 23/23.</a:t>
+              <a:t>0:35. Ini kontribusi metodologis yang selama ini cuma catatan kaki. Baris 0,69 yang dijual: 52% jadi 4,8%. Lalu segera sebut baris 0,90 — 99% — supaya tidak terdengar seperti alat yang jadi tumpul.</a:t>
             </a:r>
             <a:endParaRPr lang="en-US" dirty="0"/>
           </a:p>
@@ -2775,7 +2864,7 @@
                 <a:ea typeface="Calibri" pitchFamily="34" charset="-122"/>
                 <a:cs typeface="Calibri" pitchFamily="34" charset="-120"/>
               </a:rPr>
-              <a:t>Kenapa punya batas</a:t>
+              <a:t>Penjaga out-of-distribution</a:t>
             </a:r>
             <a:endParaRPr lang="en-US" sz="1200" dirty="0"/>
           </a:p>
@@ -2817,6 +2906,756 @@
                 <a:ea typeface="Cambria" pitchFamily="34" charset="-122"/>
                 <a:cs typeface="Cambria" pitchFamily="34" charset="-120"/>
               </a:rPr>
+              <a:t>Modelnya jalan. Penjaganya menolak — dan kami buktikan ia tidak menolak semuanya.</a:t>
+            </a:r>
+            <a:endParaRPr lang="en-US" sz="3200" dirty="0"/>
+          </a:p>
+        </p:txBody>
+      </p:sp>
+      <p:sp>
+        <p:nvSpPr>
+          <p:cNvPr id="6" name="Shape 4"/>
+          <p:cNvSpPr/>
+          <p:nvPr/>
+        </p:nvSpPr>
+        <p:spPr>
+          <a:xfrm>
+            <a:off x="685800" y="2194560"/>
+            <a:ext cx="5760720" cy="2286000"/>
+          </a:xfrm>
+          <a:prstGeom prst="roundRect">
+            <a:avLst>
+              <a:gd name="adj" fmla="val 2400"/>
+            </a:avLst>
+          </a:prstGeom>
+          <a:solidFill>
+            <a:srgbClr val="0B1E1B"/>
+          </a:solidFill>
+          <a:ln w="12700">
+            <a:solidFill>
+              <a:srgbClr val="0B1E1B"/>
+            </a:solidFill>
+            <a:prstDash val="solid"/>
+          </a:ln>
+        </p:spPr>
+      </p:sp>
+      <p:sp>
+        <p:nvSpPr>
+          <p:cNvPr id="7" name="Text 5"/>
+          <p:cNvSpPr/>
+          <p:nvPr/>
+        </p:nvSpPr>
+        <p:spPr>
+          <a:xfrm>
+            <a:off x="1051560" y="2487168"/>
+            <a:ext cx="5029200" cy="274320"/>
+          </a:xfrm>
+          <a:prstGeom prst="rect">
+            <a:avLst/>
+          </a:prstGeom>
+          <a:noFill/>
+          <a:ln/>
+        </p:spPr>
+        <p:txBody>
+          <a:bodyPr wrap="square" lIns="0" tIns="0" rIns="0" bIns="0" rtlCol="0" anchor="ctr"/>
+          <a:lstStyle/>
+          <a:p>
+            <a:pPr indent="0" marL="0">
+              <a:buNone/>
+            </a:pPr>
+            <a:r>
+              <a:rPr lang="en-US" sz="1150" b="1" spc="120" kern="0" dirty="0">
+                <a:solidFill>
+                  <a:srgbClr val="8CAEA5"/>
+                </a:solidFill>
+                <a:latin typeface="Calibri" pitchFamily="34" charset="0"/>
+                <a:ea typeface="Calibri" pitchFamily="34" charset="-122"/>
+                <a:cs typeface="Calibri" pitchFamily="34" charset="-120"/>
+              </a:rPr>
+              <a:t>PUTUSAN PENJAGA</a:t>
+            </a:r>
+            <a:endParaRPr lang="en-US" sz="1150" dirty="0"/>
+          </a:p>
+        </p:txBody>
+      </p:sp>
+      <p:sp>
+        <p:nvSpPr>
+          <p:cNvPr id="8" name="Text 6"/>
+          <p:cNvSpPr/>
+          <p:nvPr/>
+        </p:nvSpPr>
+        <p:spPr>
+          <a:xfrm>
+            <a:off x="1051560" y="2788920"/>
+            <a:ext cx="2743200" cy="548640"/>
+          </a:xfrm>
+          <a:prstGeom prst="rect">
+            <a:avLst/>
+          </a:prstGeom>
+          <a:noFill/>
+          <a:ln/>
+        </p:spPr>
+        <p:txBody>
+          <a:bodyPr wrap="square" lIns="0" tIns="0" rIns="0" bIns="0" rtlCol="0" anchor="ctr"/>
+          <a:lstStyle/>
+          <a:p>
+            <a:pPr indent="0" marL="0">
+              <a:buNone/>
+            </a:pPr>
+            <a:r>
+              <a:rPr lang="en-US" sz="3400" b="1" dirty="0">
+                <a:solidFill>
+                  <a:srgbClr val="F0A189"/>
+                </a:solidFill>
+                <a:latin typeface="Cambria" pitchFamily="34" charset="0"/>
+                <a:ea typeface="Cambria" pitchFamily="34" charset="-122"/>
+                <a:cs typeface="Cambria" pitchFamily="34" charset="-120"/>
+              </a:rPr>
+              <a:t>Ditolak</a:t>
+            </a:r>
+            <a:endParaRPr lang="en-US" sz="3400" dirty="0"/>
+          </a:p>
+        </p:txBody>
+      </p:sp>
+      <p:sp>
+        <p:nvSpPr>
+          <p:cNvPr id="9" name="Text 7"/>
+          <p:cNvSpPr/>
+          <p:nvPr/>
+        </p:nvSpPr>
+        <p:spPr>
+          <a:xfrm>
+            <a:off x="1051560" y="3383280"/>
+            <a:ext cx="5029200" cy="274320"/>
+          </a:xfrm>
+          <a:prstGeom prst="rect">
+            <a:avLst/>
+          </a:prstGeom>
+          <a:noFill/>
+          <a:ln/>
+        </p:spPr>
+        <p:txBody>
+          <a:bodyPr wrap="square" lIns="0" tIns="0" rIns="0" bIns="0" rtlCol="0" anchor="ctr"/>
+          <a:lstStyle/>
+          <a:p>
+            <a:pPr indent="0" marL="0">
+              <a:buNone/>
+            </a:pPr>
+            <a:r>
+              <a:rPr lang="en-US" sz="1300" dirty="0">
+                <a:solidFill>
+                  <a:srgbClr val="B7D2CA"/>
+                </a:solidFill>
+                <a:latin typeface="Calibri" pitchFamily="34" charset="0"/>
+                <a:ea typeface="Calibri" pitchFamily="34" charset="-122"/>
+                <a:cs typeface="Calibri" pitchFamily="34" charset="-120"/>
+              </a:rPr>
+              <a:t>3 fitur ditandai  ·  cakupan 100%</a:t>
+            </a:r>
+            <a:endParaRPr lang="en-US" sz="1300" dirty="0"/>
+          </a:p>
+        </p:txBody>
+      </p:sp>
+      <p:sp>
+        <p:nvSpPr>
+          <p:cNvPr id="10" name="Text 8"/>
+          <p:cNvSpPr/>
+          <p:nvPr/>
+        </p:nvSpPr>
+        <p:spPr>
+          <a:xfrm>
+            <a:off x="1051560" y="3767328"/>
+            <a:ext cx="5029200" cy="457200"/>
+          </a:xfrm>
+          <a:prstGeom prst="rect">
+            <a:avLst/>
+          </a:prstGeom>
+          <a:noFill/>
+          <a:ln/>
+        </p:spPr>
+        <p:txBody>
+          <a:bodyPr wrap="square" lIns="0" tIns="0" rIns="0" bIns="0" rtlCol="0" anchor="ctr"/>
+          <a:lstStyle/>
+          <a:p>
+            <a:pPr indent="0" marL="0">
+              <a:lnSpc>
+                <a:spcPts val="1700"/>
+              </a:lnSpc>
+              <a:buNone/>
+            </a:pPr>
+            <a:r>
+              <a:rPr lang="en-US" sz="1250" dirty="0">
+                <a:solidFill>
+                  <a:srgbClr val="5CB9A3"/>
+                </a:solidFill>
+                <a:latin typeface="Calibri" pitchFamily="34" charset="0"/>
+                <a:ea typeface="Calibri" pitchFamily="34" charset="-122"/>
+                <a:cs typeface="Calibri" pitchFamily="34" charset="-120"/>
+              </a:rPr>
+              <a:t>Jarak terjauh 9,1 z  ·  Mahalanobis 87,9  ·  keluaran model ditahan</a:t>
+            </a:r>
+            <a:endParaRPr lang="en-US" sz="1250" dirty="0"/>
+          </a:p>
+        </p:txBody>
+      </p:sp>
+      <p:sp>
+        <p:nvSpPr>
+          <p:cNvPr id="11" name="Text 9"/>
+          <p:cNvSpPr/>
+          <p:nvPr/>
+        </p:nvSpPr>
+        <p:spPr>
+          <a:xfrm>
+            <a:off x="6995160" y="2286000"/>
+            <a:ext cx="4480560" cy="822960"/>
+          </a:xfrm>
+          <a:prstGeom prst="rect">
+            <a:avLst/>
+          </a:prstGeom>
+          <a:noFill/>
+          <a:ln/>
+        </p:spPr>
+        <p:txBody>
+          <a:bodyPr wrap="square" lIns="0" tIns="0" rIns="0" bIns="0" rtlCol="0" anchor="ctr"/>
+          <a:lstStyle/>
+          <a:p>
+            <a:pPr indent="0" marL="0">
+              <a:lnSpc>
+                <a:spcPts val="2400"/>
+              </a:lnSpc>
+              <a:buNone/>
+            </a:pPr>
+            <a:r>
+              <a:rPr lang="en-US" sz="1800" b="1" dirty="0">
+                <a:solidFill>
+                  <a:srgbClr val="0B1E1B"/>
+                </a:solidFill>
+                <a:latin typeface="Cambria" pitchFamily="34" charset="0"/>
+                <a:ea typeface="Cambria" pitchFamily="34" charset="-122"/>
+                <a:cs typeface="Cambria" pitchFamily="34" charset="-120"/>
+              </a:rPr>
+              <a:t>Penjaga yang selalu menolak sama saja dengan false yang dipasang tetap. Jadi kami jalankan dua arah.</a:t>
+            </a:r>
+            <a:endParaRPr lang="en-US" sz="1800" dirty="0"/>
+          </a:p>
+        </p:txBody>
+      </p:sp>
+      <p:sp>
+        <p:nvSpPr>
+          <p:cNvPr id="12" name="Text 10"/>
+          <p:cNvSpPr/>
+          <p:nvPr/>
+        </p:nvSpPr>
+        <p:spPr>
+          <a:xfrm>
+            <a:off x="6995160" y="3200400"/>
+            <a:ext cx="2743200" cy="274320"/>
+          </a:xfrm>
+          <a:prstGeom prst="rect">
+            <a:avLst/>
+          </a:prstGeom>
+          <a:noFill/>
+          <a:ln/>
+        </p:spPr>
+        <p:txBody>
+          <a:bodyPr wrap="square" lIns="0" tIns="0" rIns="0" bIns="0" rtlCol="0" anchor="ctr"/>
+          <a:lstStyle/>
+          <a:p>
+            <a:pPr indent="0" marL="0">
+              <a:buNone/>
+            </a:pPr>
+            <a:r>
+              <a:rPr lang="en-US" sz="1200" dirty="0">
+                <a:solidFill>
+                  <a:srgbClr val="4A635D"/>
+                </a:solidFill>
+                <a:latin typeface="Calibri" pitchFamily="34" charset="0"/>
+                <a:ea typeface="Calibri" pitchFamily="34" charset="-122"/>
+                <a:cs typeface="Calibri" pitchFamily="34" charset="-120"/>
+              </a:rPr>
+              <a:t>Domain sumber (Carette)</a:t>
+            </a:r>
+            <a:endParaRPr lang="en-US" sz="1200" dirty="0"/>
+          </a:p>
+        </p:txBody>
+      </p:sp>
+      <p:sp>
+        <p:nvSpPr>
+          <p:cNvPr id="13" name="Text 11"/>
+          <p:cNvSpPr/>
+          <p:nvPr/>
+        </p:nvSpPr>
+        <p:spPr>
+          <a:xfrm>
+            <a:off x="9738360" y="3145536"/>
+            <a:ext cx="1737360" cy="329184"/>
+          </a:xfrm>
+          <a:prstGeom prst="rect">
+            <a:avLst/>
+          </a:prstGeom>
+          <a:noFill/>
+          <a:ln/>
+        </p:spPr>
+        <p:txBody>
+          <a:bodyPr wrap="square" lIns="0" tIns="0" rIns="0" bIns="0" rtlCol="0" anchor="ctr"/>
+          <a:lstStyle/>
+          <a:p>
+            <a:pPr algn="r" indent="0" marL="0">
+              <a:buNone/>
+            </a:pPr>
+            <a:r>
+              <a:rPr lang="en-US" sz="1450" b="1" dirty="0">
+                <a:solidFill>
+                  <a:srgbClr val="0D8271"/>
+                </a:solidFill>
+                <a:latin typeface="Calibri" pitchFamily="34" charset="0"/>
+                <a:ea typeface="Calibri" pitchFamily="34" charset="-122"/>
+                <a:cs typeface="Calibri" pitchFamily="34" charset="-120"/>
+              </a:rPr>
+              <a:t>544 / 547 diterima</a:t>
+            </a:r>
+            <a:endParaRPr lang="en-US" sz="1450" dirty="0"/>
+          </a:p>
+        </p:txBody>
+      </p:sp>
+      <p:sp>
+        <p:nvSpPr>
+          <p:cNvPr id="14" name="Text 12"/>
+          <p:cNvSpPr/>
+          <p:nvPr/>
+        </p:nvSpPr>
+        <p:spPr>
+          <a:xfrm>
+            <a:off x="6995160" y="3767328"/>
+            <a:ext cx="2743200" cy="274320"/>
+          </a:xfrm>
+          <a:prstGeom prst="rect">
+            <a:avLst/>
+          </a:prstGeom>
+          <a:noFill/>
+          <a:ln/>
+        </p:spPr>
+        <p:txBody>
+          <a:bodyPr wrap="square" lIns="0" tIns="0" rIns="0" bIns="0" rtlCol="0" anchor="ctr"/>
+          <a:lstStyle/>
+          <a:p>
+            <a:pPr indent="0" marL="0">
+              <a:buNone/>
+            </a:pPr>
+            <a:r>
+              <a:rPr lang="en-US" sz="1200" dirty="0">
+                <a:solidFill>
+                  <a:srgbClr val="4A635D"/>
+                </a:solidFill>
+                <a:latin typeface="Calibri" pitchFamily="34" charset="0"/>
+                <a:ea typeface="Calibri" pitchFamily="34" charset="-122"/>
+                <a:cs typeface="Calibri" pitchFamily="34" charset="-120"/>
+              </a:rPr>
+              <a:t>Stimulus yang dikirim</a:t>
+            </a:r>
+            <a:endParaRPr lang="en-US" sz="1200" dirty="0"/>
+          </a:p>
+        </p:txBody>
+      </p:sp>
+      <p:sp>
+        <p:nvSpPr>
+          <p:cNvPr id="15" name="Text 13"/>
+          <p:cNvSpPr/>
+          <p:nvPr/>
+        </p:nvSpPr>
+        <p:spPr>
+          <a:xfrm>
+            <a:off x="9738360" y="3712464"/>
+            <a:ext cx="1737360" cy="329184"/>
+          </a:xfrm>
+          <a:prstGeom prst="rect">
+            <a:avLst/>
+          </a:prstGeom>
+          <a:noFill/>
+          <a:ln/>
+        </p:spPr>
+        <p:txBody>
+          <a:bodyPr wrap="square" lIns="0" tIns="0" rIns="0" bIns="0" rtlCol="0" anchor="ctr"/>
+          <a:lstStyle/>
+          <a:p>
+            <a:pPr algn="r" indent="0" marL="0">
+              <a:buNone/>
+            </a:pPr>
+            <a:r>
+              <a:rPr lang="en-US" sz="1450" b="1" dirty="0">
+                <a:solidFill>
+                  <a:srgbClr val="B1442C"/>
+                </a:solidFill>
+                <a:latin typeface="Calibri" pitchFamily="34" charset="0"/>
+                <a:ea typeface="Calibri" pitchFamily="34" charset="-122"/>
+                <a:cs typeface="Calibri" pitchFamily="34" charset="-120"/>
+              </a:rPr>
+              <a:t>1 / 23 diterima</a:t>
+            </a:r>
+            <a:endParaRPr lang="en-US" sz="1450" dirty="0"/>
+          </a:p>
+        </p:txBody>
+      </p:sp>
+      <p:sp>
+        <p:nvSpPr>
+          <p:cNvPr id="16" name="Text 14"/>
+          <p:cNvSpPr/>
+          <p:nvPr/>
+        </p:nvSpPr>
+        <p:spPr>
+          <a:xfrm>
+            <a:off x="6995160" y="4334256"/>
+            <a:ext cx="2743200" cy="274320"/>
+          </a:xfrm>
+          <a:prstGeom prst="rect">
+            <a:avLst/>
+          </a:prstGeom>
+          <a:noFill/>
+          <a:ln/>
+        </p:spPr>
+        <p:txBody>
+          <a:bodyPr wrap="square" lIns="0" tIns="0" rIns="0" bIns="0" rtlCol="0" anchor="ctr"/>
+          <a:lstStyle/>
+          <a:p>
+            <a:pPr indent="0" marL="0">
+              <a:buNone/>
+            </a:pPr>
+            <a:r>
+              <a:rPr lang="en-US" sz="1200" dirty="0">
+                <a:solidFill>
+                  <a:srgbClr val="4A635D"/>
+                </a:solidFill>
+                <a:latin typeface="Calibri" pitchFamily="34" charset="0"/>
+                <a:ea typeface="Calibri" pitchFamily="34" charset="-122"/>
+                <a:cs typeface="Calibri" pitchFamily="34" charset="-120"/>
+              </a:rPr>
+              <a:t>Keputusan direproduksi Python</a:t>
+            </a:r>
+            <a:endParaRPr lang="en-US" sz="1200" dirty="0"/>
+          </a:p>
+        </p:txBody>
+      </p:sp>
+      <p:sp>
+        <p:nvSpPr>
+          <p:cNvPr id="17" name="Text 15"/>
+          <p:cNvSpPr/>
+          <p:nvPr/>
+        </p:nvSpPr>
+        <p:spPr>
+          <a:xfrm>
+            <a:off x="9738360" y="4279392"/>
+            <a:ext cx="1737360" cy="329184"/>
+          </a:xfrm>
+          <a:prstGeom prst="rect">
+            <a:avLst/>
+          </a:prstGeom>
+          <a:noFill/>
+          <a:ln/>
+        </p:spPr>
+        <p:txBody>
+          <a:bodyPr wrap="square" lIns="0" tIns="0" rIns="0" bIns="0" rtlCol="0" anchor="ctr"/>
+          <a:lstStyle/>
+          <a:p>
+            <a:pPr algn="r" indent="0" marL="0">
+              <a:buNone/>
+            </a:pPr>
+            <a:r>
+              <a:rPr lang="en-US" sz="1450" b="1" dirty="0">
+                <a:solidFill>
+                  <a:srgbClr val="14302B"/>
+                </a:solidFill>
+                <a:latin typeface="Calibri" pitchFamily="34" charset="0"/>
+                <a:ea typeface="Calibri" pitchFamily="34" charset="-122"/>
+                <a:cs typeface="Calibri" pitchFamily="34" charset="-120"/>
+              </a:rPr>
+              <a:t>23 / 23</a:t>
+            </a:r>
+            <a:endParaRPr lang="en-US" sz="1450" dirty="0"/>
+          </a:p>
+        </p:txBody>
+      </p:sp>
+      <p:sp>
+        <p:nvSpPr>
+          <p:cNvPr id="18" name="Text 16"/>
+          <p:cNvSpPr/>
+          <p:nvPr/>
+        </p:nvSpPr>
+        <p:spPr>
+          <a:xfrm>
+            <a:off x="685800" y="4846320"/>
+            <a:ext cx="10424160" cy="548640"/>
+          </a:xfrm>
+          <a:prstGeom prst="rect">
+            <a:avLst/>
+          </a:prstGeom>
+          <a:noFill/>
+          <a:ln/>
+        </p:spPr>
+        <p:txBody>
+          <a:bodyPr wrap="square" lIns="0" tIns="0" rIns="0" bIns="0" rtlCol="0" anchor="ctr"/>
+          <a:lstStyle/>
+          <a:p>
+            <a:pPr indent="0" marL="0">
+              <a:lnSpc>
+                <a:spcPts val="1800"/>
+              </a:lnSpc>
+              <a:buNone/>
+            </a:pPr>
+            <a:r>
+              <a:rPr lang="en-US" sz="1300" dirty="0">
+                <a:solidFill>
+                  <a:srgbClr val="14302B"/>
+                </a:solidFill>
+                <a:latin typeface="Calibri" pitchFamily="34" charset="0"/>
+                <a:ea typeface="Calibri" pitchFamily="34" charset="-122"/>
+                <a:cs typeface="Calibri" pitchFamily="34" charset="-120"/>
+              </a:rPr>
+              <a:t>Ia menerima hampir semua yang berasal dari kohort yang membangunnya, dan menolak setiap sesi pada stimulus sekarang — sambil menyebut fiturnya: ink_frac di 22 dari 23 sesi.</a:t>
+            </a:r>
+            <a:endParaRPr lang="en-US" sz="1300" dirty="0"/>
+          </a:p>
+        </p:txBody>
+      </p:sp>
+      <p:sp>
+        <p:nvSpPr>
+          <p:cNvPr id="19" name="Text 17"/>
+          <p:cNvSpPr/>
+          <p:nvPr/>
+        </p:nvSpPr>
+        <p:spPr>
+          <a:xfrm>
+            <a:off x="685800" y="5440680"/>
+            <a:ext cx="10424160" cy="457200"/>
+          </a:xfrm>
+          <a:prstGeom prst="rect">
+            <a:avLst/>
+          </a:prstGeom>
+          <a:noFill/>
+          <a:ln/>
+        </p:spPr>
+        <p:txBody>
+          <a:bodyPr wrap="square" lIns="0" tIns="0" rIns="0" bIns="0" rtlCol="0" anchor="ctr"/>
+          <a:lstStyle/>
+          <a:p>
+            <a:pPr indent="0" marL="0">
+              <a:lnSpc>
+                <a:spcPts val="2100"/>
+              </a:lnSpc>
+              <a:buNone/>
+            </a:pPr>
+            <a:r>
+              <a:rPr lang="en-US" sz="1500" i="1" dirty="0">
+                <a:solidFill>
+                  <a:srgbClr val="0D8271"/>
+                </a:solidFill>
+                <a:latin typeface="Cambria" pitchFamily="34" charset="0"/>
+                <a:ea typeface="Cambria" pitchFamily="34" charset="-122"/>
+                <a:cs typeface="Cambria" pitchFamily="34" charset="-120"/>
+              </a:rPr>
+              <a:t>Keputusan itu dibuat TypeScript di peramban saat sesi berjalan. Python menghitungnya ulang dari log dan mendapat verdict yang sama, 23 dari 23.</a:t>
+            </a:r>
+            <a:endParaRPr lang="en-US" sz="1500" dirty="0"/>
+          </a:p>
+        </p:txBody>
+      </p:sp>
+      <p:sp>
+        <p:nvSpPr>
+          <p:cNvPr id="20" name="Text 18"/>
+          <p:cNvSpPr/>
+          <p:nvPr/>
+        </p:nvSpPr>
+        <p:spPr>
+          <a:xfrm>
+            <a:off x="685800" y="5943600"/>
+            <a:ext cx="10424160" cy="274320"/>
+          </a:xfrm>
+          <a:prstGeom prst="rect">
+            <a:avLst/>
+          </a:prstGeom>
+          <a:noFill/>
+          <a:ln/>
+        </p:spPr>
+        <p:txBody>
+          <a:bodyPr wrap="square" lIns="0" tIns="0" rIns="0" bIns="0" rtlCol="0" anchor="ctr"/>
+          <a:lstStyle/>
+          <a:p>
+            <a:pPr indent="0" marL="0">
+              <a:buNone/>
+            </a:pPr>
+            <a:r>
+              <a:rPr lang="en-US" sz="1000" dirty="0">
+                <a:solidFill>
+                  <a:srgbClr val="4A635D"/>
+                </a:solidFill>
+                <a:latin typeface="Calibri" pitchFamily="34" charset="0"/>
+                <a:ea typeface="Calibri" pitchFamily="34" charset="-122"/>
+                <a:cs typeface="Calibri" pitchFamily="34" charset="-120"/>
+              </a:rPr>
+              <a:t>Sumber: research/hasil/ood_dua_arah.json · kalibrasi referensi persentil 99,5 sehingga tingkat penerimaan domain sumber adalah pemeriksaan kewarasan, bukan uji generalisasi</a:t>
+            </a:r>
+            <a:endParaRPr lang="en-US" sz="1000" dirty="0"/>
+          </a:p>
+        </p:txBody>
+      </p:sp>
+    </p:spTree>
+  </p:cSld>
+  <p:clrMapOvr>
+    <a:masterClrMapping/>
+  </p:clrMapOvr>
+</p:sld>
+</file>
+
+<file path=ppt/slides/slide11.xml><?xml version="1.0" encoding="utf-8"?>
+<p:sld xmlns:a="http://schemas.openxmlformats.org/drawingml/2006/main" xmlns:r="http://schemas.openxmlformats.org/officeDocument/2006/relationships" xmlns:p="http://schemas.openxmlformats.org/presentationml/2006/main">
+  <p:cSld name="Slide 11">
+    <p:bg>
+      <p:bgPr>
+        <a:solidFill>
+          <a:srgbClr val="F7F9F8"/>
+        </a:solidFill>
+      </p:bgPr>
+    </p:bg>
+    <p:spTree>
+      <p:nvGrpSpPr>
+        <p:cNvPr id="1" name=""/>
+        <p:cNvGrpSpPr/>
+        <p:nvPr/>
+      </p:nvGrpSpPr>
+      <p:grpSpPr>
+        <a:xfrm>
+          <a:off x="0" y="0"/>
+          <a:ext cx="0" cy="0"/>
+          <a:chOff x="0" y="0"/>
+          <a:chExt cx="0" cy="0"/>
+        </a:xfrm>
+      </p:grpSpPr>
+      <p:sp>
+        <p:nvSpPr>
+          <p:cNvPr id="2" name="Shape 0"/>
+          <p:cNvSpPr/>
+          <p:nvPr/>
+        </p:nvSpPr>
+        <p:spPr>
+          <a:xfrm>
+            <a:off x="11268151" y="740664"/>
+            <a:ext cx="237744" cy="237744"/>
+          </a:xfrm>
+          <a:prstGeom prst="ellipse">
+            <a:avLst/>
+          </a:prstGeom>
+          <a:solidFill>
+            <a:srgbClr val="FFFFFF">
+              <a:alpha val="0"/>
+            </a:srgbClr>
+          </a:solidFill>
+          <a:ln w="25400">
+            <a:solidFill>
+              <a:srgbClr val="5CB9A3"/>
+            </a:solidFill>
+            <a:prstDash val="solid"/>
+          </a:ln>
+        </p:spPr>
+      </p:sp>
+      <p:sp>
+        <p:nvSpPr>
+          <p:cNvPr id="3" name="Shape 1"/>
+          <p:cNvSpPr/>
+          <p:nvPr/>
+        </p:nvSpPr>
+        <p:spPr>
+          <a:xfrm>
+            <a:off x="11339474" y="811987"/>
+            <a:ext cx="95098" cy="95098"/>
+          </a:xfrm>
+          <a:prstGeom prst="ellipse">
+            <a:avLst/>
+          </a:prstGeom>
+          <a:solidFill>
+            <a:srgbClr val="5CB9A3"/>
+          </a:solidFill>
+          <a:ln w="12700">
+            <a:solidFill>
+              <a:srgbClr val="333333"/>
+            </a:solidFill>
+            <a:prstDash val="solid"/>
+          </a:ln>
+        </p:spPr>
+      </p:sp>
+      <p:sp>
+        <p:nvSpPr>
+          <p:cNvPr id="4" name="Text 2"/>
+          <p:cNvSpPr/>
+          <p:nvPr/>
+        </p:nvSpPr>
+        <p:spPr>
+          <a:xfrm>
+            <a:off x="685800" y="685800"/>
+            <a:ext cx="10271455" cy="256032"/>
+          </a:xfrm>
+          <a:prstGeom prst="rect">
+            <a:avLst/>
+          </a:prstGeom>
+          <a:noFill/>
+          <a:ln/>
+        </p:spPr>
+        <p:txBody>
+          <a:bodyPr wrap="square" lIns="0" tIns="0" rIns="0" bIns="0" rtlCol="0" anchor="ctr"/>
+          <a:lstStyle/>
+          <a:p>
+            <a:pPr indent="0" marL="0">
+              <a:buNone/>
+            </a:pPr>
+            <a:r>
+              <a:rPr lang="en-US" sz="1200" b="1" spc="120" kern="0" dirty="0">
+                <a:solidFill>
+                  <a:srgbClr val="0D8271"/>
+                </a:solidFill>
+                <a:latin typeface="Calibri" pitchFamily="34" charset="0"/>
+                <a:ea typeface="Calibri" pitchFamily="34" charset="-122"/>
+                <a:cs typeface="Calibri" pitchFamily="34" charset="-120"/>
+              </a:rPr>
+              <a:t>Kenapa punya batas</a:t>
+            </a:r>
+            <a:endParaRPr lang="en-US" sz="1200" dirty="0"/>
+          </a:p>
+        </p:txBody>
+      </p:sp>
+      <p:sp>
+        <p:nvSpPr>
+          <p:cNvPr id="5" name="Text 3"/>
+          <p:cNvSpPr/>
+          <p:nvPr/>
+        </p:nvSpPr>
+        <p:spPr>
+          <a:xfrm>
+            <a:off x="685800" y="996696"/>
+            <a:ext cx="10271455" cy="822960"/>
+          </a:xfrm>
+          <a:prstGeom prst="rect">
+            <a:avLst/>
+          </a:prstGeom>
+          <a:noFill/>
+          <a:ln/>
+        </p:spPr>
+        <p:txBody>
+          <a:bodyPr wrap="square" lIns="0" tIns="0" rIns="0" bIns="0" rtlCol="0" anchor="ctr"/>
+          <a:lstStyle/>
+          <a:p>
+            <a:pPr indent="0" marL="0">
+              <a:lnSpc>
+                <a:spcPts val="3600"/>
+              </a:lnSpc>
+              <a:buNone/>
+            </a:pPr>
+            <a:r>
+              <a:rPr lang="en-US" sz="3200" b="1" dirty="0">
+                <a:solidFill>
+                  <a:srgbClr val="0B1E1B"/>
+                </a:solidFill>
+                <a:latin typeface="Cambria" pitchFamily="34" charset="0"/>
+                <a:ea typeface="Cambria" pitchFamily="34" charset="-122"/>
+                <a:cs typeface="Cambria" pitchFamily="34" charset="-120"/>
+              </a:rPr>
               <a:t>Kami memilih titik kerja yang menemukan paling sedikit</a:t>
             </a:r>
             <a:endParaRPr lang="en-US" sz="3200" dirty="0"/>
@@ -2825,7 +3664,7 @@
       </p:sp>
       <p:graphicFrame>
         <p:nvGraphicFramePr>
-          <p:cNvPr id="11" name="Table 0"/>
+          <p:cNvPr id="12" name="Table 0"/>
           <p:cNvGraphicFramePr>
             <a:graphicFrameLocks noGrp="1"/>
           </p:cNvGraphicFramePr>
@@ -4861,1101 +5700,6 @@
 </p:sld>
 </file>
 
-<file path=ppt/slides/slide11.xml><?xml version="1.0" encoding="utf-8"?>
-<p:sld xmlns:a="http://schemas.openxmlformats.org/drawingml/2006/main" xmlns:r="http://schemas.openxmlformats.org/officeDocument/2006/relationships" xmlns:p="http://schemas.openxmlformats.org/presentationml/2006/main">
-  <p:cSld name="Slide 11">
-    <p:bg>
-      <p:bgPr>
-        <a:solidFill>
-          <a:srgbClr val="F7F9F8"/>
-        </a:solidFill>
-      </p:bgPr>
-    </p:bg>
-    <p:spTree>
-      <p:nvGrpSpPr>
-        <p:cNvPr id="1" name=""/>
-        <p:cNvGrpSpPr/>
-        <p:nvPr/>
-      </p:nvGrpSpPr>
-      <p:grpSpPr>
-        <a:xfrm>
-          <a:off x="0" y="0"/>
-          <a:ext cx="0" cy="0"/>
-          <a:chOff x="0" y="0"/>
-          <a:chExt cx="0" cy="0"/>
-        </a:xfrm>
-      </p:grpSpPr>
-      <p:sp>
-        <p:nvSpPr>
-          <p:cNvPr id="2" name="Shape 0"/>
-          <p:cNvSpPr/>
-          <p:nvPr/>
-        </p:nvSpPr>
-        <p:spPr>
-          <a:xfrm>
-            <a:off x="11268151" y="740664"/>
-            <a:ext cx="237744" cy="237744"/>
-          </a:xfrm>
-          <a:prstGeom prst="ellipse">
-            <a:avLst/>
-          </a:prstGeom>
-          <a:solidFill>
-            <a:srgbClr val="FFFFFF">
-              <a:alpha val="0"/>
-            </a:srgbClr>
-          </a:solidFill>
-          <a:ln w="25400">
-            <a:solidFill>
-              <a:srgbClr val="5CB9A3"/>
-            </a:solidFill>
-            <a:prstDash val="solid"/>
-          </a:ln>
-        </p:spPr>
-      </p:sp>
-      <p:sp>
-        <p:nvSpPr>
-          <p:cNvPr id="3" name="Shape 1"/>
-          <p:cNvSpPr/>
-          <p:nvPr/>
-        </p:nvSpPr>
-        <p:spPr>
-          <a:xfrm>
-            <a:off x="11339474" y="811987"/>
-            <a:ext cx="95098" cy="95098"/>
-          </a:xfrm>
-          <a:prstGeom prst="ellipse">
-            <a:avLst/>
-          </a:prstGeom>
-          <a:solidFill>
-            <a:srgbClr val="5CB9A3"/>
-          </a:solidFill>
-          <a:ln w="12700">
-            <a:solidFill>
-              <a:srgbClr val="333333"/>
-            </a:solidFill>
-            <a:prstDash val="solid"/>
-          </a:ln>
-        </p:spPr>
-      </p:sp>
-      <p:sp>
-        <p:nvSpPr>
-          <p:cNvPr id="4" name="Text 2"/>
-          <p:cNvSpPr/>
-          <p:nvPr/>
-        </p:nvSpPr>
-        <p:spPr>
-          <a:xfrm>
-            <a:off x="685800" y="685800"/>
-            <a:ext cx="10271455" cy="256032"/>
-          </a:xfrm>
-          <a:prstGeom prst="rect">
-            <a:avLst/>
-          </a:prstGeom>
-          <a:noFill/>
-          <a:ln/>
-        </p:spPr>
-        <p:txBody>
-          <a:bodyPr wrap="square" lIns="0" tIns="0" rIns="0" bIns="0" rtlCol="0" anchor="ctr"/>
-          <a:lstStyle/>
-          <a:p>
-            <a:pPr indent="0" marL="0">
-              <a:buNone/>
-            </a:pPr>
-            <a:r>
-              <a:rPr lang="en-US" sz="1200" b="1" spc="120" kern="0" dirty="0">
-                <a:solidFill>
-                  <a:srgbClr val="0D8271"/>
-                </a:solidFill>
-                <a:latin typeface="Calibri" pitchFamily="34" charset="0"/>
-                <a:ea typeface="Calibri" pitchFamily="34" charset="-122"/>
-                <a:cs typeface="Calibri" pitchFamily="34" charset="-120"/>
-              </a:rPr>
-              <a:t>Lapis bobot · hasil negatif</a:t>
-            </a:r>
-            <a:endParaRPr lang="en-US" sz="1200" dirty="0"/>
-          </a:p>
-        </p:txBody>
-      </p:sp>
-      <p:sp>
-        <p:nvSpPr>
-          <p:cNvPr id="5" name="Text 3"/>
-          <p:cNvSpPr/>
-          <p:nvPr/>
-        </p:nvSpPr>
-        <p:spPr>
-          <a:xfrm>
-            <a:off x="685800" y="996696"/>
-            <a:ext cx="10271455" cy="822960"/>
-          </a:xfrm>
-          <a:prstGeom prst="rect">
-            <a:avLst/>
-          </a:prstGeom>
-          <a:noFill/>
-          <a:ln/>
-        </p:spPr>
-        <p:txBody>
-          <a:bodyPr wrap="square" lIns="0" tIns="0" rIns="0" bIns="0" rtlCol="0" anchor="ctr"/>
-          <a:lstStyle/>
-          <a:p>
-            <a:pPr indent="0" marL="0">
-              <a:lnSpc>
-                <a:spcPts val="3600"/>
-              </a:lnSpc>
-              <a:buNone/>
-            </a:pPr>
-            <a:r>
-              <a:rPr lang="en-US" sz="3200" b="1" dirty="0">
-                <a:solidFill>
-                  <a:srgbClr val="0B1E1B"/>
-                </a:solidFill>
-                <a:latin typeface="Cambria" pitchFamily="34" charset="0"/>
-                <a:ea typeface="Cambria" pitchFamily="34" charset="-122"/>
-                <a:cs typeface="Cambria" pitchFamily="34" charset="-120"/>
-              </a:rPr>
-              <a:t>Kami unduh data anak yang terbit, pasang bobotnya, lalu auditnya membunuhnya</a:t>
-            </a:r>
-            <a:endParaRPr lang="en-US" sz="3200" dirty="0"/>
-          </a:p>
-        </p:txBody>
-      </p:sp>
-      <p:sp>
-        <p:nvSpPr>
-          <p:cNvPr id="6" name="Text 4"/>
-          <p:cNvSpPr/>
-          <p:nvPr/>
-        </p:nvSpPr>
-        <p:spPr>
-          <a:xfrm>
-            <a:off x="685800" y="2103120"/>
-            <a:ext cx="10424160" cy="548640"/>
-          </a:xfrm>
-          <a:prstGeom prst="rect">
-            <a:avLst/>
-          </a:prstGeom>
-          <a:noFill/>
-          <a:ln/>
-        </p:spPr>
-        <p:txBody>
-          <a:bodyPr wrap="square" lIns="0" tIns="0" rIns="0" bIns="0" rtlCol="0" anchor="ctr"/>
-          <a:lstStyle/>
-          <a:p>
-            <a:pPr indent="0" marL="0">
-              <a:lnSpc>
-                <a:spcPts val="2000"/>
-              </a:lnSpc>
-              <a:buNone/>
-            </a:pPr>
-            <a:r>
-              <a:rPr lang="en-US" sz="1400" dirty="0">
-                <a:solidFill>
-                  <a:srgbClr val="14302B"/>
-                </a:solidFill>
-                <a:latin typeface="Calibri" pitchFamily="34" charset="0"/>
-                <a:ea typeface="Calibri" pitchFamily="34" charset="-122"/>
-                <a:cs typeface="Calibri" pitchFamily="34" charset="-120"/>
-              </a:rPr>
-              <a:t>Cilia dkk. 2022, CC BY 4.0: 59 anak berlabel, 2,25 juta baris koordinat. Data anak sungguhan tanpa merekam satu pun anak sendiri. Empat audit ditulis sebelum fitting dijalankan. Dua gagal.</a:t>
-            </a:r>
-            <a:endParaRPr lang="en-US" sz="1400" dirty="0"/>
-          </a:p>
-        </p:txBody>
-      </p:sp>
-      <p:sp>
-        <p:nvSpPr>
-          <p:cNvPr id="7" name="Text 5"/>
-          <p:cNvSpPr/>
-          <p:nvPr/>
-        </p:nvSpPr>
-        <p:spPr>
-          <a:xfrm>
-            <a:off x="685800" y="2743200"/>
-            <a:ext cx="6035040" cy="274320"/>
-          </a:xfrm>
-          <a:prstGeom prst="rect">
-            <a:avLst/>
-          </a:prstGeom>
-          <a:noFill/>
-          <a:ln/>
-        </p:spPr>
-        <p:txBody>
-          <a:bodyPr wrap="square" lIns="0" tIns="0" rIns="0" bIns="0" rtlCol="0" anchor="ctr"/>
-          <a:lstStyle/>
-          <a:p>
-            <a:pPr indent="0" marL="0">
-              <a:buNone/>
-            </a:pPr>
-            <a:r>
-              <a:rPr lang="en-US" sz="1100" b="1" dirty="0">
-                <a:solidFill>
-                  <a:srgbClr val="4A635D"/>
-                </a:solidFill>
-                <a:latin typeface="Calibri" pitchFamily="34" charset="0"/>
-                <a:ea typeface="Calibri" pitchFamily="34" charset="-122"/>
-                <a:cs typeface="Calibri" pitchFamily="34" charset="-120"/>
-              </a:rPr>
-              <a:t>AUC prediktor tunggal terhadap label ASD</a:t>
-            </a:r>
-            <a:endParaRPr lang="en-US" sz="1100" dirty="0"/>
-          </a:p>
-        </p:txBody>
-      </p:sp>
-      <p:sp>
-        <p:nvSpPr>
-          <p:cNvPr id="8" name="Text 6"/>
-          <p:cNvSpPr/>
-          <p:nvPr/>
-        </p:nvSpPr>
-        <p:spPr>
-          <a:xfrm>
-            <a:off x="685800" y="3127248"/>
-            <a:ext cx="2286000" cy="292608"/>
-          </a:xfrm>
-          <a:prstGeom prst="rect">
-            <a:avLst/>
-          </a:prstGeom>
-          <a:noFill/>
-          <a:ln/>
-        </p:spPr>
-        <p:txBody>
-          <a:bodyPr wrap="square" lIns="0" tIns="0" rIns="0" bIns="0" rtlCol="0" anchor="ctr"/>
-          <a:lstStyle/>
-          <a:p>
-            <a:pPr indent="0" marL="0">
-              <a:buNone/>
-            </a:pPr>
-            <a:r>
-              <a:rPr lang="en-US" sz="1200" dirty="0">
-                <a:solidFill>
-                  <a:srgbClr val="14302B"/>
-                </a:solidFill>
-                <a:latin typeface="Calibri" pitchFamily="34" charset="0"/>
-                <a:ea typeface="Calibri" pitchFamily="34" charset="-122"/>
-                <a:cs typeface="Calibri" pitchFamily="34" charset="-120"/>
-              </a:rPr>
-              <a:t>Rasio pelacakan alat</a:t>
-            </a:r>
-            <a:endParaRPr lang="en-US" sz="1200" dirty="0"/>
-          </a:p>
-        </p:txBody>
-      </p:sp>
-      <p:sp>
-        <p:nvSpPr>
-          <p:cNvPr id="9" name="Shape 7"/>
-          <p:cNvSpPr/>
-          <p:nvPr/>
-        </p:nvSpPr>
-        <p:spPr>
-          <a:xfrm>
-            <a:off x="3063240" y="3182112"/>
-            <a:ext cx="2495946" cy="182880"/>
-          </a:xfrm>
-          <a:prstGeom prst="rect">
-            <a:avLst/>
-          </a:prstGeom>
-          <a:solidFill>
-            <a:srgbClr val="B1442C"/>
-          </a:solidFill>
-          <a:ln w="12700">
-            <a:solidFill>
-              <a:srgbClr val="333333"/>
-            </a:solidFill>
-            <a:prstDash val="solid"/>
-          </a:ln>
-        </p:spPr>
-      </p:sp>
-      <p:sp>
-        <p:nvSpPr>
-          <p:cNvPr id="10" name="Text 8"/>
-          <p:cNvSpPr/>
-          <p:nvPr/>
-        </p:nvSpPr>
-        <p:spPr>
-          <a:xfrm>
-            <a:off x="6126480" y="3127248"/>
-            <a:ext cx="640080" cy="292608"/>
-          </a:xfrm>
-          <a:prstGeom prst="rect">
-            <a:avLst/>
-          </a:prstGeom>
-          <a:noFill/>
-          <a:ln/>
-        </p:spPr>
-        <p:txBody>
-          <a:bodyPr wrap="square" lIns="0" tIns="0" rIns="0" bIns="0" rtlCol="0" anchor="ctr"/>
-          <a:lstStyle/>
-          <a:p>
-            <a:pPr indent="0" marL="0">
-              <a:buNone/>
-            </a:pPr>
-            <a:r>
-              <a:rPr lang="en-US" sz="1200" b="1" dirty="0">
-                <a:solidFill>
-                  <a:srgbClr val="B1442C"/>
-                </a:solidFill>
-                <a:latin typeface="Calibri" pitchFamily="34" charset="0"/>
-                <a:ea typeface="Calibri" pitchFamily="34" charset="-122"/>
-                <a:cs typeface="Calibri" pitchFamily="34" charset="-120"/>
-              </a:rPr>
-              <a:t>0,853</a:t>
-            </a:r>
-            <a:endParaRPr lang="en-US" sz="1200" dirty="0"/>
-          </a:p>
-        </p:txBody>
-      </p:sp>
-      <p:sp>
-        <p:nvSpPr>
-          <p:cNvPr id="11" name="Text 9"/>
-          <p:cNvSpPr/>
-          <p:nvPr/>
-        </p:nvSpPr>
-        <p:spPr>
-          <a:xfrm>
-            <a:off x="685800" y="3584448"/>
-            <a:ext cx="2286000" cy="292608"/>
-          </a:xfrm>
-          <a:prstGeom prst="rect">
-            <a:avLst/>
-          </a:prstGeom>
-          <a:noFill/>
-          <a:ln/>
-        </p:spPr>
-        <p:txBody>
-          <a:bodyPr wrap="square" lIns="0" tIns="0" rIns="0" bIns="0" rtlCol="0" anchor="ctr"/>
-          <a:lstStyle/>
-          <a:p>
-            <a:pPr indent="0" marL="0">
-              <a:buNone/>
-            </a:pPr>
-            <a:r>
-              <a:rPr lang="en-US" sz="1200" dirty="0">
-                <a:solidFill>
-                  <a:srgbClr val="14302B"/>
-                </a:solidFill>
-                <a:latin typeface="Calibri" pitchFamily="34" charset="0"/>
-                <a:ea typeface="Calibri" pitchFamily="34" charset="-122"/>
-                <a:cs typeface="Calibri" pitchFamily="34" charset="-120"/>
-              </a:rPr>
-              <a:t>Fraksi kedip</a:t>
-            </a:r>
-            <a:endParaRPr lang="en-US" sz="1200" dirty="0"/>
-          </a:p>
-        </p:txBody>
-      </p:sp>
-      <p:sp>
-        <p:nvSpPr>
-          <p:cNvPr id="12" name="Shape 10"/>
-          <p:cNvSpPr/>
-          <p:nvPr/>
-        </p:nvSpPr>
-        <p:spPr>
-          <a:xfrm>
-            <a:off x="3063240" y="3639312"/>
-            <a:ext cx="2478390" cy="182880"/>
-          </a:xfrm>
-          <a:prstGeom prst="rect">
-            <a:avLst/>
-          </a:prstGeom>
-          <a:solidFill>
-            <a:srgbClr val="B1442C"/>
-          </a:solidFill>
-          <a:ln w="12700">
-            <a:solidFill>
-              <a:srgbClr val="333333"/>
-            </a:solidFill>
-            <a:prstDash val="solid"/>
-          </a:ln>
-        </p:spPr>
-      </p:sp>
-      <p:sp>
-        <p:nvSpPr>
-          <p:cNvPr id="13" name="Text 11"/>
-          <p:cNvSpPr/>
-          <p:nvPr/>
-        </p:nvSpPr>
-        <p:spPr>
-          <a:xfrm>
-            <a:off x="6126480" y="3584448"/>
-            <a:ext cx="640080" cy="292608"/>
-          </a:xfrm>
-          <a:prstGeom prst="rect">
-            <a:avLst/>
-          </a:prstGeom>
-          <a:noFill/>
-          <a:ln/>
-        </p:spPr>
-        <p:txBody>
-          <a:bodyPr wrap="square" lIns="0" tIns="0" rIns="0" bIns="0" rtlCol="0" anchor="ctr"/>
-          <a:lstStyle/>
-          <a:p>
-            <a:pPr indent="0" marL="0">
-              <a:buNone/>
-            </a:pPr>
-            <a:r>
-              <a:rPr lang="en-US" sz="1200" b="1" dirty="0">
-                <a:solidFill>
-                  <a:srgbClr val="B1442C"/>
-                </a:solidFill>
-                <a:latin typeface="Calibri" pitchFamily="34" charset="0"/>
-                <a:ea typeface="Calibri" pitchFamily="34" charset="-122"/>
-                <a:cs typeface="Calibri" pitchFamily="34" charset="-120"/>
-              </a:rPr>
-              <a:t>0,847</a:t>
-            </a:r>
-            <a:endParaRPr lang="en-US" sz="1200" dirty="0"/>
-          </a:p>
-        </p:txBody>
-      </p:sp>
-      <p:sp>
-        <p:nvSpPr>
-          <p:cNvPr id="14" name="Text 12"/>
-          <p:cNvSpPr/>
-          <p:nvPr/>
-        </p:nvSpPr>
-        <p:spPr>
-          <a:xfrm>
-            <a:off x="685800" y="4041648"/>
-            <a:ext cx="2286000" cy="292608"/>
-          </a:xfrm>
-          <a:prstGeom prst="rect">
-            <a:avLst/>
-          </a:prstGeom>
-          <a:noFill/>
-          <a:ln/>
-        </p:spPr>
-        <p:txBody>
-          <a:bodyPr wrap="square" lIns="0" tIns="0" rIns="0" bIns="0" rtlCol="0" anchor="ctr"/>
-          <a:lstStyle/>
-          <a:p>
-            <a:pPr indent="0" marL="0">
-              <a:buNone/>
-            </a:pPr>
-            <a:r>
-              <a:rPr lang="en-US" sz="1200" dirty="0">
-                <a:solidFill>
-                  <a:srgbClr val="14302B"/>
-                </a:solidFill>
-                <a:latin typeface="Calibri" pitchFamily="34" charset="0"/>
-                <a:ea typeface="Calibri" pitchFamily="34" charset="-122"/>
-                <a:cs typeface="Calibri" pitchFamily="34" charset="-120"/>
-              </a:rPr>
-              <a:t>Fraksi fiksasi</a:t>
-            </a:r>
-            <a:endParaRPr lang="en-US" sz="1200" dirty="0"/>
-          </a:p>
-        </p:txBody>
-      </p:sp>
-      <p:sp>
-        <p:nvSpPr>
-          <p:cNvPr id="15" name="Shape 13"/>
-          <p:cNvSpPr/>
-          <p:nvPr/>
-        </p:nvSpPr>
-        <p:spPr>
-          <a:xfrm>
-            <a:off x="3063240" y="4096512"/>
-            <a:ext cx="2416942" cy="182880"/>
-          </a:xfrm>
-          <a:prstGeom prst="rect">
-            <a:avLst/>
-          </a:prstGeom>
-          <a:solidFill>
-            <a:srgbClr val="B1442C"/>
-          </a:solidFill>
-          <a:ln w="12700">
-            <a:solidFill>
-              <a:srgbClr val="333333"/>
-            </a:solidFill>
-            <a:prstDash val="solid"/>
-          </a:ln>
-        </p:spPr>
-      </p:sp>
-      <p:sp>
-        <p:nvSpPr>
-          <p:cNvPr id="16" name="Text 14"/>
-          <p:cNvSpPr/>
-          <p:nvPr/>
-        </p:nvSpPr>
-        <p:spPr>
-          <a:xfrm>
-            <a:off x="6126480" y="4041648"/>
-            <a:ext cx="640080" cy="292608"/>
-          </a:xfrm>
-          <a:prstGeom prst="rect">
-            <a:avLst/>
-          </a:prstGeom>
-          <a:noFill/>
-          <a:ln/>
-        </p:spPr>
-        <p:txBody>
-          <a:bodyPr wrap="square" lIns="0" tIns="0" rIns="0" bIns="0" rtlCol="0" anchor="ctr"/>
-          <a:lstStyle/>
-          <a:p>
-            <a:pPr indent="0" marL="0">
-              <a:buNone/>
-            </a:pPr>
-            <a:r>
-              <a:rPr lang="en-US" sz="1200" b="1" dirty="0">
-                <a:solidFill>
-                  <a:srgbClr val="B1442C"/>
-                </a:solidFill>
-                <a:latin typeface="Calibri" pitchFamily="34" charset="0"/>
-                <a:ea typeface="Calibri" pitchFamily="34" charset="-122"/>
-                <a:cs typeface="Calibri" pitchFamily="34" charset="-120"/>
-              </a:rPr>
-              <a:t>0,826</a:t>
-            </a:r>
-            <a:endParaRPr lang="en-US" sz="1200" dirty="0"/>
-          </a:p>
-        </p:txBody>
-      </p:sp>
-      <p:sp>
-        <p:nvSpPr>
-          <p:cNvPr id="17" name="Text 15"/>
-          <p:cNvSpPr/>
-          <p:nvPr/>
-        </p:nvSpPr>
-        <p:spPr>
-          <a:xfrm>
-            <a:off x="685800" y="4498848"/>
-            <a:ext cx="2286000" cy="292608"/>
-          </a:xfrm>
-          <a:prstGeom prst="rect">
-            <a:avLst/>
-          </a:prstGeom>
-          <a:noFill/>
-          <a:ln/>
-        </p:spPr>
-        <p:txBody>
-          <a:bodyPr wrap="square" lIns="0" tIns="0" rIns="0" bIns="0" rtlCol="0" anchor="ctr"/>
-          <a:lstStyle/>
-          <a:p>
-            <a:pPr indent="0" marL="0">
-              <a:buNone/>
-            </a:pPr>
-            <a:r>
-              <a:rPr lang="en-US" sz="1200" dirty="0">
-                <a:solidFill>
-                  <a:srgbClr val="14302B"/>
-                </a:solidFill>
-                <a:latin typeface="Calibri" pitchFamily="34" charset="0"/>
-                <a:ea typeface="Calibri" pitchFamily="34" charset="-122"/>
-                <a:cs typeface="Calibri" pitchFamily="34" charset="-120"/>
-              </a:rPr>
-              <a:t>Sebaran tatapan</a:t>
-            </a:r>
-            <a:endParaRPr lang="en-US" sz="1200" dirty="0"/>
-          </a:p>
-        </p:txBody>
-      </p:sp>
-      <p:sp>
-        <p:nvSpPr>
-          <p:cNvPr id="18" name="Shape 16"/>
-          <p:cNvSpPr/>
-          <p:nvPr/>
-        </p:nvSpPr>
-        <p:spPr>
-          <a:xfrm>
-            <a:off x="3063240" y="4553712"/>
-            <a:ext cx="2229673" cy="182880"/>
-          </a:xfrm>
-          <a:prstGeom prst="rect">
-            <a:avLst/>
-          </a:prstGeom>
-          <a:solidFill>
-            <a:srgbClr val="4A635D"/>
-          </a:solidFill>
-          <a:ln w="12700">
-            <a:solidFill>
-              <a:srgbClr val="333333"/>
-            </a:solidFill>
-            <a:prstDash val="solid"/>
-          </a:ln>
-        </p:spPr>
-      </p:sp>
-      <p:sp>
-        <p:nvSpPr>
-          <p:cNvPr id="19" name="Text 17"/>
-          <p:cNvSpPr/>
-          <p:nvPr/>
-        </p:nvSpPr>
-        <p:spPr>
-          <a:xfrm>
-            <a:off x="6126480" y="4498848"/>
-            <a:ext cx="640080" cy="292608"/>
-          </a:xfrm>
-          <a:prstGeom prst="rect">
-            <a:avLst/>
-          </a:prstGeom>
-          <a:noFill/>
-          <a:ln/>
-        </p:spPr>
-        <p:txBody>
-          <a:bodyPr wrap="square" lIns="0" tIns="0" rIns="0" bIns="0" rtlCol="0" anchor="ctr"/>
-          <a:lstStyle/>
-          <a:p>
-            <a:pPr indent="0" marL="0">
-              <a:buNone/>
-            </a:pPr>
-            <a:r>
-              <a:rPr lang="en-US" sz="1200" b="1" dirty="0">
-                <a:solidFill>
-                  <a:srgbClr val="4A635D"/>
-                </a:solidFill>
-                <a:latin typeface="Calibri" pitchFamily="34" charset="0"/>
-                <a:ea typeface="Calibri" pitchFamily="34" charset="-122"/>
-                <a:cs typeface="Calibri" pitchFamily="34" charset="-120"/>
-              </a:rPr>
-              <a:t>0,762</a:t>
-            </a:r>
-            <a:endParaRPr lang="en-US" sz="1200" dirty="0"/>
-          </a:p>
-        </p:txBody>
-      </p:sp>
-      <p:sp>
-        <p:nvSpPr>
-          <p:cNvPr id="20" name="Text 18"/>
-          <p:cNvSpPr/>
-          <p:nvPr/>
-        </p:nvSpPr>
-        <p:spPr>
-          <a:xfrm>
-            <a:off x="685800" y="4956048"/>
-            <a:ext cx="2286000" cy="292608"/>
-          </a:xfrm>
-          <a:prstGeom prst="rect">
-            <a:avLst/>
-          </a:prstGeom>
-          <a:noFill/>
-          <a:ln/>
-        </p:spPr>
-        <p:txBody>
-          <a:bodyPr wrap="square" lIns="0" tIns="0" rIns="0" bIns="0" rtlCol="0" anchor="ctr"/>
-          <a:lstStyle/>
-          <a:p>
-            <a:pPr indent="0" marL="0">
-              <a:buNone/>
-            </a:pPr>
-            <a:r>
-              <a:rPr lang="en-US" sz="1200" dirty="0">
-                <a:solidFill>
-                  <a:srgbClr val="14302B"/>
-                </a:solidFill>
-                <a:latin typeface="Calibri" pitchFamily="34" charset="0"/>
-                <a:ea typeface="Calibri" pitchFamily="34" charset="-122"/>
-                <a:cs typeface="Calibri" pitchFamily="34" charset="-120"/>
-              </a:rPr>
-              <a:t>Mengikuti isyarat arah</a:t>
-            </a:r>
-            <a:endParaRPr lang="en-US" sz="1200" dirty="0"/>
-          </a:p>
-        </p:txBody>
-      </p:sp>
-      <p:sp>
-        <p:nvSpPr>
-          <p:cNvPr id="21" name="Shape 19"/>
-          <p:cNvSpPr/>
-          <p:nvPr/>
-        </p:nvSpPr>
-        <p:spPr>
-          <a:xfrm>
-            <a:off x="3063240" y="5010912"/>
-            <a:ext cx="1474744" cy="182880"/>
-          </a:xfrm>
-          <a:prstGeom prst="rect">
-            <a:avLst/>
-          </a:prstGeom>
-          <a:solidFill>
-            <a:srgbClr val="0D8271"/>
-          </a:solidFill>
-          <a:ln w="12700">
-            <a:solidFill>
-              <a:srgbClr val="333333"/>
-            </a:solidFill>
-            <a:prstDash val="solid"/>
-          </a:ln>
-        </p:spPr>
-      </p:sp>
-      <p:sp>
-        <p:nvSpPr>
-          <p:cNvPr id="22" name="Text 20"/>
-          <p:cNvSpPr/>
-          <p:nvPr/>
-        </p:nvSpPr>
-        <p:spPr>
-          <a:xfrm>
-            <a:off x="6126480" y="4956048"/>
-            <a:ext cx="640080" cy="292608"/>
-          </a:xfrm>
-          <a:prstGeom prst="rect">
-            <a:avLst/>
-          </a:prstGeom>
-          <a:noFill/>
-          <a:ln/>
-        </p:spPr>
-        <p:txBody>
-          <a:bodyPr wrap="square" lIns="0" tIns="0" rIns="0" bIns="0" rtlCol="0" anchor="ctr"/>
-          <a:lstStyle/>
-          <a:p>
-            <a:pPr indent="0" marL="0">
-              <a:buNone/>
-            </a:pPr>
-            <a:r>
-              <a:rPr lang="en-US" sz="1200" b="1" dirty="0">
-                <a:solidFill>
-                  <a:srgbClr val="0D8271"/>
-                </a:solidFill>
-                <a:latin typeface="Calibri" pitchFamily="34" charset="0"/>
-                <a:ea typeface="Calibri" pitchFamily="34" charset="-122"/>
-                <a:cs typeface="Calibri" pitchFamily="34" charset="-120"/>
-              </a:rPr>
-              <a:t>0,504</a:t>
-            </a:r>
-            <a:endParaRPr lang="en-US" sz="1200" dirty="0"/>
-          </a:p>
-        </p:txBody>
-      </p:sp>
-      <p:sp>
-        <p:nvSpPr>
-          <p:cNvPr id="23" name="Shape 21"/>
-          <p:cNvSpPr/>
-          <p:nvPr/>
-        </p:nvSpPr>
-        <p:spPr>
-          <a:xfrm>
-            <a:off x="7086600" y="2697480"/>
-            <a:ext cx="4023360" cy="2651760"/>
-          </a:xfrm>
-          <a:prstGeom prst="roundRect">
-            <a:avLst>
-              <a:gd name="adj" fmla="val 2069"/>
-            </a:avLst>
-          </a:prstGeom>
-          <a:solidFill>
-            <a:srgbClr val="FBEAE5"/>
-          </a:solidFill>
-          <a:ln w="12700">
-            <a:solidFill>
-              <a:srgbClr val="FBEAE5"/>
-            </a:solidFill>
-            <a:prstDash val="solid"/>
-          </a:ln>
-        </p:spPr>
-      </p:sp>
-      <p:sp>
-        <p:nvSpPr>
-          <p:cNvPr id="24" name="Text 22"/>
-          <p:cNvSpPr/>
-          <p:nvPr/>
-        </p:nvSpPr>
-        <p:spPr>
-          <a:xfrm>
-            <a:off x="7342632" y="2926080"/>
-            <a:ext cx="3520440" cy="822960"/>
-          </a:xfrm>
-          <a:prstGeom prst="rect">
-            <a:avLst/>
-          </a:prstGeom>
-          <a:noFill/>
-          <a:ln/>
-        </p:spPr>
-        <p:txBody>
-          <a:bodyPr wrap="square" lIns="0" tIns="0" rIns="0" bIns="0" rtlCol="0" anchor="ctr"/>
-          <a:lstStyle/>
-          <a:p>
-            <a:pPr indent="0" marL="0">
-              <a:lnSpc>
-                <a:spcPts val="2200"/>
-              </a:lnSpc>
-              <a:buNone/>
-            </a:pPr>
-            <a:r>
-              <a:rPr lang="en-US" sz="1700" b="1" dirty="0">
-                <a:solidFill>
-                  <a:srgbClr val="B1442C"/>
-                </a:solidFill>
-                <a:latin typeface="Cambria" pitchFamily="34" charset="0"/>
-                <a:ea typeface="Cambria" pitchFamily="34" charset="-122"/>
-                <a:cs typeface="Cambria" pitchFamily="34" charset="-120"/>
-              </a:rPr>
-              <a:t>Yang paling memprediksi autisme di dataset itu adalah seberapa baik alatnya merekam anaknya.</a:t>
-            </a:r>
-            <a:endParaRPr lang="en-US" sz="1700" dirty="0"/>
-          </a:p>
-        </p:txBody>
-      </p:sp>
-      <p:sp>
-        <p:nvSpPr>
-          <p:cNvPr id="25" name="Text 23"/>
-          <p:cNvSpPr/>
-          <p:nvPr/>
-        </p:nvSpPr>
-        <p:spPr>
-          <a:xfrm>
-            <a:off x="7342632" y="3840480"/>
-            <a:ext cx="3520440" cy="1371600"/>
-          </a:xfrm>
-          <a:prstGeom prst="rect">
-            <a:avLst/>
-          </a:prstGeom>
-          <a:noFill/>
-          <a:ln/>
-        </p:spPr>
-        <p:txBody>
-          <a:bodyPr wrap="square" lIns="0" tIns="0" rIns="0" bIns="0" rtlCol="0" anchor="ctr"/>
-          <a:lstStyle/>
-          <a:p>
-            <a:pPr marL="342900" indent="-342900">
-              <a:lnSpc>
-                <a:spcPts val="1700"/>
-              </a:lnSpc>
-              <a:spcAft>
-                <a:spcPts val="600"/>
-              </a:spcAft>
-              <a:buSzPct val="100000"/>
-              <a:buChar char="•"/>
-            </a:pPr>
-            <a:r>
-              <a:rPr lang="en-US" sz="1200" dirty="0">
-                <a:solidFill>
-                  <a:srgbClr val="14302B"/>
-                </a:solidFill>
-                <a:latin typeface="Calibri" pitchFamily="34" charset="0"/>
-                <a:ea typeface="Calibri" pitchFamily="34" charset="-122"/>
-                <a:cs typeface="Calibri" pitchFamily="34" charset="-120"/>
-              </a:rPr>
-              <a:t>Alas tanpa satu pun fitur perilaku: AUC 0,905.</a:t>
-            </a:r>
-            <a:endParaRPr lang="en-US" sz="1200" dirty="0"/>
-          </a:p>
-          <a:p>
-            <a:pPr marL="342900" indent="-342900">
-              <a:lnSpc>
-                <a:spcPts val="1700"/>
-              </a:lnSpc>
-              <a:spcAft>
-                <a:spcPts val="600"/>
-              </a:spcAft>
-              <a:buSzPct val="100000"/>
-              <a:buChar char="•"/>
-            </a:pPr>
-            <a:r>
-              <a:rPr lang="en-US" sz="1200" dirty="0">
-                <a:solidFill>
-                  <a:srgbClr val="14302B"/>
-                </a:solidFill>
-                <a:latin typeface="Calibri" pitchFamily="34" charset="0"/>
-                <a:ea typeface="Calibri" pitchFamily="34" charset="-122"/>
-                <a:cs typeface="Calibri" pitchFamily="34" charset="-120"/>
-              </a:rPr>
-              <a:t>Model indeks perilaku kami: 0,784. Lebih rendah.</a:t>
-            </a:r>
-            <a:endParaRPr lang="en-US" sz="1200" dirty="0"/>
-          </a:p>
-          <a:p>
-            <a:pPr marL="342900" indent="-342900">
-              <a:lnSpc>
-                <a:spcPts val="1700"/>
-              </a:lnSpc>
-              <a:spcAft>
-                <a:spcPts val="600"/>
-              </a:spcAft>
-              <a:buSzPct val="100000"/>
-              <a:buChar char="•"/>
-            </a:pPr>
-            <a:r>
-              <a:rPr lang="en-US" sz="1200" dirty="0">
-                <a:solidFill>
-                  <a:srgbClr val="14302B"/>
-                </a:solidFill>
-                <a:latin typeface="Calibri" pitchFamily="34" charset="0"/>
-                <a:ea typeface="Calibri" pitchFamily="34" charset="-122"/>
-                <a:cs typeface="Calibri" pitchFamily="34" charset="-120"/>
-              </a:rPr>
-              <a:t>Anak ASD terbaca 13 percobaan, anak TD 20.</a:t>
-            </a:r>
-            <a:endParaRPr lang="en-US" sz="1200" dirty="0"/>
-          </a:p>
-          <a:p>
-            <a:pPr marL="342900" indent="-342900">
-              <a:lnSpc>
-                <a:spcPts val="1700"/>
-              </a:lnSpc>
-              <a:spcAft>
-                <a:spcPts val="600"/>
-              </a:spcAft>
-              <a:buSzPct val="100000"/>
-              <a:buChar char="•"/>
-            </a:pPr>
-            <a:r>
-              <a:rPr lang="en-US" sz="1200" dirty="0">
-                <a:solidFill>
-                  <a:srgbClr val="14302B"/>
-                </a:solidFill>
-                <a:latin typeface="Calibri" pitchFamily="34" charset="0"/>
-                <a:ea typeface="Calibri" pitchFamily="34" charset="-122"/>
-                <a:cs typeface="Calibri" pitchFamily="34" charset="-120"/>
-              </a:rPr>
-              <a:t>Bobot ditolak. Lapis 1 dikirim sendirian.</a:t>
-            </a:r>
-            <a:endParaRPr lang="en-US" sz="1200" dirty="0"/>
-          </a:p>
-        </p:txBody>
-      </p:sp>
-      <p:sp>
-        <p:nvSpPr>
-          <p:cNvPr id="26" name="Shape 24"/>
-          <p:cNvSpPr/>
-          <p:nvPr/>
-        </p:nvSpPr>
-        <p:spPr>
-          <a:xfrm>
-            <a:off x="685800" y="5440680"/>
-            <a:ext cx="10424160" cy="868680"/>
-          </a:xfrm>
-          <a:prstGeom prst="roundRect">
-            <a:avLst>
-              <a:gd name="adj" fmla="val 6316"/>
-            </a:avLst>
-          </a:prstGeom>
-          <a:solidFill>
-            <a:srgbClr val="0B1E1B"/>
-          </a:solidFill>
-          <a:ln w="12700">
-            <a:solidFill>
-              <a:srgbClr val="0B1E1B"/>
-            </a:solidFill>
-            <a:prstDash val="solid"/>
-          </a:ln>
-        </p:spPr>
-      </p:sp>
-      <p:sp>
-        <p:nvSpPr>
-          <p:cNvPr id="27" name="Text 25"/>
-          <p:cNvSpPr/>
-          <p:nvPr/>
-        </p:nvSpPr>
-        <p:spPr>
-          <a:xfrm>
-            <a:off x="1097280" y="5577840"/>
-            <a:ext cx="4937760" cy="320040"/>
-          </a:xfrm>
-          <a:prstGeom prst="rect">
-            <a:avLst/>
-          </a:prstGeom>
-          <a:noFill/>
-          <a:ln/>
-        </p:spPr>
-        <p:txBody>
-          <a:bodyPr wrap="square" lIns="0" tIns="0" rIns="0" bIns="0" rtlCol="0" anchor="ctr"/>
-          <a:lstStyle/>
-          <a:p>
-            <a:pPr indent="0" marL="0">
-              <a:buNone/>
-            </a:pPr>
-            <a:r>
-              <a:rPr lang="en-US" sz="1300" b="1" dirty="0">
-                <a:solidFill>
-                  <a:srgbClr val="5CB9A3"/>
-                </a:solidFill>
-                <a:latin typeface="Calibri" pitchFamily="34" charset="0"/>
-                <a:ea typeface="Calibri" pitchFamily="34" charset="-122"/>
-                <a:cs typeface="Calibri" pitchFamily="34" charset="-120"/>
-              </a:rPr>
-              <a:t>Lalu kami jalankan audit yang sama pada data kami sendiri.</a:t>
-            </a:r>
-            <a:endParaRPr lang="en-US" sz="1300" dirty="0"/>
-          </a:p>
-        </p:txBody>
-      </p:sp>
-      <p:sp>
-        <p:nvSpPr>
-          <p:cNvPr id="28" name="Text 26"/>
-          <p:cNvSpPr/>
-          <p:nvPr/>
-        </p:nvSpPr>
-        <p:spPr>
-          <a:xfrm>
-            <a:off x="1097280" y="5897880"/>
-            <a:ext cx="9692640" cy="365760"/>
-          </a:xfrm>
-          <a:prstGeom prst="rect">
-            <a:avLst/>
-          </a:prstGeom>
-          <a:noFill/>
-          <a:ln/>
-        </p:spPr>
-        <p:txBody>
-          <a:bodyPr wrap="square" lIns="0" tIns="0" rIns="0" bIns="0" rtlCol="0" anchor="ctr"/>
-          <a:lstStyle/>
-          <a:p>
-            <a:pPr indent="0" marL="0">
-              <a:lnSpc>
-                <a:spcPts val="2000"/>
-              </a:lnSpc>
-              <a:buNone/>
-            </a:pPr>
-            <a:r>
-              <a:rPr lang="en-US" sz="1500" i="1" dirty="0">
-                <a:solidFill>
-                  <a:srgbClr val="FFFFFF"/>
-                </a:solidFill>
-                <a:latin typeface="Cambria" pitchFamily="34" charset="0"/>
-                <a:ea typeface="Cambria" pitchFamily="34" charset="-122"/>
-                <a:cs typeface="Cambria" pitchFamily="34" charset="-120"/>
-              </a:rPr>
-              <a:t>Mutu rekaman saja, kontrol positif kami: AUC 0,537 · p = 0,26. Kebetulan. Yang memisahkan kedua kondisi kami adalah perilaku, bukan cara sesinya direkam.</a:t>
-            </a:r>
-            <a:endParaRPr lang="en-US" sz="1500" dirty="0"/>
-          </a:p>
-        </p:txBody>
-      </p:sp>
-      <p:sp>
-        <p:nvSpPr>
-          <p:cNvPr id="29" name="Text 27"/>
-          <p:cNvSpPr/>
-          <p:nvPr/>
-        </p:nvSpPr>
-        <p:spPr>
-          <a:xfrm>
-            <a:off x="6263640" y="5559552"/>
-            <a:ext cx="4480560" cy="320040"/>
-          </a:xfrm>
-          <a:prstGeom prst="rect">
-            <a:avLst/>
-          </a:prstGeom>
-          <a:noFill/>
-          <a:ln/>
-        </p:spPr>
-        <p:txBody>
-          <a:bodyPr wrap="square" lIns="0" tIns="0" rIns="0" bIns="0" rtlCol="0" anchor="ctr"/>
-          <a:lstStyle/>
-          <a:p>
-            <a:pPr algn="r" indent="0" marL="0">
-              <a:buNone/>
-            </a:pPr>
-            <a:r>
-              <a:rPr lang="en-US" sz="1400" b="1" dirty="0">
-                <a:solidFill>
-                  <a:srgbClr val="F0A189"/>
-                </a:solidFill>
-                <a:latin typeface="Calibri" pitchFamily="34" charset="0"/>
-                <a:ea typeface="Calibri" pitchFamily="34" charset="-122"/>
-                <a:cs typeface="Calibri" pitchFamily="34" charset="-120"/>
-              </a:rPr>
-              <a:t>Cilia 0,905  ·  kami 0,537</a:t>
-            </a:r>
-            <a:endParaRPr lang="en-US" sz="1400" dirty="0"/>
-          </a:p>
-        </p:txBody>
-      </p:sp>
-    </p:spTree>
-  </p:cSld>
-  <p:clrMapOvr>
-    <a:masterClrMapping/>
-  </p:clrMapOvr>
-</p:sld>
-</file>
-
 <file path=ppt/slides/slide12.xml><?xml version="1.0" encoding="utf-8"?>
 <p:sld xmlns:a="http://schemas.openxmlformats.org/drawingml/2006/main" xmlns:r="http://schemas.openxmlformats.org/officeDocument/2006/relationships" xmlns:p="http://schemas.openxmlformats.org/presentationml/2006/main">
   <p:cSld name="Slide 12">
@@ -6065,7 +5809,7 @@
                 <a:ea typeface="Calibri" pitchFamily="34" charset="-122"/>
                 <a:cs typeface="Calibri" pitchFamily="34" charset="-120"/>
               </a:rPr>
-              <a:t>Dampak yang sudah selesai hari ini</a:t>
+              <a:t>Lapis bobot · hasil negatif</a:t>
             </a:r>
             <a:endParaRPr lang="en-US" sz="1200" dirty="0"/>
           </a:p>
@@ -6107,7 +5851,7 @@
                 <a:ea typeface="Cambria" pitchFamily="34" charset="-122"/>
                 <a:cs typeface="Cambria" pitchFamily="34" charset="-120"/>
               </a:rPr>
-              <a:t>Studi yang akan menjawab pertanyaan ini belum bisa dimulai — instrumennya tidak ada</a:t>
+              <a:t>Kami unduh data anak yang terbit, pasang bobotnya, lalu auditnya membunuhnya</a:t>
             </a:r>
             <a:endParaRPr lang="en-US" sz="3200" dirty="0"/>
           </a:p>
@@ -6122,7 +5866,7 @@
         <p:spPr>
           <a:xfrm>
             <a:off x="685800" y="2103120"/>
-            <a:ext cx="10424160" cy="640080"/>
+            <a:ext cx="10424160" cy="548640"/>
           </a:xfrm>
           <a:prstGeom prst="rect">
             <a:avLst/>
@@ -6149,7 +5893,7 @@
                 <a:ea typeface="Calibri" pitchFamily="34" charset="-122"/>
                 <a:cs typeface="Calibri" pitchFamily="34" charset="-120"/>
               </a:rPr>
-              <a:t>Itu bukan retorika. Kelompok riset mana pun yang ingin menguji ukuran atensi berbasis tablet pada balita Indonesia harus membangun seluruh rantai ini lebih dulu, sebelum merekrut satu anak pun. Rantai itu sudah selesai, sudah diuji, dan sudah bisa diserahkan.</a:t>
+              <a:t>Cilia dkk. 2022, CC BY 4.0: 59 anak berlabel, 2,25 juta baris koordinat. Data anak sungguhan tanpa merekam satu pun anak sendiri. Empat audit ditulis sebelum fitting dijalankan. Dua gagal.</a:t>
             </a:r>
             <a:endParaRPr lang="en-US" sz="1400" dirty="0"/>
           </a:p>
@@ -6163,34 +5907,34 @@
         </p:nvSpPr>
         <p:spPr>
           <a:xfrm>
-            <a:off x="685800" y="2880360"/>
-            <a:ext cx="274320" cy="274320"/>
-          </a:xfrm>
-          <a:prstGeom prst="rect">
-            <a:avLst/>
-          </a:prstGeom>
-          <a:noFill/>
-          <a:ln/>
-        </p:spPr>
-        <p:txBody>
-          <a:bodyPr wrap="square" lIns="0" tIns="0" rIns="0" bIns="0" rtlCol="0" anchor="ctr"/>
-          <a:lstStyle/>
-          <a:p>
-            <a:pPr indent="0" marL="0">
-              <a:buNone/>
-            </a:pPr>
-            <a:r>
-              <a:rPr lang="en-US" sz="1400" b="1" dirty="0">
-                <a:solidFill>
-                  <a:srgbClr val="0D8271"/>
+            <a:off x="685800" y="2743200"/>
+            <a:ext cx="6035040" cy="274320"/>
+          </a:xfrm>
+          <a:prstGeom prst="rect">
+            <a:avLst/>
+          </a:prstGeom>
+          <a:noFill/>
+          <a:ln/>
+        </p:spPr>
+        <p:txBody>
+          <a:bodyPr wrap="square" lIns="0" tIns="0" rIns="0" bIns="0" rtlCol="0" anchor="ctr"/>
+          <a:lstStyle/>
+          <a:p>
+            <a:pPr indent="0" marL="0">
+              <a:buNone/>
+            </a:pPr>
+            <a:r>
+              <a:rPr lang="en-US" sz="1100" b="1" dirty="0">
+                <a:solidFill>
+                  <a:srgbClr val="4A635D"/>
                 </a:solidFill>
                 <a:latin typeface="Calibri" pitchFamily="34" charset="0"/>
                 <a:ea typeface="Calibri" pitchFamily="34" charset="-122"/>
                 <a:cs typeface="Calibri" pitchFamily="34" charset="-120"/>
               </a:rPr>
-              <a:t>✓</a:t>
-            </a:r>
-            <a:endParaRPr lang="en-US" sz="1400" dirty="0"/>
+              <a:t>AUC prediktor tunggal terhadap label ASD</a:t>
+            </a:r>
+            <a:endParaRPr lang="en-US" sz="1100" dirty="0"/>
           </a:p>
         </p:txBody>
       </p:sp>
@@ -6202,297 +5946,397 @@
         </p:nvSpPr>
         <p:spPr>
           <a:xfrm>
-            <a:off x="996696" y="2880360"/>
-            <a:ext cx="4846320" cy="256032"/>
-          </a:xfrm>
-          <a:prstGeom prst="rect">
-            <a:avLst/>
-          </a:prstGeom>
-          <a:noFill/>
-          <a:ln/>
-        </p:spPr>
-        <p:txBody>
-          <a:bodyPr wrap="square" lIns="0" tIns="0" rIns="0" bIns="0" rtlCol="0" anchor="ctr"/>
-          <a:lstStyle/>
-          <a:p>
-            <a:pPr indent="0" marL="0">
-              <a:buNone/>
-            </a:pPr>
-            <a:r>
-              <a:rPr lang="en-US" sz="1300" b="1" dirty="0">
-                <a:solidFill>
-                  <a:srgbClr val="0B1E1B"/>
+            <a:off x="685800" y="3127248"/>
+            <a:ext cx="2286000" cy="292608"/>
+          </a:xfrm>
+          <a:prstGeom prst="rect">
+            <a:avLst/>
+          </a:prstGeom>
+          <a:noFill/>
+          <a:ln/>
+        </p:spPr>
+        <p:txBody>
+          <a:bodyPr wrap="square" lIns="0" tIns="0" rIns="0" bIns="0" rtlCol="0" anchor="ctr"/>
+          <a:lstStyle/>
+          <a:p>
+            <a:pPr indent="0" marL="0">
+              <a:buNone/>
+            </a:pPr>
+            <a:r>
+              <a:rPr lang="en-US" sz="1200" dirty="0">
+                <a:solidFill>
+                  <a:srgbClr val="14302B"/>
                 </a:solidFill>
                 <a:latin typeface="Calibri" pitchFamily="34" charset="0"/>
                 <a:ea typeface="Calibri" pitchFamily="34" charset="-122"/>
                 <a:cs typeface="Calibri" pitchFamily="34" charset="-120"/>
               </a:rPr>
-              <a:t>Instrumen luring terinstrumentasi</a:t>
-            </a:r>
-            <a:endParaRPr lang="en-US" sz="1300" dirty="0"/>
-          </a:p>
-        </p:txBody>
-      </p:sp>
-      <p:sp>
-        <p:nvSpPr>
-          <p:cNvPr id="9" name="Text 7"/>
-          <p:cNvSpPr/>
-          <p:nvPr/>
-        </p:nvSpPr>
-        <p:spPr>
-          <a:xfrm>
-            <a:off x="996696" y="3136392"/>
-            <a:ext cx="4846320" cy="256032"/>
-          </a:xfrm>
-          <a:prstGeom prst="rect">
-            <a:avLst/>
-          </a:prstGeom>
-          <a:noFill/>
-          <a:ln/>
-        </p:spPr>
-        <p:txBody>
-          <a:bodyPr wrap="square" lIns="0" tIns="0" rIns="0" bIns="0" rtlCol="0" anchor="ctr"/>
-          <a:lstStyle/>
-          <a:p>
-            <a:pPr indent="0" marL="0">
-              <a:buNone/>
-            </a:pPr>
-            <a:r>
-              <a:rPr lang="en-US" sz="1100" dirty="0">
-                <a:solidFill>
-                  <a:srgbClr val="4A635D"/>
+              <a:t>Rasio pelacakan alat</a:t>
+            </a:r>
+            <a:endParaRPr lang="en-US" sz="1200" dirty="0"/>
+          </a:p>
+        </p:txBody>
+      </p:sp>
+      <p:sp>
+        <p:nvSpPr>
+          <p:cNvPr id="9" name="Shape 7"/>
+          <p:cNvSpPr/>
+          <p:nvPr/>
+        </p:nvSpPr>
+        <p:spPr>
+          <a:xfrm>
+            <a:off x="3063240" y="3182112"/>
+            <a:ext cx="2495946" cy="182880"/>
+          </a:xfrm>
+          <a:prstGeom prst="rect">
+            <a:avLst/>
+          </a:prstGeom>
+          <a:solidFill>
+            <a:srgbClr val="B1442C"/>
+          </a:solidFill>
+          <a:ln w="12700">
+            <a:solidFill>
+              <a:srgbClr val="333333"/>
+            </a:solidFill>
+            <a:prstDash val="solid"/>
+          </a:ln>
+        </p:spPr>
+      </p:sp>
+      <p:sp>
+        <p:nvSpPr>
+          <p:cNvPr id="10" name="Text 8"/>
+          <p:cNvSpPr/>
+          <p:nvPr/>
+        </p:nvSpPr>
+        <p:spPr>
+          <a:xfrm>
+            <a:off x="6126480" y="3127248"/>
+            <a:ext cx="640080" cy="292608"/>
+          </a:xfrm>
+          <a:prstGeom prst="rect">
+            <a:avLst/>
+          </a:prstGeom>
+          <a:noFill/>
+          <a:ln/>
+        </p:spPr>
+        <p:txBody>
+          <a:bodyPr wrap="square" lIns="0" tIns="0" rIns="0" bIns="0" rtlCol="0" anchor="ctr"/>
+          <a:lstStyle/>
+          <a:p>
+            <a:pPr indent="0" marL="0">
+              <a:buNone/>
+            </a:pPr>
+            <a:r>
+              <a:rPr lang="en-US" sz="1200" b="1" dirty="0">
+                <a:solidFill>
+                  <a:srgbClr val="B1442C"/>
                 </a:solidFill>
                 <a:latin typeface="Calibri" pitchFamily="34" charset="0"/>
                 <a:ea typeface="Calibri" pitchFamily="34" charset="-122"/>
                 <a:cs typeface="Calibri" pitchFamily="34" charset="-120"/>
               </a:rPr>
-              <a:t>kamera, kalibrasi, gerbang mutu, jejak audit</a:t>
-            </a:r>
-            <a:endParaRPr lang="en-US" sz="1100" dirty="0"/>
-          </a:p>
-        </p:txBody>
-      </p:sp>
-      <p:sp>
-        <p:nvSpPr>
-          <p:cNvPr id="10" name="Text 8"/>
-          <p:cNvSpPr/>
-          <p:nvPr/>
-        </p:nvSpPr>
-        <p:spPr>
-          <a:xfrm>
-            <a:off x="6035040" y="2880360"/>
-            <a:ext cx="274320" cy="274320"/>
-          </a:xfrm>
-          <a:prstGeom prst="rect">
-            <a:avLst/>
-          </a:prstGeom>
-          <a:noFill/>
-          <a:ln/>
-        </p:spPr>
-        <p:txBody>
-          <a:bodyPr wrap="square" lIns="0" tIns="0" rIns="0" bIns="0" rtlCol="0" anchor="ctr"/>
-          <a:lstStyle/>
-          <a:p>
-            <a:pPr indent="0" marL="0">
-              <a:buNone/>
-            </a:pPr>
-            <a:r>
-              <a:rPr lang="en-US" sz="1400" b="1" dirty="0">
-                <a:solidFill>
-                  <a:srgbClr val="0D8271"/>
+              <a:t>0,853</a:t>
+            </a:r>
+            <a:endParaRPr lang="en-US" sz="1200" dirty="0"/>
+          </a:p>
+        </p:txBody>
+      </p:sp>
+      <p:sp>
+        <p:nvSpPr>
+          <p:cNvPr id="11" name="Text 9"/>
+          <p:cNvSpPr/>
+          <p:nvPr/>
+        </p:nvSpPr>
+        <p:spPr>
+          <a:xfrm>
+            <a:off x="685800" y="3584448"/>
+            <a:ext cx="2286000" cy="292608"/>
+          </a:xfrm>
+          <a:prstGeom prst="rect">
+            <a:avLst/>
+          </a:prstGeom>
+          <a:noFill/>
+          <a:ln/>
+        </p:spPr>
+        <p:txBody>
+          <a:bodyPr wrap="square" lIns="0" tIns="0" rIns="0" bIns="0" rtlCol="0" anchor="ctr"/>
+          <a:lstStyle/>
+          <a:p>
+            <a:pPr indent="0" marL="0">
+              <a:buNone/>
+            </a:pPr>
+            <a:r>
+              <a:rPr lang="en-US" sz="1200" dirty="0">
+                <a:solidFill>
+                  <a:srgbClr val="14302B"/>
                 </a:solidFill>
                 <a:latin typeface="Calibri" pitchFamily="34" charset="0"/>
                 <a:ea typeface="Calibri" pitchFamily="34" charset="-122"/>
                 <a:cs typeface="Calibri" pitchFamily="34" charset="-120"/>
               </a:rPr>
-              <a:t>✓</a:t>
-            </a:r>
-            <a:endParaRPr lang="en-US" sz="1400" dirty="0"/>
-          </a:p>
-        </p:txBody>
-      </p:sp>
-      <p:sp>
-        <p:nvSpPr>
-          <p:cNvPr id="11" name="Text 9"/>
-          <p:cNvSpPr/>
-          <p:nvPr/>
-        </p:nvSpPr>
-        <p:spPr>
-          <a:xfrm>
-            <a:off x="6345936" y="2880360"/>
-            <a:ext cx="4846320" cy="256032"/>
-          </a:xfrm>
-          <a:prstGeom prst="rect">
-            <a:avLst/>
-          </a:prstGeom>
-          <a:noFill/>
-          <a:ln/>
-        </p:spPr>
-        <p:txBody>
-          <a:bodyPr wrap="square" lIns="0" tIns="0" rIns="0" bIns="0" rtlCol="0" anchor="ctr"/>
-          <a:lstStyle/>
-          <a:p>
-            <a:pPr indent="0" marL="0">
-              <a:buNone/>
-            </a:pPr>
-            <a:r>
-              <a:rPr lang="en-US" sz="1300" b="1" dirty="0">
-                <a:solidFill>
-                  <a:srgbClr val="0B1E1B"/>
+              <a:t>Fraksi kedip</a:t>
+            </a:r>
+            <a:endParaRPr lang="en-US" sz="1200" dirty="0"/>
+          </a:p>
+        </p:txBody>
+      </p:sp>
+      <p:sp>
+        <p:nvSpPr>
+          <p:cNvPr id="12" name="Shape 10"/>
+          <p:cNvSpPr/>
+          <p:nvPr/>
+        </p:nvSpPr>
+        <p:spPr>
+          <a:xfrm>
+            <a:off x="3063240" y="3639312"/>
+            <a:ext cx="2478390" cy="182880"/>
+          </a:xfrm>
+          <a:prstGeom prst="rect">
+            <a:avLst/>
+          </a:prstGeom>
+          <a:solidFill>
+            <a:srgbClr val="B1442C"/>
+          </a:solidFill>
+          <a:ln w="12700">
+            <a:solidFill>
+              <a:srgbClr val="333333"/>
+            </a:solidFill>
+            <a:prstDash val="solid"/>
+          </a:ln>
+        </p:spPr>
+      </p:sp>
+      <p:sp>
+        <p:nvSpPr>
+          <p:cNvPr id="13" name="Text 11"/>
+          <p:cNvSpPr/>
+          <p:nvPr/>
+        </p:nvSpPr>
+        <p:spPr>
+          <a:xfrm>
+            <a:off x="6126480" y="3584448"/>
+            <a:ext cx="640080" cy="292608"/>
+          </a:xfrm>
+          <a:prstGeom prst="rect">
+            <a:avLst/>
+          </a:prstGeom>
+          <a:noFill/>
+          <a:ln/>
+        </p:spPr>
+        <p:txBody>
+          <a:bodyPr wrap="square" lIns="0" tIns="0" rIns="0" bIns="0" rtlCol="0" anchor="ctr"/>
+          <a:lstStyle/>
+          <a:p>
+            <a:pPr indent="0" marL="0">
+              <a:buNone/>
+            </a:pPr>
+            <a:r>
+              <a:rPr lang="en-US" sz="1200" b="1" dirty="0">
+                <a:solidFill>
+                  <a:srgbClr val="B1442C"/>
                 </a:solidFill>
                 <a:latin typeface="Calibri" pitchFamily="34" charset="0"/>
                 <a:ea typeface="Calibri" pitchFamily="34" charset="-122"/>
                 <a:cs typeface="Calibri" pitchFamily="34" charset="-120"/>
               </a:rPr>
-              <a:t>Parity Python–TypeScript</a:t>
-            </a:r>
-            <a:endParaRPr lang="en-US" sz="1300" dirty="0"/>
-          </a:p>
-        </p:txBody>
-      </p:sp>
-      <p:sp>
-        <p:nvSpPr>
-          <p:cNvPr id="12" name="Text 10"/>
-          <p:cNvSpPr/>
-          <p:nvPr/>
-        </p:nvSpPr>
-        <p:spPr>
-          <a:xfrm>
-            <a:off x="6345936" y="3136392"/>
-            <a:ext cx="4846320" cy="256032"/>
-          </a:xfrm>
-          <a:prstGeom prst="rect">
-            <a:avLst/>
-          </a:prstGeom>
-          <a:noFill/>
-          <a:ln/>
-        </p:spPr>
-        <p:txBody>
-          <a:bodyPr wrap="square" lIns="0" tIns="0" rIns="0" bIns="0" rtlCol="0" anchor="ctr"/>
-          <a:lstStyle/>
-          <a:p>
-            <a:pPr indent="0" marL="0">
-              <a:buNone/>
-            </a:pPr>
-            <a:r>
-              <a:rPr lang="en-US" sz="1100" dirty="0">
-                <a:solidFill>
-                  <a:srgbClr val="4A635D"/>
+              <a:t>0,847</a:t>
+            </a:r>
+            <a:endParaRPr lang="en-US" sz="1200" dirty="0"/>
+          </a:p>
+        </p:txBody>
+      </p:sp>
+      <p:sp>
+        <p:nvSpPr>
+          <p:cNvPr id="14" name="Text 12"/>
+          <p:cNvSpPr/>
+          <p:nvPr/>
+        </p:nvSpPr>
+        <p:spPr>
+          <a:xfrm>
+            <a:off x="685800" y="4041648"/>
+            <a:ext cx="2286000" cy="292608"/>
+          </a:xfrm>
+          <a:prstGeom prst="rect">
+            <a:avLst/>
+          </a:prstGeom>
+          <a:noFill/>
+          <a:ln/>
+        </p:spPr>
+        <p:txBody>
+          <a:bodyPr wrap="square" lIns="0" tIns="0" rIns="0" bIns="0" rtlCol="0" anchor="ctr"/>
+          <a:lstStyle/>
+          <a:p>
+            <a:pPr indent="0" marL="0">
+              <a:buNone/>
+            </a:pPr>
+            <a:r>
+              <a:rPr lang="en-US" sz="1200" dirty="0">
+                <a:solidFill>
+                  <a:srgbClr val="14302B"/>
                 </a:solidFill>
                 <a:latin typeface="Calibri" pitchFamily="34" charset="0"/>
                 <a:ea typeface="Calibri" pitchFamily="34" charset="-122"/>
                 <a:cs typeface="Calibri" pitchFamily="34" charset="-120"/>
               </a:rPr>
-              <a:t>fitur riset dan fitur tablet diuji berpasangan</a:t>
-            </a:r>
-            <a:endParaRPr lang="en-US" sz="1100" dirty="0"/>
-          </a:p>
-        </p:txBody>
-      </p:sp>
-      <p:sp>
-        <p:nvSpPr>
-          <p:cNvPr id="13" name="Text 11"/>
-          <p:cNvSpPr/>
-          <p:nvPr/>
-        </p:nvSpPr>
-        <p:spPr>
-          <a:xfrm>
-            <a:off x="685800" y="3593592"/>
-            <a:ext cx="274320" cy="274320"/>
-          </a:xfrm>
-          <a:prstGeom prst="rect">
-            <a:avLst/>
-          </a:prstGeom>
-          <a:noFill/>
-          <a:ln/>
-        </p:spPr>
-        <p:txBody>
-          <a:bodyPr wrap="square" lIns="0" tIns="0" rIns="0" bIns="0" rtlCol="0" anchor="ctr"/>
-          <a:lstStyle/>
-          <a:p>
-            <a:pPr indent="0" marL="0">
-              <a:buNone/>
-            </a:pPr>
-            <a:r>
-              <a:rPr lang="en-US" sz="1400" b="1" dirty="0">
-                <a:solidFill>
-                  <a:srgbClr val="0D8271"/>
+              <a:t>Fraksi fiksasi</a:t>
+            </a:r>
+            <a:endParaRPr lang="en-US" sz="1200" dirty="0"/>
+          </a:p>
+        </p:txBody>
+      </p:sp>
+      <p:sp>
+        <p:nvSpPr>
+          <p:cNvPr id="15" name="Shape 13"/>
+          <p:cNvSpPr/>
+          <p:nvPr/>
+        </p:nvSpPr>
+        <p:spPr>
+          <a:xfrm>
+            <a:off x="3063240" y="4096512"/>
+            <a:ext cx="2416942" cy="182880"/>
+          </a:xfrm>
+          <a:prstGeom prst="rect">
+            <a:avLst/>
+          </a:prstGeom>
+          <a:solidFill>
+            <a:srgbClr val="B1442C"/>
+          </a:solidFill>
+          <a:ln w="12700">
+            <a:solidFill>
+              <a:srgbClr val="333333"/>
+            </a:solidFill>
+            <a:prstDash val="solid"/>
+          </a:ln>
+        </p:spPr>
+      </p:sp>
+      <p:sp>
+        <p:nvSpPr>
+          <p:cNvPr id="16" name="Text 14"/>
+          <p:cNvSpPr/>
+          <p:nvPr/>
+        </p:nvSpPr>
+        <p:spPr>
+          <a:xfrm>
+            <a:off x="6126480" y="4041648"/>
+            <a:ext cx="640080" cy="292608"/>
+          </a:xfrm>
+          <a:prstGeom prst="rect">
+            <a:avLst/>
+          </a:prstGeom>
+          <a:noFill/>
+          <a:ln/>
+        </p:spPr>
+        <p:txBody>
+          <a:bodyPr wrap="square" lIns="0" tIns="0" rIns="0" bIns="0" rtlCol="0" anchor="ctr"/>
+          <a:lstStyle/>
+          <a:p>
+            <a:pPr indent="0" marL="0">
+              <a:buNone/>
+            </a:pPr>
+            <a:r>
+              <a:rPr lang="en-US" sz="1200" b="1" dirty="0">
+                <a:solidFill>
+                  <a:srgbClr val="B1442C"/>
                 </a:solidFill>
                 <a:latin typeface="Calibri" pitchFamily="34" charset="0"/>
                 <a:ea typeface="Calibri" pitchFamily="34" charset="-122"/>
                 <a:cs typeface="Calibri" pitchFamily="34" charset="-120"/>
               </a:rPr>
-              <a:t>✓</a:t>
-            </a:r>
-            <a:endParaRPr lang="en-US" sz="1400" dirty="0"/>
-          </a:p>
-        </p:txBody>
-      </p:sp>
-      <p:sp>
-        <p:nvSpPr>
-          <p:cNvPr id="14" name="Text 12"/>
-          <p:cNvSpPr/>
-          <p:nvPr/>
-        </p:nvSpPr>
-        <p:spPr>
-          <a:xfrm>
-            <a:off x="996696" y="3593592"/>
-            <a:ext cx="4846320" cy="256032"/>
-          </a:xfrm>
-          <a:prstGeom prst="rect">
-            <a:avLst/>
-          </a:prstGeom>
-          <a:noFill/>
-          <a:ln/>
-        </p:spPr>
-        <p:txBody>
-          <a:bodyPr wrap="square" lIns="0" tIns="0" rIns="0" bIns="0" rtlCol="0" anchor="ctr"/>
-          <a:lstStyle/>
-          <a:p>
-            <a:pPr indent="0" marL="0">
-              <a:buNone/>
-            </a:pPr>
-            <a:r>
-              <a:rPr lang="en-US" sz="1300" b="1" dirty="0">
-                <a:solidFill>
-                  <a:srgbClr val="0B1E1B"/>
+              <a:t>0,826</a:t>
+            </a:r>
+            <a:endParaRPr lang="en-US" sz="1200" dirty="0"/>
+          </a:p>
+        </p:txBody>
+      </p:sp>
+      <p:sp>
+        <p:nvSpPr>
+          <p:cNvPr id="17" name="Text 15"/>
+          <p:cNvSpPr/>
+          <p:nvPr/>
+        </p:nvSpPr>
+        <p:spPr>
+          <a:xfrm>
+            <a:off x="685800" y="4498848"/>
+            <a:ext cx="2286000" cy="292608"/>
+          </a:xfrm>
+          <a:prstGeom prst="rect">
+            <a:avLst/>
+          </a:prstGeom>
+          <a:noFill/>
+          <a:ln/>
+        </p:spPr>
+        <p:txBody>
+          <a:bodyPr wrap="square" lIns="0" tIns="0" rIns="0" bIns="0" rtlCol="0" anchor="ctr"/>
+          <a:lstStyle/>
+          <a:p>
+            <a:pPr indent="0" marL="0">
+              <a:buNone/>
+            </a:pPr>
+            <a:r>
+              <a:rPr lang="en-US" sz="1200" dirty="0">
+                <a:solidFill>
+                  <a:srgbClr val="14302B"/>
                 </a:solidFill>
                 <a:latin typeface="Calibri" pitchFamily="34" charset="0"/>
                 <a:ea typeface="Calibri" pitchFamily="34" charset="-122"/>
                 <a:cs typeface="Calibri" pitchFamily="34" charset="-120"/>
               </a:rPr>
-              <a:t>Bukti instrumen Gate A dan B</a:t>
-            </a:r>
-            <a:endParaRPr lang="en-US" sz="1300" dirty="0"/>
-          </a:p>
-        </p:txBody>
-      </p:sp>
-      <p:sp>
-        <p:nvSpPr>
-          <p:cNvPr id="15" name="Text 13"/>
-          <p:cNvSpPr/>
-          <p:nvPr/>
-        </p:nvSpPr>
-        <p:spPr>
-          <a:xfrm>
-            <a:off x="996696" y="3849624"/>
-            <a:ext cx="4846320" cy="256032"/>
-          </a:xfrm>
-          <a:prstGeom prst="rect">
-            <a:avLst/>
-          </a:prstGeom>
-          <a:noFill/>
-          <a:ln/>
-        </p:spPr>
-        <p:txBody>
-          <a:bodyPr wrap="square" lIns="0" tIns="0" rIns="0" bIns="0" rtlCol="0" anchor="ctr"/>
-          <a:lstStyle/>
-          <a:p>
-            <a:pPr indent="0" marL="0">
-              <a:buNone/>
-            </a:pPr>
-            <a:r>
-              <a:rPr lang="en-US" sz="1100" dirty="0">
+              <a:t>Sebaran tatapan</a:t>
+            </a:r>
+            <a:endParaRPr lang="en-US" sz="1200" dirty="0"/>
+          </a:p>
+        </p:txBody>
+      </p:sp>
+      <p:sp>
+        <p:nvSpPr>
+          <p:cNvPr id="18" name="Shape 16"/>
+          <p:cNvSpPr/>
+          <p:nvPr/>
+        </p:nvSpPr>
+        <p:spPr>
+          <a:xfrm>
+            <a:off x="3063240" y="4553712"/>
+            <a:ext cx="2229673" cy="182880"/>
+          </a:xfrm>
+          <a:prstGeom prst="rect">
+            <a:avLst/>
+          </a:prstGeom>
+          <a:solidFill>
+            <a:srgbClr val="4A635D"/>
+          </a:solidFill>
+          <a:ln w="12700">
+            <a:solidFill>
+              <a:srgbClr val="333333"/>
+            </a:solidFill>
+            <a:prstDash val="solid"/>
+          </a:ln>
+        </p:spPr>
+      </p:sp>
+      <p:sp>
+        <p:nvSpPr>
+          <p:cNvPr id="19" name="Text 17"/>
+          <p:cNvSpPr/>
+          <p:nvPr/>
+        </p:nvSpPr>
+        <p:spPr>
+          <a:xfrm>
+            <a:off x="6126480" y="4498848"/>
+            <a:ext cx="640080" cy="292608"/>
+          </a:xfrm>
+          <a:prstGeom prst="rect">
+            <a:avLst/>
+          </a:prstGeom>
+          <a:noFill/>
+          <a:ln/>
+        </p:spPr>
+        <p:txBody>
+          <a:bodyPr wrap="square" lIns="0" tIns="0" rIns="0" bIns="0" rtlCol="0" anchor="ctr"/>
+          <a:lstStyle/>
+          <a:p>
+            <a:pPr indent="0" marL="0">
+              <a:buNone/>
+            </a:pPr>
+            <a:r>
+              <a:rPr lang="en-US" sz="1200" b="1" dirty="0">
                 <a:solidFill>
                   <a:srgbClr val="4A635D"/>
                 </a:solidFill>
@@ -6500,549 +6344,446 @@
                 <a:ea typeface="Calibri" pitchFamily="34" charset="-122"/>
                 <a:cs typeface="Calibri" pitchFamily="34" charset="-120"/>
               </a:rPr>
-              <a:t>130 berkas mentah, manifest SHA-256</a:t>
-            </a:r>
-            <a:endParaRPr lang="en-US" sz="1100" dirty="0"/>
-          </a:p>
-        </p:txBody>
-      </p:sp>
-      <p:sp>
-        <p:nvSpPr>
-          <p:cNvPr id="16" name="Text 14"/>
-          <p:cNvSpPr/>
-          <p:nvPr/>
-        </p:nvSpPr>
-        <p:spPr>
-          <a:xfrm>
-            <a:off x="6035040" y="3593592"/>
-            <a:ext cx="274320" cy="274320"/>
-          </a:xfrm>
-          <a:prstGeom prst="rect">
-            <a:avLst/>
-          </a:prstGeom>
-          <a:noFill/>
-          <a:ln/>
-        </p:spPr>
-        <p:txBody>
-          <a:bodyPr wrap="square" lIns="0" tIns="0" rIns="0" bIns="0" rtlCol="0" anchor="ctr"/>
-          <a:lstStyle/>
-          <a:p>
-            <a:pPr indent="0" marL="0">
-              <a:buNone/>
-            </a:pPr>
-            <a:r>
-              <a:rPr lang="en-US" sz="1400" b="1" dirty="0">
-                <a:solidFill>
-                  <a:srgbClr val="0D8271"/>
+              <a:t>0,762</a:t>
+            </a:r>
+            <a:endParaRPr lang="en-US" sz="1200" dirty="0"/>
+          </a:p>
+        </p:txBody>
+      </p:sp>
+      <p:sp>
+        <p:nvSpPr>
+          <p:cNvPr id="20" name="Text 18"/>
+          <p:cNvSpPr/>
+          <p:nvPr/>
+        </p:nvSpPr>
+        <p:spPr>
+          <a:xfrm>
+            <a:off x="685800" y="4956048"/>
+            <a:ext cx="2286000" cy="292608"/>
+          </a:xfrm>
+          <a:prstGeom prst="rect">
+            <a:avLst/>
+          </a:prstGeom>
+          <a:noFill/>
+          <a:ln/>
+        </p:spPr>
+        <p:txBody>
+          <a:bodyPr wrap="square" lIns="0" tIns="0" rIns="0" bIns="0" rtlCol="0" anchor="ctr"/>
+          <a:lstStyle/>
+          <a:p>
+            <a:pPr indent="0" marL="0">
+              <a:buNone/>
+            </a:pPr>
+            <a:r>
+              <a:rPr lang="en-US" sz="1200" dirty="0">
+                <a:solidFill>
+                  <a:srgbClr val="14302B"/>
                 </a:solidFill>
                 <a:latin typeface="Calibri" pitchFamily="34" charset="0"/>
                 <a:ea typeface="Calibri" pitchFamily="34" charset="-122"/>
                 <a:cs typeface="Calibri" pitchFamily="34" charset="-120"/>
               </a:rPr>
-              <a:t>✓</a:t>
-            </a:r>
-            <a:endParaRPr lang="en-US" sz="1400" dirty="0"/>
-          </a:p>
-        </p:txBody>
-      </p:sp>
-      <p:sp>
-        <p:nvSpPr>
-          <p:cNvPr id="17" name="Text 15"/>
-          <p:cNvSpPr/>
-          <p:nvPr/>
-        </p:nvSpPr>
-        <p:spPr>
-          <a:xfrm>
-            <a:off x="6345936" y="3593592"/>
-            <a:ext cx="4846320" cy="256032"/>
-          </a:xfrm>
-          <a:prstGeom prst="rect">
-            <a:avLst/>
-          </a:prstGeom>
-          <a:noFill/>
-          <a:ln/>
-        </p:spPr>
-        <p:txBody>
-          <a:bodyPr wrap="square" lIns="0" tIns="0" rIns="0" bIns="0" rtlCol="0" anchor="ctr"/>
-          <a:lstStyle/>
-          <a:p>
-            <a:pPr indent="0" marL="0">
-              <a:buNone/>
-            </a:pPr>
-            <a:r>
-              <a:rPr lang="en-US" sz="1300" b="1" dirty="0">
-                <a:solidFill>
-                  <a:srgbClr val="0B1E1B"/>
+              <a:t>Mengikuti isyarat arah</a:t>
+            </a:r>
+            <a:endParaRPr lang="en-US" sz="1200" dirty="0"/>
+          </a:p>
+        </p:txBody>
+      </p:sp>
+      <p:sp>
+        <p:nvSpPr>
+          <p:cNvPr id="21" name="Shape 19"/>
+          <p:cNvSpPr/>
+          <p:nvPr/>
+        </p:nvSpPr>
+        <p:spPr>
+          <a:xfrm>
+            <a:off x="3063240" y="5010912"/>
+            <a:ext cx="1474744" cy="182880"/>
+          </a:xfrm>
+          <a:prstGeom prst="rect">
+            <a:avLst/>
+          </a:prstGeom>
+          <a:solidFill>
+            <a:srgbClr val="0D8271"/>
+          </a:solidFill>
+          <a:ln w="12700">
+            <a:solidFill>
+              <a:srgbClr val="333333"/>
+            </a:solidFill>
+            <a:prstDash val="solid"/>
+          </a:ln>
+        </p:spPr>
+      </p:sp>
+      <p:sp>
+        <p:nvSpPr>
+          <p:cNvPr id="22" name="Text 20"/>
+          <p:cNvSpPr/>
+          <p:nvPr/>
+        </p:nvSpPr>
+        <p:spPr>
+          <a:xfrm>
+            <a:off x="6126480" y="4956048"/>
+            <a:ext cx="640080" cy="292608"/>
+          </a:xfrm>
+          <a:prstGeom prst="rect">
+            <a:avLst/>
+          </a:prstGeom>
+          <a:noFill/>
+          <a:ln/>
+        </p:spPr>
+        <p:txBody>
+          <a:bodyPr wrap="square" lIns="0" tIns="0" rIns="0" bIns="0" rtlCol="0" anchor="ctr"/>
+          <a:lstStyle/>
+          <a:p>
+            <a:pPr indent="0" marL="0">
+              <a:buNone/>
+            </a:pPr>
+            <a:r>
+              <a:rPr lang="en-US" sz="1200" b="1" dirty="0">
+                <a:solidFill>
+                  <a:srgbClr val="0D8271"/>
                 </a:solidFill>
                 <a:latin typeface="Calibri" pitchFamily="34" charset="0"/>
                 <a:ea typeface="Calibri" pitchFamily="34" charset="-122"/>
                 <a:cs typeface="Calibri" pitchFamily="34" charset="-120"/>
               </a:rPr>
-              <a:t>Kontrol positif dewasa</a:t>
-            </a:r>
-            <a:endParaRPr lang="en-US" sz="1300" dirty="0"/>
-          </a:p>
-        </p:txBody>
-      </p:sp>
-      <p:sp>
-        <p:nvSpPr>
-          <p:cNvPr id="18" name="Text 16"/>
-          <p:cNvSpPr/>
-          <p:nvPr/>
-        </p:nvSpPr>
-        <p:spPr>
-          <a:xfrm>
-            <a:off x="6345936" y="3849624"/>
-            <a:ext cx="4846320" cy="256032"/>
-          </a:xfrm>
-          <a:prstGeom prst="rect">
-            <a:avLst/>
-          </a:prstGeom>
-          <a:noFill/>
-          <a:ln/>
-        </p:spPr>
-        <p:txBody>
-          <a:bodyPr wrap="square" lIns="0" tIns="0" rIns="0" bIns="0" rtlCol="0" anchor="ctr"/>
-          <a:lstStyle/>
-          <a:p>
-            <a:pPr indent="0" marL="0">
-              <a:buNone/>
-            </a:pPr>
-            <a:r>
-              <a:rPr lang="en-US" sz="1100" dirty="0">
-                <a:solidFill>
-                  <a:srgbClr val="4A635D"/>
+              <a:t>0,504</a:t>
+            </a:r>
+            <a:endParaRPr lang="en-US" sz="1200" dirty="0"/>
+          </a:p>
+        </p:txBody>
+      </p:sp>
+      <p:sp>
+        <p:nvSpPr>
+          <p:cNvPr id="23" name="Shape 21"/>
+          <p:cNvSpPr/>
+          <p:nvPr/>
+        </p:nvSpPr>
+        <p:spPr>
+          <a:xfrm>
+            <a:off x="7086600" y="2697480"/>
+            <a:ext cx="4023360" cy="2651760"/>
+          </a:xfrm>
+          <a:prstGeom prst="roundRect">
+            <a:avLst>
+              <a:gd name="adj" fmla="val 2069"/>
+            </a:avLst>
+          </a:prstGeom>
+          <a:solidFill>
+            <a:srgbClr val="FBEAE5"/>
+          </a:solidFill>
+          <a:ln w="12700">
+            <a:solidFill>
+              <a:srgbClr val="FBEAE5"/>
+            </a:solidFill>
+            <a:prstDash val="solid"/>
+          </a:ln>
+        </p:spPr>
+      </p:sp>
+      <p:sp>
+        <p:nvSpPr>
+          <p:cNvPr id="24" name="Text 22"/>
+          <p:cNvSpPr/>
+          <p:nvPr/>
+        </p:nvSpPr>
+        <p:spPr>
+          <a:xfrm>
+            <a:off x="7342632" y="2926080"/>
+            <a:ext cx="3520440" cy="822960"/>
+          </a:xfrm>
+          <a:prstGeom prst="rect">
+            <a:avLst/>
+          </a:prstGeom>
+          <a:noFill/>
+          <a:ln/>
+        </p:spPr>
+        <p:txBody>
+          <a:bodyPr wrap="square" lIns="0" tIns="0" rIns="0" bIns="0" rtlCol="0" anchor="ctr"/>
+          <a:lstStyle/>
+          <a:p>
+            <a:pPr indent="0" marL="0">
+              <a:lnSpc>
+                <a:spcPts val="2200"/>
+              </a:lnSpc>
+              <a:buNone/>
+            </a:pPr>
+            <a:r>
+              <a:rPr lang="en-US" sz="1700" b="1" dirty="0">
+                <a:solidFill>
+                  <a:srgbClr val="B1442C"/>
+                </a:solidFill>
+                <a:latin typeface="Cambria" pitchFamily="34" charset="0"/>
+                <a:ea typeface="Cambria" pitchFamily="34" charset="-122"/>
+                <a:cs typeface="Cambria" pitchFamily="34" charset="-120"/>
+              </a:rPr>
+              <a:t>Yang paling memprediksi autisme di dataset itu adalah seberapa baik alatnya merekam anaknya.</a:t>
+            </a:r>
+            <a:endParaRPr lang="en-US" sz="1700" dirty="0"/>
+          </a:p>
+        </p:txBody>
+      </p:sp>
+      <p:sp>
+        <p:nvSpPr>
+          <p:cNvPr id="25" name="Text 23"/>
+          <p:cNvSpPr/>
+          <p:nvPr/>
+        </p:nvSpPr>
+        <p:spPr>
+          <a:xfrm>
+            <a:off x="7342632" y="3840480"/>
+            <a:ext cx="3520440" cy="1371600"/>
+          </a:xfrm>
+          <a:prstGeom prst="rect">
+            <a:avLst/>
+          </a:prstGeom>
+          <a:noFill/>
+          <a:ln/>
+        </p:spPr>
+        <p:txBody>
+          <a:bodyPr wrap="square" lIns="0" tIns="0" rIns="0" bIns="0" rtlCol="0" anchor="ctr"/>
+          <a:lstStyle/>
+          <a:p>
+            <a:pPr marL="342900" indent="-342900">
+              <a:lnSpc>
+                <a:spcPts val="1700"/>
+              </a:lnSpc>
+              <a:spcAft>
+                <a:spcPts val="600"/>
+              </a:spcAft>
+              <a:buSzPct val="100000"/>
+              <a:buChar char="•"/>
+            </a:pPr>
+            <a:r>
+              <a:rPr lang="en-US" sz="1200" dirty="0">
+                <a:solidFill>
+                  <a:srgbClr val="14302B"/>
                 </a:solidFill>
                 <a:latin typeface="Calibri" pitchFamily="34" charset="0"/>
                 <a:ea typeface="Calibri" pitchFamily="34" charset="-122"/>
                 <a:cs typeface="Calibri" pitchFamily="34" charset="-120"/>
               </a:rPr>
-              <a:t>provenance kamera-ke-angka lengkap</a:t>
-            </a:r>
-            <a:endParaRPr lang="en-US" sz="1100" dirty="0"/>
-          </a:p>
-        </p:txBody>
-      </p:sp>
-      <p:sp>
-        <p:nvSpPr>
-          <p:cNvPr id="19" name="Text 17"/>
-          <p:cNvSpPr/>
-          <p:nvPr/>
-        </p:nvSpPr>
-        <p:spPr>
-          <a:xfrm>
-            <a:off x="685800" y="4306824"/>
-            <a:ext cx="274320" cy="274320"/>
-          </a:xfrm>
-          <a:prstGeom prst="rect">
-            <a:avLst/>
-          </a:prstGeom>
-          <a:noFill/>
-          <a:ln/>
-        </p:spPr>
-        <p:txBody>
-          <a:bodyPr wrap="square" lIns="0" tIns="0" rIns="0" bIns="0" rtlCol="0" anchor="ctr"/>
-          <a:lstStyle/>
-          <a:p>
-            <a:pPr indent="0" marL="0">
-              <a:buNone/>
-            </a:pPr>
-            <a:r>
-              <a:rPr lang="en-US" sz="1400" b="1" dirty="0">
-                <a:solidFill>
-                  <a:srgbClr val="0D8271"/>
+              <a:t>Alas tanpa satu pun fitur perilaku: AUC 0,905.</a:t>
+            </a:r>
+            <a:endParaRPr lang="en-US" sz="1200" dirty="0"/>
+          </a:p>
+          <a:p>
+            <a:pPr marL="342900" indent="-342900">
+              <a:lnSpc>
+                <a:spcPts val="1700"/>
+              </a:lnSpc>
+              <a:spcAft>
+                <a:spcPts val="600"/>
+              </a:spcAft>
+              <a:buSzPct val="100000"/>
+              <a:buChar char="•"/>
+            </a:pPr>
+            <a:r>
+              <a:rPr lang="en-US" sz="1200" dirty="0">
+                <a:solidFill>
+                  <a:srgbClr val="14302B"/>
                 </a:solidFill>
                 <a:latin typeface="Calibri" pitchFamily="34" charset="0"/>
                 <a:ea typeface="Calibri" pitchFamily="34" charset="-122"/>
                 <a:cs typeface="Calibri" pitchFamily="34" charset="-120"/>
               </a:rPr>
-              <a:t>✓</a:t>
-            </a:r>
-            <a:endParaRPr lang="en-US" sz="1400" dirty="0"/>
-          </a:p>
-        </p:txBody>
-      </p:sp>
-      <p:sp>
-        <p:nvSpPr>
-          <p:cNvPr id="20" name="Text 18"/>
-          <p:cNvSpPr/>
-          <p:nvPr/>
-        </p:nvSpPr>
-        <p:spPr>
-          <a:xfrm>
-            <a:off x="996696" y="4306824"/>
-            <a:ext cx="4846320" cy="256032"/>
-          </a:xfrm>
-          <a:prstGeom prst="rect">
-            <a:avLst/>
-          </a:prstGeom>
-          <a:noFill/>
-          <a:ln/>
-        </p:spPr>
-        <p:txBody>
-          <a:bodyPr wrap="square" lIns="0" tIns="0" rIns="0" bIns="0" rtlCol="0" anchor="ctr"/>
-          <a:lstStyle/>
-          <a:p>
-            <a:pPr indent="0" marL="0">
-              <a:buNone/>
-            </a:pPr>
-            <a:r>
-              <a:rPr lang="en-US" sz="1300" b="1" dirty="0">
-                <a:solidFill>
-                  <a:srgbClr val="0B1E1B"/>
+              <a:t>Model indeks perilaku kami: 0,784. Lebih rendah.</a:t>
+            </a:r>
+            <a:endParaRPr lang="en-US" sz="1200" dirty="0"/>
+          </a:p>
+          <a:p>
+            <a:pPr marL="342900" indent="-342900">
+              <a:lnSpc>
+                <a:spcPts val="1700"/>
+              </a:lnSpc>
+              <a:spcAft>
+                <a:spcPts val="600"/>
+              </a:spcAft>
+              <a:buSzPct val="100000"/>
+              <a:buChar char="•"/>
+            </a:pPr>
+            <a:r>
+              <a:rPr lang="en-US" sz="1200" dirty="0">
+                <a:solidFill>
+                  <a:srgbClr val="14302B"/>
                 </a:solidFill>
                 <a:latin typeface="Calibri" pitchFamily="34" charset="0"/>
                 <a:ea typeface="Calibri" pitchFamily="34" charset="-122"/>
                 <a:cs typeface="Calibri" pitchFamily="34" charset="-120"/>
               </a:rPr>
-              <a:t>Protokol Gate C dan kriteria terimanya</a:t>
-            </a:r>
-            <a:endParaRPr lang="en-US" sz="1300" dirty="0"/>
-          </a:p>
-        </p:txBody>
-      </p:sp>
-      <p:sp>
-        <p:nvSpPr>
-          <p:cNvPr id="21" name="Text 19"/>
-          <p:cNvSpPr/>
-          <p:nvPr/>
-        </p:nvSpPr>
-        <p:spPr>
-          <a:xfrm>
-            <a:off x="996696" y="4562856"/>
-            <a:ext cx="4846320" cy="256032"/>
-          </a:xfrm>
-          <a:prstGeom prst="rect">
-            <a:avLst/>
-          </a:prstGeom>
-          <a:noFill/>
-          <a:ln/>
-        </p:spPr>
-        <p:txBody>
-          <a:bodyPr wrap="square" lIns="0" tIns="0" rIns="0" bIns="0" rtlCol="0" anchor="ctr"/>
-          <a:lstStyle/>
-          <a:p>
-            <a:pPr indent="0" marL="0">
-              <a:buNone/>
-            </a:pPr>
-            <a:r>
-              <a:rPr lang="en-US" sz="1100" dirty="0">
-                <a:solidFill>
-                  <a:srgbClr val="4A635D"/>
+              <a:t>Anak ASD terbaca 13 percobaan, anak TD 20.</a:t>
+            </a:r>
+            <a:endParaRPr lang="en-US" sz="1200" dirty="0"/>
+          </a:p>
+          <a:p>
+            <a:pPr marL="342900" indent="-342900">
+              <a:lnSpc>
+                <a:spcPts val="1700"/>
+              </a:lnSpc>
+              <a:spcAft>
+                <a:spcPts val="600"/>
+              </a:spcAft>
+              <a:buSzPct val="100000"/>
+              <a:buChar char="•"/>
+            </a:pPr>
+            <a:r>
+              <a:rPr lang="en-US" sz="1200" dirty="0">
+                <a:solidFill>
+                  <a:srgbClr val="14302B"/>
                 </a:solidFill>
                 <a:latin typeface="Calibri" pitchFamily="34" charset="0"/>
                 <a:ea typeface="Calibri" pitchFamily="34" charset="-122"/>
                 <a:cs typeface="Calibri" pitchFamily="34" charset="-120"/>
               </a:rPr>
-              <a:t>beserta empat audit wajib</a:t>
-            </a:r>
-            <a:endParaRPr lang="en-US" sz="1100" dirty="0"/>
-          </a:p>
-        </p:txBody>
-      </p:sp>
-      <p:sp>
-        <p:nvSpPr>
-          <p:cNvPr id="22" name="Text 20"/>
-          <p:cNvSpPr/>
-          <p:nvPr/>
-        </p:nvSpPr>
-        <p:spPr>
-          <a:xfrm>
-            <a:off x="6035040" y="4306824"/>
-            <a:ext cx="274320" cy="274320"/>
-          </a:xfrm>
-          <a:prstGeom prst="rect">
-            <a:avLst/>
-          </a:prstGeom>
-          <a:noFill/>
-          <a:ln/>
-        </p:spPr>
-        <p:txBody>
-          <a:bodyPr wrap="square" lIns="0" tIns="0" rIns="0" bIns="0" rtlCol="0" anchor="ctr"/>
-          <a:lstStyle/>
-          <a:p>
-            <a:pPr indent="0" marL="0">
-              <a:buNone/>
-            </a:pPr>
-            <a:r>
-              <a:rPr lang="en-US" sz="1400" b="1" dirty="0">
-                <a:solidFill>
-                  <a:srgbClr val="0D8271"/>
+              <a:t>Bobot ditolak. Lapis 1 dikirim sendirian.</a:t>
+            </a:r>
+            <a:endParaRPr lang="en-US" sz="1200" dirty="0"/>
+          </a:p>
+        </p:txBody>
+      </p:sp>
+      <p:sp>
+        <p:nvSpPr>
+          <p:cNvPr id="26" name="Shape 24"/>
+          <p:cNvSpPr/>
+          <p:nvPr/>
+        </p:nvSpPr>
+        <p:spPr>
+          <a:xfrm>
+            <a:off x="685800" y="5440680"/>
+            <a:ext cx="10424160" cy="868680"/>
+          </a:xfrm>
+          <a:prstGeom prst="roundRect">
+            <a:avLst>
+              <a:gd name="adj" fmla="val 6316"/>
+            </a:avLst>
+          </a:prstGeom>
+          <a:solidFill>
+            <a:srgbClr val="0B1E1B"/>
+          </a:solidFill>
+          <a:ln w="12700">
+            <a:solidFill>
+              <a:srgbClr val="0B1E1B"/>
+            </a:solidFill>
+            <a:prstDash val="solid"/>
+          </a:ln>
+        </p:spPr>
+      </p:sp>
+      <p:sp>
+        <p:nvSpPr>
+          <p:cNvPr id="27" name="Text 25"/>
+          <p:cNvSpPr/>
+          <p:nvPr/>
+        </p:nvSpPr>
+        <p:spPr>
+          <a:xfrm>
+            <a:off x="1097280" y="5577840"/>
+            <a:ext cx="4937760" cy="320040"/>
+          </a:xfrm>
+          <a:prstGeom prst="rect">
+            <a:avLst/>
+          </a:prstGeom>
+          <a:noFill/>
+          <a:ln/>
+        </p:spPr>
+        <p:txBody>
+          <a:bodyPr wrap="square" lIns="0" tIns="0" rIns="0" bIns="0" rtlCol="0" anchor="ctr"/>
+          <a:lstStyle/>
+          <a:p>
+            <a:pPr indent="0" marL="0">
+              <a:buNone/>
+            </a:pPr>
+            <a:r>
+              <a:rPr lang="en-US" sz="1300" b="1" dirty="0">
+                <a:solidFill>
+                  <a:srgbClr val="5CB9A3"/>
                 </a:solidFill>
                 <a:latin typeface="Calibri" pitchFamily="34" charset="0"/>
                 <a:ea typeface="Calibri" pitchFamily="34" charset="-122"/>
                 <a:cs typeface="Calibri" pitchFamily="34" charset="-120"/>
               </a:rPr>
-              <a:t>✓</a:t>
-            </a:r>
-            <a:endParaRPr lang="en-US" sz="1400" dirty="0"/>
-          </a:p>
-        </p:txBody>
-      </p:sp>
-      <p:sp>
-        <p:nvSpPr>
-          <p:cNvPr id="23" name="Text 21"/>
-          <p:cNvSpPr/>
-          <p:nvPr/>
-        </p:nvSpPr>
-        <p:spPr>
-          <a:xfrm>
-            <a:off x="6345936" y="4306824"/>
-            <a:ext cx="4846320" cy="256032"/>
-          </a:xfrm>
-          <a:prstGeom prst="rect">
-            <a:avLst/>
-          </a:prstGeom>
-          <a:noFill/>
-          <a:ln/>
-        </p:spPr>
-        <p:txBody>
-          <a:bodyPr wrap="square" lIns="0" tIns="0" rIns="0" bIns="0" rtlCol="0" anchor="ctr"/>
-          <a:lstStyle/>
-          <a:p>
-            <a:pPr indent="0" marL="0">
-              <a:buNone/>
-            </a:pPr>
-            <a:r>
-              <a:rPr lang="en-US" sz="1300" b="1" dirty="0">
-                <a:solidFill>
-                  <a:srgbClr val="0B1E1B"/>
+              <a:t>Lalu kami jalankan audit yang sama pada data kami sendiri.</a:t>
+            </a:r>
+            <a:endParaRPr lang="en-US" sz="1300" dirty="0"/>
+          </a:p>
+        </p:txBody>
+      </p:sp>
+      <p:sp>
+        <p:nvSpPr>
+          <p:cNvPr id="28" name="Text 26"/>
+          <p:cNvSpPr/>
+          <p:nvPr/>
+        </p:nvSpPr>
+        <p:spPr>
+          <a:xfrm>
+            <a:off x="1097280" y="5897880"/>
+            <a:ext cx="9692640" cy="365760"/>
+          </a:xfrm>
+          <a:prstGeom prst="rect">
+            <a:avLst/>
+          </a:prstGeom>
+          <a:noFill/>
+          <a:ln/>
+        </p:spPr>
+        <p:txBody>
+          <a:bodyPr wrap="square" lIns="0" tIns="0" rIns="0" bIns="0" rtlCol="0" anchor="ctr"/>
+          <a:lstStyle/>
+          <a:p>
+            <a:pPr indent="0" marL="0">
+              <a:lnSpc>
+                <a:spcPts val="2000"/>
+              </a:lnSpc>
+              <a:buNone/>
+            </a:pPr>
+            <a:r>
+              <a:rPr lang="en-US" sz="1500" i="1" dirty="0">
+                <a:solidFill>
+                  <a:srgbClr val="FFFFFF"/>
+                </a:solidFill>
+                <a:latin typeface="Cambria" pitchFamily="34" charset="0"/>
+                <a:ea typeface="Cambria" pitchFamily="34" charset="-122"/>
+                <a:cs typeface="Cambria" pitchFamily="34" charset="-120"/>
+              </a:rPr>
+              <a:t>Mutu rekaman saja, kontrol positif kami: AUC 0,537 · p = 0,26. Kebetulan. Yang memisahkan kedua kondisi kami adalah perilaku, bukan cara sesinya direkam.</a:t>
+            </a:r>
+            <a:endParaRPr lang="en-US" sz="1500" dirty="0"/>
+          </a:p>
+        </p:txBody>
+      </p:sp>
+      <p:sp>
+        <p:nvSpPr>
+          <p:cNvPr id="29" name="Text 27"/>
+          <p:cNvSpPr/>
+          <p:nvPr/>
+        </p:nvSpPr>
+        <p:spPr>
+          <a:xfrm>
+            <a:off x="6263640" y="5559552"/>
+            <a:ext cx="4480560" cy="320040"/>
+          </a:xfrm>
+          <a:prstGeom prst="rect">
+            <a:avLst/>
+          </a:prstGeom>
+          <a:noFill/>
+          <a:ln/>
+        </p:spPr>
+        <p:txBody>
+          <a:bodyPr wrap="square" lIns="0" tIns="0" rIns="0" bIns="0" rtlCol="0" anchor="ctr"/>
+          <a:lstStyle/>
+          <a:p>
+            <a:pPr algn="r" indent="0" marL="0">
+              <a:buNone/>
+            </a:pPr>
+            <a:r>
+              <a:rPr lang="en-US" sz="1400" b="1" dirty="0">
+                <a:solidFill>
+                  <a:srgbClr val="F0A189"/>
                 </a:solidFill>
                 <a:latin typeface="Calibri" pitchFamily="34" charset="0"/>
                 <a:ea typeface="Calibri" pitchFamily="34" charset="-122"/>
                 <a:cs typeface="Calibri" pitchFamily="34" charset="-120"/>
               </a:rPr>
-              <a:t>Simulasi beban rujukan per titik kerja</a:t>
-            </a:r>
-            <a:endParaRPr lang="en-US" sz="1300" dirty="0"/>
-          </a:p>
-        </p:txBody>
-      </p:sp>
-      <p:sp>
-        <p:nvSpPr>
-          <p:cNvPr id="24" name="Text 22"/>
-          <p:cNvSpPr/>
-          <p:nvPr/>
-        </p:nvSpPr>
-        <p:spPr>
-          <a:xfrm>
-            <a:off x="6345936" y="4562856"/>
-            <a:ext cx="4846320" cy="256032"/>
-          </a:xfrm>
-          <a:prstGeom prst="rect">
-            <a:avLst/>
-          </a:prstGeom>
-          <a:noFill/>
-          <a:ln/>
-        </p:spPr>
-        <p:txBody>
-          <a:bodyPr wrap="square" lIns="0" tIns="0" rIns="0" bIns="0" rtlCol="0" anchor="ctr"/>
-          <a:lstStyle/>
-          <a:p>
-            <a:pPr indent="0" marL="0">
-              <a:buNone/>
-            </a:pPr>
-            <a:r>
-              <a:rPr lang="en-US" sz="1100" dirty="0">
-                <a:solidFill>
-                  <a:srgbClr val="4A635D"/>
-                </a:solidFill>
-                <a:latin typeface="Calibri" pitchFamily="34" charset="0"/>
-                <a:ea typeface="Calibri" pitchFamily="34" charset="-122"/>
-                <a:cs typeface="Calibri" pitchFamily="34" charset="-120"/>
-              </a:rPr>
-              <a:t>termasuk titik impas kapasitas</a:t>
-            </a:r>
-            <a:endParaRPr lang="en-US" sz="1100" dirty="0"/>
-          </a:p>
-        </p:txBody>
-      </p:sp>
-      <p:sp>
-        <p:nvSpPr>
-          <p:cNvPr id="25" name="Shape 23"/>
-          <p:cNvSpPr/>
-          <p:nvPr/>
-        </p:nvSpPr>
-        <p:spPr>
-          <a:xfrm>
-            <a:off x="685800" y="5120640"/>
-            <a:ext cx="10424160" cy="914400"/>
-          </a:xfrm>
-          <a:prstGeom prst="roundRect">
-            <a:avLst>
-              <a:gd name="adj" fmla="val 6000"/>
-            </a:avLst>
-          </a:prstGeom>
-          <a:solidFill>
-            <a:srgbClr val="E4F2EE"/>
-          </a:solidFill>
-          <a:ln w="12700">
-            <a:solidFill>
-              <a:srgbClr val="E4F2EE"/>
-            </a:solidFill>
-            <a:prstDash val="solid"/>
-          </a:ln>
-        </p:spPr>
-      </p:sp>
-      <p:sp>
-        <p:nvSpPr>
-          <p:cNvPr id="26" name="Text 24"/>
-          <p:cNvSpPr/>
-          <p:nvPr/>
-        </p:nvSpPr>
-        <p:spPr>
-          <a:xfrm>
-            <a:off x="1051560" y="5230368"/>
-            <a:ext cx="2011680" cy="442452"/>
-          </a:xfrm>
-          <a:prstGeom prst="rect">
-            <a:avLst/>
-          </a:prstGeom>
-          <a:noFill/>
-          <a:ln/>
-        </p:spPr>
-        <p:txBody>
-          <a:bodyPr wrap="square" lIns="0" tIns="0" rIns="0" bIns="0" rtlCol="0" anchor="ctr"/>
-          <a:lstStyle/>
-          <a:p>
-            <a:pPr indent="0" marL="0">
-              <a:lnSpc>
-                <a:spcPts val="3000"/>
-              </a:lnSpc>
-              <a:buNone/>
-            </a:pPr>
-            <a:r>
-              <a:rPr lang="en-US" sz="3000" b="1" dirty="0">
-                <a:solidFill>
-                  <a:srgbClr val="0D8271"/>
-                </a:solidFill>
-                <a:latin typeface="Cambria" pitchFamily="34" charset="0"/>
-                <a:ea typeface="Cambria" pitchFamily="34" charset="-122"/>
-                <a:cs typeface="Cambria" pitchFamily="34" charset="-120"/>
-              </a:rPr>
-              <a:t>10/14</a:t>
-            </a:r>
-            <a:endParaRPr lang="en-US" sz="3000" dirty="0"/>
-          </a:p>
-        </p:txBody>
-      </p:sp>
-      <p:sp>
-        <p:nvSpPr>
-          <p:cNvPr id="27" name="Text 25"/>
-          <p:cNvSpPr/>
-          <p:nvPr/>
-        </p:nvSpPr>
-        <p:spPr>
-          <a:xfrm>
-            <a:off x="1051560" y="5727684"/>
-            <a:ext cx="2011680" cy="274320"/>
-          </a:xfrm>
-          <a:prstGeom prst="rect">
-            <a:avLst/>
-          </a:prstGeom>
-          <a:noFill/>
-          <a:ln/>
-        </p:spPr>
-        <p:txBody>
-          <a:bodyPr wrap="square" lIns="0" tIns="0" rIns="0" bIns="0" rtlCol="0" anchor="ctr"/>
-          <a:lstStyle/>
-          <a:p>
-            <a:pPr indent="0" marL="0">
-              <a:buNone/>
-            </a:pPr>
-            <a:r>
-              <a:rPr lang="en-US" sz="1400" b="1" dirty="0">
-                <a:solidFill>
-                  <a:srgbClr val="14302B"/>
-                </a:solidFill>
-                <a:latin typeface="Calibri" pitchFamily="34" charset="0"/>
-                <a:ea typeface="Calibri" pitchFamily="34" charset="-122"/>
-                <a:cs typeface="Calibri" pitchFamily="34" charset="-120"/>
-              </a:rPr>
-              <a:t>berkas paket mitra siap kirim</a:t>
+              <a:t>Cilia 0,905  ·  kami 0,537</a:t>
             </a:r>
             <a:endParaRPr lang="en-US" sz="1400" dirty="0"/>
-          </a:p>
-        </p:txBody>
-      </p:sp>
-      <p:sp>
-        <p:nvSpPr>
-          <p:cNvPr id="28" name="Text 26"/>
-          <p:cNvSpPr/>
-          <p:nvPr/>
-        </p:nvSpPr>
-        <p:spPr>
-          <a:xfrm>
-            <a:off x="3520440" y="5285232"/>
-            <a:ext cx="7315200" cy="658368"/>
-          </a:xfrm>
-          <a:prstGeom prst="rect">
-            <a:avLst/>
-          </a:prstGeom>
-          <a:noFill/>
-          <a:ln/>
-        </p:spPr>
-        <p:txBody>
-          <a:bodyPr wrap="square" lIns="0" tIns="0" rIns="0" bIns="0" rtlCol="0" anchor="ctr"/>
-          <a:lstStyle/>
-          <a:p>
-            <a:pPr indent="0" marL="0">
-              <a:lnSpc>
-                <a:spcPts val="1600"/>
-              </a:lnSpc>
-              <a:buNone/>
-            </a:pPr>
-            <a:r>
-              <a:rPr lang="en-US" sz="1200" dirty="0">
-                <a:solidFill>
-                  <a:srgbClr val="14302B"/>
-                </a:solidFill>
-                <a:latin typeface="Calibri" pitchFamily="34" charset="0"/>
-                <a:ea typeface="Calibri" pitchFamily="34" charset="-122"/>
-                <a:cs typeface="Calibri" pitchFamily="34" charset="-120"/>
-              </a:rPr>
-              <a:t>Empat sisanya — naskah kaji etik, lembar persetujuan orang tua, perjanjian data — menuntut mitra sebagai penanggung jawabnya, dan tidak dapat dikarang lebih dulu. “Kami belum punya mitra” dan “paketnya siap, mitranya yang belum ada” menggambarkan keadaan yang sama; hanya satu yang menggambarkan pekerjaannya.</a:t>
-            </a:r>
-            <a:endParaRPr lang="en-US" sz="1200" dirty="0"/>
-          </a:p>
-        </p:txBody>
-      </p:sp>
-      <p:sp>
-        <p:nvSpPr>
-          <p:cNvPr id="29" name="Text 27"/>
-          <p:cNvSpPr/>
-          <p:nvPr/>
-        </p:nvSpPr>
-        <p:spPr>
-          <a:xfrm>
-            <a:off x="685800" y="6144768"/>
-            <a:ext cx="10424160" cy="274320"/>
-          </a:xfrm>
-          <a:prstGeom prst="rect">
-            <a:avLst/>
-          </a:prstGeom>
-          <a:noFill/>
-          <a:ln/>
-        </p:spPr>
-        <p:txBody>
-          <a:bodyPr wrap="square" lIns="0" tIns="0" rIns="0" bIns="0" rtlCol="0" anchor="ctr"/>
-          <a:lstStyle/>
-          <a:p>
-            <a:pPr indent="0" marL="0">
-              <a:buNone/>
-            </a:pPr>
-            <a:r>
-              <a:rPr lang="en-US" sz="1000" dirty="0">
-                <a:solidFill>
-                  <a:srgbClr val="4A635D"/>
-                </a:solidFill>
-                <a:latin typeface="Calibri" pitchFamily="34" charset="0"/>
-                <a:ea typeface="Calibri" pitchFamily="34" charset="-122"/>
-                <a:cs typeface="Calibri" pitchFamily="34" charset="-120"/>
-              </a:rPr>
-              <a:t>Rinciannya di docs/paket_mitra.md</a:t>
-            </a:r>
-            <a:endParaRPr lang="en-US" sz="1000" dirty="0"/>
           </a:p>
         </p:txBody>
       </p:sp>
@@ -7163,7 +6904,7 @@
                 <a:ea typeface="Calibri" pitchFamily="34" charset="-122"/>
                 <a:cs typeface="Calibri" pitchFamily="34" charset="-120"/>
               </a:rPr>
-              <a:t>Dampak dan biaya</a:t>
+              <a:t>Dampak yang sudah selesai hari ini</a:t>
             </a:r>
             <a:endParaRPr lang="en-US" sz="1200" dirty="0"/>
           </a:p>
@@ -7205,7 +6946,7 @@
                 <a:ea typeface="Cambria" pitchFamily="34" charset="-122"/>
                 <a:cs typeface="Cambria" pitchFamily="34" charset="-120"/>
               </a:rPr>
-              <a:t>Ambil metrik yang paling keras terhadap kami</a:t>
+              <a:t>Studi yang akan menjawab pertanyaan ini belum bisa dimulai — instrumennya tidak ada</a:t>
             </a:r>
             <a:endParaRPr lang="en-US" sz="3200" dirty="0"/>
           </a:p>
@@ -7220,7 +6961,7 @@
         <p:spPr>
           <a:xfrm>
             <a:off x="685800" y="2103120"/>
-            <a:ext cx="10424160" cy="502920"/>
+            <a:ext cx="10424160" cy="640080"/>
           </a:xfrm>
           <a:prstGeom prst="rect">
             <a:avLst/>
@@ -7234,170 +6975,137 @@
           <a:p>
             <a:pPr indent="0" marL="0">
               <a:lnSpc>
-                <a:spcPts val="2100"/>
+                <a:spcPts val="2000"/>
               </a:lnSpc>
               <a:buNone/>
             </a:pPr>
             <a:r>
-              <a:rPr lang="en-US" sz="1500" b="1" dirty="0">
-                <a:solidFill>
-                  <a:srgbClr val="B1442C"/>
+              <a:rPr lang="en-US" sz="1400" dirty="0">
+                <a:solidFill>
+                  <a:srgbClr val="14302B"/>
                 </a:solidFill>
                 <a:latin typeface="Calibri" pitchFamily="34" charset="0"/>
                 <a:ea typeface="Calibri" pitchFamily="34" charset="-122"/>
                 <a:cs typeface="Calibri" pitchFamily="34" charset="-120"/>
               </a:rPr>
-              <a:t>Skenario, bukan hasil terukur: angka per kasus ini berlaku hanya bila titik operasi protokol penuh berhasil direplikasi pada balita Indonesia. Hari ini titik itu ditahan.</a:t>
-            </a:r>
-            <a:endParaRPr lang="en-US" sz="1500" dirty="0"/>
-          </a:p>
-        </p:txBody>
-      </p:sp>
-      <p:sp>
-        <p:nvSpPr>
-          <p:cNvPr id="7" name="Shape 5"/>
-          <p:cNvSpPr/>
-          <p:nvPr/>
-        </p:nvSpPr>
-        <p:spPr>
-          <a:xfrm>
-            <a:off x="685800" y="2788920"/>
-            <a:ext cx="3246120" cy="1965960"/>
-          </a:xfrm>
-          <a:prstGeom prst="roundRect">
-            <a:avLst>
-              <a:gd name="adj" fmla="val 2791"/>
-            </a:avLst>
-          </a:prstGeom>
-          <a:solidFill>
-            <a:srgbClr val="FFFFFF"/>
-          </a:solidFill>
-          <a:ln w="12700">
-            <a:solidFill>
-              <a:srgbClr val="DBE4E1"/>
-            </a:solidFill>
-            <a:prstDash val="solid"/>
-          </a:ln>
-        </p:spPr>
-      </p:sp>
-      <p:sp>
-        <p:nvSpPr>
-          <p:cNvPr id="8" name="Text 6"/>
-          <p:cNvSpPr/>
-          <p:nvPr/>
-        </p:nvSpPr>
-        <p:spPr>
-          <a:xfrm>
-            <a:off x="960120" y="3035808"/>
-            <a:ext cx="2697480" cy="548640"/>
-          </a:xfrm>
-          <a:prstGeom prst="rect">
-            <a:avLst/>
-          </a:prstGeom>
-          <a:noFill/>
-          <a:ln/>
-        </p:spPr>
-        <p:txBody>
-          <a:bodyPr wrap="square" lIns="0" tIns="0" rIns="0" bIns="0" rtlCol="0" anchor="ctr"/>
-          <a:lstStyle/>
-          <a:p>
-            <a:pPr indent="0" marL="0">
-              <a:buNone/>
-            </a:pPr>
-            <a:r>
-              <a:rPr lang="en-US" sz="3200" b="1" dirty="0">
-                <a:solidFill>
-                  <a:srgbClr val="0B1E1B"/>
-                </a:solidFill>
-                <a:latin typeface="Cambria" pitchFamily="34" charset="0"/>
-                <a:ea typeface="Cambria" pitchFamily="34" charset="-122"/>
-                <a:cs typeface="Cambria" pitchFamily="34" charset="-120"/>
-              </a:rPr>
-              <a:t>Rp 9,08 jt</a:t>
-            </a:r>
-            <a:endParaRPr lang="en-US" sz="3200" dirty="0"/>
-          </a:p>
-        </p:txBody>
-      </p:sp>
-      <p:sp>
-        <p:nvSpPr>
-          <p:cNvPr id="9" name="Text 7"/>
-          <p:cNvSpPr/>
-          <p:nvPr/>
-        </p:nvSpPr>
-        <p:spPr>
-          <a:xfrm>
-            <a:off x="960120" y="3639312"/>
-            <a:ext cx="2697480" cy="457200"/>
-          </a:xfrm>
-          <a:prstGeom prst="rect">
-            <a:avLst/>
-          </a:prstGeom>
-          <a:noFill/>
-          <a:ln/>
-        </p:spPr>
-        <p:txBody>
-          <a:bodyPr wrap="square" lIns="0" tIns="0" rIns="0" bIns="0" rtlCol="0" anchor="ctr"/>
-          <a:lstStyle/>
-          <a:p>
-            <a:pPr indent="0" marL="0">
-              <a:lnSpc>
-                <a:spcPts val="1700"/>
-              </a:lnSpc>
-              <a:buNone/>
-            </a:pPr>
-            <a:r>
-              <a:rPr lang="en-US" sz="1300" b="1" dirty="0">
-                <a:solidFill>
-                  <a:srgbClr val="14302B"/>
+              <a:t>Itu bukan retorika. Kelompok riset mana pun yang ingin menguji ukuran atensi berbasis tablet pada balita Indonesia harus membangun seluruh rantai ini lebih dulu, sebelum merekrut satu anak pun. Rantai itu sudah selesai, sudah diuji, dan sudah bisa diserahkan.</a:t>
+            </a:r>
+            <a:endParaRPr lang="en-US" sz="1400" dirty="0"/>
+          </a:p>
+        </p:txBody>
+      </p:sp>
+      <p:sp>
+        <p:nvSpPr>
+          <p:cNvPr id="7" name="Text 5"/>
+          <p:cNvSpPr/>
+          <p:nvPr/>
+        </p:nvSpPr>
+        <p:spPr>
+          <a:xfrm>
+            <a:off x="685800" y="2880360"/>
+            <a:ext cx="274320" cy="274320"/>
+          </a:xfrm>
+          <a:prstGeom prst="rect">
+            <a:avLst/>
+          </a:prstGeom>
+          <a:noFill/>
+          <a:ln/>
+        </p:spPr>
+        <p:txBody>
+          <a:bodyPr wrap="square" lIns="0" tIns="0" rIns="0" bIns="0" rtlCol="0" anchor="ctr"/>
+          <a:lstStyle/>
+          <a:p>
+            <a:pPr indent="0" marL="0">
+              <a:buNone/>
+            </a:pPr>
+            <a:r>
+              <a:rPr lang="en-US" sz="1400" b="1" dirty="0">
+                <a:solidFill>
+                  <a:srgbClr val="0D8271"/>
                 </a:solidFill>
                 <a:latin typeface="Calibri" pitchFamily="34" charset="0"/>
                 <a:ea typeface="Calibri" pitchFamily="34" charset="-122"/>
                 <a:cs typeface="Calibri" pitchFamily="34" charset="-120"/>
               </a:rPr>
-              <a:t>Neurogaze · 1 Posyandu</a:t>
-            </a:r>
-            <a:endParaRPr lang="en-US" sz="1300" dirty="0"/>
-          </a:p>
-        </p:txBody>
-      </p:sp>
-      <p:sp>
-        <p:nvSpPr>
-          <p:cNvPr id="10" name="Text 8"/>
-          <p:cNvSpPr/>
-          <p:nvPr/>
-        </p:nvSpPr>
-        <p:spPr>
-          <a:xfrm>
-            <a:off x="960120" y="4114800"/>
-            <a:ext cx="2697480" cy="502920"/>
-          </a:xfrm>
-          <a:prstGeom prst="rect">
-            <a:avLst/>
-          </a:prstGeom>
-          <a:noFill/>
-          <a:ln/>
-        </p:spPr>
-        <p:txBody>
-          <a:bodyPr wrap="square" lIns="0" tIns="0" rIns="0" bIns="0" rtlCol="0" anchor="ctr"/>
-          <a:lstStyle/>
-          <a:p>
-            <a:pPr indent="0" marL="0">
-              <a:lnSpc>
-                <a:spcPts val="1500"/>
-              </a:lnSpc>
-              <a:buNone/>
-            </a:pPr>
-            <a:r>
-              <a:rPr lang="en-US" sz="1100" dirty="0">
-                <a:solidFill>
-                  <a:srgbClr val="4A635D"/>
+              <a:t>✓</a:t>
+            </a:r>
+            <a:endParaRPr lang="en-US" sz="1400" dirty="0"/>
+          </a:p>
+        </p:txBody>
+      </p:sp>
+      <p:sp>
+        <p:nvSpPr>
+          <p:cNvPr id="8" name="Text 6"/>
+          <p:cNvSpPr/>
+          <p:nvPr/>
+        </p:nvSpPr>
+        <p:spPr>
+          <a:xfrm>
+            <a:off x="996696" y="2880360"/>
+            <a:ext cx="4846320" cy="256032"/>
+          </a:xfrm>
+          <a:prstGeom prst="rect">
+            <a:avLst/>
+          </a:prstGeom>
+          <a:noFill/>
+          <a:ln/>
+        </p:spPr>
+        <p:txBody>
+          <a:bodyPr wrap="square" lIns="0" tIns="0" rIns="0" bIns="0" rtlCol="0" anchor="ctr"/>
+          <a:lstStyle/>
+          <a:p>
+            <a:pPr indent="0" marL="0">
+              <a:buNone/>
+            </a:pPr>
+            <a:r>
+              <a:rPr lang="en-US" sz="1300" b="1" dirty="0">
+                <a:solidFill>
+                  <a:srgbClr val="0B1E1B"/>
                 </a:solidFill>
                 <a:latin typeface="Calibri" pitchFamily="34" charset="0"/>
                 <a:ea typeface="Calibri" pitchFamily="34" charset="-122"/>
                 <a:cs typeface="Calibri" pitchFamily="34" charset="-120"/>
               </a:rPr>
-              <a:t>1.000 sesi × Rp 13.900 ÷ 1,53 kasus</a:t>
+              <a:t>Instrumen luring terinstrumentasi</a:t>
+            </a:r>
+            <a:endParaRPr lang="en-US" sz="1300" dirty="0"/>
+          </a:p>
+        </p:txBody>
+      </p:sp>
+      <p:sp>
+        <p:nvSpPr>
+          <p:cNvPr id="9" name="Text 7"/>
+          <p:cNvSpPr/>
+          <p:nvPr/>
+        </p:nvSpPr>
+        <p:spPr>
+          <a:xfrm>
+            <a:off x="996696" y="3136392"/>
+            <a:ext cx="4846320" cy="256032"/>
+          </a:xfrm>
+          <a:prstGeom prst="rect">
+            <a:avLst/>
+          </a:prstGeom>
+          <a:noFill/>
+          <a:ln/>
+        </p:spPr>
+        <p:txBody>
+          <a:bodyPr wrap="square" lIns="0" tIns="0" rIns="0" bIns="0" rtlCol="0" anchor="ctr"/>
+          <a:lstStyle/>
+          <a:p>
+            <a:pPr indent="0" marL="0">
+              <a:buNone/>
+            </a:pPr>
+            <a:r>
+              <a:rPr lang="en-US" sz="1100" dirty="0">
+                <a:solidFill>
+                  <a:srgbClr val="4A635D"/>
+                </a:solidFill>
+                <a:latin typeface="Calibri" pitchFamily="34" charset="0"/>
+                <a:ea typeface="Calibri" pitchFamily="34" charset="-122"/>
+                <a:cs typeface="Calibri" pitchFamily="34" charset="-120"/>
+              </a:rPr>
+              <a:t>kamera, kalibrasi, gerbang mutu, jejak audit</a:t>
             </a:r>
             <a:endParaRPr lang="en-US" sz="1100" dirty="0"/>
           </a:p>
@@ -7405,18 +7113,603 @@
       </p:sp>
       <p:sp>
         <p:nvSpPr>
-          <p:cNvPr id="11" name="Shape 9"/>
-          <p:cNvSpPr/>
-          <p:nvPr/>
-        </p:nvSpPr>
-        <p:spPr>
-          <a:xfrm>
-            <a:off x="4206240" y="2788920"/>
-            <a:ext cx="3246120" cy="1965960"/>
+          <p:cNvPr id="10" name="Text 8"/>
+          <p:cNvSpPr/>
+          <p:nvPr/>
+        </p:nvSpPr>
+        <p:spPr>
+          <a:xfrm>
+            <a:off x="6035040" y="2880360"/>
+            <a:ext cx="274320" cy="274320"/>
+          </a:xfrm>
+          <a:prstGeom prst="rect">
+            <a:avLst/>
+          </a:prstGeom>
+          <a:noFill/>
+          <a:ln/>
+        </p:spPr>
+        <p:txBody>
+          <a:bodyPr wrap="square" lIns="0" tIns="0" rIns="0" bIns="0" rtlCol="0" anchor="ctr"/>
+          <a:lstStyle/>
+          <a:p>
+            <a:pPr indent="0" marL="0">
+              <a:buNone/>
+            </a:pPr>
+            <a:r>
+              <a:rPr lang="en-US" sz="1400" b="1" dirty="0">
+                <a:solidFill>
+                  <a:srgbClr val="0D8271"/>
+                </a:solidFill>
+                <a:latin typeface="Calibri" pitchFamily="34" charset="0"/>
+                <a:ea typeface="Calibri" pitchFamily="34" charset="-122"/>
+                <a:cs typeface="Calibri" pitchFamily="34" charset="-120"/>
+              </a:rPr>
+              <a:t>✓</a:t>
+            </a:r>
+            <a:endParaRPr lang="en-US" sz="1400" dirty="0"/>
+          </a:p>
+        </p:txBody>
+      </p:sp>
+      <p:sp>
+        <p:nvSpPr>
+          <p:cNvPr id="11" name="Text 9"/>
+          <p:cNvSpPr/>
+          <p:nvPr/>
+        </p:nvSpPr>
+        <p:spPr>
+          <a:xfrm>
+            <a:off x="6345936" y="2880360"/>
+            <a:ext cx="4846320" cy="256032"/>
+          </a:xfrm>
+          <a:prstGeom prst="rect">
+            <a:avLst/>
+          </a:prstGeom>
+          <a:noFill/>
+          <a:ln/>
+        </p:spPr>
+        <p:txBody>
+          <a:bodyPr wrap="square" lIns="0" tIns="0" rIns="0" bIns="0" rtlCol="0" anchor="ctr"/>
+          <a:lstStyle/>
+          <a:p>
+            <a:pPr indent="0" marL="0">
+              <a:buNone/>
+            </a:pPr>
+            <a:r>
+              <a:rPr lang="en-US" sz="1300" b="1" dirty="0">
+                <a:solidFill>
+                  <a:srgbClr val="0B1E1B"/>
+                </a:solidFill>
+                <a:latin typeface="Calibri" pitchFamily="34" charset="0"/>
+                <a:ea typeface="Calibri" pitchFamily="34" charset="-122"/>
+                <a:cs typeface="Calibri" pitchFamily="34" charset="-120"/>
+              </a:rPr>
+              <a:t>Parity Python–TypeScript</a:t>
+            </a:r>
+            <a:endParaRPr lang="en-US" sz="1300" dirty="0"/>
+          </a:p>
+        </p:txBody>
+      </p:sp>
+      <p:sp>
+        <p:nvSpPr>
+          <p:cNvPr id="12" name="Text 10"/>
+          <p:cNvSpPr/>
+          <p:nvPr/>
+        </p:nvSpPr>
+        <p:spPr>
+          <a:xfrm>
+            <a:off x="6345936" y="3136392"/>
+            <a:ext cx="4846320" cy="256032"/>
+          </a:xfrm>
+          <a:prstGeom prst="rect">
+            <a:avLst/>
+          </a:prstGeom>
+          <a:noFill/>
+          <a:ln/>
+        </p:spPr>
+        <p:txBody>
+          <a:bodyPr wrap="square" lIns="0" tIns="0" rIns="0" bIns="0" rtlCol="0" anchor="ctr"/>
+          <a:lstStyle/>
+          <a:p>
+            <a:pPr indent="0" marL="0">
+              <a:buNone/>
+            </a:pPr>
+            <a:r>
+              <a:rPr lang="en-US" sz="1100" dirty="0">
+                <a:solidFill>
+                  <a:srgbClr val="4A635D"/>
+                </a:solidFill>
+                <a:latin typeface="Calibri" pitchFamily="34" charset="0"/>
+                <a:ea typeface="Calibri" pitchFamily="34" charset="-122"/>
+                <a:cs typeface="Calibri" pitchFamily="34" charset="-120"/>
+              </a:rPr>
+              <a:t>fitur riset dan fitur tablet diuji berpasangan</a:t>
+            </a:r>
+            <a:endParaRPr lang="en-US" sz="1100" dirty="0"/>
+          </a:p>
+        </p:txBody>
+      </p:sp>
+      <p:sp>
+        <p:nvSpPr>
+          <p:cNvPr id="13" name="Text 11"/>
+          <p:cNvSpPr/>
+          <p:nvPr/>
+        </p:nvSpPr>
+        <p:spPr>
+          <a:xfrm>
+            <a:off x="685800" y="3593592"/>
+            <a:ext cx="274320" cy="274320"/>
+          </a:xfrm>
+          <a:prstGeom prst="rect">
+            <a:avLst/>
+          </a:prstGeom>
+          <a:noFill/>
+          <a:ln/>
+        </p:spPr>
+        <p:txBody>
+          <a:bodyPr wrap="square" lIns="0" tIns="0" rIns="0" bIns="0" rtlCol="0" anchor="ctr"/>
+          <a:lstStyle/>
+          <a:p>
+            <a:pPr indent="0" marL="0">
+              <a:buNone/>
+            </a:pPr>
+            <a:r>
+              <a:rPr lang="en-US" sz="1400" b="1" dirty="0">
+                <a:solidFill>
+                  <a:srgbClr val="0D8271"/>
+                </a:solidFill>
+                <a:latin typeface="Calibri" pitchFamily="34" charset="0"/>
+                <a:ea typeface="Calibri" pitchFamily="34" charset="-122"/>
+                <a:cs typeface="Calibri" pitchFamily="34" charset="-120"/>
+              </a:rPr>
+              <a:t>✓</a:t>
+            </a:r>
+            <a:endParaRPr lang="en-US" sz="1400" dirty="0"/>
+          </a:p>
+        </p:txBody>
+      </p:sp>
+      <p:sp>
+        <p:nvSpPr>
+          <p:cNvPr id="14" name="Text 12"/>
+          <p:cNvSpPr/>
+          <p:nvPr/>
+        </p:nvSpPr>
+        <p:spPr>
+          <a:xfrm>
+            <a:off x="996696" y="3593592"/>
+            <a:ext cx="4846320" cy="256032"/>
+          </a:xfrm>
+          <a:prstGeom prst="rect">
+            <a:avLst/>
+          </a:prstGeom>
+          <a:noFill/>
+          <a:ln/>
+        </p:spPr>
+        <p:txBody>
+          <a:bodyPr wrap="square" lIns="0" tIns="0" rIns="0" bIns="0" rtlCol="0" anchor="ctr"/>
+          <a:lstStyle/>
+          <a:p>
+            <a:pPr indent="0" marL="0">
+              <a:buNone/>
+            </a:pPr>
+            <a:r>
+              <a:rPr lang="en-US" sz="1300" b="1" dirty="0">
+                <a:solidFill>
+                  <a:srgbClr val="0B1E1B"/>
+                </a:solidFill>
+                <a:latin typeface="Calibri" pitchFamily="34" charset="0"/>
+                <a:ea typeface="Calibri" pitchFamily="34" charset="-122"/>
+                <a:cs typeface="Calibri" pitchFamily="34" charset="-120"/>
+              </a:rPr>
+              <a:t>Bukti instrumen Gate A dan B</a:t>
+            </a:r>
+            <a:endParaRPr lang="en-US" sz="1300" dirty="0"/>
+          </a:p>
+        </p:txBody>
+      </p:sp>
+      <p:sp>
+        <p:nvSpPr>
+          <p:cNvPr id="15" name="Text 13"/>
+          <p:cNvSpPr/>
+          <p:nvPr/>
+        </p:nvSpPr>
+        <p:spPr>
+          <a:xfrm>
+            <a:off x="996696" y="3849624"/>
+            <a:ext cx="4846320" cy="256032"/>
+          </a:xfrm>
+          <a:prstGeom prst="rect">
+            <a:avLst/>
+          </a:prstGeom>
+          <a:noFill/>
+          <a:ln/>
+        </p:spPr>
+        <p:txBody>
+          <a:bodyPr wrap="square" lIns="0" tIns="0" rIns="0" bIns="0" rtlCol="0" anchor="ctr"/>
+          <a:lstStyle/>
+          <a:p>
+            <a:pPr indent="0" marL="0">
+              <a:buNone/>
+            </a:pPr>
+            <a:r>
+              <a:rPr lang="en-US" sz="1100" dirty="0">
+                <a:solidFill>
+                  <a:srgbClr val="4A635D"/>
+                </a:solidFill>
+                <a:latin typeface="Calibri" pitchFamily="34" charset="0"/>
+                <a:ea typeface="Calibri" pitchFamily="34" charset="-122"/>
+                <a:cs typeface="Calibri" pitchFamily="34" charset="-120"/>
+              </a:rPr>
+              <a:t>130 berkas mentah, manifest SHA-256</a:t>
+            </a:r>
+            <a:endParaRPr lang="en-US" sz="1100" dirty="0"/>
+          </a:p>
+        </p:txBody>
+      </p:sp>
+      <p:sp>
+        <p:nvSpPr>
+          <p:cNvPr id="16" name="Text 14"/>
+          <p:cNvSpPr/>
+          <p:nvPr/>
+        </p:nvSpPr>
+        <p:spPr>
+          <a:xfrm>
+            <a:off x="6035040" y="3593592"/>
+            <a:ext cx="274320" cy="274320"/>
+          </a:xfrm>
+          <a:prstGeom prst="rect">
+            <a:avLst/>
+          </a:prstGeom>
+          <a:noFill/>
+          <a:ln/>
+        </p:spPr>
+        <p:txBody>
+          <a:bodyPr wrap="square" lIns="0" tIns="0" rIns="0" bIns="0" rtlCol="0" anchor="ctr"/>
+          <a:lstStyle/>
+          <a:p>
+            <a:pPr indent="0" marL="0">
+              <a:buNone/>
+            </a:pPr>
+            <a:r>
+              <a:rPr lang="en-US" sz="1400" b="1" dirty="0">
+                <a:solidFill>
+                  <a:srgbClr val="0D8271"/>
+                </a:solidFill>
+                <a:latin typeface="Calibri" pitchFamily="34" charset="0"/>
+                <a:ea typeface="Calibri" pitchFamily="34" charset="-122"/>
+                <a:cs typeface="Calibri" pitchFamily="34" charset="-120"/>
+              </a:rPr>
+              <a:t>✓</a:t>
+            </a:r>
+            <a:endParaRPr lang="en-US" sz="1400" dirty="0"/>
+          </a:p>
+        </p:txBody>
+      </p:sp>
+      <p:sp>
+        <p:nvSpPr>
+          <p:cNvPr id="17" name="Text 15"/>
+          <p:cNvSpPr/>
+          <p:nvPr/>
+        </p:nvSpPr>
+        <p:spPr>
+          <a:xfrm>
+            <a:off x="6345936" y="3593592"/>
+            <a:ext cx="4846320" cy="256032"/>
+          </a:xfrm>
+          <a:prstGeom prst="rect">
+            <a:avLst/>
+          </a:prstGeom>
+          <a:noFill/>
+          <a:ln/>
+        </p:spPr>
+        <p:txBody>
+          <a:bodyPr wrap="square" lIns="0" tIns="0" rIns="0" bIns="0" rtlCol="0" anchor="ctr"/>
+          <a:lstStyle/>
+          <a:p>
+            <a:pPr indent="0" marL="0">
+              <a:buNone/>
+            </a:pPr>
+            <a:r>
+              <a:rPr lang="en-US" sz="1300" b="1" dirty="0">
+                <a:solidFill>
+                  <a:srgbClr val="0B1E1B"/>
+                </a:solidFill>
+                <a:latin typeface="Calibri" pitchFamily="34" charset="0"/>
+                <a:ea typeface="Calibri" pitchFamily="34" charset="-122"/>
+                <a:cs typeface="Calibri" pitchFamily="34" charset="-120"/>
+              </a:rPr>
+              <a:t>Kontrol positif dewasa</a:t>
+            </a:r>
+            <a:endParaRPr lang="en-US" sz="1300" dirty="0"/>
+          </a:p>
+        </p:txBody>
+      </p:sp>
+      <p:sp>
+        <p:nvSpPr>
+          <p:cNvPr id="18" name="Text 16"/>
+          <p:cNvSpPr/>
+          <p:nvPr/>
+        </p:nvSpPr>
+        <p:spPr>
+          <a:xfrm>
+            <a:off x="6345936" y="3849624"/>
+            <a:ext cx="4846320" cy="256032"/>
+          </a:xfrm>
+          <a:prstGeom prst="rect">
+            <a:avLst/>
+          </a:prstGeom>
+          <a:noFill/>
+          <a:ln/>
+        </p:spPr>
+        <p:txBody>
+          <a:bodyPr wrap="square" lIns="0" tIns="0" rIns="0" bIns="0" rtlCol="0" anchor="ctr"/>
+          <a:lstStyle/>
+          <a:p>
+            <a:pPr indent="0" marL="0">
+              <a:buNone/>
+            </a:pPr>
+            <a:r>
+              <a:rPr lang="en-US" sz="1100" dirty="0">
+                <a:solidFill>
+                  <a:srgbClr val="4A635D"/>
+                </a:solidFill>
+                <a:latin typeface="Calibri" pitchFamily="34" charset="0"/>
+                <a:ea typeface="Calibri" pitchFamily="34" charset="-122"/>
+                <a:cs typeface="Calibri" pitchFamily="34" charset="-120"/>
+              </a:rPr>
+              <a:t>provenance kamera-ke-angka lengkap</a:t>
+            </a:r>
+            <a:endParaRPr lang="en-US" sz="1100" dirty="0"/>
+          </a:p>
+        </p:txBody>
+      </p:sp>
+      <p:sp>
+        <p:nvSpPr>
+          <p:cNvPr id="19" name="Text 17"/>
+          <p:cNvSpPr/>
+          <p:nvPr/>
+        </p:nvSpPr>
+        <p:spPr>
+          <a:xfrm>
+            <a:off x="685800" y="4306824"/>
+            <a:ext cx="274320" cy="274320"/>
+          </a:xfrm>
+          <a:prstGeom prst="rect">
+            <a:avLst/>
+          </a:prstGeom>
+          <a:noFill/>
+          <a:ln/>
+        </p:spPr>
+        <p:txBody>
+          <a:bodyPr wrap="square" lIns="0" tIns="0" rIns="0" bIns="0" rtlCol="0" anchor="ctr"/>
+          <a:lstStyle/>
+          <a:p>
+            <a:pPr indent="0" marL="0">
+              <a:buNone/>
+            </a:pPr>
+            <a:r>
+              <a:rPr lang="en-US" sz="1400" b="1" dirty="0">
+                <a:solidFill>
+                  <a:srgbClr val="0D8271"/>
+                </a:solidFill>
+                <a:latin typeface="Calibri" pitchFamily="34" charset="0"/>
+                <a:ea typeface="Calibri" pitchFamily="34" charset="-122"/>
+                <a:cs typeface="Calibri" pitchFamily="34" charset="-120"/>
+              </a:rPr>
+              <a:t>✓</a:t>
+            </a:r>
+            <a:endParaRPr lang="en-US" sz="1400" dirty="0"/>
+          </a:p>
+        </p:txBody>
+      </p:sp>
+      <p:sp>
+        <p:nvSpPr>
+          <p:cNvPr id="20" name="Text 18"/>
+          <p:cNvSpPr/>
+          <p:nvPr/>
+        </p:nvSpPr>
+        <p:spPr>
+          <a:xfrm>
+            <a:off x="996696" y="4306824"/>
+            <a:ext cx="4846320" cy="256032"/>
+          </a:xfrm>
+          <a:prstGeom prst="rect">
+            <a:avLst/>
+          </a:prstGeom>
+          <a:noFill/>
+          <a:ln/>
+        </p:spPr>
+        <p:txBody>
+          <a:bodyPr wrap="square" lIns="0" tIns="0" rIns="0" bIns="0" rtlCol="0" anchor="ctr"/>
+          <a:lstStyle/>
+          <a:p>
+            <a:pPr indent="0" marL="0">
+              <a:buNone/>
+            </a:pPr>
+            <a:r>
+              <a:rPr lang="en-US" sz="1300" b="1" dirty="0">
+                <a:solidFill>
+                  <a:srgbClr val="0B1E1B"/>
+                </a:solidFill>
+                <a:latin typeface="Calibri" pitchFamily="34" charset="0"/>
+                <a:ea typeface="Calibri" pitchFamily="34" charset="-122"/>
+                <a:cs typeface="Calibri" pitchFamily="34" charset="-120"/>
+              </a:rPr>
+              <a:t>Protokol Gate C dan kriteria terimanya</a:t>
+            </a:r>
+            <a:endParaRPr lang="en-US" sz="1300" dirty="0"/>
+          </a:p>
+        </p:txBody>
+      </p:sp>
+      <p:sp>
+        <p:nvSpPr>
+          <p:cNvPr id="21" name="Text 19"/>
+          <p:cNvSpPr/>
+          <p:nvPr/>
+        </p:nvSpPr>
+        <p:spPr>
+          <a:xfrm>
+            <a:off x="996696" y="4562856"/>
+            <a:ext cx="4846320" cy="256032"/>
+          </a:xfrm>
+          <a:prstGeom prst="rect">
+            <a:avLst/>
+          </a:prstGeom>
+          <a:noFill/>
+          <a:ln/>
+        </p:spPr>
+        <p:txBody>
+          <a:bodyPr wrap="square" lIns="0" tIns="0" rIns="0" bIns="0" rtlCol="0" anchor="ctr"/>
+          <a:lstStyle/>
+          <a:p>
+            <a:pPr indent="0" marL="0">
+              <a:buNone/>
+            </a:pPr>
+            <a:r>
+              <a:rPr lang="en-US" sz="1100" dirty="0">
+                <a:solidFill>
+                  <a:srgbClr val="4A635D"/>
+                </a:solidFill>
+                <a:latin typeface="Calibri" pitchFamily="34" charset="0"/>
+                <a:ea typeface="Calibri" pitchFamily="34" charset="-122"/>
+                <a:cs typeface="Calibri" pitchFamily="34" charset="-120"/>
+              </a:rPr>
+              <a:t>beserta empat audit wajib</a:t>
+            </a:r>
+            <a:endParaRPr lang="en-US" sz="1100" dirty="0"/>
+          </a:p>
+        </p:txBody>
+      </p:sp>
+      <p:sp>
+        <p:nvSpPr>
+          <p:cNvPr id="22" name="Text 20"/>
+          <p:cNvSpPr/>
+          <p:nvPr/>
+        </p:nvSpPr>
+        <p:spPr>
+          <a:xfrm>
+            <a:off x="6035040" y="4306824"/>
+            <a:ext cx="274320" cy="274320"/>
+          </a:xfrm>
+          <a:prstGeom prst="rect">
+            <a:avLst/>
+          </a:prstGeom>
+          <a:noFill/>
+          <a:ln/>
+        </p:spPr>
+        <p:txBody>
+          <a:bodyPr wrap="square" lIns="0" tIns="0" rIns="0" bIns="0" rtlCol="0" anchor="ctr"/>
+          <a:lstStyle/>
+          <a:p>
+            <a:pPr indent="0" marL="0">
+              <a:buNone/>
+            </a:pPr>
+            <a:r>
+              <a:rPr lang="en-US" sz="1400" b="1" dirty="0">
+                <a:solidFill>
+                  <a:srgbClr val="0D8271"/>
+                </a:solidFill>
+                <a:latin typeface="Calibri" pitchFamily="34" charset="0"/>
+                <a:ea typeface="Calibri" pitchFamily="34" charset="-122"/>
+                <a:cs typeface="Calibri" pitchFamily="34" charset="-120"/>
+              </a:rPr>
+              <a:t>✓</a:t>
+            </a:r>
+            <a:endParaRPr lang="en-US" sz="1400" dirty="0"/>
+          </a:p>
+        </p:txBody>
+      </p:sp>
+      <p:sp>
+        <p:nvSpPr>
+          <p:cNvPr id="23" name="Text 21"/>
+          <p:cNvSpPr/>
+          <p:nvPr/>
+        </p:nvSpPr>
+        <p:spPr>
+          <a:xfrm>
+            <a:off x="6345936" y="4306824"/>
+            <a:ext cx="4846320" cy="256032"/>
+          </a:xfrm>
+          <a:prstGeom prst="rect">
+            <a:avLst/>
+          </a:prstGeom>
+          <a:noFill/>
+          <a:ln/>
+        </p:spPr>
+        <p:txBody>
+          <a:bodyPr wrap="square" lIns="0" tIns="0" rIns="0" bIns="0" rtlCol="0" anchor="ctr"/>
+          <a:lstStyle/>
+          <a:p>
+            <a:pPr indent="0" marL="0">
+              <a:buNone/>
+            </a:pPr>
+            <a:r>
+              <a:rPr lang="en-US" sz="1300" b="1" dirty="0">
+                <a:solidFill>
+                  <a:srgbClr val="0B1E1B"/>
+                </a:solidFill>
+                <a:latin typeface="Calibri" pitchFamily="34" charset="0"/>
+                <a:ea typeface="Calibri" pitchFamily="34" charset="-122"/>
+                <a:cs typeface="Calibri" pitchFamily="34" charset="-120"/>
+              </a:rPr>
+              <a:t>Simulasi beban rujukan per titik kerja</a:t>
+            </a:r>
+            <a:endParaRPr lang="en-US" sz="1300" dirty="0"/>
+          </a:p>
+        </p:txBody>
+      </p:sp>
+      <p:sp>
+        <p:nvSpPr>
+          <p:cNvPr id="24" name="Text 22"/>
+          <p:cNvSpPr/>
+          <p:nvPr/>
+        </p:nvSpPr>
+        <p:spPr>
+          <a:xfrm>
+            <a:off x="6345936" y="4562856"/>
+            <a:ext cx="4846320" cy="256032"/>
+          </a:xfrm>
+          <a:prstGeom prst="rect">
+            <a:avLst/>
+          </a:prstGeom>
+          <a:noFill/>
+          <a:ln/>
+        </p:spPr>
+        <p:txBody>
+          <a:bodyPr wrap="square" lIns="0" tIns="0" rIns="0" bIns="0" rtlCol="0" anchor="ctr"/>
+          <a:lstStyle/>
+          <a:p>
+            <a:pPr indent="0" marL="0">
+              <a:buNone/>
+            </a:pPr>
+            <a:r>
+              <a:rPr lang="en-US" sz="1100" dirty="0">
+                <a:solidFill>
+                  <a:srgbClr val="4A635D"/>
+                </a:solidFill>
+                <a:latin typeface="Calibri" pitchFamily="34" charset="0"/>
+                <a:ea typeface="Calibri" pitchFamily="34" charset="-122"/>
+                <a:cs typeface="Calibri" pitchFamily="34" charset="-120"/>
+              </a:rPr>
+              <a:t>termasuk titik impas kapasitas</a:t>
+            </a:r>
+            <a:endParaRPr lang="en-US" sz="1100" dirty="0"/>
+          </a:p>
+        </p:txBody>
+      </p:sp>
+      <p:sp>
+        <p:nvSpPr>
+          <p:cNvPr id="25" name="Shape 23"/>
+          <p:cNvSpPr/>
+          <p:nvPr/>
+        </p:nvSpPr>
+        <p:spPr>
+          <a:xfrm>
+            <a:off x="685800" y="5120640"/>
+            <a:ext cx="10424160" cy="914400"/>
           </a:xfrm>
           <a:prstGeom prst="roundRect">
             <a:avLst>
-              <a:gd name="adj" fmla="val 2791"/>
+              <a:gd name="adj" fmla="val 6000"/>
             </a:avLst>
           </a:prstGeom>
           <a:solidFill>
@@ -7432,30 +7725,33 @@
       </p:sp>
       <p:sp>
         <p:nvSpPr>
-          <p:cNvPr id="12" name="Text 10"/>
-          <p:cNvSpPr/>
-          <p:nvPr/>
-        </p:nvSpPr>
-        <p:spPr>
-          <a:xfrm>
-            <a:off x="4480560" y="3035808"/>
-            <a:ext cx="2697480" cy="548640"/>
-          </a:xfrm>
-          <a:prstGeom prst="rect">
-            <a:avLst/>
-          </a:prstGeom>
-          <a:noFill/>
-          <a:ln/>
-        </p:spPr>
-        <p:txBody>
-          <a:bodyPr wrap="square" lIns="0" tIns="0" rIns="0" bIns="0" rtlCol="0" anchor="ctr"/>
-          <a:lstStyle/>
-          <a:p>
-            <a:pPr indent="0" marL="0">
-              <a:buNone/>
-            </a:pPr>
-            <a:r>
-              <a:rPr lang="en-US" sz="3200" b="1" dirty="0">
+          <p:cNvPr id="26" name="Text 24"/>
+          <p:cNvSpPr/>
+          <p:nvPr/>
+        </p:nvSpPr>
+        <p:spPr>
+          <a:xfrm>
+            <a:off x="1051560" y="5230368"/>
+            <a:ext cx="2011680" cy="442452"/>
+          </a:xfrm>
+          <a:prstGeom prst="rect">
+            <a:avLst/>
+          </a:prstGeom>
+          <a:noFill/>
+          <a:ln/>
+        </p:spPr>
+        <p:txBody>
+          <a:bodyPr wrap="square" lIns="0" tIns="0" rIns="0" bIns="0" rtlCol="0" anchor="ctr"/>
+          <a:lstStyle/>
+          <a:p>
+            <a:pPr indent="0" marL="0">
+              <a:lnSpc>
+                <a:spcPts val="3000"/>
+              </a:lnSpc>
+              <a:buNone/>
+            </a:pPr>
+            <a:r>
+              <a:rPr lang="en-US" sz="3000" b="1" dirty="0">
                 <a:solidFill>
                   <a:srgbClr val="0D8271"/>
                 </a:solidFill>
@@ -7463,41 +7759,38 @@
                 <a:ea typeface="Cambria" pitchFamily="34" charset="-122"/>
                 <a:cs typeface="Cambria" pitchFamily="34" charset="-120"/>
               </a:rPr>
-              <a:t>Rp 2,29 jt</a:t>
-            </a:r>
-            <a:endParaRPr lang="en-US" sz="3200" dirty="0"/>
-          </a:p>
-        </p:txBody>
-      </p:sp>
-      <p:sp>
-        <p:nvSpPr>
-          <p:cNvPr id="13" name="Text 11"/>
-          <p:cNvSpPr/>
-          <p:nvPr/>
-        </p:nvSpPr>
-        <p:spPr>
-          <a:xfrm>
-            <a:off x="4480560" y="3639312"/>
-            <a:ext cx="2697480" cy="457200"/>
-          </a:xfrm>
-          <a:prstGeom prst="rect">
-            <a:avLst/>
-          </a:prstGeom>
-          <a:noFill/>
-          <a:ln/>
-        </p:spPr>
-        <p:txBody>
-          <a:bodyPr wrap="square" lIns="0" tIns="0" rIns="0" bIns="0" rtlCol="0" anchor="ctr"/>
-          <a:lstStyle/>
-          <a:p>
-            <a:pPr indent="0" marL="0">
-              <a:lnSpc>
-                <a:spcPts val="1700"/>
-              </a:lnSpc>
-              <a:buNone/>
-            </a:pPr>
-            <a:r>
-              <a:rPr lang="en-US" sz="1300" b="1" dirty="0">
+              <a:t>10/14</a:t>
+            </a:r>
+            <a:endParaRPr lang="en-US" sz="3000" dirty="0"/>
+          </a:p>
+        </p:txBody>
+      </p:sp>
+      <p:sp>
+        <p:nvSpPr>
+          <p:cNvPr id="27" name="Text 25"/>
+          <p:cNvSpPr/>
+          <p:nvPr/>
+        </p:nvSpPr>
+        <p:spPr>
+          <a:xfrm>
+            <a:off x="1051560" y="5727684"/>
+            <a:ext cx="2011680" cy="274320"/>
+          </a:xfrm>
+          <a:prstGeom prst="rect">
+            <a:avLst/>
+          </a:prstGeom>
+          <a:noFill/>
+          <a:ln/>
+        </p:spPr>
+        <p:txBody>
+          <a:bodyPr wrap="square" lIns="0" tIns="0" rIns="0" bIns="0" rtlCol="0" anchor="ctr"/>
+          <a:lstStyle/>
+          <a:p>
+            <a:pPr indent="0" marL="0">
+              <a:buNone/>
+            </a:pPr>
+            <a:r>
+              <a:rPr lang="en-US" sz="1400" b="1" dirty="0">
                 <a:solidFill>
                   <a:srgbClr val="14302B"/>
                 </a:solidFill>
@@ -7505,22 +7798,22 @@
                 <a:ea typeface="Calibri" pitchFamily="34" charset="-122"/>
                 <a:cs typeface="Calibri" pitchFamily="34" charset="-120"/>
               </a:rPr>
-              <a:t>Neurogaze · dirotasi 4 Posyandu</a:t>
-            </a:r>
-            <a:endParaRPr lang="en-US" sz="1300" dirty="0"/>
-          </a:p>
-        </p:txBody>
-      </p:sp>
-      <p:sp>
-        <p:nvSpPr>
-          <p:cNvPr id="14" name="Text 12"/>
-          <p:cNvSpPr/>
-          <p:nvPr/>
-        </p:nvSpPr>
-        <p:spPr>
-          <a:xfrm>
-            <a:off x="4480560" y="4114800"/>
-            <a:ext cx="2697480" cy="502920"/>
+              <a:t>berkas paket mitra siap kirim</a:t>
+            </a:r>
+            <a:endParaRPr lang="en-US" sz="1400" dirty="0"/>
+          </a:p>
+        </p:txBody>
+      </p:sp>
+      <p:sp>
+        <p:nvSpPr>
+          <p:cNvPr id="28" name="Text 26"/>
+          <p:cNvSpPr/>
+          <p:nvPr/>
+        </p:nvSpPr>
+        <p:spPr>
+          <a:xfrm>
+            <a:off x="3520440" y="5285232"/>
+            <a:ext cx="7315200" cy="658368"/>
           </a:xfrm>
           <a:prstGeom prst="rect">
             <a:avLst/>
@@ -7534,292 +7827,61 @@
           <a:p>
             <a:pPr indent="0" marL="0">
               <a:lnSpc>
-                <a:spcPts val="1500"/>
+                <a:spcPts val="1600"/>
               </a:lnSpc>
               <a:buNone/>
             </a:pPr>
             <a:r>
-              <a:rPr lang="en-US" sz="1100" dirty="0">
-                <a:solidFill>
-                  <a:srgbClr val="4A635D"/>
+              <a:rPr lang="en-US" sz="1200" dirty="0">
+                <a:solidFill>
+                  <a:srgbClr val="14302B"/>
                 </a:solidFill>
                 <a:latin typeface="Calibri" pitchFamily="34" charset="0"/>
                 <a:ea typeface="Calibri" pitchFamily="34" charset="-122"/>
                 <a:cs typeface="Calibri" pitchFamily="34" charset="-120"/>
               </a:rPr>
-              <a:t>1.000 sesi × Rp 3.500 ÷ 1,53 kasus</a:t>
-            </a:r>
-            <a:endParaRPr lang="en-US" sz="1100" dirty="0"/>
-          </a:p>
-        </p:txBody>
-      </p:sp>
-      <p:sp>
-        <p:nvSpPr>
-          <p:cNvPr id="15" name="Shape 13"/>
-          <p:cNvSpPr/>
-          <p:nvPr/>
-        </p:nvSpPr>
-        <p:spPr>
-          <a:xfrm>
-            <a:off x="7726680" y="2788920"/>
-            <a:ext cx="3246120" cy="1965960"/>
-          </a:xfrm>
-          <a:prstGeom prst="roundRect">
-            <a:avLst>
-              <a:gd name="adj" fmla="val 2791"/>
-            </a:avLst>
-          </a:prstGeom>
-          <a:solidFill>
-            <a:srgbClr val="FFFFFF"/>
-          </a:solidFill>
-          <a:ln w="12700">
-            <a:solidFill>
-              <a:srgbClr val="DBE4E1"/>
-            </a:solidFill>
-            <a:prstDash val="solid"/>
-          </a:ln>
-        </p:spPr>
-      </p:sp>
-      <p:sp>
-        <p:nvSpPr>
-          <p:cNvPr id="16" name="Text 14"/>
-          <p:cNvSpPr/>
-          <p:nvPr/>
-        </p:nvSpPr>
-        <p:spPr>
-          <a:xfrm>
-            <a:off x="8001000" y="3035808"/>
-            <a:ext cx="2697480" cy="548640"/>
-          </a:xfrm>
-          <a:prstGeom prst="rect">
-            <a:avLst/>
-          </a:prstGeom>
-          <a:noFill/>
-          <a:ln/>
-        </p:spPr>
-        <p:txBody>
-          <a:bodyPr wrap="square" lIns="0" tIns="0" rIns="0" bIns="0" rtlCol="0" anchor="ctr"/>
-          <a:lstStyle/>
-          <a:p>
-            <a:pPr indent="0" marL="0">
-              <a:buNone/>
-            </a:pPr>
-            <a:r>
-              <a:rPr lang="en-US" sz="3200" b="1" dirty="0">
-                <a:solidFill>
-                  <a:srgbClr val="B1442C"/>
-                </a:solidFill>
-                <a:latin typeface="Cambria" pitchFamily="34" charset="0"/>
-                <a:ea typeface="Cambria" pitchFamily="34" charset="-122"/>
-                <a:cs typeface="Cambria" pitchFamily="34" charset="-120"/>
-              </a:rPr>
-              <a:t>Rp 9,70 jt</a:t>
-            </a:r>
-            <a:endParaRPr lang="en-US" sz="3200" dirty="0"/>
-          </a:p>
-        </p:txBody>
-      </p:sp>
-      <p:sp>
-        <p:nvSpPr>
-          <p:cNvPr id="17" name="Text 15"/>
-          <p:cNvSpPr/>
-          <p:nvPr/>
-        </p:nvSpPr>
-        <p:spPr>
-          <a:xfrm>
-            <a:off x="8001000" y="3639312"/>
-            <a:ext cx="2697480" cy="457200"/>
-          </a:xfrm>
-          <a:prstGeom prst="rect">
-            <a:avLst/>
-          </a:prstGeom>
-          <a:noFill/>
-          <a:ln/>
-        </p:spPr>
-        <p:txBody>
-          <a:bodyPr wrap="square" lIns="0" tIns="0" rIns="0" bIns="0" rtlCol="0" anchor="ctr"/>
-          <a:lstStyle/>
-          <a:p>
-            <a:pPr indent="0" marL="0">
-              <a:lnSpc>
-                <a:spcPts val="1700"/>
-              </a:lnSpc>
-              <a:buNone/>
-            </a:pPr>
-            <a:r>
-              <a:rPr lang="en-US" sz="1300" b="1" dirty="0">
-                <a:solidFill>
-                  <a:srgbClr val="14302B"/>
+              <a:t>Empat sisanya — naskah kaji etik, lembar persetujuan orang tua, perjanjian data — menuntut mitra sebagai penanggung jawabnya, dan tidak dapat dikarang lebih dulu. “Kami belum punya mitra” dan “paketnya siap, mitranya yang belum ada” menggambarkan keadaan yang sama; hanya satu yang menggambarkan pekerjaannya.</a:t>
+            </a:r>
+            <a:endParaRPr lang="en-US" sz="1200" dirty="0"/>
+          </a:p>
+        </p:txBody>
+      </p:sp>
+      <p:sp>
+        <p:nvSpPr>
+          <p:cNvPr id="29" name="Text 27"/>
+          <p:cNvSpPr/>
+          <p:nvPr/>
+        </p:nvSpPr>
+        <p:spPr>
+          <a:xfrm>
+            <a:off x="685800" y="6144768"/>
+            <a:ext cx="10424160" cy="274320"/>
+          </a:xfrm>
+          <a:prstGeom prst="rect">
+            <a:avLst/>
+          </a:prstGeom>
+          <a:noFill/>
+          <a:ln/>
+        </p:spPr>
+        <p:txBody>
+          <a:bodyPr wrap="square" lIns="0" tIns="0" rIns="0" bIns="0" rtlCol="0" anchor="ctr"/>
+          <a:lstStyle/>
+          <a:p>
+            <a:pPr indent="0" marL="0">
+              <a:buNone/>
+            </a:pPr>
+            <a:r>
+              <a:rPr lang="en-US" sz="1000" dirty="0">
+                <a:solidFill>
+                  <a:srgbClr val="4A635D"/>
                 </a:solidFill>
                 <a:latin typeface="Calibri" pitchFamily="34" charset="0"/>
                 <a:ea typeface="Calibri" pitchFamily="34" charset="-122"/>
                 <a:cs typeface="Calibri" pitchFamily="34" charset="-120"/>
               </a:rPr>
-              <a:t>EarliPoint · satu pemeriksaan</a:t>
-            </a:r>
-            <a:endParaRPr lang="en-US" sz="1300" dirty="0"/>
-          </a:p>
-        </p:txBody>
-      </p:sp>
-      <p:sp>
-        <p:nvSpPr>
-          <p:cNvPr id="18" name="Text 16"/>
-          <p:cNvSpPr/>
-          <p:nvPr/>
-        </p:nvSpPr>
-        <p:spPr>
-          <a:xfrm>
-            <a:off x="8001000" y="4114800"/>
-            <a:ext cx="2697480" cy="502920"/>
-          </a:xfrm>
-          <a:prstGeom prst="rect">
-            <a:avLst/>
-          </a:prstGeom>
-          <a:noFill/>
-          <a:ln/>
-        </p:spPr>
-        <p:txBody>
-          <a:bodyPr wrap="square" lIns="0" tIns="0" rIns="0" bIns="0" rtlCol="0" anchor="ctr"/>
-          <a:lstStyle/>
-          <a:p>
-            <a:pPr indent="0" marL="0">
-              <a:lnSpc>
-                <a:spcPts val="1500"/>
-              </a:lnSpc>
-              <a:buNone/>
-            </a:pPr>
-            <a:r>
-              <a:rPr lang="en-US" sz="1100" dirty="0">
-                <a:solidFill>
-                  <a:srgbClr val="4A635D"/>
-                </a:solidFill>
-                <a:latin typeface="Calibri" pitchFamily="34" charset="0"/>
-                <a:ea typeface="Calibri" pitchFamily="34" charset="-122"/>
-                <a:cs typeface="Calibri" pitchFamily="34" charset="-120"/>
-              </a:rPr>
-              <a:t>Satu anak, sekali periksa, di klinik</a:t>
-            </a:r>
-            <a:endParaRPr lang="en-US" sz="1100" dirty="0"/>
-          </a:p>
-        </p:txBody>
-      </p:sp>
-      <p:sp>
-        <p:nvSpPr>
-          <p:cNvPr id="19" name="Text 17"/>
-          <p:cNvSpPr/>
-          <p:nvPr/>
-        </p:nvSpPr>
-        <p:spPr>
-          <a:xfrm>
-            <a:off x="685800" y="4983480"/>
-            <a:ext cx="10424160" cy="640080"/>
-          </a:xfrm>
-          <a:prstGeom prst="rect">
-            <a:avLst/>
-          </a:prstGeom>
-          <a:noFill/>
-          <a:ln/>
-        </p:spPr>
-        <p:txBody>
-          <a:bodyPr wrap="square" lIns="0" tIns="0" rIns="0" bIns="0" rtlCol="0" anchor="ctr"/>
-          <a:lstStyle/>
-          <a:p>
-            <a:pPr indent="0" marL="0">
-              <a:lnSpc>
-                <a:spcPts val="2400"/>
-              </a:lnSpc>
-              <a:buNone/>
-            </a:pPr>
-            <a:r>
-              <a:rPr lang="en-US" sz="1700" b="1" dirty="0">
-                <a:solidFill>
-                  <a:srgbClr val="0B1E1B"/>
-                </a:solidFill>
-                <a:latin typeface="Cambria" pitchFamily="34" charset="0"/>
-                <a:ea typeface="Cambria" pitchFamily="34" charset="-122"/>
-                <a:cs typeface="Cambria" pitchFamily="34" charset="-120"/>
-              </a:rPr>
-              <a:t>Bila titik operasinya terreplikasi, menemukan satu kasus harganya kira-kira sekali pemeriksaan EarliPoint — seperempatnya bila satu tablet dirotasi ke empat Posyandu.</a:t>
-            </a:r>
-            <a:endParaRPr lang="en-US" sz="1700" dirty="0"/>
-          </a:p>
-        </p:txBody>
-      </p:sp>
-      <p:sp>
-        <p:nvSpPr>
-          <p:cNvPr id="20" name="Text 18"/>
-          <p:cNvSpPr/>
-          <p:nvPr/>
-        </p:nvSpPr>
-        <p:spPr>
-          <a:xfrm>
-            <a:off x="685800" y="5650992"/>
-            <a:ext cx="10424160" cy="274320"/>
-          </a:xfrm>
-          <a:prstGeom prst="rect">
-            <a:avLst/>
-          </a:prstGeom>
-          <a:noFill/>
-          <a:ln/>
-        </p:spPr>
-        <p:txBody>
-          <a:bodyPr wrap="square" lIns="0" tIns="0" rIns="0" bIns="0" rtlCol="0" anchor="ctr"/>
-          <a:lstStyle/>
-          <a:p>
-            <a:pPr indent="0" marL="0">
-              <a:buNone/>
-            </a:pPr>
-            <a:r>
-              <a:rPr lang="en-US" sz="1050" b="1" dirty="0">
-                <a:solidFill>
-                  <a:srgbClr val="14302B"/>
-                </a:solidFill>
-                <a:latin typeface="Calibri" pitchFamily="34" charset="0"/>
-                <a:ea typeface="Calibri" pitchFamily="34" charset="-122"/>
-                <a:cs typeface="Calibri" pitchFamily="34" charset="-120"/>
-              </a:rPr>
-              <a:t>Yang belum terukur: waktu kader, pelatihan, dukungan, cetak, dudukan, pengulangan sesi, pemeliharaan, penggantian perangkat, dan tindak lanjut klinis.</a:t>
-            </a:r>
-            <a:endParaRPr lang="en-US" sz="1050" dirty="0"/>
-          </a:p>
-        </p:txBody>
-      </p:sp>
-      <p:sp>
-        <p:nvSpPr>
-          <p:cNvPr id="21" name="Text 19"/>
-          <p:cNvSpPr/>
-          <p:nvPr/>
-        </p:nvSpPr>
-        <p:spPr>
-          <a:xfrm>
-            <a:off x="685800" y="5943600"/>
-            <a:ext cx="10424160" cy="274320"/>
-          </a:xfrm>
-          <a:prstGeom prst="rect">
-            <a:avLst/>
-          </a:prstGeom>
-          <a:noFill/>
-          <a:ln/>
-        </p:spPr>
-        <p:txBody>
-          <a:bodyPr wrap="square" lIns="0" tIns="0" rIns="0" bIns="0" rtlCol="0" anchor="ctr"/>
-          <a:lstStyle/>
-          <a:p>
-            <a:pPr indent="0" marL="0">
-              <a:buNone/>
-            </a:pPr>
-            <a:r>
-              <a:rPr lang="en-US" sz="1050" dirty="0">
-                <a:solidFill>
-                  <a:srgbClr val="4A635D"/>
-                </a:solidFill>
-                <a:latin typeface="Calibri" pitchFamily="34" charset="0"/>
-                <a:ea typeface="Calibri" pitchFamily="34" charset="-122"/>
-                <a:cs typeface="Calibri" pitchFamily="34" charset="-120"/>
-              </a:rPr>
-              <a:t>Asumsi dinyatakan di docs/dampak_dan_adopsi.md · kohort 1.000, prevalensi 1%, cakupan teknis 90%</a:t>
-            </a:r>
-            <a:endParaRPr lang="en-US" sz="1050" dirty="0"/>
+              <a:t>Rinciannya di docs/paket_mitra.md</a:t>
+            </a:r>
+            <a:endParaRPr lang="en-US" sz="1000" dirty="0"/>
           </a:p>
         </p:txBody>
       </p:sp>
@@ -7940,7 +8002,7 @@
                 <a:ea typeface="Calibri" pitchFamily="34" charset="-122"/>
                 <a:cs typeface="Calibri" pitchFamily="34" charset="-120"/>
               </a:rPr>
-              <a:t>Jalur adopsi</a:t>
+              <a:t>Dampak dan biaya</a:t>
             </a:r>
             <a:endParaRPr lang="en-US" sz="1200" dirty="0"/>
           </a:p>
@@ -7982,7 +8044,7 @@
                 <a:ea typeface="Cambria" pitchFamily="34" charset="-122"/>
                 <a:cs typeface="Cambria" pitchFamily="34" charset="-120"/>
               </a:rPr>
-              <a:t>Ia menempel pada alur yang sudah jalan</a:t>
+              <a:t>Ambil metrik yang paling keras terhadap kami</a:t>
             </a:r>
             <a:endParaRPr lang="en-US" sz="3200" dirty="0"/>
           </a:p>
@@ -7997,7 +8059,7 @@
         <p:spPr>
           <a:xfrm>
             <a:off x="685800" y="2103120"/>
-            <a:ext cx="10424160" cy="548640"/>
+            <a:ext cx="10424160" cy="502920"/>
           </a:xfrm>
           <a:prstGeom prst="rect">
             <a:avLst/>
@@ -8016,15 +8078,15 @@
               <a:buNone/>
             </a:pPr>
             <a:r>
-              <a:rPr lang="en-US" sz="1500" dirty="0">
-                <a:solidFill>
-                  <a:srgbClr val="14302B"/>
+              <a:rPr lang="en-US" sz="1500" b="1" dirty="0">
+                <a:solidFill>
+                  <a:srgbClr val="B1442C"/>
                 </a:solidFill>
                 <a:latin typeface="Calibri" pitchFamily="34" charset="0"/>
                 <a:ea typeface="Calibri" pitchFamily="34" charset="-122"/>
                 <a:cs typeface="Calibri" pitchFamily="34" charset="-120"/>
               </a:rPr>
-              <a:t>Alat ini tidak menggantikan apa pun. Ia menempel: sesi 67 detik sesudah penimbangan bulanan, laporan satu halaman diserahkan ke Puskesmas, dibaca berdampingan dengan SDIDTK.</a:t>
+              <a:t>Skenario, bukan hasil terukur: angka per kasus ini berlaku hanya bila titik operasi protokol penuh berhasil direplikasi pada balita Indonesia. Hari ini titik itu ditahan.</a:t>
             </a:r>
             <a:endParaRPr lang="en-US" sz="1500" dirty="0"/>
           </a:p>
@@ -8032,72 +8094,99 @@
       </p:sp>
       <p:sp>
         <p:nvSpPr>
-          <p:cNvPr id="7" name="Text 5"/>
-          <p:cNvSpPr/>
-          <p:nvPr/>
-        </p:nvSpPr>
-        <p:spPr>
-          <a:xfrm>
-            <a:off x="685800" y="2926080"/>
-            <a:ext cx="3291840" cy="1002890"/>
-          </a:xfrm>
-          <a:prstGeom prst="rect">
-            <a:avLst/>
-          </a:prstGeom>
-          <a:noFill/>
-          <a:ln/>
-        </p:spPr>
-        <p:txBody>
-          <a:bodyPr wrap="square" lIns="0" tIns="0" rIns="0" bIns="0" rtlCol="0" anchor="ctr"/>
-          <a:lstStyle/>
-          <a:p>
-            <a:pPr indent="0" marL="0">
-              <a:lnSpc>
-                <a:spcPts val="6800"/>
-              </a:lnSpc>
-              <a:buNone/>
-            </a:pPr>
-            <a:r>
-              <a:rPr lang="en-US" sz="6800" b="1" dirty="0">
-                <a:solidFill>
-                  <a:srgbClr val="0D8271"/>
+          <p:cNvPr id="7" name="Shape 5"/>
+          <p:cNvSpPr/>
+          <p:nvPr/>
+        </p:nvSpPr>
+        <p:spPr>
+          <a:xfrm>
+            <a:off x="685800" y="2788920"/>
+            <a:ext cx="3246120" cy="1965960"/>
+          </a:xfrm>
+          <a:prstGeom prst="roundRect">
+            <a:avLst>
+              <a:gd name="adj" fmla="val 2791"/>
+            </a:avLst>
+          </a:prstGeom>
+          <a:solidFill>
+            <a:srgbClr val="FFFFFF"/>
+          </a:solidFill>
+          <a:ln w="12700">
+            <a:solidFill>
+              <a:srgbClr val="DBE4E1"/>
+            </a:solidFill>
+            <a:prstDash val="solid"/>
+          </a:ln>
+        </p:spPr>
+      </p:sp>
+      <p:sp>
+        <p:nvSpPr>
+          <p:cNvPr id="8" name="Text 6"/>
+          <p:cNvSpPr/>
+          <p:nvPr/>
+        </p:nvSpPr>
+        <p:spPr>
+          <a:xfrm>
+            <a:off x="960120" y="3035808"/>
+            <a:ext cx="2697480" cy="548640"/>
+          </a:xfrm>
+          <a:prstGeom prst="rect">
+            <a:avLst/>
+          </a:prstGeom>
+          <a:noFill/>
+          <a:ln/>
+        </p:spPr>
+        <p:txBody>
+          <a:bodyPr wrap="square" lIns="0" tIns="0" rIns="0" bIns="0" rtlCol="0" anchor="ctr"/>
+          <a:lstStyle/>
+          <a:p>
+            <a:pPr indent="0" marL="0">
+              <a:buNone/>
+            </a:pPr>
+            <a:r>
+              <a:rPr lang="en-US" sz="3200" b="1" dirty="0">
+                <a:solidFill>
+                  <a:srgbClr val="0B1E1B"/>
                 </a:solidFill>
                 <a:latin typeface="Cambria" pitchFamily="34" charset="0"/>
                 <a:ea typeface="Cambria" pitchFamily="34" charset="-122"/>
                 <a:cs typeface="Cambria" pitchFamily="34" charset="-120"/>
               </a:rPr>
-              <a:t>~700</a:t>
-            </a:r>
-            <a:endParaRPr lang="en-US" sz="6800" dirty="0"/>
-          </a:p>
-        </p:txBody>
-      </p:sp>
-      <p:sp>
-        <p:nvSpPr>
-          <p:cNvPr id="8" name="Text 6"/>
-          <p:cNvSpPr/>
-          <p:nvPr/>
-        </p:nvSpPr>
-        <p:spPr>
-          <a:xfrm>
-            <a:off x="685800" y="3983834"/>
-            <a:ext cx="3291840" cy="274320"/>
-          </a:xfrm>
-          <a:prstGeom prst="rect">
-            <a:avLst/>
-          </a:prstGeom>
-          <a:noFill/>
-          <a:ln/>
-        </p:spPr>
-        <p:txBody>
-          <a:bodyPr wrap="square" lIns="0" tIns="0" rIns="0" bIns="0" rtlCol="0" anchor="ctr"/>
-          <a:lstStyle/>
-          <a:p>
-            <a:pPr indent="0" marL="0">
-              <a:buNone/>
-            </a:pPr>
-            <a:r>
-              <a:rPr lang="en-US" sz="1400" b="1" dirty="0">
+              <a:t>Rp 9,08 jt</a:t>
+            </a:r>
+            <a:endParaRPr lang="en-US" sz="3200" dirty="0"/>
+          </a:p>
+        </p:txBody>
+      </p:sp>
+      <p:sp>
+        <p:nvSpPr>
+          <p:cNvPr id="9" name="Text 7"/>
+          <p:cNvSpPr/>
+          <p:nvPr/>
+        </p:nvSpPr>
+        <p:spPr>
+          <a:xfrm>
+            <a:off x="960120" y="3639312"/>
+            <a:ext cx="2697480" cy="457200"/>
+          </a:xfrm>
+          <a:prstGeom prst="rect">
+            <a:avLst/>
+          </a:prstGeom>
+          <a:noFill/>
+          <a:ln/>
+        </p:spPr>
+        <p:txBody>
+          <a:bodyPr wrap="square" lIns="0" tIns="0" rIns="0" bIns="0" rtlCol="0" anchor="ctr"/>
+          <a:lstStyle/>
+          <a:p>
+            <a:pPr indent="0" marL="0">
+              <a:lnSpc>
+                <a:spcPts val="1700"/>
+              </a:lnSpc>
+              <a:buNone/>
+            </a:pPr>
+            <a:r>
+              <a:rPr lang="en-US" sz="1300" b="1" dirty="0">
                 <a:solidFill>
                   <a:srgbClr val="14302B"/>
                 </a:solidFill>
@@ -8105,22 +8194,22 @@
                 <a:ea typeface="Calibri" pitchFamily="34" charset="-122"/>
                 <a:cs typeface="Calibri" pitchFamily="34" charset="-120"/>
               </a:rPr>
-              <a:t>sesi dapat dinilai per tahun — hipotetis</a:t>
-            </a:r>
-            <a:endParaRPr lang="en-US" sz="1400" dirty="0"/>
-          </a:p>
-        </p:txBody>
-      </p:sp>
-      <p:sp>
-        <p:nvSpPr>
-          <p:cNvPr id="9" name="Text 7"/>
-          <p:cNvSpPr/>
-          <p:nvPr/>
-        </p:nvSpPr>
-        <p:spPr>
-          <a:xfrm>
-            <a:off x="685800" y="4294730"/>
-            <a:ext cx="3291840" cy="640080"/>
+              <a:t>Neurogaze · 1 Posyandu</a:t>
+            </a:r>
+            <a:endParaRPr lang="en-US" sz="1300" dirty="0"/>
+          </a:p>
+        </p:txBody>
+      </p:sp>
+      <p:sp>
+        <p:nvSpPr>
+          <p:cNvPr id="10" name="Text 8"/>
+          <p:cNvSpPr/>
+          <p:nvPr/>
+        </p:nvSpPr>
+        <p:spPr>
+          <a:xfrm>
+            <a:off x="960120" y="4114800"/>
+            <a:ext cx="2697480" cy="502920"/>
           </a:xfrm>
           <a:prstGeom prst="rect">
             <a:avLst/>
@@ -8139,7 +8228,7 @@
               <a:buNone/>
             </a:pPr>
             <a:r>
-              <a:rPr lang="en-US" sz="1200" dirty="0">
+              <a:rPr lang="en-US" sz="1100" dirty="0">
                 <a:solidFill>
                   <a:srgbClr val="4A635D"/>
                 </a:solidFill>
@@ -8147,149 +8236,26 @@
                 <a:ea typeface="Calibri" pitchFamily="34" charset="-122"/>
                 <a:cs typeface="Calibri" pitchFamily="34" charset="-120"/>
               </a:rPr>
-              <a:t>Aritmetika skala: 30 Posyandu × 40 anak layak, dikurangi attrition 42%. Skala rekrutmen, bukan rencana operasional.</a:t>
-            </a:r>
-            <a:endParaRPr lang="en-US" sz="1200" dirty="0"/>
-          </a:p>
-        </p:txBody>
-      </p:sp>
-      <p:sp>
-        <p:nvSpPr>
-          <p:cNvPr id="10" name="Text 8"/>
-          <p:cNvSpPr/>
-          <p:nvPr/>
-        </p:nvSpPr>
-        <p:spPr>
-          <a:xfrm>
-            <a:off x="4434840" y="2926080"/>
-            <a:ext cx="3291840" cy="1002890"/>
-          </a:xfrm>
-          <a:prstGeom prst="rect">
-            <a:avLst/>
-          </a:prstGeom>
-          <a:noFill/>
-          <a:ln/>
-        </p:spPr>
-        <p:txBody>
-          <a:bodyPr wrap="square" lIns="0" tIns="0" rIns="0" bIns="0" rtlCol="0" anchor="ctr"/>
-          <a:lstStyle/>
-          <a:p>
-            <a:pPr indent="0" marL="0">
-              <a:lnSpc>
-                <a:spcPts val="6800"/>
-              </a:lnSpc>
-              <a:buNone/>
-            </a:pPr>
-            <a:r>
-              <a:rPr lang="en-US" sz="6800" b="1" dirty="0">
-                <a:solidFill>
-                  <a:srgbClr val="4A635D"/>
-                </a:solidFill>
-                <a:latin typeface="Cambria" pitchFamily="34" charset="0"/>
-                <a:ea typeface="Cambria" pitchFamily="34" charset="-122"/>
-                <a:cs typeface="Cambria" pitchFamily="34" charset="-120"/>
-              </a:rPr>
-              <a:t>475</a:t>
-            </a:r>
-            <a:endParaRPr lang="en-US" sz="6800" dirty="0"/>
-          </a:p>
-        </p:txBody>
-      </p:sp>
-      <p:sp>
-        <p:nvSpPr>
-          <p:cNvPr id="11" name="Text 9"/>
-          <p:cNvSpPr/>
-          <p:nvPr/>
-        </p:nvSpPr>
-        <p:spPr>
-          <a:xfrm>
-            <a:off x="4434840" y="3983834"/>
-            <a:ext cx="3291840" cy="274320"/>
-          </a:xfrm>
-          <a:prstGeom prst="rect">
-            <a:avLst/>
-          </a:prstGeom>
-          <a:noFill/>
-          <a:ln/>
-        </p:spPr>
-        <p:txBody>
-          <a:bodyPr wrap="square" lIns="0" tIns="0" rIns="0" bIns="0" rtlCol="0" anchor="ctr"/>
-          <a:lstStyle/>
-          <a:p>
-            <a:pPr indent="0" marL="0">
-              <a:buNone/>
-            </a:pPr>
-            <a:r>
-              <a:rPr lang="en-US" sz="1400" b="1" dirty="0">
-                <a:solidFill>
-                  <a:srgbClr val="14302B"/>
-                </a:solidFill>
-                <a:latin typeface="Calibri" pitchFamily="34" charset="0"/>
-                <a:ea typeface="Calibri" pitchFamily="34" charset="-122"/>
-                <a:cs typeface="Calibri" pitchFamily="34" charset="-120"/>
-              </a:rPr>
-              <a:t>kohort Nature Medicine</a:t>
-            </a:r>
-            <a:endParaRPr lang="en-US" sz="1400" dirty="0"/>
-          </a:p>
-        </p:txBody>
-      </p:sp>
-      <p:sp>
-        <p:nvSpPr>
-          <p:cNvPr id="12" name="Text 10"/>
-          <p:cNvSpPr/>
-          <p:nvPr/>
-        </p:nvSpPr>
-        <p:spPr>
-          <a:xfrm>
-            <a:off x="4434840" y="4294730"/>
-            <a:ext cx="3291840" cy="640080"/>
-          </a:xfrm>
-          <a:prstGeom prst="rect">
-            <a:avLst/>
-          </a:prstGeom>
-          <a:noFill/>
-          <a:ln/>
-        </p:spPr>
-        <p:txBody>
-          <a:bodyPr wrap="square" lIns="0" tIns="0" rIns="0" bIns="0" rtlCol="0" anchor="ctr"/>
-          <a:lstStyle/>
-          <a:p>
-            <a:pPr indent="0" marL="0">
-              <a:lnSpc>
-                <a:spcPts val="1500"/>
-              </a:lnSpc>
-              <a:buNone/>
-            </a:pPr>
-            <a:r>
-              <a:rPr lang="en-US" sz="1200" dirty="0">
-                <a:solidFill>
-                  <a:srgbClr val="4A635D"/>
-                </a:solidFill>
-                <a:latin typeface="Calibri" pitchFamily="34" charset="0"/>
-                <a:ea typeface="Calibri" pitchFamily="34" charset="-122"/>
-                <a:cs typeface="Calibri" pitchFamily="34" charset="-120"/>
-              </a:rPr>
-              <a:t>Studi SenseToKnow yang jadi acuan kami.</a:t>
-            </a:r>
-            <a:endParaRPr lang="en-US" sz="1200" dirty="0"/>
-          </a:p>
-        </p:txBody>
-      </p:sp>
-      <p:sp>
-        <p:nvSpPr>
-          <p:cNvPr id="13" name="Shape 11"/>
-          <p:cNvSpPr/>
-          <p:nvPr/>
-        </p:nvSpPr>
-        <p:spPr>
-          <a:xfrm>
-            <a:off x="7909560" y="2880360"/>
-            <a:ext cx="3200400" cy="2194560"/>
+              <a:t>1.000 sesi × Rp 13.900 ÷ 1,53 kasus</a:t>
+            </a:r>
+            <a:endParaRPr lang="en-US" sz="1100" dirty="0"/>
+          </a:p>
+        </p:txBody>
+      </p:sp>
+      <p:sp>
+        <p:nvSpPr>
+          <p:cNvPr id="11" name="Shape 9"/>
+          <p:cNvSpPr/>
+          <p:nvPr/>
+        </p:nvSpPr>
+        <p:spPr>
+          <a:xfrm>
+            <a:off x="4206240" y="2788920"/>
+            <a:ext cx="3246120" cy="1965960"/>
           </a:xfrm>
           <a:prstGeom prst="roundRect">
             <a:avLst>
-              <a:gd name="adj" fmla="val 2500"/>
+              <a:gd name="adj" fmla="val 2791"/>
             </a:avLst>
           </a:prstGeom>
           <a:solidFill>
@@ -8305,33 +8271,30 @@
       </p:sp>
       <p:sp>
         <p:nvSpPr>
-          <p:cNvPr id="14" name="Text 12"/>
-          <p:cNvSpPr/>
-          <p:nvPr/>
-        </p:nvSpPr>
-        <p:spPr>
-          <a:xfrm>
-            <a:off x="8138160" y="3127248"/>
-            <a:ext cx="2743200" cy="548640"/>
-          </a:xfrm>
-          <a:prstGeom prst="rect">
-            <a:avLst/>
-          </a:prstGeom>
-          <a:noFill/>
-          <a:ln/>
-        </p:spPr>
-        <p:txBody>
-          <a:bodyPr wrap="square" lIns="0" tIns="0" rIns="0" bIns="0" rtlCol="0" anchor="ctr"/>
-          <a:lstStyle/>
-          <a:p>
-            <a:pPr indent="0" marL="0">
-              <a:lnSpc>
-                <a:spcPts val="2100"/>
-              </a:lnSpc>
-              <a:buNone/>
-            </a:pPr>
-            <a:r>
-              <a:rPr lang="en-US" sz="1600" b="1" dirty="0">
+          <p:cNvPr id="12" name="Text 10"/>
+          <p:cNvSpPr/>
+          <p:nvPr/>
+        </p:nvSpPr>
+        <p:spPr>
+          <a:xfrm>
+            <a:off x="4480560" y="3035808"/>
+            <a:ext cx="2697480" cy="548640"/>
+          </a:xfrm>
+          <a:prstGeom prst="rect">
+            <a:avLst/>
+          </a:prstGeom>
+          <a:noFill/>
+          <a:ln/>
+        </p:spPr>
+        <p:txBody>
+          <a:bodyPr wrap="square" lIns="0" tIns="0" rIns="0" bIns="0" rtlCol="0" anchor="ctr"/>
+          <a:lstStyle/>
+          <a:p>
+            <a:pPr indent="0" marL="0">
+              <a:buNone/>
+            </a:pPr>
+            <a:r>
+              <a:rPr lang="en-US" sz="3200" b="1" dirty="0">
                 <a:solidFill>
                   <a:srgbClr val="0D8271"/>
                 </a:solidFill>
@@ -8339,22 +8302,22 @@
                 <a:ea typeface="Cambria" pitchFamily="34" charset="-122"/>
                 <a:cs typeface="Cambria" pitchFamily="34" charset="-120"/>
               </a:rPr>
-              <a:t>Tanpa biaya marginal perangkat lunak</a:t>
-            </a:r>
-            <a:endParaRPr lang="en-US" sz="1600" dirty="0"/>
-          </a:p>
-        </p:txBody>
-      </p:sp>
-      <p:sp>
-        <p:nvSpPr>
-          <p:cNvPr id="15" name="Text 13"/>
-          <p:cNvSpPr/>
-          <p:nvPr/>
-        </p:nvSpPr>
-        <p:spPr>
-          <a:xfrm>
-            <a:off x="8138160" y="3749040"/>
-            <a:ext cx="2743200" cy="1097280"/>
+              <a:t>Rp 2,29 jt</a:t>
+            </a:r>
+            <a:endParaRPr lang="en-US" sz="3200" dirty="0"/>
+          </a:p>
+        </p:txBody>
+      </p:sp>
+      <p:sp>
+        <p:nvSpPr>
+          <p:cNvPr id="13" name="Text 11"/>
+          <p:cNvSpPr/>
+          <p:nvPr/>
+        </p:nvSpPr>
+        <p:spPr>
+          <a:xfrm>
+            <a:off x="4480560" y="3639312"/>
+            <a:ext cx="2697480" cy="457200"/>
           </a:xfrm>
           <a:prstGeom prst="rect">
             <a:avLst/>
@@ -8368,12 +8331,12 @@
           <a:p>
             <a:pPr indent="0" marL="0">
               <a:lnSpc>
-                <a:spcPts val="1800"/>
+                <a:spcPts val="1700"/>
               </a:lnSpc>
               <a:buNone/>
             </a:pPr>
             <a:r>
-              <a:rPr lang="en-US" sz="1250" dirty="0">
+              <a:rPr lang="en-US" sz="1300" b="1" dirty="0">
                 <a:solidFill>
                   <a:srgbClr val="14302B"/>
                 </a:solidFill>
@@ -8381,11 +8344,80 @@
                 <a:ea typeface="Calibri" pitchFamily="34" charset="-122"/>
                 <a:cs typeface="Calibri" pitchFamily="34" charset="-120"/>
               </a:rPr>
-              <a:t>PWA statis. Tidak ada server, basis data, maupun lisensi. Posyandu ke-1 dan ke-1.000 memuat berkas yang sama.</a:t>
-            </a:r>
-            <a:endParaRPr lang="en-US" sz="1250" dirty="0"/>
-          </a:p>
-        </p:txBody>
+              <a:t>Neurogaze · dirotasi 4 Posyandu</a:t>
+            </a:r>
+            <a:endParaRPr lang="en-US" sz="1300" dirty="0"/>
+          </a:p>
+        </p:txBody>
+      </p:sp>
+      <p:sp>
+        <p:nvSpPr>
+          <p:cNvPr id="14" name="Text 12"/>
+          <p:cNvSpPr/>
+          <p:nvPr/>
+        </p:nvSpPr>
+        <p:spPr>
+          <a:xfrm>
+            <a:off x="4480560" y="4114800"/>
+            <a:ext cx="2697480" cy="502920"/>
+          </a:xfrm>
+          <a:prstGeom prst="rect">
+            <a:avLst/>
+          </a:prstGeom>
+          <a:noFill/>
+          <a:ln/>
+        </p:spPr>
+        <p:txBody>
+          <a:bodyPr wrap="square" lIns="0" tIns="0" rIns="0" bIns="0" rtlCol="0" anchor="ctr"/>
+          <a:lstStyle/>
+          <a:p>
+            <a:pPr indent="0" marL="0">
+              <a:lnSpc>
+                <a:spcPts val="1500"/>
+              </a:lnSpc>
+              <a:buNone/>
+            </a:pPr>
+            <a:r>
+              <a:rPr lang="en-US" sz="1100" dirty="0">
+                <a:solidFill>
+                  <a:srgbClr val="4A635D"/>
+                </a:solidFill>
+                <a:latin typeface="Calibri" pitchFamily="34" charset="0"/>
+                <a:ea typeface="Calibri" pitchFamily="34" charset="-122"/>
+                <a:cs typeface="Calibri" pitchFamily="34" charset="-120"/>
+              </a:rPr>
+              <a:t>1.000 sesi × Rp 3.500 ÷ 1,53 kasus</a:t>
+            </a:r>
+            <a:endParaRPr lang="en-US" sz="1100" dirty="0"/>
+          </a:p>
+        </p:txBody>
+      </p:sp>
+      <p:sp>
+        <p:nvSpPr>
+          <p:cNvPr id="15" name="Shape 13"/>
+          <p:cNvSpPr/>
+          <p:nvPr/>
+        </p:nvSpPr>
+        <p:spPr>
+          <a:xfrm>
+            <a:off x="7726680" y="2788920"/>
+            <a:ext cx="3246120" cy="1965960"/>
+          </a:xfrm>
+          <a:prstGeom prst="roundRect">
+            <a:avLst>
+              <a:gd name="adj" fmla="val 2791"/>
+            </a:avLst>
+          </a:prstGeom>
+          <a:solidFill>
+            <a:srgbClr val="FFFFFF"/>
+          </a:solidFill>
+          <a:ln w="12700">
+            <a:solidFill>
+              <a:srgbClr val="DBE4E1"/>
+            </a:solidFill>
+            <a:prstDash val="solid"/>
+          </a:ln>
+        </p:spPr>
       </p:sp>
       <p:sp>
         <p:nvSpPr>
@@ -8395,37 +8427,238 @@
         </p:nvSpPr>
         <p:spPr>
           <a:xfrm>
-            <a:off x="685800" y="5349240"/>
-            <a:ext cx="6766560" cy="640080"/>
-          </a:xfrm>
-          <a:prstGeom prst="rect">
-            <a:avLst/>
-          </a:prstGeom>
-          <a:noFill/>
-          <a:ln/>
-        </p:spPr>
-        <p:txBody>
-          <a:bodyPr wrap="square" lIns="0" tIns="0" rIns="0" bIns="0" rtlCol="0" anchor="ctr"/>
-          <a:lstStyle/>
-          <a:p>
-            <a:pPr indent="0" marL="0">
-              <a:lnSpc>
-                <a:spcPts val="2100"/>
-              </a:lnSpc>
-              <a:buNone/>
-            </a:pPr>
-            <a:r>
-              <a:rPr lang="en-US" sz="1500" i="1" dirty="0">
-                <a:solidFill>
-                  <a:srgbClr val="14302B"/>
+            <a:off x="8001000" y="3035808"/>
+            <a:ext cx="2697480" cy="548640"/>
+          </a:xfrm>
+          <a:prstGeom prst="rect">
+            <a:avLst/>
+          </a:prstGeom>
+          <a:noFill/>
+          <a:ln/>
+        </p:spPr>
+        <p:txBody>
+          <a:bodyPr wrap="square" lIns="0" tIns="0" rIns="0" bIns="0" rtlCol="0" anchor="ctr"/>
+          <a:lstStyle/>
+          <a:p>
+            <a:pPr indent="0" marL="0">
+              <a:buNone/>
+            </a:pPr>
+            <a:r>
+              <a:rPr lang="en-US" sz="3200" b="1" dirty="0">
+                <a:solidFill>
+                  <a:srgbClr val="B1442C"/>
                 </a:solidFill>
                 <a:latin typeface="Cambria" pitchFamily="34" charset="0"/>
                 <a:ea typeface="Cambria" pitchFamily="34" charset="-122"/>
                 <a:cs typeface="Cambria" pitchFamily="34" charset="-120"/>
               </a:rPr>
-              <a:t>Skala kohort acuan Nature Medicine dapat dicapai dalam satu tahun studi di 30 Posyandu — sebagai penelitian prospektif berizin etik dengan acuan klinis buta, bukan sebagai penyebaran produk.</a:t>
-            </a:r>
-            <a:endParaRPr lang="en-US" sz="1500" dirty="0"/>
+              <a:t>Rp 9,70 jt</a:t>
+            </a:r>
+            <a:endParaRPr lang="en-US" sz="3200" dirty="0"/>
+          </a:p>
+        </p:txBody>
+      </p:sp>
+      <p:sp>
+        <p:nvSpPr>
+          <p:cNvPr id="17" name="Text 15"/>
+          <p:cNvSpPr/>
+          <p:nvPr/>
+        </p:nvSpPr>
+        <p:spPr>
+          <a:xfrm>
+            <a:off x="8001000" y="3639312"/>
+            <a:ext cx="2697480" cy="457200"/>
+          </a:xfrm>
+          <a:prstGeom prst="rect">
+            <a:avLst/>
+          </a:prstGeom>
+          <a:noFill/>
+          <a:ln/>
+        </p:spPr>
+        <p:txBody>
+          <a:bodyPr wrap="square" lIns="0" tIns="0" rIns="0" bIns="0" rtlCol="0" anchor="ctr"/>
+          <a:lstStyle/>
+          <a:p>
+            <a:pPr indent="0" marL="0">
+              <a:lnSpc>
+                <a:spcPts val="1700"/>
+              </a:lnSpc>
+              <a:buNone/>
+            </a:pPr>
+            <a:r>
+              <a:rPr lang="en-US" sz="1300" b="1" dirty="0">
+                <a:solidFill>
+                  <a:srgbClr val="14302B"/>
+                </a:solidFill>
+                <a:latin typeface="Calibri" pitchFamily="34" charset="0"/>
+                <a:ea typeface="Calibri" pitchFamily="34" charset="-122"/>
+                <a:cs typeface="Calibri" pitchFamily="34" charset="-120"/>
+              </a:rPr>
+              <a:t>EarliPoint · satu pemeriksaan</a:t>
+            </a:r>
+            <a:endParaRPr lang="en-US" sz="1300" dirty="0"/>
+          </a:p>
+        </p:txBody>
+      </p:sp>
+      <p:sp>
+        <p:nvSpPr>
+          <p:cNvPr id="18" name="Text 16"/>
+          <p:cNvSpPr/>
+          <p:nvPr/>
+        </p:nvSpPr>
+        <p:spPr>
+          <a:xfrm>
+            <a:off x="8001000" y="4114800"/>
+            <a:ext cx="2697480" cy="502920"/>
+          </a:xfrm>
+          <a:prstGeom prst="rect">
+            <a:avLst/>
+          </a:prstGeom>
+          <a:noFill/>
+          <a:ln/>
+        </p:spPr>
+        <p:txBody>
+          <a:bodyPr wrap="square" lIns="0" tIns="0" rIns="0" bIns="0" rtlCol="0" anchor="ctr"/>
+          <a:lstStyle/>
+          <a:p>
+            <a:pPr indent="0" marL="0">
+              <a:lnSpc>
+                <a:spcPts val="1500"/>
+              </a:lnSpc>
+              <a:buNone/>
+            </a:pPr>
+            <a:r>
+              <a:rPr lang="en-US" sz="1100" dirty="0">
+                <a:solidFill>
+                  <a:srgbClr val="4A635D"/>
+                </a:solidFill>
+                <a:latin typeface="Calibri" pitchFamily="34" charset="0"/>
+                <a:ea typeface="Calibri" pitchFamily="34" charset="-122"/>
+                <a:cs typeface="Calibri" pitchFamily="34" charset="-120"/>
+              </a:rPr>
+              <a:t>Satu anak, sekali periksa, di klinik</a:t>
+            </a:r>
+            <a:endParaRPr lang="en-US" sz="1100" dirty="0"/>
+          </a:p>
+        </p:txBody>
+      </p:sp>
+      <p:sp>
+        <p:nvSpPr>
+          <p:cNvPr id="19" name="Text 17"/>
+          <p:cNvSpPr/>
+          <p:nvPr/>
+        </p:nvSpPr>
+        <p:spPr>
+          <a:xfrm>
+            <a:off x="685800" y="4983480"/>
+            <a:ext cx="10424160" cy="640080"/>
+          </a:xfrm>
+          <a:prstGeom prst="rect">
+            <a:avLst/>
+          </a:prstGeom>
+          <a:noFill/>
+          <a:ln/>
+        </p:spPr>
+        <p:txBody>
+          <a:bodyPr wrap="square" lIns="0" tIns="0" rIns="0" bIns="0" rtlCol="0" anchor="ctr"/>
+          <a:lstStyle/>
+          <a:p>
+            <a:pPr indent="0" marL="0">
+              <a:lnSpc>
+                <a:spcPts val="2400"/>
+              </a:lnSpc>
+              <a:buNone/>
+            </a:pPr>
+            <a:r>
+              <a:rPr lang="en-US" sz="1700" b="1" dirty="0">
+                <a:solidFill>
+                  <a:srgbClr val="0B1E1B"/>
+                </a:solidFill>
+                <a:latin typeface="Cambria" pitchFamily="34" charset="0"/>
+                <a:ea typeface="Cambria" pitchFamily="34" charset="-122"/>
+                <a:cs typeface="Cambria" pitchFamily="34" charset="-120"/>
+              </a:rPr>
+              <a:t>Bila titik operasinya terreplikasi, menemukan satu kasus harganya kira-kira sekali pemeriksaan EarliPoint — seperempatnya bila satu tablet dirotasi ke empat Posyandu.</a:t>
+            </a:r>
+            <a:endParaRPr lang="en-US" sz="1700" dirty="0"/>
+          </a:p>
+        </p:txBody>
+      </p:sp>
+      <p:sp>
+        <p:nvSpPr>
+          <p:cNvPr id="20" name="Text 18"/>
+          <p:cNvSpPr/>
+          <p:nvPr/>
+        </p:nvSpPr>
+        <p:spPr>
+          <a:xfrm>
+            <a:off x="685800" y="5650992"/>
+            <a:ext cx="10424160" cy="274320"/>
+          </a:xfrm>
+          <a:prstGeom prst="rect">
+            <a:avLst/>
+          </a:prstGeom>
+          <a:noFill/>
+          <a:ln/>
+        </p:spPr>
+        <p:txBody>
+          <a:bodyPr wrap="square" lIns="0" tIns="0" rIns="0" bIns="0" rtlCol="0" anchor="ctr"/>
+          <a:lstStyle/>
+          <a:p>
+            <a:pPr indent="0" marL="0">
+              <a:buNone/>
+            </a:pPr>
+            <a:r>
+              <a:rPr lang="en-US" sz="1050" b="1" dirty="0">
+                <a:solidFill>
+                  <a:srgbClr val="14302B"/>
+                </a:solidFill>
+                <a:latin typeface="Calibri" pitchFamily="34" charset="0"/>
+                <a:ea typeface="Calibri" pitchFamily="34" charset="-122"/>
+                <a:cs typeface="Calibri" pitchFamily="34" charset="-120"/>
+              </a:rPr>
+              <a:t>Yang belum terukur: waktu kader, pelatihan, dukungan, cetak, dudukan, pengulangan sesi, pemeliharaan, penggantian perangkat, dan tindak lanjut klinis.</a:t>
+            </a:r>
+            <a:endParaRPr lang="en-US" sz="1050" dirty="0"/>
+          </a:p>
+        </p:txBody>
+      </p:sp>
+      <p:sp>
+        <p:nvSpPr>
+          <p:cNvPr id="21" name="Text 19"/>
+          <p:cNvSpPr/>
+          <p:nvPr/>
+        </p:nvSpPr>
+        <p:spPr>
+          <a:xfrm>
+            <a:off x="685800" y="5943600"/>
+            <a:ext cx="10424160" cy="274320"/>
+          </a:xfrm>
+          <a:prstGeom prst="rect">
+            <a:avLst/>
+          </a:prstGeom>
+          <a:noFill/>
+          <a:ln/>
+        </p:spPr>
+        <p:txBody>
+          <a:bodyPr wrap="square" lIns="0" tIns="0" rIns="0" bIns="0" rtlCol="0" anchor="ctr"/>
+          <a:lstStyle/>
+          <a:p>
+            <a:pPr indent="0" marL="0">
+              <a:buNone/>
+            </a:pPr>
+            <a:r>
+              <a:rPr lang="en-US" sz="1050" dirty="0">
+                <a:solidFill>
+                  <a:srgbClr val="4A635D"/>
+                </a:solidFill>
+                <a:latin typeface="Calibri" pitchFamily="34" charset="0"/>
+                <a:ea typeface="Calibri" pitchFamily="34" charset="-122"/>
+                <a:cs typeface="Calibri" pitchFamily="34" charset="-120"/>
+              </a:rPr>
+              <a:t>Asumsi dinyatakan di docs/dampak_dan_adopsi.md · kohort 1.000, prevalensi 1%, cakupan teknis 90%</a:t>
+            </a:r>
+            <a:endParaRPr lang="en-US" sz="1050" dirty="0"/>
           </a:p>
         </p:txBody>
       </p:sp>
@@ -8440,6 +8673,612 @@
 <file path=ppt/slides/slide15.xml><?xml version="1.0" encoding="utf-8"?>
 <p:sld xmlns:a="http://schemas.openxmlformats.org/drawingml/2006/main" xmlns:r="http://schemas.openxmlformats.org/officeDocument/2006/relationships" xmlns:p="http://schemas.openxmlformats.org/presentationml/2006/main">
   <p:cSld name="Slide 15">
+    <p:bg>
+      <p:bgPr>
+        <a:solidFill>
+          <a:srgbClr val="F7F9F8"/>
+        </a:solidFill>
+      </p:bgPr>
+    </p:bg>
+    <p:spTree>
+      <p:nvGrpSpPr>
+        <p:cNvPr id="1" name=""/>
+        <p:cNvGrpSpPr/>
+        <p:nvPr/>
+      </p:nvGrpSpPr>
+      <p:grpSpPr>
+        <a:xfrm>
+          <a:off x="0" y="0"/>
+          <a:ext cx="0" cy="0"/>
+          <a:chOff x="0" y="0"/>
+          <a:chExt cx="0" cy="0"/>
+        </a:xfrm>
+      </p:grpSpPr>
+      <p:sp>
+        <p:nvSpPr>
+          <p:cNvPr id="2" name="Shape 0"/>
+          <p:cNvSpPr/>
+          <p:nvPr/>
+        </p:nvSpPr>
+        <p:spPr>
+          <a:xfrm>
+            <a:off x="11268151" y="740664"/>
+            <a:ext cx="237744" cy="237744"/>
+          </a:xfrm>
+          <a:prstGeom prst="ellipse">
+            <a:avLst/>
+          </a:prstGeom>
+          <a:solidFill>
+            <a:srgbClr val="FFFFFF">
+              <a:alpha val="0"/>
+            </a:srgbClr>
+          </a:solidFill>
+          <a:ln w="25400">
+            <a:solidFill>
+              <a:srgbClr val="5CB9A3"/>
+            </a:solidFill>
+            <a:prstDash val="solid"/>
+          </a:ln>
+        </p:spPr>
+      </p:sp>
+      <p:sp>
+        <p:nvSpPr>
+          <p:cNvPr id="3" name="Shape 1"/>
+          <p:cNvSpPr/>
+          <p:nvPr/>
+        </p:nvSpPr>
+        <p:spPr>
+          <a:xfrm>
+            <a:off x="11339474" y="811987"/>
+            <a:ext cx="95098" cy="95098"/>
+          </a:xfrm>
+          <a:prstGeom prst="ellipse">
+            <a:avLst/>
+          </a:prstGeom>
+          <a:solidFill>
+            <a:srgbClr val="5CB9A3"/>
+          </a:solidFill>
+          <a:ln w="12700">
+            <a:solidFill>
+              <a:srgbClr val="333333"/>
+            </a:solidFill>
+            <a:prstDash val="solid"/>
+          </a:ln>
+        </p:spPr>
+      </p:sp>
+      <p:sp>
+        <p:nvSpPr>
+          <p:cNvPr id="4" name="Text 2"/>
+          <p:cNvSpPr/>
+          <p:nvPr/>
+        </p:nvSpPr>
+        <p:spPr>
+          <a:xfrm>
+            <a:off x="685800" y="685800"/>
+            <a:ext cx="10271455" cy="256032"/>
+          </a:xfrm>
+          <a:prstGeom prst="rect">
+            <a:avLst/>
+          </a:prstGeom>
+          <a:noFill/>
+          <a:ln/>
+        </p:spPr>
+        <p:txBody>
+          <a:bodyPr wrap="square" lIns="0" tIns="0" rIns="0" bIns="0" rtlCol="0" anchor="ctr"/>
+          <a:lstStyle/>
+          <a:p>
+            <a:pPr indent="0" marL="0">
+              <a:buNone/>
+            </a:pPr>
+            <a:r>
+              <a:rPr lang="en-US" sz="1200" b="1" spc="120" kern="0" dirty="0">
+                <a:solidFill>
+                  <a:srgbClr val="0D8271"/>
+                </a:solidFill>
+                <a:latin typeface="Calibri" pitchFamily="34" charset="0"/>
+                <a:ea typeface="Calibri" pitchFamily="34" charset="-122"/>
+                <a:cs typeface="Calibri" pitchFamily="34" charset="-120"/>
+              </a:rPr>
+              <a:t>Jalur adopsi</a:t>
+            </a:r>
+            <a:endParaRPr lang="en-US" sz="1200" dirty="0"/>
+          </a:p>
+        </p:txBody>
+      </p:sp>
+      <p:sp>
+        <p:nvSpPr>
+          <p:cNvPr id="5" name="Text 3"/>
+          <p:cNvSpPr/>
+          <p:nvPr/>
+        </p:nvSpPr>
+        <p:spPr>
+          <a:xfrm>
+            <a:off x="685800" y="996696"/>
+            <a:ext cx="10271455" cy="822960"/>
+          </a:xfrm>
+          <a:prstGeom prst="rect">
+            <a:avLst/>
+          </a:prstGeom>
+          <a:noFill/>
+          <a:ln/>
+        </p:spPr>
+        <p:txBody>
+          <a:bodyPr wrap="square" lIns="0" tIns="0" rIns="0" bIns="0" rtlCol="0" anchor="ctr"/>
+          <a:lstStyle/>
+          <a:p>
+            <a:pPr indent="0" marL="0">
+              <a:lnSpc>
+                <a:spcPts val="3600"/>
+              </a:lnSpc>
+              <a:buNone/>
+            </a:pPr>
+            <a:r>
+              <a:rPr lang="en-US" sz="3200" b="1" dirty="0">
+                <a:solidFill>
+                  <a:srgbClr val="0B1E1B"/>
+                </a:solidFill>
+                <a:latin typeface="Cambria" pitchFamily="34" charset="0"/>
+                <a:ea typeface="Cambria" pitchFamily="34" charset="-122"/>
+                <a:cs typeface="Cambria" pitchFamily="34" charset="-120"/>
+              </a:rPr>
+              <a:t>Ia menempel pada alur yang sudah jalan</a:t>
+            </a:r>
+            <a:endParaRPr lang="en-US" sz="3200" dirty="0"/>
+          </a:p>
+        </p:txBody>
+      </p:sp>
+      <p:sp>
+        <p:nvSpPr>
+          <p:cNvPr id="6" name="Text 4"/>
+          <p:cNvSpPr/>
+          <p:nvPr/>
+        </p:nvSpPr>
+        <p:spPr>
+          <a:xfrm>
+            <a:off x="685800" y="2103120"/>
+            <a:ext cx="10424160" cy="548640"/>
+          </a:xfrm>
+          <a:prstGeom prst="rect">
+            <a:avLst/>
+          </a:prstGeom>
+          <a:noFill/>
+          <a:ln/>
+        </p:spPr>
+        <p:txBody>
+          <a:bodyPr wrap="square" lIns="0" tIns="0" rIns="0" bIns="0" rtlCol="0" anchor="ctr"/>
+          <a:lstStyle/>
+          <a:p>
+            <a:pPr indent="0" marL="0">
+              <a:lnSpc>
+                <a:spcPts val="2100"/>
+              </a:lnSpc>
+              <a:buNone/>
+            </a:pPr>
+            <a:r>
+              <a:rPr lang="en-US" sz="1500" dirty="0">
+                <a:solidFill>
+                  <a:srgbClr val="14302B"/>
+                </a:solidFill>
+                <a:latin typeface="Calibri" pitchFamily="34" charset="0"/>
+                <a:ea typeface="Calibri" pitchFamily="34" charset="-122"/>
+                <a:cs typeface="Calibri" pitchFamily="34" charset="-120"/>
+              </a:rPr>
+              <a:t>Alat ini tidak menggantikan apa pun. Ia menempel: sesi 67 detik sesudah penimbangan bulanan, laporan satu halaman diserahkan ke Puskesmas, dibaca berdampingan dengan SDIDTK.</a:t>
+            </a:r>
+            <a:endParaRPr lang="en-US" sz="1500" dirty="0"/>
+          </a:p>
+        </p:txBody>
+      </p:sp>
+      <p:sp>
+        <p:nvSpPr>
+          <p:cNvPr id="7" name="Text 5"/>
+          <p:cNvSpPr/>
+          <p:nvPr/>
+        </p:nvSpPr>
+        <p:spPr>
+          <a:xfrm>
+            <a:off x="685800" y="2926080"/>
+            <a:ext cx="3291840" cy="1002890"/>
+          </a:xfrm>
+          <a:prstGeom prst="rect">
+            <a:avLst/>
+          </a:prstGeom>
+          <a:noFill/>
+          <a:ln/>
+        </p:spPr>
+        <p:txBody>
+          <a:bodyPr wrap="square" lIns="0" tIns="0" rIns="0" bIns="0" rtlCol="0" anchor="ctr"/>
+          <a:lstStyle/>
+          <a:p>
+            <a:pPr indent="0" marL="0">
+              <a:lnSpc>
+                <a:spcPts val="6800"/>
+              </a:lnSpc>
+              <a:buNone/>
+            </a:pPr>
+            <a:r>
+              <a:rPr lang="en-US" sz="6800" b="1" dirty="0">
+                <a:solidFill>
+                  <a:srgbClr val="0D8271"/>
+                </a:solidFill>
+                <a:latin typeface="Cambria" pitchFamily="34" charset="0"/>
+                <a:ea typeface="Cambria" pitchFamily="34" charset="-122"/>
+                <a:cs typeface="Cambria" pitchFamily="34" charset="-120"/>
+              </a:rPr>
+              <a:t>~700</a:t>
+            </a:r>
+            <a:endParaRPr lang="en-US" sz="6800" dirty="0"/>
+          </a:p>
+        </p:txBody>
+      </p:sp>
+      <p:sp>
+        <p:nvSpPr>
+          <p:cNvPr id="8" name="Text 6"/>
+          <p:cNvSpPr/>
+          <p:nvPr/>
+        </p:nvSpPr>
+        <p:spPr>
+          <a:xfrm>
+            <a:off x="685800" y="3983834"/>
+            <a:ext cx="3291840" cy="274320"/>
+          </a:xfrm>
+          <a:prstGeom prst="rect">
+            <a:avLst/>
+          </a:prstGeom>
+          <a:noFill/>
+          <a:ln/>
+        </p:spPr>
+        <p:txBody>
+          <a:bodyPr wrap="square" lIns="0" tIns="0" rIns="0" bIns="0" rtlCol="0" anchor="ctr"/>
+          <a:lstStyle/>
+          <a:p>
+            <a:pPr indent="0" marL="0">
+              <a:buNone/>
+            </a:pPr>
+            <a:r>
+              <a:rPr lang="en-US" sz="1400" b="1" dirty="0">
+                <a:solidFill>
+                  <a:srgbClr val="14302B"/>
+                </a:solidFill>
+                <a:latin typeface="Calibri" pitchFamily="34" charset="0"/>
+                <a:ea typeface="Calibri" pitchFamily="34" charset="-122"/>
+                <a:cs typeface="Calibri" pitchFamily="34" charset="-120"/>
+              </a:rPr>
+              <a:t>sesi dapat dinilai per tahun — hipotetis</a:t>
+            </a:r>
+            <a:endParaRPr lang="en-US" sz="1400" dirty="0"/>
+          </a:p>
+        </p:txBody>
+      </p:sp>
+      <p:sp>
+        <p:nvSpPr>
+          <p:cNvPr id="9" name="Text 7"/>
+          <p:cNvSpPr/>
+          <p:nvPr/>
+        </p:nvSpPr>
+        <p:spPr>
+          <a:xfrm>
+            <a:off x="685800" y="4294730"/>
+            <a:ext cx="3291840" cy="640080"/>
+          </a:xfrm>
+          <a:prstGeom prst="rect">
+            <a:avLst/>
+          </a:prstGeom>
+          <a:noFill/>
+          <a:ln/>
+        </p:spPr>
+        <p:txBody>
+          <a:bodyPr wrap="square" lIns="0" tIns="0" rIns="0" bIns="0" rtlCol="0" anchor="ctr"/>
+          <a:lstStyle/>
+          <a:p>
+            <a:pPr indent="0" marL="0">
+              <a:lnSpc>
+                <a:spcPts val="1500"/>
+              </a:lnSpc>
+              <a:buNone/>
+            </a:pPr>
+            <a:r>
+              <a:rPr lang="en-US" sz="1200" dirty="0">
+                <a:solidFill>
+                  <a:srgbClr val="4A635D"/>
+                </a:solidFill>
+                <a:latin typeface="Calibri" pitchFamily="34" charset="0"/>
+                <a:ea typeface="Calibri" pitchFamily="34" charset="-122"/>
+                <a:cs typeface="Calibri" pitchFamily="34" charset="-120"/>
+              </a:rPr>
+              <a:t>Aritmetika skala: 30 Posyandu × 40 anak layak, dikurangi attrition 42%. Skala rekrutmen, bukan rencana operasional.</a:t>
+            </a:r>
+            <a:endParaRPr lang="en-US" sz="1200" dirty="0"/>
+          </a:p>
+        </p:txBody>
+      </p:sp>
+      <p:sp>
+        <p:nvSpPr>
+          <p:cNvPr id="10" name="Text 8"/>
+          <p:cNvSpPr/>
+          <p:nvPr/>
+        </p:nvSpPr>
+        <p:spPr>
+          <a:xfrm>
+            <a:off x="4434840" y="2926080"/>
+            <a:ext cx="3291840" cy="1002890"/>
+          </a:xfrm>
+          <a:prstGeom prst="rect">
+            <a:avLst/>
+          </a:prstGeom>
+          <a:noFill/>
+          <a:ln/>
+        </p:spPr>
+        <p:txBody>
+          <a:bodyPr wrap="square" lIns="0" tIns="0" rIns="0" bIns="0" rtlCol="0" anchor="ctr"/>
+          <a:lstStyle/>
+          <a:p>
+            <a:pPr indent="0" marL="0">
+              <a:lnSpc>
+                <a:spcPts val="6800"/>
+              </a:lnSpc>
+              <a:buNone/>
+            </a:pPr>
+            <a:r>
+              <a:rPr lang="en-US" sz="6800" b="1" dirty="0">
+                <a:solidFill>
+                  <a:srgbClr val="4A635D"/>
+                </a:solidFill>
+                <a:latin typeface="Cambria" pitchFamily="34" charset="0"/>
+                <a:ea typeface="Cambria" pitchFamily="34" charset="-122"/>
+                <a:cs typeface="Cambria" pitchFamily="34" charset="-120"/>
+              </a:rPr>
+              <a:t>475</a:t>
+            </a:r>
+            <a:endParaRPr lang="en-US" sz="6800" dirty="0"/>
+          </a:p>
+        </p:txBody>
+      </p:sp>
+      <p:sp>
+        <p:nvSpPr>
+          <p:cNvPr id="11" name="Text 9"/>
+          <p:cNvSpPr/>
+          <p:nvPr/>
+        </p:nvSpPr>
+        <p:spPr>
+          <a:xfrm>
+            <a:off x="4434840" y="3983834"/>
+            <a:ext cx="3291840" cy="274320"/>
+          </a:xfrm>
+          <a:prstGeom prst="rect">
+            <a:avLst/>
+          </a:prstGeom>
+          <a:noFill/>
+          <a:ln/>
+        </p:spPr>
+        <p:txBody>
+          <a:bodyPr wrap="square" lIns="0" tIns="0" rIns="0" bIns="0" rtlCol="0" anchor="ctr"/>
+          <a:lstStyle/>
+          <a:p>
+            <a:pPr indent="0" marL="0">
+              <a:buNone/>
+            </a:pPr>
+            <a:r>
+              <a:rPr lang="en-US" sz="1400" b="1" dirty="0">
+                <a:solidFill>
+                  <a:srgbClr val="14302B"/>
+                </a:solidFill>
+                <a:latin typeface="Calibri" pitchFamily="34" charset="0"/>
+                <a:ea typeface="Calibri" pitchFamily="34" charset="-122"/>
+                <a:cs typeface="Calibri" pitchFamily="34" charset="-120"/>
+              </a:rPr>
+              <a:t>kohort Nature Medicine</a:t>
+            </a:r>
+            <a:endParaRPr lang="en-US" sz="1400" dirty="0"/>
+          </a:p>
+        </p:txBody>
+      </p:sp>
+      <p:sp>
+        <p:nvSpPr>
+          <p:cNvPr id="12" name="Text 10"/>
+          <p:cNvSpPr/>
+          <p:nvPr/>
+        </p:nvSpPr>
+        <p:spPr>
+          <a:xfrm>
+            <a:off x="4434840" y="4294730"/>
+            <a:ext cx="3291840" cy="640080"/>
+          </a:xfrm>
+          <a:prstGeom prst="rect">
+            <a:avLst/>
+          </a:prstGeom>
+          <a:noFill/>
+          <a:ln/>
+        </p:spPr>
+        <p:txBody>
+          <a:bodyPr wrap="square" lIns="0" tIns="0" rIns="0" bIns="0" rtlCol="0" anchor="ctr"/>
+          <a:lstStyle/>
+          <a:p>
+            <a:pPr indent="0" marL="0">
+              <a:lnSpc>
+                <a:spcPts val="1500"/>
+              </a:lnSpc>
+              <a:buNone/>
+            </a:pPr>
+            <a:r>
+              <a:rPr lang="en-US" sz="1200" dirty="0">
+                <a:solidFill>
+                  <a:srgbClr val="4A635D"/>
+                </a:solidFill>
+                <a:latin typeface="Calibri" pitchFamily="34" charset="0"/>
+                <a:ea typeface="Calibri" pitchFamily="34" charset="-122"/>
+                <a:cs typeface="Calibri" pitchFamily="34" charset="-120"/>
+              </a:rPr>
+              <a:t>Studi SenseToKnow yang jadi acuan kami.</a:t>
+            </a:r>
+            <a:endParaRPr lang="en-US" sz="1200" dirty="0"/>
+          </a:p>
+        </p:txBody>
+      </p:sp>
+      <p:sp>
+        <p:nvSpPr>
+          <p:cNvPr id="13" name="Shape 11"/>
+          <p:cNvSpPr/>
+          <p:nvPr/>
+        </p:nvSpPr>
+        <p:spPr>
+          <a:xfrm>
+            <a:off x="7909560" y="2880360"/>
+            <a:ext cx="3200400" cy="2194560"/>
+          </a:xfrm>
+          <a:prstGeom prst="roundRect">
+            <a:avLst>
+              <a:gd name="adj" fmla="val 2500"/>
+            </a:avLst>
+          </a:prstGeom>
+          <a:solidFill>
+            <a:srgbClr val="E4F2EE"/>
+          </a:solidFill>
+          <a:ln w="12700">
+            <a:solidFill>
+              <a:srgbClr val="E4F2EE"/>
+            </a:solidFill>
+            <a:prstDash val="solid"/>
+          </a:ln>
+        </p:spPr>
+      </p:sp>
+      <p:sp>
+        <p:nvSpPr>
+          <p:cNvPr id="14" name="Text 12"/>
+          <p:cNvSpPr/>
+          <p:nvPr/>
+        </p:nvSpPr>
+        <p:spPr>
+          <a:xfrm>
+            <a:off x="8138160" y="3127248"/>
+            <a:ext cx="2743200" cy="548640"/>
+          </a:xfrm>
+          <a:prstGeom prst="rect">
+            <a:avLst/>
+          </a:prstGeom>
+          <a:noFill/>
+          <a:ln/>
+        </p:spPr>
+        <p:txBody>
+          <a:bodyPr wrap="square" lIns="0" tIns="0" rIns="0" bIns="0" rtlCol="0" anchor="ctr"/>
+          <a:lstStyle/>
+          <a:p>
+            <a:pPr indent="0" marL="0">
+              <a:lnSpc>
+                <a:spcPts val="2100"/>
+              </a:lnSpc>
+              <a:buNone/>
+            </a:pPr>
+            <a:r>
+              <a:rPr lang="en-US" sz="1600" b="1" dirty="0">
+                <a:solidFill>
+                  <a:srgbClr val="0D8271"/>
+                </a:solidFill>
+                <a:latin typeface="Cambria" pitchFamily="34" charset="0"/>
+                <a:ea typeface="Cambria" pitchFamily="34" charset="-122"/>
+                <a:cs typeface="Cambria" pitchFamily="34" charset="-120"/>
+              </a:rPr>
+              <a:t>Tanpa biaya marginal perangkat lunak</a:t>
+            </a:r>
+            <a:endParaRPr lang="en-US" sz="1600" dirty="0"/>
+          </a:p>
+        </p:txBody>
+      </p:sp>
+      <p:sp>
+        <p:nvSpPr>
+          <p:cNvPr id="15" name="Text 13"/>
+          <p:cNvSpPr/>
+          <p:nvPr/>
+        </p:nvSpPr>
+        <p:spPr>
+          <a:xfrm>
+            <a:off x="8138160" y="3749040"/>
+            <a:ext cx="2743200" cy="1097280"/>
+          </a:xfrm>
+          <a:prstGeom prst="rect">
+            <a:avLst/>
+          </a:prstGeom>
+          <a:noFill/>
+          <a:ln/>
+        </p:spPr>
+        <p:txBody>
+          <a:bodyPr wrap="square" lIns="0" tIns="0" rIns="0" bIns="0" rtlCol="0" anchor="ctr"/>
+          <a:lstStyle/>
+          <a:p>
+            <a:pPr indent="0" marL="0">
+              <a:lnSpc>
+                <a:spcPts val="1800"/>
+              </a:lnSpc>
+              <a:buNone/>
+            </a:pPr>
+            <a:r>
+              <a:rPr lang="en-US" sz="1250" dirty="0">
+                <a:solidFill>
+                  <a:srgbClr val="14302B"/>
+                </a:solidFill>
+                <a:latin typeface="Calibri" pitchFamily="34" charset="0"/>
+                <a:ea typeface="Calibri" pitchFamily="34" charset="-122"/>
+                <a:cs typeface="Calibri" pitchFamily="34" charset="-120"/>
+              </a:rPr>
+              <a:t>PWA statis. Tidak ada server, basis data, maupun lisensi. Posyandu ke-1 dan ke-1.000 memuat berkas yang sama.</a:t>
+            </a:r>
+            <a:endParaRPr lang="en-US" sz="1250" dirty="0"/>
+          </a:p>
+        </p:txBody>
+      </p:sp>
+      <p:sp>
+        <p:nvSpPr>
+          <p:cNvPr id="16" name="Text 14"/>
+          <p:cNvSpPr/>
+          <p:nvPr/>
+        </p:nvSpPr>
+        <p:spPr>
+          <a:xfrm>
+            <a:off x="685800" y="5349240"/>
+            <a:ext cx="6766560" cy="640080"/>
+          </a:xfrm>
+          <a:prstGeom prst="rect">
+            <a:avLst/>
+          </a:prstGeom>
+          <a:noFill/>
+          <a:ln/>
+        </p:spPr>
+        <p:txBody>
+          <a:bodyPr wrap="square" lIns="0" tIns="0" rIns="0" bIns="0" rtlCol="0" anchor="ctr"/>
+          <a:lstStyle/>
+          <a:p>
+            <a:pPr indent="0" marL="0">
+              <a:lnSpc>
+                <a:spcPts val="2100"/>
+              </a:lnSpc>
+              <a:buNone/>
+            </a:pPr>
+            <a:r>
+              <a:rPr lang="en-US" sz="1500" i="1" dirty="0">
+                <a:solidFill>
+                  <a:srgbClr val="14302B"/>
+                </a:solidFill>
+                <a:latin typeface="Cambria" pitchFamily="34" charset="0"/>
+                <a:ea typeface="Cambria" pitchFamily="34" charset="-122"/>
+                <a:cs typeface="Cambria" pitchFamily="34" charset="-120"/>
+              </a:rPr>
+              <a:t>Skala kohort acuan Nature Medicine dapat dicapai dalam satu tahun studi di 30 Posyandu — sebagai penelitian prospektif berizin etik dengan acuan klinis buta, bukan sebagai penyebaran produk.</a:t>
+            </a:r>
+            <a:endParaRPr lang="en-US" sz="1500" dirty="0"/>
+          </a:p>
+        </p:txBody>
+      </p:sp>
+    </p:spTree>
+  </p:cSld>
+  <p:clrMapOvr>
+    <a:masterClrMapping/>
+  </p:clrMapOvr>
+</p:sld>
+</file>
+
+<file path=ppt/slides/slide16.xml><?xml version="1.0" encoding="utf-8"?>
+<p:sld xmlns:a="http://schemas.openxmlformats.org/drawingml/2006/main" xmlns:r="http://schemas.openxmlformats.org/officeDocument/2006/relationships" xmlns:p="http://schemas.openxmlformats.org/presentationml/2006/main">
+  <p:cSld name="Slide 16">
     <p:bg>
       <p:bgPr>
         <a:solidFill>
@@ -12116,6 +12955,1020 @@
     <p:bg>
       <p:bgPr>
         <a:solidFill>
+          <a:srgbClr val="F7F9F8"/>
+        </a:solidFill>
+      </p:bgPr>
+    </p:bg>
+    <p:spTree>
+      <p:nvGrpSpPr>
+        <p:cNvPr id="1" name=""/>
+        <p:cNvGrpSpPr/>
+        <p:nvPr/>
+      </p:nvGrpSpPr>
+      <p:grpSpPr>
+        <a:xfrm>
+          <a:off x="0" y="0"/>
+          <a:ext cx="0" cy="0"/>
+          <a:chOff x="0" y="0"/>
+          <a:chExt cx="0" cy="0"/>
+        </a:xfrm>
+      </p:grpSpPr>
+      <p:sp>
+        <p:nvSpPr>
+          <p:cNvPr id="2" name="Shape 0"/>
+          <p:cNvSpPr/>
+          <p:nvPr/>
+        </p:nvSpPr>
+        <p:spPr>
+          <a:xfrm>
+            <a:off x="11268151" y="740664"/>
+            <a:ext cx="237744" cy="237744"/>
+          </a:xfrm>
+          <a:prstGeom prst="ellipse">
+            <a:avLst/>
+          </a:prstGeom>
+          <a:solidFill>
+            <a:srgbClr val="FFFFFF">
+              <a:alpha val="0"/>
+            </a:srgbClr>
+          </a:solidFill>
+          <a:ln w="25400">
+            <a:solidFill>
+              <a:srgbClr val="5CB9A3"/>
+            </a:solidFill>
+            <a:prstDash val="solid"/>
+          </a:ln>
+        </p:spPr>
+      </p:sp>
+      <p:sp>
+        <p:nvSpPr>
+          <p:cNvPr id="3" name="Shape 1"/>
+          <p:cNvSpPr/>
+          <p:nvPr/>
+        </p:nvSpPr>
+        <p:spPr>
+          <a:xfrm>
+            <a:off x="11339474" y="811987"/>
+            <a:ext cx="95098" cy="95098"/>
+          </a:xfrm>
+          <a:prstGeom prst="ellipse">
+            <a:avLst/>
+          </a:prstGeom>
+          <a:solidFill>
+            <a:srgbClr val="5CB9A3"/>
+          </a:solidFill>
+          <a:ln w="12700">
+            <a:solidFill>
+              <a:srgbClr val="333333"/>
+            </a:solidFill>
+            <a:prstDash val="solid"/>
+          </a:ln>
+        </p:spPr>
+      </p:sp>
+      <p:sp>
+        <p:nvSpPr>
+          <p:cNvPr id="4" name="Text 2"/>
+          <p:cNvSpPr/>
+          <p:nvPr/>
+        </p:nvSpPr>
+        <p:spPr>
+          <a:xfrm>
+            <a:off x="685800" y="685800"/>
+            <a:ext cx="10271455" cy="256032"/>
+          </a:xfrm>
+          <a:prstGeom prst="rect">
+            <a:avLst/>
+          </a:prstGeom>
+          <a:noFill/>
+          <a:ln/>
+        </p:spPr>
+        <p:txBody>
+          <a:bodyPr wrap="square" lIns="0" tIns="0" rIns="0" bIns="0" rtlCol="0" anchor="ctr"/>
+          <a:lstStyle/>
+          <a:p>
+            <a:pPr indent="0" marL="0">
+              <a:buNone/>
+            </a:pPr>
+            <a:r>
+              <a:rPr lang="en-US" sz="1200" b="1" spc="120" kern="0" dirty="0">
+                <a:solidFill>
+                  <a:srgbClr val="0D8271"/>
+                </a:solidFill>
+                <a:latin typeface="Calibri" pitchFamily="34" charset="0"/>
+                <a:ea typeface="Calibri" pitchFamily="34" charset="-122"/>
+                <a:cs typeface="Calibri" pitchFamily="34" charset="-120"/>
+              </a:rPr>
+              <a:t>Bukti lapangan</a:t>
+            </a:r>
+            <a:endParaRPr lang="en-US" sz="1200" dirty="0"/>
+          </a:p>
+        </p:txBody>
+      </p:sp>
+      <p:sp>
+        <p:nvSpPr>
+          <p:cNvPr id="5" name="Text 3"/>
+          <p:cNvSpPr/>
+          <p:nvPr/>
+        </p:nvSpPr>
+        <p:spPr>
+          <a:xfrm>
+            <a:off x="685800" y="996696"/>
+            <a:ext cx="10271455" cy="822960"/>
+          </a:xfrm>
+          <a:prstGeom prst="rect">
+            <a:avLst/>
+          </a:prstGeom>
+          <a:noFill/>
+          <a:ln/>
+        </p:spPr>
+        <p:txBody>
+          <a:bodyPr wrap="square" lIns="0" tIns="0" rIns="0" bIns="0" rtlCol="0" anchor="ctr"/>
+          <a:lstStyle/>
+          <a:p>
+            <a:pPr indent="0" marL="0">
+              <a:lnSpc>
+                <a:spcPts val="3600"/>
+              </a:lnSpc>
+              <a:buNone/>
+            </a:pPr>
+            <a:r>
+              <a:rPr lang="en-US" sz="3200" b="1" dirty="0">
+                <a:solidFill>
+                  <a:srgbClr val="0B1E1B"/>
+                </a:solidFill>
+                <a:latin typeface="Cambria" pitchFamily="34" charset="0"/>
+                <a:ea typeface="Cambria" pitchFamily="34" charset="-122"/>
+                <a:cs typeface="Cambria" pitchFamily="34" charset="-120"/>
+              </a:rPr>
+              <a:t>Ini bukan simulasi — 123 sesi, di tablet sungguhan, di cahaya sungguhan</a:t>
+            </a:r>
+            <a:endParaRPr lang="en-US" sz="3200" dirty="0"/>
+          </a:p>
+        </p:txBody>
+      </p:sp>
+      <p:sp>
+        <p:nvSpPr>
+          <p:cNvPr id="6" name="Text 4"/>
+          <p:cNvSpPr/>
+          <p:nvPr/>
+        </p:nvSpPr>
+        <p:spPr>
+          <a:xfrm>
+            <a:off x="685800" y="2148840"/>
+            <a:ext cx="2468880" cy="589935"/>
+          </a:xfrm>
+          <a:prstGeom prst="rect">
+            <a:avLst/>
+          </a:prstGeom>
+          <a:noFill/>
+          <a:ln/>
+        </p:spPr>
+        <p:txBody>
+          <a:bodyPr wrap="square" lIns="0" tIns="0" rIns="0" bIns="0" rtlCol="0" anchor="ctr"/>
+          <a:lstStyle/>
+          <a:p>
+            <a:pPr indent="0" marL="0">
+              <a:lnSpc>
+                <a:spcPts val="4000"/>
+              </a:lnSpc>
+              <a:buNone/>
+            </a:pPr>
+            <a:r>
+              <a:rPr lang="en-US" sz="4000" b="1" dirty="0">
+                <a:solidFill>
+                  <a:srgbClr val="0B1E1B"/>
+                </a:solidFill>
+                <a:latin typeface="Cambria" pitchFamily="34" charset="0"/>
+                <a:ea typeface="Cambria" pitchFamily="34" charset="-122"/>
+                <a:cs typeface="Cambria" pitchFamily="34" charset="-120"/>
+              </a:rPr>
+              <a:t>123</a:t>
+            </a:r>
+            <a:endParaRPr lang="en-US" sz="4000" dirty="0"/>
+          </a:p>
+        </p:txBody>
+      </p:sp>
+      <p:sp>
+        <p:nvSpPr>
+          <p:cNvPr id="7" name="Text 5"/>
+          <p:cNvSpPr/>
+          <p:nvPr/>
+        </p:nvSpPr>
+        <p:spPr>
+          <a:xfrm>
+            <a:off x="685800" y="2793639"/>
+            <a:ext cx="2468880" cy="274320"/>
+          </a:xfrm>
+          <a:prstGeom prst="rect">
+            <a:avLst/>
+          </a:prstGeom>
+          <a:noFill/>
+          <a:ln/>
+        </p:spPr>
+        <p:txBody>
+          <a:bodyPr wrap="square" lIns="0" tIns="0" rIns="0" bIns="0" rtlCol="0" anchor="ctr"/>
+          <a:lstStyle/>
+          <a:p>
+            <a:pPr indent="0" marL="0">
+              <a:buNone/>
+            </a:pPr>
+            <a:r>
+              <a:rPr lang="en-US" sz="1400" b="1" dirty="0">
+                <a:solidFill>
+                  <a:srgbClr val="14302B"/>
+                </a:solidFill>
+                <a:latin typeface="Calibri" pitchFamily="34" charset="0"/>
+                <a:ea typeface="Calibri" pitchFamily="34" charset="-122"/>
+                <a:cs typeface="Calibri" pitchFamily="34" charset="-120"/>
+              </a:rPr>
+              <a:t>sesi ujung-ke-ujung</a:t>
+            </a:r>
+            <a:endParaRPr lang="en-US" sz="1400" dirty="0"/>
+          </a:p>
+        </p:txBody>
+      </p:sp>
+      <p:sp>
+        <p:nvSpPr>
+          <p:cNvPr id="8" name="Text 6"/>
+          <p:cNvSpPr/>
+          <p:nvPr/>
+        </p:nvSpPr>
+        <p:spPr>
+          <a:xfrm>
+            <a:off x="685800" y="3104535"/>
+            <a:ext cx="2468880" cy="640080"/>
+          </a:xfrm>
+          <a:prstGeom prst="rect">
+            <a:avLst/>
+          </a:prstGeom>
+          <a:noFill/>
+          <a:ln/>
+        </p:spPr>
+        <p:txBody>
+          <a:bodyPr wrap="square" lIns="0" tIns="0" rIns="0" bIns="0" rtlCol="0" anchor="ctr"/>
+          <a:lstStyle/>
+          <a:p>
+            <a:pPr indent="0" marL="0">
+              <a:lnSpc>
+                <a:spcPts val="1500"/>
+              </a:lnSpc>
+              <a:buNone/>
+            </a:pPr>
+            <a:r>
+              <a:rPr lang="en-US" sz="1200" dirty="0">
+                <a:solidFill>
+                  <a:srgbClr val="4A635D"/>
+                </a:solidFill>
+                <a:latin typeface="Calibri" pitchFamily="34" charset="0"/>
+                <a:ea typeface="Calibri" pitchFamily="34" charset="-122"/>
+                <a:cs typeface="Calibri" pitchFamily="34" charset="-120"/>
+              </a:rPr>
+              <a:t>100 Gate A + 23 kontrol positif</a:t>
+            </a:r>
+            <a:endParaRPr lang="en-US" sz="1200" dirty="0"/>
+          </a:p>
+        </p:txBody>
+      </p:sp>
+      <p:sp>
+        <p:nvSpPr>
+          <p:cNvPr id="9" name="Text 7"/>
+          <p:cNvSpPr/>
+          <p:nvPr/>
+        </p:nvSpPr>
+        <p:spPr>
+          <a:xfrm>
+            <a:off x="3383280" y="2148840"/>
+            <a:ext cx="2468880" cy="589935"/>
+          </a:xfrm>
+          <a:prstGeom prst="rect">
+            <a:avLst/>
+          </a:prstGeom>
+          <a:noFill/>
+          <a:ln/>
+        </p:spPr>
+        <p:txBody>
+          <a:bodyPr wrap="square" lIns="0" tIns="0" rIns="0" bIns="0" rtlCol="0" anchor="ctr"/>
+          <a:lstStyle/>
+          <a:p>
+            <a:pPr indent="0" marL="0">
+              <a:lnSpc>
+                <a:spcPts val="4000"/>
+              </a:lnSpc>
+              <a:buNone/>
+            </a:pPr>
+            <a:r>
+              <a:rPr lang="en-US" sz="4000" b="1" dirty="0">
+                <a:solidFill>
+                  <a:srgbClr val="0B1E1B"/>
+                </a:solidFill>
+                <a:latin typeface="Cambria" pitchFamily="34" charset="0"/>
+                <a:ea typeface="Cambria" pitchFamily="34" charset="-122"/>
+                <a:cs typeface="Cambria" pitchFamily="34" charset="-120"/>
+              </a:rPr>
+              <a:t>37</a:t>
+            </a:r>
+            <a:endParaRPr lang="en-US" sz="4000" dirty="0"/>
+          </a:p>
+        </p:txBody>
+      </p:sp>
+      <p:sp>
+        <p:nvSpPr>
+          <p:cNvPr id="10" name="Text 8"/>
+          <p:cNvSpPr/>
+          <p:nvPr/>
+        </p:nvSpPr>
+        <p:spPr>
+          <a:xfrm>
+            <a:off x="3383280" y="2793639"/>
+            <a:ext cx="2468880" cy="274320"/>
+          </a:xfrm>
+          <a:prstGeom prst="rect">
+            <a:avLst/>
+          </a:prstGeom>
+          <a:noFill/>
+          <a:ln/>
+        </p:spPr>
+        <p:txBody>
+          <a:bodyPr wrap="square" lIns="0" tIns="0" rIns="0" bIns="0" rtlCol="0" anchor="ctr"/>
+          <a:lstStyle/>
+          <a:p>
+            <a:pPr indent="0" marL="0">
+              <a:buNone/>
+            </a:pPr>
+            <a:r>
+              <a:rPr lang="en-US" sz="1400" b="1" dirty="0">
+                <a:solidFill>
+                  <a:srgbClr val="14302B"/>
+                </a:solidFill>
+                <a:latin typeface="Calibri" pitchFamily="34" charset="0"/>
+                <a:ea typeface="Calibri" pitchFamily="34" charset="-122"/>
+                <a:cs typeface="Calibri" pitchFamily="34" charset="-120"/>
+              </a:rPr>
+              <a:t>dewasa menyetujui</a:t>
+            </a:r>
+            <a:endParaRPr lang="en-US" sz="1400" dirty="0"/>
+          </a:p>
+        </p:txBody>
+      </p:sp>
+      <p:sp>
+        <p:nvSpPr>
+          <p:cNvPr id="11" name="Text 9"/>
+          <p:cNvSpPr/>
+          <p:nvPr/>
+        </p:nvSpPr>
+        <p:spPr>
+          <a:xfrm>
+            <a:off x="3383280" y="3104535"/>
+            <a:ext cx="2468880" cy="640080"/>
+          </a:xfrm>
+          <a:prstGeom prst="rect">
+            <a:avLst/>
+          </a:prstGeom>
+          <a:noFill/>
+          <a:ln/>
+        </p:spPr>
+        <p:txBody>
+          <a:bodyPr wrap="square" lIns="0" tIns="0" rIns="0" bIns="0" rtlCol="0" anchor="ctr"/>
+          <a:lstStyle/>
+          <a:p>
+            <a:pPr indent="0" marL="0">
+              <a:lnSpc>
+                <a:spcPts val="1500"/>
+              </a:lnSpc>
+              <a:buNone/>
+            </a:pPr>
+            <a:r>
+              <a:rPr lang="en-US" sz="1200" dirty="0">
+                <a:solidFill>
+                  <a:srgbClr val="4A635D"/>
+                </a:solidFill>
+                <a:latin typeface="Calibri" pitchFamily="34" charset="0"/>
+                <a:ea typeface="Calibri" pitchFamily="34" charset="-122"/>
+                <a:cs typeface="Calibri" pitchFamily="34" charset="-120"/>
+              </a:rPr>
+              <a:t>25 Gate A + 12 kontrol positif</a:t>
+            </a:r>
+            <a:endParaRPr lang="en-US" sz="1200" dirty="0"/>
+          </a:p>
+        </p:txBody>
+      </p:sp>
+      <p:sp>
+        <p:nvSpPr>
+          <p:cNvPr id="12" name="Text 10"/>
+          <p:cNvSpPr/>
+          <p:nvPr/>
+        </p:nvSpPr>
+        <p:spPr>
+          <a:xfrm>
+            <a:off x="6080760" y="2148840"/>
+            <a:ext cx="2468880" cy="589935"/>
+          </a:xfrm>
+          <a:prstGeom prst="rect">
+            <a:avLst/>
+          </a:prstGeom>
+          <a:noFill/>
+          <a:ln/>
+        </p:spPr>
+        <p:txBody>
+          <a:bodyPr wrap="square" lIns="0" tIns="0" rIns="0" bIns="0" rtlCol="0" anchor="ctr"/>
+          <a:lstStyle/>
+          <a:p>
+            <a:pPr indent="0" marL="0">
+              <a:lnSpc>
+                <a:spcPts val="4000"/>
+              </a:lnSpc>
+              <a:buNone/>
+            </a:pPr>
+            <a:r>
+              <a:rPr lang="en-US" sz="4000" b="1" dirty="0">
+                <a:solidFill>
+                  <a:srgbClr val="0B1E1B"/>
+                </a:solidFill>
+                <a:latin typeface="Cambria" pitchFamily="34" charset="0"/>
+                <a:ea typeface="Cambria" pitchFamily="34" charset="-122"/>
+                <a:cs typeface="Cambria" pitchFamily="34" charset="-120"/>
+              </a:rPr>
+              <a:t>3</a:t>
+            </a:r>
+            <a:endParaRPr lang="en-US" sz="4000" dirty="0"/>
+          </a:p>
+        </p:txBody>
+      </p:sp>
+      <p:sp>
+        <p:nvSpPr>
+          <p:cNvPr id="13" name="Text 11"/>
+          <p:cNvSpPr/>
+          <p:nvPr/>
+        </p:nvSpPr>
+        <p:spPr>
+          <a:xfrm>
+            <a:off x="6080760" y="2793639"/>
+            <a:ext cx="2468880" cy="274320"/>
+          </a:xfrm>
+          <a:prstGeom prst="rect">
+            <a:avLst/>
+          </a:prstGeom>
+          <a:noFill/>
+          <a:ln/>
+        </p:spPr>
+        <p:txBody>
+          <a:bodyPr wrap="square" lIns="0" tIns="0" rIns="0" bIns="0" rtlCol="0" anchor="ctr"/>
+          <a:lstStyle/>
+          <a:p>
+            <a:pPr indent="0" marL="0">
+              <a:buNone/>
+            </a:pPr>
+            <a:r>
+              <a:rPr lang="en-US" sz="1400" b="1" dirty="0">
+                <a:solidFill>
+                  <a:srgbClr val="14302B"/>
+                </a:solidFill>
+                <a:latin typeface="Calibri" pitchFamily="34" charset="0"/>
+                <a:ea typeface="Calibri" pitchFamily="34" charset="-122"/>
+                <a:cs typeface="Calibri" pitchFamily="34" charset="-120"/>
+              </a:rPr>
+              <a:t>tablet Android kelas menengah</a:t>
+            </a:r>
+            <a:endParaRPr lang="en-US" sz="1400" dirty="0"/>
+          </a:p>
+        </p:txBody>
+      </p:sp>
+      <p:sp>
+        <p:nvSpPr>
+          <p:cNvPr id="14" name="Text 12"/>
+          <p:cNvSpPr/>
+          <p:nvPr/>
+        </p:nvSpPr>
+        <p:spPr>
+          <a:xfrm>
+            <a:off x="6080760" y="3104535"/>
+            <a:ext cx="2468880" cy="640080"/>
+          </a:xfrm>
+          <a:prstGeom prst="rect">
+            <a:avLst/>
+          </a:prstGeom>
+          <a:noFill/>
+          <a:ln/>
+        </p:spPr>
+        <p:txBody>
+          <a:bodyPr wrap="square" lIns="0" tIns="0" rIns="0" bIns="0" rtlCol="0" anchor="ctr"/>
+          <a:lstStyle/>
+          <a:p>
+            <a:pPr indent="0" marL="0">
+              <a:lnSpc>
+                <a:spcPts val="1500"/>
+              </a:lnSpc>
+              <a:buNone/>
+            </a:pPr>
+            <a:r>
+              <a:rPr lang="en-US" sz="1200" dirty="0">
+                <a:solidFill>
+                  <a:srgbClr val="4A635D"/>
+                </a:solidFill>
+                <a:latin typeface="Calibri" pitchFamily="34" charset="0"/>
+                <a:ea typeface="Calibri" pitchFamily="34" charset="-122"/>
+                <a:cs typeface="Calibri" pitchFamily="34" charset="-120"/>
+              </a:rPr>
+              <a:t>Galaxy Tab A8 · Lenovo Tab M10 · Redmi Note 13</a:t>
+            </a:r>
+            <a:endParaRPr lang="en-US" sz="1200" dirty="0"/>
+          </a:p>
+        </p:txBody>
+      </p:sp>
+      <p:sp>
+        <p:nvSpPr>
+          <p:cNvPr id="15" name="Text 13"/>
+          <p:cNvSpPr/>
+          <p:nvPr/>
+        </p:nvSpPr>
+        <p:spPr>
+          <a:xfrm>
+            <a:off x="8778240" y="2148840"/>
+            <a:ext cx="2468880" cy="589935"/>
+          </a:xfrm>
+          <a:prstGeom prst="rect">
+            <a:avLst/>
+          </a:prstGeom>
+          <a:noFill/>
+          <a:ln/>
+        </p:spPr>
+        <p:txBody>
+          <a:bodyPr wrap="square" lIns="0" tIns="0" rIns="0" bIns="0" rtlCol="0" anchor="ctr"/>
+          <a:lstStyle/>
+          <a:p>
+            <a:pPr indent="0" marL="0">
+              <a:lnSpc>
+                <a:spcPts val="4000"/>
+              </a:lnSpc>
+              <a:buNone/>
+            </a:pPr>
+            <a:r>
+              <a:rPr lang="en-US" sz="4000" b="1" dirty="0">
+                <a:solidFill>
+                  <a:srgbClr val="0D8271"/>
+                </a:solidFill>
+                <a:latin typeface="Cambria" pitchFamily="34" charset="0"/>
+                <a:ea typeface="Cambria" pitchFamily="34" charset="-122"/>
+                <a:cs typeface="Cambria" pitchFamily="34" charset="-120"/>
+              </a:rPr>
+              <a:t>6</a:t>
+            </a:r>
+            <a:endParaRPr lang="en-US" sz="4000" dirty="0"/>
+          </a:p>
+        </p:txBody>
+      </p:sp>
+      <p:sp>
+        <p:nvSpPr>
+          <p:cNvPr id="16" name="Text 14"/>
+          <p:cNvSpPr/>
+          <p:nvPr/>
+        </p:nvSpPr>
+        <p:spPr>
+          <a:xfrm>
+            <a:off x="8778240" y="2793639"/>
+            <a:ext cx="2468880" cy="274320"/>
+          </a:xfrm>
+          <a:prstGeom prst="rect">
+            <a:avLst/>
+          </a:prstGeom>
+          <a:noFill/>
+          <a:ln/>
+        </p:spPr>
+        <p:txBody>
+          <a:bodyPr wrap="square" lIns="0" tIns="0" rIns="0" bIns="0" rtlCol="0" anchor="ctr"/>
+          <a:lstStyle/>
+          <a:p>
+            <a:pPr indent="0" marL="0">
+              <a:buNone/>
+            </a:pPr>
+            <a:r>
+              <a:rPr lang="en-US" sz="1400" b="1" dirty="0">
+                <a:solidFill>
+                  <a:srgbClr val="14302B"/>
+                </a:solidFill>
+                <a:latin typeface="Calibri" pitchFamily="34" charset="0"/>
+                <a:ea typeface="Calibri" pitchFamily="34" charset="-122"/>
+                <a:cs typeface="Calibri" pitchFamily="34" charset="-120"/>
+              </a:rPr>
+              <a:t>kondisi lingkungan</a:t>
+            </a:r>
+            <a:endParaRPr lang="en-US" sz="1400" dirty="0"/>
+          </a:p>
+        </p:txBody>
+      </p:sp>
+      <p:sp>
+        <p:nvSpPr>
+          <p:cNvPr id="17" name="Text 15"/>
+          <p:cNvSpPr/>
+          <p:nvPr/>
+        </p:nvSpPr>
+        <p:spPr>
+          <a:xfrm>
+            <a:off x="8778240" y="3104535"/>
+            <a:ext cx="2468880" cy="640080"/>
+          </a:xfrm>
+          <a:prstGeom prst="rect">
+            <a:avLst/>
+          </a:prstGeom>
+          <a:noFill/>
+          <a:ln/>
+        </p:spPr>
+        <p:txBody>
+          <a:bodyPr wrap="square" lIns="0" tIns="0" rIns="0" bIns="0" rtlCol="0" anchor="ctr"/>
+          <a:lstStyle/>
+          <a:p>
+            <a:pPr indent="0" marL="0">
+              <a:lnSpc>
+                <a:spcPts val="1500"/>
+              </a:lnSpc>
+              <a:buNone/>
+            </a:pPr>
+            <a:r>
+              <a:rPr lang="en-US" sz="1200" dirty="0">
+                <a:solidFill>
+                  <a:srgbClr val="4A635D"/>
+                </a:solidFill>
+                <a:latin typeface="Calibri" pitchFamily="34" charset="0"/>
+                <a:ea typeface="Calibri" pitchFamily="34" charset="-122"/>
+                <a:cs typeface="Calibri" pitchFamily="34" charset="-120"/>
+              </a:rPr>
+              <a:t>cahaya redup, normal, campuran × berkacamata dan tidak</a:t>
+            </a:r>
+            <a:endParaRPr lang="en-US" sz="1200" dirty="0"/>
+          </a:p>
+        </p:txBody>
+      </p:sp>
+      <p:sp>
+        <p:nvSpPr>
+          <p:cNvPr id="18" name="Shape 16"/>
+          <p:cNvSpPr/>
+          <p:nvPr/>
+        </p:nvSpPr>
+        <p:spPr>
+          <a:xfrm>
+            <a:off x="685800" y="3611880"/>
+            <a:ext cx="3291840" cy="1874520"/>
+          </a:xfrm>
+          <a:prstGeom prst="roundRect">
+            <a:avLst>
+              <a:gd name="adj" fmla="val 2927"/>
+            </a:avLst>
+          </a:prstGeom>
+          <a:solidFill>
+            <a:srgbClr val="E4F2EE"/>
+          </a:solidFill>
+          <a:ln w="12700">
+            <a:solidFill>
+              <a:srgbClr val="E4F2EE"/>
+            </a:solidFill>
+            <a:prstDash val="solid"/>
+          </a:ln>
+        </p:spPr>
+      </p:sp>
+      <p:sp>
+        <p:nvSpPr>
+          <p:cNvPr id="19" name="Text 17"/>
+          <p:cNvSpPr/>
+          <p:nvPr/>
+        </p:nvSpPr>
+        <p:spPr>
+          <a:xfrm>
+            <a:off x="685800" y="4411980"/>
+            <a:ext cx="3291840" cy="274320"/>
+          </a:xfrm>
+          <a:prstGeom prst="rect">
+            <a:avLst/>
+          </a:prstGeom>
+          <a:noFill/>
+          <a:ln/>
+        </p:spPr>
+        <p:txBody>
+          <a:bodyPr wrap="square" lIns="0" tIns="0" rIns="0" bIns="0" rtlCol="0" anchor="ctr"/>
+          <a:lstStyle/>
+          <a:p>
+            <a:pPr algn="ctr" indent="0" marL="0">
+              <a:buNone/>
+            </a:pPr>
+            <a:r>
+              <a:rPr lang="en-US" sz="1000" dirty="0">
+                <a:solidFill>
+                  <a:srgbClr val="0D8271"/>
+                </a:solidFill>
+                <a:latin typeface="Calibri" pitchFamily="34" charset="0"/>
+                <a:ea typeface="Calibri" pitchFamily="34" charset="-122"/>
+                <a:cs typeface="Calibri" pitchFamily="34" charset="-120"/>
+              </a:rPr>
+              <a:t>foto/01-sesi.jpg</a:t>
+            </a:r>
+            <a:endParaRPr lang="en-US" sz="1000" dirty="0"/>
+          </a:p>
+        </p:txBody>
+      </p:sp>
+      <p:sp>
+        <p:nvSpPr>
+          <p:cNvPr id="20" name="Text 18"/>
+          <p:cNvSpPr/>
+          <p:nvPr/>
+        </p:nvSpPr>
+        <p:spPr>
+          <a:xfrm>
+            <a:off x="685800" y="5541264"/>
+            <a:ext cx="3291840" cy="274320"/>
+          </a:xfrm>
+          <a:prstGeom prst="rect">
+            <a:avLst/>
+          </a:prstGeom>
+          <a:noFill/>
+          <a:ln/>
+        </p:spPr>
+        <p:txBody>
+          <a:bodyPr wrap="square" lIns="0" tIns="0" rIns="0" bIns="0" rtlCol="0" anchor="ctr"/>
+          <a:lstStyle/>
+          <a:p>
+            <a:pPr indent="0" marL="0">
+              <a:buNone/>
+            </a:pPr>
+            <a:r>
+              <a:rPr lang="en-US" sz="1000" dirty="0">
+                <a:solidFill>
+                  <a:srgbClr val="4A635D"/>
+                </a:solidFill>
+                <a:latin typeface="Calibri" pitchFamily="34" charset="0"/>
+                <a:ea typeface="Calibri" pitchFamily="34" charset="-122"/>
+                <a:cs typeface="Calibri" pitchFamily="34" charset="-120"/>
+              </a:rPr>
+              <a:t>Sesi berjalan pada dudukan tablet</a:t>
+            </a:r>
+            <a:endParaRPr lang="en-US" sz="1000" dirty="0"/>
+          </a:p>
+        </p:txBody>
+      </p:sp>
+      <p:sp>
+        <p:nvSpPr>
+          <p:cNvPr id="21" name="Shape 19"/>
+          <p:cNvSpPr/>
+          <p:nvPr/>
+        </p:nvSpPr>
+        <p:spPr>
+          <a:xfrm>
+            <a:off x="4251960" y="3611880"/>
+            <a:ext cx="3291840" cy="1874520"/>
+          </a:xfrm>
+          <a:prstGeom prst="roundRect">
+            <a:avLst>
+              <a:gd name="adj" fmla="val 2927"/>
+            </a:avLst>
+          </a:prstGeom>
+          <a:solidFill>
+            <a:srgbClr val="E4F2EE"/>
+          </a:solidFill>
+          <a:ln w="12700">
+            <a:solidFill>
+              <a:srgbClr val="E4F2EE"/>
+            </a:solidFill>
+            <a:prstDash val="solid"/>
+          </a:ln>
+        </p:spPr>
+      </p:sp>
+      <p:sp>
+        <p:nvSpPr>
+          <p:cNvPr id="22" name="Text 20"/>
+          <p:cNvSpPr/>
+          <p:nvPr/>
+        </p:nvSpPr>
+        <p:spPr>
+          <a:xfrm>
+            <a:off x="4251960" y="4411980"/>
+            <a:ext cx="3291840" cy="274320"/>
+          </a:xfrm>
+          <a:prstGeom prst="rect">
+            <a:avLst/>
+          </a:prstGeom>
+          <a:noFill/>
+          <a:ln/>
+        </p:spPr>
+        <p:txBody>
+          <a:bodyPr wrap="square" lIns="0" tIns="0" rIns="0" bIns="0" rtlCol="0" anchor="ctr"/>
+          <a:lstStyle/>
+          <a:p>
+            <a:pPr algn="ctr" indent="0" marL="0">
+              <a:buNone/>
+            </a:pPr>
+            <a:r>
+              <a:rPr lang="en-US" sz="1000" dirty="0">
+                <a:solidFill>
+                  <a:srgbClr val="0D8271"/>
+                </a:solidFill>
+                <a:latin typeface="Calibri" pitchFamily="34" charset="0"/>
+                <a:ea typeface="Calibri" pitchFamily="34" charset="-122"/>
+                <a:cs typeface="Calibri" pitchFamily="34" charset="-120"/>
+              </a:rPr>
+              <a:t>foto/02-perangkat.jpg</a:t>
+            </a:r>
+            <a:endParaRPr lang="en-US" sz="1000" dirty="0"/>
+          </a:p>
+        </p:txBody>
+      </p:sp>
+      <p:sp>
+        <p:nvSpPr>
+          <p:cNvPr id="23" name="Text 21"/>
+          <p:cNvSpPr/>
+          <p:nvPr/>
+        </p:nvSpPr>
+        <p:spPr>
+          <a:xfrm>
+            <a:off x="4251960" y="5541264"/>
+            <a:ext cx="3291840" cy="274320"/>
+          </a:xfrm>
+          <a:prstGeom prst="rect">
+            <a:avLst/>
+          </a:prstGeom>
+          <a:noFill/>
+          <a:ln/>
+        </p:spPr>
+        <p:txBody>
+          <a:bodyPr wrap="square" lIns="0" tIns="0" rIns="0" bIns="0" rtlCol="0" anchor="ctr"/>
+          <a:lstStyle/>
+          <a:p>
+            <a:pPr indent="0" marL="0">
+              <a:buNone/>
+            </a:pPr>
+            <a:r>
+              <a:rPr lang="en-US" sz="1000" dirty="0">
+                <a:solidFill>
+                  <a:srgbClr val="4A635D"/>
+                </a:solidFill>
+                <a:latin typeface="Calibri" pitchFamily="34" charset="0"/>
+                <a:ea typeface="Calibri" pitchFamily="34" charset="-122"/>
+                <a:cs typeface="Calibri" pitchFamily="34" charset="-120"/>
+              </a:rPr>
+              <a:t>Tiga perangkat yang dipakai</a:t>
+            </a:r>
+            <a:endParaRPr lang="en-US" sz="1000" dirty="0"/>
+          </a:p>
+        </p:txBody>
+      </p:sp>
+      <p:sp>
+        <p:nvSpPr>
+          <p:cNvPr id="24" name="Shape 22"/>
+          <p:cNvSpPr/>
+          <p:nvPr/>
+        </p:nvSpPr>
+        <p:spPr>
+          <a:xfrm>
+            <a:off x="7818120" y="3611880"/>
+            <a:ext cx="3291840" cy="1874520"/>
+          </a:xfrm>
+          <a:prstGeom prst="roundRect">
+            <a:avLst>
+              <a:gd name="adj" fmla="val 2927"/>
+            </a:avLst>
+          </a:prstGeom>
+          <a:solidFill>
+            <a:srgbClr val="E4F2EE"/>
+          </a:solidFill>
+          <a:ln w="12700">
+            <a:solidFill>
+              <a:srgbClr val="E4F2EE"/>
+            </a:solidFill>
+            <a:prstDash val="solid"/>
+          </a:ln>
+        </p:spPr>
+      </p:sp>
+      <p:sp>
+        <p:nvSpPr>
+          <p:cNvPr id="25" name="Text 23"/>
+          <p:cNvSpPr/>
+          <p:nvPr/>
+        </p:nvSpPr>
+        <p:spPr>
+          <a:xfrm>
+            <a:off x="7818120" y="4411980"/>
+            <a:ext cx="3291840" cy="274320"/>
+          </a:xfrm>
+          <a:prstGeom prst="rect">
+            <a:avLst/>
+          </a:prstGeom>
+          <a:noFill/>
+          <a:ln/>
+        </p:spPr>
+        <p:txBody>
+          <a:bodyPr wrap="square" lIns="0" tIns="0" rIns="0" bIns="0" rtlCol="0" anchor="ctr"/>
+          <a:lstStyle/>
+          <a:p>
+            <a:pPr algn="ctr" indent="0" marL="0">
+              <a:buNone/>
+            </a:pPr>
+            <a:r>
+              <a:rPr lang="en-US" sz="1000" dirty="0">
+                <a:solidFill>
+                  <a:srgbClr val="0D8271"/>
+                </a:solidFill>
+                <a:latin typeface="Calibri" pitchFamily="34" charset="0"/>
+                <a:ea typeface="Calibri" pitchFamily="34" charset="-122"/>
+                <a:cs typeface="Calibri" pitchFamily="34" charset="-120"/>
+              </a:rPr>
+              <a:t>foto/03-kondisi.jpg</a:t>
+            </a:r>
+            <a:endParaRPr lang="en-US" sz="1000" dirty="0"/>
+          </a:p>
+        </p:txBody>
+      </p:sp>
+      <p:sp>
+        <p:nvSpPr>
+          <p:cNvPr id="26" name="Text 24"/>
+          <p:cNvSpPr/>
+          <p:nvPr/>
+        </p:nvSpPr>
+        <p:spPr>
+          <a:xfrm>
+            <a:off x="7818120" y="5541264"/>
+            <a:ext cx="3291840" cy="274320"/>
+          </a:xfrm>
+          <a:prstGeom prst="rect">
+            <a:avLst/>
+          </a:prstGeom>
+          <a:noFill/>
+          <a:ln/>
+        </p:spPr>
+        <p:txBody>
+          <a:bodyPr wrap="square" lIns="0" tIns="0" rIns="0" bIns="0" rtlCol="0" anchor="ctr"/>
+          <a:lstStyle/>
+          <a:p>
+            <a:pPr indent="0" marL="0">
+              <a:buNone/>
+            </a:pPr>
+            <a:r>
+              <a:rPr lang="en-US" sz="1000" dirty="0">
+                <a:solidFill>
+                  <a:srgbClr val="4A635D"/>
+                </a:solidFill>
+                <a:latin typeface="Calibri" pitchFamily="34" charset="0"/>
+                <a:ea typeface="Calibri" pitchFamily="34" charset="-122"/>
+                <a:cs typeface="Calibri" pitchFamily="34" charset="-120"/>
+              </a:rPr>
+              <a:t>Kondisi cahaya yang berbeda</a:t>
+            </a:r>
+            <a:endParaRPr lang="en-US" sz="1000" dirty="0"/>
+          </a:p>
+        </p:txBody>
+      </p:sp>
+      <p:sp>
+        <p:nvSpPr>
+          <p:cNvPr id="27" name="Text 25"/>
+          <p:cNvSpPr/>
+          <p:nvPr/>
+        </p:nvSpPr>
+        <p:spPr>
+          <a:xfrm>
+            <a:off x="685800" y="5870448"/>
+            <a:ext cx="10424160" cy="502920"/>
+          </a:xfrm>
+          <a:prstGeom prst="rect">
+            <a:avLst/>
+          </a:prstGeom>
+          <a:noFill/>
+          <a:ln/>
+        </p:spPr>
+        <p:txBody>
+          <a:bodyPr wrap="square" lIns="0" tIns="0" rIns="0" bIns="0" rtlCol="0" anchor="ctr"/>
+          <a:lstStyle/>
+          <a:p>
+            <a:pPr indent="0" marL="0">
+              <a:lnSpc>
+                <a:spcPts val="1700"/>
+              </a:lnSpc>
+              <a:buNone/>
+            </a:pPr>
+            <a:r>
+              <a:rPr lang="en-US" sz="1200" dirty="0">
+                <a:solidFill>
+                  <a:srgbClr val="14302B"/>
+                </a:solidFill>
+                <a:latin typeface="Calibri" pitchFamily="34" charset="0"/>
+                <a:ea typeface="Calibri" pitchFamily="34" charset="-122"/>
+                <a:cs typeface="Calibri" pitchFamily="34" charset="-120"/>
+              </a:rPr>
+              <a:t>Yang diuji di sini adalah alat ukurnya, bukan kadernya: operatornya tim kami dan lokasinya bukan Posyandu. Yang ditunjukkannya tetap nyata — alur ini berjalan berulang di perangkat kelas menengah, luring, termasuk pada peserta berkacamata dan di ruangan yang remang.</a:t>
+            </a:r>
+            <a:endParaRPr lang="en-US" sz="1200" dirty="0"/>
+          </a:p>
+        </p:txBody>
+      </p:sp>
+    </p:spTree>
+  </p:cSld>
+  <p:clrMapOvr>
+    <a:masterClrMapping/>
+  </p:clrMapOvr>
+</p:sld>
+</file>
+
+<file path=ppt/slides/slide7.xml><?xml version="1.0" encoding="utf-8"?>
+<p:sld xmlns:a="http://schemas.openxmlformats.org/drawingml/2006/main" xmlns:r="http://schemas.openxmlformats.org/officeDocument/2006/relationships" xmlns:p="http://schemas.openxmlformats.org/presentationml/2006/main">
+  <p:cSld name="Slide 7">
+    <p:bg>
+      <p:bgPr>
+        <a:solidFill>
           <a:srgbClr val="0B1E1B"/>
         </a:solidFill>
       </p:bgPr>
@@ -12945,418 +14798,6 @@
               <a:t>Hampir semua ML yang dikerahkan ke lapangan mengandaikan data masuk mirip data latihnya. Ketika andaian itu salah, modelnya tetap mengeluarkan angka — dan tidak memberi tahu siapa pun.</a:t>
             </a:r>
             <a:endParaRPr lang="en-US" sz="1400" dirty="0"/>
-          </a:p>
-        </p:txBody>
-      </p:sp>
-    </p:spTree>
-  </p:cSld>
-  <p:clrMapOvr>
-    <a:masterClrMapping/>
-  </p:clrMapOvr>
-</p:sld>
-</file>
-
-<file path=ppt/slides/slide7.xml><?xml version="1.0" encoding="utf-8"?>
-<p:sld xmlns:a="http://schemas.openxmlformats.org/drawingml/2006/main" xmlns:r="http://schemas.openxmlformats.org/officeDocument/2006/relationships" xmlns:p="http://schemas.openxmlformats.org/presentationml/2006/main">
-  <p:cSld name="Slide 7">
-    <p:bg>
-      <p:bgPr>
-        <a:solidFill>
-          <a:srgbClr val="F7F9F8"/>
-        </a:solidFill>
-      </p:bgPr>
-    </p:bg>
-    <p:spTree>
-      <p:nvGrpSpPr>
-        <p:cNvPr id="1" name=""/>
-        <p:cNvGrpSpPr/>
-        <p:nvPr/>
-      </p:nvGrpSpPr>
-      <p:grpSpPr>
-        <a:xfrm>
-          <a:off x="0" y="0"/>
-          <a:ext cx="0" cy="0"/>
-          <a:chOff x="0" y="0"/>
-          <a:chExt cx="0" cy="0"/>
-        </a:xfrm>
-      </p:grpSpPr>
-      <p:sp>
-        <p:nvSpPr>
-          <p:cNvPr id="2" name="Shape 0"/>
-          <p:cNvSpPr/>
-          <p:nvPr/>
-        </p:nvSpPr>
-        <p:spPr>
-          <a:xfrm>
-            <a:off x="11268151" y="740664"/>
-            <a:ext cx="237744" cy="237744"/>
-          </a:xfrm>
-          <a:prstGeom prst="ellipse">
-            <a:avLst/>
-          </a:prstGeom>
-          <a:solidFill>
-            <a:srgbClr val="FFFFFF">
-              <a:alpha val="0"/>
-            </a:srgbClr>
-          </a:solidFill>
-          <a:ln w="25400">
-            <a:solidFill>
-              <a:srgbClr val="5CB9A3"/>
-            </a:solidFill>
-            <a:prstDash val="solid"/>
-          </a:ln>
-        </p:spPr>
-      </p:sp>
-      <p:sp>
-        <p:nvSpPr>
-          <p:cNvPr id="3" name="Shape 1"/>
-          <p:cNvSpPr/>
-          <p:nvPr/>
-        </p:nvSpPr>
-        <p:spPr>
-          <a:xfrm>
-            <a:off x="11339474" y="811987"/>
-            <a:ext cx="95098" cy="95098"/>
-          </a:xfrm>
-          <a:prstGeom prst="ellipse">
-            <a:avLst/>
-          </a:prstGeom>
-          <a:solidFill>
-            <a:srgbClr val="5CB9A3"/>
-          </a:solidFill>
-          <a:ln w="12700">
-            <a:solidFill>
-              <a:srgbClr val="333333"/>
-            </a:solidFill>
-            <a:prstDash val="solid"/>
-          </a:ln>
-        </p:spPr>
-      </p:sp>
-      <p:sp>
-        <p:nvSpPr>
-          <p:cNvPr id="4" name="Text 2"/>
-          <p:cNvSpPr/>
-          <p:nvPr/>
-        </p:nvSpPr>
-        <p:spPr>
-          <a:xfrm>
-            <a:off x="685800" y="685800"/>
-            <a:ext cx="10271455" cy="256032"/>
-          </a:xfrm>
-          <a:prstGeom prst="rect">
-            <a:avLst/>
-          </a:prstGeom>
-          <a:noFill/>
-          <a:ln/>
-        </p:spPr>
-        <p:txBody>
-          <a:bodyPr wrap="square" lIns="0" tIns="0" rIns="0" bIns="0" rtlCol="0" anchor="ctr"/>
-          <a:lstStyle/>
-          <a:p>
-            <a:pPr indent="0" marL="0">
-              <a:buNone/>
-            </a:pPr>
-            <a:r>
-              <a:rPr lang="en-US" sz="1200" b="1" spc="120" kern="0" dirty="0">
-                <a:solidFill>
-                  <a:srgbClr val="0D8271"/>
-                </a:solidFill>
-                <a:latin typeface="Calibri" pitchFamily="34" charset="0"/>
-                <a:ea typeface="Calibri" pitchFamily="34" charset="-122"/>
-                <a:cs typeface="Calibri" pitchFamily="34" charset="-120"/>
-              </a:rPr>
-              <a:t>Temuan orisinal · degradasi temporal</a:t>
-            </a:r>
-            <a:endParaRPr lang="en-US" sz="1200" dirty="0"/>
-          </a:p>
-        </p:txBody>
-      </p:sp>
-      <p:sp>
-        <p:nvSpPr>
-          <p:cNvPr id="5" name="Text 3"/>
-          <p:cNvSpPr/>
-          <p:nvPr/>
-        </p:nvSpPr>
-        <p:spPr>
-          <a:xfrm>
-            <a:off x="685800" y="996696"/>
-            <a:ext cx="10271455" cy="822960"/>
-          </a:xfrm>
-          <a:prstGeom prst="rect">
-            <a:avLst/>
-          </a:prstGeom>
-          <a:noFill/>
-          <a:ln/>
-        </p:spPr>
-        <p:txBody>
-          <a:bodyPr wrap="square" lIns="0" tIns="0" rIns="0" bIns="0" rtlCol="0" anchor="ctr"/>
-          <a:lstStyle/>
-          <a:p>
-            <a:pPr indent="0" marL="0">
-              <a:lnSpc>
-                <a:spcPts val="3600"/>
-              </a:lnSpc>
-              <a:buNone/>
-            </a:pPr>
-            <a:r>
-              <a:rPr lang="en-US" sz="3200" b="1" dirty="0">
-                <a:solidFill>
-                  <a:srgbClr val="0B1E1B"/>
-                </a:solidFill>
-                <a:latin typeface="Cambria" pitchFamily="34" charset="0"/>
-                <a:ea typeface="Cambria" pitchFamily="34" charset="-122"/>
-                <a:cs typeface="Cambria" pitchFamily="34" charset="-120"/>
-              </a:rPr>
-              <a:t>Kami tidak menebak fitur mana yang bertahan — kami mengukurnya</a:t>
-            </a:r>
-            <a:endParaRPr lang="en-US" sz="3200" dirty="0"/>
-          </a:p>
-        </p:txBody>
-      </p:sp>
-      <p:graphicFrame>
-        <p:nvGraphicFramePr>
-          <p:cNvPr id="6" name="Chart 0" descr=""/>
-          <p:cNvGraphicFramePr/>
-          <p:nvPr/>
-        </p:nvGraphicFramePr>
-        <p:xfrm>
-          <a:off x="685800" y="2194560"/>
-          <a:ext cx="6858000" cy="2926080"/>
-        </p:xfrm>
-        <a:graphic xmlns:a="http://schemas.openxmlformats.org/drawingml/2006/main">
-          <a:graphicData uri="http://schemas.openxmlformats.org/drawingml/2006/chart">
-            <c:chart xmlns:c="http://schemas.openxmlformats.org/drawingml/2006/chart" r:id="rId1"/>
-          </a:graphicData>
-        </a:graphic>
-      </p:graphicFrame>
-      <p:sp>
-        <p:nvSpPr>
-          <p:cNvPr id="7" name="Shape 4"/>
-          <p:cNvSpPr/>
-          <p:nvPr/>
-        </p:nvSpPr>
-        <p:spPr>
-          <a:xfrm>
-            <a:off x="7909560" y="2194560"/>
-            <a:ext cx="3566160" cy="2926080"/>
-          </a:xfrm>
-          <a:prstGeom prst="roundRect">
-            <a:avLst>
-              <a:gd name="adj" fmla="val 1875"/>
-            </a:avLst>
-          </a:prstGeom>
-          <a:solidFill>
-            <a:srgbClr val="E4F2EE"/>
-          </a:solidFill>
-          <a:ln w="12700">
-            <a:solidFill>
-              <a:srgbClr val="E4F2EE"/>
-            </a:solidFill>
-            <a:prstDash val="solid"/>
-          </a:ln>
-        </p:spPr>
-      </p:sp>
-      <p:sp>
-        <p:nvSpPr>
-          <p:cNvPr id="8" name="Text 5"/>
-          <p:cNvSpPr/>
-          <p:nvPr/>
-        </p:nvSpPr>
-        <p:spPr>
-          <a:xfrm>
-            <a:off x="8183880" y="2468880"/>
-            <a:ext cx="3017520" cy="796413"/>
-          </a:xfrm>
-          <a:prstGeom prst="rect">
-            <a:avLst/>
-          </a:prstGeom>
-          <a:noFill/>
-          <a:ln/>
-        </p:spPr>
-        <p:txBody>
-          <a:bodyPr wrap="square" lIns="0" tIns="0" rIns="0" bIns="0" rtlCol="0" anchor="ctr"/>
-          <a:lstStyle/>
-          <a:p>
-            <a:pPr indent="0" marL="0">
-              <a:lnSpc>
-                <a:spcPts val="5400"/>
-              </a:lnSpc>
-              <a:buNone/>
-            </a:pPr>
-            <a:r>
-              <a:rPr lang="en-US" sz="5400" b="1" dirty="0">
-                <a:solidFill>
-                  <a:srgbClr val="0D8271"/>
-                </a:solidFill>
-                <a:latin typeface="Cambria" pitchFamily="34" charset="0"/>
-                <a:ea typeface="Cambria" pitchFamily="34" charset="-122"/>
-                <a:cs typeface="Cambria" pitchFamily="34" charset="-120"/>
-              </a:rPr>
-              <a:t>42×</a:t>
-            </a:r>
-            <a:endParaRPr lang="en-US" sz="5400" dirty="0"/>
-          </a:p>
-        </p:txBody>
-      </p:sp>
-      <p:sp>
-        <p:nvSpPr>
-          <p:cNvPr id="9" name="Text 6"/>
-          <p:cNvSpPr/>
-          <p:nvPr/>
-        </p:nvSpPr>
-        <p:spPr>
-          <a:xfrm>
-            <a:off x="8183880" y="3320157"/>
-            <a:ext cx="3017520" cy="274320"/>
-          </a:xfrm>
-          <a:prstGeom prst="rect">
-            <a:avLst/>
-          </a:prstGeom>
-          <a:noFill/>
-          <a:ln/>
-        </p:spPr>
-        <p:txBody>
-          <a:bodyPr wrap="square" lIns="0" tIns="0" rIns="0" bIns="0" rtlCol="0" anchor="ctr"/>
-          <a:lstStyle/>
-          <a:p>
-            <a:pPr indent="0" marL="0">
-              <a:buNone/>
-            </a:pPr>
-            <a:r>
-              <a:rPr lang="en-US" sz="1400" b="1" dirty="0">
-                <a:solidFill>
-                  <a:srgbClr val="14302B"/>
-                </a:solidFill>
-                <a:latin typeface="Calibri" pitchFamily="34" charset="0"/>
-                <a:ea typeface="Calibri" pitchFamily="34" charset="-122"/>
-                <a:cs typeface="Calibri" pitchFamily="34" charset="-120"/>
-              </a:rPr>
-              <a:t>selisih drift fitur, bukan akurasi</a:t>
-            </a:r>
-            <a:endParaRPr lang="en-US" sz="1400" dirty="0"/>
-          </a:p>
-        </p:txBody>
-      </p:sp>
-      <p:sp>
-        <p:nvSpPr>
-          <p:cNvPr id="10" name="Text 7"/>
-          <p:cNvSpPr/>
-          <p:nvPr/>
-        </p:nvSpPr>
-        <p:spPr>
-          <a:xfrm>
-            <a:off x="8183880" y="3631053"/>
-            <a:ext cx="3017520" cy="640080"/>
-          </a:xfrm>
-          <a:prstGeom prst="rect">
-            <a:avLst/>
-          </a:prstGeom>
-          <a:noFill/>
-          <a:ln/>
-        </p:spPr>
-        <p:txBody>
-          <a:bodyPr wrap="square" lIns="0" tIns="0" rIns="0" bIns="0" rtlCol="0" anchor="ctr"/>
-          <a:lstStyle/>
-          <a:p>
-            <a:pPr indent="0" marL="0">
-              <a:lnSpc>
-                <a:spcPts val="1500"/>
-              </a:lnSpc>
-              <a:buNone/>
-            </a:pPr>
-            <a:r>
-              <a:rPr lang="en-US" sz="1200" dirty="0">
-                <a:solidFill>
-                  <a:srgbClr val="4A635D"/>
-                </a:solidFill>
-                <a:latin typeface="Calibri" pitchFamily="34" charset="0"/>
-                <a:ea typeface="Calibri" pitchFamily="34" charset="-122"/>
-                <a:cs typeface="Calibri" pitchFamily="34" charset="-120"/>
-              </a:rPr>
-              <a:t>Median drift relatif di bawah desimasi waktu: 69,4% untuk fitur kinematik, 1,6% untuk fitur yang dipakai. Kamera Posyandu berjalan 26 fps dan sering lebih lambat.</a:t>
-            </a:r>
-            <a:endParaRPr lang="en-US" sz="1200" dirty="0"/>
-          </a:p>
-        </p:txBody>
-      </p:sp>
-      <p:sp>
-        <p:nvSpPr>
-          <p:cNvPr id="11" name="Text 8"/>
-          <p:cNvSpPr/>
-          <p:nvPr/>
-        </p:nvSpPr>
-        <p:spPr>
-          <a:xfrm>
-            <a:off x="8183880" y="4572000"/>
-            <a:ext cx="3017520" cy="365760"/>
-          </a:xfrm>
-          <a:prstGeom prst="rect">
-            <a:avLst/>
-          </a:prstGeom>
-          <a:noFill/>
-          <a:ln/>
-        </p:spPr>
-        <p:txBody>
-          <a:bodyPr wrap="square" lIns="0" tIns="0" rIns="0" bIns="0" rtlCol="0" anchor="ctr"/>
-          <a:lstStyle/>
-          <a:p>
-            <a:pPr indent="0" marL="0">
-              <a:lnSpc>
-                <a:spcPts val="1500"/>
-              </a:lnSpc>
-              <a:buNone/>
-            </a:pPr>
-            <a:r>
-              <a:rPr lang="en-US" sz="1100" b="1" dirty="0">
-                <a:solidFill>
-                  <a:srgbClr val="14302B"/>
-                </a:solidFill>
-                <a:latin typeface="Calibri" pitchFamily="34" charset="0"/>
-                <a:ea typeface="Calibri" pitchFamily="34" charset="-122"/>
-                <a:cs typeface="Calibri" pitchFamily="34" charset="-120"/>
-              </a:rPr>
-              <a:t>27 sesi berpasangan Gate B, aliran (x, y, t) nyata</a:t>
-            </a:r>
-            <a:endParaRPr lang="en-US" sz="1100" dirty="0"/>
-          </a:p>
-        </p:txBody>
-      </p:sp>
-      <p:sp>
-        <p:nvSpPr>
-          <p:cNvPr id="12" name="Text 9"/>
-          <p:cNvSpPr/>
-          <p:nvPr/>
-        </p:nvSpPr>
-        <p:spPr>
-          <a:xfrm>
-            <a:off x="685800" y="5285232"/>
-            <a:ext cx="6858000" cy="274320"/>
-          </a:xfrm>
-          <a:prstGeom prst="rect">
-            <a:avLst/>
-          </a:prstGeom>
-          <a:noFill/>
-          <a:ln/>
-        </p:spPr>
-        <p:txBody>
-          <a:bodyPr wrap="square" lIns="0" tIns="0" rIns="0" bIns="0" rtlCol="0" anchor="ctr"/>
-          <a:lstStyle/>
-          <a:p>
-            <a:pPr indent="0" marL="0">
-              <a:buNone/>
-            </a:pPr>
-            <a:r>
-              <a:rPr lang="en-US" sz="1100" dirty="0">
-                <a:solidFill>
-                  <a:srgbClr val="4A635D"/>
-                </a:solidFill>
-                <a:latin typeface="Calibri" pitchFamily="34" charset="0"/>
-                <a:ea typeface="Calibri" pitchFamily="34" charset="-122"/>
-                <a:cs typeface="Calibri" pitchFamily="34" charset="-120"/>
-              </a:rPr>
-              <a:t>Sumber: research/hasil/degradasi_temporal.json</a:t>
-            </a:r>
-            <a:endParaRPr lang="en-US" sz="1100" dirty="0"/>
           </a:p>
         </p:txBody>
       </p:sp>
@@ -13477,7 +14918,7 @@
                 <a:ea typeface="Calibri" pitchFamily="34" charset="-122"/>
                 <a:cs typeface="Calibri" pitchFamily="34" charset="-120"/>
               </a:rPr>
-              <a:t>Kontribusi metodologis</a:t>
+              <a:t>Temuan orisinal · degradasi temporal</a:t>
             </a:r>
             <a:endParaRPr lang="en-US" sz="1200" dirty="0"/>
           </a:p>
@@ -13519,6 +14960,418 @@
                 <a:ea typeface="Cambria" pitchFamily="34" charset="-122"/>
                 <a:cs typeface="Cambria" pitchFamily="34" charset="-120"/>
               </a:rPr>
+              <a:t>Kami tidak menebak fitur mana yang bertahan — kami mengukurnya</a:t>
+            </a:r>
+            <a:endParaRPr lang="en-US" sz="3200" dirty="0"/>
+          </a:p>
+        </p:txBody>
+      </p:sp>
+      <p:graphicFrame>
+        <p:nvGraphicFramePr>
+          <p:cNvPr id="6" name="Chart 0" descr=""/>
+          <p:cNvGraphicFramePr/>
+          <p:nvPr/>
+        </p:nvGraphicFramePr>
+        <p:xfrm>
+          <a:off x="685800" y="2194560"/>
+          <a:ext cx="6858000" cy="2926080"/>
+        </p:xfrm>
+        <a:graphic xmlns:a="http://schemas.openxmlformats.org/drawingml/2006/main">
+          <a:graphicData uri="http://schemas.openxmlformats.org/drawingml/2006/chart">
+            <c:chart xmlns:c="http://schemas.openxmlformats.org/drawingml/2006/chart" r:id="rId1"/>
+          </a:graphicData>
+        </a:graphic>
+      </p:graphicFrame>
+      <p:sp>
+        <p:nvSpPr>
+          <p:cNvPr id="7" name="Shape 4"/>
+          <p:cNvSpPr/>
+          <p:nvPr/>
+        </p:nvSpPr>
+        <p:spPr>
+          <a:xfrm>
+            <a:off x="7909560" y="2194560"/>
+            <a:ext cx="3566160" cy="2926080"/>
+          </a:xfrm>
+          <a:prstGeom prst="roundRect">
+            <a:avLst>
+              <a:gd name="adj" fmla="val 1875"/>
+            </a:avLst>
+          </a:prstGeom>
+          <a:solidFill>
+            <a:srgbClr val="E4F2EE"/>
+          </a:solidFill>
+          <a:ln w="12700">
+            <a:solidFill>
+              <a:srgbClr val="E4F2EE"/>
+            </a:solidFill>
+            <a:prstDash val="solid"/>
+          </a:ln>
+        </p:spPr>
+      </p:sp>
+      <p:sp>
+        <p:nvSpPr>
+          <p:cNvPr id="8" name="Text 5"/>
+          <p:cNvSpPr/>
+          <p:nvPr/>
+        </p:nvSpPr>
+        <p:spPr>
+          <a:xfrm>
+            <a:off x="8183880" y="2468880"/>
+            <a:ext cx="3017520" cy="796413"/>
+          </a:xfrm>
+          <a:prstGeom prst="rect">
+            <a:avLst/>
+          </a:prstGeom>
+          <a:noFill/>
+          <a:ln/>
+        </p:spPr>
+        <p:txBody>
+          <a:bodyPr wrap="square" lIns="0" tIns="0" rIns="0" bIns="0" rtlCol="0" anchor="ctr"/>
+          <a:lstStyle/>
+          <a:p>
+            <a:pPr indent="0" marL="0">
+              <a:lnSpc>
+                <a:spcPts val="5400"/>
+              </a:lnSpc>
+              <a:buNone/>
+            </a:pPr>
+            <a:r>
+              <a:rPr lang="en-US" sz="5400" b="1" dirty="0">
+                <a:solidFill>
+                  <a:srgbClr val="0D8271"/>
+                </a:solidFill>
+                <a:latin typeface="Cambria" pitchFamily="34" charset="0"/>
+                <a:ea typeface="Cambria" pitchFamily="34" charset="-122"/>
+                <a:cs typeface="Cambria" pitchFamily="34" charset="-120"/>
+              </a:rPr>
+              <a:t>42×</a:t>
+            </a:r>
+            <a:endParaRPr lang="en-US" sz="5400" dirty="0"/>
+          </a:p>
+        </p:txBody>
+      </p:sp>
+      <p:sp>
+        <p:nvSpPr>
+          <p:cNvPr id="9" name="Text 6"/>
+          <p:cNvSpPr/>
+          <p:nvPr/>
+        </p:nvSpPr>
+        <p:spPr>
+          <a:xfrm>
+            <a:off x="8183880" y="3320157"/>
+            <a:ext cx="3017520" cy="274320"/>
+          </a:xfrm>
+          <a:prstGeom prst="rect">
+            <a:avLst/>
+          </a:prstGeom>
+          <a:noFill/>
+          <a:ln/>
+        </p:spPr>
+        <p:txBody>
+          <a:bodyPr wrap="square" lIns="0" tIns="0" rIns="0" bIns="0" rtlCol="0" anchor="ctr"/>
+          <a:lstStyle/>
+          <a:p>
+            <a:pPr indent="0" marL="0">
+              <a:buNone/>
+            </a:pPr>
+            <a:r>
+              <a:rPr lang="en-US" sz="1400" b="1" dirty="0">
+                <a:solidFill>
+                  <a:srgbClr val="14302B"/>
+                </a:solidFill>
+                <a:latin typeface="Calibri" pitchFamily="34" charset="0"/>
+                <a:ea typeface="Calibri" pitchFamily="34" charset="-122"/>
+                <a:cs typeface="Calibri" pitchFamily="34" charset="-120"/>
+              </a:rPr>
+              <a:t>selisih drift fitur, bukan akurasi</a:t>
+            </a:r>
+            <a:endParaRPr lang="en-US" sz="1400" dirty="0"/>
+          </a:p>
+        </p:txBody>
+      </p:sp>
+      <p:sp>
+        <p:nvSpPr>
+          <p:cNvPr id="10" name="Text 7"/>
+          <p:cNvSpPr/>
+          <p:nvPr/>
+        </p:nvSpPr>
+        <p:spPr>
+          <a:xfrm>
+            <a:off x="8183880" y="3631053"/>
+            <a:ext cx="3017520" cy="640080"/>
+          </a:xfrm>
+          <a:prstGeom prst="rect">
+            <a:avLst/>
+          </a:prstGeom>
+          <a:noFill/>
+          <a:ln/>
+        </p:spPr>
+        <p:txBody>
+          <a:bodyPr wrap="square" lIns="0" tIns="0" rIns="0" bIns="0" rtlCol="0" anchor="ctr"/>
+          <a:lstStyle/>
+          <a:p>
+            <a:pPr indent="0" marL="0">
+              <a:lnSpc>
+                <a:spcPts val="1500"/>
+              </a:lnSpc>
+              <a:buNone/>
+            </a:pPr>
+            <a:r>
+              <a:rPr lang="en-US" sz="1200" dirty="0">
+                <a:solidFill>
+                  <a:srgbClr val="4A635D"/>
+                </a:solidFill>
+                <a:latin typeface="Calibri" pitchFamily="34" charset="0"/>
+                <a:ea typeface="Calibri" pitchFamily="34" charset="-122"/>
+                <a:cs typeface="Calibri" pitchFamily="34" charset="-120"/>
+              </a:rPr>
+              <a:t>Median drift relatif di bawah desimasi waktu: 69,4% untuk fitur kinematik, 1,6% untuk fitur yang dipakai. Kamera Posyandu berjalan 26 fps dan sering lebih lambat.</a:t>
+            </a:r>
+            <a:endParaRPr lang="en-US" sz="1200" dirty="0"/>
+          </a:p>
+        </p:txBody>
+      </p:sp>
+      <p:sp>
+        <p:nvSpPr>
+          <p:cNvPr id="11" name="Text 8"/>
+          <p:cNvSpPr/>
+          <p:nvPr/>
+        </p:nvSpPr>
+        <p:spPr>
+          <a:xfrm>
+            <a:off x="8183880" y="4572000"/>
+            <a:ext cx="3017520" cy="365760"/>
+          </a:xfrm>
+          <a:prstGeom prst="rect">
+            <a:avLst/>
+          </a:prstGeom>
+          <a:noFill/>
+          <a:ln/>
+        </p:spPr>
+        <p:txBody>
+          <a:bodyPr wrap="square" lIns="0" tIns="0" rIns="0" bIns="0" rtlCol="0" anchor="ctr"/>
+          <a:lstStyle/>
+          <a:p>
+            <a:pPr indent="0" marL="0">
+              <a:lnSpc>
+                <a:spcPts val="1500"/>
+              </a:lnSpc>
+              <a:buNone/>
+            </a:pPr>
+            <a:r>
+              <a:rPr lang="en-US" sz="1100" b="1" dirty="0">
+                <a:solidFill>
+                  <a:srgbClr val="14302B"/>
+                </a:solidFill>
+                <a:latin typeface="Calibri" pitchFamily="34" charset="0"/>
+                <a:ea typeface="Calibri" pitchFamily="34" charset="-122"/>
+                <a:cs typeface="Calibri" pitchFamily="34" charset="-120"/>
+              </a:rPr>
+              <a:t>27 sesi berpasangan Gate B, aliran (x, y, t) nyata</a:t>
+            </a:r>
+            <a:endParaRPr lang="en-US" sz="1100" dirty="0"/>
+          </a:p>
+        </p:txBody>
+      </p:sp>
+      <p:sp>
+        <p:nvSpPr>
+          <p:cNvPr id="12" name="Text 9"/>
+          <p:cNvSpPr/>
+          <p:nvPr/>
+        </p:nvSpPr>
+        <p:spPr>
+          <a:xfrm>
+            <a:off x="685800" y="5285232"/>
+            <a:ext cx="6858000" cy="274320"/>
+          </a:xfrm>
+          <a:prstGeom prst="rect">
+            <a:avLst/>
+          </a:prstGeom>
+          <a:noFill/>
+          <a:ln/>
+        </p:spPr>
+        <p:txBody>
+          <a:bodyPr wrap="square" lIns="0" tIns="0" rIns="0" bIns="0" rtlCol="0" anchor="ctr"/>
+          <a:lstStyle/>
+          <a:p>
+            <a:pPr indent="0" marL="0">
+              <a:buNone/>
+            </a:pPr>
+            <a:r>
+              <a:rPr lang="en-US" sz="1100" dirty="0">
+                <a:solidFill>
+                  <a:srgbClr val="4A635D"/>
+                </a:solidFill>
+                <a:latin typeface="Calibri" pitchFamily="34" charset="0"/>
+                <a:ea typeface="Calibri" pitchFamily="34" charset="-122"/>
+                <a:cs typeface="Calibri" pitchFamily="34" charset="-120"/>
+              </a:rPr>
+              <a:t>Sumber: research/hasil/degradasi_temporal.json</a:t>
+            </a:r>
+            <a:endParaRPr lang="en-US" sz="1100" dirty="0"/>
+          </a:p>
+        </p:txBody>
+      </p:sp>
+    </p:spTree>
+  </p:cSld>
+  <p:clrMapOvr>
+    <a:masterClrMapping/>
+  </p:clrMapOvr>
+</p:sld>
+</file>
+
+<file path=ppt/slides/slide9.xml><?xml version="1.0" encoding="utf-8"?>
+<p:sld xmlns:a="http://schemas.openxmlformats.org/drawingml/2006/main" xmlns:r="http://schemas.openxmlformats.org/officeDocument/2006/relationships" xmlns:p="http://schemas.openxmlformats.org/presentationml/2006/main">
+  <p:cSld name="Slide 9">
+    <p:bg>
+      <p:bgPr>
+        <a:solidFill>
+          <a:srgbClr val="F7F9F8"/>
+        </a:solidFill>
+      </p:bgPr>
+    </p:bg>
+    <p:spTree>
+      <p:nvGrpSpPr>
+        <p:cNvPr id="1" name=""/>
+        <p:cNvGrpSpPr/>
+        <p:nvPr/>
+      </p:nvGrpSpPr>
+      <p:grpSpPr>
+        <a:xfrm>
+          <a:off x="0" y="0"/>
+          <a:ext cx="0" cy="0"/>
+          <a:chOff x="0" y="0"/>
+          <a:chExt cx="0" cy="0"/>
+        </a:xfrm>
+      </p:grpSpPr>
+      <p:sp>
+        <p:nvSpPr>
+          <p:cNvPr id="2" name="Shape 0"/>
+          <p:cNvSpPr/>
+          <p:nvPr/>
+        </p:nvSpPr>
+        <p:spPr>
+          <a:xfrm>
+            <a:off x="11268151" y="740664"/>
+            <a:ext cx="237744" cy="237744"/>
+          </a:xfrm>
+          <a:prstGeom prst="ellipse">
+            <a:avLst/>
+          </a:prstGeom>
+          <a:solidFill>
+            <a:srgbClr val="FFFFFF">
+              <a:alpha val="0"/>
+            </a:srgbClr>
+          </a:solidFill>
+          <a:ln w="25400">
+            <a:solidFill>
+              <a:srgbClr val="5CB9A3"/>
+            </a:solidFill>
+            <a:prstDash val="solid"/>
+          </a:ln>
+        </p:spPr>
+      </p:sp>
+      <p:sp>
+        <p:nvSpPr>
+          <p:cNvPr id="3" name="Shape 1"/>
+          <p:cNvSpPr/>
+          <p:nvPr/>
+        </p:nvSpPr>
+        <p:spPr>
+          <a:xfrm>
+            <a:off x="11339474" y="811987"/>
+            <a:ext cx="95098" cy="95098"/>
+          </a:xfrm>
+          <a:prstGeom prst="ellipse">
+            <a:avLst/>
+          </a:prstGeom>
+          <a:solidFill>
+            <a:srgbClr val="5CB9A3"/>
+          </a:solidFill>
+          <a:ln w="12700">
+            <a:solidFill>
+              <a:srgbClr val="333333"/>
+            </a:solidFill>
+            <a:prstDash val="solid"/>
+          </a:ln>
+        </p:spPr>
+      </p:sp>
+      <p:sp>
+        <p:nvSpPr>
+          <p:cNvPr id="4" name="Text 2"/>
+          <p:cNvSpPr/>
+          <p:nvPr/>
+        </p:nvSpPr>
+        <p:spPr>
+          <a:xfrm>
+            <a:off x="685800" y="685800"/>
+            <a:ext cx="10271455" cy="256032"/>
+          </a:xfrm>
+          <a:prstGeom prst="rect">
+            <a:avLst/>
+          </a:prstGeom>
+          <a:noFill/>
+          <a:ln/>
+        </p:spPr>
+        <p:txBody>
+          <a:bodyPr wrap="square" lIns="0" tIns="0" rIns="0" bIns="0" rtlCol="0" anchor="ctr"/>
+          <a:lstStyle/>
+          <a:p>
+            <a:pPr indent="0" marL="0">
+              <a:buNone/>
+            </a:pPr>
+            <a:r>
+              <a:rPr lang="en-US" sz="1200" b="1" spc="120" kern="0" dirty="0">
+                <a:solidFill>
+                  <a:srgbClr val="0D8271"/>
+                </a:solidFill>
+                <a:latin typeface="Calibri" pitchFamily="34" charset="0"/>
+                <a:ea typeface="Calibri" pitchFamily="34" charset="-122"/>
+                <a:cs typeface="Calibri" pitchFamily="34" charset="-120"/>
+              </a:rPr>
+              <a:t>Kontribusi metodologis</a:t>
+            </a:r>
+            <a:endParaRPr lang="en-US" sz="1200" dirty="0"/>
+          </a:p>
+        </p:txBody>
+      </p:sp>
+      <p:sp>
+        <p:nvSpPr>
+          <p:cNvPr id="5" name="Text 3"/>
+          <p:cNvSpPr/>
+          <p:nvPr/>
+        </p:nvSpPr>
+        <p:spPr>
+          <a:xfrm>
+            <a:off x="685800" y="996696"/>
+            <a:ext cx="10271455" cy="822960"/>
+          </a:xfrm>
+          <a:prstGeom prst="rect">
+            <a:avLst/>
+          </a:prstGeom>
+          <a:noFill/>
+          <a:ln/>
+        </p:spPr>
+        <p:txBody>
+          <a:bodyPr wrap="square" lIns="0" tIns="0" rIns="0" bIns="0" rtlCol="0" anchor="ctr"/>
+          <a:lstStyle/>
+          <a:p>
+            <a:pPr indent="0" marL="0">
+              <a:lnSpc>
+                <a:spcPts val="3600"/>
+              </a:lnSpc>
+              <a:buNone/>
+            </a:pPr>
+            <a:r>
+              <a:rPr lang="en-US" sz="3200" b="1" dirty="0">
+                <a:solidFill>
+                  <a:srgbClr val="0B1E1B"/>
+                </a:solidFill>
+                <a:latin typeface="Cambria" pitchFamily="34" charset="0"/>
+                <a:ea typeface="Cambria" pitchFamily="34" charset="-122"/>
+                <a:cs typeface="Cambria" pitchFamily="34" charset="-120"/>
+              </a:rPr>
               <a:t>Kami membandingkan ambang terhadap selang, bukan terhadap satu angka</a:t>
             </a:r>
             <a:endParaRPr lang="en-US" sz="3200" dirty="0"/>
@@ -13569,7 +15422,7 @@
       </p:sp>
       <p:graphicFrame>
         <p:nvGraphicFramePr>
-          <p:cNvPr id="9" name="Table 0"/>
+          <p:cNvPr id="10" name="Table 0"/>
           <p:cNvGraphicFramePr>
             <a:graphicFrameLocks noGrp="1"/>
           </p:cNvGraphicFramePr>
@@ -14817,756 +16670,6 @@
               <a:t>Standar buktinya jadi sama untuk kedua sinyal: mengikuti isyarat sudah memakai uji tanda sejak awal. Yang tidak dapat menempatkan dirinya di satu sisi ambang belum mengukur apa pun tentang ambang itu.</a:t>
             </a:r>
             <a:endParaRPr lang="en-US" sz="1500" dirty="0"/>
-          </a:p>
-        </p:txBody>
-      </p:sp>
-    </p:spTree>
-  </p:cSld>
-  <p:clrMapOvr>
-    <a:masterClrMapping/>
-  </p:clrMapOvr>
-</p:sld>
-</file>
-
-<file path=ppt/slides/slide9.xml><?xml version="1.0" encoding="utf-8"?>
-<p:sld xmlns:a="http://schemas.openxmlformats.org/drawingml/2006/main" xmlns:r="http://schemas.openxmlformats.org/officeDocument/2006/relationships" xmlns:p="http://schemas.openxmlformats.org/presentationml/2006/main">
-  <p:cSld name="Slide 9">
-    <p:bg>
-      <p:bgPr>
-        <a:solidFill>
-          <a:srgbClr val="F7F9F8"/>
-        </a:solidFill>
-      </p:bgPr>
-    </p:bg>
-    <p:spTree>
-      <p:nvGrpSpPr>
-        <p:cNvPr id="1" name=""/>
-        <p:cNvGrpSpPr/>
-        <p:nvPr/>
-      </p:nvGrpSpPr>
-      <p:grpSpPr>
-        <a:xfrm>
-          <a:off x="0" y="0"/>
-          <a:ext cx="0" cy="0"/>
-          <a:chOff x="0" y="0"/>
-          <a:chExt cx="0" cy="0"/>
-        </a:xfrm>
-      </p:grpSpPr>
-      <p:sp>
-        <p:nvSpPr>
-          <p:cNvPr id="2" name="Shape 0"/>
-          <p:cNvSpPr/>
-          <p:nvPr/>
-        </p:nvSpPr>
-        <p:spPr>
-          <a:xfrm>
-            <a:off x="11268151" y="740664"/>
-            <a:ext cx="237744" cy="237744"/>
-          </a:xfrm>
-          <a:prstGeom prst="ellipse">
-            <a:avLst/>
-          </a:prstGeom>
-          <a:solidFill>
-            <a:srgbClr val="FFFFFF">
-              <a:alpha val="0"/>
-            </a:srgbClr>
-          </a:solidFill>
-          <a:ln w="25400">
-            <a:solidFill>
-              <a:srgbClr val="5CB9A3"/>
-            </a:solidFill>
-            <a:prstDash val="solid"/>
-          </a:ln>
-        </p:spPr>
-      </p:sp>
-      <p:sp>
-        <p:nvSpPr>
-          <p:cNvPr id="3" name="Shape 1"/>
-          <p:cNvSpPr/>
-          <p:nvPr/>
-        </p:nvSpPr>
-        <p:spPr>
-          <a:xfrm>
-            <a:off x="11339474" y="811987"/>
-            <a:ext cx="95098" cy="95098"/>
-          </a:xfrm>
-          <a:prstGeom prst="ellipse">
-            <a:avLst/>
-          </a:prstGeom>
-          <a:solidFill>
-            <a:srgbClr val="5CB9A3"/>
-          </a:solidFill>
-          <a:ln w="12700">
-            <a:solidFill>
-              <a:srgbClr val="333333"/>
-            </a:solidFill>
-            <a:prstDash val="solid"/>
-          </a:ln>
-        </p:spPr>
-      </p:sp>
-      <p:sp>
-        <p:nvSpPr>
-          <p:cNvPr id="4" name="Text 2"/>
-          <p:cNvSpPr/>
-          <p:nvPr/>
-        </p:nvSpPr>
-        <p:spPr>
-          <a:xfrm>
-            <a:off x="685800" y="685800"/>
-            <a:ext cx="10271455" cy="256032"/>
-          </a:xfrm>
-          <a:prstGeom prst="rect">
-            <a:avLst/>
-          </a:prstGeom>
-          <a:noFill/>
-          <a:ln/>
-        </p:spPr>
-        <p:txBody>
-          <a:bodyPr wrap="square" lIns="0" tIns="0" rIns="0" bIns="0" rtlCol="0" anchor="ctr"/>
-          <a:lstStyle/>
-          <a:p>
-            <a:pPr indent="0" marL="0">
-              <a:buNone/>
-            </a:pPr>
-            <a:r>
-              <a:rPr lang="en-US" sz="1200" b="1" spc="120" kern="0" dirty="0">
-                <a:solidFill>
-                  <a:srgbClr val="0D8271"/>
-                </a:solidFill>
-                <a:latin typeface="Calibri" pitchFamily="34" charset="0"/>
-                <a:ea typeface="Calibri" pitchFamily="34" charset="-122"/>
-                <a:cs typeface="Calibri" pitchFamily="34" charset="-120"/>
-              </a:rPr>
-              <a:t>Penjaga out-of-distribution</a:t>
-            </a:r>
-            <a:endParaRPr lang="en-US" sz="1200" dirty="0"/>
-          </a:p>
-        </p:txBody>
-      </p:sp>
-      <p:sp>
-        <p:nvSpPr>
-          <p:cNvPr id="5" name="Text 3"/>
-          <p:cNvSpPr/>
-          <p:nvPr/>
-        </p:nvSpPr>
-        <p:spPr>
-          <a:xfrm>
-            <a:off x="685800" y="996696"/>
-            <a:ext cx="10271455" cy="822960"/>
-          </a:xfrm>
-          <a:prstGeom prst="rect">
-            <a:avLst/>
-          </a:prstGeom>
-          <a:noFill/>
-          <a:ln/>
-        </p:spPr>
-        <p:txBody>
-          <a:bodyPr wrap="square" lIns="0" tIns="0" rIns="0" bIns="0" rtlCol="0" anchor="ctr"/>
-          <a:lstStyle/>
-          <a:p>
-            <a:pPr indent="0" marL="0">
-              <a:lnSpc>
-                <a:spcPts val="3600"/>
-              </a:lnSpc>
-              <a:buNone/>
-            </a:pPr>
-            <a:r>
-              <a:rPr lang="en-US" sz="3200" b="1" dirty="0">
-                <a:solidFill>
-                  <a:srgbClr val="0B1E1B"/>
-                </a:solidFill>
-                <a:latin typeface="Cambria" pitchFamily="34" charset="0"/>
-                <a:ea typeface="Cambria" pitchFamily="34" charset="-122"/>
-                <a:cs typeface="Cambria" pitchFamily="34" charset="-120"/>
-              </a:rPr>
-              <a:t>Modelnya jalan. Penjaganya menolak — dan kami buktikan ia tidak menolak semuanya.</a:t>
-            </a:r>
-            <a:endParaRPr lang="en-US" sz="3200" dirty="0"/>
-          </a:p>
-        </p:txBody>
-      </p:sp>
-      <p:sp>
-        <p:nvSpPr>
-          <p:cNvPr id="6" name="Shape 4"/>
-          <p:cNvSpPr/>
-          <p:nvPr/>
-        </p:nvSpPr>
-        <p:spPr>
-          <a:xfrm>
-            <a:off x="685800" y="2194560"/>
-            <a:ext cx="5760720" cy="2286000"/>
-          </a:xfrm>
-          <a:prstGeom prst="roundRect">
-            <a:avLst>
-              <a:gd name="adj" fmla="val 2400"/>
-            </a:avLst>
-          </a:prstGeom>
-          <a:solidFill>
-            <a:srgbClr val="0B1E1B"/>
-          </a:solidFill>
-          <a:ln w="12700">
-            <a:solidFill>
-              <a:srgbClr val="0B1E1B"/>
-            </a:solidFill>
-            <a:prstDash val="solid"/>
-          </a:ln>
-        </p:spPr>
-      </p:sp>
-      <p:sp>
-        <p:nvSpPr>
-          <p:cNvPr id="7" name="Text 5"/>
-          <p:cNvSpPr/>
-          <p:nvPr/>
-        </p:nvSpPr>
-        <p:spPr>
-          <a:xfrm>
-            <a:off x="1051560" y="2487168"/>
-            <a:ext cx="5029200" cy="274320"/>
-          </a:xfrm>
-          <a:prstGeom prst="rect">
-            <a:avLst/>
-          </a:prstGeom>
-          <a:noFill/>
-          <a:ln/>
-        </p:spPr>
-        <p:txBody>
-          <a:bodyPr wrap="square" lIns="0" tIns="0" rIns="0" bIns="0" rtlCol="0" anchor="ctr"/>
-          <a:lstStyle/>
-          <a:p>
-            <a:pPr indent="0" marL="0">
-              <a:buNone/>
-            </a:pPr>
-            <a:r>
-              <a:rPr lang="en-US" sz="1150" b="1" spc="120" kern="0" dirty="0">
-                <a:solidFill>
-                  <a:srgbClr val="8CAEA5"/>
-                </a:solidFill>
-                <a:latin typeface="Calibri" pitchFamily="34" charset="0"/>
-                <a:ea typeface="Calibri" pitchFamily="34" charset="-122"/>
-                <a:cs typeface="Calibri" pitchFamily="34" charset="-120"/>
-              </a:rPr>
-              <a:t>PUTUSAN PENJAGA</a:t>
-            </a:r>
-            <a:endParaRPr lang="en-US" sz="1150" dirty="0"/>
-          </a:p>
-        </p:txBody>
-      </p:sp>
-      <p:sp>
-        <p:nvSpPr>
-          <p:cNvPr id="8" name="Text 6"/>
-          <p:cNvSpPr/>
-          <p:nvPr/>
-        </p:nvSpPr>
-        <p:spPr>
-          <a:xfrm>
-            <a:off x="1051560" y="2788920"/>
-            <a:ext cx="2743200" cy="548640"/>
-          </a:xfrm>
-          <a:prstGeom prst="rect">
-            <a:avLst/>
-          </a:prstGeom>
-          <a:noFill/>
-          <a:ln/>
-        </p:spPr>
-        <p:txBody>
-          <a:bodyPr wrap="square" lIns="0" tIns="0" rIns="0" bIns="0" rtlCol="0" anchor="ctr"/>
-          <a:lstStyle/>
-          <a:p>
-            <a:pPr indent="0" marL="0">
-              <a:buNone/>
-            </a:pPr>
-            <a:r>
-              <a:rPr lang="en-US" sz="3400" b="1" dirty="0">
-                <a:solidFill>
-                  <a:srgbClr val="F0A189"/>
-                </a:solidFill>
-                <a:latin typeface="Cambria" pitchFamily="34" charset="0"/>
-                <a:ea typeface="Cambria" pitchFamily="34" charset="-122"/>
-                <a:cs typeface="Cambria" pitchFamily="34" charset="-120"/>
-              </a:rPr>
-              <a:t>Ditolak</a:t>
-            </a:r>
-            <a:endParaRPr lang="en-US" sz="3400" dirty="0"/>
-          </a:p>
-        </p:txBody>
-      </p:sp>
-      <p:sp>
-        <p:nvSpPr>
-          <p:cNvPr id="9" name="Text 7"/>
-          <p:cNvSpPr/>
-          <p:nvPr/>
-        </p:nvSpPr>
-        <p:spPr>
-          <a:xfrm>
-            <a:off x="1051560" y="3383280"/>
-            <a:ext cx="5029200" cy="274320"/>
-          </a:xfrm>
-          <a:prstGeom prst="rect">
-            <a:avLst/>
-          </a:prstGeom>
-          <a:noFill/>
-          <a:ln/>
-        </p:spPr>
-        <p:txBody>
-          <a:bodyPr wrap="square" lIns="0" tIns="0" rIns="0" bIns="0" rtlCol="0" anchor="ctr"/>
-          <a:lstStyle/>
-          <a:p>
-            <a:pPr indent="0" marL="0">
-              <a:buNone/>
-            </a:pPr>
-            <a:r>
-              <a:rPr lang="en-US" sz="1300" dirty="0">
-                <a:solidFill>
-                  <a:srgbClr val="B7D2CA"/>
-                </a:solidFill>
-                <a:latin typeface="Calibri" pitchFamily="34" charset="0"/>
-                <a:ea typeface="Calibri" pitchFamily="34" charset="-122"/>
-                <a:cs typeface="Calibri" pitchFamily="34" charset="-120"/>
-              </a:rPr>
-              <a:t>3 fitur ditandai  ·  cakupan 100%</a:t>
-            </a:r>
-            <a:endParaRPr lang="en-US" sz="1300" dirty="0"/>
-          </a:p>
-        </p:txBody>
-      </p:sp>
-      <p:sp>
-        <p:nvSpPr>
-          <p:cNvPr id="10" name="Text 8"/>
-          <p:cNvSpPr/>
-          <p:nvPr/>
-        </p:nvSpPr>
-        <p:spPr>
-          <a:xfrm>
-            <a:off x="1051560" y="3767328"/>
-            <a:ext cx="5029200" cy="457200"/>
-          </a:xfrm>
-          <a:prstGeom prst="rect">
-            <a:avLst/>
-          </a:prstGeom>
-          <a:noFill/>
-          <a:ln/>
-        </p:spPr>
-        <p:txBody>
-          <a:bodyPr wrap="square" lIns="0" tIns="0" rIns="0" bIns="0" rtlCol="0" anchor="ctr"/>
-          <a:lstStyle/>
-          <a:p>
-            <a:pPr indent="0" marL="0">
-              <a:lnSpc>
-                <a:spcPts val="1700"/>
-              </a:lnSpc>
-              <a:buNone/>
-            </a:pPr>
-            <a:r>
-              <a:rPr lang="en-US" sz="1250" dirty="0">
-                <a:solidFill>
-                  <a:srgbClr val="5CB9A3"/>
-                </a:solidFill>
-                <a:latin typeface="Calibri" pitchFamily="34" charset="0"/>
-                <a:ea typeface="Calibri" pitchFamily="34" charset="-122"/>
-                <a:cs typeface="Calibri" pitchFamily="34" charset="-120"/>
-              </a:rPr>
-              <a:t>Jarak terjauh 9,1 z  ·  Mahalanobis 87,9  ·  keluaran model ditahan</a:t>
-            </a:r>
-            <a:endParaRPr lang="en-US" sz="1250" dirty="0"/>
-          </a:p>
-        </p:txBody>
-      </p:sp>
-      <p:sp>
-        <p:nvSpPr>
-          <p:cNvPr id="11" name="Text 9"/>
-          <p:cNvSpPr/>
-          <p:nvPr/>
-        </p:nvSpPr>
-        <p:spPr>
-          <a:xfrm>
-            <a:off x="6995160" y="2286000"/>
-            <a:ext cx="4480560" cy="822960"/>
-          </a:xfrm>
-          <a:prstGeom prst="rect">
-            <a:avLst/>
-          </a:prstGeom>
-          <a:noFill/>
-          <a:ln/>
-        </p:spPr>
-        <p:txBody>
-          <a:bodyPr wrap="square" lIns="0" tIns="0" rIns="0" bIns="0" rtlCol="0" anchor="ctr"/>
-          <a:lstStyle/>
-          <a:p>
-            <a:pPr indent="0" marL="0">
-              <a:lnSpc>
-                <a:spcPts val="2400"/>
-              </a:lnSpc>
-              <a:buNone/>
-            </a:pPr>
-            <a:r>
-              <a:rPr lang="en-US" sz="1800" b="1" dirty="0">
-                <a:solidFill>
-                  <a:srgbClr val="0B1E1B"/>
-                </a:solidFill>
-                <a:latin typeface="Cambria" pitchFamily="34" charset="0"/>
-                <a:ea typeface="Cambria" pitchFamily="34" charset="-122"/>
-                <a:cs typeface="Cambria" pitchFamily="34" charset="-120"/>
-              </a:rPr>
-              <a:t>Penjaga yang selalu menolak sama saja dengan false yang dipasang tetap. Jadi kami jalankan dua arah.</a:t>
-            </a:r>
-            <a:endParaRPr lang="en-US" sz="1800" dirty="0"/>
-          </a:p>
-        </p:txBody>
-      </p:sp>
-      <p:sp>
-        <p:nvSpPr>
-          <p:cNvPr id="12" name="Text 10"/>
-          <p:cNvSpPr/>
-          <p:nvPr/>
-        </p:nvSpPr>
-        <p:spPr>
-          <a:xfrm>
-            <a:off x="6995160" y="3200400"/>
-            <a:ext cx="2743200" cy="274320"/>
-          </a:xfrm>
-          <a:prstGeom prst="rect">
-            <a:avLst/>
-          </a:prstGeom>
-          <a:noFill/>
-          <a:ln/>
-        </p:spPr>
-        <p:txBody>
-          <a:bodyPr wrap="square" lIns="0" tIns="0" rIns="0" bIns="0" rtlCol="0" anchor="ctr"/>
-          <a:lstStyle/>
-          <a:p>
-            <a:pPr indent="0" marL="0">
-              <a:buNone/>
-            </a:pPr>
-            <a:r>
-              <a:rPr lang="en-US" sz="1200" dirty="0">
-                <a:solidFill>
-                  <a:srgbClr val="4A635D"/>
-                </a:solidFill>
-                <a:latin typeface="Calibri" pitchFamily="34" charset="0"/>
-                <a:ea typeface="Calibri" pitchFamily="34" charset="-122"/>
-                <a:cs typeface="Calibri" pitchFamily="34" charset="-120"/>
-              </a:rPr>
-              <a:t>Domain sumber (Carette)</a:t>
-            </a:r>
-            <a:endParaRPr lang="en-US" sz="1200" dirty="0"/>
-          </a:p>
-        </p:txBody>
-      </p:sp>
-      <p:sp>
-        <p:nvSpPr>
-          <p:cNvPr id="13" name="Text 11"/>
-          <p:cNvSpPr/>
-          <p:nvPr/>
-        </p:nvSpPr>
-        <p:spPr>
-          <a:xfrm>
-            <a:off x="9738360" y="3145536"/>
-            <a:ext cx="1737360" cy="329184"/>
-          </a:xfrm>
-          <a:prstGeom prst="rect">
-            <a:avLst/>
-          </a:prstGeom>
-          <a:noFill/>
-          <a:ln/>
-        </p:spPr>
-        <p:txBody>
-          <a:bodyPr wrap="square" lIns="0" tIns="0" rIns="0" bIns="0" rtlCol="0" anchor="ctr"/>
-          <a:lstStyle/>
-          <a:p>
-            <a:pPr algn="r" indent="0" marL="0">
-              <a:buNone/>
-            </a:pPr>
-            <a:r>
-              <a:rPr lang="en-US" sz="1450" b="1" dirty="0">
-                <a:solidFill>
-                  <a:srgbClr val="0D8271"/>
-                </a:solidFill>
-                <a:latin typeface="Calibri" pitchFamily="34" charset="0"/>
-                <a:ea typeface="Calibri" pitchFamily="34" charset="-122"/>
-                <a:cs typeface="Calibri" pitchFamily="34" charset="-120"/>
-              </a:rPr>
-              <a:t>544 / 547 diterima</a:t>
-            </a:r>
-            <a:endParaRPr lang="en-US" sz="1450" dirty="0"/>
-          </a:p>
-        </p:txBody>
-      </p:sp>
-      <p:sp>
-        <p:nvSpPr>
-          <p:cNvPr id="14" name="Text 12"/>
-          <p:cNvSpPr/>
-          <p:nvPr/>
-        </p:nvSpPr>
-        <p:spPr>
-          <a:xfrm>
-            <a:off x="6995160" y="3767328"/>
-            <a:ext cx="2743200" cy="274320"/>
-          </a:xfrm>
-          <a:prstGeom prst="rect">
-            <a:avLst/>
-          </a:prstGeom>
-          <a:noFill/>
-          <a:ln/>
-        </p:spPr>
-        <p:txBody>
-          <a:bodyPr wrap="square" lIns="0" tIns="0" rIns="0" bIns="0" rtlCol="0" anchor="ctr"/>
-          <a:lstStyle/>
-          <a:p>
-            <a:pPr indent="0" marL="0">
-              <a:buNone/>
-            </a:pPr>
-            <a:r>
-              <a:rPr lang="en-US" sz="1200" dirty="0">
-                <a:solidFill>
-                  <a:srgbClr val="4A635D"/>
-                </a:solidFill>
-                <a:latin typeface="Calibri" pitchFamily="34" charset="0"/>
-                <a:ea typeface="Calibri" pitchFamily="34" charset="-122"/>
-                <a:cs typeface="Calibri" pitchFamily="34" charset="-120"/>
-              </a:rPr>
-              <a:t>Stimulus yang dikirim</a:t>
-            </a:r>
-            <a:endParaRPr lang="en-US" sz="1200" dirty="0"/>
-          </a:p>
-        </p:txBody>
-      </p:sp>
-      <p:sp>
-        <p:nvSpPr>
-          <p:cNvPr id="15" name="Text 13"/>
-          <p:cNvSpPr/>
-          <p:nvPr/>
-        </p:nvSpPr>
-        <p:spPr>
-          <a:xfrm>
-            <a:off x="9738360" y="3712464"/>
-            <a:ext cx="1737360" cy="329184"/>
-          </a:xfrm>
-          <a:prstGeom prst="rect">
-            <a:avLst/>
-          </a:prstGeom>
-          <a:noFill/>
-          <a:ln/>
-        </p:spPr>
-        <p:txBody>
-          <a:bodyPr wrap="square" lIns="0" tIns="0" rIns="0" bIns="0" rtlCol="0" anchor="ctr"/>
-          <a:lstStyle/>
-          <a:p>
-            <a:pPr algn="r" indent="0" marL="0">
-              <a:buNone/>
-            </a:pPr>
-            <a:r>
-              <a:rPr lang="en-US" sz="1450" b="1" dirty="0">
-                <a:solidFill>
-                  <a:srgbClr val="B1442C"/>
-                </a:solidFill>
-                <a:latin typeface="Calibri" pitchFamily="34" charset="0"/>
-                <a:ea typeface="Calibri" pitchFamily="34" charset="-122"/>
-                <a:cs typeface="Calibri" pitchFamily="34" charset="-120"/>
-              </a:rPr>
-              <a:t>1 / 23 diterima</a:t>
-            </a:r>
-            <a:endParaRPr lang="en-US" sz="1450" dirty="0"/>
-          </a:p>
-        </p:txBody>
-      </p:sp>
-      <p:sp>
-        <p:nvSpPr>
-          <p:cNvPr id="16" name="Text 14"/>
-          <p:cNvSpPr/>
-          <p:nvPr/>
-        </p:nvSpPr>
-        <p:spPr>
-          <a:xfrm>
-            <a:off x="6995160" y="4334256"/>
-            <a:ext cx="2743200" cy="274320"/>
-          </a:xfrm>
-          <a:prstGeom prst="rect">
-            <a:avLst/>
-          </a:prstGeom>
-          <a:noFill/>
-          <a:ln/>
-        </p:spPr>
-        <p:txBody>
-          <a:bodyPr wrap="square" lIns="0" tIns="0" rIns="0" bIns="0" rtlCol="0" anchor="ctr"/>
-          <a:lstStyle/>
-          <a:p>
-            <a:pPr indent="0" marL="0">
-              <a:buNone/>
-            </a:pPr>
-            <a:r>
-              <a:rPr lang="en-US" sz="1200" dirty="0">
-                <a:solidFill>
-                  <a:srgbClr val="4A635D"/>
-                </a:solidFill>
-                <a:latin typeface="Calibri" pitchFamily="34" charset="0"/>
-                <a:ea typeface="Calibri" pitchFamily="34" charset="-122"/>
-                <a:cs typeface="Calibri" pitchFamily="34" charset="-120"/>
-              </a:rPr>
-              <a:t>Keputusan direproduksi Python</a:t>
-            </a:r>
-            <a:endParaRPr lang="en-US" sz="1200" dirty="0"/>
-          </a:p>
-        </p:txBody>
-      </p:sp>
-      <p:sp>
-        <p:nvSpPr>
-          <p:cNvPr id="17" name="Text 15"/>
-          <p:cNvSpPr/>
-          <p:nvPr/>
-        </p:nvSpPr>
-        <p:spPr>
-          <a:xfrm>
-            <a:off x="9738360" y="4279392"/>
-            <a:ext cx="1737360" cy="329184"/>
-          </a:xfrm>
-          <a:prstGeom prst="rect">
-            <a:avLst/>
-          </a:prstGeom>
-          <a:noFill/>
-          <a:ln/>
-        </p:spPr>
-        <p:txBody>
-          <a:bodyPr wrap="square" lIns="0" tIns="0" rIns="0" bIns="0" rtlCol="0" anchor="ctr"/>
-          <a:lstStyle/>
-          <a:p>
-            <a:pPr algn="r" indent="0" marL="0">
-              <a:buNone/>
-            </a:pPr>
-            <a:r>
-              <a:rPr lang="en-US" sz="1450" b="1" dirty="0">
-                <a:solidFill>
-                  <a:srgbClr val="14302B"/>
-                </a:solidFill>
-                <a:latin typeface="Calibri" pitchFamily="34" charset="0"/>
-                <a:ea typeface="Calibri" pitchFamily="34" charset="-122"/>
-                <a:cs typeface="Calibri" pitchFamily="34" charset="-120"/>
-              </a:rPr>
-              <a:t>23 / 23</a:t>
-            </a:r>
-            <a:endParaRPr lang="en-US" sz="1450" dirty="0"/>
-          </a:p>
-        </p:txBody>
-      </p:sp>
-      <p:sp>
-        <p:nvSpPr>
-          <p:cNvPr id="18" name="Text 16"/>
-          <p:cNvSpPr/>
-          <p:nvPr/>
-        </p:nvSpPr>
-        <p:spPr>
-          <a:xfrm>
-            <a:off x="685800" y="4846320"/>
-            <a:ext cx="10424160" cy="548640"/>
-          </a:xfrm>
-          <a:prstGeom prst="rect">
-            <a:avLst/>
-          </a:prstGeom>
-          <a:noFill/>
-          <a:ln/>
-        </p:spPr>
-        <p:txBody>
-          <a:bodyPr wrap="square" lIns="0" tIns="0" rIns="0" bIns="0" rtlCol="0" anchor="ctr"/>
-          <a:lstStyle/>
-          <a:p>
-            <a:pPr indent="0" marL="0">
-              <a:lnSpc>
-                <a:spcPts val="1800"/>
-              </a:lnSpc>
-              <a:buNone/>
-            </a:pPr>
-            <a:r>
-              <a:rPr lang="en-US" sz="1300" dirty="0">
-                <a:solidFill>
-                  <a:srgbClr val="14302B"/>
-                </a:solidFill>
-                <a:latin typeface="Calibri" pitchFamily="34" charset="0"/>
-                <a:ea typeface="Calibri" pitchFamily="34" charset="-122"/>
-                <a:cs typeface="Calibri" pitchFamily="34" charset="-120"/>
-              </a:rPr>
-              <a:t>Ia menerima hampir semua yang berasal dari kohort yang membangunnya, dan menolak setiap sesi pada stimulus sekarang — sambil menyebut fiturnya: ink_frac di 22 dari 23 sesi.</a:t>
-            </a:r>
-            <a:endParaRPr lang="en-US" sz="1300" dirty="0"/>
-          </a:p>
-        </p:txBody>
-      </p:sp>
-      <p:sp>
-        <p:nvSpPr>
-          <p:cNvPr id="19" name="Text 17"/>
-          <p:cNvSpPr/>
-          <p:nvPr/>
-        </p:nvSpPr>
-        <p:spPr>
-          <a:xfrm>
-            <a:off x="685800" y="5440680"/>
-            <a:ext cx="10424160" cy="457200"/>
-          </a:xfrm>
-          <a:prstGeom prst="rect">
-            <a:avLst/>
-          </a:prstGeom>
-          <a:noFill/>
-          <a:ln/>
-        </p:spPr>
-        <p:txBody>
-          <a:bodyPr wrap="square" lIns="0" tIns="0" rIns="0" bIns="0" rtlCol="0" anchor="ctr"/>
-          <a:lstStyle/>
-          <a:p>
-            <a:pPr indent="0" marL="0">
-              <a:lnSpc>
-                <a:spcPts val="2100"/>
-              </a:lnSpc>
-              <a:buNone/>
-            </a:pPr>
-            <a:r>
-              <a:rPr lang="en-US" sz="1500" i="1" dirty="0">
-                <a:solidFill>
-                  <a:srgbClr val="0D8271"/>
-                </a:solidFill>
-                <a:latin typeface="Cambria" pitchFamily="34" charset="0"/>
-                <a:ea typeface="Cambria" pitchFamily="34" charset="-122"/>
-                <a:cs typeface="Cambria" pitchFamily="34" charset="-120"/>
-              </a:rPr>
-              <a:t>Keputusan itu dibuat TypeScript di peramban saat sesi berjalan. Python menghitungnya ulang dari log dan mendapat verdict yang sama, 23 dari 23.</a:t>
-            </a:r>
-            <a:endParaRPr lang="en-US" sz="1500" dirty="0"/>
-          </a:p>
-        </p:txBody>
-      </p:sp>
-      <p:sp>
-        <p:nvSpPr>
-          <p:cNvPr id="20" name="Text 18"/>
-          <p:cNvSpPr/>
-          <p:nvPr/>
-        </p:nvSpPr>
-        <p:spPr>
-          <a:xfrm>
-            <a:off x="685800" y="5943600"/>
-            <a:ext cx="10424160" cy="274320"/>
-          </a:xfrm>
-          <a:prstGeom prst="rect">
-            <a:avLst/>
-          </a:prstGeom>
-          <a:noFill/>
-          <a:ln/>
-        </p:spPr>
-        <p:txBody>
-          <a:bodyPr wrap="square" lIns="0" tIns="0" rIns="0" bIns="0" rtlCol="0" anchor="ctr"/>
-          <a:lstStyle/>
-          <a:p>
-            <a:pPr indent="0" marL="0">
-              <a:buNone/>
-            </a:pPr>
-            <a:r>
-              <a:rPr lang="en-US" sz="1000" dirty="0">
-                <a:solidFill>
-                  <a:srgbClr val="4A635D"/>
-                </a:solidFill>
-                <a:latin typeface="Calibri" pitchFamily="34" charset="0"/>
-                <a:ea typeface="Calibri" pitchFamily="34" charset="-122"/>
-                <a:cs typeface="Calibri" pitchFamily="34" charset="-120"/>
-              </a:rPr>
-              <a:t>Sumber: research/hasil/ood_dua_arah.json · kalibrasi referensi persentil 99,5 sehingga tingkat penerimaan domain sumber adalah pemeriksaan kewarasan, bukan uji generalisasi</a:t>
-            </a:r>
-            <a:endParaRPr lang="en-US" sz="1000" dirty="0"/>
           </a:p>
         </p:txBody>
       </p:sp>
